--- a/信吾/銀行研究/添付ファイル/信託銀行キャリア形成モデル.pptx
+++ b/信吾/銀行研究/添付ファイル/信託銀行キャリア形成モデル.pptx
@@ -1480,7 +1480,7 @@
     <p:bg>
       <p:bgPr>
         <a:solidFill>
-          <a:srgbClr val="1E2761"/>
+          <a:srgbClr val="FFFFFF"/>
         </a:solidFill>
       </p:bgPr>
     </p:bg>
@@ -1500,16 +1500,14 @@
       </p:grpSpPr>
       <p:pic>
         <p:nvPicPr>
-          <p:cNvPr id="2" name="Image 0" descr="icon_chart.png">    </p:cNvPr>
+          <p:cNvPr id="2" name="Image 0" descr="icon_chart_gray.png">    </p:cNvPr>
           <p:cNvPicPr>
             <a:picLocks noChangeAspect="1"/>
           </p:cNvPicPr>
           <p:nvPr/>
         </p:nvPicPr>
         <p:blipFill>
-          <a:blip r:embed="rId1">
-            <a:alphaModFix amt="12000"/>
-          </a:blip>
+          <a:blip r:embed="rId1"/>
           <a:stretch>
             <a:fillRect/>
           </a:stretch>
@@ -1554,11 +1552,11 @@
             <a:r>
               <a:rPr lang="en-US" sz="4000" b="1" dirty="0">
                 <a:solidFill>
-                  <a:srgbClr val="FFFFFF"/>
-                </a:solidFill>
-                <a:latin typeface="Cambria" pitchFamily="34" charset="0"/>
-                <a:ea typeface="Cambria" pitchFamily="34" charset="-122"/>
-                <a:cs typeface="Cambria" pitchFamily="34" charset="-120"/>
+                  <a:srgbClr val="000000"/>
+                </a:solidFill>
+                <a:latin typeface="Meiryo UI" pitchFamily="34" charset="0"/>
+                <a:ea typeface="Meiryo UI" pitchFamily="34" charset="-122"/>
+                <a:cs typeface="Meiryo UI" pitchFamily="34" charset="-120"/>
               </a:rPr>
               <a:t>信託銀行における</a:t>
             </a:r>
@@ -1574,11 +1572,11 @@
             <a:r>
               <a:rPr lang="en-US" sz="4000" b="1" dirty="0">
                 <a:solidFill>
-                  <a:srgbClr val="FFFFFF"/>
-                </a:solidFill>
-                <a:latin typeface="Cambria" pitchFamily="34" charset="0"/>
-                <a:ea typeface="Cambria" pitchFamily="34" charset="-122"/>
-                <a:cs typeface="Cambria" pitchFamily="34" charset="-120"/>
+                  <a:srgbClr val="000000"/>
+                </a:solidFill>
+                <a:latin typeface="Meiryo UI" pitchFamily="34" charset="0"/>
+                <a:ea typeface="Meiryo UI" pitchFamily="34" charset="-122"/>
+                <a:cs typeface="Meiryo UI" pitchFamily="34" charset="-120"/>
               </a:rPr>
               <a:t>キャリア形成モデル</a:t>
             </a:r>
@@ -1613,11 +1611,11 @@
             <a:r>
               <a:rPr lang="en-US" sz="1800" dirty="0">
                 <a:solidFill>
-                  <a:srgbClr val="CADCFC"/>
-                </a:solidFill>
-                <a:latin typeface="Calibri" pitchFamily="34" charset="0"/>
-                <a:ea typeface="Calibri" pitchFamily="34" charset="-122"/>
-                <a:cs typeface="Calibri" pitchFamily="34" charset="-120"/>
+                  <a:srgbClr val="000000"/>
+                </a:solidFill>
+                <a:latin typeface="Meiryo UI" pitchFamily="34" charset="0"/>
+                <a:ea typeface="Meiryo UI" pitchFamily="34" charset="-122"/>
+                <a:cs typeface="Meiryo UI" pitchFamily="34" charset="-120"/>
               </a:rPr>
               <a:t>財務分析力と企業法の知識を掛け合わせて伸ばす、信吾さんの成長ロードマップ</a:t>
             </a:r>
@@ -1650,17 +1648,17 @@
               <a:buNone/>
             </a:pPr>
             <a:r>
-              <a:rPr lang="en-US" sz="1100" dirty="0">
-                <a:solidFill>
-                  <a:srgbClr val="8896C4"/>
-                </a:solidFill>
-                <a:latin typeface="Calibri" pitchFamily="34" charset="0"/>
-                <a:ea typeface="Calibri" pitchFamily="34" charset="-122"/>
-                <a:cs typeface="Calibri" pitchFamily="34" charset="-120"/>
+              <a:rPr lang="en-US" sz="1400" dirty="0">
+                <a:solidFill>
+                  <a:srgbClr val="000000"/>
+                </a:solidFill>
+                <a:latin typeface="Meiryo UI" pitchFamily="34" charset="0"/>
+                <a:ea typeface="Meiryo UI" pitchFamily="34" charset="-122"/>
+                <a:cs typeface="Meiryo UI" pitchFamily="34" charset="-120"/>
               </a:rPr>
               <a:t>2026年8月時点の想定モデル案</a:t>
             </a:r>
-            <a:endParaRPr lang="en-US" sz="1100" dirty="0"/>
+            <a:endParaRPr lang="en-US" sz="1400" dirty="0"/>
           </a:p>
         </p:txBody>
       </p:sp>
@@ -1723,11 +1721,11 @@
             <a:r>
               <a:rPr lang="en-US" sz="3000" b="1" dirty="0">
                 <a:solidFill>
-                  <a:srgbClr val="1E2761"/>
-                </a:solidFill>
-                <a:latin typeface="Cambria" pitchFamily="34" charset="0"/>
-                <a:ea typeface="Cambria" pitchFamily="34" charset="-122"/>
-                <a:cs typeface="Cambria" pitchFamily="34" charset="-120"/>
+                  <a:srgbClr val="000000"/>
+                </a:solidFill>
+                <a:latin typeface="Meiryo UI" pitchFamily="34" charset="0"/>
+                <a:ea typeface="Meiryo UI" pitchFamily="34" charset="-122"/>
+                <a:cs typeface="Meiryo UI" pitchFamily="34" charset="-120"/>
               </a:rPr>
               <a:t>信吾さんの強み — 3つの柱</a:t>
             </a:r>
@@ -1762,11 +1760,11 @@
             <a:r>
               <a:rPr lang="en-US" sz="1400" dirty="0">
                 <a:solidFill>
-                  <a:srgbClr val="6B7280"/>
-                </a:solidFill>
-                <a:latin typeface="Calibri" pitchFamily="34" charset="0"/>
-                <a:ea typeface="Calibri" pitchFamily="34" charset="-122"/>
-                <a:cs typeface="Calibri" pitchFamily="34" charset="-120"/>
+                  <a:srgbClr val="000000"/>
+                </a:solidFill>
+                <a:latin typeface="Meiryo UI" pitchFamily="34" charset="0"/>
+                <a:ea typeface="Meiryo UI" pitchFamily="34" charset="-122"/>
+                <a:cs typeface="Meiryo UI" pitchFamily="34" charset="-120"/>
               </a:rPr>
               <a:t>このモデルは、次の3つの強みをどの順番で・どの部署で鍛えるかを軸に設計しています。</a:t>
             </a:r>
@@ -1783,17 +1781,22 @@
         <p:spPr>
           <a:xfrm>
             <a:off x="640080" y="1965960"/>
-            <a:ext cx="3520440" cy="3246120"/>
+            <a:ext cx="3520440" cy="3429000"/>
           </a:xfrm>
           <a:prstGeom prst="roundRect">
             <a:avLst>
-              <a:gd name="adj" fmla="val 3380"/>
+              <a:gd name="adj" fmla="val 2667"/>
             </a:avLst>
           </a:prstGeom>
           <a:solidFill>
-            <a:srgbClr val="F4F6FB"/>
+            <a:srgbClr val="FFFFFF"/>
           </a:solidFill>
-          <a:ln/>
+          <a:ln w="12700">
+            <a:solidFill>
+              <a:srgbClr val="D0D5DD"/>
+            </a:solidFill>
+            <a:prstDash val="solid"/>
+          </a:ln>
         </p:spPr>
       </p:sp>
       <p:sp>
@@ -1867,11 +1870,11 @@
             <a:r>
               <a:rPr lang="en-US" sz="1700" b="1" dirty="0">
                 <a:solidFill>
-                  <a:srgbClr val="1E2761"/>
-                </a:solidFill>
-                <a:latin typeface="Calibri" pitchFamily="34" charset="0"/>
-                <a:ea typeface="Calibri" pitchFamily="34" charset="-122"/>
-                <a:cs typeface="Calibri" pitchFamily="34" charset="-120"/>
+                  <a:srgbClr val="000000"/>
+                </a:solidFill>
+                <a:latin typeface="Meiryo UI" pitchFamily="34" charset="0"/>
+                <a:ea typeface="Meiryo UI" pitchFamily="34" charset="-122"/>
+                <a:cs typeface="Meiryo UI" pitchFamily="34" charset="-120"/>
               </a:rPr>
               <a:t>財務諸表分析力</a:t>
             </a:r>
@@ -1888,7 +1891,7 @@
         <p:spPr>
           <a:xfrm>
             <a:off x="914400" y="4069080"/>
-            <a:ext cx="2971800" cy="1051560"/>
+            <a:ext cx="2971800" cy="1234440"/>
           </a:xfrm>
           <a:prstGeom prst="rect">
             <a:avLst/>
@@ -1907,17 +1910,17 @@
               <a:buNone/>
             </a:pPr>
             <a:r>
-              <a:rPr lang="en-US" sz="1200" dirty="0">
-                <a:solidFill>
-                  <a:srgbClr val="333333"/>
-                </a:solidFill>
-                <a:latin typeface="Calibri" pitchFamily="34" charset="0"/>
-                <a:ea typeface="Calibri" pitchFamily="34" charset="-122"/>
-                <a:cs typeface="Calibri" pitchFamily="34" charset="-120"/>
+              <a:rPr lang="en-US" sz="1400" dirty="0">
+                <a:solidFill>
+                  <a:srgbClr val="000000"/>
+                </a:solidFill>
+                <a:latin typeface="Meiryo UI" pitchFamily="34" charset="0"/>
+                <a:ea typeface="Meiryo UI" pitchFamily="34" charset="-122"/>
+                <a:cs typeface="Meiryo UI" pitchFamily="34" charset="-120"/>
               </a:rPr>
               <a:t>簿記1級取得。りそな銀行インターンのグループワークで「財務諸表を読めるのは自分だけ」という強みを実証済み。</a:t>
             </a:r>
-            <a:endParaRPr lang="en-US" sz="1200" dirty="0"/>
+            <a:endParaRPr lang="en-US" sz="1400" dirty="0"/>
           </a:p>
         </p:txBody>
       </p:sp>
@@ -1930,17 +1933,22 @@
         <p:spPr>
           <a:xfrm>
             <a:off x="4480560" y="1965960"/>
-            <a:ext cx="3520440" cy="3246120"/>
+            <a:ext cx="3520440" cy="3429000"/>
           </a:xfrm>
           <a:prstGeom prst="roundRect">
             <a:avLst>
-              <a:gd name="adj" fmla="val 3380"/>
+              <a:gd name="adj" fmla="val 2667"/>
             </a:avLst>
           </a:prstGeom>
           <a:solidFill>
-            <a:srgbClr val="F4F6FB"/>
+            <a:srgbClr val="FFFFFF"/>
           </a:solidFill>
-          <a:ln/>
+          <a:ln w="12700">
+            <a:solidFill>
+              <a:srgbClr val="D0D5DD"/>
+            </a:solidFill>
+            <a:prstDash val="solid"/>
+          </a:ln>
         </p:spPr>
       </p:sp>
       <p:sp>
@@ -2014,11 +2022,11 @@
             <a:r>
               <a:rPr lang="en-US" sz="1700" b="1" dirty="0">
                 <a:solidFill>
-                  <a:srgbClr val="1E2761"/>
-                </a:solidFill>
-                <a:latin typeface="Calibri" pitchFamily="34" charset="0"/>
-                <a:ea typeface="Calibri" pitchFamily="34" charset="-122"/>
-                <a:cs typeface="Calibri" pitchFamily="34" charset="-120"/>
+                  <a:srgbClr val="000000"/>
+                </a:solidFill>
+                <a:latin typeface="Meiryo UI" pitchFamily="34" charset="0"/>
+                <a:ea typeface="Meiryo UI" pitchFamily="34" charset="-122"/>
+                <a:cs typeface="Meiryo UI" pitchFamily="34" charset="-120"/>
               </a:rPr>
               <a:t>企業法の知識</a:t>
             </a:r>
@@ -2035,7 +2043,7 @@
         <p:spPr>
           <a:xfrm>
             <a:off x="4754880" y="4069080"/>
-            <a:ext cx="2971800" cy="1051560"/>
+            <a:ext cx="2971800" cy="1234440"/>
           </a:xfrm>
           <a:prstGeom prst="rect">
             <a:avLst/>
@@ -2054,17 +2062,17 @@
               <a:buNone/>
             </a:pPr>
             <a:r>
-              <a:rPr lang="en-US" sz="1200" dirty="0">
-                <a:solidFill>
-                  <a:srgbClr val="333333"/>
-                </a:solidFill>
-                <a:latin typeface="Calibri" pitchFamily="34" charset="0"/>
-                <a:ea typeface="Calibri" pitchFamily="34" charset="-122"/>
-                <a:cs typeface="Calibri" pitchFamily="34" charset="-120"/>
+              <a:rPr lang="en-US" sz="1400" dirty="0">
+                <a:solidFill>
+                  <a:srgbClr val="000000"/>
+                </a:solidFill>
+                <a:latin typeface="Meiryo UI" pitchFamily="34" charset="0"/>
+                <a:ea typeface="Meiryo UI" pitchFamily="34" charset="-122"/>
+                <a:cs typeface="Meiryo UI" pitchFamily="34" charset="-120"/>
               </a:rPr>
               <a:t>中央大学法学部・企業法ゼミ所属。財務分析と法律知識の両輪が必要という発想から選択した専門領域。</a:t>
             </a:r>
-            <a:endParaRPr lang="en-US" sz="1200" dirty="0"/>
+            <a:endParaRPr lang="en-US" sz="1400" dirty="0"/>
           </a:p>
         </p:txBody>
       </p:sp>
@@ -2077,17 +2085,22 @@
         <p:spPr>
           <a:xfrm>
             <a:off x="8321040" y="1965960"/>
-            <a:ext cx="3520440" cy="3246120"/>
+            <a:ext cx="3520440" cy="3429000"/>
           </a:xfrm>
           <a:prstGeom prst="roundRect">
             <a:avLst>
-              <a:gd name="adj" fmla="val 3380"/>
+              <a:gd name="adj" fmla="val 2667"/>
             </a:avLst>
           </a:prstGeom>
           <a:solidFill>
-            <a:srgbClr val="F4F6FB"/>
+            <a:srgbClr val="FFFFFF"/>
           </a:solidFill>
-          <a:ln/>
+          <a:ln w="12700">
+            <a:solidFill>
+              <a:srgbClr val="D0D5DD"/>
+            </a:solidFill>
+            <a:prstDash val="solid"/>
+          </a:ln>
         </p:spPr>
       </p:sp>
       <p:sp>
@@ -2161,11 +2174,11 @@
             <a:r>
               <a:rPr lang="en-US" sz="1700" b="1" dirty="0">
                 <a:solidFill>
-                  <a:srgbClr val="1E2761"/>
-                </a:solidFill>
-                <a:latin typeface="Calibri" pitchFamily="34" charset="0"/>
-                <a:ea typeface="Calibri" pitchFamily="34" charset="-122"/>
-                <a:cs typeface="Calibri" pitchFamily="34" charset="-120"/>
+                  <a:srgbClr val="000000"/>
+                </a:solidFill>
+                <a:latin typeface="Meiryo UI" pitchFamily="34" charset="0"/>
+                <a:ea typeface="Meiryo UI" pitchFamily="34" charset="-122"/>
+                <a:cs typeface="Meiryo UI" pitchFamily="34" charset="-120"/>
               </a:rPr>
               <a:t>原因分析・改善力(PDCA)</a:t>
             </a:r>
@@ -2182,7 +2195,7 @@
         <p:spPr>
           <a:xfrm>
             <a:off x="8595360" y="4069080"/>
-            <a:ext cx="2971800" cy="1051560"/>
+            <a:ext cx="2971800" cy="1234440"/>
           </a:xfrm>
           <a:prstGeom prst="rect">
             <a:avLst/>
@@ -2201,17 +2214,17 @@
               <a:buNone/>
             </a:pPr>
             <a:r>
-              <a:rPr lang="en-US" sz="1200" dirty="0">
-                <a:solidFill>
-                  <a:srgbClr val="333333"/>
-                </a:solidFill>
-                <a:latin typeface="Calibri" pitchFamily="34" charset="0"/>
-                <a:ea typeface="Calibri" pitchFamily="34" charset="-122"/>
-                <a:cs typeface="Calibri" pitchFamily="34" charset="-120"/>
+              <a:rPr lang="en-US" sz="1400" dirty="0">
+                <a:solidFill>
+                  <a:srgbClr val="000000"/>
+                </a:solidFill>
+                <a:latin typeface="Meiryo UI" pitchFamily="34" charset="0"/>
+                <a:ea typeface="Meiryo UI" pitchFamily="34" charset="-122"/>
+                <a:cs typeface="Meiryo UI" pitchFamily="34" charset="-120"/>
               </a:rPr>
               <a:t>公認会計士試験の学習で正答率20%台から60%台後半まで改善。原因分析→仮説検証→実行のサイクルが持ち味。</a:t>
             </a:r>
-            <a:endParaRPr lang="en-US" sz="1200" dirty="0"/>
+            <a:endParaRPr lang="en-US" sz="1400" dirty="0"/>
           </a:p>
         </p:txBody>
       </p:sp>
@@ -2274,11 +2287,11 @@
             <a:r>
               <a:rPr lang="en-US" sz="3000" b="1" dirty="0">
                 <a:solidFill>
-                  <a:srgbClr val="1E2761"/>
-                </a:solidFill>
-                <a:latin typeface="Cambria" pitchFamily="34" charset="0"/>
-                <a:ea typeface="Cambria" pitchFamily="34" charset="-122"/>
-                <a:cs typeface="Cambria" pitchFamily="34" charset="-120"/>
+                  <a:srgbClr val="000000"/>
+                </a:solidFill>
+                <a:latin typeface="Meiryo UI" pitchFamily="34" charset="0"/>
+                <a:ea typeface="Meiryo UI" pitchFamily="34" charset="-122"/>
+                <a:cs typeface="Meiryo UI" pitchFamily="34" charset="-120"/>
               </a:rPr>
               <a:t>キャリアロードマップ全体像</a:t>
             </a:r>
@@ -2313,11 +2326,11 @@
             <a:r>
               <a:rPr lang="en-US" sz="1400" dirty="0">
                 <a:solidFill>
-                  <a:srgbClr val="6B7280"/>
-                </a:solidFill>
-                <a:latin typeface="Calibri" pitchFamily="34" charset="0"/>
-                <a:ea typeface="Calibri" pitchFamily="34" charset="-122"/>
-                <a:cs typeface="Calibri" pitchFamily="34" charset="-120"/>
+                  <a:srgbClr val="000000"/>
+                </a:solidFill>
+                <a:latin typeface="Meiryo UI" pitchFamily="34" charset="0"/>
+                <a:ea typeface="Meiryo UI" pitchFamily="34" charset="-122"/>
+                <a:cs typeface="Meiryo UI" pitchFamily="34" charset="-120"/>
               </a:rPr>
               <a:t>強みを「実践 → 専門性 → 統合 → 集大成」の順で積み上げる4フェーズ構成です。</a:t>
             </a:r>
@@ -2334,7 +2347,7 @@
         <p:spPr>
           <a:xfrm>
             <a:off x="640080" y="2057400"/>
-            <a:ext cx="2468880" cy="3794760"/>
+            <a:ext cx="2468880" cy="3931920"/>
           </a:xfrm>
           <a:prstGeom prst="roundRect">
             <a:avLst>
@@ -2342,9 +2355,14 @@
             </a:avLst>
           </a:prstGeom>
           <a:solidFill>
-            <a:srgbClr val="F4F6FB"/>
+            <a:srgbClr val="FFFFFF"/>
           </a:solidFill>
-          <a:ln/>
+          <a:ln w="12700">
+            <a:solidFill>
+              <a:srgbClr val="D0D5DD"/>
+            </a:solidFill>
+            <a:prstDash val="solid"/>
+          </a:ln>
         </p:spPr>
       </p:sp>
       <p:sp>
@@ -2364,9 +2382,14 @@
             </a:avLst>
           </a:prstGeom>
           <a:solidFill>
-            <a:srgbClr val="C9A227"/>
+            <a:srgbClr val="FFFFFF"/>
           </a:solidFill>
-          <a:ln/>
+          <a:ln w="15875">
+            <a:solidFill>
+              <a:srgbClr val="1E2761"/>
+            </a:solidFill>
+            <a:prstDash val="solid"/>
+          </a:ln>
         </p:spPr>
       </p:sp>
       <p:sp>
@@ -2394,17 +2417,17 @@
               <a:buNone/>
             </a:pPr>
             <a:r>
-              <a:rPr lang="en-US" sz="1200" b="1" dirty="0">
-                <a:solidFill>
-                  <a:srgbClr val="FFFFFF"/>
-                </a:solidFill>
-                <a:latin typeface="Calibri" pitchFamily="34" charset="0"/>
-                <a:ea typeface="Calibri" pitchFamily="34" charset="-122"/>
-                <a:cs typeface="Calibri" pitchFamily="34" charset="-120"/>
+              <a:rPr lang="en-US" sz="1400" b="1" dirty="0">
+                <a:solidFill>
+                  <a:srgbClr val="000000"/>
+                </a:solidFill>
+                <a:latin typeface="Meiryo UI" pitchFamily="34" charset="0"/>
+                <a:ea typeface="Meiryo UI" pitchFamily="34" charset="-122"/>
+                <a:cs typeface="Meiryo UI" pitchFamily="34" charset="-120"/>
               </a:rPr>
               <a:t>Phase 1</a:t>
             </a:r>
-            <a:endParaRPr lang="en-US" sz="1200" dirty="0"/>
+            <a:endParaRPr lang="en-US" sz="1400" dirty="0"/>
           </a:p>
         </p:txBody>
       </p:sp>
@@ -2477,17 +2500,17 @@
               <a:buNone/>
             </a:pPr>
             <a:r>
-              <a:rPr lang="en-US" sz="1200" b="1" dirty="0">
-                <a:solidFill>
-                  <a:srgbClr val="6B7280"/>
-                </a:solidFill>
-                <a:latin typeface="Calibri" pitchFamily="34" charset="0"/>
-                <a:ea typeface="Calibri" pitchFamily="34" charset="-122"/>
-                <a:cs typeface="Calibri" pitchFamily="34" charset="-120"/>
+              <a:rPr lang="en-US" sz="1400" b="1" dirty="0">
+                <a:solidFill>
+                  <a:srgbClr val="000000"/>
+                </a:solidFill>
+                <a:latin typeface="Meiryo UI" pitchFamily="34" charset="0"/>
+                <a:ea typeface="Meiryo UI" pitchFamily="34" charset="-122"/>
+                <a:cs typeface="Meiryo UI" pitchFamily="34" charset="-120"/>
               </a:rPr>
               <a:t>入行〜5年目</a:t>
             </a:r>
-            <a:endParaRPr lang="en-US" sz="1200" dirty="0"/>
+            <a:endParaRPr lang="en-US" sz="1400" dirty="0"/>
           </a:p>
         </p:txBody>
       </p:sp>
@@ -2500,7 +2523,7 @@
         <p:spPr>
           <a:xfrm>
             <a:off x="777240" y="4114800"/>
-            <a:ext cx="2194560" cy="777240"/>
+            <a:ext cx="2194560" cy="822960"/>
           </a:xfrm>
           <a:prstGeom prst="rect">
             <a:avLst/>
@@ -2521,11 +2544,11 @@
             <a:r>
               <a:rPr lang="en-US" sz="1400" b="1" dirty="0">
                 <a:solidFill>
-                  <a:srgbClr val="1E2761"/>
-                </a:solidFill>
-                <a:latin typeface="Calibri" pitchFamily="34" charset="0"/>
-                <a:ea typeface="Calibri" pitchFamily="34" charset="-122"/>
-                <a:cs typeface="Calibri" pitchFamily="34" charset="-120"/>
+                  <a:srgbClr val="000000"/>
+                </a:solidFill>
+                <a:latin typeface="Meiryo UI" pitchFamily="34" charset="0"/>
+                <a:ea typeface="Meiryo UI" pitchFamily="34" charset="-122"/>
+                <a:cs typeface="Meiryo UI" pitchFamily="34" charset="-120"/>
               </a:rPr>
               <a:t>法人業務部門</a:t>
             </a:r>
@@ -2541,11 +2564,11 @@
             <a:r>
               <a:rPr lang="en-US" sz="1400" b="1" dirty="0">
                 <a:solidFill>
-                  <a:srgbClr val="1E2761"/>
-                </a:solidFill>
-                <a:latin typeface="Calibri" pitchFamily="34" charset="0"/>
-                <a:ea typeface="Calibri" pitchFamily="34" charset="-122"/>
-                <a:cs typeface="Calibri" pitchFamily="34" charset="-120"/>
+                  <a:srgbClr val="000000"/>
+                </a:solidFill>
+                <a:latin typeface="Meiryo UI" pitchFamily="34" charset="0"/>
+                <a:ea typeface="Meiryo UI" pitchFamily="34" charset="-122"/>
+                <a:cs typeface="Meiryo UI" pitchFamily="34" charset="-120"/>
               </a:rPr>
               <a:t>（法人融資・法人渉外）</a:t>
             </a:r>
@@ -2561,8 +2584,8 @@
         </p:nvSpPr>
         <p:spPr>
           <a:xfrm>
-            <a:off x="822960" y="4937760"/>
-            <a:ext cx="2103120" cy="777240"/>
+            <a:off x="822960" y="4983480"/>
+            <a:ext cx="2103120" cy="914400"/>
           </a:xfrm>
           <a:prstGeom prst="rect">
             <a:avLst/>
@@ -2581,39 +2604,37 @@
               <a:buNone/>
             </a:pPr>
             <a:r>
-              <a:rPr lang="en-US" sz="1100" dirty="0">
-                <a:solidFill>
-                  <a:srgbClr val="333333"/>
-                </a:solidFill>
-                <a:latin typeface="Calibri" pitchFamily="34" charset="0"/>
-                <a:ea typeface="Calibri" pitchFamily="34" charset="-122"/>
-                <a:cs typeface="Calibri" pitchFamily="34" charset="-120"/>
+              <a:rPr lang="en-US" sz="1400" dirty="0">
+                <a:solidFill>
+                  <a:srgbClr val="000000"/>
+                </a:solidFill>
+                <a:latin typeface="Meiryo UI" pitchFamily="34" charset="0"/>
+                <a:ea typeface="Meiryo UI" pitchFamily="34" charset="-122"/>
+                <a:cs typeface="Meiryo UI" pitchFamily="34" charset="-120"/>
               </a:rPr>
               <a:t>財務分析力を実務で鍛える</a:t>
             </a:r>
-            <a:endParaRPr lang="en-US" sz="1100" dirty="0"/>
+            <a:endParaRPr lang="en-US" sz="1400" dirty="0"/>
           </a:p>
         </p:txBody>
       </p:sp>
       <p:pic>
         <p:nvPicPr>
-          <p:cNvPr id="12" name="Image 1" descr="icon_arrow.png">    </p:cNvPr>
+          <p:cNvPr id="12" name="Image 1" descr="icon_arrow_dark.png">    </p:cNvPr>
           <p:cNvPicPr>
             <a:picLocks noChangeAspect="1"/>
           </p:cNvPicPr>
           <p:nvPr/>
         </p:nvPicPr>
         <p:blipFill>
-          <a:blip r:embed="rId2">
-            <a:alphaModFix amt="60000"/>
-          </a:blip>
+          <a:blip r:embed="rId2"/>
           <a:stretch>
             <a:fillRect/>
           </a:stretch>
         </p:blipFill>
         <p:spPr>
           <a:xfrm>
-            <a:off x="3127248" y="3808476"/>
+            <a:off x="3127248" y="3877056"/>
             <a:ext cx="219456" cy="292608"/>
           </a:xfrm>
           <a:prstGeom prst="rect">
@@ -2630,7 +2651,7 @@
         <p:spPr>
           <a:xfrm>
             <a:off x="3364992" y="2057400"/>
-            <a:ext cx="2468880" cy="3794760"/>
+            <a:ext cx="2468880" cy="3931920"/>
           </a:xfrm>
           <a:prstGeom prst="roundRect">
             <a:avLst>
@@ -2638,9 +2659,14 @@
             </a:avLst>
           </a:prstGeom>
           <a:solidFill>
-            <a:srgbClr val="F4F6FB"/>
+            <a:srgbClr val="FFFFFF"/>
           </a:solidFill>
-          <a:ln/>
+          <a:ln w="12700">
+            <a:solidFill>
+              <a:srgbClr val="D0D5DD"/>
+            </a:solidFill>
+            <a:prstDash val="solid"/>
+          </a:ln>
         </p:spPr>
       </p:sp>
       <p:sp>
@@ -2660,9 +2686,14 @@
             </a:avLst>
           </a:prstGeom>
           <a:solidFill>
-            <a:srgbClr val="C9A227"/>
+            <a:srgbClr val="FFFFFF"/>
           </a:solidFill>
-          <a:ln/>
+          <a:ln w="15875">
+            <a:solidFill>
+              <a:srgbClr val="1E2761"/>
+            </a:solidFill>
+            <a:prstDash val="solid"/>
+          </a:ln>
         </p:spPr>
       </p:sp>
       <p:sp>
@@ -2690,17 +2721,17 @@
               <a:buNone/>
             </a:pPr>
             <a:r>
-              <a:rPr lang="en-US" sz="1200" b="1" dirty="0">
-                <a:solidFill>
-                  <a:srgbClr val="FFFFFF"/>
-                </a:solidFill>
-                <a:latin typeface="Calibri" pitchFamily="34" charset="0"/>
-                <a:ea typeface="Calibri" pitchFamily="34" charset="-122"/>
-                <a:cs typeface="Calibri" pitchFamily="34" charset="-120"/>
+              <a:rPr lang="en-US" sz="1400" b="1" dirty="0">
+                <a:solidFill>
+                  <a:srgbClr val="000000"/>
+                </a:solidFill>
+                <a:latin typeface="Meiryo UI" pitchFamily="34" charset="0"/>
+                <a:ea typeface="Meiryo UI" pitchFamily="34" charset="-122"/>
+                <a:cs typeface="Meiryo UI" pitchFamily="34" charset="-120"/>
               </a:rPr>
               <a:t>Phase 2</a:t>
             </a:r>
-            <a:endParaRPr lang="en-US" sz="1200" dirty="0"/>
+            <a:endParaRPr lang="en-US" sz="1400" dirty="0"/>
           </a:p>
         </p:txBody>
       </p:sp>
@@ -2773,17 +2804,17 @@
               <a:buNone/>
             </a:pPr>
             <a:r>
-              <a:rPr lang="en-US" sz="1200" b="1" dirty="0">
-                <a:solidFill>
-                  <a:srgbClr val="6B7280"/>
-                </a:solidFill>
-                <a:latin typeface="Calibri" pitchFamily="34" charset="0"/>
-                <a:ea typeface="Calibri" pitchFamily="34" charset="-122"/>
-                <a:cs typeface="Calibri" pitchFamily="34" charset="-120"/>
+              <a:rPr lang="en-US" sz="1400" b="1" dirty="0">
+                <a:solidFill>
+                  <a:srgbClr val="000000"/>
+                </a:solidFill>
+                <a:latin typeface="Meiryo UI" pitchFamily="34" charset="0"/>
+                <a:ea typeface="Meiryo UI" pitchFamily="34" charset="-122"/>
+                <a:cs typeface="Meiryo UI" pitchFamily="34" charset="-120"/>
               </a:rPr>
               <a:t>6〜10年目</a:t>
             </a:r>
-            <a:endParaRPr lang="en-US" sz="1200" dirty="0"/>
+            <a:endParaRPr lang="en-US" sz="1400" dirty="0"/>
           </a:p>
         </p:txBody>
       </p:sp>
@@ -2796,7 +2827,7 @@
         <p:spPr>
           <a:xfrm>
             <a:off x="3502152" y="4114800"/>
-            <a:ext cx="2194560" cy="777240"/>
+            <a:ext cx="2194560" cy="822960"/>
           </a:xfrm>
           <a:prstGeom prst="rect">
             <a:avLst/>
@@ -2817,11 +2848,11 @@
             <a:r>
               <a:rPr lang="en-US" sz="1400" b="1" dirty="0">
                 <a:solidFill>
-                  <a:srgbClr val="1E2761"/>
-                </a:solidFill>
-                <a:latin typeface="Calibri" pitchFamily="34" charset="0"/>
-                <a:ea typeface="Calibri" pitchFamily="34" charset="-122"/>
-                <a:cs typeface="Calibri" pitchFamily="34" charset="-120"/>
+                  <a:srgbClr val="000000"/>
+                </a:solidFill>
+                <a:latin typeface="Meiryo UI" pitchFamily="34" charset="0"/>
+                <a:ea typeface="Meiryo UI" pitchFamily="34" charset="-122"/>
+                <a:cs typeface="Meiryo UI" pitchFamily="34" charset="-120"/>
               </a:rPr>
               <a:t>証券代行・</a:t>
             </a:r>
@@ -2837,11 +2868,11 @@
             <a:r>
               <a:rPr lang="en-US" sz="1400" b="1" dirty="0">
                 <a:solidFill>
-                  <a:srgbClr val="1E2761"/>
-                </a:solidFill>
-                <a:latin typeface="Calibri" pitchFamily="34" charset="0"/>
-                <a:ea typeface="Calibri" pitchFamily="34" charset="-122"/>
-                <a:cs typeface="Calibri" pitchFamily="34" charset="-120"/>
+                  <a:srgbClr val="000000"/>
+                </a:solidFill>
+                <a:latin typeface="Meiryo UI" pitchFamily="34" charset="0"/>
+                <a:ea typeface="Meiryo UI" pitchFamily="34" charset="-122"/>
+                <a:cs typeface="Meiryo UI" pitchFamily="34" charset="-120"/>
               </a:rPr>
               <a:t>年金信託業務部門</a:t>
             </a:r>
@@ -2857,8 +2888,8 @@
         </p:nvSpPr>
         <p:spPr>
           <a:xfrm>
-            <a:off x="3547872" y="4937760"/>
-            <a:ext cx="2103120" cy="777240"/>
+            <a:off x="3547872" y="4983480"/>
+            <a:ext cx="2103120" cy="914400"/>
           </a:xfrm>
           <a:prstGeom prst="rect">
             <a:avLst/>
@@ -2877,39 +2908,37 @@
               <a:buNone/>
             </a:pPr>
             <a:r>
-              <a:rPr lang="en-US" sz="1100" dirty="0">
-                <a:solidFill>
-                  <a:srgbClr val="333333"/>
-                </a:solidFill>
-                <a:latin typeface="Calibri" pitchFamily="34" charset="0"/>
-                <a:ea typeface="Calibri" pitchFamily="34" charset="-122"/>
-                <a:cs typeface="Calibri" pitchFamily="34" charset="-120"/>
+              <a:rPr lang="en-US" sz="1400" dirty="0">
+                <a:solidFill>
+                  <a:srgbClr val="000000"/>
+                </a:solidFill>
+                <a:latin typeface="Meiryo UI" pitchFamily="34" charset="0"/>
+                <a:ea typeface="Meiryo UI" pitchFamily="34" charset="-122"/>
+                <a:cs typeface="Meiryo UI" pitchFamily="34" charset="-120"/>
               </a:rPr>
               <a:t>企業法知識を専門性に変える</a:t>
             </a:r>
-            <a:endParaRPr lang="en-US" sz="1100" dirty="0"/>
+            <a:endParaRPr lang="en-US" sz="1400" dirty="0"/>
           </a:p>
         </p:txBody>
       </p:sp>
       <p:pic>
         <p:nvPicPr>
-          <p:cNvPr id="21" name="Image 3" descr="icon_arrow.png">    </p:cNvPr>
+          <p:cNvPr id="21" name="Image 3" descr="icon_arrow_dark.png">    </p:cNvPr>
           <p:cNvPicPr>
             <a:picLocks noChangeAspect="1"/>
           </p:cNvPicPr>
           <p:nvPr/>
         </p:nvPicPr>
         <p:blipFill>
-          <a:blip r:embed="rId4">
-            <a:alphaModFix amt="60000"/>
-          </a:blip>
+          <a:blip r:embed="rId4"/>
           <a:stretch>
             <a:fillRect/>
           </a:stretch>
         </p:blipFill>
         <p:spPr>
           <a:xfrm>
-            <a:off x="5852160" y="3808476"/>
+            <a:off x="5852160" y="3877056"/>
             <a:ext cx="219456" cy="292608"/>
           </a:xfrm>
           <a:prstGeom prst="rect">
@@ -2926,7 +2955,7 @@
         <p:spPr>
           <a:xfrm>
             <a:off x="6089904" y="2057400"/>
-            <a:ext cx="2468880" cy="3794760"/>
+            <a:ext cx="2468880" cy="3931920"/>
           </a:xfrm>
           <a:prstGeom prst="roundRect">
             <a:avLst>
@@ -2934,9 +2963,14 @@
             </a:avLst>
           </a:prstGeom>
           <a:solidFill>
-            <a:srgbClr val="EFE6CE"/>
+            <a:srgbClr val="FFFFFF"/>
           </a:solidFill>
-          <a:ln/>
+          <a:ln w="25400">
+            <a:solidFill>
+              <a:srgbClr val="C9A227"/>
+            </a:solidFill>
+            <a:prstDash val="solid"/>
+          </a:ln>
         </p:spPr>
       </p:sp>
       <p:sp>
@@ -2956,9 +2990,14 @@
             </a:avLst>
           </a:prstGeom>
           <a:solidFill>
-            <a:srgbClr val="C9A227"/>
+            <a:srgbClr val="FFFFFF"/>
           </a:solidFill>
-          <a:ln/>
+          <a:ln w="15875">
+            <a:solidFill>
+              <a:srgbClr val="1E2761"/>
+            </a:solidFill>
+            <a:prstDash val="solid"/>
+          </a:ln>
         </p:spPr>
       </p:sp>
       <p:sp>
@@ -2986,17 +3025,17 @@
               <a:buNone/>
             </a:pPr>
             <a:r>
-              <a:rPr lang="en-US" sz="1200" b="1" dirty="0">
-                <a:solidFill>
-                  <a:srgbClr val="FFFFFF"/>
-                </a:solidFill>
-                <a:latin typeface="Calibri" pitchFamily="34" charset="0"/>
-                <a:ea typeface="Calibri" pitchFamily="34" charset="-122"/>
-                <a:cs typeface="Calibri" pitchFamily="34" charset="-120"/>
+              <a:rPr lang="en-US" sz="1400" b="1" dirty="0">
+                <a:solidFill>
+                  <a:srgbClr val="000000"/>
+                </a:solidFill>
+                <a:latin typeface="Meiryo UI" pitchFamily="34" charset="0"/>
+                <a:ea typeface="Meiryo UI" pitchFamily="34" charset="-122"/>
+                <a:cs typeface="Meiryo UI" pitchFamily="34" charset="-120"/>
               </a:rPr>
               <a:t>Phase 3</a:t>
             </a:r>
-            <a:endParaRPr lang="en-US" sz="1200" dirty="0"/>
+            <a:endParaRPr lang="en-US" sz="1400" dirty="0"/>
           </a:p>
         </p:txBody>
       </p:sp>
@@ -3069,17 +3108,17 @@
               <a:buNone/>
             </a:pPr>
             <a:r>
-              <a:rPr lang="en-US" sz="1200" b="1" dirty="0">
-                <a:solidFill>
-                  <a:srgbClr val="6B7280"/>
-                </a:solidFill>
-                <a:latin typeface="Calibri" pitchFamily="34" charset="0"/>
-                <a:ea typeface="Calibri" pitchFamily="34" charset="-122"/>
-                <a:cs typeface="Calibri" pitchFamily="34" charset="-120"/>
+              <a:rPr lang="en-US" sz="1400" b="1" dirty="0">
+                <a:solidFill>
+                  <a:srgbClr val="000000"/>
+                </a:solidFill>
+                <a:latin typeface="Meiryo UI" pitchFamily="34" charset="0"/>
+                <a:ea typeface="Meiryo UI" pitchFamily="34" charset="-122"/>
+                <a:cs typeface="Meiryo UI" pitchFamily="34" charset="-120"/>
               </a:rPr>
               <a:t>11〜15年目</a:t>
             </a:r>
-            <a:endParaRPr lang="en-US" sz="1200" dirty="0"/>
+            <a:endParaRPr lang="en-US" sz="1400" dirty="0"/>
           </a:p>
         </p:txBody>
       </p:sp>
@@ -3092,7 +3131,7 @@
         <p:spPr>
           <a:xfrm>
             <a:off x="6227064" y="4114800"/>
-            <a:ext cx="2194560" cy="777240"/>
+            <a:ext cx="2194560" cy="822960"/>
           </a:xfrm>
           <a:prstGeom prst="rect">
             <a:avLst/>
@@ -3113,11 +3152,11 @@
             <a:r>
               <a:rPr lang="en-US" sz="1400" b="1" dirty="0">
                 <a:solidFill>
-                  <a:srgbClr val="1E2761"/>
-                </a:solidFill>
-                <a:latin typeface="Calibri" pitchFamily="34" charset="0"/>
-                <a:ea typeface="Calibri" pitchFamily="34" charset="-122"/>
-                <a:cs typeface="Calibri" pitchFamily="34" charset="-120"/>
+                  <a:srgbClr val="000000"/>
+                </a:solidFill>
+                <a:latin typeface="Meiryo UI" pitchFamily="34" charset="0"/>
+                <a:ea typeface="Meiryo UI" pitchFamily="34" charset="-122"/>
+                <a:cs typeface="Meiryo UI" pitchFamily="34" charset="-120"/>
               </a:rPr>
               <a:t>事業承継・</a:t>
             </a:r>
@@ -3133,11 +3172,11 @@
             <a:r>
               <a:rPr lang="en-US" sz="1400" b="1" dirty="0">
                 <a:solidFill>
-                  <a:srgbClr val="1E2761"/>
-                </a:solidFill>
-                <a:latin typeface="Calibri" pitchFamily="34" charset="0"/>
-                <a:ea typeface="Calibri" pitchFamily="34" charset="-122"/>
-                <a:cs typeface="Calibri" pitchFamily="34" charset="-120"/>
+                  <a:srgbClr val="000000"/>
+                </a:solidFill>
+                <a:latin typeface="Meiryo UI" pitchFamily="34" charset="0"/>
+                <a:ea typeface="Meiryo UI" pitchFamily="34" charset="-122"/>
+                <a:cs typeface="Meiryo UI" pitchFamily="34" charset="-120"/>
               </a:rPr>
               <a:t>M&amp;Aアドバイザリー</a:t>
             </a:r>
@@ -3153,8 +3192,8 @@
         </p:nvSpPr>
         <p:spPr>
           <a:xfrm>
-            <a:off x="6272784" y="4937760"/>
-            <a:ext cx="2103120" cy="777240"/>
+            <a:off x="6272784" y="4983480"/>
+            <a:ext cx="2103120" cy="914400"/>
           </a:xfrm>
           <a:prstGeom prst="rect">
             <a:avLst/>
@@ -3173,39 +3212,37 @@
               <a:buNone/>
             </a:pPr>
             <a:r>
-              <a:rPr lang="en-US" sz="1100" dirty="0">
-                <a:solidFill>
-                  <a:srgbClr val="333333"/>
-                </a:solidFill>
-                <a:latin typeface="Calibri" pitchFamily="34" charset="0"/>
-                <a:ea typeface="Calibri" pitchFamily="34" charset="-122"/>
-                <a:cs typeface="Calibri" pitchFamily="34" charset="-120"/>
+              <a:rPr lang="en-US" sz="1400" dirty="0">
+                <a:solidFill>
+                  <a:srgbClr val="000000"/>
+                </a:solidFill>
+                <a:latin typeface="Meiryo UI" pitchFamily="34" charset="0"/>
+                <a:ea typeface="Meiryo UI" pitchFamily="34" charset="-122"/>
+                <a:cs typeface="Meiryo UI" pitchFamily="34" charset="-120"/>
               </a:rPr>
               <a:t>財務×法務を統合する差別化ポイント</a:t>
             </a:r>
-            <a:endParaRPr lang="en-US" sz="1100" dirty="0"/>
+            <a:endParaRPr lang="en-US" sz="1400" dirty="0"/>
           </a:p>
         </p:txBody>
       </p:sp>
       <p:pic>
         <p:nvPicPr>
-          <p:cNvPr id="30" name="Image 5" descr="icon_arrow.png">    </p:cNvPr>
+          <p:cNvPr id="30" name="Image 5" descr="icon_arrow_dark.png">    </p:cNvPr>
           <p:cNvPicPr>
             <a:picLocks noChangeAspect="1"/>
           </p:cNvPicPr>
           <p:nvPr/>
         </p:nvPicPr>
         <p:blipFill>
-          <a:blip r:embed="rId6">
-            <a:alphaModFix amt="60000"/>
-          </a:blip>
+          <a:blip r:embed="rId6"/>
           <a:stretch>
             <a:fillRect/>
           </a:stretch>
         </p:blipFill>
         <p:spPr>
           <a:xfrm>
-            <a:off x="8577072" y="3808476"/>
+            <a:off x="8577072" y="3877056"/>
             <a:ext cx="219456" cy="292608"/>
           </a:xfrm>
           <a:prstGeom prst="rect">
@@ -3222,7 +3259,7 @@
         <p:spPr>
           <a:xfrm>
             <a:off x="8814816" y="2057400"/>
-            <a:ext cx="2468880" cy="3794760"/>
+            <a:ext cx="2468880" cy="3931920"/>
           </a:xfrm>
           <a:prstGeom prst="roundRect">
             <a:avLst>
@@ -3230,9 +3267,14 @@
             </a:avLst>
           </a:prstGeom>
           <a:solidFill>
-            <a:srgbClr val="F4F6FB"/>
+            <a:srgbClr val="FFFFFF"/>
           </a:solidFill>
-          <a:ln/>
+          <a:ln w="12700">
+            <a:solidFill>
+              <a:srgbClr val="D0D5DD"/>
+            </a:solidFill>
+            <a:prstDash val="solid"/>
+          </a:ln>
         </p:spPr>
       </p:sp>
       <p:sp>
@@ -3252,9 +3294,14 @@
             </a:avLst>
           </a:prstGeom>
           <a:solidFill>
-            <a:srgbClr val="C9A227"/>
+            <a:srgbClr val="FFFFFF"/>
           </a:solidFill>
-          <a:ln/>
+          <a:ln w="15875">
+            <a:solidFill>
+              <a:srgbClr val="1E2761"/>
+            </a:solidFill>
+            <a:prstDash val="solid"/>
+          </a:ln>
         </p:spPr>
       </p:sp>
       <p:sp>
@@ -3282,17 +3329,17 @@
               <a:buNone/>
             </a:pPr>
             <a:r>
-              <a:rPr lang="en-US" sz="1200" b="1" dirty="0">
-                <a:solidFill>
-                  <a:srgbClr val="FFFFFF"/>
-                </a:solidFill>
-                <a:latin typeface="Calibri" pitchFamily="34" charset="0"/>
-                <a:ea typeface="Calibri" pitchFamily="34" charset="-122"/>
-                <a:cs typeface="Calibri" pitchFamily="34" charset="-120"/>
+              <a:rPr lang="en-US" sz="1400" b="1" dirty="0">
+                <a:solidFill>
+                  <a:srgbClr val="000000"/>
+                </a:solidFill>
+                <a:latin typeface="Meiryo UI" pitchFamily="34" charset="0"/>
+                <a:ea typeface="Meiryo UI" pitchFamily="34" charset="-122"/>
+                <a:cs typeface="Meiryo UI" pitchFamily="34" charset="-120"/>
               </a:rPr>
               <a:t>Phase 4</a:t>
             </a:r>
-            <a:endParaRPr lang="en-US" sz="1200" dirty="0"/>
+            <a:endParaRPr lang="en-US" sz="1400" dirty="0"/>
           </a:p>
         </p:txBody>
       </p:sp>
@@ -3365,17 +3412,17 @@
               <a:buNone/>
             </a:pPr>
             <a:r>
-              <a:rPr lang="en-US" sz="1200" b="1" dirty="0">
-                <a:solidFill>
-                  <a:srgbClr val="6B7280"/>
-                </a:solidFill>
-                <a:latin typeface="Calibri" pitchFamily="34" charset="0"/>
-                <a:ea typeface="Calibri" pitchFamily="34" charset="-122"/>
-                <a:cs typeface="Calibri" pitchFamily="34" charset="-120"/>
+              <a:rPr lang="en-US" sz="1400" b="1" dirty="0">
+                <a:solidFill>
+                  <a:srgbClr val="000000"/>
+                </a:solidFill>
+                <a:latin typeface="Meiryo UI" pitchFamily="34" charset="0"/>
+                <a:ea typeface="Meiryo UI" pitchFamily="34" charset="-122"/>
+                <a:cs typeface="Meiryo UI" pitchFamily="34" charset="-120"/>
               </a:rPr>
               <a:t>16年目〜</a:t>
             </a:r>
-            <a:endParaRPr lang="en-US" sz="1200" dirty="0"/>
+            <a:endParaRPr lang="en-US" sz="1400" dirty="0"/>
           </a:p>
         </p:txBody>
       </p:sp>
@@ -3388,7 +3435,7 @@
         <p:spPr>
           <a:xfrm>
             <a:off x="8951976" y="4114800"/>
-            <a:ext cx="2194560" cy="777240"/>
+            <a:ext cx="2194560" cy="822960"/>
           </a:xfrm>
           <a:prstGeom prst="rect">
             <a:avLst/>
@@ -3409,11 +3456,11 @@
             <a:r>
               <a:rPr lang="en-US" sz="1400" b="1" dirty="0">
                 <a:solidFill>
-                  <a:srgbClr val="1E2761"/>
-                </a:solidFill>
-                <a:latin typeface="Calibri" pitchFamily="34" charset="0"/>
-                <a:ea typeface="Calibri" pitchFamily="34" charset="-122"/>
-                <a:cs typeface="Calibri" pitchFamily="34" charset="-120"/>
+                  <a:srgbClr val="000000"/>
+                </a:solidFill>
+                <a:latin typeface="Meiryo UI" pitchFamily="34" charset="0"/>
+                <a:ea typeface="Meiryo UI" pitchFamily="34" charset="-122"/>
+                <a:cs typeface="Meiryo UI" pitchFamily="34" charset="-120"/>
               </a:rPr>
               <a:t>プライベートバンキング／</a:t>
             </a:r>
@@ -3429,11 +3476,11 @@
             <a:r>
               <a:rPr lang="en-US" sz="1400" b="1" dirty="0">
                 <a:solidFill>
-                  <a:srgbClr val="1E2761"/>
-                </a:solidFill>
-                <a:latin typeface="Calibri" pitchFamily="34" charset="0"/>
-                <a:ea typeface="Calibri" pitchFamily="34" charset="-122"/>
-                <a:cs typeface="Calibri" pitchFamily="34" charset="-120"/>
+                  <a:srgbClr val="000000"/>
+                </a:solidFill>
+                <a:latin typeface="Meiryo UI" pitchFamily="34" charset="0"/>
+                <a:ea typeface="Meiryo UI" pitchFamily="34" charset="-122"/>
+                <a:cs typeface="Meiryo UI" pitchFamily="34" charset="-120"/>
               </a:rPr>
               <a:t>資産運用会社</a:t>
             </a:r>
@@ -3449,8 +3496,8 @@
         </p:nvSpPr>
         <p:spPr>
           <a:xfrm>
-            <a:off x="8997696" y="4937760"/>
-            <a:ext cx="2103120" cy="777240"/>
+            <a:off x="8997696" y="4983480"/>
+            <a:ext cx="2103120" cy="914400"/>
           </a:xfrm>
           <a:prstGeom prst="rect">
             <a:avLst/>
@@ -3469,17 +3516,17 @@
               <a:buNone/>
             </a:pPr>
             <a:r>
-              <a:rPr lang="en-US" sz="1100" dirty="0">
-                <a:solidFill>
-                  <a:srgbClr val="333333"/>
-                </a:solidFill>
-                <a:latin typeface="Calibri" pitchFamily="34" charset="0"/>
-                <a:ea typeface="Calibri" pitchFamily="34" charset="-122"/>
-                <a:cs typeface="Calibri" pitchFamily="34" charset="-120"/>
+              <a:rPr lang="en-US" sz="1400" dirty="0">
+                <a:solidFill>
+                  <a:srgbClr val="000000"/>
+                </a:solidFill>
+                <a:latin typeface="Meiryo UI" pitchFamily="34" charset="0"/>
+                <a:ea typeface="Meiryo UI" pitchFamily="34" charset="-122"/>
+                <a:cs typeface="Meiryo UI" pitchFamily="34" charset="-120"/>
               </a:rPr>
               <a:t>顧客の資産全体を長期的に支える集大成</a:t>
             </a:r>
-            <a:endParaRPr lang="en-US" sz="1100" dirty="0"/>
+            <a:endParaRPr lang="en-US" sz="1400" dirty="0"/>
           </a:p>
         </p:txBody>
       </p:sp>
@@ -3523,16 +3570,23 @@
         </p:nvSpPr>
         <p:spPr>
           <a:xfrm>
-            <a:off x="0" y="0"/>
-            <a:ext cx="3840480" cy="6858000"/>
-          </a:xfrm>
-          <a:prstGeom prst="rect">
-            <a:avLst/>
+            <a:off x="457200" y="457200"/>
+            <a:ext cx="3200400" cy="5943600"/>
+          </a:xfrm>
+          <a:prstGeom prst="roundRect">
+            <a:avLst>
+              <a:gd name="adj" fmla="val 2857"/>
+            </a:avLst>
           </a:prstGeom>
           <a:solidFill>
-            <a:srgbClr val="1E2761"/>
+            <a:srgbClr val="FFFFFF"/>
           </a:solidFill>
-          <a:ln/>
+          <a:ln w="19050">
+            <a:solidFill>
+              <a:srgbClr val="1E2761"/>
+            </a:solidFill>
+            <a:prstDash val="solid"/>
+          </a:ln>
         </p:spPr>
       </p:sp>
       <p:sp>
@@ -3552,9 +3606,14 @@
             </a:avLst>
           </a:prstGeom>
           <a:solidFill>
-            <a:srgbClr val="C9A227"/>
+            <a:srgbClr val="FFFFFF"/>
           </a:solidFill>
-          <a:ln/>
+          <a:ln w="15875">
+            <a:solidFill>
+              <a:srgbClr val="1E2761"/>
+            </a:solidFill>
+            <a:prstDash val="solid"/>
+          </a:ln>
         </p:spPr>
       </p:sp>
       <p:sp>
@@ -3582,17 +3641,17 @@
               <a:buNone/>
             </a:pPr>
             <a:r>
-              <a:rPr lang="en-US" sz="1300" b="1" dirty="0">
-                <a:solidFill>
-                  <a:srgbClr val="FFFFFF"/>
-                </a:solidFill>
-                <a:latin typeface="Calibri" pitchFamily="34" charset="0"/>
-                <a:ea typeface="Calibri" pitchFamily="34" charset="-122"/>
-                <a:cs typeface="Calibri" pitchFamily="34" charset="-120"/>
+              <a:rPr lang="en-US" sz="1400" b="1" dirty="0">
+                <a:solidFill>
+                  <a:srgbClr val="000000"/>
+                </a:solidFill>
+                <a:latin typeface="Meiryo UI" pitchFamily="34" charset="0"/>
+                <a:ea typeface="Meiryo UI" pitchFamily="34" charset="-122"/>
+                <a:cs typeface="Meiryo UI" pitchFamily="34" charset="-120"/>
               </a:rPr>
               <a:t>PHASE 1</a:t>
             </a:r>
-            <a:endParaRPr lang="en-US" sz="1300" dirty="0"/>
+            <a:endParaRPr lang="en-US" sz="1400" dirty="0"/>
           </a:p>
         </p:txBody>
       </p:sp>
@@ -3611,7 +3670,7 @@
             <a:avLst/>
           </a:prstGeom>
           <a:solidFill>
-            <a:srgbClr val="2A3A8C"/>
+            <a:srgbClr val="1E2761"/>
           </a:solidFill>
           <a:ln/>
         </p:spPr>
@@ -3667,11 +3726,11 @@
             <a:r>
               <a:rPr lang="en-US" sz="1400" b="1" dirty="0">
                 <a:solidFill>
-                  <a:srgbClr val="CADCFC"/>
-                </a:solidFill>
-                <a:latin typeface="Calibri" pitchFamily="34" charset="0"/>
-                <a:ea typeface="Calibri" pitchFamily="34" charset="-122"/>
-                <a:cs typeface="Calibri" pitchFamily="34" charset="-120"/>
+                  <a:srgbClr val="000000"/>
+                </a:solidFill>
+                <a:latin typeface="Meiryo UI" pitchFamily="34" charset="0"/>
+                <a:ea typeface="Meiryo UI" pitchFamily="34" charset="-122"/>
+                <a:cs typeface="Meiryo UI" pitchFamily="34" charset="-120"/>
               </a:rPr>
               <a:t>入行〜5年目</a:t>
             </a:r>
@@ -3707,17 +3766,17 @@
               <a:buNone/>
             </a:pPr>
             <a:r>
-              <a:rPr lang="en-US" sz="2400" b="1" dirty="0">
-                <a:solidFill>
-                  <a:srgbClr val="FFFFFF"/>
-                </a:solidFill>
-                <a:latin typeface="Cambria" pitchFamily="34" charset="0"/>
-                <a:ea typeface="Cambria" pitchFamily="34" charset="-122"/>
-                <a:cs typeface="Cambria" pitchFamily="34" charset="-120"/>
+              <a:rPr lang="en-US" sz="2200" b="1" dirty="0">
+                <a:solidFill>
+                  <a:srgbClr val="000000"/>
+                </a:solidFill>
+                <a:latin typeface="Meiryo UI" pitchFamily="34" charset="0"/>
+                <a:ea typeface="Meiryo UI" pitchFamily="34" charset="-122"/>
+                <a:cs typeface="Meiryo UI" pitchFamily="34" charset="-120"/>
               </a:rPr>
               <a:t>法人業務部門</a:t>
             </a:r>
-            <a:endParaRPr lang="en-US" sz="2400" dirty="0"/>
+            <a:endParaRPr lang="en-US" sz="2200" dirty="0"/>
           </a:p>
           <a:p>
             <a:pPr indent="0" marL="0">
@@ -3727,17 +3786,17 @@
               <a:buNone/>
             </a:pPr>
             <a:r>
-              <a:rPr lang="en-US" sz="2400" b="1" dirty="0">
-                <a:solidFill>
-                  <a:srgbClr val="FFFFFF"/>
-                </a:solidFill>
-                <a:latin typeface="Cambria" pitchFamily="34" charset="0"/>
-                <a:ea typeface="Cambria" pitchFamily="34" charset="-122"/>
-                <a:cs typeface="Cambria" pitchFamily="34" charset="-120"/>
+              <a:rPr lang="en-US" sz="2200" b="1" dirty="0">
+                <a:solidFill>
+                  <a:srgbClr val="000000"/>
+                </a:solidFill>
+                <a:latin typeface="Meiryo UI" pitchFamily="34" charset="0"/>
+                <a:ea typeface="Meiryo UI" pitchFamily="34" charset="-122"/>
+                <a:cs typeface="Meiryo UI" pitchFamily="34" charset="-120"/>
               </a:rPr>
               <a:t>（法人融資・法人渉外）</a:t>
             </a:r>
-            <a:endParaRPr lang="en-US" sz="2400" dirty="0"/>
+            <a:endParaRPr lang="en-US" sz="2200" dirty="0"/>
           </a:p>
         </p:txBody>
       </p:sp>
@@ -3749,8 +3808,8 @@
         </p:nvSpPr>
         <p:spPr>
           <a:xfrm>
-            <a:off x="777240" y="5029200"/>
-            <a:ext cx="2788920" cy="1280160"/>
+            <a:off x="777240" y="4937760"/>
+            <a:ext cx="2788920" cy="1371600"/>
           </a:xfrm>
           <a:prstGeom prst="rect">
             <a:avLst/>
@@ -3769,17 +3828,17 @@
               <a:buNone/>
             </a:pPr>
             <a:r>
-              <a:rPr lang="en-US" sz="1250" i="1" dirty="0">
-                <a:solidFill>
-                  <a:srgbClr val="CADCFC"/>
-                </a:solidFill>
-                <a:latin typeface="Calibri" pitchFamily="34" charset="0"/>
-                <a:ea typeface="Calibri" pitchFamily="34" charset="-122"/>
-                <a:cs typeface="Calibri" pitchFamily="34" charset="-120"/>
+              <a:rPr lang="en-US" sz="1400" i="1" dirty="0">
+                <a:solidFill>
+                  <a:srgbClr val="000000"/>
+                </a:solidFill>
+                <a:latin typeface="Meiryo UI" pitchFamily="34" charset="0"/>
+                <a:ea typeface="Meiryo UI" pitchFamily="34" charset="-122"/>
+                <a:cs typeface="Meiryo UI" pitchFamily="34" charset="-120"/>
               </a:rPr>
               <a:t>財務諸表を「読む」力を、与信判断という実務で鍛える最初のステージ</a:t>
             </a:r>
-            <a:endParaRPr lang="en-US" sz="1250" dirty="0"/>
+            <a:endParaRPr lang="en-US" sz="1400" dirty="0"/>
           </a:p>
         </p:txBody>
       </p:sp>
@@ -3791,7 +3850,7 @@
         </p:nvSpPr>
         <p:spPr>
           <a:xfrm>
-            <a:off x="4325112" y="685800"/>
+            <a:off x="4005072" y="685800"/>
             <a:ext cx="146304" cy="146304"/>
           </a:xfrm>
           <a:prstGeom prst="roundRect">
@@ -3813,8 +3872,8 @@
         </p:nvSpPr>
         <p:spPr>
           <a:xfrm>
-            <a:off x="4617720" y="612648"/>
-            <a:ext cx="7132320" cy="365760"/>
+            <a:off x="4297680" y="612648"/>
+            <a:ext cx="7406640" cy="365760"/>
           </a:xfrm>
           <a:prstGeom prst="rect">
             <a:avLst/>
@@ -3832,11 +3891,11 @@
             <a:r>
               <a:rPr lang="en-US" sz="1600" b="1" dirty="0">
                 <a:solidFill>
-                  <a:srgbClr val="1E2761"/>
-                </a:solidFill>
-                <a:latin typeface="Calibri" pitchFamily="34" charset="0"/>
-                <a:ea typeface="Calibri" pitchFamily="34" charset="-122"/>
-                <a:cs typeface="Calibri" pitchFamily="34" charset="-120"/>
+                  <a:srgbClr val="000000"/>
+                </a:solidFill>
+                <a:latin typeface="Meiryo UI" pitchFamily="34" charset="0"/>
+                <a:ea typeface="Meiryo UI" pitchFamily="34" charset="-122"/>
+                <a:cs typeface="Meiryo UI" pitchFamily="34" charset="-120"/>
               </a:rPr>
               <a:t>業務内容</a:t>
             </a:r>
@@ -3852,8 +3911,8 @@
         </p:nvSpPr>
         <p:spPr>
           <a:xfrm>
-            <a:off x="4361688" y="1069848"/>
-            <a:ext cx="7406640" cy="1417320"/>
+            <a:off x="4041648" y="1069848"/>
+            <a:ext cx="7680960" cy="1417320"/>
           </a:xfrm>
           <a:prstGeom prst="rect">
             <a:avLst/>
@@ -3872,17 +3931,17 @@
               <a:buNone/>
             </a:pPr>
             <a:r>
-              <a:rPr lang="en-US" sz="1300" dirty="0">
-                <a:solidFill>
-                  <a:srgbClr val="333333"/>
-                </a:solidFill>
-                <a:latin typeface="Calibri" pitchFamily="34" charset="0"/>
-                <a:ea typeface="Calibri" pitchFamily="34" charset="-122"/>
-                <a:cs typeface="Calibri" pitchFamily="34" charset="-120"/>
+              <a:rPr lang="en-US" sz="1400" dirty="0">
+                <a:solidFill>
+                  <a:srgbClr val="000000"/>
+                </a:solidFill>
+                <a:latin typeface="Meiryo UI" pitchFamily="34" charset="0"/>
+                <a:ea typeface="Meiryo UI" pitchFamily="34" charset="-122"/>
+                <a:cs typeface="Meiryo UI" pitchFamily="34" charset="-120"/>
               </a:rPr>
               <a:t>取引先企業への与信審査、財務諸表分析に基づく融資判断、法人渉外を通じた企業とのリレーション構築を担当。信託銀行も普通銀行業務を兼営しており、若手が財務分析の基礎体力をつける代表的な配属先。</a:t>
             </a:r>
-            <a:endParaRPr lang="en-US" sz="1300" dirty="0"/>
+            <a:endParaRPr lang="en-US" sz="1400" dirty="0"/>
           </a:p>
         </p:txBody>
       </p:sp>
@@ -3894,7 +3953,7 @@
         </p:nvSpPr>
         <p:spPr>
           <a:xfrm>
-            <a:off x="4325112" y="2606040"/>
+            <a:off x="4005072" y="2606040"/>
             <a:ext cx="146304" cy="146304"/>
           </a:xfrm>
           <a:prstGeom prst="roundRect">
@@ -3916,8 +3975,8 @@
         </p:nvSpPr>
         <p:spPr>
           <a:xfrm>
-            <a:off x="4617720" y="2532888"/>
-            <a:ext cx="7132320" cy="365760"/>
+            <a:off x="4297680" y="2532888"/>
+            <a:ext cx="7406640" cy="365760"/>
           </a:xfrm>
           <a:prstGeom prst="rect">
             <a:avLst/>
@@ -3935,11 +3994,11 @@
             <a:r>
               <a:rPr lang="en-US" sz="1600" b="1" dirty="0">
                 <a:solidFill>
-                  <a:srgbClr val="1E2761"/>
-                </a:solidFill>
-                <a:latin typeface="Calibri" pitchFamily="34" charset="0"/>
-                <a:ea typeface="Calibri" pitchFamily="34" charset="-122"/>
-                <a:cs typeface="Calibri" pitchFamily="34" charset="-120"/>
+                  <a:srgbClr val="000000"/>
+                </a:solidFill>
+                <a:latin typeface="Meiryo UI" pitchFamily="34" charset="0"/>
+                <a:ea typeface="Meiryo UI" pitchFamily="34" charset="-122"/>
+                <a:cs typeface="Meiryo UI" pitchFamily="34" charset="-120"/>
               </a:rPr>
               <a:t>身につく力</a:t>
             </a:r>
@@ -3955,8 +4014,8 @@
         </p:nvSpPr>
         <p:spPr>
           <a:xfrm>
-            <a:off x="4361688" y="2990088"/>
-            <a:ext cx="7406640" cy="1417320"/>
+            <a:off x="4041648" y="2990088"/>
+            <a:ext cx="7680960" cy="1417320"/>
           </a:xfrm>
           <a:prstGeom prst="rect">
             <a:avLst/>
@@ -3975,17 +4034,17 @@
               <a:buNone/>
             </a:pPr>
             <a:r>
-              <a:rPr lang="en-US" sz="1300" dirty="0">
-                <a:solidFill>
-                  <a:srgbClr val="333333"/>
-                </a:solidFill>
-                <a:latin typeface="Calibri" pitchFamily="34" charset="0"/>
-                <a:ea typeface="Calibri" pitchFamily="34" charset="-122"/>
-                <a:cs typeface="Calibri" pitchFamily="34" charset="-120"/>
+              <a:rPr lang="en-US" sz="1400" dirty="0">
+                <a:solidFill>
+                  <a:srgbClr val="000000"/>
+                </a:solidFill>
+                <a:latin typeface="Meiryo UI" pitchFamily="34" charset="0"/>
+                <a:ea typeface="Meiryo UI" pitchFamily="34" charset="-122"/>
+                <a:cs typeface="Meiryo UI" pitchFamily="34" charset="-120"/>
               </a:rPr>
               <a:t>決算書を「読める」だけでなく、与信判断や提案に「使う」実践力。企業への説明力・折衝力も同時に磨かれる。</a:t>
             </a:r>
-            <a:endParaRPr lang="en-US" sz="1300" dirty="0"/>
+            <a:endParaRPr lang="en-US" sz="1400" dirty="0"/>
           </a:p>
         </p:txBody>
       </p:sp>
@@ -3997,7 +4056,7 @@
         </p:nvSpPr>
         <p:spPr>
           <a:xfrm>
-            <a:off x="4325112" y="4526280"/>
+            <a:off x="4005072" y="4526280"/>
             <a:ext cx="146304" cy="146304"/>
           </a:xfrm>
           <a:prstGeom prst="roundRect">
@@ -4019,8 +4078,8 @@
         </p:nvSpPr>
         <p:spPr>
           <a:xfrm>
-            <a:off x="4617720" y="4453128"/>
-            <a:ext cx="7132320" cy="365760"/>
+            <a:off x="4297680" y="4453128"/>
+            <a:ext cx="7406640" cy="365760"/>
           </a:xfrm>
           <a:prstGeom prst="rect">
             <a:avLst/>
@@ -4038,11 +4097,11 @@
             <a:r>
               <a:rPr lang="en-US" sz="1600" b="1" dirty="0">
                 <a:solidFill>
-                  <a:srgbClr val="1E2761"/>
-                </a:solidFill>
-                <a:latin typeface="Calibri" pitchFamily="34" charset="0"/>
-                <a:ea typeface="Calibri" pitchFamily="34" charset="-122"/>
-                <a:cs typeface="Calibri" pitchFamily="34" charset="-120"/>
+                  <a:srgbClr val="000000"/>
+                </a:solidFill>
+                <a:latin typeface="Meiryo UI" pitchFamily="34" charset="0"/>
+                <a:ea typeface="Meiryo UI" pitchFamily="34" charset="-122"/>
+                <a:cs typeface="Meiryo UI" pitchFamily="34" charset="-120"/>
               </a:rPr>
               <a:t>強みとの接続</a:t>
             </a:r>
@@ -4058,8 +4117,8 @@
         </p:nvSpPr>
         <p:spPr>
           <a:xfrm>
-            <a:off x="4361688" y="4910328"/>
-            <a:ext cx="7406640" cy="1417320"/>
+            <a:off x="4041648" y="4910328"/>
+            <a:ext cx="7680960" cy="1417320"/>
           </a:xfrm>
           <a:prstGeom prst="rect">
             <a:avLst/>
@@ -4078,17 +4137,17 @@
               <a:buNone/>
             </a:pPr>
             <a:r>
-              <a:rPr lang="en-US" sz="1300" dirty="0">
-                <a:solidFill>
-                  <a:srgbClr val="333333"/>
-                </a:solidFill>
-                <a:latin typeface="Calibri" pitchFamily="34" charset="0"/>
-                <a:ea typeface="Calibri" pitchFamily="34" charset="-122"/>
-                <a:cs typeface="Calibri" pitchFamily="34" charset="-120"/>
+              <a:rPr lang="en-US" sz="1400" dirty="0">
+                <a:solidFill>
+                  <a:srgbClr val="000000"/>
+                </a:solidFill>
+                <a:latin typeface="Meiryo UI" pitchFamily="34" charset="0"/>
+                <a:ea typeface="Meiryo UI" pitchFamily="34" charset="-122"/>
+                <a:cs typeface="Meiryo UI" pitchFamily="34" charset="-120"/>
               </a:rPr>
               <a:t>簿記1級で培った会計知識と、りそな銀行インターンで実証済みの「財務諸表を読める」強みを、実務レベルまで鍛え上げるフェーズ。</a:t>
             </a:r>
-            <a:endParaRPr lang="en-US" sz="1300" dirty="0"/>
+            <a:endParaRPr lang="en-US" sz="1400" dirty="0"/>
           </a:p>
         </p:txBody>
       </p:sp>
@@ -4132,16 +4191,23 @@
         </p:nvSpPr>
         <p:spPr>
           <a:xfrm>
-            <a:off x="0" y="0"/>
-            <a:ext cx="3840480" cy="6858000"/>
-          </a:xfrm>
-          <a:prstGeom prst="rect">
-            <a:avLst/>
+            <a:off x="457200" y="457200"/>
+            <a:ext cx="3200400" cy="5943600"/>
+          </a:xfrm>
+          <a:prstGeom prst="roundRect">
+            <a:avLst>
+              <a:gd name="adj" fmla="val 2857"/>
+            </a:avLst>
           </a:prstGeom>
           <a:solidFill>
-            <a:srgbClr val="1E2761"/>
+            <a:srgbClr val="FFFFFF"/>
           </a:solidFill>
-          <a:ln/>
+          <a:ln w="19050">
+            <a:solidFill>
+              <a:srgbClr val="1E2761"/>
+            </a:solidFill>
+            <a:prstDash val="solid"/>
+          </a:ln>
         </p:spPr>
       </p:sp>
       <p:sp>
@@ -4161,9 +4227,14 @@
             </a:avLst>
           </a:prstGeom>
           <a:solidFill>
-            <a:srgbClr val="C9A227"/>
+            <a:srgbClr val="FFFFFF"/>
           </a:solidFill>
-          <a:ln/>
+          <a:ln w="15875">
+            <a:solidFill>
+              <a:srgbClr val="1E2761"/>
+            </a:solidFill>
+            <a:prstDash val="solid"/>
+          </a:ln>
         </p:spPr>
       </p:sp>
       <p:sp>
@@ -4191,17 +4262,17 @@
               <a:buNone/>
             </a:pPr>
             <a:r>
-              <a:rPr lang="en-US" sz="1300" b="1" dirty="0">
-                <a:solidFill>
-                  <a:srgbClr val="FFFFFF"/>
-                </a:solidFill>
-                <a:latin typeface="Calibri" pitchFamily="34" charset="0"/>
-                <a:ea typeface="Calibri" pitchFamily="34" charset="-122"/>
-                <a:cs typeface="Calibri" pitchFamily="34" charset="-120"/>
+              <a:rPr lang="en-US" sz="1400" b="1" dirty="0">
+                <a:solidFill>
+                  <a:srgbClr val="000000"/>
+                </a:solidFill>
+                <a:latin typeface="Meiryo UI" pitchFamily="34" charset="0"/>
+                <a:ea typeface="Meiryo UI" pitchFamily="34" charset="-122"/>
+                <a:cs typeface="Meiryo UI" pitchFamily="34" charset="-120"/>
               </a:rPr>
               <a:t>PHASE 2</a:t>
             </a:r>
-            <a:endParaRPr lang="en-US" sz="1300" dirty="0"/>
+            <a:endParaRPr lang="en-US" sz="1400" dirty="0"/>
           </a:p>
         </p:txBody>
       </p:sp>
@@ -4220,7 +4291,7 @@
             <a:avLst/>
           </a:prstGeom>
           <a:solidFill>
-            <a:srgbClr val="2A3A8C"/>
+            <a:srgbClr val="1E2761"/>
           </a:solidFill>
           <a:ln/>
         </p:spPr>
@@ -4276,11 +4347,11 @@
             <a:r>
               <a:rPr lang="en-US" sz="1400" b="1" dirty="0">
                 <a:solidFill>
-                  <a:srgbClr val="CADCFC"/>
-                </a:solidFill>
-                <a:latin typeface="Calibri" pitchFamily="34" charset="0"/>
-                <a:ea typeface="Calibri" pitchFamily="34" charset="-122"/>
-                <a:cs typeface="Calibri" pitchFamily="34" charset="-120"/>
+                  <a:srgbClr val="000000"/>
+                </a:solidFill>
+                <a:latin typeface="Meiryo UI" pitchFamily="34" charset="0"/>
+                <a:ea typeface="Meiryo UI" pitchFamily="34" charset="-122"/>
+                <a:cs typeface="Meiryo UI" pitchFamily="34" charset="-120"/>
               </a:rPr>
               <a:t>6〜10年目</a:t>
             </a:r>
@@ -4316,17 +4387,17 @@
               <a:buNone/>
             </a:pPr>
             <a:r>
-              <a:rPr lang="en-US" sz="2400" b="1" dirty="0">
-                <a:solidFill>
-                  <a:srgbClr val="FFFFFF"/>
-                </a:solidFill>
-                <a:latin typeface="Cambria" pitchFamily="34" charset="0"/>
-                <a:ea typeface="Cambria" pitchFamily="34" charset="-122"/>
-                <a:cs typeface="Cambria" pitchFamily="34" charset="-120"/>
+              <a:rPr lang="en-US" sz="2200" b="1" dirty="0">
+                <a:solidFill>
+                  <a:srgbClr val="000000"/>
+                </a:solidFill>
+                <a:latin typeface="Meiryo UI" pitchFamily="34" charset="0"/>
+                <a:ea typeface="Meiryo UI" pitchFamily="34" charset="-122"/>
+                <a:cs typeface="Meiryo UI" pitchFamily="34" charset="-120"/>
               </a:rPr>
               <a:t>証券代行・</a:t>
             </a:r>
-            <a:endParaRPr lang="en-US" sz="2400" dirty="0"/>
+            <a:endParaRPr lang="en-US" sz="2200" dirty="0"/>
           </a:p>
           <a:p>
             <a:pPr indent="0" marL="0">
@@ -4336,17 +4407,17 @@
               <a:buNone/>
             </a:pPr>
             <a:r>
-              <a:rPr lang="en-US" sz="2400" b="1" dirty="0">
-                <a:solidFill>
-                  <a:srgbClr val="FFFFFF"/>
-                </a:solidFill>
-                <a:latin typeface="Cambria" pitchFamily="34" charset="0"/>
-                <a:ea typeface="Cambria" pitchFamily="34" charset="-122"/>
-                <a:cs typeface="Cambria" pitchFamily="34" charset="-120"/>
+              <a:rPr lang="en-US" sz="2200" b="1" dirty="0">
+                <a:solidFill>
+                  <a:srgbClr val="000000"/>
+                </a:solidFill>
+                <a:latin typeface="Meiryo UI" pitchFamily="34" charset="0"/>
+                <a:ea typeface="Meiryo UI" pitchFamily="34" charset="-122"/>
+                <a:cs typeface="Meiryo UI" pitchFamily="34" charset="-120"/>
               </a:rPr>
               <a:t>年金信託業務部門</a:t>
             </a:r>
-            <a:endParaRPr lang="en-US" sz="2400" dirty="0"/>
+            <a:endParaRPr lang="en-US" sz="2200" dirty="0"/>
           </a:p>
         </p:txBody>
       </p:sp>
@@ -4358,8 +4429,8 @@
         </p:nvSpPr>
         <p:spPr>
           <a:xfrm>
-            <a:off x="777240" y="5029200"/>
-            <a:ext cx="2788920" cy="1280160"/>
+            <a:off x="777240" y="4937760"/>
+            <a:ext cx="2788920" cy="1371600"/>
           </a:xfrm>
           <a:prstGeom prst="rect">
             <a:avLst/>
@@ -4378,17 +4449,17 @@
               <a:buNone/>
             </a:pPr>
             <a:r>
-              <a:rPr lang="en-US" sz="1250" i="1" dirty="0">
-                <a:solidFill>
-                  <a:srgbClr val="CADCFC"/>
-                </a:solidFill>
-                <a:latin typeface="Calibri" pitchFamily="34" charset="0"/>
-                <a:ea typeface="Calibri" pitchFamily="34" charset="-122"/>
-                <a:cs typeface="Calibri" pitchFamily="34" charset="-120"/>
+              <a:rPr lang="en-US" sz="1400" i="1" dirty="0">
+                <a:solidFill>
+                  <a:srgbClr val="000000"/>
+                </a:solidFill>
+                <a:latin typeface="Meiryo UI" pitchFamily="34" charset="0"/>
+                <a:ea typeface="Meiryo UI" pitchFamily="34" charset="-122"/>
+                <a:cs typeface="Meiryo UI" pitchFamily="34" charset="-120"/>
               </a:rPr>
               <a:t>企業法ゼミで培った法律知識を、信託銀行ならではの専門業務で磨く</a:t>
             </a:r>
-            <a:endParaRPr lang="en-US" sz="1250" dirty="0"/>
+            <a:endParaRPr lang="en-US" sz="1400" dirty="0"/>
           </a:p>
         </p:txBody>
       </p:sp>
@@ -4400,7 +4471,7 @@
         </p:nvSpPr>
         <p:spPr>
           <a:xfrm>
-            <a:off x="4325112" y="685800"/>
+            <a:off x="4005072" y="685800"/>
             <a:ext cx="146304" cy="146304"/>
           </a:xfrm>
           <a:prstGeom prst="roundRect">
@@ -4422,8 +4493,8 @@
         </p:nvSpPr>
         <p:spPr>
           <a:xfrm>
-            <a:off x="4617720" y="612648"/>
-            <a:ext cx="7132320" cy="365760"/>
+            <a:off x="4297680" y="612648"/>
+            <a:ext cx="7406640" cy="365760"/>
           </a:xfrm>
           <a:prstGeom prst="rect">
             <a:avLst/>
@@ -4441,11 +4512,11 @@
             <a:r>
               <a:rPr lang="en-US" sz="1600" b="1" dirty="0">
                 <a:solidFill>
-                  <a:srgbClr val="1E2761"/>
-                </a:solidFill>
-                <a:latin typeface="Calibri" pitchFamily="34" charset="0"/>
-                <a:ea typeface="Calibri" pitchFamily="34" charset="-122"/>
-                <a:cs typeface="Calibri" pitchFamily="34" charset="-120"/>
+                  <a:srgbClr val="000000"/>
+                </a:solidFill>
+                <a:latin typeface="Meiryo UI" pitchFamily="34" charset="0"/>
+                <a:ea typeface="Meiryo UI" pitchFamily="34" charset="-122"/>
+                <a:cs typeface="Meiryo UI" pitchFamily="34" charset="-120"/>
               </a:rPr>
               <a:t>業務内容</a:t>
             </a:r>
@@ -4461,8 +4532,8 @@
         </p:nvSpPr>
         <p:spPr>
           <a:xfrm>
-            <a:off x="4361688" y="1069848"/>
-            <a:ext cx="7406640" cy="1417320"/>
+            <a:off x="4041648" y="1069848"/>
+            <a:ext cx="7680960" cy="1417320"/>
           </a:xfrm>
           <a:prstGeom prst="rect">
             <a:avLst/>
@@ -4481,17 +4552,17 @@
               <a:buNone/>
             </a:pPr>
             <a:r>
-              <a:rPr lang="en-US" sz="1300" dirty="0">
-                <a:solidFill>
-                  <a:srgbClr val="333333"/>
-                </a:solidFill>
-                <a:latin typeface="Calibri" pitchFamily="34" charset="0"/>
-                <a:ea typeface="Calibri" pitchFamily="34" charset="-122"/>
-                <a:cs typeface="Calibri" pitchFamily="34" charset="-120"/>
+              <a:rPr lang="en-US" sz="1400" dirty="0">
+                <a:solidFill>
+                  <a:srgbClr val="000000"/>
+                </a:solidFill>
+                <a:latin typeface="Meiryo UI" pitchFamily="34" charset="0"/>
+                <a:ea typeface="Meiryo UI" pitchFamily="34" charset="-122"/>
+                <a:cs typeface="Meiryo UI" pitchFamily="34" charset="-120"/>
               </a:rPr>
               <a:t>証券代行業務（株主名簿管理、株主総会運営支援、コーポレートガバナンス関連アドバイザリー）または年金信託業務（企業年金の資産運用・給付設計）を担当。いずれも大手信託銀行など一部の会社しか担えない専門領域。</a:t>
             </a:r>
-            <a:endParaRPr lang="en-US" sz="1300" dirty="0"/>
+            <a:endParaRPr lang="en-US" sz="1400" dirty="0"/>
           </a:p>
         </p:txBody>
       </p:sp>
@@ -4503,7 +4574,7 @@
         </p:nvSpPr>
         <p:spPr>
           <a:xfrm>
-            <a:off x="4325112" y="2606040"/>
+            <a:off x="4005072" y="2606040"/>
             <a:ext cx="146304" cy="146304"/>
           </a:xfrm>
           <a:prstGeom prst="roundRect">
@@ -4525,8 +4596,8 @@
         </p:nvSpPr>
         <p:spPr>
           <a:xfrm>
-            <a:off x="4617720" y="2532888"/>
-            <a:ext cx="7132320" cy="365760"/>
+            <a:off x="4297680" y="2532888"/>
+            <a:ext cx="7406640" cy="365760"/>
           </a:xfrm>
           <a:prstGeom prst="rect">
             <a:avLst/>
@@ -4544,11 +4615,11 @@
             <a:r>
               <a:rPr lang="en-US" sz="1600" b="1" dirty="0">
                 <a:solidFill>
-                  <a:srgbClr val="1E2761"/>
-                </a:solidFill>
-                <a:latin typeface="Calibri" pitchFamily="34" charset="0"/>
-                <a:ea typeface="Calibri" pitchFamily="34" charset="-122"/>
-                <a:cs typeface="Calibri" pitchFamily="34" charset="-120"/>
+                  <a:srgbClr val="000000"/>
+                </a:solidFill>
+                <a:latin typeface="Meiryo UI" pitchFamily="34" charset="0"/>
+                <a:ea typeface="Meiryo UI" pitchFamily="34" charset="-122"/>
+                <a:cs typeface="Meiryo UI" pitchFamily="34" charset="-120"/>
               </a:rPr>
               <a:t>身につく力</a:t>
             </a:r>
@@ -4564,8 +4635,8 @@
         </p:nvSpPr>
         <p:spPr>
           <a:xfrm>
-            <a:off x="4361688" y="2990088"/>
-            <a:ext cx="7406640" cy="1417320"/>
+            <a:off x="4041648" y="2990088"/>
+            <a:ext cx="7680960" cy="1417320"/>
           </a:xfrm>
           <a:prstGeom prst="rect">
             <a:avLst/>
@@ -4584,17 +4655,17 @@
               <a:buNone/>
             </a:pPr>
             <a:r>
-              <a:rPr lang="en-US" sz="1300" dirty="0">
-                <a:solidFill>
-                  <a:srgbClr val="333333"/>
-                </a:solidFill>
-                <a:latin typeface="Calibri" pitchFamily="34" charset="0"/>
-                <a:ea typeface="Calibri" pitchFamily="34" charset="-122"/>
-                <a:cs typeface="Calibri" pitchFamily="34" charset="-120"/>
+              <a:rPr lang="en-US" sz="1400" dirty="0">
+                <a:solidFill>
+                  <a:srgbClr val="000000"/>
+                </a:solidFill>
+                <a:latin typeface="Meiryo UI" pitchFamily="34" charset="0"/>
+                <a:ea typeface="Meiryo UI" pitchFamily="34" charset="-122"/>
+                <a:cs typeface="Meiryo UI" pitchFamily="34" charset="-120"/>
               </a:rPr>
               <a:t>会社法・金融商品取引法等の実務知識、法人顧客に対する高度な専門アドバイザリー力。</a:t>
             </a:r>
-            <a:endParaRPr lang="en-US" sz="1300" dirty="0"/>
+            <a:endParaRPr lang="en-US" sz="1400" dirty="0"/>
           </a:p>
         </p:txBody>
       </p:sp>
@@ -4606,7 +4677,7 @@
         </p:nvSpPr>
         <p:spPr>
           <a:xfrm>
-            <a:off x="4325112" y="4526280"/>
+            <a:off x="4005072" y="4526280"/>
             <a:ext cx="146304" cy="146304"/>
           </a:xfrm>
           <a:prstGeom prst="roundRect">
@@ -4628,8 +4699,8 @@
         </p:nvSpPr>
         <p:spPr>
           <a:xfrm>
-            <a:off x="4617720" y="4453128"/>
-            <a:ext cx="7132320" cy="365760"/>
+            <a:off x="4297680" y="4453128"/>
+            <a:ext cx="7406640" cy="365760"/>
           </a:xfrm>
           <a:prstGeom prst="rect">
             <a:avLst/>
@@ -4647,11 +4718,11 @@
             <a:r>
               <a:rPr lang="en-US" sz="1600" b="1" dirty="0">
                 <a:solidFill>
-                  <a:srgbClr val="1E2761"/>
-                </a:solidFill>
-                <a:latin typeface="Calibri" pitchFamily="34" charset="0"/>
-                <a:ea typeface="Calibri" pitchFamily="34" charset="-122"/>
-                <a:cs typeface="Calibri" pitchFamily="34" charset="-120"/>
+                  <a:srgbClr val="000000"/>
+                </a:solidFill>
+                <a:latin typeface="Meiryo UI" pitchFamily="34" charset="0"/>
+                <a:ea typeface="Meiryo UI" pitchFamily="34" charset="-122"/>
+                <a:cs typeface="Meiryo UI" pitchFamily="34" charset="-120"/>
               </a:rPr>
               <a:t>強みとの接続</a:t>
             </a:r>
@@ -4667,8 +4738,8 @@
         </p:nvSpPr>
         <p:spPr>
           <a:xfrm>
-            <a:off x="4361688" y="4910328"/>
-            <a:ext cx="7406640" cy="1417320"/>
+            <a:off x="4041648" y="4910328"/>
+            <a:ext cx="7680960" cy="1417320"/>
           </a:xfrm>
           <a:prstGeom prst="rect">
             <a:avLst/>
@@ -4687,17 +4758,17 @@
               <a:buNone/>
             </a:pPr>
             <a:r>
-              <a:rPr lang="en-US" sz="1300" dirty="0">
-                <a:solidFill>
-                  <a:srgbClr val="333333"/>
-                </a:solidFill>
-                <a:latin typeface="Calibri" pitchFamily="34" charset="0"/>
-                <a:ea typeface="Calibri" pitchFamily="34" charset="-122"/>
-                <a:cs typeface="Calibri" pitchFamily="34" charset="-120"/>
+              <a:rPr lang="en-US" sz="1400" dirty="0">
+                <a:solidFill>
+                  <a:srgbClr val="000000"/>
+                </a:solidFill>
+                <a:latin typeface="Meiryo UI" pitchFamily="34" charset="0"/>
+                <a:ea typeface="Meiryo UI" pitchFamily="34" charset="-122"/>
+                <a:cs typeface="Meiryo UI" pitchFamily="34" charset="-120"/>
               </a:rPr>
               <a:t>中央大学法学部・企業法ゼミで培った法律知識を、信託銀行にしかない業務を通じて実務の専門性に転換するフェーズ。</a:t>
             </a:r>
-            <a:endParaRPr lang="en-US" sz="1300" dirty="0"/>
+            <a:endParaRPr lang="en-US" sz="1400" dirty="0"/>
           </a:p>
         </p:txBody>
       </p:sp>
@@ -4741,16 +4812,23 @@
         </p:nvSpPr>
         <p:spPr>
           <a:xfrm>
-            <a:off x="0" y="0"/>
-            <a:ext cx="3840480" cy="6858000"/>
-          </a:xfrm>
-          <a:prstGeom prst="rect">
-            <a:avLst/>
+            <a:off x="457200" y="457200"/>
+            <a:ext cx="3200400" cy="5943600"/>
+          </a:xfrm>
+          <a:prstGeom prst="roundRect">
+            <a:avLst>
+              <a:gd name="adj" fmla="val 2857"/>
+            </a:avLst>
           </a:prstGeom>
           <a:solidFill>
-            <a:srgbClr val="1E2761"/>
+            <a:srgbClr val="FFFFFF"/>
           </a:solidFill>
-          <a:ln/>
+          <a:ln w="19050">
+            <a:solidFill>
+              <a:srgbClr val="1E2761"/>
+            </a:solidFill>
+            <a:prstDash val="solid"/>
+          </a:ln>
         </p:spPr>
       </p:sp>
       <p:sp>
@@ -4770,9 +4848,14 @@
             </a:avLst>
           </a:prstGeom>
           <a:solidFill>
-            <a:srgbClr val="C9A227"/>
+            <a:srgbClr val="FFFFFF"/>
           </a:solidFill>
-          <a:ln/>
+          <a:ln w="15875">
+            <a:solidFill>
+              <a:srgbClr val="1E2761"/>
+            </a:solidFill>
+            <a:prstDash val="solid"/>
+          </a:ln>
         </p:spPr>
       </p:sp>
       <p:sp>
@@ -4800,17 +4883,17 @@
               <a:buNone/>
             </a:pPr>
             <a:r>
-              <a:rPr lang="en-US" sz="1300" b="1" dirty="0">
-                <a:solidFill>
-                  <a:srgbClr val="FFFFFF"/>
-                </a:solidFill>
-                <a:latin typeface="Calibri" pitchFamily="34" charset="0"/>
-                <a:ea typeface="Calibri" pitchFamily="34" charset="-122"/>
-                <a:cs typeface="Calibri" pitchFamily="34" charset="-120"/>
+              <a:rPr lang="en-US" sz="1400" b="1" dirty="0">
+                <a:solidFill>
+                  <a:srgbClr val="000000"/>
+                </a:solidFill>
+                <a:latin typeface="Meiryo UI" pitchFamily="34" charset="0"/>
+                <a:ea typeface="Meiryo UI" pitchFamily="34" charset="-122"/>
+                <a:cs typeface="Meiryo UI" pitchFamily="34" charset="-120"/>
               </a:rPr>
               <a:t>PHASE 3</a:t>
             </a:r>
-            <a:endParaRPr lang="en-US" sz="1300" dirty="0"/>
+            <a:endParaRPr lang="en-US" sz="1400" dirty="0"/>
           </a:p>
         </p:txBody>
       </p:sp>
@@ -4829,7 +4912,7 @@
             <a:avLst/>
           </a:prstGeom>
           <a:solidFill>
-            <a:srgbClr val="2A3A8C"/>
+            <a:srgbClr val="1E2761"/>
           </a:solidFill>
           <a:ln/>
         </p:spPr>
@@ -4885,11 +4968,11 @@
             <a:r>
               <a:rPr lang="en-US" sz="1400" b="1" dirty="0">
                 <a:solidFill>
-                  <a:srgbClr val="CADCFC"/>
-                </a:solidFill>
-                <a:latin typeface="Calibri" pitchFamily="34" charset="0"/>
-                <a:ea typeface="Calibri" pitchFamily="34" charset="-122"/>
-                <a:cs typeface="Calibri" pitchFamily="34" charset="-120"/>
+                  <a:srgbClr val="000000"/>
+                </a:solidFill>
+                <a:latin typeface="Meiryo UI" pitchFamily="34" charset="0"/>
+                <a:ea typeface="Meiryo UI" pitchFamily="34" charset="-122"/>
+                <a:cs typeface="Meiryo UI" pitchFamily="34" charset="-120"/>
               </a:rPr>
               <a:t>11〜15年目</a:t>
             </a:r>
@@ -4925,17 +5008,17 @@
               <a:buNone/>
             </a:pPr>
             <a:r>
-              <a:rPr lang="en-US" sz="2400" b="1" dirty="0">
-                <a:solidFill>
-                  <a:srgbClr val="FFFFFF"/>
-                </a:solidFill>
-                <a:latin typeface="Cambria" pitchFamily="34" charset="0"/>
-                <a:ea typeface="Cambria" pitchFamily="34" charset="-122"/>
-                <a:cs typeface="Cambria" pitchFamily="34" charset="-120"/>
+              <a:rPr lang="en-US" sz="2200" b="1" dirty="0">
+                <a:solidFill>
+                  <a:srgbClr val="000000"/>
+                </a:solidFill>
+                <a:latin typeface="Meiryo UI" pitchFamily="34" charset="0"/>
+                <a:ea typeface="Meiryo UI" pitchFamily="34" charset="-122"/>
+                <a:cs typeface="Meiryo UI" pitchFamily="34" charset="-120"/>
               </a:rPr>
               <a:t>事業承継・</a:t>
             </a:r>
-            <a:endParaRPr lang="en-US" sz="2400" dirty="0"/>
+            <a:endParaRPr lang="en-US" sz="2200" dirty="0"/>
           </a:p>
           <a:p>
             <a:pPr indent="0" marL="0">
@@ -4945,17 +5028,17 @@
               <a:buNone/>
             </a:pPr>
             <a:r>
-              <a:rPr lang="en-US" sz="2400" b="1" dirty="0">
-                <a:solidFill>
-                  <a:srgbClr val="FFFFFF"/>
-                </a:solidFill>
-                <a:latin typeface="Cambria" pitchFamily="34" charset="0"/>
-                <a:ea typeface="Cambria" pitchFamily="34" charset="-122"/>
-                <a:cs typeface="Cambria" pitchFamily="34" charset="-120"/>
+              <a:rPr lang="en-US" sz="2200" b="1" dirty="0">
+                <a:solidFill>
+                  <a:srgbClr val="000000"/>
+                </a:solidFill>
+                <a:latin typeface="Meiryo UI" pitchFamily="34" charset="0"/>
+                <a:ea typeface="Meiryo UI" pitchFamily="34" charset="-122"/>
+                <a:cs typeface="Meiryo UI" pitchFamily="34" charset="-120"/>
               </a:rPr>
               <a:t>M&amp;Aアドバイザリー</a:t>
             </a:r>
-            <a:endParaRPr lang="en-US" sz="2400" dirty="0"/>
+            <a:endParaRPr lang="en-US" sz="2200" dirty="0"/>
           </a:p>
         </p:txBody>
       </p:sp>
@@ -4967,8 +5050,8 @@
         </p:nvSpPr>
         <p:spPr>
           <a:xfrm>
-            <a:off x="777240" y="5029200"/>
-            <a:ext cx="2788920" cy="1280160"/>
+            <a:off x="777240" y="4937760"/>
+            <a:ext cx="2788920" cy="1371600"/>
           </a:xfrm>
           <a:prstGeom prst="rect">
             <a:avLst/>
@@ -4987,17 +5070,17 @@
               <a:buNone/>
             </a:pPr>
             <a:r>
-              <a:rPr lang="en-US" sz="1250" i="1" dirty="0">
-                <a:solidFill>
-                  <a:srgbClr val="CADCFC"/>
-                </a:solidFill>
-                <a:latin typeface="Calibri" pitchFamily="34" charset="0"/>
-                <a:ea typeface="Calibri" pitchFamily="34" charset="-122"/>
-                <a:cs typeface="Calibri" pitchFamily="34" charset="-120"/>
+              <a:rPr lang="en-US" sz="1400" i="1" dirty="0">
+                <a:solidFill>
+                  <a:srgbClr val="000000"/>
+                </a:solidFill>
+                <a:latin typeface="Meiryo UI" pitchFamily="34" charset="0"/>
+                <a:ea typeface="Meiryo UI" pitchFamily="34" charset="-122"/>
+                <a:cs typeface="Meiryo UI" pitchFamily="34" charset="-120"/>
               </a:rPr>
               <a:t>財務分析力と企業法知識、2つの強みが初めて統合される差別化ポイント</a:t>
             </a:r>
-            <a:endParaRPr lang="en-US" sz="1250" dirty="0"/>
+            <a:endParaRPr lang="en-US" sz="1400" dirty="0"/>
           </a:p>
         </p:txBody>
       </p:sp>
@@ -5009,7 +5092,7 @@
         </p:nvSpPr>
         <p:spPr>
           <a:xfrm>
-            <a:off x="4325112" y="685800"/>
+            <a:off x="4005072" y="685800"/>
             <a:ext cx="146304" cy="146304"/>
           </a:xfrm>
           <a:prstGeom prst="roundRect">
@@ -5031,8 +5114,8 @@
         </p:nvSpPr>
         <p:spPr>
           <a:xfrm>
-            <a:off x="4617720" y="612648"/>
-            <a:ext cx="7132320" cy="365760"/>
+            <a:off x="4297680" y="612648"/>
+            <a:ext cx="7406640" cy="365760"/>
           </a:xfrm>
           <a:prstGeom prst="rect">
             <a:avLst/>
@@ -5050,11 +5133,11 @@
             <a:r>
               <a:rPr lang="en-US" sz="1600" b="1" dirty="0">
                 <a:solidFill>
-                  <a:srgbClr val="1E2761"/>
-                </a:solidFill>
-                <a:latin typeface="Calibri" pitchFamily="34" charset="0"/>
-                <a:ea typeface="Calibri" pitchFamily="34" charset="-122"/>
-                <a:cs typeface="Calibri" pitchFamily="34" charset="-120"/>
+                  <a:srgbClr val="000000"/>
+                </a:solidFill>
+                <a:latin typeface="Meiryo UI" pitchFamily="34" charset="0"/>
+                <a:ea typeface="Meiryo UI" pitchFamily="34" charset="-122"/>
+                <a:cs typeface="Meiryo UI" pitchFamily="34" charset="-120"/>
               </a:rPr>
               <a:t>業務内容</a:t>
             </a:r>
@@ -5070,8 +5153,8 @@
         </p:nvSpPr>
         <p:spPr>
           <a:xfrm>
-            <a:off x="4361688" y="1069848"/>
-            <a:ext cx="7406640" cy="1417320"/>
+            <a:off x="4041648" y="1069848"/>
+            <a:ext cx="7680960" cy="1417320"/>
           </a:xfrm>
           <a:prstGeom prst="rect">
             <a:avLst/>
@@ -5090,17 +5173,17 @@
               <a:buNone/>
             </a:pPr>
             <a:r>
-              <a:rPr lang="en-US" sz="1300" dirty="0">
-                <a:solidFill>
-                  <a:srgbClr val="333333"/>
-                </a:solidFill>
-                <a:latin typeface="Calibri" pitchFamily="34" charset="0"/>
-                <a:ea typeface="Calibri" pitchFamily="34" charset="-122"/>
-                <a:cs typeface="Calibri" pitchFamily="34" charset="-120"/>
+              <a:rPr lang="en-US" sz="1400" dirty="0">
+                <a:solidFill>
+                  <a:srgbClr val="000000"/>
+                </a:solidFill>
+                <a:latin typeface="Meiryo UI" pitchFamily="34" charset="0"/>
+                <a:ea typeface="Meiryo UI" pitchFamily="34" charset="-122"/>
+                <a:cs typeface="Meiryo UI" pitchFamily="34" charset="-120"/>
               </a:rPr>
               <a:t>中小企業オーナーの事業承継設計、M&amp;Aマッチング・助言、遺言信託を組み合わせた資産承継提案など、信託銀行ならではの複合的なソリューションを提供。</a:t>
             </a:r>
-            <a:endParaRPr lang="en-US" sz="1300" dirty="0"/>
+            <a:endParaRPr lang="en-US" sz="1400" dirty="0"/>
           </a:p>
         </p:txBody>
       </p:sp>
@@ -5112,7 +5195,7 @@
         </p:nvSpPr>
         <p:spPr>
           <a:xfrm>
-            <a:off x="4325112" y="2606040"/>
+            <a:off x="4005072" y="2606040"/>
             <a:ext cx="146304" cy="146304"/>
           </a:xfrm>
           <a:prstGeom prst="roundRect">
@@ -5134,8 +5217,8 @@
         </p:nvSpPr>
         <p:spPr>
           <a:xfrm>
-            <a:off x="4617720" y="2532888"/>
-            <a:ext cx="7132320" cy="365760"/>
+            <a:off x="4297680" y="2532888"/>
+            <a:ext cx="7406640" cy="365760"/>
           </a:xfrm>
           <a:prstGeom prst="rect">
             <a:avLst/>
@@ -5153,11 +5236,11 @@
             <a:r>
               <a:rPr lang="en-US" sz="1600" b="1" dirty="0">
                 <a:solidFill>
-                  <a:srgbClr val="1E2761"/>
-                </a:solidFill>
-                <a:latin typeface="Calibri" pitchFamily="34" charset="0"/>
-                <a:ea typeface="Calibri" pitchFamily="34" charset="-122"/>
-                <a:cs typeface="Calibri" pitchFamily="34" charset="-120"/>
+                  <a:srgbClr val="000000"/>
+                </a:solidFill>
+                <a:latin typeface="Meiryo UI" pitchFamily="34" charset="0"/>
+                <a:ea typeface="Meiryo UI" pitchFamily="34" charset="-122"/>
+                <a:cs typeface="Meiryo UI" pitchFamily="34" charset="-120"/>
               </a:rPr>
               <a:t>身につく力</a:t>
             </a:r>
@@ -5173,8 +5256,8 @@
         </p:nvSpPr>
         <p:spPr>
           <a:xfrm>
-            <a:off x="4361688" y="2990088"/>
-            <a:ext cx="7406640" cy="1417320"/>
+            <a:off x="4041648" y="2990088"/>
+            <a:ext cx="7680960" cy="1417320"/>
           </a:xfrm>
           <a:prstGeom prst="rect">
             <a:avLst/>
@@ -5193,17 +5276,17 @@
               <a:buNone/>
             </a:pPr>
             <a:r>
-              <a:rPr lang="en-US" sz="1300" dirty="0">
-                <a:solidFill>
-                  <a:srgbClr val="333333"/>
-                </a:solidFill>
-                <a:latin typeface="Calibri" pitchFamily="34" charset="0"/>
-                <a:ea typeface="Calibri" pitchFamily="34" charset="-122"/>
-                <a:cs typeface="Calibri" pitchFamily="34" charset="-120"/>
+              <a:rPr lang="en-US" sz="1400" dirty="0">
+                <a:solidFill>
+                  <a:srgbClr val="000000"/>
+                </a:solidFill>
+                <a:latin typeface="Meiryo UI" pitchFamily="34" charset="0"/>
+                <a:ea typeface="Meiryo UI" pitchFamily="34" charset="-122"/>
+                <a:cs typeface="Meiryo UI" pitchFamily="34" charset="-120"/>
               </a:rPr>
               <a:t>財務分析力と法務知識を掛け合わせた統合コンサルティング力。経営者との長期的な信頼関係構築力。</a:t>
             </a:r>
-            <a:endParaRPr lang="en-US" sz="1300" dirty="0"/>
+            <a:endParaRPr lang="en-US" sz="1400" dirty="0"/>
           </a:p>
         </p:txBody>
       </p:sp>
@@ -5215,7 +5298,7 @@
         </p:nvSpPr>
         <p:spPr>
           <a:xfrm>
-            <a:off x="4325112" y="4526280"/>
+            <a:off x="4005072" y="4526280"/>
             <a:ext cx="146304" cy="146304"/>
           </a:xfrm>
           <a:prstGeom prst="roundRect">
@@ -5237,8 +5320,8 @@
         </p:nvSpPr>
         <p:spPr>
           <a:xfrm>
-            <a:off x="4617720" y="4453128"/>
-            <a:ext cx="7132320" cy="365760"/>
+            <a:off x="4297680" y="4453128"/>
+            <a:ext cx="7406640" cy="365760"/>
           </a:xfrm>
           <a:prstGeom prst="rect">
             <a:avLst/>
@@ -5256,11 +5339,11 @@
             <a:r>
               <a:rPr lang="en-US" sz="1600" b="1" dirty="0">
                 <a:solidFill>
-                  <a:srgbClr val="1E2761"/>
-                </a:solidFill>
-                <a:latin typeface="Calibri" pitchFamily="34" charset="0"/>
-                <a:ea typeface="Calibri" pitchFamily="34" charset="-122"/>
-                <a:cs typeface="Calibri" pitchFamily="34" charset="-120"/>
+                  <a:srgbClr val="000000"/>
+                </a:solidFill>
+                <a:latin typeface="Meiryo UI" pitchFamily="34" charset="0"/>
+                <a:ea typeface="Meiryo UI" pitchFamily="34" charset="-122"/>
+                <a:cs typeface="Meiryo UI" pitchFamily="34" charset="-120"/>
               </a:rPr>
               <a:t>強みとの接続</a:t>
             </a:r>
@@ -5276,8 +5359,8 @@
         </p:nvSpPr>
         <p:spPr>
           <a:xfrm>
-            <a:off x="4361688" y="4910328"/>
-            <a:ext cx="7406640" cy="1417320"/>
+            <a:off x="4041648" y="4910328"/>
+            <a:ext cx="7680960" cy="1417320"/>
           </a:xfrm>
           <a:prstGeom prst="rect">
             <a:avLst/>
@@ -5296,17 +5379,17 @@
               <a:buNone/>
             </a:pPr>
             <a:r>
-              <a:rPr lang="en-US" sz="1300" dirty="0">
-                <a:solidFill>
-                  <a:srgbClr val="333333"/>
-                </a:solidFill>
-                <a:latin typeface="Calibri" pitchFamily="34" charset="0"/>
-                <a:ea typeface="Calibri" pitchFamily="34" charset="-122"/>
-                <a:cs typeface="Calibri" pitchFamily="34" charset="-120"/>
+              <a:rPr lang="en-US" sz="1400" dirty="0">
+                <a:solidFill>
+                  <a:srgbClr val="000000"/>
+                </a:solidFill>
+                <a:latin typeface="Meiryo UI" pitchFamily="34" charset="0"/>
+                <a:ea typeface="Meiryo UI" pitchFamily="34" charset="-122"/>
+                <a:cs typeface="Meiryo UI" pitchFamily="34" charset="-120"/>
               </a:rPr>
               <a:t>Phase1で鍛えた財務分析力とPhase2で確立した企業法の専門性を統合し、他行にはまねしにくい独自のキャリアポジションを確立するフェーズ。</a:t>
             </a:r>
-            <a:endParaRPr lang="en-US" sz="1300" dirty="0"/>
+            <a:endParaRPr lang="en-US" sz="1400" dirty="0"/>
           </a:p>
         </p:txBody>
       </p:sp>
@@ -5350,16 +5433,23 @@
         </p:nvSpPr>
         <p:spPr>
           <a:xfrm>
-            <a:off x="0" y="0"/>
-            <a:ext cx="3840480" cy="6858000"/>
-          </a:xfrm>
-          <a:prstGeom prst="rect">
-            <a:avLst/>
+            <a:off x="457200" y="457200"/>
+            <a:ext cx="3200400" cy="5943600"/>
+          </a:xfrm>
+          <a:prstGeom prst="roundRect">
+            <a:avLst>
+              <a:gd name="adj" fmla="val 2857"/>
+            </a:avLst>
           </a:prstGeom>
           <a:solidFill>
-            <a:srgbClr val="1E2761"/>
+            <a:srgbClr val="FFFFFF"/>
           </a:solidFill>
-          <a:ln/>
+          <a:ln w="19050">
+            <a:solidFill>
+              <a:srgbClr val="1E2761"/>
+            </a:solidFill>
+            <a:prstDash val="solid"/>
+          </a:ln>
         </p:spPr>
       </p:sp>
       <p:sp>
@@ -5379,9 +5469,14 @@
             </a:avLst>
           </a:prstGeom>
           <a:solidFill>
-            <a:srgbClr val="C9A227"/>
+            <a:srgbClr val="FFFFFF"/>
           </a:solidFill>
-          <a:ln/>
+          <a:ln w="15875">
+            <a:solidFill>
+              <a:srgbClr val="1E2761"/>
+            </a:solidFill>
+            <a:prstDash val="solid"/>
+          </a:ln>
         </p:spPr>
       </p:sp>
       <p:sp>
@@ -5409,17 +5504,17 @@
               <a:buNone/>
             </a:pPr>
             <a:r>
-              <a:rPr lang="en-US" sz="1300" b="1" dirty="0">
-                <a:solidFill>
-                  <a:srgbClr val="FFFFFF"/>
-                </a:solidFill>
-                <a:latin typeface="Calibri" pitchFamily="34" charset="0"/>
-                <a:ea typeface="Calibri" pitchFamily="34" charset="-122"/>
-                <a:cs typeface="Calibri" pitchFamily="34" charset="-120"/>
+              <a:rPr lang="en-US" sz="1400" b="1" dirty="0">
+                <a:solidFill>
+                  <a:srgbClr val="000000"/>
+                </a:solidFill>
+                <a:latin typeface="Meiryo UI" pitchFamily="34" charset="0"/>
+                <a:ea typeface="Meiryo UI" pitchFamily="34" charset="-122"/>
+                <a:cs typeface="Meiryo UI" pitchFamily="34" charset="-120"/>
               </a:rPr>
               <a:t>PHASE 4</a:t>
             </a:r>
-            <a:endParaRPr lang="en-US" sz="1300" dirty="0"/>
+            <a:endParaRPr lang="en-US" sz="1400" dirty="0"/>
           </a:p>
         </p:txBody>
       </p:sp>
@@ -5438,7 +5533,7 @@
             <a:avLst/>
           </a:prstGeom>
           <a:solidFill>
-            <a:srgbClr val="2A3A8C"/>
+            <a:srgbClr val="1E2761"/>
           </a:solidFill>
           <a:ln/>
         </p:spPr>
@@ -5494,11 +5589,11 @@
             <a:r>
               <a:rPr lang="en-US" sz="1400" b="1" dirty="0">
                 <a:solidFill>
-                  <a:srgbClr val="CADCFC"/>
-                </a:solidFill>
-                <a:latin typeface="Calibri" pitchFamily="34" charset="0"/>
-                <a:ea typeface="Calibri" pitchFamily="34" charset="-122"/>
-                <a:cs typeface="Calibri" pitchFamily="34" charset="-120"/>
+                  <a:srgbClr val="000000"/>
+                </a:solidFill>
+                <a:latin typeface="Meiryo UI" pitchFamily="34" charset="0"/>
+                <a:ea typeface="Meiryo UI" pitchFamily="34" charset="-122"/>
+                <a:cs typeface="Meiryo UI" pitchFamily="34" charset="-120"/>
               </a:rPr>
               <a:t>16年目〜</a:t>
             </a:r>
@@ -5534,17 +5629,17 @@
               <a:buNone/>
             </a:pPr>
             <a:r>
-              <a:rPr lang="en-US" sz="2400" b="1" dirty="0">
-                <a:solidFill>
-                  <a:srgbClr val="FFFFFF"/>
-                </a:solidFill>
-                <a:latin typeface="Cambria" pitchFamily="34" charset="0"/>
-                <a:ea typeface="Cambria" pitchFamily="34" charset="-122"/>
-                <a:cs typeface="Cambria" pitchFamily="34" charset="-120"/>
+              <a:rPr lang="en-US" sz="2200" b="1" dirty="0">
+                <a:solidFill>
+                  <a:srgbClr val="000000"/>
+                </a:solidFill>
+                <a:latin typeface="Meiryo UI" pitchFamily="34" charset="0"/>
+                <a:ea typeface="Meiryo UI" pitchFamily="34" charset="-122"/>
+                <a:cs typeface="Meiryo UI" pitchFamily="34" charset="-120"/>
               </a:rPr>
               <a:t>プライベートバンキング／</a:t>
             </a:r>
-            <a:endParaRPr lang="en-US" sz="2400" dirty="0"/>
+            <a:endParaRPr lang="en-US" sz="2200" dirty="0"/>
           </a:p>
           <a:p>
             <a:pPr indent="0" marL="0">
@@ -5554,17 +5649,17 @@
               <a:buNone/>
             </a:pPr>
             <a:r>
-              <a:rPr lang="en-US" sz="2400" b="1" dirty="0">
-                <a:solidFill>
-                  <a:srgbClr val="FFFFFF"/>
-                </a:solidFill>
-                <a:latin typeface="Cambria" pitchFamily="34" charset="0"/>
-                <a:ea typeface="Cambria" pitchFamily="34" charset="-122"/>
-                <a:cs typeface="Cambria" pitchFamily="34" charset="-120"/>
+              <a:rPr lang="en-US" sz="2200" b="1" dirty="0">
+                <a:solidFill>
+                  <a:srgbClr val="000000"/>
+                </a:solidFill>
+                <a:latin typeface="Meiryo UI" pitchFamily="34" charset="0"/>
+                <a:ea typeface="Meiryo UI" pitchFamily="34" charset="-122"/>
+                <a:cs typeface="Meiryo UI" pitchFamily="34" charset="-120"/>
               </a:rPr>
               <a:t>資産運用会社</a:t>
             </a:r>
-            <a:endParaRPr lang="en-US" sz="2400" dirty="0"/>
+            <a:endParaRPr lang="en-US" sz="2200" dirty="0"/>
           </a:p>
         </p:txBody>
       </p:sp>
@@ -5576,8 +5671,8 @@
         </p:nvSpPr>
         <p:spPr>
           <a:xfrm>
-            <a:off x="777240" y="5029200"/>
-            <a:ext cx="2788920" cy="1280160"/>
+            <a:off x="777240" y="4937760"/>
+            <a:ext cx="2788920" cy="1371600"/>
           </a:xfrm>
           <a:prstGeom prst="rect">
             <a:avLst/>
@@ -5596,17 +5691,17 @@
               <a:buNone/>
             </a:pPr>
             <a:r>
-              <a:rPr lang="en-US" sz="1250" i="1" dirty="0">
-                <a:solidFill>
-                  <a:srgbClr val="CADCFC"/>
-                </a:solidFill>
-                <a:latin typeface="Calibri" pitchFamily="34" charset="0"/>
-                <a:ea typeface="Calibri" pitchFamily="34" charset="-122"/>
-                <a:cs typeface="Calibri" pitchFamily="34" charset="-120"/>
+              <a:rPr lang="en-US" sz="1400" i="1" dirty="0">
+                <a:solidFill>
+                  <a:srgbClr val="000000"/>
+                </a:solidFill>
+                <a:latin typeface="Meiryo UI" pitchFamily="34" charset="0"/>
+                <a:ea typeface="Meiryo UI" pitchFamily="34" charset="-122"/>
+                <a:cs typeface="Meiryo UI" pitchFamily="34" charset="-120"/>
               </a:rPr>
               <a:t>顧客の資産・企業のライフサイクル全体を俯瞰する集大成のステージ</a:t>
             </a:r>
-            <a:endParaRPr lang="en-US" sz="1250" dirty="0"/>
+            <a:endParaRPr lang="en-US" sz="1400" dirty="0"/>
           </a:p>
         </p:txBody>
       </p:sp>
@@ -5618,7 +5713,7 @@
         </p:nvSpPr>
         <p:spPr>
           <a:xfrm>
-            <a:off x="4325112" y="685800"/>
+            <a:off x="4005072" y="685800"/>
             <a:ext cx="146304" cy="146304"/>
           </a:xfrm>
           <a:prstGeom prst="roundRect">
@@ -5640,8 +5735,8 @@
         </p:nvSpPr>
         <p:spPr>
           <a:xfrm>
-            <a:off x="4617720" y="612648"/>
-            <a:ext cx="7132320" cy="365760"/>
+            <a:off x="4297680" y="612648"/>
+            <a:ext cx="7406640" cy="365760"/>
           </a:xfrm>
           <a:prstGeom prst="rect">
             <a:avLst/>
@@ -5659,11 +5754,11 @@
             <a:r>
               <a:rPr lang="en-US" sz="1600" b="1" dirty="0">
                 <a:solidFill>
-                  <a:srgbClr val="1E2761"/>
-                </a:solidFill>
-                <a:latin typeface="Calibri" pitchFamily="34" charset="0"/>
-                <a:ea typeface="Calibri" pitchFamily="34" charset="-122"/>
-                <a:cs typeface="Calibri" pitchFamily="34" charset="-120"/>
+                  <a:srgbClr val="000000"/>
+                </a:solidFill>
+                <a:latin typeface="Meiryo UI" pitchFamily="34" charset="0"/>
+                <a:ea typeface="Meiryo UI" pitchFamily="34" charset="-122"/>
+                <a:cs typeface="Meiryo UI" pitchFamily="34" charset="-120"/>
               </a:rPr>
               <a:t>業務内容</a:t>
             </a:r>
@@ -5679,8 +5774,8 @@
         </p:nvSpPr>
         <p:spPr>
           <a:xfrm>
-            <a:off x="4361688" y="1069848"/>
-            <a:ext cx="7406640" cy="1417320"/>
+            <a:off x="4041648" y="1069848"/>
+            <a:ext cx="7680960" cy="1417320"/>
           </a:xfrm>
           <a:prstGeom prst="rect">
             <a:avLst/>
@@ -5699,17 +5794,17 @@
               <a:buNone/>
             </a:pPr>
             <a:r>
-              <a:rPr lang="en-US" sz="1300" dirty="0">
-                <a:solidFill>
-                  <a:srgbClr val="333333"/>
-                </a:solidFill>
-                <a:latin typeface="Calibri" pitchFamily="34" charset="0"/>
-                <a:ea typeface="Calibri" pitchFamily="34" charset="-122"/>
-                <a:cs typeface="Calibri" pitchFamily="34" charset="-120"/>
+              <a:rPr lang="en-US" sz="1400" dirty="0">
+                <a:solidFill>
+                  <a:srgbClr val="000000"/>
+                </a:solidFill>
+                <a:latin typeface="Meiryo UI" pitchFamily="34" charset="0"/>
+                <a:ea typeface="Meiryo UI" pitchFamily="34" charset="-122"/>
+                <a:cs typeface="Meiryo UI" pitchFamily="34" charset="-120"/>
               </a:rPr>
               <a:t>富裕層・オーナー経営者に対する資産運用・資産承継・事業承継を統合的にサポートする最上流のコンサルティング、またはグループ資産運用会社への出向によるアセットマネジメント業務。</a:t>
             </a:r>
-            <a:endParaRPr lang="en-US" sz="1300" dirty="0"/>
+            <a:endParaRPr lang="en-US" sz="1400" dirty="0"/>
           </a:p>
         </p:txBody>
       </p:sp>
@@ -5721,7 +5816,7 @@
         </p:nvSpPr>
         <p:spPr>
           <a:xfrm>
-            <a:off x="4325112" y="2606040"/>
+            <a:off x="4005072" y="2606040"/>
             <a:ext cx="146304" cy="146304"/>
           </a:xfrm>
           <a:prstGeom prst="roundRect">
@@ -5743,8 +5838,8 @@
         </p:nvSpPr>
         <p:spPr>
           <a:xfrm>
-            <a:off x="4617720" y="2532888"/>
-            <a:ext cx="7132320" cy="365760"/>
+            <a:off x="4297680" y="2532888"/>
+            <a:ext cx="7406640" cy="365760"/>
           </a:xfrm>
           <a:prstGeom prst="rect">
             <a:avLst/>
@@ -5762,11 +5857,11 @@
             <a:r>
               <a:rPr lang="en-US" sz="1600" b="1" dirty="0">
                 <a:solidFill>
-                  <a:srgbClr val="1E2761"/>
-                </a:solidFill>
-                <a:latin typeface="Calibri" pitchFamily="34" charset="0"/>
-                <a:ea typeface="Calibri" pitchFamily="34" charset="-122"/>
-                <a:cs typeface="Calibri" pitchFamily="34" charset="-120"/>
+                  <a:srgbClr val="000000"/>
+                </a:solidFill>
+                <a:latin typeface="Meiryo UI" pitchFamily="34" charset="0"/>
+                <a:ea typeface="Meiryo UI" pitchFamily="34" charset="-122"/>
+                <a:cs typeface="Meiryo UI" pitchFamily="34" charset="-120"/>
               </a:rPr>
               <a:t>身につく力</a:t>
             </a:r>
@@ -5782,8 +5877,8 @@
         </p:nvSpPr>
         <p:spPr>
           <a:xfrm>
-            <a:off x="4361688" y="2990088"/>
-            <a:ext cx="7406640" cy="1417320"/>
+            <a:off x="4041648" y="2990088"/>
+            <a:ext cx="7680960" cy="1417320"/>
           </a:xfrm>
           <a:prstGeom prst="rect">
             <a:avLst/>
@@ -5802,17 +5897,17 @@
               <a:buNone/>
             </a:pPr>
             <a:r>
-              <a:rPr lang="en-US" sz="1300" dirty="0">
-                <a:solidFill>
-                  <a:srgbClr val="333333"/>
-                </a:solidFill>
-                <a:latin typeface="Calibri" pitchFamily="34" charset="0"/>
-                <a:ea typeface="Calibri" pitchFamily="34" charset="-122"/>
-                <a:cs typeface="Calibri" pitchFamily="34" charset="-120"/>
+              <a:rPr lang="en-US" sz="1400" dirty="0">
+                <a:solidFill>
+                  <a:srgbClr val="000000"/>
+                </a:solidFill>
+                <a:latin typeface="Meiryo UI" pitchFamily="34" charset="0"/>
+                <a:ea typeface="Meiryo UI" pitchFamily="34" charset="-122"/>
+                <a:cs typeface="Meiryo UI" pitchFamily="34" charset="-120"/>
               </a:rPr>
               <a:t>顧客の一生涯・企業の世代交代までを見通す視座と、社内外の専門家を束ねる統括力。</a:t>
             </a:r>
-            <a:endParaRPr lang="en-US" sz="1300" dirty="0"/>
+            <a:endParaRPr lang="en-US" sz="1400" dirty="0"/>
           </a:p>
         </p:txBody>
       </p:sp>
@@ -5824,7 +5919,7 @@
         </p:nvSpPr>
         <p:spPr>
           <a:xfrm>
-            <a:off x="4325112" y="4526280"/>
+            <a:off x="4005072" y="4526280"/>
             <a:ext cx="146304" cy="146304"/>
           </a:xfrm>
           <a:prstGeom prst="roundRect">
@@ -5846,8 +5941,8 @@
         </p:nvSpPr>
         <p:spPr>
           <a:xfrm>
-            <a:off x="4617720" y="4453128"/>
-            <a:ext cx="7132320" cy="365760"/>
+            <a:off x="4297680" y="4453128"/>
+            <a:ext cx="7406640" cy="365760"/>
           </a:xfrm>
           <a:prstGeom prst="rect">
             <a:avLst/>
@@ -5865,11 +5960,11 @@
             <a:r>
               <a:rPr lang="en-US" sz="1600" b="1" dirty="0">
                 <a:solidFill>
-                  <a:srgbClr val="1E2761"/>
-                </a:solidFill>
-                <a:latin typeface="Calibri" pitchFamily="34" charset="0"/>
-                <a:ea typeface="Calibri" pitchFamily="34" charset="-122"/>
-                <a:cs typeface="Calibri" pitchFamily="34" charset="-120"/>
+                  <a:srgbClr val="000000"/>
+                </a:solidFill>
+                <a:latin typeface="Meiryo UI" pitchFamily="34" charset="0"/>
+                <a:ea typeface="Meiryo UI" pitchFamily="34" charset="-122"/>
+                <a:cs typeface="Meiryo UI" pitchFamily="34" charset="-120"/>
               </a:rPr>
               <a:t>強みとの接続</a:t>
             </a:r>
@@ -5885,8 +5980,8 @@
         </p:nvSpPr>
         <p:spPr>
           <a:xfrm>
-            <a:off x="4361688" y="4910328"/>
-            <a:ext cx="7406640" cy="1417320"/>
+            <a:off x="4041648" y="4910328"/>
+            <a:ext cx="7680960" cy="1417320"/>
           </a:xfrm>
           <a:prstGeom prst="rect">
             <a:avLst/>
@@ -5905,17 +6000,17 @@
               <a:buNone/>
             </a:pPr>
             <a:r>
-              <a:rPr lang="en-US" sz="1300" dirty="0">
-                <a:solidFill>
-                  <a:srgbClr val="333333"/>
-                </a:solidFill>
-                <a:latin typeface="Calibri" pitchFamily="34" charset="0"/>
-                <a:ea typeface="Calibri" pitchFamily="34" charset="-122"/>
-                <a:cs typeface="Calibri" pitchFamily="34" charset="-120"/>
+              <a:rPr lang="en-US" sz="1400" dirty="0">
+                <a:solidFill>
+                  <a:srgbClr val="000000"/>
+                </a:solidFill>
+                <a:latin typeface="Meiryo UI" pitchFamily="34" charset="0"/>
+                <a:ea typeface="Meiryo UI" pitchFamily="34" charset="-122"/>
+                <a:cs typeface="Meiryo UI" pitchFamily="34" charset="-120"/>
               </a:rPr>
               <a:t>財務分析力・企業法知識・PDCAで磨いた改善力、これまで積み上げた全ての強みを統合し、顧客との長期的な信頼関係を築く集大成のポジション。</a:t>
             </a:r>
-            <a:endParaRPr lang="en-US" sz="1300" dirty="0"/>
+            <a:endParaRPr lang="en-US" sz="1400" dirty="0"/>
           </a:p>
         </p:txBody>
       </p:sp>
@@ -5933,7 +6028,7 @@
     <p:bg>
       <p:bgPr>
         <a:solidFill>
-          <a:srgbClr val="1E2761"/>
+          <a:srgbClr val="FFFFFF"/>
         </a:solidFill>
       </p:bgPr>
     </p:bg>
@@ -5978,11 +6073,11 @@
             <a:r>
               <a:rPr lang="en-US" sz="3000" b="1" dirty="0">
                 <a:solidFill>
-                  <a:srgbClr val="FFFFFF"/>
-                </a:solidFill>
-                <a:latin typeface="Cambria" pitchFamily="34" charset="0"/>
-                <a:ea typeface="Cambria" pitchFamily="34" charset="-122"/>
-                <a:cs typeface="Cambria" pitchFamily="34" charset="-120"/>
+                  <a:srgbClr val="000000"/>
+                </a:solidFill>
+                <a:latin typeface="Meiryo UI" pitchFamily="34" charset="0"/>
+                <a:ea typeface="Meiryo UI" pitchFamily="34" charset="-122"/>
+                <a:cs typeface="Meiryo UI" pitchFamily="34" charset="-120"/>
               </a:rPr>
               <a:t>まとめ：強みを掛け算するキャリア</a:t>
             </a:r>
@@ -6017,11 +6112,11 @@
             <a:r>
               <a:rPr lang="en-US" sz="1400" dirty="0">
                 <a:solidFill>
-                  <a:srgbClr val="CADCFC"/>
-                </a:solidFill>
-                <a:latin typeface="Calibri" pitchFamily="34" charset="0"/>
-                <a:ea typeface="Calibri" pitchFamily="34" charset="-122"/>
-                <a:cs typeface="Calibri" pitchFamily="34" charset="-120"/>
+                  <a:srgbClr val="000000"/>
+                </a:solidFill>
+                <a:latin typeface="Meiryo UI" pitchFamily="34" charset="0"/>
+                <a:ea typeface="Meiryo UI" pitchFamily="34" charset="-122"/>
+                <a:cs typeface="Meiryo UI" pitchFamily="34" charset="-120"/>
               </a:rPr>
               <a:t>財務分析力と企業法知識を、直列でなく段階的に掛け合わせていくことで、信託銀行ならではの独自ポジションに到達するモデルです。</a:t>
             </a:r>
@@ -6038,17 +6133,22 @@
         <p:spPr>
           <a:xfrm>
             <a:off x="640080" y="1965960"/>
-            <a:ext cx="2468880" cy="1417320"/>
+            <a:ext cx="2468880" cy="1554480"/>
           </a:xfrm>
           <a:prstGeom prst="roundRect">
             <a:avLst>
-              <a:gd name="adj" fmla="val 6452"/>
+              <a:gd name="adj" fmla="val 5882"/>
             </a:avLst>
           </a:prstGeom>
           <a:solidFill>
-            <a:srgbClr val="2A3A8C"/>
+            <a:srgbClr val="FFFFFF"/>
           </a:solidFill>
-          <a:ln/>
+          <a:ln w="12700">
+            <a:solidFill>
+              <a:srgbClr val="D0D5DD"/>
+            </a:solidFill>
+            <a:prstDash val="solid"/>
+          </a:ln>
         </p:spPr>
       </p:sp>
       <p:sp>
@@ -6076,17 +6176,17 @@
               <a:buNone/>
             </a:pPr>
             <a:r>
-              <a:rPr lang="en-US" sz="1100" b="1" dirty="0">
-                <a:solidFill>
-                  <a:srgbClr val="C9A227"/>
-                </a:solidFill>
-                <a:latin typeface="Calibri" pitchFamily="34" charset="0"/>
-                <a:ea typeface="Calibri" pitchFamily="34" charset="-122"/>
-                <a:cs typeface="Calibri" pitchFamily="34" charset="-120"/>
+              <a:rPr lang="en-US" sz="1400" b="1" dirty="0">
+                <a:solidFill>
+                  <a:srgbClr val="000000"/>
+                </a:solidFill>
+                <a:latin typeface="Meiryo UI" pitchFamily="34" charset="0"/>
+                <a:ea typeface="Meiryo UI" pitchFamily="34" charset="-122"/>
+                <a:cs typeface="Meiryo UI" pitchFamily="34" charset="-120"/>
               </a:rPr>
               <a:t>Phase 1　入行〜5年目</a:t>
             </a:r>
-            <a:endParaRPr lang="en-US" sz="1100" dirty="0"/>
+            <a:endParaRPr lang="en-US" sz="1400" dirty="0"/>
           </a:p>
         </p:txBody>
       </p:sp>
@@ -6098,8 +6198,8 @@
         </p:nvSpPr>
         <p:spPr>
           <a:xfrm>
-            <a:off x="804672" y="2423160"/>
-            <a:ext cx="2139696" cy="868680"/>
+            <a:off x="804672" y="2468880"/>
+            <a:ext cx="2139696" cy="914400"/>
           </a:xfrm>
           <a:prstGeom prst="rect">
             <a:avLst/>
@@ -6118,17 +6218,17 @@
               <a:buNone/>
             </a:pPr>
             <a:r>
-              <a:rPr lang="en-US" sz="1300" b="1" dirty="0">
-                <a:solidFill>
-                  <a:srgbClr val="FFFFFF"/>
-                </a:solidFill>
-                <a:latin typeface="Calibri" pitchFamily="34" charset="0"/>
-                <a:ea typeface="Calibri" pitchFamily="34" charset="-122"/>
-                <a:cs typeface="Calibri" pitchFamily="34" charset="-120"/>
+              <a:rPr lang="en-US" sz="1400" b="1" dirty="0">
+                <a:solidFill>
+                  <a:srgbClr val="000000"/>
+                </a:solidFill>
+                <a:latin typeface="Meiryo UI" pitchFamily="34" charset="0"/>
+                <a:ea typeface="Meiryo UI" pitchFamily="34" charset="-122"/>
+                <a:cs typeface="Meiryo UI" pitchFamily="34" charset="-120"/>
               </a:rPr>
               <a:t>法人業務部門</a:t>
             </a:r>
-            <a:endParaRPr lang="en-US" sz="1300" dirty="0"/>
+            <a:endParaRPr lang="en-US" sz="1400" dirty="0"/>
           </a:p>
           <a:p>
             <a:pPr indent="0" marL="0">
@@ -6138,39 +6238,37 @@
               <a:buNone/>
             </a:pPr>
             <a:r>
-              <a:rPr lang="en-US" sz="1300" b="1" dirty="0">
-                <a:solidFill>
-                  <a:srgbClr val="FFFFFF"/>
-                </a:solidFill>
-                <a:latin typeface="Calibri" pitchFamily="34" charset="0"/>
-                <a:ea typeface="Calibri" pitchFamily="34" charset="-122"/>
-                <a:cs typeface="Calibri" pitchFamily="34" charset="-120"/>
+              <a:rPr lang="en-US" sz="1400" b="1" dirty="0">
+                <a:solidFill>
+                  <a:srgbClr val="000000"/>
+                </a:solidFill>
+                <a:latin typeface="Meiryo UI" pitchFamily="34" charset="0"/>
+                <a:ea typeface="Meiryo UI" pitchFamily="34" charset="-122"/>
+                <a:cs typeface="Meiryo UI" pitchFamily="34" charset="-120"/>
               </a:rPr>
               <a:t>（法人融資・法人渉外）</a:t>
             </a:r>
-            <a:endParaRPr lang="en-US" sz="1300" dirty="0"/>
+            <a:endParaRPr lang="en-US" sz="1400" dirty="0"/>
           </a:p>
         </p:txBody>
       </p:sp>
       <p:pic>
         <p:nvPicPr>
-          <p:cNvPr id="7" name="Image 0" descr="icon_arrow.png">    </p:cNvPr>
+          <p:cNvPr id="7" name="Image 0" descr="icon_arrow_dark.png">    </p:cNvPr>
           <p:cNvPicPr>
             <a:picLocks noChangeAspect="1"/>
           </p:cNvPicPr>
           <p:nvPr/>
         </p:nvPicPr>
         <p:blipFill>
-          <a:blip r:embed="rId1">
-            <a:alphaModFix amt="75000"/>
-          </a:blip>
+          <a:blip r:embed="rId1"/>
           <a:stretch>
             <a:fillRect/>
           </a:stretch>
         </p:blipFill>
         <p:spPr>
           <a:xfrm>
-            <a:off x="3127248" y="2546604"/>
+            <a:off x="3127248" y="2615184"/>
             <a:ext cx="219456" cy="256032"/>
           </a:xfrm>
           <a:prstGeom prst="rect">
@@ -6187,17 +6285,22 @@
         <p:spPr>
           <a:xfrm>
             <a:off x="3364992" y="1965960"/>
-            <a:ext cx="2468880" cy="1417320"/>
+            <a:ext cx="2468880" cy="1554480"/>
           </a:xfrm>
           <a:prstGeom prst="roundRect">
             <a:avLst>
-              <a:gd name="adj" fmla="val 6452"/>
+              <a:gd name="adj" fmla="val 5882"/>
             </a:avLst>
           </a:prstGeom>
           <a:solidFill>
-            <a:srgbClr val="2A3A8C"/>
+            <a:srgbClr val="FFFFFF"/>
           </a:solidFill>
-          <a:ln/>
+          <a:ln w="12700">
+            <a:solidFill>
+              <a:srgbClr val="D0D5DD"/>
+            </a:solidFill>
+            <a:prstDash val="solid"/>
+          </a:ln>
         </p:spPr>
       </p:sp>
       <p:sp>
@@ -6225,17 +6328,17 @@
               <a:buNone/>
             </a:pPr>
             <a:r>
-              <a:rPr lang="en-US" sz="1100" b="1" dirty="0">
-                <a:solidFill>
-                  <a:srgbClr val="C9A227"/>
-                </a:solidFill>
-                <a:latin typeface="Calibri" pitchFamily="34" charset="0"/>
-                <a:ea typeface="Calibri" pitchFamily="34" charset="-122"/>
-                <a:cs typeface="Calibri" pitchFamily="34" charset="-120"/>
+              <a:rPr lang="en-US" sz="1400" b="1" dirty="0">
+                <a:solidFill>
+                  <a:srgbClr val="000000"/>
+                </a:solidFill>
+                <a:latin typeface="Meiryo UI" pitchFamily="34" charset="0"/>
+                <a:ea typeface="Meiryo UI" pitchFamily="34" charset="-122"/>
+                <a:cs typeface="Meiryo UI" pitchFamily="34" charset="-120"/>
               </a:rPr>
               <a:t>Phase 2　6〜10年目</a:t>
             </a:r>
-            <a:endParaRPr lang="en-US" sz="1100" dirty="0"/>
+            <a:endParaRPr lang="en-US" sz="1400" dirty="0"/>
           </a:p>
         </p:txBody>
       </p:sp>
@@ -6247,8 +6350,8 @@
         </p:nvSpPr>
         <p:spPr>
           <a:xfrm>
-            <a:off x="3529584" y="2423160"/>
-            <a:ext cx="2139696" cy="868680"/>
+            <a:off x="3529584" y="2468880"/>
+            <a:ext cx="2139696" cy="914400"/>
           </a:xfrm>
           <a:prstGeom prst="rect">
             <a:avLst/>
@@ -6267,17 +6370,17 @@
               <a:buNone/>
             </a:pPr>
             <a:r>
-              <a:rPr lang="en-US" sz="1300" b="1" dirty="0">
-                <a:solidFill>
-                  <a:srgbClr val="FFFFFF"/>
-                </a:solidFill>
-                <a:latin typeface="Calibri" pitchFamily="34" charset="0"/>
-                <a:ea typeface="Calibri" pitchFamily="34" charset="-122"/>
-                <a:cs typeface="Calibri" pitchFamily="34" charset="-120"/>
+              <a:rPr lang="en-US" sz="1400" b="1" dirty="0">
+                <a:solidFill>
+                  <a:srgbClr val="000000"/>
+                </a:solidFill>
+                <a:latin typeface="Meiryo UI" pitchFamily="34" charset="0"/>
+                <a:ea typeface="Meiryo UI" pitchFamily="34" charset="-122"/>
+                <a:cs typeface="Meiryo UI" pitchFamily="34" charset="-120"/>
               </a:rPr>
               <a:t>証券代行・</a:t>
             </a:r>
-            <a:endParaRPr lang="en-US" sz="1300" dirty="0"/>
+            <a:endParaRPr lang="en-US" sz="1400" dirty="0"/>
           </a:p>
           <a:p>
             <a:pPr indent="0" marL="0">
@@ -6287,39 +6390,37 @@
               <a:buNone/>
             </a:pPr>
             <a:r>
-              <a:rPr lang="en-US" sz="1300" b="1" dirty="0">
-                <a:solidFill>
-                  <a:srgbClr val="FFFFFF"/>
-                </a:solidFill>
-                <a:latin typeface="Calibri" pitchFamily="34" charset="0"/>
-                <a:ea typeface="Calibri" pitchFamily="34" charset="-122"/>
-                <a:cs typeface="Calibri" pitchFamily="34" charset="-120"/>
+              <a:rPr lang="en-US" sz="1400" b="1" dirty="0">
+                <a:solidFill>
+                  <a:srgbClr val="000000"/>
+                </a:solidFill>
+                <a:latin typeface="Meiryo UI" pitchFamily="34" charset="0"/>
+                <a:ea typeface="Meiryo UI" pitchFamily="34" charset="-122"/>
+                <a:cs typeface="Meiryo UI" pitchFamily="34" charset="-120"/>
               </a:rPr>
               <a:t>年金信託業務部門</a:t>
             </a:r>
-            <a:endParaRPr lang="en-US" sz="1300" dirty="0"/>
+            <a:endParaRPr lang="en-US" sz="1400" dirty="0"/>
           </a:p>
         </p:txBody>
       </p:sp>
       <p:pic>
         <p:nvPicPr>
-          <p:cNvPr id="11" name="Image 1" descr="icon_arrow.png">    </p:cNvPr>
+          <p:cNvPr id="11" name="Image 1" descr="icon_arrow_dark.png">    </p:cNvPr>
           <p:cNvPicPr>
             <a:picLocks noChangeAspect="1"/>
           </p:cNvPicPr>
           <p:nvPr/>
         </p:nvPicPr>
         <p:blipFill>
-          <a:blip r:embed="rId2">
-            <a:alphaModFix amt="75000"/>
-          </a:blip>
+          <a:blip r:embed="rId2"/>
           <a:stretch>
             <a:fillRect/>
           </a:stretch>
         </p:blipFill>
         <p:spPr>
           <a:xfrm>
-            <a:off x="5852160" y="2546604"/>
+            <a:off x="5852160" y="2615184"/>
             <a:ext cx="219456" cy="256032"/>
           </a:xfrm>
           <a:prstGeom prst="rect">
@@ -6336,17 +6437,22 @@
         <p:spPr>
           <a:xfrm>
             <a:off x="6089904" y="1965960"/>
-            <a:ext cx="2468880" cy="1417320"/>
+            <a:ext cx="2468880" cy="1554480"/>
           </a:xfrm>
           <a:prstGeom prst="roundRect">
             <a:avLst>
-              <a:gd name="adj" fmla="val 6452"/>
+              <a:gd name="adj" fmla="val 5882"/>
             </a:avLst>
           </a:prstGeom>
           <a:solidFill>
-            <a:srgbClr val="2A3A8C"/>
+            <a:srgbClr val="FFFFFF"/>
           </a:solidFill>
-          <a:ln/>
+          <a:ln w="12700">
+            <a:solidFill>
+              <a:srgbClr val="D0D5DD"/>
+            </a:solidFill>
+            <a:prstDash val="solid"/>
+          </a:ln>
         </p:spPr>
       </p:sp>
       <p:sp>
@@ -6374,17 +6480,17 @@
               <a:buNone/>
             </a:pPr>
             <a:r>
-              <a:rPr lang="en-US" sz="1100" b="1" dirty="0">
-                <a:solidFill>
-                  <a:srgbClr val="C9A227"/>
-                </a:solidFill>
-                <a:latin typeface="Calibri" pitchFamily="34" charset="0"/>
-                <a:ea typeface="Calibri" pitchFamily="34" charset="-122"/>
-                <a:cs typeface="Calibri" pitchFamily="34" charset="-120"/>
+              <a:rPr lang="en-US" sz="1400" b="1" dirty="0">
+                <a:solidFill>
+                  <a:srgbClr val="000000"/>
+                </a:solidFill>
+                <a:latin typeface="Meiryo UI" pitchFamily="34" charset="0"/>
+                <a:ea typeface="Meiryo UI" pitchFamily="34" charset="-122"/>
+                <a:cs typeface="Meiryo UI" pitchFamily="34" charset="-120"/>
               </a:rPr>
               <a:t>Phase 3　11〜15年目</a:t>
             </a:r>
-            <a:endParaRPr lang="en-US" sz="1100" dirty="0"/>
+            <a:endParaRPr lang="en-US" sz="1400" dirty="0"/>
           </a:p>
         </p:txBody>
       </p:sp>
@@ -6396,8 +6502,8 @@
         </p:nvSpPr>
         <p:spPr>
           <a:xfrm>
-            <a:off x="6254496" y="2423160"/>
-            <a:ext cx="2139696" cy="868680"/>
+            <a:off x="6254496" y="2468880"/>
+            <a:ext cx="2139696" cy="914400"/>
           </a:xfrm>
           <a:prstGeom prst="rect">
             <a:avLst/>
@@ -6416,17 +6522,17 @@
               <a:buNone/>
             </a:pPr>
             <a:r>
-              <a:rPr lang="en-US" sz="1300" b="1" dirty="0">
-                <a:solidFill>
-                  <a:srgbClr val="FFFFFF"/>
-                </a:solidFill>
-                <a:latin typeface="Calibri" pitchFamily="34" charset="0"/>
-                <a:ea typeface="Calibri" pitchFamily="34" charset="-122"/>
-                <a:cs typeface="Calibri" pitchFamily="34" charset="-120"/>
+              <a:rPr lang="en-US" sz="1400" b="1" dirty="0">
+                <a:solidFill>
+                  <a:srgbClr val="000000"/>
+                </a:solidFill>
+                <a:latin typeface="Meiryo UI" pitchFamily="34" charset="0"/>
+                <a:ea typeface="Meiryo UI" pitchFamily="34" charset="-122"/>
+                <a:cs typeface="Meiryo UI" pitchFamily="34" charset="-120"/>
               </a:rPr>
               <a:t>事業承継・</a:t>
             </a:r>
-            <a:endParaRPr lang="en-US" sz="1300" dirty="0"/>
+            <a:endParaRPr lang="en-US" sz="1400" dirty="0"/>
           </a:p>
           <a:p>
             <a:pPr indent="0" marL="0">
@@ -6436,39 +6542,37 @@
               <a:buNone/>
             </a:pPr>
             <a:r>
-              <a:rPr lang="en-US" sz="1300" b="1" dirty="0">
-                <a:solidFill>
-                  <a:srgbClr val="FFFFFF"/>
-                </a:solidFill>
-                <a:latin typeface="Calibri" pitchFamily="34" charset="0"/>
-                <a:ea typeface="Calibri" pitchFamily="34" charset="-122"/>
-                <a:cs typeface="Calibri" pitchFamily="34" charset="-120"/>
+              <a:rPr lang="en-US" sz="1400" b="1" dirty="0">
+                <a:solidFill>
+                  <a:srgbClr val="000000"/>
+                </a:solidFill>
+                <a:latin typeface="Meiryo UI" pitchFamily="34" charset="0"/>
+                <a:ea typeface="Meiryo UI" pitchFamily="34" charset="-122"/>
+                <a:cs typeface="Meiryo UI" pitchFamily="34" charset="-120"/>
               </a:rPr>
               <a:t>M&amp;Aアドバイザリー</a:t>
             </a:r>
-            <a:endParaRPr lang="en-US" sz="1300" dirty="0"/>
+            <a:endParaRPr lang="en-US" sz="1400" dirty="0"/>
           </a:p>
         </p:txBody>
       </p:sp>
       <p:pic>
         <p:nvPicPr>
-          <p:cNvPr id="15" name="Image 2" descr="icon_arrow.png">    </p:cNvPr>
+          <p:cNvPr id="15" name="Image 2" descr="icon_arrow_dark.png">    </p:cNvPr>
           <p:cNvPicPr>
             <a:picLocks noChangeAspect="1"/>
           </p:cNvPicPr>
           <p:nvPr/>
         </p:nvPicPr>
         <p:blipFill>
-          <a:blip r:embed="rId3">
-            <a:alphaModFix amt="75000"/>
-          </a:blip>
+          <a:blip r:embed="rId3"/>
           <a:stretch>
             <a:fillRect/>
           </a:stretch>
         </p:blipFill>
         <p:spPr>
           <a:xfrm>
-            <a:off x="8577072" y="2546604"/>
+            <a:off x="8577072" y="2615184"/>
             <a:ext cx="219456" cy="256032"/>
           </a:xfrm>
           <a:prstGeom prst="rect">
@@ -6485,17 +6589,22 @@
         <p:spPr>
           <a:xfrm>
             <a:off x="8814816" y="1965960"/>
-            <a:ext cx="2468880" cy="1417320"/>
+            <a:ext cx="2468880" cy="1554480"/>
           </a:xfrm>
           <a:prstGeom prst="roundRect">
             <a:avLst>
-              <a:gd name="adj" fmla="val 6452"/>
+              <a:gd name="adj" fmla="val 5882"/>
             </a:avLst>
           </a:prstGeom>
           <a:solidFill>
-            <a:srgbClr val="2A3A8C"/>
+            <a:srgbClr val="FFFFFF"/>
           </a:solidFill>
-          <a:ln/>
+          <a:ln w="12700">
+            <a:solidFill>
+              <a:srgbClr val="D0D5DD"/>
+            </a:solidFill>
+            <a:prstDash val="solid"/>
+          </a:ln>
         </p:spPr>
       </p:sp>
       <p:sp>
@@ -6523,17 +6632,17 @@
               <a:buNone/>
             </a:pPr>
             <a:r>
-              <a:rPr lang="en-US" sz="1100" b="1" dirty="0">
-                <a:solidFill>
-                  <a:srgbClr val="C9A227"/>
-                </a:solidFill>
-                <a:latin typeface="Calibri" pitchFamily="34" charset="0"/>
-                <a:ea typeface="Calibri" pitchFamily="34" charset="-122"/>
-                <a:cs typeface="Calibri" pitchFamily="34" charset="-120"/>
+              <a:rPr lang="en-US" sz="1400" b="1" dirty="0">
+                <a:solidFill>
+                  <a:srgbClr val="000000"/>
+                </a:solidFill>
+                <a:latin typeface="Meiryo UI" pitchFamily="34" charset="0"/>
+                <a:ea typeface="Meiryo UI" pitchFamily="34" charset="-122"/>
+                <a:cs typeface="Meiryo UI" pitchFamily="34" charset="-120"/>
               </a:rPr>
               <a:t>Phase 4　16年目〜</a:t>
             </a:r>
-            <a:endParaRPr lang="en-US" sz="1100" dirty="0"/>
+            <a:endParaRPr lang="en-US" sz="1400" dirty="0"/>
           </a:p>
         </p:txBody>
       </p:sp>
@@ -6545,8 +6654,8 @@
         </p:nvSpPr>
         <p:spPr>
           <a:xfrm>
-            <a:off x="8979408" y="2423160"/>
-            <a:ext cx="2139696" cy="868680"/>
+            <a:off x="8979408" y="2468880"/>
+            <a:ext cx="2139696" cy="914400"/>
           </a:xfrm>
           <a:prstGeom prst="rect">
             <a:avLst/>
@@ -6565,17 +6674,17 @@
               <a:buNone/>
             </a:pPr>
             <a:r>
-              <a:rPr lang="en-US" sz="1300" b="1" dirty="0">
-                <a:solidFill>
-                  <a:srgbClr val="FFFFFF"/>
-                </a:solidFill>
-                <a:latin typeface="Calibri" pitchFamily="34" charset="0"/>
-                <a:ea typeface="Calibri" pitchFamily="34" charset="-122"/>
-                <a:cs typeface="Calibri" pitchFamily="34" charset="-120"/>
+              <a:rPr lang="en-US" sz="1400" b="1" dirty="0">
+                <a:solidFill>
+                  <a:srgbClr val="000000"/>
+                </a:solidFill>
+                <a:latin typeface="Meiryo UI" pitchFamily="34" charset="0"/>
+                <a:ea typeface="Meiryo UI" pitchFamily="34" charset="-122"/>
+                <a:cs typeface="Meiryo UI" pitchFamily="34" charset="-120"/>
               </a:rPr>
               <a:t>プライベートバンキング／</a:t>
             </a:r>
-            <a:endParaRPr lang="en-US" sz="1300" dirty="0"/>
+            <a:endParaRPr lang="en-US" sz="1400" dirty="0"/>
           </a:p>
           <a:p>
             <a:pPr indent="0" marL="0">
@@ -6585,17 +6694,17 @@
               <a:buNone/>
             </a:pPr>
             <a:r>
-              <a:rPr lang="en-US" sz="1300" b="1" dirty="0">
-                <a:solidFill>
-                  <a:srgbClr val="FFFFFF"/>
-                </a:solidFill>
-                <a:latin typeface="Calibri" pitchFamily="34" charset="0"/>
-                <a:ea typeface="Calibri" pitchFamily="34" charset="-122"/>
-                <a:cs typeface="Calibri" pitchFamily="34" charset="-120"/>
+              <a:rPr lang="en-US" sz="1400" b="1" dirty="0">
+                <a:solidFill>
+                  <a:srgbClr val="000000"/>
+                </a:solidFill>
+                <a:latin typeface="Meiryo UI" pitchFamily="34" charset="0"/>
+                <a:ea typeface="Meiryo UI" pitchFamily="34" charset="-122"/>
+                <a:cs typeface="Meiryo UI" pitchFamily="34" charset="-120"/>
               </a:rPr>
               <a:t>資産運用会社</a:t>
             </a:r>
-            <a:endParaRPr lang="en-US" sz="1300" dirty="0"/>
+            <a:endParaRPr lang="en-US" sz="1400" dirty="0"/>
           </a:p>
         </p:txBody>
       </p:sp>
@@ -6607,18 +6716,23 @@
         </p:nvSpPr>
         <p:spPr>
           <a:xfrm>
-            <a:off x="640080" y="3749040"/>
+            <a:off x="640080" y="3886200"/>
             <a:ext cx="10881360" cy="2331720"/>
           </a:xfrm>
           <a:prstGeom prst="roundRect">
             <a:avLst>
-              <a:gd name="adj" fmla="val 4706"/>
+              <a:gd name="adj" fmla="val 3922"/>
             </a:avLst>
           </a:prstGeom>
           <a:solidFill>
-            <a:srgbClr val="16204F"/>
+            <a:srgbClr val="FFFFFF"/>
           </a:solidFill>
-          <a:ln/>
+          <a:ln w="19050">
+            <a:solidFill>
+              <a:srgbClr val="C9A227"/>
+            </a:solidFill>
+            <a:prstDash val="solid"/>
+          </a:ln>
         </p:spPr>
       </p:sp>
       <p:sp>
@@ -6629,7 +6743,7 @@
         </p:nvSpPr>
         <p:spPr>
           <a:xfrm>
-            <a:off x="914400" y="3977640"/>
+            <a:off x="914400" y="4114800"/>
             <a:ext cx="10241280" cy="365760"/>
           </a:xfrm>
           <a:prstGeom prst="rect">
@@ -6648,11 +6762,11 @@
             <a:r>
               <a:rPr lang="en-US" sz="1600" b="1" dirty="0">
                 <a:solidFill>
-                  <a:srgbClr val="C9A227"/>
-                </a:solidFill>
-                <a:latin typeface="Calibri" pitchFamily="34" charset="0"/>
-                <a:ea typeface="Calibri" pitchFamily="34" charset="-122"/>
-                <a:cs typeface="Calibri" pitchFamily="34" charset="-120"/>
+                  <a:srgbClr val="000000"/>
+                </a:solidFill>
+                <a:latin typeface="Meiryo UI" pitchFamily="34" charset="0"/>
+                <a:ea typeface="Meiryo UI" pitchFamily="34" charset="-122"/>
+                <a:cs typeface="Meiryo UI" pitchFamily="34" charset="-120"/>
               </a:rPr>
               <a:t>次の一歩（就活で意識したいこと）</a:t>
             </a:r>
@@ -6668,7 +6782,7 @@
         </p:nvSpPr>
         <p:spPr>
           <a:xfrm>
-            <a:off x="1051560" y="4434840"/>
+            <a:off x="1051560" y="4572000"/>
             <a:ext cx="10149840" cy="1554480"/>
           </a:xfrm>
           <a:prstGeom prst="rect">
@@ -6692,17 +6806,17 @@
               <a:buChar char="•"/>
             </a:pPr>
             <a:r>
-              <a:rPr lang="en-US" sz="1300" dirty="0">
-                <a:solidFill>
-                  <a:srgbClr val="CADCFC"/>
-                </a:solidFill>
-                <a:latin typeface="Calibri" pitchFamily="34" charset="0"/>
-                <a:ea typeface="Calibri" pitchFamily="34" charset="-122"/>
-                <a:cs typeface="Calibri" pitchFamily="34" charset="-120"/>
+              <a:rPr lang="en-US" sz="1400" dirty="0">
+                <a:solidFill>
+                  <a:srgbClr val="000000"/>
+                </a:solidFill>
+                <a:latin typeface="Meiryo UI" pitchFamily="34" charset="0"/>
+                <a:ea typeface="Meiryo UI" pitchFamily="34" charset="-122"/>
+                <a:cs typeface="Meiryo UI" pitchFamily="34" charset="-120"/>
               </a:rPr>
               <a:t>面接・ESでは「財務諸表を読める強み」を、まず法人融資・与信審査の場面でどう活かすかを具体的に語る</a:t>
             </a:r>
-            <a:endParaRPr lang="en-US" sz="1300" dirty="0"/>
+            <a:endParaRPr lang="en-US" sz="1400" dirty="0"/>
           </a:p>
           <a:p>
             <a:pPr marL="342900" indent="-342900">
@@ -6716,17 +6830,17 @@
               <a:buChar char="•"/>
             </a:pPr>
             <a:r>
-              <a:rPr lang="en-US" sz="1300" dirty="0">
-                <a:solidFill>
-                  <a:srgbClr val="CADCFC"/>
-                </a:solidFill>
-                <a:latin typeface="Calibri" pitchFamily="34" charset="0"/>
-                <a:ea typeface="Calibri" pitchFamily="34" charset="-122"/>
-                <a:cs typeface="Calibri" pitchFamily="34" charset="-120"/>
+              <a:rPr lang="en-US" sz="1400" dirty="0">
+                <a:solidFill>
+                  <a:srgbClr val="000000"/>
+                </a:solidFill>
+                <a:latin typeface="Meiryo UI" pitchFamily="34" charset="0"/>
+                <a:ea typeface="Meiryo UI" pitchFamily="34" charset="-122"/>
+                <a:cs typeface="Meiryo UI" pitchFamily="34" charset="-120"/>
               </a:rPr>
               <a:t>企業法ゼミでの学びを、証券代行・年金信託といった信託銀行特有の業務にどう接続できるかを調べて言語化しておく</a:t>
             </a:r>
-            <a:endParaRPr lang="en-US" sz="1300" dirty="0"/>
+            <a:endParaRPr lang="en-US" sz="1400" dirty="0"/>
           </a:p>
           <a:p>
             <a:pPr marL="342900" indent="-342900">
@@ -6740,17 +6854,17 @@
               <a:buChar char="•"/>
             </a:pPr>
             <a:r>
-              <a:rPr lang="en-US" sz="1300" dirty="0">
-                <a:solidFill>
-                  <a:srgbClr val="CADCFC"/>
-                </a:solidFill>
-                <a:latin typeface="Calibri" pitchFamily="34" charset="0"/>
-                <a:ea typeface="Calibri" pitchFamily="34" charset="-122"/>
-                <a:cs typeface="Calibri" pitchFamily="34" charset="-120"/>
+              <a:rPr lang="en-US" sz="1400" dirty="0">
+                <a:solidFill>
+                  <a:srgbClr val="000000"/>
+                </a:solidFill>
+                <a:latin typeface="Meiryo UI" pitchFamily="34" charset="0"/>
+                <a:ea typeface="Meiryo UI" pitchFamily="34" charset="-122"/>
+                <a:cs typeface="Meiryo UI" pitchFamily="34" charset="-120"/>
               </a:rPr>
               <a:t>将来的に「財務分析×法務」を掛け合わせた事業承継・M&amp;Aアドバイザリーを志向している、という一貫したストーリーを準備する</a:t>
             </a:r>
-            <a:endParaRPr lang="en-US" sz="1300" dirty="0"/>
+            <a:endParaRPr lang="en-US" sz="1400" dirty="0"/>
           </a:p>
         </p:txBody>
       </p:sp>

--- a/信吾/銀行研究/添付ファイル/信託銀行キャリア形成モデル.pptx
+++ b/信吾/銀行研究/添付ファイル/信託銀行キャリア形成モデル.pptx
@@ -12,10 +12,9 @@
     <p:sldId id="260" r:id="rId6"/>
     <p:sldId id="261" r:id="rId7"/>
     <p:sldId id="262" r:id="rId8"/>
-    <p:sldId id="263" r:id="rId9"/>
   </p:sldIdLst>
   <p:notesMasterIdLst>
-    <p:notesMasterId r:id="rId10"/>
+    <p:notesMasterId r:id="rId9"/>
   </p:notesMasterIdLst>
   <p:sldSz cx="12192000" cy="6858000"/>
   <p:notesSz cx="6858000" cy="12192000"/>
@@ -1061,94 +1060,6 @@
             <a:fld id="{F7021451-1387-4CA6-816F-3879F97B5CBC}" type="slidenum">
               <a:rPr lang="en-US"/>
               <a:t>7</a:t>
-            </a:fld>
-            <a:endParaRPr lang="en-US"/>
-          </a:p>
-        </p:txBody>
-      </p:sp>
-    </p:spTree>
-    <p:extLst>
-      <p:ext uri="{BB962C8B-B14F-4D97-AF65-F5344CB8AC3E}">
-        <p14:creationId xmlns:p14="http://schemas.microsoft.com/office/powerpoint/2010/main" val="1024086991"/>
-      </p:ext>
-    </p:extLst>
-  </p:cSld>
-  <p:clrMapOvr>
-    <a:masterClrMapping/>
-  </p:clrMapOvr>
-</p:notes>
-</file>
-
-<file path=ppt/notesSlides/notesSlide8.xml><?xml version="1.0" encoding="utf-8"?>
-<p:notes xmlns:a="http://schemas.openxmlformats.org/drawingml/2006/main" xmlns:r="http://schemas.openxmlformats.org/officeDocument/2006/relationships" xmlns:p="http://schemas.openxmlformats.org/presentationml/2006/main">
-  <p:cSld>
-    <p:spTree>
-      <p:nvGrpSpPr>
-        <p:cNvPr id="1" name=""/>
-        <p:cNvGrpSpPr/>
-        <p:nvPr/>
-      </p:nvGrpSpPr>
-      <p:grpSpPr>
-        <a:xfrm>
-          <a:off x="0" y="0"/>
-          <a:ext cx="0" cy="0"/>
-          <a:chOff x="0" y="0"/>
-          <a:chExt cx="0" cy="0"/>
-        </a:xfrm>
-      </p:grpSpPr>
-      <p:sp>
-        <p:nvSpPr>
-          <p:cNvPr id="2" name="Slide Image Placeholder 1"/>
-          <p:cNvSpPr>
-            <a:spLocks noGrp="1" noRot="1" noChangeAspect="1"/>
-          </p:cNvSpPr>
-          <p:nvPr>
-            <p:ph type="sldImg"/>
-          </p:nvPr>
-        </p:nvSpPr>
-        <p:spPr/>
-      </p:sp>
-      <p:sp>
-        <p:nvSpPr>
-          <p:cNvPr id="3" name="Notes Placeholder 2"/>
-          <p:cNvSpPr>
-            <a:spLocks noGrp="1"/>
-          </p:cNvSpPr>
-          <p:nvPr>
-            <p:ph type="body" idx="1"/>
-          </p:nvPr>
-        </p:nvSpPr>
-        <p:spPr/>
-        <p:txBody>
-          <a:bodyPr/>
-          <a:lstStyle/>
-          <a:p>
-            <a:r>
-              <a:rPr lang="en-US" dirty="0"/>
-              <a:t/>
-            </a:r>
-            <a:endParaRPr lang="en-US" dirty="0"/>
-          </a:p>
-        </p:txBody>
-      </p:sp>
-      <p:sp>
-        <p:nvSpPr>
-          <p:cNvPr id="4" name="Slide Number Placeholder 3"/>
-          <p:cNvSpPr>
-            <a:spLocks noGrp="1"/>
-          </p:cNvSpPr>
-          <p:nvPr>
-            <p:ph type="sldNum" sz="quarter" idx="10"/>
-          </p:nvPr>
-        </p:nvSpPr>
-        <p:spPr/>
-        <p:txBody>
-          <a:bodyPr/>
-          <a:lstStyle/>
-          <a:p>
-            <a:fld id="{F7021451-1387-4CA6-816F-3879F97B5CBC}" type="slidenum">
-              <a:rPr lang="en-US"/>
-              <a:t>8</a:t>
             </a:fld>
             <a:endParaRPr lang="en-US"/>
           </a:p>
@@ -1530,7 +1441,7 @@
         </p:nvSpPr>
         <p:spPr>
           <a:xfrm>
-            <a:off x="822960" y="1965960"/>
+            <a:off x="822960" y="1600200"/>
             <a:ext cx="9601200" cy="1737360"/>
           </a:xfrm>
           <a:prstGeom prst="rect">
@@ -1592,7 +1503,7 @@
         </p:nvSpPr>
         <p:spPr>
           <a:xfrm>
-            <a:off x="822960" y="3794760"/>
+            <a:off x="822960" y="3429000"/>
             <a:ext cx="8961120" cy="548640"/>
           </a:xfrm>
           <a:prstGeom prst="rect">
@@ -1617,7 +1528,7 @@
                 <a:ea typeface="Meiryo UI" pitchFamily="34" charset="-122"/>
                 <a:cs typeface="Meiryo UI" pitchFamily="34" charset="-120"/>
               </a:rPr>
-              <a:t>財務分析力と企業法の知識を掛け合わせて伸ばす、信吾さんの成長ロードマップ</a:t>
+              <a:t>「運用」に関わる3つのキャリアパターンで考える、信吾さんの成長ロードマップ</a:t>
             </a:r>
             <a:endParaRPr lang="en-US" sz="1800" dirty="0"/>
           </a:p>
@@ -1626,6 +1537,100 @@
       <p:sp>
         <p:nvSpPr>
           <p:cNvPr id="5" name="Text 2"/>
+          <p:cNvSpPr/>
+          <p:nvPr/>
+        </p:nvSpPr>
+        <p:spPr>
+          <a:xfrm>
+            <a:off x="914400" y="4160520"/>
+            <a:ext cx="8229600" cy="1371600"/>
+          </a:xfrm>
+          <a:prstGeom prst="rect">
+            <a:avLst/>
+          </a:prstGeom>
+          <a:noFill/>
+          <a:ln/>
+        </p:spPr>
+        <p:txBody>
+          <a:bodyPr wrap="square" rtlCol="0" anchor="ctr"/>
+          <a:lstStyle/>
+          <a:p>
+            <a:pPr marL="342900" indent="-342900">
+              <a:lnSpc>
+                <a:spcPct val="125000"/>
+              </a:lnSpc>
+              <a:spcAft>
+                <a:spcPts val="400"/>
+              </a:spcAft>
+              <a:buSzPct val="100000"/>
+              <a:buChar char="•"/>
+            </a:pPr>
+            <a:r>
+              <a:rPr lang="en-US" sz="1600" dirty="0">
+                <a:solidFill>
+                  <a:srgbClr val="000000"/>
+                </a:solidFill>
+                <a:latin typeface="Meiryo UI" pitchFamily="34" charset="0"/>
+                <a:ea typeface="Meiryo UI" pitchFamily="34" charset="-122"/>
+                <a:cs typeface="Meiryo UI" pitchFamily="34" charset="-120"/>
+              </a:rPr>
+              <a:t>①アセットマネジメント業務を中心とするキャリア</a:t>
+            </a:r>
+            <a:endParaRPr lang="en-US" sz="1600" dirty="0"/>
+          </a:p>
+          <a:p>
+            <a:pPr marL="342900" indent="-342900">
+              <a:lnSpc>
+                <a:spcPct val="125000"/>
+              </a:lnSpc>
+              <a:spcAft>
+                <a:spcPts val="400"/>
+              </a:spcAft>
+              <a:buSzPct val="100000"/>
+              <a:buChar char="•"/>
+            </a:pPr>
+            <a:r>
+              <a:rPr lang="en-US" sz="1600" dirty="0">
+                <a:solidFill>
+                  <a:srgbClr val="000000"/>
+                </a:solidFill>
+                <a:latin typeface="Meiryo UI" pitchFamily="34" charset="0"/>
+                <a:ea typeface="Meiryo UI" pitchFamily="34" charset="-122"/>
+                <a:cs typeface="Meiryo UI" pitchFamily="34" charset="-120"/>
+              </a:rPr>
+              <a:t>②信託銀行の運用業務を中心とするキャリア</a:t>
+            </a:r>
+            <a:endParaRPr lang="en-US" sz="1600" dirty="0"/>
+          </a:p>
+          <a:p>
+            <a:pPr marL="342900" indent="-342900">
+              <a:lnSpc>
+                <a:spcPct val="125000"/>
+              </a:lnSpc>
+              <a:spcAft>
+                <a:spcPts val="400"/>
+              </a:spcAft>
+              <a:buSzPct val="100000"/>
+              <a:buChar char="•"/>
+            </a:pPr>
+            <a:r>
+              <a:rPr lang="en-US" sz="1600" dirty="0">
+                <a:solidFill>
+                  <a:srgbClr val="000000"/>
+                </a:solidFill>
+                <a:latin typeface="Meiryo UI" pitchFamily="34" charset="0"/>
+                <a:ea typeface="Meiryo UI" pitchFamily="34" charset="-122"/>
+                <a:cs typeface="Meiryo UI" pitchFamily="34" charset="-120"/>
+              </a:rPr>
+              <a:t>③銀行内で完結する運用キャリア（ゆうちょ銀行型）</a:t>
+            </a:r>
+            <a:endParaRPr lang="en-US" sz="1600" dirty="0"/>
+          </a:p>
+        </p:txBody>
+      </p:sp>
+      <p:sp>
+        <p:nvSpPr>
+          <p:cNvPr id="6" name="Text 3"/>
           <p:cNvSpPr/>
           <p:nvPr/>
         </p:nvSpPr>
@@ -1766,7 +1771,7 @@
                 <a:ea typeface="Meiryo UI" pitchFamily="34" charset="-122"/>
                 <a:cs typeface="Meiryo UI" pitchFamily="34" charset="-120"/>
               </a:rPr>
-              <a:t>このモデルは、次の3つの強みをどの順番で・どの部署で鍛えるかを軸に設計しています。</a:t>
+              <a:t>どのパターンを選んでも、この3つの強みをどの部署で・どの順番で鍛えるかが軸になります。</a:t>
             </a:r>
             <a:endParaRPr lang="en-US" sz="1400" dirty="0"/>
           </a:p>
@@ -2268,7 +2273,7 @@
         </p:nvSpPr>
         <p:spPr>
           <a:xfrm>
-            <a:off x="640080" y="457200"/>
+            <a:off x="640080" y="411480"/>
             <a:ext cx="10972800" cy="640080"/>
           </a:xfrm>
           <a:prstGeom prst="rect">
@@ -2293,7 +2298,7 @@
                 <a:ea typeface="Meiryo UI" pitchFamily="34" charset="-122"/>
                 <a:cs typeface="Meiryo UI" pitchFamily="34" charset="-120"/>
               </a:rPr>
-              <a:t>キャリアロードマップ全体像</a:t>
+              <a:t>3つのキャリアパターン全体像</a:t>
             </a:r>
             <a:endParaRPr lang="en-US" sz="3000" dirty="0"/>
           </a:p>
@@ -2307,7 +2312,7 @@
         </p:nvSpPr>
         <p:spPr>
           <a:xfrm>
-            <a:off x="640080" y="1097280"/>
+            <a:off x="640080" y="1005840"/>
             <a:ext cx="10972800" cy="411480"/>
           </a:xfrm>
           <a:prstGeom prst="rect">
@@ -2332,7 +2337,7 @@
                 <a:ea typeface="Meiryo UI" pitchFamily="34" charset="-122"/>
                 <a:cs typeface="Meiryo UI" pitchFamily="34" charset="-120"/>
               </a:rPr>
-              <a:t>強みを「実践 → 専門性 → 統合 → 集大成」の順で積み上げる4フェーズ構成です。</a:t>
+              <a:t>「運用の頭脳をどこで担うか」「別会社に異動するか、銀行内で完結するか」で3パターンに分かれます。</a:t>
             </a:r>
             <a:endParaRPr lang="en-US" sz="1400" dirty="0"/>
           </a:p>
@@ -2346,45 +2351,18 @@
         </p:nvSpPr>
         <p:spPr>
           <a:xfrm>
-            <a:off x="640080" y="2057400"/>
-            <a:ext cx="2468880" cy="3931920"/>
+            <a:off x="548640" y="1600200"/>
+            <a:ext cx="3566160" cy="4892040"/>
           </a:xfrm>
           <a:prstGeom prst="roundRect">
             <a:avLst>
-              <a:gd name="adj" fmla="val 3704"/>
+              <a:gd name="adj" fmla="val 2564"/>
             </a:avLst>
           </a:prstGeom>
           <a:solidFill>
             <a:srgbClr val="FFFFFF"/>
           </a:solidFill>
-          <a:ln w="12700">
-            <a:solidFill>
-              <a:srgbClr val="D0D5DD"/>
-            </a:solidFill>
-            <a:prstDash val="solid"/>
-          </a:ln>
-        </p:spPr>
-      </p:sp>
-      <p:sp>
-        <p:nvSpPr>
-          <p:cNvPr id="5" name="Shape 3"/>
-          <p:cNvSpPr/>
-          <p:nvPr/>
-        </p:nvSpPr>
-        <p:spPr>
-          <a:xfrm>
-            <a:off x="1371600" y="2313432"/>
-            <a:ext cx="1005840" cy="365760"/>
-          </a:xfrm>
-          <a:prstGeom prst="roundRect">
-            <a:avLst>
-              <a:gd name="adj" fmla="val 20000"/>
-            </a:avLst>
-          </a:prstGeom>
-          <a:solidFill>
-            <a:srgbClr val="FFFFFF"/>
-          </a:solidFill>
-          <a:ln w="15875">
+          <a:ln w="19050">
             <a:solidFill>
               <a:srgbClr val="1E2761"/>
             </a:solidFill>
@@ -2394,56 +2372,19 @@
       </p:sp>
       <p:sp>
         <p:nvSpPr>
-          <p:cNvPr id="6" name="Text 4"/>
-          <p:cNvSpPr/>
-          <p:nvPr/>
-        </p:nvSpPr>
-        <p:spPr>
-          <a:xfrm>
-            <a:off x="1371600" y="2313432"/>
-            <a:ext cx="1005840" cy="365760"/>
-          </a:xfrm>
-          <a:prstGeom prst="rect">
-            <a:avLst/>
-          </a:prstGeom>
-          <a:noFill/>
-          <a:ln/>
-        </p:spPr>
-        <p:txBody>
-          <a:bodyPr wrap="square" rtlCol="0" anchor="ctr"/>
-          <a:lstStyle/>
-          <a:p>
-            <a:pPr algn="ctr" indent="0" marL="0">
-              <a:buNone/>
-            </a:pPr>
-            <a:r>
-              <a:rPr lang="en-US" sz="1400" b="1" dirty="0">
-                <a:solidFill>
-                  <a:srgbClr val="000000"/>
-                </a:solidFill>
-                <a:latin typeface="Meiryo UI" pitchFamily="34" charset="0"/>
-                <a:ea typeface="Meiryo UI" pitchFamily="34" charset="-122"/>
-                <a:cs typeface="Meiryo UI" pitchFamily="34" charset="-120"/>
-              </a:rPr>
-              <a:t>Phase 1</a:t>
-            </a:r>
-            <a:endParaRPr lang="en-US" sz="1400" dirty="0"/>
-          </a:p>
-        </p:txBody>
-      </p:sp>
-      <p:sp>
-        <p:nvSpPr>
-          <p:cNvPr id="7" name="Shape 5"/>
-          <p:cNvSpPr/>
-          <p:nvPr/>
-        </p:nvSpPr>
-        <p:spPr>
-          <a:xfrm>
-            <a:off x="1463040" y="2834640"/>
-            <a:ext cx="822960" cy="822960"/>
-          </a:xfrm>
-          <a:prstGeom prst="ellipse">
-            <a:avLst/>
+          <p:cNvPr id="5" name="Shape 3"/>
+          <p:cNvSpPr/>
+          <p:nvPr/>
+        </p:nvSpPr>
+        <p:spPr>
+          <a:xfrm>
+            <a:off x="777240" y="1801368"/>
+            <a:ext cx="502920" cy="384048"/>
+          </a:xfrm>
+          <a:prstGeom prst="roundRect">
+            <a:avLst>
+              <a:gd name="adj" fmla="val 19048"/>
+            </a:avLst>
           </a:prstGeom>
           <a:solidFill>
             <a:srgbClr val="1E2761"/>
@@ -2451,9 +2392,110 @@
           <a:ln/>
         </p:spPr>
       </p:sp>
+      <p:sp>
+        <p:nvSpPr>
+          <p:cNvPr id="6" name="Text 4"/>
+          <p:cNvSpPr/>
+          <p:nvPr/>
+        </p:nvSpPr>
+        <p:spPr>
+          <a:xfrm>
+            <a:off x="777240" y="1801368"/>
+            <a:ext cx="502920" cy="384048"/>
+          </a:xfrm>
+          <a:prstGeom prst="rect">
+            <a:avLst/>
+          </a:prstGeom>
+          <a:noFill/>
+          <a:ln/>
+        </p:spPr>
+        <p:txBody>
+          <a:bodyPr wrap="square" rtlCol="0" anchor="ctr"/>
+          <a:lstStyle/>
+          <a:p>
+            <a:pPr algn="ctr" indent="0" marL="0">
+              <a:buNone/>
+            </a:pPr>
+            <a:r>
+              <a:rPr lang="en-US" sz="1600" b="1" dirty="0">
+                <a:solidFill>
+                  <a:srgbClr val="FFFFFF"/>
+                </a:solidFill>
+                <a:latin typeface="Meiryo UI" pitchFamily="34" charset="0"/>
+                <a:ea typeface="Meiryo UI" pitchFamily="34" charset="-122"/>
+                <a:cs typeface="Meiryo UI" pitchFamily="34" charset="-120"/>
+              </a:rPr>
+              <a:t>1</a:t>
+            </a:r>
+            <a:endParaRPr lang="en-US" sz="1600" dirty="0"/>
+          </a:p>
+        </p:txBody>
+      </p:sp>
+      <p:sp>
+        <p:nvSpPr>
+          <p:cNvPr id="7" name="Text 5"/>
+          <p:cNvSpPr/>
+          <p:nvPr/>
+        </p:nvSpPr>
+        <p:spPr>
+          <a:xfrm>
+            <a:off x="1417320" y="1764792"/>
+            <a:ext cx="2468880" cy="502920"/>
+          </a:xfrm>
+          <a:prstGeom prst="rect">
+            <a:avLst/>
+          </a:prstGeom>
+          <a:noFill/>
+          <a:ln/>
+        </p:spPr>
+        <p:txBody>
+          <a:bodyPr wrap="square" rtlCol="0" anchor="ctr"/>
+          <a:lstStyle/>
+          <a:p>
+            <a:pPr indent="0" marL="0">
+              <a:lnSpc>
+                <a:spcPct val="105000"/>
+              </a:lnSpc>
+              <a:buNone/>
+            </a:pPr>
+            <a:r>
+              <a:rPr lang="en-US" sz="1500" b="1" dirty="0">
+                <a:solidFill>
+                  <a:srgbClr val="000000"/>
+                </a:solidFill>
+                <a:latin typeface="Meiryo UI" pitchFamily="34" charset="0"/>
+                <a:ea typeface="Meiryo UI" pitchFamily="34" charset="-122"/>
+                <a:cs typeface="Meiryo UI" pitchFamily="34" charset="-120"/>
+              </a:rPr>
+              <a:t>アセットマネジメント業務を中心とするキャリア</a:t>
+            </a:r>
+            <a:endParaRPr lang="en-US" sz="1500" dirty="0"/>
+          </a:p>
+        </p:txBody>
+      </p:sp>
+      <p:sp>
+        <p:nvSpPr>
+          <p:cNvPr id="8" name="Shape 6"/>
+          <p:cNvSpPr/>
+          <p:nvPr/>
+        </p:nvSpPr>
+        <p:spPr>
+          <a:xfrm>
+            <a:off x="804672" y="2468880"/>
+            <a:ext cx="566928" cy="566928"/>
+          </a:xfrm>
+          <a:prstGeom prst="ellipse">
+            <a:avLst/>
+          </a:prstGeom>
+          <a:solidFill>
+            <a:srgbClr val="1E2761"/>
+          </a:solidFill>
+          <a:ln/>
+        </p:spPr>
+      </p:sp>
       <p:pic>
         <p:nvPicPr>
-          <p:cNvPr id="8" name="Image 0" descr="icon_building.png">    </p:cNvPr>
+          <p:cNvPr id="9" name="Image 0" descr="icon_building.png">    </p:cNvPr>
           <p:cNvPicPr>
             <a:picLocks noChangeAspect="1"/>
           </p:cNvPicPr>
@@ -2467,8 +2509,8 @@
         </p:blipFill>
         <p:spPr>
           <a:xfrm>
-            <a:off x="1682496" y="3054096"/>
-            <a:ext cx="384048" cy="384048"/>
+            <a:off x="923544" y="2587752"/>
+            <a:ext cx="329184" cy="329184"/>
           </a:xfrm>
           <a:prstGeom prst="rect">
             <a:avLst/>
@@ -2477,14 +2519,14 @@
       </p:pic>
       <p:sp>
         <p:nvSpPr>
-          <p:cNvPr id="9" name="Text 6"/>
-          <p:cNvSpPr/>
-          <p:nvPr/>
-        </p:nvSpPr>
-        <p:spPr>
-          <a:xfrm>
-            <a:off x="777240" y="3794760"/>
-            <a:ext cx="2194560" cy="320040"/>
+          <p:cNvPr id="10" name="Text 7"/>
+          <p:cNvSpPr/>
+          <p:nvPr/>
+        </p:nvSpPr>
+        <p:spPr>
+          <a:xfrm>
+            <a:off x="1508760" y="2441448"/>
+            <a:ext cx="2377440" cy="274320"/>
           </a:xfrm>
           <a:prstGeom prst="rect">
             <a:avLst/>
@@ -2496,131 +2538,148 @@
           <a:bodyPr wrap="square" rtlCol="0" anchor="ctr"/>
           <a:lstStyle/>
           <a:p>
+            <a:pPr indent="0" marL="0">
+              <a:buNone/>
+            </a:pPr>
+            <a:r>
+              <a:rPr lang="en-US" sz="1300" b="1" dirty="0">
+                <a:solidFill>
+                  <a:srgbClr val="000000"/>
+                </a:solidFill>
+                <a:latin typeface="Meiryo UI" pitchFamily="34" charset="0"/>
+                <a:ea typeface="Meiryo UI" pitchFamily="34" charset="-122"/>
+                <a:cs typeface="Meiryo UI" pitchFamily="34" charset="-120"/>
+              </a:rPr>
+              <a:t>入行〜5年目</a:t>
+            </a:r>
+            <a:endParaRPr lang="en-US" sz="1300" dirty="0"/>
+          </a:p>
+        </p:txBody>
+      </p:sp>
+      <p:sp>
+        <p:nvSpPr>
+          <p:cNvPr id="11" name="Text 8"/>
+          <p:cNvSpPr/>
+          <p:nvPr/>
+        </p:nvSpPr>
+        <p:spPr>
+          <a:xfrm>
+            <a:off x="1508760" y="2706624"/>
+            <a:ext cx="2377440" cy="594360"/>
+          </a:xfrm>
+          <a:prstGeom prst="rect">
+            <a:avLst/>
+          </a:prstGeom>
+          <a:noFill/>
+          <a:ln/>
+        </p:spPr>
+        <p:txBody>
+          <a:bodyPr wrap="square" rtlCol="0" anchor="ctr"/>
+          <a:lstStyle/>
+          <a:p>
+            <a:pPr indent="0" marL="0">
+              <a:lnSpc>
+                <a:spcPct val="105000"/>
+              </a:lnSpc>
+              <a:buNone/>
+            </a:pPr>
+            <a:r>
+              <a:rPr lang="en-US" sz="1400" dirty="0">
+                <a:solidFill>
+                  <a:srgbClr val="000000"/>
+                </a:solidFill>
+                <a:latin typeface="Meiryo UI" pitchFamily="34" charset="0"/>
+                <a:ea typeface="Meiryo UI" pitchFamily="34" charset="-122"/>
+                <a:cs typeface="Meiryo UI" pitchFamily="34" charset="-120"/>
+              </a:rPr>
+              <a:t>信託銀行</a:t>
+            </a:r>
+            <a:endParaRPr lang="en-US" sz="1400" dirty="0"/>
+          </a:p>
+          <a:p>
+            <a:pPr indent="0" marL="0">
+              <a:lnSpc>
+                <a:spcPct val="105000"/>
+              </a:lnSpc>
+              <a:buNone/>
+            </a:pPr>
+            <a:r>
+              <a:rPr lang="en-US" sz="1400" dirty="0">
+                <a:solidFill>
+                  <a:srgbClr val="000000"/>
+                </a:solidFill>
+                <a:latin typeface="Meiryo UI" pitchFamily="34" charset="0"/>
+                <a:ea typeface="Meiryo UI" pitchFamily="34" charset="-122"/>
+                <a:cs typeface="Meiryo UI" pitchFamily="34" charset="-120"/>
+              </a:rPr>
+              <a:t>資産運用部門</a:t>
+            </a:r>
+            <a:endParaRPr lang="en-US" sz="1400" dirty="0"/>
+          </a:p>
+        </p:txBody>
+      </p:sp>
+      <p:sp>
+        <p:nvSpPr>
+          <p:cNvPr id="12" name="Text 9"/>
+          <p:cNvSpPr/>
+          <p:nvPr/>
+        </p:nvSpPr>
+        <p:spPr>
+          <a:xfrm>
+            <a:off x="804672" y="3035808"/>
+            <a:ext cx="566928" cy="292608"/>
+          </a:xfrm>
+          <a:prstGeom prst="rect">
+            <a:avLst/>
+          </a:prstGeom>
+          <a:noFill/>
+          <a:ln/>
+        </p:spPr>
+        <p:txBody>
+          <a:bodyPr wrap="square" rtlCol="0" anchor="ctr"/>
+          <a:lstStyle/>
+          <a:p>
             <a:pPr algn="ctr" indent="0" marL="0">
               <a:buNone/>
             </a:pPr>
             <a:r>
-              <a:rPr lang="en-US" sz="1400" b="1" dirty="0">
-                <a:solidFill>
-                  <a:srgbClr val="000000"/>
-                </a:solidFill>
-                <a:latin typeface="Meiryo UI" pitchFamily="34" charset="0"/>
-                <a:ea typeface="Meiryo UI" pitchFamily="34" charset="-122"/>
-                <a:cs typeface="Meiryo UI" pitchFamily="34" charset="-120"/>
-              </a:rPr>
-              <a:t>入行〜5年目</a:t>
-            </a:r>
-            <a:endParaRPr lang="en-US" sz="1400" dirty="0"/>
-          </a:p>
-        </p:txBody>
-      </p:sp>
-      <p:sp>
-        <p:nvSpPr>
-          <p:cNvPr id="10" name="Text 7"/>
-          <p:cNvSpPr/>
-          <p:nvPr/>
-        </p:nvSpPr>
-        <p:spPr>
-          <a:xfrm>
-            <a:off x="777240" y="4114800"/>
-            <a:ext cx="2194560" cy="822960"/>
-          </a:xfrm>
-          <a:prstGeom prst="rect">
-            <a:avLst/>
-          </a:prstGeom>
-          <a:noFill/>
-          <a:ln/>
-        </p:spPr>
-        <p:txBody>
-          <a:bodyPr wrap="square" rtlCol="0" anchor="ctr"/>
-          <a:lstStyle/>
-          <a:p>
-            <a:pPr algn="ctr" indent="0" marL="0">
-              <a:lnSpc>
-                <a:spcPct val="110000"/>
-              </a:lnSpc>
-              <a:buNone/>
-            </a:pPr>
-            <a:r>
-              <a:rPr lang="en-US" sz="1400" b="1" dirty="0">
-                <a:solidFill>
-                  <a:srgbClr val="000000"/>
-                </a:solidFill>
-                <a:latin typeface="Meiryo UI" pitchFamily="34" charset="0"/>
-                <a:ea typeface="Meiryo UI" pitchFamily="34" charset="-122"/>
-                <a:cs typeface="Meiryo UI" pitchFamily="34" charset="-120"/>
-              </a:rPr>
-              <a:t>法人業務部門</a:t>
-            </a:r>
-            <a:endParaRPr lang="en-US" sz="1400" dirty="0"/>
-          </a:p>
-          <a:p>
-            <a:pPr algn="ctr" indent="0" marL="0">
-              <a:lnSpc>
-                <a:spcPct val="110000"/>
-              </a:lnSpc>
-              <a:buNone/>
-            </a:pPr>
-            <a:r>
-              <a:rPr lang="en-US" sz="1400" b="1" dirty="0">
-                <a:solidFill>
-                  <a:srgbClr val="000000"/>
-                </a:solidFill>
-                <a:latin typeface="Meiryo UI" pitchFamily="34" charset="0"/>
-                <a:ea typeface="Meiryo UI" pitchFamily="34" charset="-122"/>
-                <a:cs typeface="Meiryo UI" pitchFamily="34" charset="-120"/>
-              </a:rPr>
-              <a:t>（法人融資・法人渉外）</a:t>
-            </a:r>
-            <a:endParaRPr lang="en-US" sz="1400" dirty="0"/>
-          </a:p>
-        </p:txBody>
-      </p:sp>
-      <p:sp>
-        <p:nvSpPr>
-          <p:cNvPr id="11" name="Text 8"/>
-          <p:cNvSpPr/>
-          <p:nvPr/>
-        </p:nvSpPr>
-        <p:spPr>
-          <a:xfrm>
-            <a:off x="822960" y="4983480"/>
-            <a:ext cx="2103120" cy="914400"/>
-          </a:xfrm>
-          <a:prstGeom prst="rect">
-            <a:avLst/>
-          </a:prstGeom>
-          <a:noFill/>
-          <a:ln/>
-        </p:spPr>
-        <p:txBody>
-          <a:bodyPr wrap="square" rtlCol="0" anchor="ctr"/>
-          <a:lstStyle/>
-          <a:p>
-            <a:pPr algn="ctr" indent="0" marL="0">
-              <a:lnSpc>
-                <a:spcPct val="115000"/>
-              </a:lnSpc>
-              <a:buNone/>
-            </a:pPr>
-            <a:r>
-              <a:rPr lang="en-US" sz="1400" dirty="0">
-                <a:solidFill>
-                  <a:srgbClr val="000000"/>
-                </a:solidFill>
-                <a:latin typeface="Meiryo UI" pitchFamily="34" charset="0"/>
-                <a:ea typeface="Meiryo UI" pitchFamily="34" charset="-122"/>
-                <a:cs typeface="Meiryo UI" pitchFamily="34" charset="-120"/>
-              </a:rPr>
-              <a:t>財務分析力を実務で鍛える</a:t>
-            </a:r>
-            <a:endParaRPr lang="en-US" sz="1400" dirty="0"/>
-          </a:p>
-        </p:txBody>
+              <a:rPr lang="en-US" sz="1800" dirty="0">
+                <a:solidFill>
+                  <a:srgbClr val="1E2761"/>
+                </a:solidFill>
+                <a:latin typeface="Meiryo UI" pitchFamily="34" charset="0"/>
+                <a:ea typeface="Meiryo UI" pitchFamily="34" charset="-122"/>
+                <a:cs typeface="Meiryo UI" pitchFamily="34" charset="-120"/>
+              </a:rPr>
+              <a:t>↓</a:t>
+            </a:r>
+            <a:endParaRPr lang="en-US" sz="1800" dirty="0"/>
+          </a:p>
+        </p:txBody>
+      </p:sp>
+      <p:sp>
+        <p:nvSpPr>
+          <p:cNvPr id="13" name="Shape 10"/>
+          <p:cNvSpPr/>
+          <p:nvPr/>
+        </p:nvSpPr>
+        <p:spPr>
+          <a:xfrm>
+            <a:off x="804672" y="3328416"/>
+            <a:ext cx="566928" cy="566928"/>
+          </a:xfrm>
+          <a:prstGeom prst="ellipse">
+            <a:avLst/>
+          </a:prstGeom>
+          <a:solidFill>
+            <a:srgbClr val="1E2761"/>
+          </a:solidFill>
+          <a:ln/>
+        </p:spPr>
       </p:sp>
       <p:pic>
         <p:nvPicPr>
-          <p:cNvPr id="12" name="Image 1" descr="icon_arrow_dark.png">    </p:cNvPr>
+          <p:cNvPr id="14" name="Image 1" descr="icon_exchange.png">    </p:cNvPr>
           <p:cNvPicPr>
             <a:picLocks noChangeAspect="1"/>
           </p:cNvPicPr>
@@ -2634,8 +2693,8 @@
         </p:blipFill>
         <p:spPr>
           <a:xfrm>
-            <a:off x="3127248" y="3877056"/>
-            <a:ext cx="219456" cy="292608"/>
+            <a:off x="923544" y="3447288"/>
+            <a:ext cx="329184" cy="329184"/>
           </a:xfrm>
           <a:prstGeom prst="rect">
             <a:avLst/>
@@ -2644,68 +2703,14 @@
       </p:pic>
       <p:sp>
         <p:nvSpPr>
-          <p:cNvPr id="13" name="Shape 9"/>
-          <p:cNvSpPr/>
-          <p:nvPr/>
-        </p:nvSpPr>
-        <p:spPr>
-          <a:xfrm>
-            <a:off x="3364992" y="2057400"/>
-            <a:ext cx="2468880" cy="3931920"/>
-          </a:xfrm>
-          <a:prstGeom prst="roundRect">
-            <a:avLst>
-              <a:gd name="adj" fmla="val 3704"/>
-            </a:avLst>
-          </a:prstGeom>
-          <a:solidFill>
-            <a:srgbClr val="FFFFFF"/>
-          </a:solidFill>
-          <a:ln w="12700">
-            <a:solidFill>
-              <a:srgbClr val="D0D5DD"/>
-            </a:solidFill>
-            <a:prstDash val="solid"/>
-          </a:ln>
-        </p:spPr>
-      </p:sp>
-      <p:sp>
-        <p:nvSpPr>
-          <p:cNvPr id="14" name="Shape 10"/>
-          <p:cNvSpPr/>
-          <p:nvPr/>
-        </p:nvSpPr>
-        <p:spPr>
-          <a:xfrm>
-            <a:off x="4096512" y="2313432"/>
-            <a:ext cx="1005840" cy="365760"/>
-          </a:xfrm>
-          <a:prstGeom prst="roundRect">
-            <a:avLst>
-              <a:gd name="adj" fmla="val 20000"/>
-            </a:avLst>
-          </a:prstGeom>
-          <a:solidFill>
-            <a:srgbClr val="FFFFFF"/>
-          </a:solidFill>
-          <a:ln w="15875">
-            <a:solidFill>
-              <a:srgbClr val="1E2761"/>
-            </a:solidFill>
-            <a:prstDash val="solid"/>
-          </a:ln>
-        </p:spPr>
-      </p:sp>
-      <p:sp>
-        <p:nvSpPr>
           <p:cNvPr id="15" name="Text 11"/>
           <p:cNvSpPr/>
           <p:nvPr/>
         </p:nvSpPr>
         <p:spPr>
           <a:xfrm>
-            <a:off x="4096512" y="2313432"/>
-            <a:ext cx="1005840" cy="365760"/>
+            <a:off x="1508760" y="3300984"/>
+            <a:ext cx="2377440" cy="274320"/>
           </a:xfrm>
           <a:prstGeom prst="rect">
             <a:avLst/>
@@ -2717,34 +2722,135 @@
           <a:bodyPr wrap="square" rtlCol="0" anchor="ctr"/>
           <a:lstStyle/>
           <a:p>
+            <a:pPr indent="0" marL="0">
+              <a:buNone/>
+            </a:pPr>
+            <a:r>
+              <a:rPr lang="en-US" sz="1300" b="1" dirty="0">
+                <a:solidFill>
+                  <a:srgbClr val="000000"/>
+                </a:solidFill>
+                <a:latin typeface="Meiryo UI" pitchFamily="34" charset="0"/>
+                <a:ea typeface="Meiryo UI" pitchFamily="34" charset="-122"/>
+                <a:cs typeface="Meiryo UI" pitchFamily="34" charset="-120"/>
+              </a:rPr>
+              <a:t>6〜12年目</a:t>
+            </a:r>
+            <a:endParaRPr lang="en-US" sz="1300" dirty="0"/>
+          </a:p>
+        </p:txBody>
+      </p:sp>
+      <p:sp>
+        <p:nvSpPr>
+          <p:cNvPr id="16" name="Text 12"/>
+          <p:cNvSpPr/>
+          <p:nvPr/>
+        </p:nvSpPr>
+        <p:spPr>
+          <a:xfrm>
+            <a:off x="1508760" y="3566160"/>
+            <a:ext cx="2377440" cy="594360"/>
+          </a:xfrm>
+          <a:prstGeom prst="rect">
+            <a:avLst/>
+          </a:prstGeom>
+          <a:noFill/>
+          <a:ln/>
+        </p:spPr>
+        <p:txBody>
+          <a:bodyPr wrap="square" rtlCol="0" anchor="ctr"/>
+          <a:lstStyle/>
+          <a:p>
+            <a:pPr indent="0" marL="0">
+              <a:lnSpc>
+                <a:spcPct val="105000"/>
+              </a:lnSpc>
+              <a:buNone/>
+            </a:pPr>
+            <a:r>
+              <a:rPr lang="en-US" sz="1400" dirty="0">
+                <a:solidFill>
+                  <a:srgbClr val="000000"/>
+                </a:solidFill>
+                <a:latin typeface="Meiryo UI" pitchFamily="34" charset="0"/>
+                <a:ea typeface="Meiryo UI" pitchFamily="34" charset="-122"/>
+                <a:cs typeface="Meiryo UI" pitchFamily="34" charset="-120"/>
+              </a:rPr>
+              <a:t>グループAM会社へ</a:t>
+            </a:r>
+            <a:endParaRPr lang="en-US" sz="1400" dirty="0"/>
+          </a:p>
+          <a:p>
+            <a:pPr indent="0" marL="0">
+              <a:lnSpc>
+                <a:spcPct val="105000"/>
+              </a:lnSpc>
+              <a:buNone/>
+            </a:pPr>
+            <a:r>
+              <a:rPr lang="en-US" sz="1400" dirty="0">
+                <a:solidFill>
+                  <a:srgbClr val="000000"/>
+                </a:solidFill>
+                <a:latin typeface="Meiryo UI" pitchFamily="34" charset="0"/>
+                <a:ea typeface="Meiryo UI" pitchFamily="34" charset="-122"/>
+                <a:cs typeface="Meiryo UI" pitchFamily="34" charset="-120"/>
+              </a:rPr>
+              <a:t>出向・転籍</a:t>
+            </a:r>
+            <a:endParaRPr lang="en-US" sz="1400" dirty="0"/>
+          </a:p>
+        </p:txBody>
+      </p:sp>
+      <p:sp>
+        <p:nvSpPr>
+          <p:cNvPr id="17" name="Text 13"/>
+          <p:cNvSpPr/>
+          <p:nvPr/>
+        </p:nvSpPr>
+        <p:spPr>
+          <a:xfrm>
+            <a:off x="804672" y="3895344"/>
+            <a:ext cx="566928" cy="292608"/>
+          </a:xfrm>
+          <a:prstGeom prst="rect">
+            <a:avLst/>
+          </a:prstGeom>
+          <a:noFill/>
+          <a:ln/>
+        </p:spPr>
+        <p:txBody>
+          <a:bodyPr wrap="square" rtlCol="0" anchor="ctr"/>
+          <a:lstStyle/>
+          <a:p>
             <a:pPr algn="ctr" indent="0" marL="0">
               <a:buNone/>
             </a:pPr>
             <a:r>
-              <a:rPr lang="en-US" sz="1400" b="1" dirty="0">
-                <a:solidFill>
-                  <a:srgbClr val="000000"/>
-                </a:solidFill>
-                <a:latin typeface="Meiryo UI" pitchFamily="34" charset="0"/>
-                <a:ea typeface="Meiryo UI" pitchFamily="34" charset="-122"/>
-                <a:cs typeface="Meiryo UI" pitchFamily="34" charset="-120"/>
-              </a:rPr>
-              <a:t>Phase 2</a:t>
-            </a:r>
-            <a:endParaRPr lang="en-US" sz="1400" dirty="0"/>
-          </a:p>
-        </p:txBody>
-      </p:sp>
-      <p:sp>
-        <p:nvSpPr>
-          <p:cNvPr id="16" name="Shape 12"/>
-          <p:cNvSpPr/>
-          <p:nvPr/>
-        </p:nvSpPr>
-        <p:spPr>
-          <a:xfrm>
-            <a:off x="4187952" y="2834640"/>
-            <a:ext cx="822960" cy="822960"/>
+              <a:rPr lang="en-US" sz="1800" dirty="0">
+                <a:solidFill>
+                  <a:srgbClr val="1E2761"/>
+                </a:solidFill>
+                <a:latin typeface="Meiryo UI" pitchFamily="34" charset="0"/>
+                <a:ea typeface="Meiryo UI" pitchFamily="34" charset="-122"/>
+                <a:cs typeface="Meiryo UI" pitchFamily="34" charset="-120"/>
+              </a:rPr>
+              <a:t>↓</a:t>
+            </a:r>
+            <a:endParaRPr lang="en-US" sz="1800" dirty="0"/>
+          </a:p>
+        </p:txBody>
+      </p:sp>
+      <p:sp>
+        <p:nvSpPr>
+          <p:cNvPr id="18" name="Shape 14"/>
+          <p:cNvSpPr/>
+          <p:nvPr/>
+        </p:nvSpPr>
+        <p:spPr>
+          <a:xfrm>
+            <a:off x="804672" y="4187952"/>
+            <a:ext cx="566928" cy="566928"/>
           </a:xfrm>
           <a:prstGeom prst="ellipse">
             <a:avLst/>
@@ -2757,7 +2863,7 @@
       </p:sp>
       <p:pic>
         <p:nvPicPr>
-          <p:cNvPr id="17" name="Image 2" descr="icon_contract.png">    </p:cNvPr>
+          <p:cNvPr id="19" name="Image 2" descr="icon_crown.png">    </p:cNvPr>
           <p:cNvPicPr>
             <a:picLocks noChangeAspect="1"/>
           </p:cNvPicPr>
@@ -2771,8 +2877,8 @@
         </p:blipFill>
         <p:spPr>
           <a:xfrm>
-            <a:off x="4407408" y="3054096"/>
-            <a:ext cx="384048" cy="384048"/>
+            <a:off x="923544" y="4306824"/>
+            <a:ext cx="329184" cy="329184"/>
           </a:xfrm>
           <a:prstGeom prst="rect">
             <a:avLst/>
@@ -2781,14 +2887,14 @@
       </p:pic>
       <p:sp>
         <p:nvSpPr>
-          <p:cNvPr id="18" name="Text 13"/>
-          <p:cNvSpPr/>
-          <p:nvPr/>
-        </p:nvSpPr>
-        <p:spPr>
-          <a:xfrm>
-            <a:off x="3502152" y="3794760"/>
-            <a:ext cx="2194560" cy="320040"/>
+          <p:cNvPr id="20" name="Text 15"/>
+          <p:cNvSpPr/>
+          <p:nvPr/>
+        </p:nvSpPr>
+        <p:spPr>
+          <a:xfrm>
+            <a:off x="1508760" y="4160520"/>
+            <a:ext cx="2377440" cy="274320"/>
           </a:xfrm>
           <a:prstGeom prst="rect">
             <a:avLst/>
@@ -2800,34 +2906,123 @@
           <a:bodyPr wrap="square" rtlCol="0" anchor="ctr"/>
           <a:lstStyle/>
           <a:p>
-            <a:pPr algn="ctr" indent="0" marL="0">
-              <a:buNone/>
-            </a:pPr>
-            <a:r>
-              <a:rPr lang="en-US" sz="1400" b="1" dirty="0">
-                <a:solidFill>
-                  <a:srgbClr val="000000"/>
-                </a:solidFill>
-                <a:latin typeface="Meiryo UI" pitchFamily="34" charset="0"/>
-                <a:ea typeface="Meiryo UI" pitchFamily="34" charset="-122"/>
-                <a:cs typeface="Meiryo UI" pitchFamily="34" charset="-120"/>
-              </a:rPr>
-              <a:t>6〜10年目</a:t>
+            <a:pPr indent="0" marL="0">
+              <a:buNone/>
+            </a:pPr>
+            <a:r>
+              <a:rPr lang="en-US" sz="1300" b="1" dirty="0">
+                <a:solidFill>
+                  <a:srgbClr val="000000"/>
+                </a:solidFill>
+                <a:latin typeface="Meiryo UI" pitchFamily="34" charset="0"/>
+                <a:ea typeface="Meiryo UI" pitchFamily="34" charset="-122"/>
+                <a:cs typeface="Meiryo UI" pitchFamily="34" charset="-120"/>
+              </a:rPr>
+              <a:t>13年目〜</a:t>
+            </a:r>
+            <a:endParaRPr lang="en-US" sz="1300" dirty="0"/>
+          </a:p>
+        </p:txBody>
+      </p:sp>
+      <p:sp>
+        <p:nvSpPr>
+          <p:cNvPr id="21" name="Text 16"/>
+          <p:cNvSpPr/>
+          <p:nvPr/>
+        </p:nvSpPr>
+        <p:spPr>
+          <a:xfrm>
+            <a:off x="1508760" y="4425696"/>
+            <a:ext cx="2377440" cy="594360"/>
+          </a:xfrm>
+          <a:prstGeom prst="rect">
+            <a:avLst/>
+          </a:prstGeom>
+          <a:noFill/>
+          <a:ln/>
+        </p:spPr>
+        <p:txBody>
+          <a:bodyPr wrap="square" rtlCol="0" anchor="ctr"/>
+          <a:lstStyle/>
+          <a:p>
+            <a:pPr indent="0" marL="0">
+              <a:lnSpc>
+                <a:spcPct val="105000"/>
+              </a:lnSpc>
+              <a:buNone/>
+            </a:pPr>
+            <a:r>
+              <a:rPr lang="en-US" sz="1400" dirty="0">
+                <a:solidFill>
+                  <a:srgbClr val="000000"/>
+                </a:solidFill>
+                <a:latin typeface="Meiryo UI" pitchFamily="34" charset="0"/>
+                <a:ea typeface="Meiryo UI" pitchFamily="34" charset="-122"/>
+                <a:cs typeface="Meiryo UI" pitchFamily="34" charset="-120"/>
+              </a:rPr>
+              <a:t>信託銀行復帰 or</a:t>
             </a:r>
             <a:endParaRPr lang="en-US" sz="1400" dirty="0"/>
           </a:p>
-        </p:txBody>
-      </p:sp>
-      <p:sp>
-        <p:nvSpPr>
-          <p:cNvPr id="19" name="Text 14"/>
-          <p:cNvSpPr/>
-          <p:nvPr/>
-        </p:nvSpPr>
-        <p:spPr>
-          <a:xfrm>
-            <a:off x="3502152" y="4114800"/>
-            <a:ext cx="2194560" cy="822960"/>
+          <a:p>
+            <a:pPr indent="0" marL="0">
+              <a:lnSpc>
+                <a:spcPct val="105000"/>
+              </a:lnSpc>
+              <a:buNone/>
+            </a:pPr>
+            <a:r>
+              <a:rPr lang="en-US" sz="1400" dirty="0">
+                <a:solidFill>
+                  <a:srgbClr val="000000"/>
+                </a:solidFill>
+                <a:latin typeface="Meiryo UI" pitchFamily="34" charset="0"/>
+                <a:ea typeface="Meiryo UI" pitchFamily="34" charset="-122"/>
+                <a:cs typeface="Meiryo UI" pitchFamily="34" charset="-120"/>
+              </a:rPr>
+              <a:t>AM会社の上級職</a:t>
+            </a:r>
+            <a:endParaRPr lang="en-US" sz="1400" dirty="0"/>
+          </a:p>
+        </p:txBody>
+      </p:sp>
+      <p:sp>
+        <p:nvSpPr>
+          <p:cNvPr id="22" name="Shape 17"/>
+          <p:cNvSpPr/>
+          <p:nvPr/>
+        </p:nvSpPr>
+        <p:spPr>
+          <a:xfrm>
+            <a:off x="685800" y="5513832"/>
+            <a:ext cx="3291840" cy="822960"/>
+          </a:xfrm>
+          <a:prstGeom prst="roundRect">
+            <a:avLst>
+              <a:gd name="adj" fmla="val 11111"/>
+            </a:avLst>
+          </a:prstGeom>
+          <a:solidFill>
+            <a:srgbClr val="FFFFFF"/>
+          </a:solidFill>
+          <a:ln w="12700">
+            <a:solidFill>
+              <a:srgbClr val="1E2761"/>
+            </a:solidFill>
+            <a:prstDash val="solid"/>
+          </a:ln>
+        </p:spPr>
+      </p:sp>
+      <p:sp>
+        <p:nvSpPr>
+          <p:cNvPr id="23" name="Text 18"/>
+          <p:cNvSpPr/>
+          <p:nvPr/>
+        </p:nvSpPr>
+        <p:spPr>
+          <a:xfrm>
+            <a:off x="822960" y="5577840"/>
+            <a:ext cx="3017520" cy="713232"/>
           </a:xfrm>
           <a:prstGeom prst="rect">
             <a:avLst/>
@@ -2839,92 +3034,180 @@
           <a:bodyPr wrap="square" rtlCol="0" anchor="ctr"/>
           <a:lstStyle/>
           <a:p>
-            <a:pPr algn="ctr" indent="0" marL="0">
-              <a:lnSpc>
-                <a:spcPct val="110000"/>
-              </a:lnSpc>
-              <a:buNone/>
-            </a:pPr>
-            <a:r>
-              <a:rPr lang="en-US" sz="1400" b="1" dirty="0">
-                <a:solidFill>
-                  <a:srgbClr val="000000"/>
-                </a:solidFill>
-                <a:latin typeface="Meiryo UI" pitchFamily="34" charset="0"/>
-                <a:ea typeface="Meiryo UI" pitchFamily="34" charset="-122"/>
-                <a:cs typeface="Meiryo UI" pitchFamily="34" charset="-120"/>
-              </a:rPr>
-              <a:t>証券代行・</a:t>
-            </a:r>
-            <a:endParaRPr lang="en-US" sz="1400" dirty="0"/>
-          </a:p>
-          <a:p>
-            <a:pPr algn="ctr" indent="0" marL="0">
-              <a:lnSpc>
-                <a:spcPct val="110000"/>
-              </a:lnSpc>
-              <a:buNone/>
-            </a:pPr>
-            <a:r>
-              <a:rPr lang="en-US" sz="1400" b="1" dirty="0">
-                <a:solidFill>
-                  <a:srgbClr val="000000"/>
-                </a:solidFill>
-                <a:latin typeface="Meiryo UI" pitchFamily="34" charset="0"/>
-                <a:ea typeface="Meiryo UI" pitchFamily="34" charset="-122"/>
-                <a:cs typeface="Meiryo UI" pitchFamily="34" charset="-120"/>
-              </a:rPr>
-              <a:t>年金信託業務部門</a:t>
-            </a:r>
-            <a:endParaRPr lang="en-US" sz="1400" dirty="0"/>
-          </a:p>
-        </p:txBody>
-      </p:sp>
-      <p:sp>
-        <p:nvSpPr>
-          <p:cNvPr id="20" name="Text 15"/>
-          <p:cNvSpPr/>
-          <p:nvPr/>
-        </p:nvSpPr>
-        <p:spPr>
-          <a:xfrm>
-            <a:off x="3547872" y="4983480"/>
-            <a:ext cx="2103120" cy="914400"/>
-          </a:xfrm>
-          <a:prstGeom prst="rect">
-            <a:avLst/>
-          </a:prstGeom>
-          <a:noFill/>
-          <a:ln/>
-        </p:spPr>
-        <p:txBody>
-          <a:bodyPr wrap="square" rtlCol="0" anchor="ctr"/>
-          <a:lstStyle/>
-          <a:p>
-            <a:pPr algn="ctr" indent="0" marL="0">
+            <a:pPr indent="0" marL="0">
               <a:lnSpc>
                 <a:spcPct val="115000"/>
               </a:lnSpc>
               <a:buNone/>
             </a:pPr>
             <a:r>
-              <a:rPr lang="en-US" sz="1400" dirty="0">
-                <a:solidFill>
-                  <a:srgbClr val="000000"/>
-                </a:solidFill>
-                <a:latin typeface="Meiryo UI" pitchFamily="34" charset="0"/>
-                <a:ea typeface="Meiryo UI" pitchFamily="34" charset="-122"/>
-                <a:cs typeface="Meiryo UI" pitchFamily="34" charset="-120"/>
-              </a:rPr>
-              <a:t>企業法知識を専門性に変える</a:t>
+              <a:rPr lang="en-US" sz="1400" b="1" dirty="0">
+                <a:solidFill>
+                  <a:srgbClr val="1E2761"/>
+                </a:solidFill>
+                <a:latin typeface="Meiryo UI" pitchFamily="34" charset="0"/>
+                <a:ea typeface="Meiryo UI" pitchFamily="34" charset="-122"/>
+                <a:cs typeface="Meiryo UI" pitchFamily="34" charset="-120"/>
+              </a:rPr>
+              <a:t>信託銀行とグループAM会社を異動し、運用の「頭脳」を極める</a:t>
             </a:r>
             <a:endParaRPr lang="en-US" sz="1400" dirty="0"/>
           </a:p>
         </p:txBody>
+      </p:sp>
+      <p:sp>
+        <p:nvSpPr>
+          <p:cNvPr id="24" name="Shape 19"/>
+          <p:cNvSpPr/>
+          <p:nvPr/>
+        </p:nvSpPr>
+        <p:spPr>
+          <a:xfrm>
+            <a:off x="4389120" y="1600200"/>
+            <a:ext cx="3566160" cy="4892040"/>
+          </a:xfrm>
+          <a:prstGeom prst="roundRect">
+            <a:avLst>
+              <a:gd name="adj" fmla="val 2564"/>
+            </a:avLst>
+          </a:prstGeom>
+          <a:solidFill>
+            <a:srgbClr val="FFFFFF"/>
+          </a:solidFill>
+          <a:ln w="19050">
+            <a:solidFill>
+              <a:srgbClr val="2E6F52"/>
+            </a:solidFill>
+            <a:prstDash val="solid"/>
+          </a:ln>
+        </p:spPr>
+      </p:sp>
+      <p:sp>
+        <p:nvSpPr>
+          <p:cNvPr id="25" name="Shape 20"/>
+          <p:cNvSpPr/>
+          <p:nvPr/>
+        </p:nvSpPr>
+        <p:spPr>
+          <a:xfrm>
+            <a:off x="4617720" y="1801368"/>
+            <a:ext cx="502920" cy="384048"/>
+          </a:xfrm>
+          <a:prstGeom prst="roundRect">
+            <a:avLst>
+              <a:gd name="adj" fmla="val 19048"/>
+            </a:avLst>
+          </a:prstGeom>
+          <a:solidFill>
+            <a:srgbClr val="2E6F52"/>
+          </a:solidFill>
+          <a:ln/>
+        </p:spPr>
+      </p:sp>
+      <p:sp>
+        <p:nvSpPr>
+          <p:cNvPr id="26" name="Text 21"/>
+          <p:cNvSpPr/>
+          <p:nvPr/>
+        </p:nvSpPr>
+        <p:spPr>
+          <a:xfrm>
+            <a:off x="4617720" y="1801368"/>
+            <a:ext cx="502920" cy="384048"/>
+          </a:xfrm>
+          <a:prstGeom prst="rect">
+            <a:avLst/>
+          </a:prstGeom>
+          <a:noFill/>
+          <a:ln/>
+        </p:spPr>
+        <p:txBody>
+          <a:bodyPr wrap="square" rtlCol="0" anchor="ctr"/>
+          <a:lstStyle/>
+          <a:p>
+            <a:pPr algn="ctr" indent="0" marL="0">
+              <a:buNone/>
+            </a:pPr>
+            <a:r>
+              <a:rPr lang="en-US" sz="1600" b="1" dirty="0">
+                <a:solidFill>
+                  <a:srgbClr val="FFFFFF"/>
+                </a:solidFill>
+                <a:latin typeface="Meiryo UI" pitchFamily="34" charset="0"/>
+                <a:ea typeface="Meiryo UI" pitchFamily="34" charset="-122"/>
+                <a:cs typeface="Meiryo UI" pitchFamily="34" charset="-120"/>
+              </a:rPr>
+              <a:t>2</a:t>
+            </a:r>
+            <a:endParaRPr lang="en-US" sz="1600" dirty="0"/>
+          </a:p>
+        </p:txBody>
+      </p:sp>
+      <p:sp>
+        <p:nvSpPr>
+          <p:cNvPr id="27" name="Text 22"/>
+          <p:cNvSpPr/>
+          <p:nvPr/>
+        </p:nvSpPr>
+        <p:spPr>
+          <a:xfrm>
+            <a:off x="5257800" y="1764792"/>
+            <a:ext cx="2468880" cy="502920"/>
+          </a:xfrm>
+          <a:prstGeom prst="rect">
+            <a:avLst/>
+          </a:prstGeom>
+          <a:noFill/>
+          <a:ln/>
+        </p:spPr>
+        <p:txBody>
+          <a:bodyPr wrap="square" rtlCol="0" anchor="ctr"/>
+          <a:lstStyle/>
+          <a:p>
+            <a:pPr indent="0" marL="0">
+              <a:lnSpc>
+                <a:spcPct val="105000"/>
+              </a:lnSpc>
+              <a:buNone/>
+            </a:pPr>
+            <a:r>
+              <a:rPr lang="en-US" sz="1500" b="1" dirty="0">
+                <a:solidFill>
+                  <a:srgbClr val="000000"/>
+                </a:solidFill>
+                <a:latin typeface="Meiryo UI" pitchFamily="34" charset="0"/>
+                <a:ea typeface="Meiryo UI" pitchFamily="34" charset="-122"/>
+                <a:cs typeface="Meiryo UI" pitchFamily="34" charset="-120"/>
+              </a:rPr>
+              <a:t>信託銀行の運用業務を中心とするキャリア</a:t>
+            </a:r>
+            <a:endParaRPr lang="en-US" sz="1500" dirty="0"/>
+          </a:p>
+        </p:txBody>
+      </p:sp>
+      <p:sp>
+        <p:nvSpPr>
+          <p:cNvPr id="28" name="Shape 23"/>
+          <p:cNvSpPr/>
+          <p:nvPr/>
+        </p:nvSpPr>
+        <p:spPr>
+          <a:xfrm>
+            <a:off x="4645152" y="2468880"/>
+            <a:ext cx="566928" cy="566928"/>
+          </a:xfrm>
+          <a:prstGeom prst="ellipse">
+            <a:avLst/>
+          </a:prstGeom>
+          <a:solidFill>
+            <a:srgbClr val="2E6F52"/>
+          </a:solidFill>
+          <a:ln/>
+        </p:spPr>
       </p:sp>
       <p:pic>
         <p:nvPicPr>
-          <p:cNvPr id="21" name="Image 3" descr="icon_arrow_dark.png">    </p:cNvPr>
+          <p:cNvPr id="29" name="Image 3" descr="icon_contract.png">    </p:cNvPr>
           <p:cNvPicPr>
             <a:picLocks noChangeAspect="1"/>
           </p:cNvPicPr>
@@ -2938,8 +3221,8 @@
         </p:blipFill>
         <p:spPr>
           <a:xfrm>
-            <a:off x="5852160" y="3877056"/>
-            <a:ext cx="219456" cy="292608"/>
+            <a:off x="4764024" y="2587752"/>
+            <a:ext cx="329184" cy="329184"/>
           </a:xfrm>
           <a:prstGeom prst="rect">
             <a:avLst/>
@@ -2948,120 +3231,167 @@
       </p:pic>
       <p:sp>
         <p:nvSpPr>
-          <p:cNvPr id="22" name="Shape 16"/>
-          <p:cNvSpPr/>
-          <p:nvPr/>
-        </p:nvSpPr>
-        <p:spPr>
-          <a:xfrm>
-            <a:off x="6089904" y="2057400"/>
-            <a:ext cx="2468880" cy="3931920"/>
-          </a:xfrm>
-          <a:prstGeom prst="roundRect">
-            <a:avLst>
-              <a:gd name="adj" fmla="val 3704"/>
-            </a:avLst>
+          <p:cNvPr id="30" name="Text 24"/>
+          <p:cNvSpPr/>
+          <p:nvPr/>
+        </p:nvSpPr>
+        <p:spPr>
+          <a:xfrm>
+            <a:off x="5349240" y="2441448"/>
+            <a:ext cx="2377440" cy="274320"/>
+          </a:xfrm>
+          <a:prstGeom prst="rect">
+            <a:avLst/>
+          </a:prstGeom>
+          <a:noFill/>
+          <a:ln/>
+        </p:spPr>
+        <p:txBody>
+          <a:bodyPr wrap="square" rtlCol="0" anchor="ctr"/>
+          <a:lstStyle/>
+          <a:p>
+            <a:pPr indent="0" marL="0">
+              <a:buNone/>
+            </a:pPr>
+            <a:r>
+              <a:rPr lang="en-US" sz="1300" b="1" dirty="0">
+                <a:solidFill>
+                  <a:srgbClr val="000000"/>
+                </a:solidFill>
+                <a:latin typeface="Meiryo UI" pitchFamily="34" charset="0"/>
+                <a:ea typeface="Meiryo UI" pitchFamily="34" charset="-122"/>
+                <a:cs typeface="Meiryo UI" pitchFamily="34" charset="-120"/>
+              </a:rPr>
+              <a:t>入行〜5年目</a:t>
+            </a:r>
+            <a:endParaRPr lang="en-US" sz="1300" dirty="0"/>
+          </a:p>
+        </p:txBody>
+      </p:sp>
+      <p:sp>
+        <p:nvSpPr>
+          <p:cNvPr id="31" name="Text 25"/>
+          <p:cNvSpPr/>
+          <p:nvPr/>
+        </p:nvSpPr>
+        <p:spPr>
+          <a:xfrm>
+            <a:off x="5349240" y="2706624"/>
+            <a:ext cx="2377440" cy="594360"/>
+          </a:xfrm>
+          <a:prstGeom prst="rect">
+            <a:avLst/>
+          </a:prstGeom>
+          <a:noFill/>
+          <a:ln/>
+        </p:spPr>
+        <p:txBody>
+          <a:bodyPr wrap="square" rtlCol="0" anchor="ctr"/>
+          <a:lstStyle/>
+          <a:p>
+            <a:pPr indent="0" marL="0">
+              <a:lnSpc>
+                <a:spcPct val="105000"/>
+              </a:lnSpc>
+              <a:buNone/>
+            </a:pPr>
+            <a:r>
+              <a:rPr lang="en-US" sz="1400" dirty="0">
+                <a:solidFill>
+                  <a:srgbClr val="000000"/>
+                </a:solidFill>
+                <a:latin typeface="Meiryo UI" pitchFamily="34" charset="0"/>
+                <a:ea typeface="Meiryo UI" pitchFamily="34" charset="-122"/>
+                <a:cs typeface="Meiryo UI" pitchFamily="34" charset="-120"/>
+              </a:rPr>
+              <a:t>信託銀行</a:t>
+            </a:r>
+            <a:endParaRPr lang="en-US" sz="1400" dirty="0"/>
+          </a:p>
+          <a:p>
+            <a:pPr indent="0" marL="0">
+              <a:lnSpc>
+                <a:spcPct val="105000"/>
+              </a:lnSpc>
+              <a:buNone/>
+            </a:pPr>
+            <a:r>
+              <a:rPr lang="en-US" sz="1400" dirty="0">
+                <a:solidFill>
+                  <a:srgbClr val="000000"/>
+                </a:solidFill>
+                <a:latin typeface="Meiryo UI" pitchFamily="34" charset="0"/>
+                <a:ea typeface="Meiryo UI" pitchFamily="34" charset="-122"/>
+                <a:cs typeface="Meiryo UI" pitchFamily="34" charset="-120"/>
+              </a:rPr>
+              <a:t>年金信託業務部門</a:t>
+            </a:r>
+            <a:endParaRPr lang="en-US" sz="1400" dirty="0"/>
+          </a:p>
+        </p:txBody>
+      </p:sp>
+      <p:sp>
+        <p:nvSpPr>
+          <p:cNvPr id="32" name="Text 26"/>
+          <p:cNvSpPr/>
+          <p:nvPr/>
+        </p:nvSpPr>
+        <p:spPr>
+          <a:xfrm>
+            <a:off x="4645152" y="3035808"/>
+            <a:ext cx="566928" cy="292608"/>
+          </a:xfrm>
+          <a:prstGeom prst="rect">
+            <a:avLst/>
+          </a:prstGeom>
+          <a:noFill/>
+          <a:ln/>
+        </p:spPr>
+        <p:txBody>
+          <a:bodyPr wrap="square" rtlCol="0" anchor="ctr"/>
+          <a:lstStyle/>
+          <a:p>
+            <a:pPr algn="ctr" indent="0" marL="0">
+              <a:buNone/>
+            </a:pPr>
+            <a:r>
+              <a:rPr lang="en-US" sz="1800" dirty="0">
+                <a:solidFill>
+                  <a:srgbClr val="2E6F52"/>
+                </a:solidFill>
+                <a:latin typeface="Meiryo UI" pitchFamily="34" charset="0"/>
+                <a:ea typeface="Meiryo UI" pitchFamily="34" charset="-122"/>
+                <a:cs typeface="Meiryo UI" pitchFamily="34" charset="-120"/>
+              </a:rPr>
+              <a:t>↓</a:t>
+            </a:r>
+            <a:endParaRPr lang="en-US" sz="1800" dirty="0"/>
+          </a:p>
+        </p:txBody>
+      </p:sp>
+      <p:sp>
+        <p:nvSpPr>
+          <p:cNvPr id="33" name="Shape 27"/>
+          <p:cNvSpPr/>
+          <p:nvPr/>
+        </p:nvSpPr>
+        <p:spPr>
+          <a:xfrm>
+            <a:off x="4645152" y="3328416"/>
+            <a:ext cx="566928" cy="566928"/>
+          </a:xfrm>
+          <a:prstGeom prst="ellipse">
+            <a:avLst/>
           </a:prstGeom>
           <a:solidFill>
-            <a:srgbClr val="FFFFFF"/>
-          </a:solidFill>
-          <a:ln w="25400">
-            <a:solidFill>
-              <a:srgbClr val="C9A227"/>
-            </a:solidFill>
-            <a:prstDash val="solid"/>
-          </a:ln>
-        </p:spPr>
-      </p:sp>
-      <p:sp>
-        <p:nvSpPr>
-          <p:cNvPr id="23" name="Shape 17"/>
-          <p:cNvSpPr/>
-          <p:nvPr/>
-        </p:nvSpPr>
-        <p:spPr>
-          <a:xfrm>
-            <a:off x="6821424" y="2313432"/>
-            <a:ext cx="1005840" cy="365760"/>
-          </a:xfrm>
-          <a:prstGeom prst="roundRect">
-            <a:avLst>
-              <a:gd name="adj" fmla="val 20000"/>
-            </a:avLst>
-          </a:prstGeom>
-          <a:solidFill>
-            <a:srgbClr val="FFFFFF"/>
-          </a:solidFill>
-          <a:ln w="15875">
-            <a:solidFill>
-              <a:srgbClr val="1E2761"/>
-            </a:solidFill>
-            <a:prstDash val="solid"/>
-          </a:ln>
-        </p:spPr>
-      </p:sp>
-      <p:sp>
-        <p:nvSpPr>
-          <p:cNvPr id="24" name="Text 18"/>
-          <p:cNvSpPr/>
-          <p:nvPr/>
-        </p:nvSpPr>
-        <p:spPr>
-          <a:xfrm>
-            <a:off x="6821424" y="2313432"/>
-            <a:ext cx="1005840" cy="365760"/>
-          </a:xfrm>
-          <a:prstGeom prst="rect">
-            <a:avLst/>
-          </a:prstGeom>
-          <a:noFill/>
-          <a:ln/>
-        </p:spPr>
-        <p:txBody>
-          <a:bodyPr wrap="square" rtlCol="0" anchor="ctr"/>
-          <a:lstStyle/>
-          <a:p>
-            <a:pPr algn="ctr" indent="0" marL="0">
-              <a:buNone/>
-            </a:pPr>
-            <a:r>
-              <a:rPr lang="en-US" sz="1400" b="1" dirty="0">
-                <a:solidFill>
-                  <a:srgbClr val="000000"/>
-                </a:solidFill>
-                <a:latin typeface="Meiryo UI" pitchFamily="34" charset="0"/>
-                <a:ea typeface="Meiryo UI" pitchFamily="34" charset="-122"/>
-                <a:cs typeface="Meiryo UI" pitchFamily="34" charset="-120"/>
-              </a:rPr>
-              <a:t>Phase 3</a:t>
-            </a:r>
-            <a:endParaRPr lang="en-US" sz="1400" dirty="0"/>
-          </a:p>
-        </p:txBody>
-      </p:sp>
-      <p:sp>
-        <p:nvSpPr>
-          <p:cNvPr id="25" name="Shape 19"/>
-          <p:cNvSpPr/>
-          <p:nvPr/>
-        </p:nvSpPr>
-        <p:spPr>
-          <a:xfrm>
-            <a:off x="6912864" y="2834640"/>
-            <a:ext cx="822960" cy="822960"/>
-          </a:xfrm>
-          <a:prstGeom prst="ellipse">
-            <a:avLst/>
-          </a:prstGeom>
-          <a:solidFill>
-            <a:srgbClr val="1E2761"/>
+            <a:srgbClr val="2E6F52"/>
           </a:solidFill>
           <a:ln/>
         </p:spPr>
       </p:sp>
       <p:pic>
         <p:nvPicPr>
-          <p:cNvPr id="26" name="Image 4" descr="icon_handshake.png">    </p:cNvPr>
+          <p:cNvPr id="34" name="Image 4" descr="icon_exchange.png">    </p:cNvPr>
           <p:cNvPicPr>
             <a:picLocks noChangeAspect="1"/>
           </p:cNvPicPr>
@@ -3075,8 +3405,8 @@
         </p:blipFill>
         <p:spPr>
           <a:xfrm>
-            <a:off x="7132320" y="3054096"/>
-            <a:ext cx="384048" cy="384048"/>
+            <a:off x="4764024" y="3447288"/>
+            <a:ext cx="329184" cy="329184"/>
           </a:xfrm>
           <a:prstGeom prst="rect">
             <a:avLst/>
@@ -3085,14 +3415,14 @@
       </p:pic>
       <p:sp>
         <p:nvSpPr>
-          <p:cNvPr id="27" name="Text 20"/>
-          <p:cNvSpPr/>
-          <p:nvPr/>
-        </p:nvSpPr>
-        <p:spPr>
-          <a:xfrm>
-            <a:off x="6227064" y="3794760"/>
-            <a:ext cx="2194560" cy="320040"/>
+          <p:cNvPr id="35" name="Text 28"/>
+          <p:cNvSpPr/>
+          <p:nvPr/>
+        </p:nvSpPr>
+        <p:spPr>
+          <a:xfrm>
+            <a:off x="5349240" y="3300984"/>
+            <a:ext cx="2377440" cy="274320"/>
           </a:xfrm>
           <a:prstGeom prst="rect">
             <a:avLst/>
@@ -3104,131 +3434,148 @@
           <a:bodyPr wrap="square" rtlCol="0" anchor="ctr"/>
           <a:lstStyle/>
           <a:p>
+            <a:pPr indent="0" marL="0">
+              <a:buNone/>
+            </a:pPr>
+            <a:r>
+              <a:rPr lang="en-US" sz="1300" b="1" dirty="0">
+                <a:solidFill>
+                  <a:srgbClr val="000000"/>
+                </a:solidFill>
+                <a:latin typeface="Meiryo UI" pitchFamily="34" charset="0"/>
+                <a:ea typeface="Meiryo UI" pitchFamily="34" charset="-122"/>
+                <a:cs typeface="Meiryo UI" pitchFamily="34" charset="-120"/>
+              </a:rPr>
+              <a:t>6〜10年目</a:t>
+            </a:r>
+            <a:endParaRPr lang="en-US" sz="1300" dirty="0"/>
+          </a:p>
+        </p:txBody>
+      </p:sp>
+      <p:sp>
+        <p:nvSpPr>
+          <p:cNvPr id="36" name="Text 29"/>
+          <p:cNvSpPr/>
+          <p:nvPr/>
+        </p:nvSpPr>
+        <p:spPr>
+          <a:xfrm>
+            <a:off x="5349240" y="3566160"/>
+            <a:ext cx="2377440" cy="594360"/>
+          </a:xfrm>
+          <a:prstGeom prst="rect">
+            <a:avLst/>
+          </a:prstGeom>
+          <a:noFill/>
+          <a:ln/>
+        </p:spPr>
+        <p:txBody>
+          <a:bodyPr wrap="square" rtlCol="0" anchor="ctr"/>
+          <a:lstStyle/>
+          <a:p>
+            <a:pPr indent="0" marL="0">
+              <a:lnSpc>
+                <a:spcPct val="105000"/>
+              </a:lnSpc>
+              <a:buNone/>
+            </a:pPr>
+            <a:r>
+              <a:rPr lang="en-US" sz="1400" dirty="0">
+                <a:solidFill>
+                  <a:srgbClr val="000000"/>
+                </a:solidFill>
+                <a:latin typeface="Meiryo UI" pitchFamily="34" charset="0"/>
+                <a:ea typeface="Meiryo UI" pitchFamily="34" charset="-122"/>
+                <a:cs typeface="Meiryo UI" pitchFamily="34" charset="-120"/>
+              </a:rPr>
+              <a:t>グループAM会社へ</a:t>
+            </a:r>
+            <a:endParaRPr lang="en-US" sz="1400" dirty="0"/>
+          </a:p>
+          <a:p>
+            <a:pPr indent="0" marL="0">
+              <a:lnSpc>
+                <a:spcPct val="105000"/>
+              </a:lnSpc>
+              <a:buNone/>
+            </a:pPr>
+            <a:r>
+              <a:rPr lang="en-US" sz="1400" dirty="0">
+                <a:solidFill>
+                  <a:srgbClr val="000000"/>
+                </a:solidFill>
+                <a:latin typeface="Meiryo UI" pitchFamily="34" charset="0"/>
+                <a:ea typeface="Meiryo UI" pitchFamily="34" charset="-122"/>
+                <a:cs typeface="Meiryo UI" pitchFamily="34" charset="-120"/>
+              </a:rPr>
+              <a:t>出向</a:t>
+            </a:r>
+            <a:endParaRPr lang="en-US" sz="1400" dirty="0"/>
+          </a:p>
+        </p:txBody>
+      </p:sp>
+      <p:sp>
+        <p:nvSpPr>
+          <p:cNvPr id="37" name="Text 30"/>
+          <p:cNvSpPr/>
+          <p:nvPr/>
+        </p:nvSpPr>
+        <p:spPr>
+          <a:xfrm>
+            <a:off x="4645152" y="3895344"/>
+            <a:ext cx="566928" cy="292608"/>
+          </a:xfrm>
+          <a:prstGeom prst="rect">
+            <a:avLst/>
+          </a:prstGeom>
+          <a:noFill/>
+          <a:ln/>
+        </p:spPr>
+        <p:txBody>
+          <a:bodyPr wrap="square" rtlCol="0" anchor="ctr"/>
+          <a:lstStyle/>
+          <a:p>
             <a:pPr algn="ctr" indent="0" marL="0">
               <a:buNone/>
             </a:pPr>
             <a:r>
-              <a:rPr lang="en-US" sz="1400" b="1" dirty="0">
-                <a:solidFill>
-                  <a:srgbClr val="000000"/>
-                </a:solidFill>
-                <a:latin typeface="Meiryo UI" pitchFamily="34" charset="0"/>
-                <a:ea typeface="Meiryo UI" pitchFamily="34" charset="-122"/>
-                <a:cs typeface="Meiryo UI" pitchFamily="34" charset="-120"/>
-              </a:rPr>
-              <a:t>11〜15年目</a:t>
-            </a:r>
-            <a:endParaRPr lang="en-US" sz="1400" dirty="0"/>
-          </a:p>
-        </p:txBody>
-      </p:sp>
-      <p:sp>
-        <p:nvSpPr>
-          <p:cNvPr id="28" name="Text 21"/>
-          <p:cNvSpPr/>
-          <p:nvPr/>
-        </p:nvSpPr>
-        <p:spPr>
-          <a:xfrm>
-            <a:off x="6227064" y="4114800"/>
-            <a:ext cx="2194560" cy="822960"/>
-          </a:xfrm>
-          <a:prstGeom prst="rect">
-            <a:avLst/>
-          </a:prstGeom>
-          <a:noFill/>
-          <a:ln/>
-        </p:spPr>
-        <p:txBody>
-          <a:bodyPr wrap="square" rtlCol="0" anchor="ctr"/>
-          <a:lstStyle/>
-          <a:p>
-            <a:pPr algn="ctr" indent="0" marL="0">
-              <a:lnSpc>
-                <a:spcPct val="110000"/>
-              </a:lnSpc>
-              <a:buNone/>
-            </a:pPr>
-            <a:r>
-              <a:rPr lang="en-US" sz="1400" b="1" dirty="0">
-                <a:solidFill>
-                  <a:srgbClr val="000000"/>
-                </a:solidFill>
-                <a:latin typeface="Meiryo UI" pitchFamily="34" charset="0"/>
-                <a:ea typeface="Meiryo UI" pitchFamily="34" charset="-122"/>
-                <a:cs typeface="Meiryo UI" pitchFamily="34" charset="-120"/>
-              </a:rPr>
-              <a:t>事業承継・</a:t>
-            </a:r>
-            <a:endParaRPr lang="en-US" sz="1400" dirty="0"/>
-          </a:p>
-          <a:p>
-            <a:pPr algn="ctr" indent="0" marL="0">
-              <a:lnSpc>
-                <a:spcPct val="110000"/>
-              </a:lnSpc>
-              <a:buNone/>
-            </a:pPr>
-            <a:r>
-              <a:rPr lang="en-US" sz="1400" b="1" dirty="0">
-                <a:solidFill>
-                  <a:srgbClr val="000000"/>
-                </a:solidFill>
-                <a:latin typeface="Meiryo UI" pitchFamily="34" charset="0"/>
-                <a:ea typeface="Meiryo UI" pitchFamily="34" charset="-122"/>
-                <a:cs typeface="Meiryo UI" pitchFamily="34" charset="-120"/>
-              </a:rPr>
-              <a:t>M&amp;Aアドバイザリー</a:t>
-            </a:r>
-            <a:endParaRPr lang="en-US" sz="1400" dirty="0"/>
-          </a:p>
-        </p:txBody>
-      </p:sp>
-      <p:sp>
-        <p:nvSpPr>
-          <p:cNvPr id="29" name="Text 22"/>
-          <p:cNvSpPr/>
-          <p:nvPr/>
-        </p:nvSpPr>
-        <p:spPr>
-          <a:xfrm>
-            <a:off x="6272784" y="4983480"/>
-            <a:ext cx="2103120" cy="914400"/>
-          </a:xfrm>
-          <a:prstGeom prst="rect">
-            <a:avLst/>
-          </a:prstGeom>
-          <a:noFill/>
-          <a:ln/>
-        </p:spPr>
-        <p:txBody>
-          <a:bodyPr wrap="square" rtlCol="0" anchor="ctr"/>
-          <a:lstStyle/>
-          <a:p>
-            <a:pPr algn="ctr" indent="0" marL="0">
-              <a:lnSpc>
-                <a:spcPct val="115000"/>
-              </a:lnSpc>
-              <a:buNone/>
-            </a:pPr>
-            <a:r>
-              <a:rPr lang="en-US" sz="1400" dirty="0">
-                <a:solidFill>
-                  <a:srgbClr val="000000"/>
-                </a:solidFill>
-                <a:latin typeface="Meiryo UI" pitchFamily="34" charset="0"/>
-                <a:ea typeface="Meiryo UI" pitchFamily="34" charset="-122"/>
-                <a:cs typeface="Meiryo UI" pitchFamily="34" charset="-120"/>
-              </a:rPr>
-              <a:t>財務×法務を統合する差別化ポイント</a:t>
-            </a:r>
-            <a:endParaRPr lang="en-US" sz="1400" dirty="0"/>
-          </a:p>
-        </p:txBody>
+              <a:rPr lang="en-US" sz="1800" dirty="0">
+                <a:solidFill>
+                  <a:srgbClr val="2E6F52"/>
+                </a:solidFill>
+                <a:latin typeface="Meiryo UI" pitchFamily="34" charset="0"/>
+                <a:ea typeface="Meiryo UI" pitchFamily="34" charset="-122"/>
+                <a:cs typeface="Meiryo UI" pitchFamily="34" charset="-120"/>
+              </a:rPr>
+              <a:t>↓</a:t>
+            </a:r>
+            <a:endParaRPr lang="en-US" sz="1800" dirty="0"/>
+          </a:p>
+        </p:txBody>
+      </p:sp>
+      <p:sp>
+        <p:nvSpPr>
+          <p:cNvPr id="38" name="Shape 31"/>
+          <p:cNvSpPr/>
+          <p:nvPr/>
+        </p:nvSpPr>
+        <p:spPr>
+          <a:xfrm>
+            <a:off x="4645152" y="4187952"/>
+            <a:ext cx="566928" cy="566928"/>
+          </a:xfrm>
+          <a:prstGeom prst="ellipse">
+            <a:avLst/>
+          </a:prstGeom>
+          <a:solidFill>
+            <a:srgbClr val="2E6F52"/>
+          </a:solidFill>
+          <a:ln/>
+        </p:spPr>
       </p:sp>
       <p:pic>
         <p:nvPicPr>
-          <p:cNvPr id="30" name="Image 5" descr="icon_arrow_dark.png">    </p:cNvPr>
+          <p:cNvPr id="39" name="Image 5" descr="icon_usertie.png">    </p:cNvPr>
           <p:cNvPicPr>
             <a:picLocks noChangeAspect="1"/>
           </p:cNvPicPr>
@@ -3242,8 +3589,8 @@
         </p:blipFill>
         <p:spPr>
           <a:xfrm>
-            <a:off x="8577072" y="3877056"/>
-            <a:ext cx="219456" cy="292608"/>
+            <a:off x="4764024" y="4306824"/>
+            <a:ext cx="329184" cy="329184"/>
           </a:xfrm>
           <a:prstGeom prst="rect">
             <a:avLst/>
@@ -3252,18 +3599,119 @@
       </p:pic>
       <p:sp>
         <p:nvSpPr>
-          <p:cNvPr id="31" name="Shape 23"/>
-          <p:cNvSpPr/>
-          <p:nvPr/>
-        </p:nvSpPr>
-        <p:spPr>
-          <a:xfrm>
-            <a:off x="8814816" y="2057400"/>
-            <a:ext cx="2468880" cy="3931920"/>
+          <p:cNvPr id="40" name="Text 32"/>
+          <p:cNvSpPr/>
+          <p:nvPr/>
+        </p:nvSpPr>
+        <p:spPr>
+          <a:xfrm>
+            <a:off x="5349240" y="4160520"/>
+            <a:ext cx="2377440" cy="274320"/>
+          </a:xfrm>
+          <a:prstGeom prst="rect">
+            <a:avLst/>
+          </a:prstGeom>
+          <a:noFill/>
+          <a:ln/>
+        </p:spPr>
+        <p:txBody>
+          <a:bodyPr wrap="square" rtlCol="0" anchor="ctr"/>
+          <a:lstStyle/>
+          <a:p>
+            <a:pPr indent="0" marL="0">
+              <a:buNone/>
+            </a:pPr>
+            <a:r>
+              <a:rPr lang="en-US" sz="1300" b="1" dirty="0">
+                <a:solidFill>
+                  <a:srgbClr val="000000"/>
+                </a:solidFill>
+                <a:latin typeface="Meiryo UI" pitchFamily="34" charset="0"/>
+                <a:ea typeface="Meiryo UI" pitchFamily="34" charset="-122"/>
+                <a:cs typeface="Meiryo UI" pitchFamily="34" charset="-120"/>
+              </a:rPr>
+              <a:t>11年目〜</a:t>
+            </a:r>
+            <a:endParaRPr lang="en-US" sz="1300" dirty="0"/>
+          </a:p>
+        </p:txBody>
+      </p:sp>
+      <p:sp>
+        <p:nvSpPr>
+          <p:cNvPr id="41" name="Text 33"/>
+          <p:cNvSpPr/>
+          <p:nvPr/>
+        </p:nvSpPr>
+        <p:spPr>
+          <a:xfrm>
+            <a:off x="5349240" y="4425696"/>
+            <a:ext cx="2377440" cy="594360"/>
+          </a:xfrm>
+          <a:prstGeom prst="rect">
+            <a:avLst/>
+          </a:prstGeom>
+          <a:noFill/>
+          <a:ln/>
+        </p:spPr>
+        <p:txBody>
+          <a:bodyPr wrap="square" rtlCol="0" anchor="ctr"/>
+          <a:lstStyle/>
+          <a:p>
+            <a:pPr indent="0" marL="0">
+              <a:lnSpc>
+                <a:spcPct val="105000"/>
+              </a:lnSpc>
+              <a:buNone/>
+            </a:pPr>
+            <a:r>
+              <a:rPr lang="en-US" sz="1400" dirty="0">
+                <a:solidFill>
+                  <a:srgbClr val="000000"/>
+                </a:solidFill>
+                <a:latin typeface="Meiryo UI" pitchFamily="34" charset="0"/>
+                <a:ea typeface="Meiryo UI" pitchFamily="34" charset="-122"/>
+                <a:cs typeface="Meiryo UI" pitchFamily="34" charset="-120"/>
+              </a:rPr>
+              <a:t>信託銀行</a:t>
+            </a:r>
+            <a:endParaRPr lang="en-US" sz="1400" dirty="0"/>
+          </a:p>
+          <a:p>
+            <a:pPr indent="0" marL="0">
+              <a:lnSpc>
+                <a:spcPct val="105000"/>
+              </a:lnSpc>
+              <a:buNone/>
+            </a:pPr>
+            <a:r>
+              <a:rPr lang="en-US" sz="1400" dirty="0">
+                <a:solidFill>
+                  <a:srgbClr val="000000"/>
+                </a:solidFill>
+                <a:latin typeface="Meiryo UI" pitchFamily="34" charset="0"/>
+                <a:ea typeface="Meiryo UI" pitchFamily="34" charset="-122"/>
+                <a:cs typeface="Meiryo UI" pitchFamily="34" charset="-120"/>
+              </a:rPr>
+              <a:t>資産運用部門管理職</a:t>
+            </a:r>
+            <a:endParaRPr lang="en-US" sz="1400" dirty="0"/>
+          </a:p>
+        </p:txBody>
+      </p:sp>
+      <p:sp>
+        <p:nvSpPr>
+          <p:cNvPr id="42" name="Shape 34"/>
+          <p:cNvSpPr/>
+          <p:nvPr/>
+        </p:nvSpPr>
+        <p:spPr>
+          <a:xfrm>
+            <a:off x="4526280" y="5513832"/>
+            <a:ext cx="3291840" cy="822960"/>
           </a:xfrm>
           <a:prstGeom prst="roundRect">
             <a:avLst>
-              <a:gd name="adj" fmla="val 3704"/>
+              <a:gd name="adj" fmla="val 11111"/>
             </a:avLst>
           </a:prstGeom>
           <a:solidFill>
@@ -3271,7 +3719,7 @@
           </a:solidFill>
           <a:ln w="12700">
             <a:solidFill>
-              <a:srgbClr val="D0D5DD"/>
+              <a:srgbClr val="2E6F52"/>
             </a:solidFill>
             <a:prstDash val="solid"/>
           </a:ln>
@@ -3279,26 +3727,68 @@
       </p:sp>
       <p:sp>
         <p:nvSpPr>
-          <p:cNvPr id="32" name="Shape 24"/>
-          <p:cNvSpPr/>
-          <p:nvPr/>
-        </p:nvSpPr>
-        <p:spPr>
-          <a:xfrm>
-            <a:off x="9546336" y="2313432"/>
-            <a:ext cx="1005840" cy="365760"/>
+          <p:cNvPr id="43" name="Text 35"/>
+          <p:cNvSpPr/>
+          <p:nvPr/>
+        </p:nvSpPr>
+        <p:spPr>
+          <a:xfrm>
+            <a:off x="4663440" y="5577840"/>
+            <a:ext cx="3017520" cy="713232"/>
+          </a:xfrm>
+          <a:prstGeom prst="rect">
+            <a:avLst/>
+          </a:prstGeom>
+          <a:noFill/>
+          <a:ln/>
+        </p:spPr>
+        <p:txBody>
+          <a:bodyPr wrap="square" rtlCol="0" anchor="ctr"/>
+          <a:lstStyle/>
+          <a:p>
+            <a:pPr indent="0" marL="0">
+              <a:lnSpc>
+                <a:spcPct val="115000"/>
+              </a:lnSpc>
+              <a:buNone/>
+            </a:pPr>
+            <a:r>
+              <a:rPr lang="en-US" sz="1400" b="1" dirty="0">
+                <a:solidFill>
+                  <a:srgbClr val="2E6F52"/>
+                </a:solidFill>
+                <a:latin typeface="Meiryo UI" pitchFamily="34" charset="0"/>
+                <a:ea typeface="Meiryo UI" pitchFamily="34" charset="-122"/>
+                <a:cs typeface="Meiryo UI" pitchFamily="34" charset="-120"/>
+              </a:rPr>
+              <a:t>信託銀行に軸足を置きつつ、AM会社を経験し「委託する側」の視点も得る</a:t>
+            </a:r>
+            <a:endParaRPr lang="en-US" sz="1400" dirty="0"/>
+          </a:p>
+        </p:txBody>
+      </p:sp>
+      <p:sp>
+        <p:nvSpPr>
+          <p:cNvPr id="44" name="Shape 36"/>
+          <p:cNvSpPr/>
+          <p:nvPr/>
+        </p:nvSpPr>
+        <p:spPr>
+          <a:xfrm>
+            <a:off x="8229600" y="1600200"/>
+            <a:ext cx="3566160" cy="4892040"/>
           </a:xfrm>
           <a:prstGeom prst="roundRect">
             <a:avLst>
-              <a:gd name="adj" fmla="val 20000"/>
+              <a:gd name="adj" fmla="val 2564"/>
             </a:avLst>
           </a:prstGeom>
           <a:solidFill>
             <a:srgbClr val="FFFFFF"/>
           </a:solidFill>
-          <a:ln w="15875">
+          <a:ln w="19050">
             <a:solidFill>
-              <a:srgbClr val="1E2761"/>
+              <a:srgbClr val="8A4B1E"/>
             </a:solidFill>
             <a:prstDash val="solid"/>
           </a:ln>
@@ -3306,14 +3796,36 @@
       </p:sp>
       <p:sp>
         <p:nvSpPr>
-          <p:cNvPr id="33" name="Text 25"/>
-          <p:cNvSpPr/>
-          <p:nvPr/>
-        </p:nvSpPr>
-        <p:spPr>
-          <a:xfrm>
-            <a:off x="9546336" y="2313432"/>
-            <a:ext cx="1005840" cy="365760"/>
+          <p:cNvPr id="45" name="Shape 37"/>
+          <p:cNvSpPr/>
+          <p:nvPr/>
+        </p:nvSpPr>
+        <p:spPr>
+          <a:xfrm>
+            <a:off x="8458200" y="1801368"/>
+            <a:ext cx="502920" cy="384048"/>
+          </a:xfrm>
+          <a:prstGeom prst="roundRect">
+            <a:avLst>
+              <a:gd name="adj" fmla="val 19048"/>
+            </a:avLst>
+          </a:prstGeom>
+          <a:solidFill>
+            <a:srgbClr val="8A4B1E"/>
+          </a:solidFill>
+          <a:ln/>
+        </p:spPr>
+      </p:sp>
+      <p:sp>
+        <p:nvSpPr>
+          <p:cNvPr id="46" name="Text 38"/>
+          <p:cNvSpPr/>
+          <p:nvPr/>
+        </p:nvSpPr>
+        <p:spPr>
+          <a:xfrm>
+            <a:off x="8458200" y="1801368"/>
+            <a:ext cx="502920" cy="384048"/>
           </a:xfrm>
           <a:prstGeom prst="rect">
             <a:avLst/>
@@ -3329,43 +3841,85 @@
               <a:buNone/>
             </a:pPr>
             <a:r>
-              <a:rPr lang="en-US" sz="1400" b="1" dirty="0">
-                <a:solidFill>
-                  <a:srgbClr val="000000"/>
-                </a:solidFill>
-                <a:latin typeface="Meiryo UI" pitchFamily="34" charset="0"/>
-                <a:ea typeface="Meiryo UI" pitchFamily="34" charset="-122"/>
-                <a:cs typeface="Meiryo UI" pitchFamily="34" charset="-120"/>
-              </a:rPr>
-              <a:t>Phase 4</a:t>
-            </a:r>
-            <a:endParaRPr lang="en-US" sz="1400" dirty="0"/>
-          </a:p>
-        </p:txBody>
-      </p:sp>
-      <p:sp>
-        <p:nvSpPr>
-          <p:cNvPr id="34" name="Shape 26"/>
-          <p:cNvSpPr/>
-          <p:nvPr/>
-        </p:nvSpPr>
-        <p:spPr>
-          <a:xfrm>
-            <a:off x="9637776" y="2834640"/>
-            <a:ext cx="822960" cy="822960"/>
+              <a:rPr lang="en-US" sz="1600" b="1" dirty="0">
+                <a:solidFill>
+                  <a:srgbClr val="FFFFFF"/>
+                </a:solidFill>
+                <a:latin typeface="Meiryo UI" pitchFamily="34" charset="0"/>
+                <a:ea typeface="Meiryo UI" pitchFamily="34" charset="-122"/>
+                <a:cs typeface="Meiryo UI" pitchFamily="34" charset="-120"/>
+              </a:rPr>
+              <a:t>3</a:t>
+            </a:r>
+            <a:endParaRPr lang="en-US" sz="1600" dirty="0"/>
+          </a:p>
+        </p:txBody>
+      </p:sp>
+      <p:sp>
+        <p:nvSpPr>
+          <p:cNvPr id="47" name="Text 39"/>
+          <p:cNvSpPr/>
+          <p:nvPr/>
+        </p:nvSpPr>
+        <p:spPr>
+          <a:xfrm>
+            <a:off x="9098280" y="1764792"/>
+            <a:ext cx="2468880" cy="502920"/>
+          </a:xfrm>
+          <a:prstGeom prst="rect">
+            <a:avLst/>
+          </a:prstGeom>
+          <a:noFill/>
+          <a:ln/>
+        </p:spPr>
+        <p:txBody>
+          <a:bodyPr wrap="square" rtlCol="0" anchor="ctr"/>
+          <a:lstStyle/>
+          <a:p>
+            <a:pPr indent="0" marL="0">
+              <a:lnSpc>
+                <a:spcPct val="105000"/>
+              </a:lnSpc>
+              <a:buNone/>
+            </a:pPr>
+            <a:r>
+              <a:rPr lang="en-US" sz="1500" b="1" dirty="0">
+                <a:solidFill>
+                  <a:srgbClr val="000000"/>
+                </a:solidFill>
+                <a:latin typeface="Meiryo UI" pitchFamily="34" charset="0"/>
+                <a:ea typeface="Meiryo UI" pitchFamily="34" charset="-122"/>
+                <a:cs typeface="Meiryo UI" pitchFamily="34" charset="-120"/>
+              </a:rPr>
+              <a:t>銀行内で完結する運用キャリア（ゆうちょ銀行型）</a:t>
+            </a:r>
+            <a:endParaRPr lang="en-US" sz="1500" dirty="0"/>
+          </a:p>
+        </p:txBody>
+      </p:sp>
+      <p:sp>
+        <p:nvSpPr>
+          <p:cNvPr id="48" name="Shape 40"/>
+          <p:cNvSpPr/>
+          <p:nvPr/>
+        </p:nvSpPr>
+        <p:spPr>
+          <a:xfrm>
+            <a:off x="8485632" y="2468880"/>
+            <a:ext cx="566928" cy="566928"/>
           </a:xfrm>
           <a:prstGeom prst="ellipse">
             <a:avLst/>
           </a:prstGeom>
           <a:solidFill>
-            <a:srgbClr val="1E2761"/>
+            <a:srgbClr val="8A4B1E"/>
           </a:solidFill>
           <a:ln/>
         </p:spPr>
       </p:sp>
       <p:pic>
         <p:nvPicPr>
-          <p:cNvPr id="35" name="Image 6" descr="icon_crown.png">    </p:cNvPr>
+          <p:cNvPr id="49" name="Image 6" descr="icon_landmark.png">    </p:cNvPr>
           <p:cNvPicPr>
             <a:picLocks noChangeAspect="1"/>
           </p:cNvPicPr>
@@ -3379,8 +3933,8 @@
         </p:blipFill>
         <p:spPr>
           <a:xfrm>
-            <a:off x="9857232" y="3054096"/>
-            <a:ext cx="384048" cy="384048"/>
+            <a:off x="8604504" y="2587752"/>
+            <a:ext cx="329184" cy="329184"/>
           </a:xfrm>
           <a:prstGeom prst="rect">
             <a:avLst/>
@@ -3389,14 +3943,14 @@
       </p:pic>
       <p:sp>
         <p:nvSpPr>
-          <p:cNvPr id="36" name="Text 27"/>
-          <p:cNvSpPr/>
-          <p:nvPr/>
-        </p:nvSpPr>
-        <p:spPr>
-          <a:xfrm>
-            <a:off x="8951976" y="3794760"/>
-            <a:ext cx="2194560" cy="320040"/>
+          <p:cNvPr id="50" name="Text 41"/>
+          <p:cNvSpPr/>
+          <p:nvPr/>
+        </p:nvSpPr>
+        <p:spPr>
+          <a:xfrm>
+            <a:off x="9189720" y="2441448"/>
+            <a:ext cx="2377440" cy="274320"/>
           </a:xfrm>
           <a:prstGeom prst="rect">
             <a:avLst/>
@@ -3408,34 +3962,280 @@
           <a:bodyPr wrap="square" rtlCol="0" anchor="ctr"/>
           <a:lstStyle/>
           <a:p>
+            <a:pPr indent="0" marL="0">
+              <a:buNone/>
+            </a:pPr>
+            <a:r>
+              <a:rPr lang="en-US" sz="1300" b="1" dirty="0">
+                <a:solidFill>
+                  <a:srgbClr val="000000"/>
+                </a:solidFill>
+                <a:latin typeface="Meiryo UI" pitchFamily="34" charset="0"/>
+                <a:ea typeface="Meiryo UI" pitchFamily="34" charset="-122"/>
+                <a:cs typeface="Meiryo UI" pitchFamily="34" charset="-120"/>
+              </a:rPr>
+              <a:t>入行〜5年目</a:t>
+            </a:r>
+            <a:endParaRPr lang="en-US" sz="1300" dirty="0"/>
+          </a:p>
+        </p:txBody>
+      </p:sp>
+      <p:sp>
+        <p:nvSpPr>
+          <p:cNvPr id="51" name="Text 42"/>
+          <p:cNvSpPr/>
+          <p:nvPr/>
+        </p:nvSpPr>
+        <p:spPr>
+          <a:xfrm>
+            <a:off x="9189720" y="2706624"/>
+            <a:ext cx="2377440" cy="594360"/>
+          </a:xfrm>
+          <a:prstGeom prst="rect">
+            <a:avLst/>
+          </a:prstGeom>
+          <a:noFill/>
+          <a:ln/>
+        </p:spPr>
+        <p:txBody>
+          <a:bodyPr wrap="square" rtlCol="0" anchor="ctr"/>
+          <a:lstStyle/>
+          <a:p>
+            <a:pPr indent="0" marL="0">
+              <a:lnSpc>
+                <a:spcPct val="105000"/>
+              </a:lnSpc>
+              <a:buNone/>
+            </a:pPr>
+            <a:r>
+              <a:rPr lang="en-US" sz="1400" dirty="0">
+                <a:solidFill>
+                  <a:srgbClr val="000000"/>
+                </a:solidFill>
+                <a:latin typeface="Meiryo UI" pitchFamily="34" charset="0"/>
+                <a:ea typeface="Meiryo UI" pitchFamily="34" charset="-122"/>
+                <a:cs typeface="Meiryo UI" pitchFamily="34" charset="-120"/>
+              </a:rPr>
+              <a:t>銀行内</a:t>
+            </a:r>
+            <a:endParaRPr lang="en-US" sz="1400" dirty="0"/>
+          </a:p>
+          <a:p>
+            <a:pPr indent="0" marL="0">
+              <a:lnSpc>
+                <a:spcPct val="105000"/>
+              </a:lnSpc>
+              <a:buNone/>
+            </a:pPr>
+            <a:r>
+              <a:rPr lang="en-US" sz="1400" dirty="0">
+                <a:solidFill>
+                  <a:srgbClr val="000000"/>
+                </a:solidFill>
+                <a:latin typeface="Meiryo UI" pitchFamily="34" charset="0"/>
+                <a:ea typeface="Meiryo UI" pitchFamily="34" charset="-122"/>
+                <a:cs typeface="Meiryo UI" pitchFamily="34" charset="-120"/>
+              </a:rPr>
+              <a:t>市場運用部門</a:t>
+            </a:r>
+            <a:endParaRPr lang="en-US" sz="1400" dirty="0"/>
+          </a:p>
+        </p:txBody>
+      </p:sp>
+      <p:sp>
+        <p:nvSpPr>
+          <p:cNvPr id="52" name="Text 43"/>
+          <p:cNvSpPr/>
+          <p:nvPr/>
+        </p:nvSpPr>
+        <p:spPr>
+          <a:xfrm>
+            <a:off x="8485632" y="3035808"/>
+            <a:ext cx="566928" cy="292608"/>
+          </a:xfrm>
+          <a:prstGeom prst="rect">
+            <a:avLst/>
+          </a:prstGeom>
+          <a:noFill/>
+          <a:ln/>
+        </p:spPr>
+        <p:txBody>
+          <a:bodyPr wrap="square" rtlCol="0" anchor="ctr"/>
+          <a:lstStyle/>
+          <a:p>
             <a:pPr algn="ctr" indent="0" marL="0">
               <a:buNone/>
             </a:pPr>
             <a:r>
-              <a:rPr lang="en-US" sz="1400" b="1" dirty="0">
-                <a:solidFill>
-                  <a:srgbClr val="000000"/>
-                </a:solidFill>
-                <a:latin typeface="Meiryo UI" pitchFamily="34" charset="0"/>
-                <a:ea typeface="Meiryo UI" pitchFamily="34" charset="-122"/>
-                <a:cs typeface="Meiryo UI" pitchFamily="34" charset="-120"/>
-              </a:rPr>
-              <a:t>16年目〜</a:t>
+              <a:rPr lang="en-US" sz="1800" dirty="0">
+                <a:solidFill>
+                  <a:srgbClr val="8A4B1E"/>
+                </a:solidFill>
+                <a:latin typeface="Meiryo UI" pitchFamily="34" charset="0"/>
+                <a:ea typeface="Meiryo UI" pitchFamily="34" charset="-122"/>
+                <a:cs typeface="Meiryo UI" pitchFamily="34" charset="-120"/>
+              </a:rPr>
+              <a:t>↓</a:t>
+            </a:r>
+            <a:endParaRPr lang="en-US" sz="1800" dirty="0"/>
+          </a:p>
+        </p:txBody>
+      </p:sp>
+      <p:sp>
+        <p:nvSpPr>
+          <p:cNvPr id="53" name="Shape 44"/>
+          <p:cNvSpPr/>
+          <p:nvPr/>
+        </p:nvSpPr>
+        <p:spPr>
+          <a:xfrm>
+            <a:off x="8485632" y="3328416"/>
+            <a:ext cx="566928" cy="566928"/>
+          </a:xfrm>
+          <a:prstGeom prst="ellipse">
+            <a:avLst/>
+          </a:prstGeom>
+          <a:solidFill>
+            <a:srgbClr val="8A4B1E"/>
+          </a:solidFill>
+          <a:ln/>
+        </p:spPr>
+      </p:sp>
+      <p:pic>
+        <p:nvPicPr>
+          <p:cNvPr id="54" name="Image 7" descr="icon_chartpie.png">    </p:cNvPr>
+          <p:cNvPicPr>
+            <a:picLocks noChangeAspect="1"/>
+          </p:cNvPicPr>
+          <p:nvPr/>
+        </p:nvPicPr>
+        <p:blipFill>
+          <a:blip r:embed="rId8"/>
+          <a:stretch>
+            <a:fillRect/>
+          </a:stretch>
+        </p:blipFill>
+        <p:spPr>
+          <a:xfrm>
+            <a:off x="8604504" y="3447288"/>
+            <a:ext cx="329184" cy="329184"/>
+          </a:xfrm>
+          <a:prstGeom prst="rect">
+            <a:avLst/>
+          </a:prstGeom>
+        </p:spPr>
+      </p:pic>
+      <p:sp>
+        <p:nvSpPr>
+          <p:cNvPr id="55" name="Text 45"/>
+          <p:cNvSpPr/>
+          <p:nvPr/>
+        </p:nvSpPr>
+        <p:spPr>
+          <a:xfrm>
+            <a:off x="9189720" y="3300984"/>
+            <a:ext cx="2377440" cy="274320"/>
+          </a:xfrm>
+          <a:prstGeom prst="rect">
+            <a:avLst/>
+          </a:prstGeom>
+          <a:noFill/>
+          <a:ln/>
+        </p:spPr>
+        <p:txBody>
+          <a:bodyPr wrap="square" rtlCol="0" anchor="ctr"/>
+          <a:lstStyle/>
+          <a:p>
+            <a:pPr indent="0" marL="0">
+              <a:buNone/>
+            </a:pPr>
+            <a:r>
+              <a:rPr lang="en-US" sz="1300" b="1" dirty="0">
+                <a:solidFill>
+                  <a:srgbClr val="000000"/>
+                </a:solidFill>
+                <a:latin typeface="Meiryo UI" pitchFamily="34" charset="0"/>
+                <a:ea typeface="Meiryo UI" pitchFamily="34" charset="-122"/>
+                <a:cs typeface="Meiryo UI" pitchFamily="34" charset="-120"/>
+              </a:rPr>
+              <a:t>6〜12年目</a:t>
+            </a:r>
+            <a:endParaRPr lang="en-US" sz="1300" dirty="0"/>
+          </a:p>
+        </p:txBody>
+      </p:sp>
+      <p:sp>
+        <p:nvSpPr>
+          <p:cNvPr id="56" name="Text 46"/>
+          <p:cNvSpPr/>
+          <p:nvPr/>
+        </p:nvSpPr>
+        <p:spPr>
+          <a:xfrm>
+            <a:off x="9189720" y="3566160"/>
+            <a:ext cx="2377440" cy="594360"/>
+          </a:xfrm>
+          <a:prstGeom prst="rect">
+            <a:avLst/>
+          </a:prstGeom>
+          <a:noFill/>
+          <a:ln/>
+        </p:spPr>
+        <p:txBody>
+          <a:bodyPr wrap="square" rtlCol="0" anchor="ctr"/>
+          <a:lstStyle/>
+          <a:p>
+            <a:pPr indent="0" marL="0">
+              <a:lnSpc>
+                <a:spcPct val="105000"/>
+              </a:lnSpc>
+              <a:buNone/>
+            </a:pPr>
+            <a:r>
+              <a:rPr lang="en-US" sz="1400" dirty="0">
+                <a:solidFill>
+                  <a:srgbClr val="000000"/>
+                </a:solidFill>
+                <a:latin typeface="Meiryo UI" pitchFamily="34" charset="0"/>
+                <a:ea typeface="Meiryo UI" pitchFamily="34" charset="-122"/>
+                <a:cs typeface="Meiryo UI" pitchFamily="34" charset="-120"/>
+              </a:rPr>
+              <a:t>銀行内</a:t>
             </a:r>
             <a:endParaRPr lang="en-US" sz="1400" dirty="0"/>
           </a:p>
-        </p:txBody>
-      </p:sp>
-      <p:sp>
-        <p:nvSpPr>
-          <p:cNvPr id="37" name="Text 28"/>
-          <p:cNvSpPr/>
-          <p:nvPr/>
-        </p:nvSpPr>
-        <p:spPr>
-          <a:xfrm>
-            <a:off x="8951976" y="4114800"/>
-            <a:ext cx="2194560" cy="822960"/>
+          <a:p>
+            <a:pPr indent="0" marL="0">
+              <a:lnSpc>
+                <a:spcPct val="105000"/>
+              </a:lnSpc>
+              <a:buNone/>
+            </a:pPr>
+            <a:r>
+              <a:rPr lang="en-US" sz="1400" dirty="0">
+                <a:solidFill>
+                  <a:srgbClr val="000000"/>
+                </a:solidFill>
+                <a:latin typeface="Meiryo UI" pitchFamily="34" charset="0"/>
+                <a:ea typeface="Meiryo UI" pitchFamily="34" charset="-122"/>
+                <a:cs typeface="Meiryo UI" pitchFamily="34" charset="-120"/>
+              </a:rPr>
+              <a:t>資産運用の専門職</a:t>
+            </a:r>
+            <a:endParaRPr lang="en-US" sz="1400" dirty="0"/>
+          </a:p>
+        </p:txBody>
+      </p:sp>
+      <p:sp>
+        <p:nvSpPr>
+          <p:cNvPr id="57" name="Text 47"/>
+          <p:cNvSpPr/>
+          <p:nvPr/>
+        </p:nvSpPr>
+        <p:spPr>
+          <a:xfrm>
+            <a:off x="8485632" y="3895344"/>
+            <a:ext cx="566928" cy="292608"/>
           </a:xfrm>
           <a:prstGeom prst="rect">
             <a:avLst/>
@@ -3448,41 +4248,163 @@
           <a:lstStyle/>
           <a:p>
             <a:pPr algn="ctr" indent="0" marL="0">
+              <a:buNone/>
+            </a:pPr>
+            <a:r>
+              <a:rPr lang="en-US" sz="1800" dirty="0">
+                <a:solidFill>
+                  <a:srgbClr val="8A4B1E"/>
+                </a:solidFill>
+                <a:latin typeface="Meiryo UI" pitchFamily="34" charset="0"/>
+                <a:ea typeface="Meiryo UI" pitchFamily="34" charset="-122"/>
+                <a:cs typeface="Meiryo UI" pitchFamily="34" charset="-120"/>
+              </a:rPr>
+              <a:t>↓</a:t>
+            </a:r>
+            <a:endParaRPr lang="en-US" sz="1800" dirty="0"/>
+          </a:p>
+        </p:txBody>
+      </p:sp>
+      <p:sp>
+        <p:nvSpPr>
+          <p:cNvPr id="58" name="Shape 48"/>
+          <p:cNvSpPr/>
+          <p:nvPr/>
+        </p:nvSpPr>
+        <p:spPr>
+          <a:xfrm>
+            <a:off x="8485632" y="4187952"/>
+            <a:ext cx="566928" cy="566928"/>
+          </a:xfrm>
+          <a:prstGeom prst="ellipse">
+            <a:avLst/>
+          </a:prstGeom>
+          <a:solidFill>
+            <a:srgbClr val="8A4B1E"/>
+          </a:solidFill>
+          <a:ln/>
+        </p:spPr>
+      </p:sp>
+      <p:pic>
+        <p:nvPicPr>
+          <p:cNvPr id="59" name="Image 8" descr="icon_crown.png">    </p:cNvPr>
+          <p:cNvPicPr>
+            <a:picLocks noChangeAspect="1"/>
+          </p:cNvPicPr>
+          <p:nvPr/>
+        </p:nvPicPr>
+        <p:blipFill>
+          <a:blip r:embed="rId9"/>
+          <a:stretch>
+            <a:fillRect/>
+          </a:stretch>
+        </p:blipFill>
+        <p:spPr>
+          <a:xfrm>
+            <a:off x="8604504" y="4306824"/>
+            <a:ext cx="329184" cy="329184"/>
+          </a:xfrm>
+          <a:prstGeom prst="rect">
+            <a:avLst/>
+          </a:prstGeom>
+        </p:spPr>
+      </p:pic>
+      <p:sp>
+        <p:nvSpPr>
+          <p:cNvPr id="60" name="Text 49"/>
+          <p:cNvSpPr/>
+          <p:nvPr/>
+        </p:nvSpPr>
+        <p:spPr>
+          <a:xfrm>
+            <a:off x="9189720" y="4160520"/>
+            <a:ext cx="2377440" cy="274320"/>
+          </a:xfrm>
+          <a:prstGeom prst="rect">
+            <a:avLst/>
+          </a:prstGeom>
+          <a:noFill/>
+          <a:ln/>
+        </p:spPr>
+        <p:txBody>
+          <a:bodyPr wrap="square" rtlCol="0" anchor="ctr"/>
+          <a:lstStyle/>
+          <a:p>
+            <a:pPr indent="0" marL="0">
+              <a:buNone/>
+            </a:pPr>
+            <a:r>
+              <a:rPr lang="en-US" sz="1300" b="1" dirty="0">
+                <a:solidFill>
+                  <a:srgbClr val="000000"/>
+                </a:solidFill>
+                <a:latin typeface="Meiryo UI" pitchFamily="34" charset="0"/>
+                <a:ea typeface="Meiryo UI" pitchFamily="34" charset="-122"/>
+                <a:cs typeface="Meiryo UI" pitchFamily="34" charset="-120"/>
+              </a:rPr>
+              <a:t>13年目〜</a:t>
+            </a:r>
+            <a:endParaRPr lang="en-US" sz="1300" dirty="0"/>
+          </a:p>
+        </p:txBody>
+      </p:sp>
+      <p:sp>
+        <p:nvSpPr>
+          <p:cNvPr id="61" name="Text 50"/>
+          <p:cNvSpPr/>
+          <p:nvPr/>
+        </p:nvSpPr>
+        <p:spPr>
+          <a:xfrm>
+            <a:off x="9189720" y="4425696"/>
+            <a:ext cx="2377440" cy="594360"/>
+          </a:xfrm>
+          <a:prstGeom prst="rect">
+            <a:avLst/>
+          </a:prstGeom>
+          <a:noFill/>
+          <a:ln/>
+        </p:spPr>
+        <p:txBody>
+          <a:bodyPr wrap="square" rtlCol="0" anchor="ctr"/>
+          <a:lstStyle/>
+          <a:p>
+            <a:pPr indent="0" marL="0">
               <a:lnSpc>
-                <a:spcPct val="110000"/>
+                <a:spcPct val="105000"/>
               </a:lnSpc>
               <a:buNone/>
             </a:pPr>
             <a:r>
-              <a:rPr lang="en-US" sz="1400" b="1" dirty="0">
-                <a:solidFill>
-                  <a:srgbClr val="000000"/>
-                </a:solidFill>
-                <a:latin typeface="Meiryo UI" pitchFamily="34" charset="0"/>
-                <a:ea typeface="Meiryo UI" pitchFamily="34" charset="-122"/>
-                <a:cs typeface="Meiryo UI" pitchFamily="34" charset="-120"/>
-              </a:rPr>
-              <a:t>プライベートバンキング／</a:t>
+              <a:rPr lang="en-US" sz="1400" dirty="0">
+                <a:solidFill>
+                  <a:srgbClr val="000000"/>
+                </a:solidFill>
+                <a:latin typeface="Meiryo UI" pitchFamily="34" charset="0"/>
+                <a:ea typeface="Meiryo UI" pitchFamily="34" charset="-122"/>
+                <a:cs typeface="Meiryo UI" pitchFamily="34" charset="-120"/>
+              </a:rPr>
+              <a:t>銀行内</a:t>
             </a:r>
             <a:endParaRPr lang="en-US" sz="1400" dirty="0"/>
           </a:p>
           <a:p>
-            <a:pPr algn="ctr" indent="0" marL="0">
+            <a:pPr indent="0" marL="0">
               <a:lnSpc>
-                <a:spcPct val="110000"/>
+                <a:spcPct val="105000"/>
               </a:lnSpc>
               <a:buNone/>
             </a:pPr>
             <a:r>
-              <a:rPr lang="en-US" sz="1400" b="1" dirty="0">
-                <a:solidFill>
-                  <a:srgbClr val="000000"/>
-                </a:solidFill>
-                <a:latin typeface="Meiryo UI" pitchFamily="34" charset="0"/>
-                <a:ea typeface="Meiryo UI" pitchFamily="34" charset="-122"/>
-                <a:cs typeface="Meiryo UI" pitchFamily="34" charset="-120"/>
-              </a:rPr>
-              <a:t>資産運用会社</a:t>
+              <a:rPr lang="en-US" sz="1400" dirty="0">
+                <a:solidFill>
+                  <a:srgbClr val="000000"/>
+                </a:solidFill>
+                <a:latin typeface="Meiryo UI" pitchFamily="34" charset="0"/>
+                <a:ea typeface="Meiryo UI" pitchFamily="34" charset="-122"/>
+                <a:cs typeface="Meiryo UI" pitchFamily="34" charset="-120"/>
+              </a:rPr>
+              <a:t>運用部門の管理職</a:t>
             </a:r>
             <a:endParaRPr lang="en-US" sz="1400" dirty="0"/>
           </a:p>
@@ -3490,14 +4412,41 @@
       </p:sp>
       <p:sp>
         <p:nvSpPr>
-          <p:cNvPr id="38" name="Text 29"/>
-          <p:cNvSpPr/>
-          <p:nvPr/>
-        </p:nvSpPr>
-        <p:spPr>
-          <a:xfrm>
-            <a:off x="8997696" y="4983480"/>
-            <a:ext cx="2103120" cy="914400"/>
+          <p:cNvPr id="62" name="Shape 51"/>
+          <p:cNvSpPr/>
+          <p:nvPr/>
+        </p:nvSpPr>
+        <p:spPr>
+          <a:xfrm>
+            <a:off x="8366760" y="5513832"/>
+            <a:ext cx="3291840" cy="822960"/>
+          </a:xfrm>
+          <a:prstGeom prst="roundRect">
+            <a:avLst>
+              <a:gd name="adj" fmla="val 11111"/>
+            </a:avLst>
+          </a:prstGeom>
+          <a:solidFill>
+            <a:srgbClr val="FFFFFF"/>
+          </a:solidFill>
+          <a:ln w="12700">
+            <a:solidFill>
+              <a:srgbClr val="8A4B1E"/>
+            </a:solidFill>
+            <a:prstDash val="solid"/>
+          </a:ln>
+        </p:spPr>
+      </p:sp>
+      <p:sp>
+        <p:nvSpPr>
+          <p:cNvPr id="63" name="Text 52"/>
+          <p:cNvSpPr/>
+          <p:nvPr/>
+        </p:nvSpPr>
+        <p:spPr>
+          <a:xfrm>
+            <a:off x="8503920" y="5577840"/>
+            <a:ext cx="3017520" cy="713232"/>
           </a:xfrm>
           <a:prstGeom prst="rect">
             <a:avLst/>
@@ -3509,22 +4458,22 @@
           <a:bodyPr wrap="square" rtlCol="0" anchor="ctr"/>
           <a:lstStyle/>
           <a:p>
-            <a:pPr algn="ctr" indent="0" marL="0">
+            <a:pPr indent="0" marL="0">
               <a:lnSpc>
                 <a:spcPct val="115000"/>
               </a:lnSpc>
               <a:buNone/>
             </a:pPr>
             <a:r>
-              <a:rPr lang="en-US" sz="1400" dirty="0">
-                <a:solidFill>
-                  <a:srgbClr val="000000"/>
-                </a:solidFill>
-                <a:latin typeface="Meiryo UI" pitchFamily="34" charset="0"/>
-                <a:ea typeface="Meiryo UI" pitchFamily="34" charset="-122"/>
-                <a:cs typeface="Meiryo UI" pitchFamily="34" charset="-120"/>
-              </a:rPr>
-              <a:t>顧客の資産全体を長期的に支える集大成</a:t>
+              <a:rPr lang="en-US" sz="1400" b="1" dirty="0">
+                <a:solidFill>
+                  <a:srgbClr val="8A4B1E"/>
+                </a:solidFill>
+                <a:latin typeface="Meiryo UI" pitchFamily="34" charset="0"/>
+                <a:ea typeface="Meiryo UI" pitchFamily="34" charset="-122"/>
+                <a:cs typeface="Meiryo UI" pitchFamily="34" charset="-120"/>
+              </a:rPr>
+              <a:t>別会社に異動せず、銀行内で運用の「頭脳」まで一貫して担う</a:t>
             </a:r>
             <a:endParaRPr lang="en-US" sz="1400" dirty="0"/>
           </a:p>
@@ -3570,39 +4519,151 @@
         </p:nvSpPr>
         <p:spPr>
           <a:xfrm>
-            <a:off x="457200" y="457200"/>
-            <a:ext cx="3200400" cy="5943600"/>
+            <a:off x="640080" y="411480"/>
+            <a:ext cx="502920" cy="457200"/>
           </a:xfrm>
           <a:prstGeom prst="roundRect">
             <a:avLst>
-              <a:gd name="adj" fmla="val 2857"/>
+              <a:gd name="adj" fmla="val 16000"/>
             </a:avLst>
           </a:prstGeom>
           <a:solidFill>
-            <a:srgbClr val="FFFFFF"/>
+            <a:srgbClr val="1E2761"/>
           </a:solidFill>
-          <a:ln w="19050">
-            <a:solidFill>
-              <a:srgbClr val="1E2761"/>
-            </a:solidFill>
-            <a:prstDash val="solid"/>
-          </a:ln>
-        </p:spPr>
-      </p:sp>
-      <p:sp>
-        <p:nvSpPr>
-          <p:cNvPr id="3" name="Shape 1"/>
-          <p:cNvSpPr/>
-          <p:nvPr/>
-        </p:nvSpPr>
-        <p:spPr>
-          <a:xfrm>
-            <a:off x="777240" y="777240"/>
-            <a:ext cx="1143000" cy="411480"/>
+          <a:ln/>
+        </p:spPr>
+      </p:sp>
+      <p:sp>
+        <p:nvSpPr>
+          <p:cNvPr id="3" name="Text 1"/>
+          <p:cNvSpPr/>
+          <p:nvPr/>
+        </p:nvSpPr>
+        <p:spPr>
+          <a:xfrm>
+            <a:off x="640080" y="411480"/>
+            <a:ext cx="502920" cy="457200"/>
+          </a:xfrm>
+          <a:prstGeom prst="rect">
+            <a:avLst/>
+          </a:prstGeom>
+          <a:noFill/>
+          <a:ln/>
+        </p:spPr>
+        <p:txBody>
+          <a:bodyPr wrap="square" rtlCol="0" anchor="ctr"/>
+          <a:lstStyle/>
+          <a:p>
+            <a:pPr algn="ctr" indent="0" marL="0">
+              <a:buNone/>
+            </a:pPr>
+            <a:r>
+              <a:rPr lang="en-US" sz="2000" b="1" dirty="0">
+                <a:solidFill>
+                  <a:srgbClr val="FFFFFF"/>
+                </a:solidFill>
+                <a:latin typeface="Meiryo UI" pitchFamily="34" charset="0"/>
+                <a:ea typeface="Meiryo UI" pitchFamily="34" charset="-122"/>
+                <a:cs typeface="Meiryo UI" pitchFamily="34" charset="-120"/>
+              </a:rPr>
+              <a:t>①</a:t>
+            </a:r>
+            <a:endParaRPr lang="en-US" sz="2000" dirty="0"/>
+          </a:p>
+        </p:txBody>
+      </p:sp>
+      <p:sp>
+        <p:nvSpPr>
+          <p:cNvPr id="4" name="Text 2"/>
+          <p:cNvSpPr/>
+          <p:nvPr/>
+        </p:nvSpPr>
+        <p:spPr>
+          <a:xfrm>
+            <a:off x="1280160" y="365760"/>
+            <a:ext cx="10241280" cy="502920"/>
+          </a:xfrm>
+          <a:prstGeom prst="rect">
+            <a:avLst/>
+          </a:prstGeom>
+          <a:noFill/>
+          <a:ln/>
+        </p:spPr>
+        <p:txBody>
+          <a:bodyPr wrap="square" rtlCol="0" anchor="ctr"/>
+          <a:lstStyle/>
+          <a:p>
+            <a:pPr indent="0" marL="0">
+              <a:buNone/>
+            </a:pPr>
+            <a:r>
+              <a:rPr lang="en-US" sz="2600" b="1" dirty="0">
+                <a:solidFill>
+                  <a:srgbClr val="000000"/>
+                </a:solidFill>
+                <a:latin typeface="Meiryo UI" pitchFamily="34" charset="0"/>
+                <a:ea typeface="Meiryo UI" pitchFamily="34" charset="-122"/>
+                <a:cs typeface="Meiryo UI" pitchFamily="34" charset="-120"/>
+              </a:rPr>
+              <a:t>アセットマネジメント業務を中心とするキャリア</a:t>
+            </a:r>
+            <a:endParaRPr lang="en-US" sz="2600" dirty="0"/>
+          </a:p>
+        </p:txBody>
+      </p:sp>
+      <p:sp>
+        <p:nvSpPr>
+          <p:cNvPr id="5" name="Text 3"/>
+          <p:cNvSpPr/>
+          <p:nvPr/>
+        </p:nvSpPr>
+        <p:spPr>
+          <a:xfrm>
+            <a:off x="1280160" y="868680"/>
+            <a:ext cx="10241280" cy="365760"/>
+          </a:xfrm>
+          <a:prstGeom prst="rect">
+            <a:avLst/>
+          </a:prstGeom>
+          <a:noFill/>
+          <a:ln/>
+        </p:spPr>
+        <p:txBody>
+          <a:bodyPr wrap="square" rtlCol="0" anchor="ctr"/>
+          <a:lstStyle/>
+          <a:p>
+            <a:pPr indent="0" marL="0">
+              <a:buNone/>
+            </a:pPr>
+            <a:r>
+              <a:rPr lang="en-US" sz="1400" i="1" dirty="0">
+                <a:solidFill>
+                  <a:srgbClr val="000000"/>
+                </a:solidFill>
+                <a:latin typeface="Meiryo UI" pitchFamily="34" charset="0"/>
+                <a:ea typeface="Meiryo UI" pitchFamily="34" charset="-122"/>
+                <a:cs typeface="Meiryo UI" pitchFamily="34" charset="-120"/>
+              </a:rPr>
+              <a:t>信託銀行とグループの資産運用会社（AM会社）を行き来しながら、運用の「頭脳」側を極める</a:t>
+            </a:r>
+            <a:endParaRPr lang="en-US" sz="1400" dirty="0"/>
+          </a:p>
+        </p:txBody>
+      </p:sp>
+      <p:sp>
+        <p:nvSpPr>
+          <p:cNvPr id="6" name="Shape 4"/>
+          <p:cNvSpPr/>
+          <p:nvPr/>
+        </p:nvSpPr>
+        <p:spPr>
+          <a:xfrm>
+            <a:off x="548640" y="1417320"/>
+            <a:ext cx="3566160" cy="1417320"/>
           </a:xfrm>
           <a:prstGeom prst="roundRect">
             <a:avLst>
-              <a:gd name="adj" fmla="val 17778"/>
+              <a:gd name="adj" fmla="val 6452"/>
             </a:avLst>
           </a:prstGeom>
           <a:solidFill>
@@ -3618,53 +4679,14 @@
       </p:sp>
       <p:sp>
         <p:nvSpPr>
-          <p:cNvPr id="4" name="Text 2"/>
-          <p:cNvSpPr/>
-          <p:nvPr/>
-        </p:nvSpPr>
-        <p:spPr>
-          <a:xfrm>
-            <a:off x="777240" y="777240"/>
-            <a:ext cx="1143000" cy="411480"/>
-          </a:xfrm>
-          <a:prstGeom prst="rect">
-            <a:avLst/>
-          </a:prstGeom>
-          <a:noFill/>
-          <a:ln/>
-        </p:spPr>
-        <p:txBody>
-          <a:bodyPr wrap="square" rtlCol="0" anchor="ctr"/>
-          <a:lstStyle/>
-          <a:p>
-            <a:pPr algn="ctr" indent="0" marL="0">
-              <a:buNone/>
-            </a:pPr>
-            <a:r>
-              <a:rPr lang="en-US" sz="1400" b="1" dirty="0">
-                <a:solidFill>
-                  <a:srgbClr val="000000"/>
-                </a:solidFill>
-                <a:latin typeface="Meiryo UI" pitchFamily="34" charset="0"/>
-                <a:ea typeface="Meiryo UI" pitchFamily="34" charset="-122"/>
-                <a:cs typeface="Meiryo UI" pitchFamily="34" charset="-120"/>
-              </a:rPr>
-              <a:t>PHASE 1</a:t>
-            </a:r>
-            <a:endParaRPr lang="en-US" sz="1400" dirty="0"/>
-          </a:p>
-        </p:txBody>
-      </p:sp>
-      <p:sp>
-        <p:nvSpPr>
-          <p:cNvPr id="5" name="Shape 3"/>
-          <p:cNvSpPr/>
-          <p:nvPr/>
-        </p:nvSpPr>
-        <p:spPr>
-          <a:xfrm>
-            <a:off x="777240" y="1508760"/>
-            <a:ext cx="1371600" cy="1371600"/>
+          <p:cNvPr id="7" name="Shape 5"/>
+          <p:cNvSpPr/>
+          <p:nvPr/>
+        </p:nvSpPr>
+        <p:spPr>
+          <a:xfrm>
+            <a:off x="749808" y="1691640"/>
+            <a:ext cx="868680" cy="868680"/>
           </a:xfrm>
           <a:prstGeom prst="ellipse">
             <a:avLst/>
@@ -3677,7 +4699,7 @@
       </p:sp>
       <p:pic>
         <p:nvPicPr>
-          <p:cNvPr id="6" name="Image 0" descr="icon_building.png">    </p:cNvPr>
+          <p:cNvPr id="8" name="Image 0" descr="icon_building.png">    </p:cNvPr>
           <p:cNvPicPr>
             <a:picLocks noChangeAspect="1"/>
           </p:cNvPicPr>
@@ -3691,8 +4713,8 @@
         </p:blipFill>
         <p:spPr>
           <a:xfrm>
-            <a:off x="1069848" y="1801368"/>
-            <a:ext cx="786384" cy="786384"/>
+            <a:off x="932688" y="1874520"/>
+            <a:ext cx="502920" cy="502920"/>
           </a:xfrm>
           <a:prstGeom prst="rect">
             <a:avLst/>
@@ -3701,14 +4723,14 @@
       </p:pic>
       <p:sp>
         <p:nvSpPr>
-          <p:cNvPr id="7" name="Text 4"/>
-          <p:cNvSpPr/>
-          <p:nvPr/>
-        </p:nvSpPr>
-        <p:spPr>
-          <a:xfrm>
-            <a:off x="777240" y="3108960"/>
-            <a:ext cx="2743200" cy="365760"/>
+          <p:cNvPr id="9" name="Text 6"/>
+          <p:cNvSpPr/>
+          <p:nvPr/>
+        </p:nvSpPr>
+        <p:spPr>
+          <a:xfrm>
+            <a:off x="1783080" y="1645920"/>
+            <a:ext cx="2148840" cy="320040"/>
           </a:xfrm>
           <a:prstGeom prst="rect">
             <a:avLst/>
@@ -3740,14 +4762,14 @@
       </p:sp>
       <p:sp>
         <p:nvSpPr>
-          <p:cNvPr id="8" name="Text 5"/>
-          <p:cNvSpPr/>
-          <p:nvPr/>
-        </p:nvSpPr>
-        <p:spPr>
-          <a:xfrm>
-            <a:off x="777240" y="3520440"/>
-            <a:ext cx="2788920" cy="1280160"/>
+          <p:cNvPr id="10" name="Text 7"/>
+          <p:cNvSpPr/>
+          <p:nvPr/>
+        </p:nvSpPr>
+        <p:spPr>
+          <a:xfrm>
+            <a:off x="1783080" y="1965960"/>
+            <a:ext cx="2148840" cy="777240"/>
           </a:xfrm>
           <a:prstGeom prst="rect">
             <a:avLst/>
@@ -3761,55 +4783,79 @@
           <a:p>
             <a:pPr indent="0" marL="0">
               <a:lnSpc>
-                <a:spcPct val="115000"/>
+                <a:spcPct val="110000"/>
               </a:lnSpc>
               <a:buNone/>
             </a:pPr>
             <a:r>
-              <a:rPr lang="en-US" sz="2200" b="1" dirty="0">
-                <a:solidFill>
-                  <a:srgbClr val="000000"/>
-                </a:solidFill>
-                <a:latin typeface="Meiryo UI" pitchFamily="34" charset="0"/>
-                <a:ea typeface="Meiryo UI" pitchFamily="34" charset="-122"/>
-                <a:cs typeface="Meiryo UI" pitchFamily="34" charset="-120"/>
-              </a:rPr>
-              <a:t>法人業務部門</a:t>
-            </a:r>
-            <a:endParaRPr lang="en-US" sz="2200" dirty="0"/>
+              <a:rPr lang="en-US" sz="1500" b="1" dirty="0">
+                <a:solidFill>
+                  <a:srgbClr val="000000"/>
+                </a:solidFill>
+                <a:latin typeface="Meiryo UI" pitchFamily="34" charset="0"/>
+                <a:ea typeface="Meiryo UI" pitchFamily="34" charset="-122"/>
+                <a:cs typeface="Meiryo UI" pitchFamily="34" charset="-120"/>
+              </a:rPr>
+              <a:t>信託銀行</a:t>
+            </a:r>
+            <a:endParaRPr lang="en-US" sz="1500" dirty="0"/>
           </a:p>
           <a:p>
             <a:pPr indent="0" marL="0">
               <a:lnSpc>
-                <a:spcPct val="115000"/>
+                <a:spcPct val="110000"/>
               </a:lnSpc>
               <a:buNone/>
             </a:pPr>
             <a:r>
-              <a:rPr lang="en-US" sz="2200" b="1" dirty="0">
-                <a:solidFill>
-                  <a:srgbClr val="000000"/>
-                </a:solidFill>
-                <a:latin typeface="Meiryo UI" pitchFamily="34" charset="0"/>
-                <a:ea typeface="Meiryo UI" pitchFamily="34" charset="-122"/>
-                <a:cs typeface="Meiryo UI" pitchFamily="34" charset="-120"/>
-              </a:rPr>
-              <a:t>（法人融資・法人渉外）</a:t>
-            </a:r>
-            <a:endParaRPr lang="en-US" sz="2200" dirty="0"/>
-          </a:p>
-        </p:txBody>
-      </p:sp>
-      <p:sp>
-        <p:nvSpPr>
-          <p:cNvPr id="9" name="Text 6"/>
-          <p:cNvSpPr/>
-          <p:nvPr/>
-        </p:nvSpPr>
-        <p:spPr>
-          <a:xfrm>
-            <a:off x="777240" y="4937760"/>
-            <a:ext cx="2788920" cy="1371600"/>
+              <a:rPr lang="en-US" sz="1500" b="1" dirty="0">
+                <a:solidFill>
+                  <a:srgbClr val="000000"/>
+                </a:solidFill>
+                <a:latin typeface="Meiryo UI" pitchFamily="34" charset="0"/>
+                <a:ea typeface="Meiryo UI" pitchFamily="34" charset="-122"/>
+                <a:cs typeface="Meiryo UI" pitchFamily="34" charset="-120"/>
+              </a:rPr>
+              <a:t>資産運用部門</a:t>
+            </a:r>
+            <a:endParaRPr lang="en-US" sz="1500" dirty="0"/>
+          </a:p>
+        </p:txBody>
+      </p:sp>
+      <p:pic>
+        <p:nvPicPr>
+          <p:cNvPr id="11" name="Image 1" descr="icon_arrow_dark.png">    </p:cNvPr>
+          <p:cNvPicPr>
+            <a:picLocks noChangeAspect="1"/>
+          </p:cNvPicPr>
+          <p:nvPr/>
+        </p:nvPicPr>
+        <p:blipFill>
+          <a:blip r:embed="rId2"/>
+          <a:stretch>
+            <a:fillRect/>
+          </a:stretch>
+        </p:blipFill>
+        <p:spPr>
+          <a:xfrm>
+            <a:off x="4133088" y="1979676"/>
+            <a:ext cx="219456" cy="292608"/>
+          </a:xfrm>
+          <a:prstGeom prst="rect">
+            <a:avLst/>
+          </a:prstGeom>
+        </p:spPr>
+      </p:pic>
+      <p:sp>
+        <p:nvSpPr>
+          <p:cNvPr id="12" name="Text 8"/>
+          <p:cNvSpPr/>
+          <p:nvPr/>
+        </p:nvSpPr>
+        <p:spPr>
+          <a:xfrm>
+            <a:off x="548640" y="3017520"/>
+            <a:ext cx="3566160" cy="2103120"/>
           </a:xfrm>
           <a:prstGeom prst="rect">
             <a:avLst/>
@@ -3825,18 +4871,41 @@
               <a:lnSpc>
                 <a:spcPct val="125000"/>
               </a:lnSpc>
-              <a:buNone/>
-            </a:pPr>
-            <a:r>
-              <a:rPr lang="en-US" sz="1400" i="1" dirty="0">
-                <a:solidFill>
-                  <a:srgbClr val="000000"/>
-                </a:solidFill>
-                <a:latin typeface="Meiryo UI" pitchFamily="34" charset="0"/>
-                <a:ea typeface="Meiryo UI" pitchFamily="34" charset="-122"/>
-                <a:cs typeface="Meiryo UI" pitchFamily="34" charset="-120"/>
-              </a:rPr>
-              <a:t>財務諸表を「読む」力を、与信判断という実務で鍛える最初のステージ</a:t>
+              <a:spcAft>
+                <a:spcPts val="600"/>
+              </a:spcAft>
+              <a:buNone/>
+            </a:pPr>
+            <a:r>
+              <a:rPr lang="en-US" sz="1400" b="1" dirty="0">
+                <a:solidFill>
+                  <a:srgbClr val="1E2761"/>
+                </a:solidFill>
+                <a:latin typeface="Meiryo UI" pitchFamily="34" charset="0"/>
+                <a:ea typeface="Meiryo UI" pitchFamily="34" charset="-122"/>
+                <a:cs typeface="Meiryo UI" pitchFamily="34" charset="-120"/>
+              </a:rPr>
+              <a:t>業務内容　</a:t>
+            </a:r>
+            <a:pPr indent="0" marL="0">
+              <a:lnSpc>
+                <a:spcPct val="125000"/>
+              </a:lnSpc>
+              <a:spcAft>
+                <a:spcPts val="600"/>
+              </a:spcAft>
+              <a:buNone/>
+            </a:pPr>
+            <a:r>
+              <a:rPr lang="en-US" sz="1400" dirty="0">
+                <a:solidFill>
+                  <a:srgbClr val="000000"/>
+                </a:solidFill>
+                <a:latin typeface="Meiryo UI" pitchFamily="34" charset="0"/>
+                <a:ea typeface="Meiryo UI" pitchFamily="34" charset="-122"/>
+                <a:cs typeface="Meiryo UI" pitchFamily="34" charset="-120"/>
+              </a:rPr>
+              <a:t>特定金銭信託・年金信託等の運用実務、商品組成、マーケット分析の基礎を、信託銀行の運用担当としてOJTで習得する。</a:t>
             </a:r>
             <a:endParaRPr lang="en-US" sz="1400" dirty="0"/>
           </a:p>
@@ -3844,36 +4913,144 @@
       </p:sp>
       <p:sp>
         <p:nvSpPr>
-          <p:cNvPr id="10" name="Shape 7"/>
-          <p:cNvSpPr/>
-          <p:nvPr/>
-        </p:nvSpPr>
-        <p:spPr>
-          <a:xfrm>
-            <a:off x="4005072" y="685800"/>
-            <a:ext cx="146304" cy="146304"/>
+          <p:cNvPr id="13" name="Text 9"/>
+          <p:cNvSpPr/>
+          <p:nvPr/>
+        </p:nvSpPr>
+        <p:spPr>
+          <a:xfrm>
+            <a:off x="548640" y="4983480"/>
+            <a:ext cx="3566160" cy="1463040"/>
+          </a:xfrm>
+          <a:prstGeom prst="rect">
+            <a:avLst/>
+          </a:prstGeom>
+          <a:noFill/>
+          <a:ln/>
+        </p:spPr>
+        <p:txBody>
+          <a:bodyPr wrap="square" rtlCol="0" anchor="ctr"/>
+          <a:lstStyle/>
+          <a:p>
+            <a:pPr indent="0" marL="0">
+              <a:lnSpc>
+                <a:spcPct val="125000"/>
+              </a:lnSpc>
+              <a:buNone/>
+            </a:pPr>
+            <a:r>
+              <a:rPr lang="en-US" sz="1400" b="1" dirty="0">
+                <a:solidFill>
+                  <a:srgbClr val="1E2761"/>
+                </a:solidFill>
+                <a:latin typeface="Meiryo UI" pitchFamily="34" charset="0"/>
+                <a:ea typeface="Meiryo UI" pitchFamily="34" charset="-122"/>
+                <a:cs typeface="Meiryo UI" pitchFamily="34" charset="-120"/>
+              </a:rPr>
+              <a:t>身につく力　</a:t>
+            </a:r>
+            <a:pPr indent="0" marL="0">
+              <a:lnSpc>
+                <a:spcPct val="125000"/>
+              </a:lnSpc>
+              <a:buNone/>
+            </a:pPr>
+            <a:r>
+              <a:rPr lang="en-US" sz="1400" dirty="0">
+                <a:solidFill>
+                  <a:srgbClr val="000000"/>
+                </a:solidFill>
+                <a:latin typeface="Meiryo UI" pitchFamily="34" charset="0"/>
+                <a:ea typeface="Meiryo UI" pitchFamily="34" charset="-122"/>
+                <a:cs typeface="Meiryo UI" pitchFamily="34" charset="-120"/>
+              </a:rPr>
+              <a:t>マーケットを見る目と運用商品の基本構造の理解、財務諸表分析力を投資判断に応用する初期経験。</a:t>
+            </a:r>
+            <a:endParaRPr lang="en-US" sz="1400" dirty="0"/>
+          </a:p>
+        </p:txBody>
+      </p:sp>
+      <p:sp>
+        <p:nvSpPr>
+          <p:cNvPr id="14" name="Shape 10"/>
+          <p:cNvSpPr/>
+          <p:nvPr/>
+        </p:nvSpPr>
+        <p:spPr>
+          <a:xfrm>
+            <a:off x="4389120" y="1417320"/>
+            <a:ext cx="3566160" cy="1417320"/>
           </a:xfrm>
           <a:prstGeom prst="roundRect">
             <a:avLst>
-              <a:gd name="adj" fmla="val 50000"/>
+              <a:gd name="adj" fmla="val 6452"/>
             </a:avLst>
           </a:prstGeom>
           <a:solidFill>
-            <a:srgbClr val="C9A227"/>
+            <a:srgbClr val="FFFFFF"/>
           </a:solidFill>
-          <a:ln/>
-        </p:spPr>
-      </p:sp>
-      <p:sp>
-        <p:nvSpPr>
-          <p:cNvPr id="11" name="Text 8"/>
-          <p:cNvSpPr/>
-          <p:nvPr/>
-        </p:nvSpPr>
-        <p:spPr>
-          <a:xfrm>
-            <a:off x="4297680" y="612648"/>
-            <a:ext cx="7406640" cy="365760"/>
+          <a:ln w="15875">
+            <a:solidFill>
+              <a:srgbClr val="1E2761"/>
+            </a:solidFill>
+            <a:prstDash val="solid"/>
+          </a:ln>
+        </p:spPr>
+      </p:sp>
+      <p:sp>
+        <p:nvSpPr>
+          <p:cNvPr id="15" name="Shape 11"/>
+          <p:cNvSpPr/>
+          <p:nvPr/>
+        </p:nvSpPr>
+        <p:spPr>
+          <a:xfrm>
+            <a:off x="4590288" y="1691640"/>
+            <a:ext cx="868680" cy="868680"/>
+          </a:xfrm>
+          <a:prstGeom prst="ellipse">
+            <a:avLst/>
+          </a:prstGeom>
+          <a:solidFill>
+            <a:srgbClr val="1E2761"/>
+          </a:solidFill>
+          <a:ln/>
+        </p:spPr>
+      </p:sp>
+      <p:pic>
+        <p:nvPicPr>
+          <p:cNvPr id="16" name="Image 2" descr="icon_exchange.png">    </p:cNvPr>
+          <p:cNvPicPr>
+            <a:picLocks noChangeAspect="1"/>
+          </p:cNvPicPr>
+          <p:nvPr/>
+        </p:nvPicPr>
+        <p:blipFill>
+          <a:blip r:embed="rId3"/>
+          <a:stretch>
+            <a:fillRect/>
+          </a:stretch>
+        </p:blipFill>
+        <p:spPr>
+          <a:xfrm>
+            <a:off x="4773168" y="1874520"/>
+            <a:ext cx="502920" cy="502920"/>
+          </a:xfrm>
+          <a:prstGeom prst="rect">
+            <a:avLst/>
+          </a:prstGeom>
+        </p:spPr>
+      </p:pic>
+      <p:sp>
+        <p:nvSpPr>
+          <p:cNvPr id="17" name="Text 12"/>
+          <p:cNvSpPr/>
+          <p:nvPr/>
+        </p:nvSpPr>
+        <p:spPr>
+          <a:xfrm>
+            <a:off x="5623560" y="1645920"/>
+            <a:ext cx="2148840" cy="320040"/>
           </a:xfrm>
           <a:prstGeom prst="rect">
             <a:avLst/>
@@ -3889,30 +5066,30 @@
               <a:buNone/>
             </a:pPr>
             <a:r>
-              <a:rPr lang="en-US" sz="1600" b="1" dirty="0">
-                <a:solidFill>
-                  <a:srgbClr val="000000"/>
-                </a:solidFill>
-                <a:latin typeface="Meiryo UI" pitchFamily="34" charset="0"/>
-                <a:ea typeface="Meiryo UI" pitchFamily="34" charset="-122"/>
-                <a:cs typeface="Meiryo UI" pitchFamily="34" charset="-120"/>
-              </a:rPr>
-              <a:t>業務内容</a:t>
-            </a:r>
-            <a:endParaRPr lang="en-US" sz="1600" dirty="0"/>
-          </a:p>
-        </p:txBody>
-      </p:sp>
-      <p:sp>
-        <p:nvSpPr>
-          <p:cNvPr id="12" name="Text 9"/>
-          <p:cNvSpPr/>
-          <p:nvPr/>
-        </p:nvSpPr>
-        <p:spPr>
-          <a:xfrm>
-            <a:off x="4041648" y="1069848"/>
-            <a:ext cx="7680960" cy="1417320"/>
+              <a:rPr lang="en-US" sz="1400" b="1" dirty="0">
+                <a:solidFill>
+                  <a:srgbClr val="000000"/>
+                </a:solidFill>
+                <a:latin typeface="Meiryo UI" pitchFamily="34" charset="0"/>
+                <a:ea typeface="Meiryo UI" pitchFamily="34" charset="-122"/>
+                <a:cs typeface="Meiryo UI" pitchFamily="34" charset="-120"/>
+              </a:rPr>
+              <a:t>6〜12年目</a:t>
+            </a:r>
+            <a:endParaRPr lang="en-US" sz="1400" dirty="0"/>
+          </a:p>
+        </p:txBody>
+      </p:sp>
+      <p:sp>
+        <p:nvSpPr>
+          <p:cNvPr id="18" name="Text 13"/>
+          <p:cNvSpPr/>
+          <p:nvPr/>
+        </p:nvSpPr>
+        <p:spPr>
+          <a:xfrm>
+            <a:off x="5623560" y="1965960"/>
+            <a:ext cx="2148840" cy="777240"/>
           </a:xfrm>
           <a:prstGeom prst="rect">
             <a:avLst/>
@@ -3926,11 +5103,120 @@
           <a:p>
             <a:pPr indent="0" marL="0">
               <a:lnSpc>
-                <a:spcPct val="135000"/>
+                <a:spcPct val="110000"/>
               </a:lnSpc>
               <a:buNone/>
             </a:pPr>
             <a:r>
+              <a:rPr lang="en-US" sz="1500" b="1" dirty="0">
+                <a:solidFill>
+                  <a:srgbClr val="000000"/>
+                </a:solidFill>
+                <a:latin typeface="Meiryo UI" pitchFamily="34" charset="0"/>
+                <a:ea typeface="Meiryo UI" pitchFamily="34" charset="-122"/>
+                <a:cs typeface="Meiryo UI" pitchFamily="34" charset="-120"/>
+              </a:rPr>
+              <a:t>グループAM会社へ</a:t>
+            </a:r>
+            <a:endParaRPr lang="en-US" sz="1500" dirty="0"/>
+          </a:p>
+          <a:p>
+            <a:pPr indent="0" marL="0">
+              <a:lnSpc>
+                <a:spcPct val="110000"/>
+              </a:lnSpc>
+              <a:buNone/>
+            </a:pPr>
+            <a:r>
+              <a:rPr lang="en-US" sz="1500" b="1" dirty="0">
+                <a:solidFill>
+                  <a:srgbClr val="000000"/>
+                </a:solidFill>
+                <a:latin typeface="Meiryo UI" pitchFamily="34" charset="0"/>
+                <a:ea typeface="Meiryo UI" pitchFamily="34" charset="-122"/>
+                <a:cs typeface="Meiryo UI" pitchFamily="34" charset="-120"/>
+              </a:rPr>
+              <a:t>出向・転籍</a:t>
+            </a:r>
+            <a:endParaRPr lang="en-US" sz="1500" dirty="0"/>
+          </a:p>
+        </p:txBody>
+      </p:sp>
+      <p:pic>
+        <p:nvPicPr>
+          <p:cNvPr id="19" name="Image 3" descr="icon_arrow_dark.png">    </p:cNvPr>
+          <p:cNvPicPr>
+            <a:picLocks noChangeAspect="1"/>
+          </p:cNvPicPr>
+          <p:nvPr/>
+        </p:nvPicPr>
+        <p:blipFill>
+          <a:blip r:embed="rId4"/>
+          <a:stretch>
+            <a:fillRect/>
+          </a:stretch>
+        </p:blipFill>
+        <p:spPr>
+          <a:xfrm>
+            <a:off x="7973568" y="1979676"/>
+            <a:ext cx="219456" cy="292608"/>
+          </a:xfrm>
+          <a:prstGeom prst="rect">
+            <a:avLst/>
+          </a:prstGeom>
+        </p:spPr>
+      </p:pic>
+      <p:sp>
+        <p:nvSpPr>
+          <p:cNvPr id="20" name="Text 14"/>
+          <p:cNvSpPr/>
+          <p:nvPr/>
+        </p:nvSpPr>
+        <p:spPr>
+          <a:xfrm>
+            <a:off x="4389120" y="3017520"/>
+            <a:ext cx="3566160" cy="2103120"/>
+          </a:xfrm>
+          <a:prstGeom prst="rect">
+            <a:avLst/>
+          </a:prstGeom>
+          <a:noFill/>
+          <a:ln/>
+        </p:spPr>
+        <p:txBody>
+          <a:bodyPr wrap="square" rtlCol="0" anchor="ctr"/>
+          <a:lstStyle/>
+          <a:p>
+            <a:pPr indent="0" marL="0">
+              <a:lnSpc>
+                <a:spcPct val="125000"/>
+              </a:lnSpc>
+              <a:spcAft>
+                <a:spcPts val="600"/>
+              </a:spcAft>
+              <a:buNone/>
+            </a:pPr>
+            <a:r>
+              <a:rPr lang="en-US" sz="1400" b="1" dirty="0">
+                <a:solidFill>
+                  <a:srgbClr val="1E2761"/>
+                </a:solidFill>
+                <a:latin typeface="Meiryo UI" pitchFamily="34" charset="0"/>
+                <a:ea typeface="Meiryo UI" pitchFamily="34" charset="-122"/>
+                <a:cs typeface="Meiryo UI" pitchFamily="34" charset="-120"/>
+              </a:rPr>
+              <a:t>業務内容　</a:t>
+            </a:r>
+            <a:pPr indent="0" marL="0">
+              <a:lnSpc>
+                <a:spcPct val="125000"/>
+              </a:lnSpc>
+              <a:spcAft>
+                <a:spcPts val="600"/>
+              </a:spcAft>
+              <a:buNone/>
+            </a:pPr>
+            <a:r>
               <a:rPr lang="en-US" sz="1400" dirty="0">
                 <a:solidFill>
                   <a:srgbClr val="000000"/>
@@ -3939,7 +5225,7 @@
                 <a:ea typeface="Meiryo UI" pitchFamily="34" charset="-122"/>
                 <a:cs typeface="Meiryo UI" pitchFamily="34" charset="-120"/>
               </a:rPr>
-              <a:t>取引先企業への与信審査、財務諸表分析に基づく融資判断、法人渉外を通じた企業とのリレーション構築を担当。信託銀行も普通銀行業務を兼営しており、若手が財務分析の基礎体力をつける代表的な配属先。</a:t>
+              <a:t>ファンドマネージャー／アナリストとして「何を買うか」を決める運用の頭脳側を担当。マルチマネージャー方式で信託銀行等から運用を受託する側の実務を経験する。</a:t>
             </a:r>
             <a:endParaRPr lang="en-US" sz="1400" dirty="0"/>
           </a:p>
@@ -3947,36 +5233,144 @@
       </p:sp>
       <p:sp>
         <p:nvSpPr>
-          <p:cNvPr id="13" name="Shape 10"/>
-          <p:cNvSpPr/>
-          <p:nvPr/>
-        </p:nvSpPr>
-        <p:spPr>
-          <a:xfrm>
-            <a:off x="4005072" y="2606040"/>
-            <a:ext cx="146304" cy="146304"/>
+          <p:cNvPr id="21" name="Text 15"/>
+          <p:cNvSpPr/>
+          <p:nvPr/>
+        </p:nvSpPr>
+        <p:spPr>
+          <a:xfrm>
+            <a:off x="4389120" y="4983480"/>
+            <a:ext cx="3566160" cy="1463040"/>
+          </a:xfrm>
+          <a:prstGeom prst="rect">
+            <a:avLst/>
+          </a:prstGeom>
+          <a:noFill/>
+          <a:ln/>
+        </p:spPr>
+        <p:txBody>
+          <a:bodyPr wrap="square" rtlCol="0" anchor="ctr"/>
+          <a:lstStyle/>
+          <a:p>
+            <a:pPr indent="0" marL="0">
+              <a:lnSpc>
+                <a:spcPct val="125000"/>
+              </a:lnSpc>
+              <a:buNone/>
+            </a:pPr>
+            <a:r>
+              <a:rPr lang="en-US" sz="1400" b="1" dirty="0">
+                <a:solidFill>
+                  <a:srgbClr val="1E2761"/>
+                </a:solidFill>
+                <a:latin typeface="Meiryo UI" pitchFamily="34" charset="0"/>
+                <a:ea typeface="Meiryo UI" pitchFamily="34" charset="-122"/>
+                <a:cs typeface="Meiryo UI" pitchFamily="34" charset="-120"/>
+              </a:rPr>
+              <a:t>身につく力　</a:t>
+            </a:r>
+            <a:pPr indent="0" marL="0">
+              <a:lnSpc>
+                <a:spcPct val="125000"/>
+              </a:lnSpc>
+              <a:buNone/>
+            </a:pPr>
+            <a:r>
+              <a:rPr lang="en-US" sz="1400" dirty="0">
+                <a:solidFill>
+                  <a:srgbClr val="000000"/>
+                </a:solidFill>
+                <a:latin typeface="Meiryo UI" pitchFamily="34" charset="0"/>
+                <a:ea typeface="Meiryo UI" pitchFamily="34" charset="-122"/>
+                <a:cs typeface="Meiryo UI" pitchFamily="34" charset="-120"/>
+              </a:rPr>
+              <a:t>投資判断力・リサーチ力を、財務諸表分析力を武器に磨き上げ、運用会社ならではの専門性を確立する。</a:t>
+            </a:r>
+            <a:endParaRPr lang="en-US" sz="1400" dirty="0"/>
+          </a:p>
+        </p:txBody>
+      </p:sp>
+      <p:sp>
+        <p:nvSpPr>
+          <p:cNvPr id="22" name="Shape 16"/>
+          <p:cNvSpPr/>
+          <p:nvPr/>
+        </p:nvSpPr>
+        <p:spPr>
+          <a:xfrm>
+            <a:off x="8229600" y="1417320"/>
+            <a:ext cx="3566160" cy="1417320"/>
           </a:xfrm>
           <a:prstGeom prst="roundRect">
             <a:avLst>
-              <a:gd name="adj" fmla="val 50000"/>
+              <a:gd name="adj" fmla="val 6452"/>
             </a:avLst>
           </a:prstGeom>
           <a:solidFill>
-            <a:srgbClr val="C9A227"/>
+            <a:srgbClr val="FFFFFF"/>
           </a:solidFill>
-          <a:ln/>
-        </p:spPr>
-      </p:sp>
-      <p:sp>
-        <p:nvSpPr>
-          <p:cNvPr id="14" name="Text 11"/>
-          <p:cNvSpPr/>
-          <p:nvPr/>
-        </p:nvSpPr>
-        <p:spPr>
-          <a:xfrm>
-            <a:off x="4297680" y="2532888"/>
-            <a:ext cx="7406640" cy="365760"/>
+          <a:ln w="15875">
+            <a:solidFill>
+              <a:srgbClr val="1E2761"/>
+            </a:solidFill>
+            <a:prstDash val="solid"/>
+          </a:ln>
+        </p:spPr>
+      </p:sp>
+      <p:sp>
+        <p:nvSpPr>
+          <p:cNvPr id="23" name="Shape 17"/>
+          <p:cNvSpPr/>
+          <p:nvPr/>
+        </p:nvSpPr>
+        <p:spPr>
+          <a:xfrm>
+            <a:off x="8430768" y="1691640"/>
+            <a:ext cx="868680" cy="868680"/>
+          </a:xfrm>
+          <a:prstGeom prst="ellipse">
+            <a:avLst/>
+          </a:prstGeom>
+          <a:solidFill>
+            <a:srgbClr val="1E2761"/>
+          </a:solidFill>
+          <a:ln/>
+        </p:spPr>
+      </p:sp>
+      <p:pic>
+        <p:nvPicPr>
+          <p:cNvPr id="24" name="Image 4" descr="icon_crown.png">    </p:cNvPr>
+          <p:cNvPicPr>
+            <a:picLocks noChangeAspect="1"/>
+          </p:cNvPicPr>
+          <p:nvPr/>
+        </p:nvPicPr>
+        <p:blipFill>
+          <a:blip r:embed="rId5"/>
+          <a:stretch>
+            <a:fillRect/>
+          </a:stretch>
+        </p:blipFill>
+        <p:spPr>
+          <a:xfrm>
+            <a:off x="8613648" y="1874520"/>
+            <a:ext cx="502920" cy="502920"/>
+          </a:xfrm>
+          <a:prstGeom prst="rect">
+            <a:avLst/>
+          </a:prstGeom>
+        </p:spPr>
+      </p:pic>
+      <p:sp>
+        <p:nvSpPr>
+          <p:cNvPr id="25" name="Text 18"/>
+          <p:cNvSpPr/>
+          <p:nvPr/>
+        </p:nvSpPr>
+        <p:spPr>
+          <a:xfrm>
+            <a:off x="9464040" y="1645920"/>
+            <a:ext cx="2148840" cy="320040"/>
           </a:xfrm>
           <a:prstGeom prst="rect">
             <a:avLst/>
@@ -3992,30 +5386,30 @@
               <a:buNone/>
             </a:pPr>
             <a:r>
-              <a:rPr lang="en-US" sz="1600" b="1" dirty="0">
-                <a:solidFill>
-                  <a:srgbClr val="000000"/>
-                </a:solidFill>
-                <a:latin typeface="Meiryo UI" pitchFamily="34" charset="0"/>
-                <a:ea typeface="Meiryo UI" pitchFamily="34" charset="-122"/>
-                <a:cs typeface="Meiryo UI" pitchFamily="34" charset="-120"/>
-              </a:rPr>
-              <a:t>身につく力</a:t>
-            </a:r>
-            <a:endParaRPr lang="en-US" sz="1600" dirty="0"/>
-          </a:p>
-        </p:txBody>
-      </p:sp>
-      <p:sp>
-        <p:nvSpPr>
-          <p:cNvPr id="15" name="Text 12"/>
-          <p:cNvSpPr/>
-          <p:nvPr/>
-        </p:nvSpPr>
-        <p:spPr>
-          <a:xfrm>
-            <a:off x="4041648" y="2990088"/>
-            <a:ext cx="7680960" cy="1417320"/>
+              <a:rPr lang="en-US" sz="1400" b="1" dirty="0">
+                <a:solidFill>
+                  <a:srgbClr val="000000"/>
+                </a:solidFill>
+                <a:latin typeface="Meiryo UI" pitchFamily="34" charset="0"/>
+                <a:ea typeface="Meiryo UI" pitchFamily="34" charset="-122"/>
+                <a:cs typeface="Meiryo UI" pitchFamily="34" charset="-120"/>
+              </a:rPr>
+              <a:t>13年目〜</a:t>
+            </a:r>
+            <a:endParaRPr lang="en-US" sz="1400" dirty="0"/>
+          </a:p>
+        </p:txBody>
+      </p:sp>
+      <p:sp>
+        <p:nvSpPr>
+          <p:cNvPr id="26" name="Text 19"/>
+          <p:cNvSpPr/>
+          <p:nvPr/>
+        </p:nvSpPr>
+        <p:spPr>
+          <a:xfrm>
+            <a:off x="9464040" y="1965960"/>
+            <a:ext cx="2148840" cy="777240"/>
           </a:xfrm>
           <a:prstGeom prst="rect">
             <a:avLst/>
@@ -4029,11 +5423,96 @@
           <a:p>
             <a:pPr indent="0" marL="0">
               <a:lnSpc>
-                <a:spcPct val="135000"/>
+                <a:spcPct val="110000"/>
               </a:lnSpc>
               <a:buNone/>
             </a:pPr>
             <a:r>
+              <a:rPr lang="en-US" sz="1500" b="1" dirty="0">
+                <a:solidFill>
+                  <a:srgbClr val="000000"/>
+                </a:solidFill>
+                <a:latin typeface="Meiryo UI" pitchFamily="34" charset="0"/>
+                <a:ea typeface="Meiryo UI" pitchFamily="34" charset="-122"/>
+                <a:cs typeface="Meiryo UI" pitchFamily="34" charset="-120"/>
+              </a:rPr>
+              <a:t>信託銀行復帰 or</a:t>
+            </a:r>
+            <a:endParaRPr lang="en-US" sz="1500" dirty="0"/>
+          </a:p>
+          <a:p>
+            <a:pPr indent="0" marL="0">
+              <a:lnSpc>
+                <a:spcPct val="110000"/>
+              </a:lnSpc>
+              <a:buNone/>
+            </a:pPr>
+            <a:r>
+              <a:rPr lang="en-US" sz="1500" b="1" dirty="0">
+                <a:solidFill>
+                  <a:srgbClr val="000000"/>
+                </a:solidFill>
+                <a:latin typeface="Meiryo UI" pitchFamily="34" charset="0"/>
+                <a:ea typeface="Meiryo UI" pitchFamily="34" charset="-122"/>
+                <a:cs typeface="Meiryo UI" pitchFamily="34" charset="-120"/>
+              </a:rPr>
+              <a:t>AM会社の上級職</a:t>
+            </a:r>
+            <a:endParaRPr lang="en-US" sz="1500" dirty="0"/>
+          </a:p>
+        </p:txBody>
+      </p:sp>
+      <p:sp>
+        <p:nvSpPr>
+          <p:cNvPr id="27" name="Text 20"/>
+          <p:cNvSpPr/>
+          <p:nvPr/>
+        </p:nvSpPr>
+        <p:spPr>
+          <a:xfrm>
+            <a:off x="8229600" y="3017520"/>
+            <a:ext cx="3566160" cy="2103120"/>
+          </a:xfrm>
+          <a:prstGeom prst="rect">
+            <a:avLst/>
+          </a:prstGeom>
+          <a:noFill/>
+          <a:ln/>
+        </p:spPr>
+        <p:txBody>
+          <a:bodyPr wrap="square" rtlCol="0" anchor="ctr"/>
+          <a:lstStyle/>
+          <a:p>
+            <a:pPr indent="0" marL="0">
+              <a:lnSpc>
+                <a:spcPct val="125000"/>
+              </a:lnSpc>
+              <a:spcAft>
+                <a:spcPts val="600"/>
+              </a:spcAft>
+              <a:buNone/>
+            </a:pPr>
+            <a:r>
+              <a:rPr lang="en-US" sz="1400" b="1" dirty="0">
+                <a:solidFill>
+                  <a:srgbClr val="1E2761"/>
+                </a:solidFill>
+                <a:latin typeface="Meiryo UI" pitchFamily="34" charset="0"/>
+                <a:ea typeface="Meiryo UI" pitchFamily="34" charset="-122"/>
+                <a:cs typeface="Meiryo UI" pitchFamily="34" charset="-120"/>
+              </a:rPr>
+              <a:t>業務内容　</a:t>
+            </a:r>
+            <a:pPr indent="0" marL="0">
+              <a:lnSpc>
+                <a:spcPct val="125000"/>
+              </a:lnSpc>
+              <a:spcAft>
+                <a:spcPts val="600"/>
+              </a:spcAft>
+              <a:buNone/>
+            </a:pPr>
+            <a:r>
               <a:rPr lang="en-US" sz="1400" dirty="0">
                 <a:solidFill>
                   <a:srgbClr val="000000"/>
@@ -4042,7 +5521,7 @@
                 <a:ea typeface="Meiryo UI" pitchFamily="34" charset="-122"/>
                 <a:cs typeface="Meiryo UI" pitchFamily="34" charset="-120"/>
               </a:rPr>
-              <a:t>決算書を「読める」だけでなく、与信判断や提案に「使う」実践力。企業への説明力・折衝力も同時に磨かれる。</a:t>
+              <a:t>信託銀行の運用企画部門で外部運用会社を評価・選定する視点も併せ持つマネージャー、またはAM会社のシニアファンドマネージャー・運用部門責任者。</a:t>
             </a:r>
             <a:endParaRPr lang="en-US" sz="1400" dirty="0"/>
           </a:p>
@@ -4050,36 +5529,14 @@
       </p:sp>
       <p:sp>
         <p:nvSpPr>
-          <p:cNvPr id="16" name="Shape 13"/>
-          <p:cNvSpPr/>
-          <p:nvPr/>
-        </p:nvSpPr>
-        <p:spPr>
-          <a:xfrm>
-            <a:off x="4005072" y="4526280"/>
-            <a:ext cx="146304" cy="146304"/>
-          </a:xfrm>
-          <a:prstGeom prst="roundRect">
-            <a:avLst>
-              <a:gd name="adj" fmla="val 50000"/>
-            </a:avLst>
-          </a:prstGeom>
-          <a:solidFill>
-            <a:srgbClr val="C9A227"/>
-          </a:solidFill>
-          <a:ln/>
-        </p:spPr>
-      </p:sp>
-      <p:sp>
-        <p:nvSpPr>
-          <p:cNvPr id="17" name="Text 14"/>
-          <p:cNvSpPr/>
-          <p:nvPr/>
-        </p:nvSpPr>
-        <p:spPr>
-          <a:xfrm>
-            <a:off x="4297680" y="4453128"/>
-            <a:ext cx="7406640" cy="365760"/>
+          <p:cNvPr id="28" name="Text 21"/>
+          <p:cNvSpPr/>
+          <p:nvPr/>
+        </p:nvSpPr>
+        <p:spPr>
+          <a:xfrm>
+            <a:off x="8229600" y="4983480"/>
+            <a:ext cx="3566160" cy="1463040"/>
           </a:xfrm>
           <a:prstGeom prst="rect">
             <a:avLst/>
@@ -4092,51 +5549,29 @@
           <a:lstStyle/>
           <a:p>
             <a:pPr indent="0" marL="0">
-              <a:buNone/>
-            </a:pPr>
-            <a:r>
-              <a:rPr lang="en-US" sz="1600" b="1" dirty="0">
-                <a:solidFill>
-                  <a:srgbClr val="000000"/>
-                </a:solidFill>
-                <a:latin typeface="Meiryo UI" pitchFamily="34" charset="0"/>
-                <a:ea typeface="Meiryo UI" pitchFamily="34" charset="-122"/>
-                <a:cs typeface="Meiryo UI" pitchFamily="34" charset="-120"/>
-              </a:rPr>
-              <a:t>強みとの接続</a:t>
-            </a:r>
-            <a:endParaRPr lang="en-US" sz="1600" dirty="0"/>
-          </a:p>
-        </p:txBody>
-      </p:sp>
-      <p:sp>
-        <p:nvSpPr>
-          <p:cNvPr id="18" name="Text 15"/>
-          <p:cNvSpPr/>
-          <p:nvPr/>
-        </p:nvSpPr>
-        <p:spPr>
-          <a:xfrm>
-            <a:off x="4041648" y="4910328"/>
-            <a:ext cx="7680960" cy="1417320"/>
-          </a:xfrm>
-          <a:prstGeom prst="rect">
-            <a:avLst/>
-          </a:prstGeom>
-          <a:noFill/>
-          <a:ln/>
-        </p:spPr>
-        <p:txBody>
-          <a:bodyPr wrap="square" rtlCol="0" anchor="ctr"/>
-          <a:lstStyle/>
-          <a:p>
-            <a:pPr indent="0" marL="0">
               <a:lnSpc>
-                <a:spcPct val="135000"/>
+                <a:spcPct val="125000"/>
               </a:lnSpc>
               <a:buNone/>
             </a:pPr>
             <a:r>
+              <a:rPr lang="en-US" sz="1400" b="1" dirty="0">
+                <a:solidFill>
+                  <a:srgbClr val="1E2761"/>
+                </a:solidFill>
+                <a:latin typeface="Meiryo UI" pitchFamily="34" charset="0"/>
+                <a:ea typeface="Meiryo UI" pitchFamily="34" charset="-122"/>
+                <a:cs typeface="Meiryo UI" pitchFamily="34" charset="-120"/>
+              </a:rPr>
+              <a:t>身につく力　</a:t>
+            </a:r>
+            <a:pPr indent="0" marL="0">
+              <a:lnSpc>
+                <a:spcPct val="125000"/>
+              </a:lnSpc>
+              <a:buNone/>
+            </a:pPr>
+            <a:r>
               <a:rPr lang="en-US" sz="1400" dirty="0">
                 <a:solidFill>
                   <a:srgbClr val="000000"/>
@@ -4145,7 +5580,7 @@
                 <a:ea typeface="Meiryo UI" pitchFamily="34" charset="-122"/>
                 <a:cs typeface="Meiryo UI" pitchFamily="34" charset="-120"/>
               </a:rPr>
-              <a:t>簿記1級で培った会計知識と、りそな銀行インターンで実証済みの「財務諸表を読める」強みを、実務レベルまで鍛え上げるフェーズ。</a:t>
+              <a:t>「頭脳」と「金庫」双方の実務を知る、グループ内でも希少な人材としての専門性。</a:t>
             </a:r>
             <a:endParaRPr lang="en-US" sz="1400" dirty="0"/>
           </a:p>
@@ -4191,39 +5626,151 @@
         </p:nvSpPr>
         <p:spPr>
           <a:xfrm>
-            <a:off x="457200" y="457200"/>
-            <a:ext cx="3200400" cy="5943600"/>
+            <a:off x="640080" y="411480"/>
+            <a:ext cx="502920" cy="457200"/>
           </a:xfrm>
           <a:prstGeom prst="roundRect">
             <a:avLst>
-              <a:gd name="adj" fmla="val 2857"/>
+              <a:gd name="adj" fmla="val 16000"/>
             </a:avLst>
           </a:prstGeom>
           <a:solidFill>
-            <a:srgbClr val="FFFFFF"/>
+            <a:srgbClr val="2E6F52"/>
           </a:solidFill>
-          <a:ln w="19050">
-            <a:solidFill>
-              <a:srgbClr val="1E2761"/>
-            </a:solidFill>
-            <a:prstDash val="solid"/>
-          </a:ln>
-        </p:spPr>
-      </p:sp>
-      <p:sp>
-        <p:nvSpPr>
-          <p:cNvPr id="3" name="Shape 1"/>
-          <p:cNvSpPr/>
-          <p:nvPr/>
-        </p:nvSpPr>
-        <p:spPr>
-          <a:xfrm>
-            <a:off x="777240" y="777240"/>
-            <a:ext cx="1143000" cy="411480"/>
+          <a:ln/>
+        </p:spPr>
+      </p:sp>
+      <p:sp>
+        <p:nvSpPr>
+          <p:cNvPr id="3" name="Text 1"/>
+          <p:cNvSpPr/>
+          <p:nvPr/>
+        </p:nvSpPr>
+        <p:spPr>
+          <a:xfrm>
+            <a:off x="640080" y="411480"/>
+            <a:ext cx="502920" cy="457200"/>
+          </a:xfrm>
+          <a:prstGeom prst="rect">
+            <a:avLst/>
+          </a:prstGeom>
+          <a:noFill/>
+          <a:ln/>
+        </p:spPr>
+        <p:txBody>
+          <a:bodyPr wrap="square" rtlCol="0" anchor="ctr"/>
+          <a:lstStyle/>
+          <a:p>
+            <a:pPr algn="ctr" indent="0" marL="0">
+              <a:buNone/>
+            </a:pPr>
+            <a:r>
+              <a:rPr lang="en-US" sz="2000" b="1" dirty="0">
+                <a:solidFill>
+                  <a:srgbClr val="FFFFFF"/>
+                </a:solidFill>
+                <a:latin typeface="Meiryo UI" pitchFamily="34" charset="0"/>
+                <a:ea typeface="Meiryo UI" pitchFamily="34" charset="-122"/>
+                <a:cs typeface="Meiryo UI" pitchFamily="34" charset="-120"/>
+              </a:rPr>
+              <a:t>②</a:t>
+            </a:r>
+            <a:endParaRPr lang="en-US" sz="2000" dirty="0"/>
+          </a:p>
+        </p:txBody>
+      </p:sp>
+      <p:sp>
+        <p:nvSpPr>
+          <p:cNvPr id="4" name="Text 2"/>
+          <p:cNvSpPr/>
+          <p:nvPr/>
+        </p:nvSpPr>
+        <p:spPr>
+          <a:xfrm>
+            <a:off x="1280160" y="365760"/>
+            <a:ext cx="10241280" cy="502920"/>
+          </a:xfrm>
+          <a:prstGeom prst="rect">
+            <a:avLst/>
+          </a:prstGeom>
+          <a:noFill/>
+          <a:ln/>
+        </p:spPr>
+        <p:txBody>
+          <a:bodyPr wrap="square" rtlCol="0" anchor="ctr"/>
+          <a:lstStyle/>
+          <a:p>
+            <a:pPr indent="0" marL="0">
+              <a:buNone/>
+            </a:pPr>
+            <a:r>
+              <a:rPr lang="en-US" sz="2600" b="1" dirty="0">
+                <a:solidFill>
+                  <a:srgbClr val="000000"/>
+                </a:solidFill>
+                <a:latin typeface="Meiryo UI" pitchFamily="34" charset="0"/>
+                <a:ea typeface="Meiryo UI" pitchFamily="34" charset="-122"/>
+                <a:cs typeface="Meiryo UI" pitchFamily="34" charset="-120"/>
+              </a:rPr>
+              <a:t>信託銀行の運用業務を中心とするキャリア</a:t>
+            </a:r>
+            <a:endParaRPr lang="en-US" sz="2600" dirty="0"/>
+          </a:p>
+        </p:txBody>
+      </p:sp>
+      <p:sp>
+        <p:nvSpPr>
+          <p:cNvPr id="5" name="Text 3"/>
+          <p:cNvSpPr/>
+          <p:nvPr/>
+        </p:nvSpPr>
+        <p:spPr>
+          <a:xfrm>
+            <a:off x="1280160" y="868680"/>
+            <a:ext cx="10241280" cy="365760"/>
+          </a:xfrm>
+          <a:prstGeom prst="rect">
+            <a:avLst/>
+          </a:prstGeom>
+          <a:noFill/>
+          <a:ln/>
+        </p:spPr>
+        <p:txBody>
+          <a:bodyPr wrap="square" rtlCol="0" anchor="ctr"/>
+          <a:lstStyle/>
+          <a:p>
+            <a:pPr indent="0" marL="0">
+              <a:buNone/>
+            </a:pPr>
+            <a:r>
+              <a:rPr lang="en-US" sz="1400" i="1" dirty="0">
+                <a:solidFill>
+                  <a:srgbClr val="000000"/>
+                </a:solidFill>
+                <a:latin typeface="Meiryo UI" pitchFamily="34" charset="0"/>
+                <a:ea typeface="Meiryo UI" pitchFamily="34" charset="-122"/>
+                <a:cs typeface="Meiryo UI" pitchFamily="34" charset="-120"/>
+              </a:rPr>
+              <a:t>信託銀行側（受託者・金庫側）に軸足を置きながら、グループAM会社との協働も経験する</a:t>
+            </a:r>
+            <a:endParaRPr lang="en-US" sz="1400" dirty="0"/>
+          </a:p>
+        </p:txBody>
+      </p:sp>
+      <p:sp>
+        <p:nvSpPr>
+          <p:cNvPr id="6" name="Shape 4"/>
+          <p:cNvSpPr/>
+          <p:nvPr/>
+        </p:nvSpPr>
+        <p:spPr>
+          <a:xfrm>
+            <a:off x="548640" y="1417320"/>
+            <a:ext cx="3566160" cy="1417320"/>
           </a:xfrm>
           <a:prstGeom prst="roundRect">
             <a:avLst>
-              <a:gd name="adj" fmla="val 17778"/>
+              <a:gd name="adj" fmla="val 6452"/>
             </a:avLst>
           </a:prstGeom>
           <a:solidFill>
@@ -4231,7 +5778,7 @@
           </a:solidFill>
           <a:ln w="15875">
             <a:solidFill>
-              <a:srgbClr val="1E2761"/>
+              <a:srgbClr val="2E6F52"/>
             </a:solidFill>
             <a:prstDash val="solid"/>
           </a:ln>
@@ -4239,66 +5786,27 @@
       </p:sp>
       <p:sp>
         <p:nvSpPr>
-          <p:cNvPr id="4" name="Text 2"/>
-          <p:cNvSpPr/>
-          <p:nvPr/>
-        </p:nvSpPr>
-        <p:spPr>
-          <a:xfrm>
-            <a:off x="777240" y="777240"/>
-            <a:ext cx="1143000" cy="411480"/>
-          </a:xfrm>
-          <a:prstGeom prst="rect">
-            <a:avLst/>
-          </a:prstGeom>
-          <a:noFill/>
-          <a:ln/>
-        </p:spPr>
-        <p:txBody>
-          <a:bodyPr wrap="square" rtlCol="0" anchor="ctr"/>
-          <a:lstStyle/>
-          <a:p>
-            <a:pPr algn="ctr" indent="0" marL="0">
-              <a:buNone/>
-            </a:pPr>
-            <a:r>
-              <a:rPr lang="en-US" sz="1400" b="1" dirty="0">
-                <a:solidFill>
-                  <a:srgbClr val="000000"/>
-                </a:solidFill>
-                <a:latin typeface="Meiryo UI" pitchFamily="34" charset="0"/>
-                <a:ea typeface="Meiryo UI" pitchFamily="34" charset="-122"/>
-                <a:cs typeface="Meiryo UI" pitchFamily="34" charset="-120"/>
-              </a:rPr>
-              <a:t>PHASE 2</a:t>
-            </a:r>
-            <a:endParaRPr lang="en-US" sz="1400" dirty="0"/>
-          </a:p>
-        </p:txBody>
-      </p:sp>
-      <p:sp>
-        <p:nvSpPr>
-          <p:cNvPr id="5" name="Shape 3"/>
-          <p:cNvSpPr/>
-          <p:nvPr/>
-        </p:nvSpPr>
-        <p:spPr>
-          <a:xfrm>
-            <a:off x="777240" y="1508760"/>
-            <a:ext cx="1371600" cy="1371600"/>
+          <p:cNvPr id="7" name="Shape 5"/>
+          <p:cNvSpPr/>
+          <p:nvPr/>
+        </p:nvSpPr>
+        <p:spPr>
+          <a:xfrm>
+            <a:off x="749808" y="1691640"/>
+            <a:ext cx="868680" cy="868680"/>
           </a:xfrm>
           <a:prstGeom prst="ellipse">
             <a:avLst/>
           </a:prstGeom>
           <a:solidFill>
-            <a:srgbClr val="1E2761"/>
+            <a:srgbClr val="2E6F52"/>
           </a:solidFill>
           <a:ln/>
         </p:spPr>
       </p:sp>
       <p:pic>
         <p:nvPicPr>
-          <p:cNvPr id="6" name="Image 0" descr="icon_contract.png">    </p:cNvPr>
+          <p:cNvPr id="8" name="Image 0" descr="icon_contract.png">    </p:cNvPr>
           <p:cNvPicPr>
             <a:picLocks noChangeAspect="1"/>
           </p:cNvPicPr>
@@ -4312,8 +5820,8 @@
         </p:blipFill>
         <p:spPr>
           <a:xfrm>
-            <a:off x="1069848" y="1801368"/>
-            <a:ext cx="786384" cy="786384"/>
+            <a:off x="932688" y="1874520"/>
+            <a:ext cx="502920" cy="502920"/>
           </a:xfrm>
           <a:prstGeom prst="rect">
             <a:avLst/>
@@ -4322,14 +5830,14 @@
       </p:pic>
       <p:sp>
         <p:nvSpPr>
-          <p:cNvPr id="7" name="Text 4"/>
-          <p:cNvSpPr/>
-          <p:nvPr/>
-        </p:nvSpPr>
-        <p:spPr>
-          <a:xfrm>
-            <a:off x="777240" y="3108960"/>
-            <a:ext cx="2743200" cy="365760"/>
+          <p:cNvPr id="9" name="Text 6"/>
+          <p:cNvSpPr/>
+          <p:nvPr/>
+        </p:nvSpPr>
+        <p:spPr>
+          <a:xfrm>
+            <a:off x="1783080" y="1645920"/>
+            <a:ext cx="2148840" cy="320040"/>
           </a:xfrm>
           <a:prstGeom prst="rect">
             <a:avLst/>
@@ -4353,7 +5861,7 @@
                 <a:ea typeface="Meiryo UI" pitchFamily="34" charset="-122"/>
                 <a:cs typeface="Meiryo UI" pitchFamily="34" charset="-120"/>
               </a:rPr>
-              <a:t>6〜10年目</a:t>
+              <a:t>入行〜5年目</a:t>
             </a:r>
             <a:endParaRPr lang="en-US" sz="1400" dirty="0"/>
           </a:p>
@@ -4361,14 +5869,14 @@
       </p:sp>
       <p:sp>
         <p:nvSpPr>
-          <p:cNvPr id="8" name="Text 5"/>
-          <p:cNvSpPr/>
-          <p:nvPr/>
-        </p:nvSpPr>
-        <p:spPr>
-          <a:xfrm>
-            <a:off x="777240" y="3520440"/>
-            <a:ext cx="2788920" cy="1280160"/>
+          <p:cNvPr id="10" name="Text 7"/>
+          <p:cNvSpPr/>
+          <p:nvPr/>
+        </p:nvSpPr>
+        <p:spPr>
+          <a:xfrm>
+            <a:off x="1783080" y="1965960"/>
+            <a:ext cx="2148840" cy="777240"/>
           </a:xfrm>
           <a:prstGeom prst="rect">
             <a:avLst/>
@@ -4382,32 +5890,32 @@
           <a:p>
             <a:pPr indent="0" marL="0">
               <a:lnSpc>
-                <a:spcPct val="115000"/>
+                <a:spcPct val="110000"/>
               </a:lnSpc>
               <a:buNone/>
             </a:pPr>
             <a:r>
-              <a:rPr lang="en-US" sz="2200" b="1" dirty="0">
-                <a:solidFill>
-                  <a:srgbClr val="000000"/>
-                </a:solidFill>
-                <a:latin typeface="Meiryo UI" pitchFamily="34" charset="0"/>
-                <a:ea typeface="Meiryo UI" pitchFamily="34" charset="-122"/>
-                <a:cs typeface="Meiryo UI" pitchFamily="34" charset="-120"/>
-              </a:rPr>
-              <a:t>証券代行・</a:t>
-            </a:r>
-            <a:endParaRPr lang="en-US" sz="2200" dirty="0"/>
+              <a:rPr lang="en-US" sz="1500" b="1" dirty="0">
+                <a:solidFill>
+                  <a:srgbClr val="000000"/>
+                </a:solidFill>
+                <a:latin typeface="Meiryo UI" pitchFamily="34" charset="0"/>
+                <a:ea typeface="Meiryo UI" pitchFamily="34" charset="-122"/>
+                <a:cs typeface="Meiryo UI" pitchFamily="34" charset="-120"/>
+              </a:rPr>
+              <a:t>信託銀行</a:t>
+            </a:r>
+            <a:endParaRPr lang="en-US" sz="1500" dirty="0"/>
           </a:p>
           <a:p>
             <a:pPr indent="0" marL="0">
               <a:lnSpc>
-                <a:spcPct val="115000"/>
+                <a:spcPct val="110000"/>
               </a:lnSpc>
               <a:buNone/>
             </a:pPr>
             <a:r>
-              <a:rPr lang="en-US" sz="2200" b="1" dirty="0">
+              <a:rPr lang="en-US" sz="1500" b="1" dirty="0">
                 <a:solidFill>
                   <a:srgbClr val="000000"/>
                 </a:solidFill>
@@ -4417,20 +5925,44 @@
               </a:rPr>
               <a:t>年金信託業務部門</a:t>
             </a:r>
-            <a:endParaRPr lang="en-US" sz="2200" dirty="0"/>
-          </a:p>
-        </p:txBody>
-      </p:sp>
-      <p:sp>
-        <p:nvSpPr>
-          <p:cNvPr id="9" name="Text 6"/>
-          <p:cNvSpPr/>
-          <p:nvPr/>
-        </p:nvSpPr>
-        <p:spPr>
-          <a:xfrm>
-            <a:off x="777240" y="4937760"/>
-            <a:ext cx="2788920" cy="1371600"/>
+            <a:endParaRPr lang="en-US" sz="1500" dirty="0"/>
+          </a:p>
+        </p:txBody>
+      </p:sp>
+      <p:pic>
+        <p:nvPicPr>
+          <p:cNvPr id="11" name="Image 1" descr="icon_arrow_dark.png">    </p:cNvPr>
+          <p:cNvPicPr>
+            <a:picLocks noChangeAspect="1"/>
+          </p:cNvPicPr>
+          <p:nvPr/>
+        </p:nvPicPr>
+        <p:blipFill>
+          <a:blip r:embed="rId2"/>
+          <a:stretch>
+            <a:fillRect/>
+          </a:stretch>
+        </p:blipFill>
+        <p:spPr>
+          <a:xfrm>
+            <a:off x="4133088" y="1979676"/>
+            <a:ext cx="219456" cy="292608"/>
+          </a:xfrm>
+          <a:prstGeom prst="rect">
+            <a:avLst/>
+          </a:prstGeom>
+        </p:spPr>
+      </p:pic>
+      <p:sp>
+        <p:nvSpPr>
+          <p:cNvPr id="12" name="Text 8"/>
+          <p:cNvSpPr/>
+          <p:nvPr/>
+        </p:nvSpPr>
+        <p:spPr>
+          <a:xfrm>
+            <a:off x="548640" y="3017520"/>
+            <a:ext cx="3566160" cy="2103120"/>
           </a:xfrm>
           <a:prstGeom prst="rect">
             <a:avLst/>
@@ -4446,18 +5978,41 @@
               <a:lnSpc>
                 <a:spcPct val="125000"/>
               </a:lnSpc>
-              <a:buNone/>
-            </a:pPr>
-            <a:r>
-              <a:rPr lang="en-US" sz="1400" i="1" dirty="0">
-                <a:solidFill>
-                  <a:srgbClr val="000000"/>
-                </a:solidFill>
-                <a:latin typeface="Meiryo UI" pitchFamily="34" charset="0"/>
-                <a:ea typeface="Meiryo UI" pitchFamily="34" charset="-122"/>
-                <a:cs typeface="Meiryo UI" pitchFamily="34" charset="-120"/>
-              </a:rPr>
-              <a:t>企業法ゼミで培った法律知識を、信託銀行ならではの専門業務で磨く</a:t>
+              <a:spcAft>
+                <a:spcPts val="600"/>
+              </a:spcAft>
+              <a:buNone/>
+            </a:pPr>
+            <a:r>
+              <a:rPr lang="en-US" sz="1400" b="1" dirty="0">
+                <a:solidFill>
+                  <a:srgbClr val="2E6F52"/>
+                </a:solidFill>
+                <a:latin typeface="Meiryo UI" pitchFamily="34" charset="0"/>
+                <a:ea typeface="Meiryo UI" pitchFamily="34" charset="-122"/>
+                <a:cs typeface="Meiryo UI" pitchFamily="34" charset="-120"/>
+              </a:rPr>
+              <a:t>業務内容　</a:t>
+            </a:r>
+            <a:pPr indent="0" marL="0">
+              <a:lnSpc>
+                <a:spcPct val="125000"/>
+              </a:lnSpc>
+              <a:spcAft>
+                <a:spcPts val="600"/>
+              </a:spcAft>
+              <a:buNone/>
+            </a:pPr>
+            <a:r>
+              <a:rPr lang="en-US" sz="1400" dirty="0">
+                <a:solidFill>
+                  <a:srgbClr val="000000"/>
+                </a:solidFill>
+                <a:latin typeface="Meiryo UI" pitchFamily="34" charset="0"/>
+                <a:ea typeface="Meiryo UI" pitchFamily="34" charset="-122"/>
+                <a:cs typeface="Meiryo UI" pitchFamily="34" charset="-120"/>
+              </a:rPr>
+              <a:t>企業年金の年金信託（合同運用）・特定金銭信託の実務、資産の保管・執行・記録という信託銀行本来の「金庫」機能を担当する。</a:t>
             </a:r>
             <a:endParaRPr lang="en-US" sz="1400" dirty="0"/>
           </a:p>
@@ -4465,36 +6020,144 @@
       </p:sp>
       <p:sp>
         <p:nvSpPr>
-          <p:cNvPr id="10" name="Shape 7"/>
-          <p:cNvSpPr/>
-          <p:nvPr/>
-        </p:nvSpPr>
-        <p:spPr>
-          <a:xfrm>
-            <a:off x="4005072" y="685800"/>
-            <a:ext cx="146304" cy="146304"/>
+          <p:cNvPr id="13" name="Text 9"/>
+          <p:cNvSpPr/>
+          <p:nvPr/>
+        </p:nvSpPr>
+        <p:spPr>
+          <a:xfrm>
+            <a:off x="548640" y="4983480"/>
+            <a:ext cx="3566160" cy="1463040"/>
+          </a:xfrm>
+          <a:prstGeom prst="rect">
+            <a:avLst/>
+          </a:prstGeom>
+          <a:noFill/>
+          <a:ln/>
+        </p:spPr>
+        <p:txBody>
+          <a:bodyPr wrap="square" rtlCol="0" anchor="ctr"/>
+          <a:lstStyle/>
+          <a:p>
+            <a:pPr indent="0" marL="0">
+              <a:lnSpc>
+                <a:spcPct val="125000"/>
+              </a:lnSpc>
+              <a:buNone/>
+            </a:pPr>
+            <a:r>
+              <a:rPr lang="en-US" sz="1400" b="1" dirty="0">
+                <a:solidFill>
+                  <a:srgbClr val="2E6F52"/>
+                </a:solidFill>
+                <a:latin typeface="Meiryo UI" pitchFamily="34" charset="0"/>
+                <a:ea typeface="Meiryo UI" pitchFamily="34" charset="-122"/>
+                <a:cs typeface="Meiryo UI" pitchFamily="34" charset="-120"/>
+              </a:rPr>
+              <a:t>身につく力　</a:t>
+            </a:r>
+            <a:pPr indent="0" marL="0">
+              <a:lnSpc>
+                <a:spcPct val="125000"/>
+              </a:lnSpc>
+              <a:buNone/>
+            </a:pPr>
+            <a:r>
+              <a:rPr lang="en-US" sz="1400" dirty="0">
+                <a:solidFill>
+                  <a:srgbClr val="000000"/>
+                </a:solidFill>
+                <a:latin typeface="Meiryo UI" pitchFamily="34" charset="0"/>
+                <a:ea typeface="Meiryo UI" pitchFamily="34" charset="-122"/>
+                <a:cs typeface="Meiryo UI" pitchFamily="34" charset="-120"/>
+              </a:rPr>
+              <a:t>信託の法的構造・受託者としての義務の理解、企業年金顧客への対応力。</a:t>
+            </a:r>
+            <a:endParaRPr lang="en-US" sz="1400" dirty="0"/>
+          </a:p>
+        </p:txBody>
+      </p:sp>
+      <p:sp>
+        <p:nvSpPr>
+          <p:cNvPr id="14" name="Shape 10"/>
+          <p:cNvSpPr/>
+          <p:nvPr/>
+        </p:nvSpPr>
+        <p:spPr>
+          <a:xfrm>
+            <a:off x="4389120" y="1417320"/>
+            <a:ext cx="3566160" cy="1417320"/>
           </a:xfrm>
           <a:prstGeom prst="roundRect">
             <a:avLst>
-              <a:gd name="adj" fmla="val 50000"/>
+              <a:gd name="adj" fmla="val 6452"/>
             </a:avLst>
           </a:prstGeom>
           <a:solidFill>
-            <a:srgbClr val="C9A227"/>
+            <a:srgbClr val="FFFFFF"/>
           </a:solidFill>
-          <a:ln/>
-        </p:spPr>
-      </p:sp>
-      <p:sp>
-        <p:nvSpPr>
-          <p:cNvPr id="11" name="Text 8"/>
-          <p:cNvSpPr/>
-          <p:nvPr/>
-        </p:nvSpPr>
-        <p:spPr>
-          <a:xfrm>
-            <a:off x="4297680" y="612648"/>
-            <a:ext cx="7406640" cy="365760"/>
+          <a:ln w="15875">
+            <a:solidFill>
+              <a:srgbClr val="2E6F52"/>
+            </a:solidFill>
+            <a:prstDash val="solid"/>
+          </a:ln>
+        </p:spPr>
+      </p:sp>
+      <p:sp>
+        <p:nvSpPr>
+          <p:cNvPr id="15" name="Shape 11"/>
+          <p:cNvSpPr/>
+          <p:nvPr/>
+        </p:nvSpPr>
+        <p:spPr>
+          <a:xfrm>
+            <a:off x="4590288" y="1691640"/>
+            <a:ext cx="868680" cy="868680"/>
+          </a:xfrm>
+          <a:prstGeom prst="ellipse">
+            <a:avLst/>
+          </a:prstGeom>
+          <a:solidFill>
+            <a:srgbClr val="2E6F52"/>
+          </a:solidFill>
+          <a:ln/>
+        </p:spPr>
+      </p:sp>
+      <p:pic>
+        <p:nvPicPr>
+          <p:cNvPr id="16" name="Image 2" descr="icon_exchange.png">    </p:cNvPr>
+          <p:cNvPicPr>
+            <a:picLocks noChangeAspect="1"/>
+          </p:cNvPicPr>
+          <p:nvPr/>
+        </p:nvPicPr>
+        <p:blipFill>
+          <a:blip r:embed="rId3"/>
+          <a:stretch>
+            <a:fillRect/>
+          </a:stretch>
+        </p:blipFill>
+        <p:spPr>
+          <a:xfrm>
+            <a:off x="4773168" y="1874520"/>
+            <a:ext cx="502920" cy="502920"/>
+          </a:xfrm>
+          <a:prstGeom prst="rect">
+            <a:avLst/>
+          </a:prstGeom>
+        </p:spPr>
+      </p:pic>
+      <p:sp>
+        <p:nvSpPr>
+          <p:cNvPr id="17" name="Text 12"/>
+          <p:cNvSpPr/>
+          <p:nvPr/>
+        </p:nvSpPr>
+        <p:spPr>
+          <a:xfrm>
+            <a:off x="5623560" y="1645920"/>
+            <a:ext cx="2148840" cy="320040"/>
           </a:xfrm>
           <a:prstGeom prst="rect">
             <a:avLst/>
@@ -4510,30 +6173,30 @@
               <a:buNone/>
             </a:pPr>
             <a:r>
-              <a:rPr lang="en-US" sz="1600" b="1" dirty="0">
-                <a:solidFill>
-                  <a:srgbClr val="000000"/>
-                </a:solidFill>
-                <a:latin typeface="Meiryo UI" pitchFamily="34" charset="0"/>
-                <a:ea typeface="Meiryo UI" pitchFamily="34" charset="-122"/>
-                <a:cs typeface="Meiryo UI" pitchFamily="34" charset="-120"/>
-              </a:rPr>
-              <a:t>業務内容</a:t>
-            </a:r>
-            <a:endParaRPr lang="en-US" sz="1600" dirty="0"/>
-          </a:p>
-        </p:txBody>
-      </p:sp>
-      <p:sp>
-        <p:nvSpPr>
-          <p:cNvPr id="12" name="Text 9"/>
-          <p:cNvSpPr/>
-          <p:nvPr/>
-        </p:nvSpPr>
-        <p:spPr>
-          <a:xfrm>
-            <a:off x="4041648" y="1069848"/>
-            <a:ext cx="7680960" cy="1417320"/>
+              <a:rPr lang="en-US" sz="1400" b="1" dirty="0">
+                <a:solidFill>
+                  <a:srgbClr val="000000"/>
+                </a:solidFill>
+                <a:latin typeface="Meiryo UI" pitchFamily="34" charset="0"/>
+                <a:ea typeface="Meiryo UI" pitchFamily="34" charset="-122"/>
+                <a:cs typeface="Meiryo UI" pitchFamily="34" charset="-120"/>
+              </a:rPr>
+              <a:t>6〜10年目</a:t>
+            </a:r>
+            <a:endParaRPr lang="en-US" sz="1400" dirty="0"/>
+          </a:p>
+        </p:txBody>
+      </p:sp>
+      <p:sp>
+        <p:nvSpPr>
+          <p:cNvPr id="18" name="Text 13"/>
+          <p:cNvSpPr/>
+          <p:nvPr/>
+        </p:nvSpPr>
+        <p:spPr>
+          <a:xfrm>
+            <a:off x="5623560" y="1965960"/>
+            <a:ext cx="2148840" cy="777240"/>
           </a:xfrm>
           <a:prstGeom prst="rect">
             <a:avLst/>
@@ -4547,11 +6210,120 @@
           <a:p>
             <a:pPr indent="0" marL="0">
               <a:lnSpc>
-                <a:spcPct val="135000"/>
+                <a:spcPct val="110000"/>
               </a:lnSpc>
               <a:buNone/>
             </a:pPr>
             <a:r>
+              <a:rPr lang="en-US" sz="1500" b="1" dirty="0">
+                <a:solidFill>
+                  <a:srgbClr val="000000"/>
+                </a:solidFill>
+                <a:latin typeface="Meiryo UI" pitchFamily="34" charset="0"/>
+                <a:ea typeface="Meiryo UI" pitchFamily="34" charset="-122"/>
+                <a:cs typeface="Meiryo UI" pitchFamily="34" charset="-120"/>
+              </a:rPr>
+              <a:t>グループAM会社へ</a:t>
+            </a:r>
+            <a:endParaRPr lang="en-US" sz="1500" dirty="0"/>
+          </a:p>
+          <a:p>
+            <a:pPr indent="0" marL="0">
+              <a:lnSpc>
+                <a:spcPct val="110000"/>
+              </a:lnSpc>
+              <a:buNone/>
+            </a:pPr>
+            <a:r>
+              <a:rPr lang="en-US" sz="1500" b="1" dirty="0">
+                <a:solidFill>
+                  <a:srgbClr val="000000"/>
+                </a:solidFill>
+                <a:latin typeface="Meiryo UI" pitchFamily="34" charset="0"/>
+                <a:ea typeface="Meiryo UI" pitchFamily="34" charset="-122"/>
+                <a:cs typeface="Meiryo UI" pitchFamily="34" charset="-120"/>
+              </a:rPr>
+              <a:t>出向</a:t>
+            </a:r>
+            <a:endParaRPr lang="en-US" sz="1500" dirty="0"/>
+          </a:p>
+        </p:txBody>
+      </p:sp>
+      <p:pic>
+        <p:nvPicPr>
+          <p:cNvPr id="19" name="Image 3" descr="icon_arrow_dark.png">    </p:cNvPr>
+          <p:cNvPicPr>
+            <a:picLocks noChangeAspect="1"/>
+          </p:cNvPicPr>
+          <p:nvPr/>
+        </p:nvPicPr>
+        <p:blipFill>
+          <a:blip r:embed="rId4"/>
+          <a:stretch>
+            <a:fillRect/>
+          </a:stretch>
+        </p:blipFill>
+        <p:spPr>
+          <a:xfrm>
+            <a:off x="7973568" y="1979676"/>
+            <a:ext cx="219456" cy="292608"/>
+          </a:xfrm>
+          <a:prstGeom prst="rect">
+            <a:avLst/>
+          </a:prstGeom>
+        </p:spPr>
+      </p:pic>
+      <p:sp>
+        <p:nvSpPr>
+          <p:cNvPr id="20" name="Text 14"/>
+          <p:cNvSpPr/>
+          <p:nvPr/>
+        </p:nvSpPr>
+        <p:spPr>
+          <a:xfrm>
+            <a:off x="4389120" y="3017520"/>
+            <a:ext cx="3566160" cy="2103120"/>
+          </a:xfrm>
+          <a:prstGeom prst="rect">
+            <a:avLst/>
+          </a:prstGeom>
+          <a:noFill/>
+          <a:ln/>
+        </p:spPr>
+        <p:txBody>
+          <a:bodyPr wrap="square" rtlCol="0" anchor="ctr"/>
+          <a:lstStyle/>
+          <a:p>
+            <a:pPr indent="0" marL="0">
+              <a:lnSpc>
+                <a:spcPct val="125000"/>
+              </a:lnSpc>
+              <a:spcAft>
+                <a:spcPts val="600"/>
+              </a:spcAft>
+              <a:buNone/>
+            </a:pPr>
+            <a:r>
+              <a:rPr lang="en-US" sz="1400" b="1" dirty="0">
+                <a:solidFill>
+                  <a:srgbClr val="2E6F52"/>
+                </a:solidFill>
+                <a:latin typeface="Meiryo UI" pitchFamily="34" charset="0"/>
+                <a:ea typeface="Meiryo UI" pitchFamily="34" charset="-122"/>
+                <a:cs typeface="Meiryo UI" pitchFamily="34" charset="-120"/>
+              </a:rPr>
+              <a:t>業務内容　</a:t>
+            </a:r>
+            <a:pPr indent="0" marL="0">
+              <a:lnSpc>
+                <a:spcPct val="125000"/>
+              </a:lnSpc>
+              <a:spcAft>
+                <a:spcPts val="600"/>
+              </a:spcAft>
+              <a:buNone/>
+            </a:pPr>
+            <a:r>
               <a:rPr lang="en-US" sz="1400" dirty="0">
                 <a:solidFill>
                   <a:srgbClr val="000000"/>
@@ -4560,7 +6332,7 @@
                 <a:ea typeface="Meiryo UI" pitchFamily="34" charset="-122"/>
                 <a:cs typeface="Meiryo UI" pitchFamily="34" charset="-120"/>
               </a:rPr>
-              <a:t>証券代行業務（株主名簿管理、株主総会運営支援、コーポレートガバナンス関連アドバイザリー）または年金信託業務（企業年金の資産運用・給付設計）を担当。いずれも大手信託銀行など一部の会社しか担えない専門領域。</a:t>
+              <a:t>マルチマネージャー方式のもとで運用会社を選定・モニタリングする、委託する側の実務を、実際にAM会社に身を置いて経験する。</a:t>
             </a:r>
             <a:endParaRPr lang="en-US" sz="1400" dirty="0"/>
           </a:p>
@@ -4568,36 +6340,144 @@
       </p:sp>
       <p:sp>
         <p:nvSpPr>
-          <p:cNvPr id="13" name="Shape 10"/>
-          <p:cNvSpPr/>
-          <p:nvPr/>
-        </p:nvSpPr>
-        <p:spPr>
-          <a:xfrm>
-            <a:off x="4005072" y="2606040"/>
-            <a:ext cx="146304" cy="146304"/>
+          <p:cNvPr id="21" name="Text 15"/>
+          <p:cNvSpPr/>
+          <p:nvPr/>
+        </p:nvSpPr>
+        <p:spPr>
+          <a:xfrm>
+            <a:off x="4389120" y="4983480"/>
+            <a:ext cx="3566160" cy="1463040"/>
+          </a:xfrm>
+          <a:prstGeom prst="rect">
+            <a:avLst/>
+          </a:prstGeom>
+          <a:noFill/>
+          <a:ln/>
+        </p:spPr>
+        <p:txBody>
+          <a:bodyPr wrap="square" rtlCol="0" anchor="ctr"/>
+          <a:lstStyle/>
+          <a:p>
+            <a:pPr indent="0" marL="0">
+              <a:lnSpc>
+                <a:spcPct val="125000"/>
+              </a:lnSpc>
+              <a:buNone/>
+            </a:pPr>
+            <a:r>
+              <a:rPr lang="en-US" sz="1400" b="1" dirty="0">
+                <a:solidFill>
+                  <a:srgbClr val="2E6F52"/>
+                </a:solidFill>
+                <a:latin typeface="Meiryo UI" pitchFamily="34" charset="0"/>
+                <a:ea typeface="Meiryo UI" pitchFamily="34" charset="-122"/>
+                <a:cs typeface="Meiryo UI" pitchFamily="34" charset="-120"/>
+              </a:rPr>
+              <a:t>身につく力　</a:t>
+            </a:r>
+            <a:pPr indent="0" marL="0">
+              <a:lnSpc>
+                <a:spcPct val="125000"/>
+              </a:lnSpc>
+              <a:buNone/>
+            </a:pPr>
+            <a:r>
+              <a:rPr lang="en-US" sz="1400" dirty="0">
+                <a:solidFill>
+                  <a:srgbClr val="000000"/>
+                </a:solidFill>
+                <a:latin typeface="Meiryo UI" pitchFamily="34" charset="0"/>
+                <a:ea typeface="Meiryo UI" pitchFamily="34" charset="-122"/>
+                <a:cs typeface="Meiryo UI" pitchFamily="34" charset="-120"/>
+              </a:rPr>
+              <a:t>運用会社の実務・評価軸を内側から理解する視点、パフォーマンス評価力。</a:t>
+            </a:r>
+            <a:endParaRPr lang="en-US" sz="1400" dirty="0"/>
+          </a:p>
+        </p:txBody>
+      </p:sp>
+      <p:sp>
+        <p:nvSpPr>
+          <p:cNvPr id="22" name="Shape 16"/>
+          <p:cNvSpPr/>
+          <p:nvPr/>
+        </p:nvSpPr>
+        <p:spPr>
+          <a:xfrm>
+            <a:off x="8229600" y="1417320"/>
+            <a:ext cx="3566160" cy="1417320"/>
           </a:xfrm>
           <a:prstGeom prst="roundRect">
             <a:avLst>
-              <a:gd name="adj" fmla="val 50000"/>
+              <a:gd name="adj" fmla="val 6452"/>
             </a:avLst>
           </a:prstGeom>
           <a:solidFill>
-            <a:srgbClr val="C9A227"/>
+            <a:srgbClr val="FFFFFF"/>
           </a:solidFill>
-          <a:ln/>
-        </p:spPr>
-      </p:sp>
-      <p:sp>
-        <p:nvSpPr>
-          <p:cNvPr id="14" name="Text 11"/>
-          <p:cNvSpPr/>
-          <p:nvPr/>
-        </p:nvSpPr>
-        <p:spPr>
-          <a:xfrm>
-            <a:off x="4297680" y="2532888"/>
-            <a:ext cx="7406640" cy="365760"/>
+          <a:ln w="15875">
+            <a:solidFill>
+              <a:srgbClr val="2E6F52"/>
+            </a:solidFill>
+            <a:prstDash val="solid"/>
+          </a:ln>
+        </p:spPr>
+      </p:sp>
+      <p:sp>
+        <p:nvSpPr>
+          <p:cNvPr id="23" name="Shape 17"/>
+          <p:cNvSpPr/>
+          <p:nvPr/>
+        </p:nvSpPr>
+        <p:spPr>
+          <a:xfrm>
+            <a:off x="8430768" y="1691640"/>
+            <a:ext cx="868680" cy="868680"/>
+          </a:xfrm>
+          <a:prstGeom prst="ellipse">
+            <a:avLst/>
+          </a:prstGeom>
+          <a:solidFill>
+            <a:srgbClr val="2E6F52"/>
+          </a:solidFill>
+          <a:ln/>
+        </p:spPr>
+      </p:sp>
+      <p:pic>
+        <p:nvPicPr>
+          <p:cNvPr id="24" name="Image 4" descr="icon_usertie.png">    </p:cNvPr>
+          <p:cNvPicPr>
+            <a:picLocks noChangeAspect="1"/>
+          </p:cNvPicPr>
+          <p:nvPr/>
+        </p:nvPicPr>
+        <p:blipFill>
+          <a:blip r:embed="rId5"/>
+          <a:stretch>
+            <a:fillRect/>
+          </a:stretch>
+        </p:blipFill>
+        <p:spPr>
+          <a:xfrm>
+            <a:off x="8613648" y="1874520"/>
+            <a:ext cx="502920" cy="502920"/>
+          </a:xfrm>
+          <a:prstGeom prst="rect">
+            <a:avLst/>
+          </a:prstGeom>
+        </p:spPr>
+      </p:pic>
+      <p:sp>
+        <p:nvSpPr>
+          <p:cNvPr id="25" name="Text 18"/>
+          <p:cNvSpPr/>
+          <p:nvPr/>
+        </p:nvSpPr>
+        <p:spPr>
+          <a:xfrm>
+            <a:off x="9464040" y="1645920"/>
+            <a:ext cx="2148840" cy="320040"/>
           </a:xfrm>
           <a:prstGeom prst="rect">
             <a:avLst/>
@@ -4613,30 +6493,30 @@
               <a:buNone/>
             </a:pPr>
             <a:r>
-              <a:rPr lang="en-US" sz="1600" b="1" dirty="0">
-                <a:solidFill>
-                  <a:srgbClr val="000000"/>
-                </a:solidFill>
-                <a:latin typeface="Meiryo UI" pitchFamily="34" charset="0"/>
-                <a:ea typeface="Meiryo UI" pitchFamily="34" charset="-122"/>
-                <a:cs typeface="Meiryo UI" pitchFamily="34" charset="-120"/>
-              </a:rPr>
-              <a:t>身につく力</a:t>
-            </a:r>
-            <a:endParaRPr lang="en-US" sz="1600" dirty="0"/>
-          </a:p>
-        </p:txBody>
-      </p:sp>
-      <p:sp>
-        <p:nvSpPr>
-          <p:cNvPr id="15" name="Text 12"/>
-          <p:cNvSpPr/>
-          <p:nvPr/>
-        </p:nvSpPr>
-        <p:spPr>
-          <a:xfrm>
-            <a:off x="4041648" y="2990088"/>
-            <a:ext cx="7680960" cy="1417320"/>
+              <a:rPr lang="en-US" sz="1400" b="1" dirty="0">
+                <a:solidFill>
+                  <a:srgbClr val="000000"/>
+                </a:solidFill>
+                <a:latin typeface="Meiryo UI" pitchFamily="34" charset="0"/>
+                <a:ea typeface="Meiryo UI" pitchFamily="34" charset="-122"/>
+                <a:cs typeface="Meiryo UI" pitchFamily="34" charset="-120"/>
+              </a:rPr>
+              <a:t>11年目〜</a:t>
+            </a:r>
+            <a:endParaRPr lang="en-US" sz="1400" dirty="0"/>
+          </a:p>
+        </p:txBody>
+      </p:sp>
+      <p:sp>
+        <p:nvSpPr>
+          <p:cNvPr id="26" name="Text 19"/>
+          <p:cNvSpPr/>
+          <p:nvPr/>
+        </p:nvSpPr>
+        <p:spPr>
+          <a:xfrm>
+            <a:off x="9464040" y="1965960"/>
+            <a:ext cx="2148840" cy="777240"/>
           </a:xfrm>
           <a:prstGeom prst="rect">
             <a:avLst/>
@@ -4650,11 +6530,96 @@
           <a:p>
             <a:pPr indent="0" marL="0">
               <a:lnSpc>
-                <a:spcPct val="135000"/>
+                <a:spcPct val="110000"/>
               </a:lnSpc>
               <a:buNone/>
             </a:pPr>
             <a:r>
+              <a:rPr lang="en-US" sz="1500" b="1" dirty="0">
+                <a:solidFill>
+                  <a:srgbClr val="000000"/>
+                </a:solidFill>
+                <a:latin typeface="Meiryo UI" pitchFamily="34" charset="0"/>
+                <a:ea typeface="Meiryo UI" pitchFamily="34" charset="-122"/>
+                <a:cs typeface="Meiryo UI" pitchFamily="34" charset="-120"/>
+              </a:rPr>
+              <a:t>信託銀行</a:t>
+            </a:r>
+            <a:endParaRPr lang="en-US" sz="1500" dirty="0"/>
+          </a:p>
+          <a:p>
+            <a:pPr indent="0" marL="0">
+              <a:lnSpc>
+                <a:spcPct val="110000"/>
+              </a:lnSpc>
+              <a:buNone/>
+            </a:pPr>
+            <a:r>
+              <a:rPr lang="en-US" sz="1500" b="1" dirty="0">
+                <a:solidFill>
+                  <a:srgbClr val="000000"/>
+                </a:solidFill>
+                <a:latin typeface="Meiryo UI" pitchFamily="34" charset="0"/>
+                <a:ea typeface="Meiryo UI" pitchFamily="34" charset="-122"/>
+                <a:cs typeface="Meiryo UI" pitchFamily="34" charset="-120"/>
+              </a:rPr>
+              <a:t>資産運用部門管理職</a:t>
+            </a:r>
+            <a:endParaRPr lang="en-US" sz="1500" dirty="0"/>
+          </a:p>
+        </p:txBody>
+      </p:sp>
+      <p:sp>
+        <p:nvSpPr>
+          <p:cNvPr id="27" name="Text 20"/>
+          <p:cNvSpPr/>
+          <p:nvPr/>
+        </p:nvSpPr>
+        <p:spPr>
+          <a:xfrm>
+            <a:off x="8229600" y="3017520"/>
+            <a:ext cx="3566160" cy="2103120"/>
+          </a:xfrm>
+          <a:prstGeom prst="rect">
+            <a:avLst/>
+          </a:prstGeom>
+          <a:noFill/>
+          <a:ln/>
+        </p:spPr>
+        <p:txBody>
+          <a:bodyPr wrap="square" rtlCol="0" anchor="ctr"/>
+          <a:lstStyle/>
+          <a:p>
+            <a:pPr indent="0" marL="0">
+              <a:lnSpc>
+                <a:spcPct val="125000"/>
+              </a:lnSpc>
+              <a:spcAft>
+                <a:spcPts val="600"/>
+              </a:spcAft>
+              <a:buNone/>
+            </a:pPr>
+            <a:r>
+              <a:rPr lang="en-US" sz="1400" b="1" dirty="0">
+                <a:solidFill>
+                  <a:srgbClr val="2E6F52"/>
+                </a:solidFill>
+                <a:latin typeface="Meiryo UI" pitchFamily="34" charset="0"/>
+                <a:ea typeface="Meiryo UI" pitchFamily="34" charset="-122"/>
+                <a:cs typeface="Meiryo UI" pitchFamily="34" charset="-120"/>
+              </a:rPr>
+              <a:t>業務内容　</a:t>
+            </a:r>
+            <a:pPr indent="0" marL="0">
+              <a:lnSpc>
+                <a:spcPct val="125000"/>
+              </a:lnSpc>
+              <a:spcAft>
+                <a:spcPts val="600"/>
+              </a:spcAft>
+              <a:buNone/>
+            </a:pPr>
+            <a:r>
               <a:rPr lang="en-US" sz="1400" dirty="0">
                 <a:solidFill>
                   <a:srgbClr val="000000"/>
@@ -4663,7 +6628,7 @@
                 <a:ea typeface="Meiryo UI" pitchFamily="34" charset="-122"/>
                 <a:cs typeface="Meiryo UI" pitchFamily="34" charset="-120"/>
               </a:rPr>
-              <a:t>会社法・金融商品取引法等の実務知識、法人顧客に対する高度な専門アドバイザリー力。</a:t>
+              <a:t>複数の外部運用会社を評価・選定・モニタリングするマネジメント業務、企業年金基金へのコンサルティングを担当する。</a:t>
             </a:r>
             <a:endParaRPr lang="en-US" sz="1400" dirty="0"/>
           </a:p>
@@ -4671,36 +6636,14 @@
       </p:sp>
       <p:sp>
         <p:nvSpPr>
-          <p:cNvPr id="16" name="Shape 13"/>
-          <p:cNvSpPr/>
-          <p:nvPr/>
-        </p:nvSpPr>
-        <p:spPr>
-          <a:xfrm>
-            <a:off x="4005072" y="4526280"/>
-            <a:ext cx="146304" cy="146304"/>
-          </a:xfrm>
-          <a:prstGeom prst="roundRect">
-            <a:avLst>
-              <a:gd name="adj" fmla="val 50000"/>
-            </a:avLst>
-          </a:prstGeom>
-          <a:solidFill>
-            <a:srgbClr val="C9A227"/>
-          </a:solidFill>
-          <a:ln/>
-        </p:spPr>
-      </p:sp>
-      <p:sp>
-        <p:nvSpPr>
-          <p:cNvPr id="17" name="Text 14"/>
-          <p:cNvSpPr/>
-          <p:nvPr/>
-        </p:nvSpPr>
-        <p:spPr>
-          <a:xfrm>
-            <a:off x="4297680" y="4453128"/>
-            <a:ext cx="7406640" cy="365760"/>
+          <p:cNvPr id="28" name="Text 21"/>
+          <p:cNvSpPr/>
+          <p:nvPr/>
+        </p:nvSpPr>
+        <p:spPr>
+          <a:xfrm>
+            <a:off x="8229600" y="4983480"/>
+            <a:ext cx="3566160" cy="1463040"/>
           </a:xfrm>
           <a:prstGeom prst="rect">
             <a:avLst/>
@@ -4713,51 +6656,29 @@
           <a:lstStyle/>
           <a:p>
             <a:pPr indent="0" marL="0">
-              <a:buNone/>
-            </a:pPr>
-            <a:r>
-              <a:rPr lang="en-US" sz="1600" b="1" dirty="0">
-                <a:solidFill>
-                  <a:srgbClr val="000000"/>
-                </a:solidFill>
-                <a:latin typeface="Meiryo UI" pitchFamily="34" charset="0"/>
-                <a:ea typeface="Meiryo UI" pitchFamily="34" charset="-122"/>
-                <a:cs typeface="Meiryo UI" pitchFamily="34" charset="-120"/>
-              </a:rPr>
-              <a:t>強みとの接続</a:t>
-            </a:r>
-            <a:endParaRPr lang="en-US" sz="1600" dirty="0"/>
-          </a:p>
-        </p:txBody>
-      </p:sp>
-      <p:sp>
-        <p:nvSpPr>
-          <p:cNvPr id="18" name="Text 15"/>
-          <p:cNvSpPr/>
-          <p:nvPr/>
-        </p:nvSpPr>
-        <p:spPr>
-          <a:xfrm>
-            <a:off x="4041648" y="4910328"/>
-            <a:ext cx="7680960" cy="1417320"/>
-          </a:xfrm>
-          <a:prstGeom prst="rect">
-            <a:avLst/>
-          </a:prstGeom>
-          <a:noFill/>
-          <a:ln/>
-        </p:spPr>
-        <p:txBody>
-          <a:bodyPr wrap="square" rtlCol="0" anchor="ctr"/>
-          <a:lstStyle/>
-          <a:p>
-            <a:pPr indent="0" marL="0">
               <a:lnSpc>
-                <a:spcPct val="135000"/>
+                <a:spcPct val="125000"/>
               </a:lnSpc>
               <a:buNone/>
             </a:pPr>
             <a:r>
+              <a:rPr lang="en-US" sz="1400" b="1" dirty="0">
+                <a:solidFill>
+                  <a:srgbClr val="2E6F52"/>
+                </a:solidFill>
+                <a:latin typeface="Meiryo UI" pitchFamily="34" charset="0"/>
+                <a:ea typeface="Meiryo UI" pitchFamily="34" charset="-122"/>
+                <a:cs typeface="Meiryo UI" pitchFamily="34" charset="-120"/>
+              </a:rPr>
+              <a:t>身につく力　</a:t>
+            </a:r>
+            <a:pPr indent="0" marL="0">
+              <a:lnSpc>
+                <a:spcPct val="125000"/>
+              </a:lnSpc>
+              <a:buNone/>
+            </a:pPr>
+            <a:r>
               <a:rPr lang="en-US" sz="1400" dirty="0">
                 <a:solidFill>
                   <a:srgbClr val="000000"/>
@@ -4766,7 +6687,7 @@
                 <a:ea typeface="Meiryo UI" pitchFamily="34" charset="-122"/>
                 <a:cs typeface="Meiryo UI" pitchFamily="34" charset="-120"/>
               </a:rPr>
-              <a:t>中央大学法学部・企業法ゼミで培った法律知識を、信託銀行にしかない業務を通じて実務の専門性に転換するフェーズ。</a:t>
+              <a:t>財務分析力と、AM会社経験に基づく目利き力を融合した、信託銀行ならではの運用マネジメント力。</a:t>
             </a:r>
             <a:endParaRPr lang="en-US" sz="1400" dirty="0"/>
           </a:p>
@@ -4812,39 +6733,151 @@
         </p:nvSpPr>
         <p:spPr>
           <a:xfrm>
-            <a:off x="457200" y="457200"/>
-            <a:ext cx="3200400" cy="5943600"/>
+            <a:off x="640080" y="411480"/>
+            <a:ext cx="502920" cy="457200"/>
           </a:xfrm>
           <a:prstGeom prst="roundRect">
             <a:avLst>
-              <a:gd name="adj" fmla="val 2857"/>
+              <a:gd name="adj" fmla="val 16000"/>
             </a:avLst>
           </a:prstGeom>
           <a:solidFill>
-            <a:srgbClr val="FFFFFF"/>
+            <a:srgbClr val="8A4B1E"/>
           </a:solidFill>
-          <a:ln w="19050">
-            <a:solidFill>
-              <a:srgbClr val="1E2761"/>
-            </a:solidFill>
-            <a:prstDash val="solid"/>
-          </a:ln>
-        </p:spPr>
-      </p:sp>
-      <p:sp>
-        <p:nvSpPr>
-          <p:cNvPr id="3" name="Shape 1"/>
-          <p:cNvSpPr/>
-          <p:nvPr/>
-        </p:nvSpPr>
-        <p:spPr>
-          <a:xfrm>
-            <a:off x="777240" y="777240"/>
-            <a:ext cx="1143000" cy="411480"/>
+          <a:ln/>
+        </p:spPr>
+      </p:sp>
+      <p:sp>
+        <p:nvSpPr>
+          <p:cNvPr id="3" name="Text 1"/>
+          <p:cNvSpPr/>
+          <p:nvPr/>
+        </p:nvSpPr>
+        <p:spPr>
+          <a:xfrm>
+            <a:off x="640080" y="411480"/>
+            <a:ext cx="502920" cy="457200"/>
+          </a:xfrm>
+          <a:prstGeom prst="rect">
+            <a:avLst/>
+          </a:prstGeom>
+          <a:noFill/>
+          <a:ln/>
+        </p:spPr>
+        <p:txBody>
+          <a:bodyPr wrap="square" rtlCol="0" anchor="ctr"/>
+          <a:lstStyle/>
+          <a:p>
+            <a:pPr algn="ctr" indent="0" marL="0">
+              <a:buNone/>
+            </a:pPr>
+            <a:r>
+              <a:rPr lang="en-US" sz="2000" b="1" dirty="0">
+                <a:solidFill>
+                  <a:srgbClr val="FFFFFF"/>
+                </a:solidFill>
+                <a:latin typeface="Meiryo UI" pitchFamily="34" charset="0"/>
+                <a:ea typeface="Meiryo UI" pitchFamily="34" charset="-122"/>
+                <a:cs typeface="Meiryo UI" pitchFamily="34" charset="-120"/>
+              </a:rPr>
+              <a:t>③</a:t>
+            </a:r>
+            <a:endParaRPr lang="en-US" sz="2000" dirty="0"/>
+          </a:p>
+        </p:txBody>
+      </p:sp>
+      <p:sp>
+        <p:nvSpPr>
+          <p:cNvPr id="4" name="Text 2"/>
+          <p:cNvSpPr/>
+          <p:nvPr/>
+        </p:nvSpPr>
+        <p:spPr>
+          <a:xfrm>
+            <a:off x="1280160" y="365760"/>
+            <a:ext cx="10241280" cy="502920"/>
+          </a:xfrm>
+          <a:prstGeom prst="rect">
+            <a:avLst/>
+          </a:prstGeom>
+          <a:noFill/>
+          <a:ln/>
+        </p:spPr>
+        <p:txBody>
+          <a:bodyPr wrap="square" rtlCol="0" anchor="ctr"/>
+          <a:lstStyle/>
+          <a:p>
+            <a:pPr indent="0" marL="0">
+              <a:buNone/>
+            </a:pPr>
+            <a:r>
+              <a:rPr lang="en-US" sz="2600" b="1" dirty="0">
+                <a:solidFill>
+                  <a:srgbClr val="000000"/>
+                </a:solidFill>
+                <a:latin typeface="Meiryo UI" pitchFamily="34" charset="0"/>
+                <a:ea typeface="Meiryo UI" pitchFamily="34" charset="-122"/>
+                <a:cs typeface="Meiryo UI" pitchFamily="34" charset="-120"/>
+              </a:rPr>
+              <a:t>銀行内で完結する運用キャリア（ゆうちょ銀行型）</a:t>
+            </a:r>
+            <a:endParaRPr lang="en-US" sz="2600" dirty="0"/>
+          </a:p>
+        </p:txBody>
+      </p:sp>
+      <p:sp>
+        <p:nvSpPr>
+          <p:cNvPr id="5" name="Text 3"/>
+          <p:cNvSpPr/>
+          <p:nvPr/>
+        </p:nvSpPr>
+        <p:spPr>
+          <a:xfrm>
+            <a:off x="1280160" y="868680"/>
+            <a:ext cx="10241280" cy="365760"/>
+          </a:xfrm>
+          <a:prstGeom prst="rect">
+            <a:avLst/>
+          </a:prstGeom>
+          <a:noFill/>
+          <a:ln/>
+        </p:spPr>
+        <p:txBody>
+          <a:bodyPr wrap="square" rtlCol="0" anchor="ctr"/>
+          <a:lstStyle/>
+          <a:p>
+            <a:pPr indent="0" marL="0">
+              <a:buNone/>
+            </a:pPr>
+            <a:r>
+              <a:rPr lang="en-US" sz="1400" i="1" dirty="0">
+                <a:solidFill>
+                  <a:srgbClr val="000000"/>
+                </a:solidFill>
+                <a:latin typeface="Meiryo UI" pitchFamily="34" charset="0"/>
+                <a:ea typeface="Meiryo UI" pitchFamily="34" charset="-122"/>
+                <a:cs typeface="Meiryo UI" pitchFamily="34" charset="-120"/>
+              </a:rPr>
+              <a:t>グループの別会社を介さず、銀行内で「頭脳」と「金庫」の両方を一貫して担う</a:t>
+            </a:r>
+            <a:endParaRPr lang="en-US" sz="1400" dirty="0"/>
+          </a:p>
+        </p:txBody>
+      </p:sp>
+      <p:sp>
+        <p:nvSpPr>
+          <p:cNvPr id="6" name="Shape 4"/>
+          <p:cNvSpPr/>
+          <p:nvPr/>
+        </p:nvSpPr>
+        <p:spPr>
+          <a:xfrm>
+            <a:off x="548640" y="1417320"/>
+            <a:ext cx="3566160" cy="1417320"/>
           </a:xfrm>
           <a:prstGeom prst="roundRect">
             <a:avLst>
-              <a:gd name="adj" fmla="val 17778"/>
+              <a:gd name="adj" fmla="val 6452"/>
             </a:avLst>
           </a:prstGeom>
           <a:solidFill>
@@ -4852,7 +6885,7 @@
           </a:solidFill>
           <a:ln w="15875">
             <a:solidFill>
-              <a:srgbClr val="1E2761"/>
+              <a:srgbClr val="8A4B1E"/>
             </a:solidFill>
             <a:prstDash val="solid"/>
           </a:ln>
@@ -4860,66 +6893,27 @@
       </p:sp>
       <p:sp>
         <p:nvSpPr>
-          <p:cNvPr id="4" name="Text 2"/>
-          <p:cNvSpPr/>
-          <p:nvPr/>
-        </p:nvSpPr>
-        <p:spPr>
-          <a:xfrm>
-            <a:off x="777240" y="777240"/>
-            <a:ext cx="1143000" cy="411480"/>
-          </a:xfrm>
-          <a:prstGeom prst="rect">
-            <a:avLst/>
-          </a:prstGeom>
-          <a:noFill/>
-          <a:ln/>
-        </p:spPr>
-        <p:txBody>
-          <a:bodyPr wrap="square" rtlCol="0" anchor="ctr"/>
-          <a:lstStyle/>
-          <a:p>
-            <a:pPr algn="ctr" indent="0" marL="0">
-              <a:buNone/>
-            </a:pPr>
-            <a:r>
-              <a:rPr lang="en-US" sz="1400" b="1" dirty="0">
-                <a:solidFill>
-                  <a:srgbClr val="000000"/>
-                </a:solidFill>
-                <a:latin typeface="Meiryo UI" pitchFamily="34" charset="0"/>
-                <a:ea typeface="Meiryo UI" pitchFamily="34" charset="-122"/>
-                <a:cs typeface="Meiryo UI" pitchFamily="34" charset="-120"/>
-              </a:rPr>
-              <a:t>PHASE 3</a:t>
-            </a:r>
-            <a:endParaRPr lang="en-US" sz="1400" dirty="0"/>
-          </a:p>
-        </p:txBody>
-      </p:sp>
-      <p:sp>
-        <p:nvSpPr>
-          <p:cNvPr id="5" name="Shape 3"/>
-          <p:cNvSpPr/>
-          <p:nvPr/>
-        </p:nvSpPr>
-        <p:spPr>
-          <a:xfrm>
-            <a:off x="777240" y="1508760"/>
-            <a:ext cx="1371600" cy="1371600"/>
+          <p:cNvPr id="7" name="Shape 5"/>
+          <p:cNvSpPr/>
+          <p:nvPr/>
+        </p:nvSpPr>
+        <p:spPr>
+          <a:xfrm>
+            <a:off x="749808" y="1691640"/>
+            <a:ext cx="868680" cy="868680"/>
           </a:xfrm>
           <a:prstGeom prst="ellipse">
             <a:avLst/>
           </a:prstGeom>
           <a:solidFill>
-            <a:srgbClr val="1E2761"/>
+            <a:srgbClr val="8A4B1E"/>
           </a:solidFill>
           <a:ln/>
         </p:spPr>
       </p:sp>
       <p:pic>
         <p:nvPicPr>
-          <p:cNvPr id="6" name="Image 0" descr="icon_handshake.png">    </p:cNvPr>
+          <p:cNvPr id="8" name="Image 0" descr="icon_landmark.png">    </p:cNvPr>
           <p:cNvPicPr>
             <a:picLocks noChangeAspect="1"/>
           </p:cNvPicPr>
@@ -4933,8 +6927,8 @@
         </p:blipFill>
         <p:spPr>
           <a:xfrm>
-            <a:off x="1069848" y="1801368"/>
-            <a:ext cx="786384" cy="786384"/>
+            <a:off x="932688" y="1874520"/>
+            <a:ext cx="502920" cy="502920"/>
           </a:xfrm>
           <a:prstGeom prst="rect">
             <a:avLst/>
@@ -4943,14 +6937,14 @@
       </p:pic>
       <p:sp>
         <p:nvSpPr>
-          <p:cNvPr id="7" name="Text 4"/>
-          <p:cNvSpPr/>
-          <p:nvPr/>
-        </p:nvSpPr>
-        <p:spPr>
-          <a:xfrm>
-            <a:off x="777240" y="3108960"/>
-            <a:ext cx="2743200" cy="365760"/>
+          <p:cNvPr id="9" name="Text 6"/>
+          <p:cNvSpPr/>
+          <p:nvPr/>
+        </p:nvSpPr>
+        <p:spPr>
+          <a:xfrm>
+            <a:off x="1783080" y="1645920"/>
+            <a:ext cx="2148840" cy="320040"/>
           </a:xfrm>
           <a:prstGeom prst="rect">
             <a:avLst/>
@@ -4974,7 +6968,7 @@
                 <a:ea typeface="Meiryo UI" pitchFamily="34" charset="-122"/>
                 <a:cs typeface="Meiryo UI" pitchFamily="34" charset="-120"/>
               </a:rPr>
-              <a:t>11〜15年目</a:t>
+              <a:t>入行〜5年目</a:t>
             </a:r>
             <a:endParaRPr lang="en-US" sz="1400" dirty="0"/>
           </a:p>
@@ -4982,14 +6976,14 @@
       </p:sp>
       <p:sp>
         <p:nvSpPr>
-          <p:cNvPr id="8" name="Text 5"/>
-          <p:cNvSpPr/>
-          <p:nvPr/>
-        </p:nvSpPr>
-        <p:spPr>
-          <a:xfrm>
-            <a:off x="777240" y="3520440"/>
-            <a:ext cx="2788920" cy="1280160"/>
+          <p:cNvPr id="10" name="Text 7"/>
+          <p:cNvSpPr/>
+          <p:nvPr/>
+        </p:nvSpPr>
+        <p:spPr>
+          <a:xfrm>
+            <a:off x="1783080" y="1965960"/>
+            <a:ext cx="2148840" cy="777240"/>
           </a:xfrm>
           <a:prstGeom prst="rect">
             <a:avLst/>
@@ -5003,55 +6997,79 @@
           <a:p>
             <a:pPr indent="0" marL="0">
               <a:lnSpc>
-                <a:spcPct val="115000"/>
+                <a:spcPct val="110000"/>
               </a:lnSpc>
               <a:buNone/>
             </a:pPr>
             <a:r>
-              <a:rPr lang="en-US" sz="2200" b="1" dirty="0">
-                <a:solidFill>
-                  <a:srgbClr val="000000"/>
-                </a:solidFill>
-                <a:latin typeface="Meiryo UI" pitchFamily="34" charset="0"/>
-                <a:ea typeface="Meiryo UI" pitchFamily="34" charset="-122"/>
-                <a:cs typeface="Meiryo UI" pitchFamily="34" charset="-120"/>
-              </a:rPr>
-              <a:t>事業承継・</a:t>
-            </a:r>
-            <a:endParaRPr lang="en-US" sz="2200" dirty="0"/>
+              <a:rPr lang="en-US" sz="1500" b="1" dirty="0">
+                <a:solidFill>
+                  <a:srgbClr val="000000"/>
+                </a:solidFill>
+                <a:latin typeface="Meiryo UI" pitchFamily="34" charset="0"/>
+                <a:ea typeface="Meiryo UI" pitchFamily="34" charset="-122"/>
+                <a:cs typeface="Meiryo UI" pitchFamily="34" charset="-120"/>
+              </a:rPr>
+              <a:t>銀行内</a:t>
+            </a:r>
+            <a:endParaRPr lang="en-US" sz="1500" dirty="0"/>
           </a:p>
           <a:p>
             <a:pPr indent="0" marL="0">
               <a:lnSpc>
-                <a:spcPct val="115000"/>
+                <a:spcPct val="110000"/>
               </a:lnSpc>
               <a:buNone/>
             </a:pPr>
             <a:r>
-              <a:rPr lang="en-US" sz="2200" b="1" dirty="0">
-                <a:solidFill>
-                  <a:srgbClr val="000000"/>
-                </a:solidFill>
-                <a:latin typeface="Meiryo UI" pitchFamily="34" charset="0"/>
-                <a:ea typeface="Meiryo UI" pitchFamily="34" charset="-122"/>
-                <a:cs typeface="Meiryo UI" pitchFamily="34" charset="-120"/>
-              </a:rPr>
-              <a:t>M&amp;Aアドバイザリー</a:t>
-            </a:r>
-            <a:endParaRPr lang="en-US" sz="2200" dirty="0"/>
-          </a:p>
-        </p:txBody>
-      </p:sp>
-      <p:sp>
-        <p:nvSpPr>
-          <p:cNvPr id="9" name="Text 6"/>
-          <p:cNvSpPr/>
-          <p:nvPr/>
-        </p:nvSpPr>
-        <p:spPr>
-          <a:xfrm>
-            <a:off x="777240" y="4937760"/>
-            <a:ext cx="2788920" cy="1371600"/>
+              <a:rPr lang="en-US" sz="1500" b="1" dirty="0">
+                <a:solidFill>
+                  <a:srgbClr val="000000"/>
+                </a:solidFill>
+                <a:latin typeface="Meiryo UI" pitchFamily="34" charset="0"/>
+                <a:ea typeface="Meiryo UI" pitchFamily="34" charset="-122"/>
+                <a:cs typeface="Meiryo UI" pitchFamily="34" charset="-120"/>
+              </a:rPr>
+              <a:t>市場運用部門</a:t>
+            </a:r>
+            <a:endParaRPr lang="en-US" sz="1500" dirty="0"/>
+          </a:p>
+        </p:txBody>
+      </p:sp>
+      <p:pic>
+        <p:nvPicPr>
+          <p:cNvPr id="11" name="Image 1" descr="icon_arrow_dark.png">    </p:cNvPr>
+          <p:cNvPicPr>
+            <a:picLocks noChangeAspect="1"/>
+          </p:cNvPicPr>
+          <p:nvPr/>
+        </p:nvPicPr>
+        <p:blipFill>
+          <a:blip r:embed="rId2"/>
+          <a:stretch>
+            <a:fillRect/>
+          </a:stretch>
+        </p:blipFill>
+        <p:spPr>
+          <a:xfrm>
+            <a:off x="4133088" y="1979676"/>
+            <a:ext cx="219456" cy="292608"/>
+          </a:xfrm>
+          <a:prstGeom prst="rect">
+            <a:avLst/>
+          </a:prstGeom>
+        </p:spPr>
+      </p:pic>
+      <p:sp>
+        <p:nvSpPr>
+          <p:cNvPr id="12" name="Text 8"/>
+          <p:cNvSpPr/>
+          <p:nvPr/>
+        </p:nvSpPr>
+        <p:spPr>
+          <a:xfrm>
+            <a:off x="548640" y="3017520"/>
+            <a:ext cx="3566160" cy="2103120"/>
           </a:xfrm>
           <a:prstGeom prst="rect">
             <a:avLst/>
@@ -5067,18 +7085,41 @@
               <a:lnSpc>
                 <a:spcPct val="125000"/>
               </a:lnSpc>
-              <a:buNone/>
-            </a:pPr>
-            <a:r>
-              <a:rPr lang="en-US" sz="1400" i="1" dirty="0">
-                <a:solidFill>
-                  <a:srgbClr val="000000"/>
-                </a:solidFill>
-                <a:latin typeface="Meiryo UI" pitchFamily="34" charset="0"/>
-                <a:ea typeface="Meiryo UI" pitchFamily="34" charset="-122"/>
-                <a:cs typeface="Meiryo UI" pitchFamily="34" charset="-120"/>
-              </a:rPr>
-              <a:t>財務分析力と企業法知識、2つの強みが初めて統合される差別化ポイント</a:t>
+              <a:spcAft>
+                <a:spcPts val="600"/>
+              </a:spcAft>
+              <a:buNone/>
+            </a:pPr>
+            <a:r>
+              <a:rPr lang="en-US" sz="1400" b="1" dirty="0">
+                <a:solidFill>
+                  <a:srgbClr val="8A4B1E"/>
+                </a:solidFill>
+                <a:latin typeface="Meiryo UI" pitchFamily="34" charset="0"/>
+                <a:ea typeface="Meiryo UI" pitchFamily="34" charset="-122"/>
+                <a:cs typeface="Meiryo UI" pitchFamily="34" charset="-120"/>
+              </a:rPr>
+              <a:t>業務内容　</a:t>
+            </a:r>
+            <a:pPr indent="0" marL="0">
+              <a:lnSpc>
+                <a:spcPct val="125000"/>
+              </a:lnSpc>
+              <a:spcAft>
+                <a:spcPts val="600"/>
+              </a:spcAft>
+              <a:buNone/>
+            </a:pPr>
+            <a:r>
+              <a:rPr lang="en-US" sz="1400" dirty="0">
+                <a:solidFill>
+                  <a:srgbClr val="000000"/>
+                </a:solidFill>
+                <a:latin typeface="Meiryo UI" pitchFamily="34" charset="0"/>
+                <a:ea typeface="Meiryo UI" pitchFamily="34" charset="-122"/>
+                <a:cs typeface="Meiryo UI" pitchFamily="34" charset="-120"/>
+              </a:rPr>
+              <a:t>銀行自身の資金（自己勘定・有価証券運用）を対象に、債券・株式等の市場調査やディーリング実務の基礎を習得する。</a:t>
             </a:r>
             <a:endParaRPr lang="en-US" sz="1400" dirty="0"/>
           </a:p>
@@ -5086,36 +7127,144 @@
       </p:sp>
       <p:sp>
         <p:nvSpPr>
-          <p:cNvPr id="10" name="Shape 7"/>
-          <p:cNvSpPr/>
-          <p:nvPr/>
-        </p:nvSpPr>
-        <p:spPr>
-          <a:xfrm>
-            <a:off x="4005072" y="685800"/>
-            <a:ext cx="146304" cy="146304"/>
+          <p:cNvPr id="13" name="Text 9"/>
+          <p:cNvSpPr/>
+          <p:nvPr/>
+        </p:nvSpPr>
+        <p:spPr>
+          <a:xfrm>
+            <a:off x="548640" y="4983480"/>
+            <a:ext cx="3566160" cy="1463040"/>
+          </a:xfrm>
+          <a:prstGeom prst="rect">
+            <a:avLst/>
+          </a:prstGeom>
+          <a:noFill/>
+          <a:ln/>
+        </p:spPr>
+        <p:txBody>
+          <a:bodyPr wrap="square" rtlCol="0" anchor="ctr"/>
+          <a:lstStyle/>
+          <a:p>
+            <a:pPr indent="0" marL="0">
+              <a:lnSpc>
+                <a:spcPct val="125000"/>
+              </a:lnSpc>
+              <a:buNone/>
+            </a:pPr>
+            <a:r>
+              <a:rPr lang="en-US" sz="1400" b="1" dirty="0">
+                <a:solidFill>
+                  <a:srgbClr val="8A4B1E"/>
+                </a:solidFill>
+                <a:latin typeface="Meiryo UI" pitchFamily="34" charset="0"/>
+                <a:ea typeface="Meiryo UI" pitchFamily="34" charset="-122"/>
+                <a:cs typeface="Meiryo UI" pitchFamily="34" charset="-120"/>
+              </a:rPr>
+              <a:t>身につく力　</a:t>
+            </a:r>
+            <a:pPr indent="0" marL="0">
+              <a:lnSpc>
+                <a:spcPct val="125000"/>
+              </a:lnSpc>
+              <a:buNone/>
+            </a:pPr>
+            <a:r>
+              <a:rPr lang="en-US" sz="1400" dirty="0">
+                <a:solidFill>
+                  <a:srgbClr val="000000"/>
+                </a:solidFill>
+                <a:latin typeface="Meiryo UI" pitchFamily="34" charset="0"/>
+                <a:ea typeface="Meiryo UI" pitchFamily="34" charset="-122"/>
+                <a:cs typeface="Meiryo UI" pitchFamily="34" charset="-120"/>
+              </a:rPr>
+              <a:t>マーケットを継続的に追う力、リスク量を意識した投資判断の基礎。</a:t>
+            </a:r>
+            <a:endParaRPr lang="en-US" sz="1400" dirty="0"/>
+          </a:p>
+        </p:txBody>
+      </p:sp>
+      <p:sp>
+        <p:nvSpPr>
+          <p:cNvPr id="14" name="Shape 10"/>
+          <p:cNvSpPr/>
+          <p:nvPr/>
+        </p:nvSpPr>
+        <p:spPr>
+          <a:xfrm>
+            <a:off x="4389120" y="1417320"/>
+            <a:ext cx="3566160" cy="1417320"/>
           </a:xfrm>
           <a:prstGeom prst="roundRect">
             <a:avLst>
-              <a:gd name="adj" fmla="val 50000"/>
+              <a:gd name="adj" fmla="val 6452"/>
             </a:avLst>
           </a:prstGeom>
           <a:solidFill>
-            <a:srgbClr val="C9A227"/>
+            <a:srgbClr val="FFFFFF"/>
           </a:solidFill>
-          <a:ln/>
-        </p:spPr>
-      </p:sp>
-      <p:sp>
-        <p:nvSpPr>
-          <p:cNvPr id="11" name="Text 8"/>
-          <p:cNvSpPr/>
-          <p:nvPr/>
-        </p:nvSpPr>
-        <p:spPr>
-          <a:xfrm>
-            <a:off x="4297680" y="612648"/>
-            <a:ext cx="7406640" cy="365760"/>
+          <a:ln w="15875">
+            <a:solidFill>
+              <a:srgbClr val="8A4B1E"/>
+            </a:solidFill>
+            <a:prstDash val="solid"/>
+          </a:ln>
+        </p:spPr>
+      </p:sp>
+      <p:sp>
+        <p:nvSpPr>
+          <p:cNvPr id="15" name="Shape 11"/>
+          <p:cNvSpPr/>
+          <p:nvPr/>
+        </p:nvSpPr>
+        <p:spPr>
+          <a:xfrm>
+            <a:off x="4590288" y="1691640"/>
+            <a:ext cx="868680" cy="868680"/>
+          </a:xfrm>
+          <a:prstGeom prst="ellipse">
+            <a:avLst/>
+          </a:prstGeom>
+          <a:solidFill>
+            <a:srgbClr val="8A4B1E"/>
+          </a:solidFill>
+          <a:ln/>
+        </p:spPr>
+      </p:sp>
+      <p:pic>
+        <p:nvPicPr>
+          <p:cNvPr id="16" name="Image 2" descr="icon_chartpie.png">    </p:cNvPr>
+          <p:cNvPicPr>
+            <a:picLocks noChangeAspect="1"/>
+          </p:cNvPicPr>
+          <p:nvPr/>
+        </p:nvPicPr>
+        <p:blipFill>
+          <a:blip r:embed="rId3"/>
+          <a:stretch>
+            <a:fillRect/>
+          </a:stretch>
+        </p:blipFill>
+        <p:spPr>
+          <a:xfrm>
+            <a:off x="4773168" y="1874520"/>
+            <a:ext cx="502920" cy="502920"/>
+          </a:xfrm>
+          <a:prstGeom prst="rect">
+            <a:avLst/>
+          </a:prstGeom>
+        </p:spPr>
+      </p:pic>
+      <p:sp>
+        <p:nvSpPr>
+          <p:cNvPr id="17" name="Text 12"/>
+          <p:cNvSpPr/>
+          <p:nvPr/>
+        </p:nvSpPr>
+        <p:spPr>
+          <a:xfrm>
+            <a:off x="5623560" y="1645920"/>
+            <a:ext cx="2148840" cy="320040"/>
           </a:xfrm>
           <a:prstGeom prst="rect">
             <a:avLst/>
@@ -5131,30 +7280,30 @@
               <a:buNone/>
             </a:pPr>
             <a:r>
-              <a:rPr lang="en-US" sz="1600" b="1" dirty="0">
-                <a:solidFill>
-                  <a:srgbClr val="000000"/>
-                </a:solidFill>
-                <a:latin typeface="Meiryo UI" pitchFamily="34" charset="0"/>
-                <a:ea typeface="Meiryo UI" pitchFamily="34" charset="-122"/>
-                <a:cs typeface="Meiryo UI" pitchFamily="34" charset="-120"/>
-              </a:rPr>
-              <a:t>業務内容</a:t>
-            </a:r>
-            <a:endParaRPr lang="en-US" sz="1600" dirty="0"/>
-          </a:p>
-        </p:txBody>
-      </p:sp>
-      <p:sp>
-        <p:nvSpPr>
-          <p:cNvPr id="12" name="Text 9"/>
-          <p:cNvSpPr/>
-          <p:nvPr/>
-        </p:nvSpPr>
-        <p:spPr>
-          <a:xfrm>
-            <a:off x="4041648" y="1069848"/>
-            <a:ext cx="7680960" cy="1417320"/>
+              <a:rPr lang="en-US" sz="1400" b="1" dirty="0">
+                <a:solidFill>
+                  <a:srgbClr val="000000"/>
+                </a:solidFill>
+                <a:latin typeface="Meiryo UI" pitchFamily="34" charset="0"/>
+                <a:ea typeface="Meiryo UI" pitchFamily="34" charset="-122"/>
+                <a:cs typeface="Meiryo UI" pitchFamily="34" charset="-120"/>
+              </a:rPr>
+              <a:t>6〜12年目</a:t>
+            </a:r>
+            <a:endParaRPr lang="en-US" sz="1400" dirty="0"/>
+          </a:p>
+        </p:txBody>
+      </p:sp>
+      <p:sp>
+        <p:nvSpPr>
+          <p:cNvPr id="18" name="Text 13"/>
+          <p:cNvSpPr/>
+          <p:nvPr/>
+        </p:nvSpPr>
+        <p:spPr>
+          <a:xfrm>
+            <a:off x="5623560" y="1965960"/>
+            <a:ext cx="2148840" cy="777240"/>
           </a:xfrm>
           <a:prstGeom prst="rect">
             <a:avLst/>
@@ -5168,11 +7317,120 @@
           <a:p>
             <a:pPr indent="0" marL="0">
               <a:lnSpc>
-                <a:spcPct val="135000"/>
+                <a:spcPct val="110000"/>
               </a:lnSpc>
               <a:buNone/>
             </a:pPr>
             <a:r>
+              <a:rPr lang="en-US" sz="1500" b="1" dirty="0">
+                <a:solidFill>
+                  <a:srgbClr val="000000"/>
+                </a:solidFill>
+                <a:latin typeface="Meiryo UI" pitchFamily="34" charset="0"/>
+                <a:ea typeface="Meiryo UI" pitchFamily="34" charset="-122"/>
+                <a:cs typeface="Meiryo UI" pitchFamily="34" charset="-120"/>
+              </a:rPr>
+              <a:t>銀行内</a:t>
+            </a:r>
+            <a:endParaRPr lang="en-US" sz="1500" dirty="0"/>
+          </a:p>
+          <a:p>
+            <a:pPr indent="0" marL="0">
+              <a:lnSpc>
+                <a:spcPct val="110000"/>
+              </a:lnSpc>
+              <a:buNone/>
+            </a:pPr>
+            <a:r>
+              <a:rPr lang="en-US" sz="1500" b="1" dirty="0">
+                <a:solidFill>
+                  <a:srgbClr val="000000"/>
+                </a:solidFill>
+                <a:latin typeface="Meiryo UI" pitchFamily="34" charset="0"/>
+                <a:ea typeface="Meiryo UI" pitchFamily="34" charset="-122"/>
+                <a:cs typeface="Meiryo UI" pitchFamily="34" charset="-120"/>
+              </a:rPr>
+              <a:t>資産運用の専門職</a:t>
+            </a:r>
+            <a:endParaRPr lang="en-US" sz="1500" dirty="0"/>
+          </a:p>
+        </p:txBody>
+      </p:sp>
+      <p:pic>
+        <p:nvPicPr>
+          <p:cNvPr id="19" name="Image 3" descr="icon_arrow_dark.png">    </p:cNvPr>
+          <p:cNvPicPr>
+            <a:picLocks noChangeAspect="1"/>
+          </p:cNvPicPr>
+          <p:nvPr/>
+        </p:nvPicPr>
+        <p:blipFill>
+          <a:blip r:embed="rId4"/>
+          <a:stretch>
+            <a:fillRect/>
+          </a:stretch>
+        </p:blipFill>
+        <p:spPr>
+          <a:xfrm>
+            <a:off x="7973568" y="1979676"/>
+            <a:ext cx="219456" cy="292608"/>
+          </a:xfrm>
+          <a:prstGeom prst="rect">
+            <a:avLst/>
+          </a:prstGeom>
+        </p:spPr>
+      </p:pic>
+      <p:sp>
+        <p:nvSpPr>
+          <p:cNvPr id="20" name="Text 14"/>
+          <p:cNvSpPr/>
+          <p:nvPr/>
+        </p:nvSpPr>
+        <p:spPr>
+          <a:xfrm>
+            <a:off x="4389120" y="3017520"/>
+            <a:ext cx="3566160" cy="2103120"/>
+          </a:xfrm>
+          <a:prstGeom prst="rect">
+            <a:avLst/>
+          </a:prstGeom>
+          <a:noFill/>
+          <a:ln/>
+        </p:spPr>
+        <p:txBody>
+          <a:bodyPr wrap="square" rtlCol="0" anchor="ctr"/>
+          <a:lstStyle/>
+          <a:p>
+            <a:pPr indent="0" marL="0">
+              <a:lnSpc>
+                <a:spcPct val="125000"/>
+              </a:lnSpc>
+              <a:spcAft>
+                <a:spcPts val="600"/>
+              </a:spcAft>
+              <a:buNone/>
+            </a:pPr>
+            <a:r>
+              <a:rPr lang="en-US" sz="1400" b="1" dirty="0">
+                <a:solidFill>
+                  <a:srgbClr val="8A4B1E"/>
+                </a:solidFill>
+                <a:latin typeface="Meiryo UI" pitchFamily="34" charset="0"/>
+                <a:ea typeface="Meiryo UI" pitchFamily="34" charset="-122"/>
+                <a:cs typeface="Meiryo UI" pitchFamily="34" charset="-120"/>
+              </a:rPr>
+              <a:t>業務内容　</a:t>
+            </a:r>
+            <a:pPr indent="0" marL="0">
+              <a:lnSpc>
+                <a:spcPct val="125000"/>
+              </a:lnSpc>
+              <a:spcAft>
+                <a:spcPts val="600"/>
+              </a:spcAft>
+              <a:buNone/>
+            </a:pPr>
+            <a:r>
               <a:rPr lang="en-US" sz="1400" dirty="0">
                 <a:solidFill>
                   <a:srgbClr val="000000"/>
@@ -5181,7 +7439,7 @@
                 <a:ea typeface="Meiryo UI" pitchFamily="34" charset="-122"/>
                 <a:cs typeface="Meiryo UI" pitchFamily="34" charset="-120"/>
               </a:rPr>
-              <a:t>中小企業オーナーの事業承継設計、M&amp;Aマッチング・助言、遺言信託を組み合わせた資産承継提案など、信託銀行ならではの複合的なソリューションを提供。</a:t>
+              <a:t>債券・株式・オルタナティブ等の運用担当として、ALM（資産負債管理）やリスク管理部門と連携しながら、銀行内で運用の頭脳役を担う。</a:t>
             </a:r>
             <a:endParaRPr lang="en-US" sz="1400" dirty="0"/>
           </a:p>
@@ -5189,36 +7447,144 @@
       </p:sp>
       <p:sp>
         <p:nvSpPr>
-          <p:cNvPr id="13" name="Shape 10"/>
-          <p:cNvSpPr/>
-          <p:nvPr/>
-        </p:nvSpPr>
-        <p:spPr>
-          <a:xfrm>
-            <a:off x="4005072" y="2606040"/>
-            <a:ext cx="146304" cy="146304"/>
+          <p:cNvPr id="21" name="Text 15"/>
+          <p:cNvSpPr/>
+          <p:nvPr/>
+        </p:nvSpPr>
+        <p:spPr>
+          <a:xfrm>
+            <a:off x="4389120" y="4983480"/>
+            <a:ext cx="3566160" cy="1463040"/>
+          </a:xfrm>
+          <a:prstGeom prst="rect">
+            <a:avLst/>
+          </a:prstGeom>
+          <a:noFill/>
+          <a:ln/>
+        </p:spPr>
+        <p:txBody>
+          <a:bodyPr wrap="square" rtlCol="0" anchor="ctr"/>
+          <a:lstStyle/>
+          <a:p>
+            <a:pPr indent="0" marL="0">
+              <a:lnSpc>
+                <a:spcPct val="125000"/>
+              </a:lnSpc>
+              <a:buNone/>
+            </a:pPr>
+            <a:r>
+              <a:rPr lang="en-US" sz="1400" b="1" dirty="0">
+                <a:solidFill>
+                  <a:srgbClr val="8A4B1E"/>
+                </a:solidFill>
+                <a:latin typeface="Meiryo UI" pitchFamily="34" charset="0"/>
+                <a:ea typeface="Meiryo UI" pitchFamily="34" charset="-122"/>
+                <a:cs typeface="Meiryo UI" pitchFamily="34" charset="-120"/>
+              </a:rPr>
+              <a:t>身につく力　</a:t>
+            </a:r>
+            <a:pPr indent="0" marL="0">
+              <a:lnSpc>
+                <a:spcPct val="125000"/>
+              </a:lnSpc>
+              <a:buNone/>
+            </a:pPr>
+            <a:r>
+              <a:rPr lang="en-US" sz="1400" dirty="0">
+                <a:solidFill>
+                  <a:srgbClr val="000000"/>
+                </a:solidFill>
+                <a:latin typeface="Meiryo UI" pitchFamily="34" charset="0"/>
+                <a:ea typeface="Meiryo UI" pitchFamily="34" charset="-122"/>
+                <a:cs typeface="Meiryo UI" pitchFamily="34" charset="-120"/>
+              </a:rPr>
+              <a:t>財務分析力を活かした投資判断力、PDCAによる運用改善力（検証→仮説修正の繰り返し）。</a:t>
+            </a:r>
+            <a:endParaRPr lang="en-US" sz="1400" dirty="0"/>
+          </a:p>
+        </p:txBody>
+      </p:sp>
+      <p:sp>
+        <p:nvSpPr>
+          <p:cNvPr id="22" name="Shape 16"/>
+          <p:cNvSpPr/>
+          <p:nvPr/>
+        </p:nvSpPr>
+        <p:spPr>
+          <a:xfrm>
+            <a:off x="8229600" y="1417320"/>
+            <a:ext cx="3566160" cy="1417320"/>
           </a:xfrm>
           <a:prstGeom prst="roundRect">
             <a:avLst>
-              <a:gd name="adj" fmla="val 50000"/>
+              <a:gd name="adj" fmla="val 6452"/>
             </a:avLst>
           </a:prstGeom>
           <a:solidFill>
-            <a:srgbClr val="C9A227"/>
+            <a:srgbClr val="FFFFFF"/>
           </a:solidFill>
-          <a:ln/>
-        </p:spPr>
-      </p:sp>
-      <p:sp>
-        <p:nvSpPr>
-          <p:cNvPr id="14" name="Text 11"/>
-          <p:cNvSpPr/>
-          <p:nvPr/>
-        </p:nvSpPr>
-        <p:spPr>
-          <a:xfrm>
-            <a:off x="4297680" y="2532888"/>
-            <a:ext cx="7406640" cy="365760"/>
+          <a:ln w="15875">
+            <a:solidFill>
+              <a:srgbClr val="8A4B1E"/>
+            </a:solidFill>
+            <a:prstDash val="solid"/>
+          </a:ln>
+        </p:spPr>
+      </p:sp>
+      <p:sp>
+        <p:nvSpPr>
+          <p:cNvPr id="23" name="Shape 17"/>
+          <p:cNvSpPr/>
+          <p:nvPr/>
+        </p:nvSpPr>
+        <p:spPr>
+          <a:xfrm>
+            <a:off x="8430768" y="1691640"/>
+            <a:ext cx="868680" cy="868680"/>
+          </a:xfrm>
+          <a:prstGeom prst="ellipse">
+            <a:avLst/>
+          </a:prstGeom>
+          <a:solidFill>
+            <a:srgbClr val="8A4B1E"/>
+          </a:solidFill>
+          <a:ln/>
+        </p:spPr>
+      </p:sp>
+      <p:pic>
+        <p:nvPicPr>
+          <p:cNvPr id="24" name="Image 4" descr="icon_crown.png">    </p:cNvPr>
+          <p:cNvPicPr>
+            <a:picLocks noChangeAspect="1"/>
+          </p:cNvPicPr>
+          <p:nvPr/>
+        </p:nvPicPr>
+        <p:blipFill>
+          <a:blip r:embed="rId5"/>
+          <a:stretch>
+            <a:fillRect/>
+          </a:stretch>
+        </p:blipFill>
+        <p:spPr>
+          <a:xfrm>
+            <a:off x="8613648" y="1874520"/>
+            <a:ext cx="502920" cy="502920"/>
+          </a:xfrm>
+          <a:prstGeom prst="rect">
+            <a:avLst/>
+          </a:prstGeom>
+        </p:spPr>
+      </p:pic>
+      <p:sp>
+        <p:nvSpPr>
+          <p:cNvPr id="25" name="Text 18"/>
+          <p:cNvSpPr/>
+          <p:nvPr/>
+        </p:nvSpPr>
+        <p:spPr>
+          <a:xfrm>
+            <a:off x="9464040" y="1645920"/>
+            <a:ext cx="2148840" cy="320040"/>
           </a:xfrm>
           <a:prstGeom prst="rect">
             <a:avLst/>
@@ -5234,30 +7600,30 @@
               <a:buNone/>
             </a:pPr>
             <a:r>
-              <a:rPr lang="en-US" sz="1600" b="1" dirty="0">
-                <a:solidFill>
-                  <a:srgbClr val="000000"/>
-                </a:solidFill>
-                <a:latin typeface="Meiryo UI" pitchFamily="34" charset="0"/>
-                <a:ea typeface="Meiryo UI" pitchFamily="34" charset="-122"/>
-                <a:cs typeface="Meiryo UI" pitchFamily="34" charset="-120"/>
-              </a:rPr>
-              <a:t>身につく力</a:t>
-            </a:r>
-            <a:endParaRPr lang="en-US" sz="1600" dirty="0"/>
-          </a:p>
-        </p:txBody>
-      </p:sp>
-      <p:sp>
-        <p:nvSpPr>
-          <p:cNvPr id="15" name="Text 12"/>
-          <p:cNvSpPr/>
-          <p:nvPr/>
-        </p:nvSpPr>
-        <p:spPr>
-          <a:xfrm>
-            <a:off x="4041648" y="2990088"/>
-            <a:ext cx="7680960" cy="1417320"/>
+              <a:rPr lang="en-US" sz="1400" b="1" dirty="0">
+                <a:solidFill>
+                  <a:srgbClr val="000000"/>
+                </a:solidFill>
+                <a:latin typeface="Meiryo UI" pitchFamily="34" charset="0"/>
+                <a:ea typeface="Meiryo UI" pitchFamily="34" charset="-122"/>
+                <a:cs typeface="Meiryo UI" pitchFamily="34" charset="-120"/>
+              </a:rPr>
+              <a:t>13年目〜</a:t>
+            </a:r>
+            <a:endParaRPr lang="en-US" sz="1400" dirty="0"/>
+          </a:p>
+        </p:txBody>
+      </p:sp>
+      <p:sp>
+        <p:nvSpPr>
+          <p:cNvPr id="26" name="Text 19"/>
+          <p:cNvSpPr/>
+          <p:nvPr/>
+        </p:nvSpPr>
+        <p:spPr>
+          <a:xfrm>
+            <a:off x="9464040" y="1965960"/>
+            <a:ext cx="2148840" cy="777240"/>
           </a:xfrm>
           <a:prstGeom prst="rect">
             <a:avLst/>
@@ -5271,11 +7637,96 @@
           <a:p>
             <a:pPr indent="0" marL="0">
               <a:lnSpc>
-                <a:spcPct val="135000"/>
+                <a:spcPct val="110000"/>
               </a:lnSpc>
               <a:buNone/>
             </a:pPr>
             <a:r>
+              <a:rPr lang="en-US" sz="1500" b="1" dirty="0">
+                <a:solidFill>
+                  <a:srgbClr val="000000"/>
+                </a:solidFill>
+                <a:latin typeface="Meiryo UI" pitchFamily="34" charset="0"/>
+                <a:ea typeface="Meiryo UI" pitchFamily="34" charset="-122"/>
+                <a:cs typeface="Meiryo UI" pitchFamily="34" charset="-120"/>
+              </a:rPr>
+              <a:t>銀行内</a:t>
+            </a:r>
+            <a:endParaRPr lang="en-US" sz="1500" dirty="0"/>
+          </a:p>
+          <a:p>
+            <a:pPr indent="0" marL="0">
+              <a:lnSpc>
+                <a:spcPct val="110000"/>
+              </a:lnSpc>
+              <a:buNone/>
+            </a:pPr>
+            <a:r>
+              <a:rPr lang="en-US" sz="1500" b="1" dirty="0">
+                <a:solidFill>
+                  <a:srgbClr val="000000"/>
+                </a:solidFill>
+                <a:latin typeface="Meiryo UI" pitchFamily="34" charset="0"/>
+                <a:ea typeface="Meiryo UI" pitchFamily="34" charset="-122"/>
+                <a:cs typeface="Meiryo UI" pitchFamily="34" charset="-120"/>
+              </a:rPr>
+              <a:t>運用部門の管理職</a:t>
+            </a:r>
+            <a:endParaRPr lang="en-US" sz="1500" dirty="0"/>
+          </a:p>
+        </p:txBody>
+      </p:sp>
+      <p:sp>
+        <p:nvSpPr>
+          <p:cNvPr id="27" name="Text 20"/>
+          <p:cNvSpPr/>
+          <p:nvPr/>
+        </p:nvSpPr>
+        <p:spPr>
+          <a:xfrm>
+            <a:off x="8229600" y="3017520"/>
+            <a:ext cx="3566160" cy="2103120"/>
+          </a:xfrm>
+          <a:prstGeom prst="rect">
+            <a:avLst/>
+          </a:prstGeom>
+          <a:noFill/>
+          <a:ln/>
+        </p:spPr>
+        <p:txBody>
+          <a:bodyPr wrap="square" rtlCol="0" anchor="ctr"/>
+          <a:lstStyle/>
+          <a:p>
+            <a:pPr indent="0" marL="0">
+              <a:lnSpc>
+                <a:spcPct val="125000"/>
+              </a:lnSpc>
+              <a:spcAft>
+                <a:spcPts val="600"/>
+              </a:spcAft>
+              <a:buNone/>
+            </a:pPr>
+            <a:r>
+              <a:rPr lang="en-US" sz="1400" b="1" dirty="0">
+                <a:solidFill>
+                  <a:srgbClr val="8A4B1E"/>
+                </a:solidFill>
+                <a:latin typeface="Meiryo UI" pitchFamily="34" charset="0"/>
+                <a:ea typeface="Meiryo UI" pitchFamily="34" charset="-122"/>
+                <a:cs typeface="Meiryo UI" pitchFamily="34" charset="-120"/>
+              </a:rPr>
+              <a:t>業務内容　</a:t>
+            </a:r>
+            <a:pPr indent="0" marL="0">
+              <a:lnSpc>
+                <a:spcPct val="125000"/>
+              </a:lnSpc>
+              <a:spcAft>
+                <a:spcPts val="600"/>
+              </a:spcAft>
+              <a:buNone/>
+            </a:pPr>
+            <a:r>
               <a:rPr lang="en-US" sz="1400" dirty="0">
                 <a:solidFill>
                   <a:srgbClr val="000000"/>
@@ -5284,7 +7735,7 @@
                 <a:ea typeface="Meiryo UI" pitchFamily="34" charset="-122"/>
                 <a:cs typeface="Meiryo UI" pitchFamily="34" charset="-120"/>
               </a:rPr>
-              <a:t>財務分析力と法務知識を掛け合わせた統合コンサルティング力。経営者との長期的な信頼関係構築力。</a:t>
+              <a:t>銀行全体の資産運用方針の立案・運用部門の統括を担当。頭脳と金庫が同一組織内で完結する体制の中核を担う。</a:t>
             </a:r>
             <a:endParaRPr lang="en-US" sz="1400" dirty="0"/>
           </a:p>
@@ -5292,36 +7743,14 @@
       </p:sp>
       <p:sp>
         <p:nvSpPr>
-          <p:cNvPr id="16" name="Shape 13"/>
-          <p:cNvSpPr/>
-          <p:nvPr/>
-        </p:nvSpPr>
-        <p:spPr>
-          <a:xfrm>
-            <a:off x="4005072" y="4526280"/>
-            <a:ext cx="146304" cy="146304"/>
-          </a:xfrm>
-          <a:prstGeom prst="roundRect">
-            <a:avLst>
-              <a:gd name="adj" fmla="val 50000"/>
-            </a:avLst>
-          </a:prstGeom>
-          <a:solidFill>
-            <a:srgbClr val="C9A227"/>
-          </a:solidFill>
-          <a:ln/>
-        </p:spPr>
-      </p:sp>
-      <p:sp>
-        <p:nvSpPr>
-          <p:cNvPr id="17" name="Text 14"/>
-          <p:cNvSpPr/>
-          <p:nvPr/>
-        </p:nvSpPr>
-        <p:spPr>
-          <a:xfrm>
-            <a:off x="4297680" y="4453128"/>
-            <a:ext cx="7406640" cy="365760"/>
+          <p:cNvPr id="28" name="Text 21"/>
+          <p:cNvSpPr/>
+          <p:nvPr/>
+        </p:nvSpPr>
+        <p:spPr>
+          <a:xfrm>
+            <a:off x="8229600" y="4983480"/>
+            <a:ext cx="3566160" cy="1463040"/>
           </a:xfrm>
           <a:prstGeom prst="rect">
             <a:avLst/>
@@ -5334,51 +7763,29 @@
           <a:lstStyle/>
           <a:p>
             <a:pPr indent="0" marL="0">
-              <a:buNone/>
-            </a:pPr>
-            <a:r>
-              <a:rPr lang="en-US" sz="1600" b="1" dirty="0">
-                <a:solidFill>
-                  <a:srgbClr val="000000"/>
-                </a:solidFill>
-                <a:latin typeface="Meiryo UI" pitchFamily="34" charset="0"/>
-                <a:ea typeface="Meiryo UI" pitchFamily="34" charset="-122"/>
-                <a:cs typeface="Meiryo UI" pitchFamily="34" charset="-120"/>
-              </a:rPr>
-              <a:t>強みとの接続</a:t>
-            </a:r>
-            <a:endParaRPr lang="en-US" sz="1600" dirty="0"/>
-          </a:p>
-        </p:txBody>
-      </p:sp>
-      <p:sp>
-        <p:nvSpPr>
-          <p:cNvPr id="18" name="Text 15"/>
-          <p:cNvSpPr/>
-          <p:nvPr/>
-        </p:nvSpPr>
-        <p:spPr>
-          <a:xfrm>
-            <a:off x="4041648" y="4910328"/>
-            <a:ext cx="7680960" cy="1417320"/>
-          </a:xfrm>
-          <a:prstGeom prst="rect">
-            <a:avLst/>
-          </a:prstGeom>
-          <a:noFill/>
-          <a:ln/>
-        </p:spPr>
-        <p:txBody>
-          <a:bodyPr wrap="square" rtlCol="0" anchor="ctr"/>
-          <a:lstStyle/>
-          <a:p>
-            <a:pPr indent="0" marL="0">
               <a:lnSpc>
-                <a:spcPct val="135000"/>
+                <a:spcPct val="125000"/>
               </a:lnSpc>
               <a:buNone/>
             </a:pPr>
             <a:r>
+              <a:rPr lang="en-US" sz="1400" b="1" dirty="0">
+                <a:solidFill>
+                  <a:srgbClr val="8A4B1E"/>
+                </a:solidFill>
+                <a:latin typeface="Meiryo UI" pitchFamily="34" charset="0"/>
+                <a:ea typeface="Meiryo UI" pitchFamily="34" charset="-122"/>
+                <a:cs typeface="Meiryo UI" pitchFamily="34" charset="-120"/>
+              </a:rPr>
+              <a:t>身につく力　</a:t>
+            </a:r>
+            <a:pPr indent="0" marL="0">
+              <a:lnSpc>
+                <a:spcPct val="125000"/>
+              </a:lnSpc>
+              <a:buNone/>
+            </a:pPr>
+            <a:r>
               <a:rPr lang="en-US" sz="1400" dirty="0">
                 <a:solidFill>
                   <a:srgbClr val="000000"/>
@@ -5387,7 +7794,7 @@
                 <a:ea typeface="Meiryo UI" pitchFamily="34" charset="-122"/>
                 <a:cs typeface="Meiryo UI" pitchFamily="34" charset="-120"/>
               </a:rPr>
-              <a:t>Phase1で鍛えた財務分析力とPhase2で確立した企業法の専門性を統合し、他行にはまねしにくい独自のキャリアポジションを確立するフェーズ。</a:t>
+              <a:t>組織全体の運用戦略を描く視座、社内の他部門を巻き込む統括力。</a:t>
             </a:r>
             <a:endParaRPr lang="en-US" sz="1400" dirty="0"/>
           </a:p>
@@ -5427,68 +7834,14 @@
       </p:grpSpPr>
       <p:sp>
         <p:nvSpPr>
-          <p:cNvPr id="2" name="Shape 0"/>
-          <p:cNvSpPr/>
-          <p:nvPr/>
-        </p:nvSpPr>
-        <p:spPr>
-          <a:xfrm>
-            <a:off x="457200" y="457200"/>
-            <a:ext cx="3200400" cy="5943600"/>
-          </a:xfrm>
-          <a:prstGeom prst="roundRect">
-            <a:avLst>
-              <a:gd name="adj" fmla="val 2857"/>
-            </a:avLst>
-          </a:prstGeom>
-          <a:solidFill>
-            <a:srgbClr val="FFFFFF"/>
-          </a:solidFill>
-          <a:ln w="19050">
-            <a:solidFill>
-              <a:srgbClr val="1E2761"/>
-            </a:solidFill>
-            <a:prstDash val="solid"/>
-          </a:ln>
-        </p:spPr>
-      </p:sp>
-      <p:sp>
-        <p:nvSpPr>
-          <p:cNvPr id="3" name="Shape 1"/>
-          <p:cNvSpPr/>
-          <p:nvPr/>
-        </p:nvSpPr>
-        <p:spPr>
-          <a:xfrm>
-            <a:off x="777240" y="777240"/>
-            <a:ext cx="1143000" cy="411480"/>
-          </a:xfrm>
-          <a:prstGeom prst="roundRect">
-            <a:avLst>
-              <a:gd name="adj" fmla="val 17778"/>
-            </a:avLst>
-          </a:prstGeom>
-          <a:solidFill>
-            <a:srgbClr val="FFFFFF"/>
-          </a:solidFill>
-          <a:ln w="15875">
-            <a:solidFill>
-              <a:srgbClr val="1E2761"/>
-            </a:solidFill>
-            <a:prstDash val="solid"/>
-          </a:ln>
-        </p:spPr>
-      </p:sp>
-      <p:sp>
-        <p:nvSpPr>
-          <p:cNvPr id="4" name="Text 2"/>
-          <p:cNvSpPr/>
-          <p:nvPr/>
-        </p:nvSpPr>
-        <p:spPr>
-          <a:xfrm>
-            <a:off x="777240" y="777240"/>
-            <a:ext cx="1143000" cy="411480"/>
+          <p:cNvPr id="2" name="Text 0"/>
+          <p:cNvSpPr/>
+          <p:nvPr/>
+        </p:nvSpPr>
+        <p:spPr>
+          <a:xfrm>
+            <a:off x="640080" y="457200"/>
+            <a:ext cx="10972800" cy="548640"/>
           </a:xfrm>
           <a:prstGeom prst="rect">
             <a:avLst/>
@@ -5500,1224 +7853,1389 @@
           <a:bodyPr wrap="square" rtlCol="0" anchor="ctr"/>
           <a:lstStyle/>
           <a:p>
-            <a:pPr algn="ctr" indent="0" marL="0">
-              <a:buNone/>
-            </a:pPr>
-            <a:r>
-              <a:rPr lang="en-US" sz="1400" b="1" dirty="0">
-                <a:solidFill>
-                  <a:srgbClr val="000000"/>
-                </a:solidFill>
-                <a:latin typeface="Meiryo UI" pitchFamily="34" charset="0"/>
-                <a:ea typeface="Meiryo UI" pitchFamily="34" charset="-122"/>
-                <a:cs typeface="Meiryo UI" pitchFamily="34" charset="-120"/>
-              </a:rPr>
-              <a:t>PHASE 4</a:t>
-            </a:r>
-            <a:endParaRPr lang="en-US" sz="1400" dirty="0"/>
-          </a:p>
-        </p:txBody>
-      </p:sp>
-      <p:sp>
-        <p:nvSpPr>
-          <p:cNvPr id="5" name="Shape 3"/>
-          <p:cNvSpPr/>
-          <p:nvPr/>
-        </p:nvSpPr>
-        <p:spPr>
-          <a:xfrm>
-            <a:off x="777240" y="1508760"/>
-            <a:ext cx="1371600" cy="1371600"/>
-          </a:xfrm>
-          <a:prstGeom prst="ellipse">
-            <a:avLst/>
-          </a:prstGeom>
-          <a:solidFill>
-            <a:srgbClr val="1E2761"/>
-          </a:solidFill>
-          <a:ln/>
-        </p:spPr>
-      </p:sp>
-      <p:pic>
-        <p:nvPicPr>
-          <p:cNvPr id="6" name="Image 0" descr="icon_crown.png">    </p:cNvPr>
-          <p:cNvPicPr>
-            <a:picLocks noChangeAspect="1"/>
-          </p:cNvPicPr>
-          <p:nvPr/>
-        </p:nvPicPr>
-        <p:blipFill>
-          <a:blip r:embed="rId1"/>
-          <a:stretch>
-            <a:fillRect/>
-          </a:stretch>
-        </p:blipFill>
-        <p:spPr>
-          <a:xfrm>
-            <a:off x="1069848" y="1801368"/>
-            <a:ext cx="786384" cy="786384"/>
-          </a:xfrm>
-          <a:prstGeom prst="rect">
-            <a:avLst/>
-          </a:prstGeom>
-        </p:spPr>
-      </p:pic>
-      <p:sp>
-        <p:nvSpPr>
-          <p:cNvPr id="7" name="Text 4"/>
-          <p:cNvSpPr/>
-          <p:nvPr/>
-        </p:nvSpPr>
-        <p:spPr>
-          <a:xfrm>
-            <a:off x="777240" y="3108960"/>
-            <a:ext cx="2743200" cy="365760"/>
-          </a:xfrm>
-          <a:prstGeom prst="rect">
-            <a:avLst/>
-          </a:prstGeom>
-          <a:noFill/>
-          <a:ln/>
-        </p:spPr>
-        <p:txBody>
-          <a:bodyPr wrap="square" rtlCol="0" anchor="ctr"/>
-          <a:lstStyle/>
-          <a:p>
-            <a:pPr indent="0" marL="0">
-              <a:buNone/>
-            </a:pPr>
-            <a:r>
-              <a:rPr lang="en-US" sz="1400" b="1" dirty="0">
-                <a:solidFill>
-                  <a:srgbClr val="000000"/>
-                </a:solidFill>
-                <a:latin typeface="Meiryo UI" pitchFamily="34" charset="0"/>
-                <a:ea typeface="Meiryo UI" pitchFamily="34" charset="-122"/>
-                <a:cs typeface="Meiryo UI" pitchFamily="34" charset="-120"/>
-              </a:rPr>
-              <a:t>16年目〜</a:t>
-            </a:r>
-            <a:endParaRPr lang="en-US" sz="1400" dirty="0"/>
-          </a:p>
-        </p:txBody>
-      </p:sp>
-      <p:sp>
-        <p:nvSpPr>
-          <p:cNvPr id="8" name="Text 5"/>
-          <p:cNvSpPr/>
-          <p:nvPr/>
-        </p:nvSpPr>
-        <p:spPr>
-          <a:xfrm>
-            <a:off x="777240" y="3520440"/>
-            <a:ext cx="2788920" cy="1280160"/>
-          </a:xfrm>
-          <a:prstGeom prst="rect">
-            <a:avLst/>
-          </a:prstGeom>
-          <a:noFill/>
-          <a:ln/>
-        </p:spPr>
-        <p:txBody>
-          <a:bodyPr wrap="square" rtlCol="0" anchor="ctr"/>
-          <a:lstStyle/>
-          <a:p>
-            <a:pPr indent="0" marL="0">
-              <a:lnSpc>
-                <a:spcPct val="115000"/>
-              </a:lnSpc>
-              <a:buNone/>
-            </a:pPr>
-            <a:r>
-              <a:rPr lang="en-US" sz="2200" b="1" dirty="0">
-                <a:solidFill>
-                  <a:srgbClr val="000000"/>
-                </a:solidFill>
-                <a:latin typeface="Meiryo UI" pitchFamily="34" charset="0"/>
-                <a:ea typeface="Meiryo UI" pitchFamily="34" charset="-122"/>
-                <a:cs typeface="Meiryo UI" pitchFamily="34" charset="-120"/>
-              </a:rPr>
-              <a:t>プライベートバンキング／</a:t>
-            </a:r>
-            <a:endParaRPr lang="en-US" sz="2200" dirty="0"/>
-          </a:p>
-          <a:p>
-            <a:pPr indent="0" marL="0">
-              <a:lnSpc>
-                <a:spcPct val="115000"/>
-              </a:lnSpc>
-              <a:buNone/>
-            </a:pPr>
-            <a:r>
-              <a:rPr lang="en-US" sz="2200" b="1" dirty="0">
-                <a:solidFill>
-                  <a:srgbClr val="000000"/>
-                </a:solidFill>
-                <a:latin typeface="Meiryo UI" pitchFamily="34" charset="0"/>
-                <a:ea typeface="Meiryo UI" pitchFamily="34" charset="-122"/>
-                <a:cs typeface="Meiryo UI" pitchFamily="34" charset="-120"/>
-              </a:rPr>
-              <a:t>資産運用会社</a:t>
-            </a:r>
-            <a:endParaRPr lang="en-US" sz="2200" dirty="0"/>
-          </a:p>
-        </p:txBody>
-      </p:sp>
-      <p:sp>
-        <p:nvSpPr>
-          <p:cNvPr id="9" name="Text 6"/>
-          <p:cNvSpPr/>
-          <p:nvPr/>
-        </p:nvSpPr>
-        <p:spPr>
-          <a:xfrm>
-            <a:off x="777240" y="4937760"/>
-            <a:ext cx="2788920" cy="1371600"/>
-          </a:xfrm>
-          <a:prstGeom prst="rect">
-            <a:avLst/>
-          </a:prstGeom>
-          <a:noFill/>
-          <a:ln/>
-        </p:spPr>
-        <p:txBody>
-          <a:bodyPr wrap="square" rtlCol="0" anchor="ctr"/>
-          <a:lstStyle/>
-          <a:p>
-            <a:pPr indent="0" marL="0">
-              <a:lnSpc>
-                <a:spcPct val="125000"/>
-              </a:lnSpc>
-              <a:buNone/>
-            </a:pPr>
-            <a:r>
-              <a:rPr lang="en-US" sz="1400" i="1" dirty="0">
-                <a:solidFill>
-                  <a:srgbClr val="000000"/>
-                </a:solidFill>
-                <a:latin typeface="Meiryo UI" pitchFamily="34" charset="0"/>
-                <a:ea typeface="Meiryo UI" pitchFamily="34" charset="-122"/>
-                <a:cs typeface="Meiryo UI" pitchFamily="34" charset="-120"/>
-              </a:rPr>
-              <a:t>顧客の資産・企業のライフサイクル全体を俯瞰する集大成のステージ</a:t>
-            </a:r>
-            <a:endParaRPr lang="en-US" sz="1400" dirty="0"/>
-          </a:p>
-        </p:txBody>
-      </p:sp>
-      <p:sp>
-        <p:nvSpPr>
-          <p:cNvPr id="10" name="Shape 7"/>
-          <p:cNvSpPr/>
-          <p:nvPr/>
-        </p:nvSpPr>
-        <p:spPr>
-          <a:xfrm>
-            <a:off x="4005072" y="685800"/>
-            <a:ext cx="146304" cy="146304"/>
-          </a:xfrm>
-          <a:prstGeom prst="roundRect">
-            <a:avLst>
-              <a:gd name="adj" fmla="val 50000"/>
-            </a:avLst>
-          </a:prstGeom>
-          <a:solidFill>
-            <a:srgbClr val="C9A227"/>
-          </a:solidFill>
-          <a:ln/>
-        </p:spPr>
-      </p:sp>
-      <p:sp>
-        <p:nvSpPr>
-          <p:cNvPr id="11" name="Text 8"/>
-          <p:cNvSpPr/>
-          <p:nvPr/>
-        </p:nvSpPr>
-        <p:spPr>
-          <a:xfrm>
-            <a:off x="4297680" y="612648"/>
-            <a:ext cx="7406640" cy="365760"/>
-          </a:xfrm>
-          <a:prstGeom prst="rect">
-            <a:avLst/>
-          </a:prstGeom>
-          <a:noFill/>
-          <a:ln/>
-        </p:spPr>
-        <p:txBody>
-          <a:bodyPr wrap="square" rtlCol="0" anchor="ctr"/>
-          <a:lstStyle/>
-          <a:p>
-            <a:pPr indent="0" marL="0">
-              <a:buNone/>
-            </a:pPr>
-            <a:r>
-              <a:rPr lang="en-US" sz="1600" b="1" dirty="0">
-                <a:solidFill>
-                  <a:srgbClr val="000000"/>
-                </a:solidFill>
-                <a:latin typeface="Meiryo UI" pitchFamily="34" charset="0"/>
-                <a:ea typeface="Meiryo UI" pitchFamily="34" charset="-122"/>
-                <a:cs typeface="Meiryo UI" pitchFamily="34" charset="-120"/>
-              </a:rPr>
-              <a:t>業務内容</a:t>
-            </a:r>
-            <a:endParaRPr lang="en-US" sz="1600" dirty="0"/>
-          </a:p>
-        </p:txBody>
-      </p:sp>
-      <p:sp>
-        <p:nvSpPr>
-          <p:cNvPr id="12" name="Text 9"/>
-          <p:cNvSpPr/>
-          <p:nvPr/>
-        </p:nvSpPr>
-        <p:spPr>
-          <a:xfrm>
-            <a:off x="4041648" y="1069848"/>
-            <a:ext cx="7680960" cy="1417320"/>
-          </a:xfrm>
-          <a:prstGeom prst="rect">
-            <a:avLst/>
-          </a:prstGeom>
-          <a:noFill/>
-          <a:ln/>
-        </p:spPr>
-        <p:txBody>
-          <a:bodyPr wrap="square" rtlCol="0" anchor="ctr"/>
-          <a:lstStyle/>
-          <a:p>
-            <a:pPr indent="0" marL="0">
-              <a:lnSpc>
-                <a:spcPct val="135000"/>
-              </a:lnSpc>
-              <a:buNone/>
-            </a:pPr>
-            <a:r>
-              <a:rPr lang="en-US" sz="1400" dirty="0">
-                <a:solidFill>
-                  <a:srgbClr val="000000"/>
-                </a:solidFill>
-                <a:latin typeface="Meiryo UI" pitchFamily="34" charset="0"/>
-                <a:ea typeface="Meiryo UI" pitchFamily="34" charset="-122"/>
-                <a:cs typeface="Meiryo UI" pitchFamily="34" charset="-120"/>
-              </a:rPr>
-              <a:t>富裕層・オーナー経営者に対する資産運用・資産承継・事業承継を統合的にサポートする最上流のコンサルティング、またはグループ資産運用会社への出向によるアセットマネジメント業務。</a:t>
-            </a:r>
-            <a:endParaRPr lang="en-US" sz="1400" dirty="0"/>
-          </a:p>
-        </p:txBody>
-      </p:sp>
-      <p:sp>
-        <p:nvSpPr>
-          <p:cNvPr id="13" name="Shape 10"/>
-          <p:cNvSpPr/>
-          <p:nvPr/>
-        </p:nvSpPr>
-        <p:spPr>
-          <a:xfrm>
-            <a:off x="4005072" y="2606040"/>
-            <a:ext cx="146304" cy="146304"/>
-          </a:xfrm>
-          <a:prstGeom prst="roundRect">
-            <a:avLst>
-              <a:gd name="adj" fmla="val 50000"/>
-            </a:avLst>
-          </a:prstGeom>
-          <a:solidFill>
-            <a:srgbClr val="C9A227"/>
-          </a:solidFill>
-          <a:ln/>
-        </p:spPr>
-      </p:sp>
-      <p:sp>
-        <p:nvSpPr>
-          <p:cNvPr id="14" name="Text 11"/>
-          <p:cNvSpPr/>
-          <p:nvPr/>
-        </p:nvSpPr>
-        <p:spPr>
-          <a:xfrm>
-            <a:off x="4297680" y="2532888"/>
-            <a:ext cx="7406640" cy="365760"/>
-          </a:xfrm>
-          <a:prstGeom prst="rect">
-            <a:avLst/>
-          </a:prstGeom>
-          <a:noFill/>
-          <a:ln/>
-        </p:spPr>
-        <p:txBody>
-          <a:bodyPr wrap="square" rtlCol="0" anchor="ctr"/>
-          <a:lstStyle/>
-          <a:p>
-            <a:pPr indent="0" marL="0">
-              <a:buNone/>
-            </a:pPr>
-            <a:r>
-              <a:rPr lang="en-US" sz="1600" b="1" dirty="0">
-                <a:solidFill>
-                  <a:srgbClr val="000000"/>
-                </a:solidFill>
-                <a:latin typeface="Meiryo UI" pitchFamily="34" charset="0"/>
-                <a:ea typeface="Meiryo UI" pitchFamily="34" charset="-122"/>
-                <a:cs typeface="Meiryo UI" pitchFamily="34" charset="-120"/>
-              </a:rPr>
-              <a:t>身につく力</a:t>
-            </a:r>
-            <a:endParaRPr lang="en-US" sz="1600" dirty="0"/>
-          </a:p>
-        </p:txBody>
-      </p:sp>
-      <p:sp>
-        <p:nvSpPr>
-          <p:cNvPr id="15" name="Text 12"/>
-          <p:cNvSpPr/>
-          <p:nvPr/>
-        </p:nvSpPr>
-        <p:spPr>
-          <a:xfrm>
-            <a:off x="4041648" y="2990088"/>
-            <a:ext cx="7680960" cy="1417320"/>
-          </a:xfrm>
-          <a:prstGeom prst="rect">
-            <a:avLst/>
-          </a:prstGeom>
-          <a:noFill/>
-          <a:ln/>
-        </p:spPr>
-        <p:txBody>
-          <a:bodyPr wrap="square" rtlCol="0" anchor="ctr"/>
-          <a:lstStyle/>
-          <a:p>
-            <a:pPr indent="0" marL="0">
-              <a:lnSpc>
-                <a:spcPct val="135000"/>
-              </a:lnSpc>
-              <a:buNone/>
-            </a:pPr>
-            <a:r>
-              <a:rPr lang="en-US" sz="1400" dirty="0">
-                <a:solidFill>
-                  <a:srgbClr val="000000"/>
-                </a:solidFill>
-                <a:latin typeface="Meiryo UI" pitchFamily="34" charset="0"/>
-                <a:ea typeface="Meiryo UI" pitchFamily="34" charset="-122"/>
-                <a:cs typeface="Meiryo UI" pitchFamily="34" charset="-120"/>
-              </a:rPr>
-              <a:t>顧客の一生涯・企業の世代交代までを見通す視座と、社内外の専門家を束ねる統括力。</a:t>
-            </a:r>
-            <a:endParaRPr lang="en-US" sz="1400" dirty="0"/>
-          </a:p>
-        </p:txBody>
-      </p:sp>
-      <p:sp>
-        <p:nvSpPr>
-          <p:cNvPr id="16" name="Shape 13"/>
-          <p:cNvSpPr/>
-          <p:nvPr/>
-        </p:nvSpPr>
-        <p:spPr>
-          <a:xfrm>
-            <a:off x="4005072" y="4526280"/>
-            <a:ext cx="146304" cy="146304"/>
-          </a:xfrm>
-          <a:prstGeom prst="roundRect">
-            <a:avLst>
-              <a:gd name="adj" fmla="val 50000"/>
-            </a:avLst>
-          </a:prstGeom>
-          <a:solidFill>
-            <a:srgbClr val="C9A227"/>
-          </a:solidFill>
-          <a:ln/>
-        </p:spPr>
-      </p:sp>
-      <p:sp>
-        <p:nvSpPr>
-          <p:cNvPr id="17" name="Text 14"/>
-          <p:cNvSpPr/>
-          <p:nvPr/>
-        </p:nvSpPr>
-        <p:spPr>
-          <a:xfrm>
-            <a:off x="4297680" y="4453128"/>
-            <a:ext cx="7406640" cy="365760"/>
-          </a:xfrm>
-          <a:prstGeom prst="rect">
-            <a:avLst/>
-          </a:prstGeom>
-          <a:noFill/>
-          <a:ln/>
-        </p:spPr>
-        <p:txBody>
-          <a:bodyPr wrap="square" rtlCol="0" anchor="ctr"/>
-          <a:lstStyle/>
-          <a:p>
-            <a:pPr indent="0" marL="0">
-              <a:buNone/>
-            </a:pPr>
-            <a:r>
-              <a:rPr lang="en-US" sz="1600" b="1" dirty="0">
-                <a:solidFill>
-                  <a:srgbClr val="000000"/>
-                </a:solidFill>
-                <a:latin typeface="Meiryo UI" pitchFamily="34" charset="0"/>
-                <a:ea typeface="Meiryo UI" pitchFamily="34" charset="-122"/>
-                <a:cs typeface="Meiryo UI" pitchFamily="34" charset="-120"/>
-              </a:rPr>
-              <a:t>強みとの接続</a:t>
-            </a:r>
-            <a:endParaRPr lang="en-US" sz="1600" dirty="0"/>
-          </a:p>
-        </p:txBody>
-      </p:sp>
-      <p:sp>
-        <p:nvSpPr>
-          <p:cNvPr id="18" name="Text 15"/>
-          <p:cNvSpPr/>
-          <p:nvPr/>
-        </p:nvSpPr>
-        <p:spPr>
-          <a:xfrm>
-            <a:off x="4041648" y="4910328"/>
-            <a:ext cx="7680960" cy="1417320"/>
-          </a:xfrm>
-          <a:prstGeom prst="rect">
-            <a:avLst/>
-          </a:prstGeom>
-          <a:noFill/>
-          <a:ln/>
-        </p:spPr>
-        <p:txBody>
-          <a:bodyPr wrap="square" rtlCol="0" anchor="ctr"/>
-          <a:lstStyle/>
-          <a:p>
-            <a:pPr indent="0" marL="0">
-              <a:lnSpc>
-                <a:spcPct val="135000"/>
-              </a:lnSpc>
-              <a:buNone/>
-            </a:pPr>
-            <a:r>
-              <a:rPr lang="en-US" sz="1400" dirty="0">
-                <a:solidFill>
-                  <a:srgbClr val="000000"/>
-                </a:solidFill>
-                <a:latin typeface="Meiryo UI" pitchFamily="34" charset="0"/>
-                <a:ea typeface="Meiryo UI" pitchFamily="34" charset="-122"/>
-                <a:cs typeface="Meiryo UI" pitchFamily="34" charset="-120"/>
-              </a:rPr>
-              <a:t>財務分析力・企業法知識・PDCAで磨いた改善力、これまで積み上げた全ての強みを統合し、顧客との長期的な信頼関係を築く集大成のポジション。</a:t>
-            </a:r>
-            <a:endParaRPr lang="en-US" sz="1400" dirty="0"/>
-          </a:p>
-        </p:txBody>
-      </p:sp>
-    </p:spTree>
-  </p:cSld>
-  <p:clrMapOvr>
-    <a:masterClrMapping/>
-  </p:clrMapOvr>
-</p:sld>
-</file>
-
-<file path=ppt/slides/slide8.xml><?xml version="1.0" encoding="utf-8"?>
-<p:sld xmlns:a="http://schemas.openxmlformats.org/drawingml/2006/main" xmlns:r="http://schemas.openxmlformats.org/officeDocument/2006/relationships" xmlns:p="http://schemas.openxmlformats.org/presentationml/2006/main">
-  <p:cSld name="Slide 8">
-    <p:bg>
-      <p:bgPr>
-        <a:solidFill>
-          <a:srgbClr val="FFFFFF"/>
-        </a:solidFill>
-      </p:bgPr>
-    </p:bg>
-    <p:spTree>
-      <p:nvGrpSpPr>
-        <p:cNvPr id="1" name=""/>
-        <p:cNvGrpSpPr/>
-        <p:nvPr/>
-      </p:nvGrpSpPr>
-      <p:grpSpPr>
-        <a:xfrm>
-          <a:off x="0" y="0"/>
-          <a:ext cx="0" cy="0"/>
-          <a:chOff x="0" y="0"/>
-          <a:chExt cx="0" cy="0"/>
-        </a:xfrm>
-      </p:grpSpPr>
-      <p:sp>
-        <p:nvSpPr>
-          <p:cNvPr id="2" name="Text 0"/>
-          <p:cNvSpPr/>
-          <p:nvPr/>
-        </p:nvSpPr>
-        <p:spPr>
-          <a:xfrm>
-            <a:off x="640080" y="502920"/>
-            <a:ext cx="10972800" cy="640080"/>
-          </a:xfrm>
-          <a:prstGeom prst="rect">
-            <a:avLst/>
-          </a:prstGeom>
-          <a:noFill/>
-          <a:ln/>
-        </p:spPr>
-        <p:txBody>
-          <a:bodyPr wrap="square" rtlCol="0" anchor="ctr"/>
-          <a:lstStyle/>
-          <a:p>
-            <a:pPr indent="0" marL="0">
-              <a:buNone/>
-            </a:pPr>
-            <a:r>
-              <a:rPr lang="en-US" sz="3000" b="1" dirty="0">
-                <a:solidFill>
-                  <a:srgbClr val="000000"/>
-                </a:solidFill>
-                <a:latin typeface="Meiryo UI" pitchFamily="34" charset="0"/>
-                <a:ea typeface="Meiryo UI" pitchFamily="34" charset="-122"/>
-                <a:cs typeface="Meiryo UI" pitchFamily="34" charset="-120"/>
-              </a:rPr>
-              <a:t>まとめ：強みを掛け算するキャリア</a:t>
-            </a:r>
-            <a:endParaRPr lang="en-US" sz="3000" dirty="0"/>
-          </a:p>
-        </p:txBody>
-      </p:sp>
-      <p:sp>
-        <p:nvSpPr>
-          <p:cNvPr id="3" name="Text 1"/>
-          <p:cNvSpPr/>
-          <p:nvPr/>
-        </p:nvSpPr>
-        <p:spPr>
-          <a:xfrm>
-            <a:off x="640080" y="1188720"/>
-            <a:ext cx="10789920" cy="457200"/>
-          </a:xfrm>
-          <a:prstGeom prst="rect">
-            <a:avLst/>
-          </a:prstGeom>
-          <a:noFill/>
-          <a:ln/>
-        </p:spPr>
-        <p:txBody>
-          <a:bodyPr wrap="square" rtlCol="0" anchor="ctr"/>
-          <a:lstStyle/>
-          <a:p>
-            <a:pPr indent="0" marL="0">
-              <a:buNone/>
-            </a:pPr>
-            <a:r>
-              <a:rPr lang="en-US" sz="1400" dirty="0">
-                <a:solidFill>
-                  <a:srgbClr val="000000"/>
-                </a:solidFill>
-                <a:latin typeface="Meiryo UI" pitchFamily="34" charset="0"/>
-                <a:ea typeface="Meiryo UI" pitchFamily="34" charset="-122"/>
-                <a:cs typeface="Meiryo UI" pitchFamily="34" charset="-120"/>
-              </a:rPr>
-              <a:t>財務分析力と企業法知識を、直列でなく段階的に掛け合わせていくことで、信託銀行ならではの独自ポジションに到達するモデルです。</a:t>
-            </a:r>
-            <a:endParaRPr lang="en-US" sz="1400" dirty="0"/>
-          </a:p>
-        </p:txBody>
-      </p:sp>
-      <p:sp>
-        <p:nvSpPr>
-          <p:cNvPr id="4" name="Shape 2"/>
-          <p:cNvSpPr/>
-          <p:nvPr/>
-        </p:nvSpPr>
-        <p:spPr>
-          <a:xfrm>
-            <a:off x="640080" y="1965960"/>
-            <a:ext cx="2468880" cy="1554480"/>
-          </a:xfrm>
-          <a:prstGeom prst="roundRect">
-            <a:avLst>
-              <a:gd name="adj" fmla="val 5882"/>
-            </a:avLst>
-          </a:prstGeom>
-          <a:solidFill>
-            <a:srgbClr val="FFFFFF"/>
-          </a:solidFill>
-          <a:ln w="12700">
-            <a:solidFill>
-              <a:srgbClr val="D0D5DD"/>
-            </a:solidFill>
-            <a:prstDash val="solid"/>
-          </a:ln>
-        </p:spPr>
-      </p:sp>
-      <p:sp>
-        <p:nvSpPr>
-          <p:cNvPr id="5" name="Text 3"/>
-          <p:cNvSpPr/>
-          <p:nvPr/>
-        </p:nvSpPr>
-        <p:spPr>
-          <a:xfrm>
-            <a:off x="804672" y="2112264"/>
-            <a:ext cx="2139696" cy="320040"/>
-          </a:xfrm>
-          <a:prstGeom prst="rect">
-            <a:avLst/>
-          </a:prstGeom>
-          <a:noFill/>
-          <a:ln/>
-        </p:spPr>
-        <p:txBody>
-          <a:bodyPr wrap="square" rtlCol="0" anchor="ctr"/>
-          <a:lstStyle/>
-          <a:p>
-            <a:pPr indent="0" marL="0">
-              <a:buNone/>
-            </a:pPr>
-            <a:r>
-              <a:rPr lang="en-US" sz="1400" b="1" dirty="0">
-                <a:solidFill>
-                  <a:srgbClr val="000000"/>
-                </a:solidFill>
-                <a:latin typeface="Meiryo UI" pitchFamily="34" charset="0"/>
-                <a:ea typeface="Meiryo UI" pitchFamily="34" charset="-122"/>
-                <a:cs typeface="Meiryo UI" pitchFamily="34" charset="-120"/>
-              </a:rPr>
-              <a:t>Phase 1　入行〜5年目</a:t>
-            </a:r>
-            <a:endParaRPr lang="en-US" sz="1400" dirty="0"/>
-          </a:p>
-        </p:txBody>
-      </p:sp>
-      <p:sp>
-        <p:nvSpPr>
-          <p:cNvPr id="6" name="Text 4"/>
-          <p:cNvSpPr/>
-          <p:nvPr/>
-        </p:nvSpPr>
-        <p:spPr>
-          <a:xfrm>
-            <a:off x="804672" y="2468880"/>
-            <a:ext cx="2139696" cy="914400"/>
-          </a:xfrm>
-          <a:prstGeom prst="rect">
-            <a:avLst/>
-          </a:prstGeom>
-          <a:noFill/>
-          <a:ln/>
-        </p:spPr>
-        <p:txBody>
-          <a:bodyPr wrap="square" rtlCol="0" anchor="ctr"/>
-          <a:lstStyle/>
-          <a:p>
-            <a:pPr indent="0" marL="0">
-              <a:lnSpc>
-                <a:spcPct val="110000"/>
-              </a:lnSpc>
-              <a:buNone/>
-            </a:pPr>
-            <a:r>
-              <a:rPr lang="en-US" sz="1400" b="1" dirty="0">
-                <a:solidFill>
-                  <a:srgbClr val="000000"/>
-                </a:solidFill>
-                <a:latin typeface="Meiryo UI" pitchFamily="34" charset="0"/>
-                <a:ea typeface="Meiryo UI" pitchFamily="34" charset="-122"/>
-                <a:cs typeface="Meiryo UI" pitchFamily="34" charset="-120"/>
-              </a:rPr>
-              <a:t>法人業務部門</a:t>
-            </a:r>
-            <a:endParaRPr lang="en-US" sz="1400" dirty="0"/>
-          </a:p>
-          <a:p>
-            <a:pPr indent="0" marL="0">
-              <a:lnSpc>
-                <a:spcPct val="110000"/>
-              </a:lnSpc>
-              <a:buNone/>
-            </a:pPr>
-            <a:r>
-              <a:rPr lang="en-US" sz="1400" b="1" dirty="0">
-                <a:solidFill>
-                  <a:srgbClr val="000000"/>
-                </a:solidFill>
-                <a:latin typeface="Meiryo UI" pitchFamily="34" charset="0"/>
-                <a:ea typeface="Meiryo UI" pitchFamily="34" charset="-122"/>
-                <a:cs typeface="Meiryo UI" pitchFamily="34" charset="-120"/>
-              </a:rPr>
-              <a:t>（法人融資・法人渉外）</a:t>
-            </a:r>
-            <a:endParaRPr lang="en-US" sz="1400" dirty="0"/>
-          </a:p>
-        </p:txBody>
-      </p:sp>
-      <p:pic>
-        <p:nvPicPr>
-          <p:cNvPr id="7" name="Image 0" descr="icon_arrow_dark.png">    </p:cNvPr>
-          <p:cNvPicPr>
-            <a:picLocks noChangeAspect="1"/>
-          </p:cNvPicPr>
-          <p:nvPr/>
-        </p:nvPicPr>
-        <p:blipFill>
-          <a:blip r:embed="rId1"/>
-          <a:stretch>
-            <a:fillRect/>
-          </a:stretch>
-        </p:blipFill>
-        <p:spPr>
-          <a:xfrm>
-            <a:off x="3127248" y="2615184"/>
-            <a:ext cx="219456" cy="256032"/>
-          </a:xfrm>
-          <a:prstGeom prst="rect">
-            <a:avLst/>
-          </a:prstGeom>
-        </p:spPr>
-      </p:pic>
-      <p:sp>
-        <p:nvSpPr>
-          <p:cNvPr id="8" name="Shape 5"/>
-          <p:cNvSpPr/>
-          <p:nvPr/>
-        </p:nvSpPr>
-        <p:spPr>
-          <a:xfrm>
-            <a:off x="3364992" y="1965960"/>
-            <a:ext cx="2468880" cy="1554480"/>
-          </a:xfrm>
-          <a:prstGeom prst="roundRect">
-            <a:avLst>
-              <a:gd name="adj" fmla="val 5882"/>
-            </a:avLst>
-          </a:prstGeom>
-          <a:solidFill>
-            <a:srgbClr val="FFFFFF"/>
-          </a:solidFill>
-          <a:ln w="12700">
-            <a:solidFill>
-              <a:srgbClr val="D0D5DD"/>
-            </a:solidFill>
-            <a:prstDash val="solid"/>
-          </a:ln>
-        </p:spPr>
-      </p:sp>
-      <p:sp>
-        <p:nvSpPr>
-          <p:cNvPr id="9" name="Text 6"/>
-          <p:cNvSpPr/>
-          <p:nvPr/>
-        </p:nvSpPr>
-        <p:spPr>
-          <a:xfrm>
-            <a:off x="3529584" y="2112264"/>
-            <a:ext cx="2139696" cy="320040"/>
-          </a:xfrm>
-          <a:prstGeom prst="rect">
-            <a:avLst/>
-          </a:prstGeom>
-          <a:noFill/>
-          <a:ln/>
-        </p:spPr>
-        <p:txBody>
-          <a:bodyPr wrap="square" rtlCol="0" anchor="ctr"/>
-          <a:lstStyle/>
-          <a:p>
-            <a:pPr indent="0" marL="0">
-              <a:buNone/>
-            </a:pPr>
-            <a:r>
-              <a:rPr lang="en-US" sz="1400" b="1" dirty="0">
-                <a:solidFill>
-                  <a:srgbClr val="000000"/>
-                </a:solidFill>
-                <a:latin typeface="Meiryo UI" pitchFamily="34" charset="0"/>
-                <a:ea typeface="Meiryo UI" pitchFamily="34" charset="-122"/>
-                <a:cs typeface="Meiryo UI" pitchFamily="34" charset="-120"/>
-              </a:rPr>
-              <a:t>Phase 2　6〜10年目</a:t>
-            </a:r>
-            <a:endParaRPr lang="en-US" sz="1400" dirty="0"/>
-          </a:p>
-        </p:txBody>
-      </p:sp>
-      <p:sp>
-        <p:nvSpPr>
-          <p:cNvPr id="10" name="Text 7"/>
-          <p:cNvSpPr/>
-          <p:nvPr/>
-        </p:nvSpPr>
-        <p:spPr>
-          <a:xfrm>
-            <a:off x="3529584" y="2468880"/>
-            <a:ext cx="2139696" cy="914400"/>
-          </a:xfrm>
-          <a:prstGeom prst="rect">
-            <a:avLst/>
-          </a:prstGeom>
-          <a:noFill/>
-          <a:ln/>
-        </p:spPr>
-        <p:txBody>
-          <a:bodyPr wrap="square" rtlCol="0" anchor="ctr"/>
-          <a:lstStyle/>
-          <a:p>
-            <a:pPr indent="0" marL="0">
-              <a:lnSpc>
-                <a:spcPct val="110000"/>
-              </a:lnSpc>
-              <a:buNone/>
-            </a:pPr>
-            <a:r>
-              <a:rPr lang="en-US" sz="1400" b="1" dirty="0">
-                <a:solidFill>
-                  <a:srgbClr val="000000"/>
-                </a:solidFill>
-                <a:latin typeface="Meiryo UI" pitchFamily="34" charset="0"/>
-                <a:ea typeface="Meiryo UI" pitchFamily="34" charset="-122"/>
-                <a:cs typeface="Meiryo UI" pitchFamily="34" charset="-120"/>
-              </a:rPr>
-              <a:t>証券代行・</a:t>
-            </a:r>
-            <a:endParaRPr lang="en-US" sz="1400" dirty="0"/>
-          </a:p>
-          <a:p>
-            <a:pPr indent="0" marL="0">
-              <a:lnSpc>
-                <a:spcPct val="110000"/>
-              </a:lnSpc>
-              <a:buNone/>
-            </a:pPr>
-            <a:r>
-              <a:rPr lang="en-US" sz="1400" b="1" dirty="0">
-                <a:solidFill>
-                  <a:srgbClr val="000000"/>
-                </a:solidFill>
-                <a:latin typeface="Meiryo UI" pitchFamily="34" charset="0"/>
-                <a:ea typeface="Meiryo UI" pitchFamily="34" charset="-122"/>
-                <a:cs typeface="Meiryo UI" pitchFamily="34" charset="-120"/>
-              </a:rPr>
-              <a:t>年金信託業務部門</a:t>
-            </a:r>
-            <a:endParaRPr lang="en-US" sz="1400" dirty="0"/>
-          </a:p>
-        </p:txBody>
-      </p:sp>
-      <p:pic>
-        <p:nvPicPr>
-          <p:cNvPr id="11" name="Image 1" descr="icon_arrow_dark.png">    </p:cNvPr>
-          <p:cNvPicPr>
-            <a:picLocks noChangeAspect="1"/>
-          </p:cNvPicPr>
-          <p:nvPr/>
-        </p:nvPicPr>
-        <p:blipFill>
-          <a:blip r:embed="rId2"/>
-          <a:stretch>
-            <a:fillRect/>
-          </a:stretch>
-        </p:blipFill>
-        <p:spPr>
-          <a:xfrm>
-            <a:off x="5852160" y="2615184"/>
-            <a:ext cx="219456" cy="256032"/>
-          </a:xfrm>
-          <a:prstGeom prst="rect">
-            <a:avLst/>
-          </a:prstGeom>
-        </p:spPr>
-      </p:pic>
-      <p:sp>
-        <p:nvSpPr>
-          <p:cNvPr id="12" name="Shape 8"/>
-          <p:cNvSpPr/>
-          <p:nvPr/>
-        </p:nvSpPr>
-        <p:spPr>
-          <a:xfrm>
-            <a:off x="6089904" y="1965960"/>
-            <a:ext cx="2468880" cy="1554480"/>
-          </a:xfrm>
-          <a:prstGeom prst="roundRect">
-            <a:avLst>
-              <a:gd name="adj" fmla="val 5882"/>
-            </a:avLst>
-          </a:prstGeom>
-          <a:solidFill>
-            <a:srgbClr val="FFFFFF"/>
-          </a:solidFill>
-          <a:ln w="12700">
-            <a:solidFill>
-              <a:srgbClr val="D0D5DD"/>
-            </a:solidFill>
-            <a:prstDash val="solid"/>
-          </a:ln>
-        </p:spPr>
-      </p:sp>
-      <p:sp>
-        <p:nvSpPr>
-          <p:cNvPr id="13" name="Text 9"/>
-          <p:cNvSpPr/>
-          <p:nvPr/>
-        </p:nvSpPr>
-        <p:spPr>
-          <a:xfrm>
-            <a:off x="6254496" y="2112264"/>
-            <a:ext cx="2139696" cy="320040"/>
-          </a:xfrm>
-          <a:prstGeom prst="rect">
-            <a:avLst/>
-          </a:prstGeom>
-          <a:noFill/>
-          <a:ln/>
-        </p:spPr>
-        <p:txBody>
-          <a:bodyPr wrap="square" rtlCol="0" anchor="ctr"/>
-          <a:lstStyle/>
-          <a:p>
-            <a:pPr indent="0" marL="0">
-              <a:buNone/>
-            </a:pPr>
-            <a:r>
-              <a:rPr lang="en-US" sz="1400" b="1" dirty="0">
-                <a:solidFill>
-                  <a:srgbClr val="000000"/>
-                </a:solidFill>
-                <a:latin typeface="Meiryo UI" pitchFamily="34" charset="0"/>
-                <a:ea typeface="Meiryo UI" pitchFamily="34" charset="-122"/>
-                <a:cs typeface="Meiryo UI" pitchFamily="34" charset="-120"/>
-              </a:rPr>
-              <a:t>Phase 3　11〜15年目</a:t>
-            </a:r>
-            <a:endParaRPr lang="en-US" sz="1400" dirty="0"/>
-          </a:p>
-        </p:txBody>
-      </p:sp>
-      <p:sp>
-        <p:nvSpPr>
-          <p:cNvPr id="14" name="Text 10"/>
-          <p:cNvSpPr/>
-          <p:nvPr/>
-        </p:nvSpPr>
-        <p:spPr>
-          <a:xfrm>
-            <a:off x="6254496" y="2468880"/>
-            <a:ext cx="2139696" cy="914400"/>
-          </a:xfrm>
-          <a:prstGeom prst="rect">
-            <a:avLst/>
-          </a:prstGeom>
-          <a:noFill/>
-          <a:ln/>
-        </p:spPr>
-        <p:txBody>
-          <a:bodyPr wrap="square" rtlCol="0" anchor="ctr"/>
-          <a:lstStyle/>
-          <a:p>
-            <a:pPr indent="0" marL="0">
-              <a:lnSpc>
-                <a:spcPct val="110000"/>
-              </a:lnSpc>
-              <a:buNone/>
-            </a:pPr>
-            <a:r>
-              <a:rPr lang="en-US" sz="1400" b="1" dirty="0">
-                <a:solidFill>
-                  <a:srgbClr val="000000"/>
-                </a:solidFill>
-                <a:latin typeface="Meiryo UI" pitchFamily="34" charset="0"/>
-                <a:ea typeface="Meiryo UI" pitchFamily="34" charset="-122"/>
-                <a:cs typeface="Meiryo UI" pitchFamily="34" charset="-120"/>
-              </a:rPr>
-              <a:t>事業承継・</a:t>
-            </a:r>
-            <a:endParaRPr lang="en-US" sz="1400" dirty="0"/>
-          </a:p>
-          <a:p>
-            <a:pPr indent="0" marL="0">
-              <a:lnSpc>
-                <a:spcPct val="110000"/>
-              </a:lnSpc>
-              <a:buNone/>
-            </a:pPr>
-            <a:r>
-              <a:rPr lang="en-US" sz="1400" b="1" dirty="0">
-                <a:solidFill>
-                  <a:srgbClr val="000000"/>
-                </a:solidFill>
-                <a:latin typeface="Meiryo UI" pitchFamily="34" charset="0"/>
-                <a:ea typeface="Meiryo UI" pitchFamily="34" charset="-122"/>
-                <a:cs typeface="Meiryo UI" pitchFamily="34" charset="-120"/>
-              </a:rPr>
-              <a:t>M&amp;Aアドバイザリー</a:t>
-            </a:r>
-            <a:endParaRPr lang="en-US" sz="1400" dirty="0"/>
-          </a:p>
-        </p:txBody>
-      </p:sp>
-      <p:pic>
-        <p:nvPicPr>
-          <p:cNvPr id="15" name="Image 2" descr="icon_arrow_dark.png">    </p:cNvPr>
-          <p:cNvPicPr>
-            <a:picLocks noChangeAspect="1"/>
-          </p:cNvPicPr>
-          <p:nvPr/>
-        </p:nvPicPr>
-        <p:blipFill>
-          <a:blip r:embed="rId3"/>
-          <a:stretch>
-            <a:fillRect/>
-          </a:stretch>
-        </p:blipFill>
-        <p:spPr>
-          <a:xfrm>
-            <a:off x="8577072" y="2615184"/>
-            <a:ext cx="219456" cy="256032"/>
-          </a:xfrm>
-          <a:prstGeom prst="rect">
-            <a:avLst/>
-          </a:prstGeom>
-        </p:spPr>
-      </p:pic>
-      <p:sp>
-        <p:nvSpPr>
-          <p:cNvPr id="16" name="Shape 11"/>
-          <p:cNvSpPr/>
-          <p:nvPr/>
-        </p:nvSpPr>
-        <p:spPr>
-          <a:xfrm>
-            <a:off x="8814816" y="1965960"/>
-            <a:ext cx="2468880" cy="1554480"/>
-          </a:xfrm>
-          <a:prstGeom prst="roundRect">
-            <a:avLst>
-              <a:gd name="adj" fmla="val 5882"/>
-            </a:avLst>
-          </a:prstGeom>
-          <a:solidFill>
-            <a:srgbClr val="FFFFFF"/>
-          </a:solidFill>
-          <a:ln w="12700">
-            <a:solidFill>
-              <a:srgbClr val="D0D5DD"/>
-            </a:solidFill>
-            <a:prstDash val="solid"/>
-          </a:ln>
-        </p:spPr>
-      </p:sp>
-      <p:sp>
-        <p:nvSpPr>
-          <p:cNvPr id="17" name="Text 12"/>
-          <p:cNvSpPr/>
-          <p:nvPr/>
-        </p:nvSpPr>
-        <p:spPr>
-          <a:xfrm>
-            <a:off x="8979408" y="2112264"/>
-            <a:ext cx="2139696" cy="320040"/>
-          </a:xfrm>
-          <a:prstGeom prst="rect">
-            <a:avLst/>
-          </a:prstGeom>
-          <a:noFill/>
-          <a:ln/>
-        </p:spPr>
-        <p:txBody>
-          <a:bodyPr wrap="square" rtlCol="0" anchor="ctr"/>
-          <a:lstStyle/>
-          <a:p>
-            <a:pPr indent="0" marL="0">
-              <a:buNone/>
-            </a:pPr>
-            <a:r>
-              <a:rPr lang="en-US" sz="1400" b="1" dirty="0">
-                <a:solidFill>
-                  <a:srgbClr val="000000"/>
-                </a:solidFill>
-                <a:latin typeface="Meiryo UI" pitchFamily="34" charset="0"/>
-                <a:ea typeface="Meiryo UI" pitchFamily="34" charset="-122"/>
-                <a:cs typeface="Meiryo UI" pitchFamily="34" charset="-120"/>
-              </a:rPr>
-              <a:t>Phase 4　16年目〜</a:t>
-            </a:r>
-            <a:endParaRPr lang="en-US" sz="1400" dirty="0"/>
-          </a:p>
-        </p:txBody>
-      </p:sp>
-      <p:sp>
-        <p:nvSpPr>
-          <p:cNvPr id="18" name="Text 13"/>
-          <p:cNvSpPr/>
-          <p:nvPr/>
-        </p:nvSpPr>
-        <p:spPr>
-          <a:xfrm>
-            <a:off x="8979408" y="2468880"/>
-            <a:ext cx="2139696" cy="914400"/>
-          </a:xfrm>
-          <a:prstGeom prst="rect">
-            <a:avLst/>
-          </a:prstGeom>
-          <a:noFill/>
-          <a:ln/>
-        </p:spPr>
-        <p:txBody>
-          <a:bodyPr wrap="square" rtlCol="0" anchor="ctr"/>
-          <a:lstStyle/>
-          <a:p>
-            <a:pPr indent="0" marL="0">
-              <a:lnSpc>
-                <a:spcPct val="110000"/>
-              </a:lnSpc>
-              <a:buNone/>
-            </a:pPr>
-            <a:r>
-              <a:rPr lang="en-US" sz="1400" b="1" dirty="0">
-                <a:solidFill>
-                  <a:srgbClr val="000000"/>
-                </a:solidFill>
-                <a:latin typeface="Meiryo UI" pitchFamily="34" charset="0"/>
-                <a:ea typeface="Meiryo UI" pitchFamily="34" charset="-122"/>
-                <a:cs typeface="Meiryo UI" pitchFamily="34" charset="-120"/>
-              </a:rPr>
-              <a:t>プライベートバンキング／</a:t>
-            </a:r>
-            <a:endParaRPr lang="en-US" sz="1400" dirty="0"/>
-          </a:p>
-          <a:p>
-            <a:pPr indent="0" marL="0">
-              <a:lnSpc>
-                <a:spcPct val="110000"/>
-              </a:lnSpc>
-              <a:buNone/>
-            </a:pPr>
-            <a:r>
-              <a:rPr lang="en-US" sz="1400" b="1" dirty="0">
-                <a:solidFill>
-                  <a:srgbClr val="000000"/>
-                </a:solidFill>
-                <a:latin typeface="Meiryo UI" pitchFamily="34" charset="0"/>
-                <a:ea typeface="Meiryo UI" pitchFamily="34" charset="-122"/>
-                <a:cs typeface="Meiryo UI" pitchFamily="34" charset="-120"/>
-              </a:rPr>
-              <a:t>資産運用会社</a:t>
-            </a:r>
-            <a:endParaRPr lang="en-US" sz="1400" dirty="0"/>
-          </a:p>
-        </p:txBody>
-      </p:sp>
-      <p:sp>
-        <p:nvSpPr>
-          <p:cNvPr id="19" name="Shape 14"/>
-          <p:cNvSpPr/>
-          <p:nvPr/>
-        </p:nvSpPr>
-        <p:spPr>
-          <a:xfrm>
-            <a:off x="640080" y="3886200"/>
-            <a:ext cx="10881360" cy="2331720"/>
+            <a:pPr indent="0" marL="0">
+              <a:buNone/>
+            </a:pPr>
+            <a:r>
+              <a:rPr lang="en-US" sz="2800" b="1" dirty="0">
+                <a:solidFill>
+                  <a:srgbClr val="000000"/>
+                </a:solidFill>
+                <a:latin typeface="Meiryo UI" pitchFamily="34" charset="0"/>
+                <a:ea typeface="Meiryo UI" pitchFamily="34" charset="-122"/>
+                <a:cs typeface="Meiryo UI" pitchFamily="34" charset="-120"/>
+              </a:rPr>
+              <a:t>3パターンの比較と次の一歩</a:t>
+            </a:r>
+            <a:endParaRPr lang="en-US" sz="2800" dirty="0"/>
+          </a:p>
+        </p:txBody>
+      </p:sp>
+      <p:graphicFrame>
+        <p:nvGraphicFramePr>
+          <p:cNvPr id="8" name="Table 0"/>
+          <p:cNvGraphicFramePr>
+            <a:graphicFrameLocks noGrp="1"/>
+          </p:cNvGraphicFramePr>
+          <p:nvPr>
+            <p:extLst>
+              <p:ext uri="{D42A27DB-BD31-4B8C-83A1-F6EECF244321}">
+                <p14:modId xmlns:p14="http://schemas.microsoft.com/office/powerpoint/2010/main" val="1579011935"/>
+              </p:ext>
+            </p:extLst>
+          </p:nvPr>
+        </p:nvGraphicFramePr>
+        <p:xfrm>
+          <a:off x="548640" y="1143000"/>
+          <a:ext cx="11064240" cy="2880360"/>
+        </p:xfrm>
+        <a:graphic>
+          <a:graphicData uri="http://schemas.openxmlformats.org/drawingml/2006/table">
+            <a:tbl>
+              <a:tblPr/>
+              <a:tblGrid>
+                <a:gridCol w="1920240"/>
+                <a:gridCol w="3044952"/>
+                <a:gridCol w="3044952"/>
+                <a:gridCol w="3054096"/>
+              </a:tblGrid>
+              <a:tr h="576072">
+                <a:tc>
+                  <a:txBody>
+                    <a:bodyPr/>
+                    <a:lstStyle/>
+                    <a:p>
+                      <a:pPr indent="0" marL="0">
+                        <a:buNone/>
+                      </a:pPr>
+                      <a:endParaRPr lang="en-US" sz="1200" dirty="0">
+                        <a:latin typeface="Meiryo UI" charset="0"/>
+                        <a:ea typeface="Meiryo UI" charset="0"/>
+                        <a:cs typeface="Meiryo UI" charset="0"/>
+                      </a:endParaRPr>
+                    </a:p>
+                  </a:txBody>
+                  <a:tcPr marL="91440" marR="91440" marT="45720" marB="45720">
+                    <a:lnL w="12700" cap="flat" cmpd="sng" algn="ctr">
+                      <a:solidFill>
+                        <a:srgbClr val="D0D5DD"/>
+                      </a:solidFill>
+                      <a:prstDash val="solid"/>
+                      <a:round/>
+                      <a:headEnd type="none" w="med" len="med"/>
+                      <a:tailEnd type="none" w="med" len="med"/>
+                    </a:lnL>
+                    <a:lnR w="12700" cap="flat" cmpd="sng" algn="ctr">
+                      <a:solidFill>
+                        <a:srgbClr val="D0D5DD"/>
+                      </a:solidFill>
+                      <a:prstDash val="solid"/>
+                      <a:round/>
+                      <a:headEnd type="none" w="med" len="med"/>
+                      <a:tailEnd type="none" w="med" len="med"/>
+                    </a:lnR>
+                    <a:lnT w="12700" cap="flat" cmpd="sng" algn="ctr">
+                      <a:solidFill>
+                        <a:srgbClr val="D0D5DD"/>
+                      </a:solidFill>
+                      <a:prstDash val="solid"/>
+                      <a:round/>
+                      <a:headEnd type="none" w="med" len="med"/>
+                      <a:tailEnd type="none" w="med" len="med"/>
+                    </a:lnT>
+                    <a:lnB w="12700" cap="flat" cmpd="sng" algn="ctr">
+                      <a:solidFill>
+                        <a:srgbClr val="D0D5DD"/>
+                      </a:solidFill>
+                      <a:prstDash val="solid"/>
+                      <a:round/>
+                      <a:headEnd type="none" w="med" len="med"/>
+                      <a:tailEnd type="none" w="med" len="med"/>
+                    </a:lnB>
+                    <a:solidFill>
+                      <a:srgbClr val="FFFFFF"/>
+                    </a:solidFill>
+                  </a:tcPr>
+                </a:tc>
+                <a:tc>
+                  <a:txBody>
+                    <a:bodyPr/>
+                    <a:lstStyle/>
+                    <a:p>
+                      <a:pPr algn="ctr" indent="0" marL="0">
+                        <a:buNone/>
+                      </a:pPr>
+                      <a:r>
+                        <a:rPr lang="en-US" sz="1400" b="1" dirty="0">
+                          <a:solidFill>
+                            <a:srgbClr val="FFFFFF"/>
+                          </a:solidFill>
+                          <a:latin typeface="Meiryo UI" pitchFamily="34" charset="0"/>
+                          <a:ea typeface="Meiryo UI" pitchFamily="34" charset="-122"/>
+                          <a:cs typeface="Meiryo UI" pitchFamily="34" charset="-120"/>
+                        </a:rPr>
+                        <a:t>アセットマネジメント業務を中心とするキャリア</a:t>
+                      </a:r>
+                      <a:endParaRPr lang="en-US" sz="1400" dirty="0">
+                        <a:latin typeface="Meiryo UI" charset="0"/>
+                        <a:ea typeface="Meiryo UI" charset="0"/>
+                        <a:cs typeface="Meiryo UI" charset="0"/>
+                      </a:endParaRPr>
+                    </a:p>
+                  </a:txBody>
+                  <a:tcPr marL="91440" marR="91440" marT="45720" marB="45720" anchor="ctr">
+                    <a:lnL w="12700" cap="flat" cmpd="sng" algn="ctr">
+                      <a:solidFill>
+                        <a:srgbClr val="D0D5DD"/>
+                      </a:solidFill>
+                      <a:prstDash val="solid"/>
+                      <a:round/>
+                      <a:headEnd type="none" w="med" len="med"/>
+                      <a:tailEnd type="none" w="med" len="med"/>
+                    </a:lnL>
+                    <a:lnR w="12700" cap="flat" cmpd="sng" algn="ctr">
+                      <a:solidFill>
+                        <a:srgbClr val="D0D5DD"/>
+                      </a:solidFill>
+                      <a:prstDash val="solid"/>
+                      <a:round/>
+                      <a:headEnd type="none" w="med" len="med"/>
+                      <a:tailEnd type="none" w="med" len="med"/>
+                    </a:lnR>
+                    <a:lnT w="12700" cap="flat" cmpd="sng" algn="ctr">
+                      <a:solidFill>
+                        <a:srgbClr val="D0D5DD"/>
+                      </a:solidFill>
+                      <a:prstDash val="solid"/>
+                      <a:round/>
+                      <a:headEnd type="none" w="med" len="med"/>
+                      <a:tailEnd type="none" w="med" len="med"/>
+                    </a:lnT>
+                    <a:lnB w="12700" cap="flat" cmpd="sng" algn="ctr">
+                      <a:solidFill>
+                        <a:srgbClr val="D0D5DD"/>
+                      </a:solidFill>
+                      <a:prstDash val="solid"/>
+                      <a:round/>
+                      <a:headEnd type="none" w="med" len="med"/>
+                      <a:tailEnd type="none" w="med" len="med"/>
+                    </a:lnB>
+                    <a:solidFill>
+                      <a:srgbClr val="1E2761"/>
+                    </a:solidFill>
+                  </a:tcPr>
+                </a:tc>
+                <a:tc>
+                  <a:txBody>
+                    <a:bodyPr/>
+                    <a:lstStyle/>
+                    <a:p>
+                      <a:pPr algn="ctr" indent="0" marL="0">
+                        <a:buNone/>
+                      </a:pPr>
+                      <a:r>
+                        <a:rPr lang="en-US" sz="1400" b="1" dirty="0">
+                          <a:solidFill>
+                            <a:srgbClr val="FFFFFF"/>
+                          </a:solidFill>
+                          <a:latin typeface="Meiryo UI" pitchFamily="34" charset="0"/>
+                          <a:ea typeface="Meiryo UI" pitchFamily="34" charset="-122"/>
+                          <a:cs typeface="Meiryo UI" pitchFamily="34" charset="-120"/>
+                        </a:rPr>
+                        <a:t>信託銀行の運用業務を中心とするキャリア</a:t>
+                      </a:r>
+                      <a:endParaRPr lang="en-US" sz="1400" dirty="0">
+                        <a:latin typeface="Meiryo UI" charset="0"/>
+                        <a:ea typeface="Meiryo UI" charset="0"/>
+                        <a:cs typeface="Meiryo UI" charset="0"/>
+                      </a:endParaRPr>
+                    </a:p>
+                  </a:txBody>
+                  <a:tcPr marL="91440" marR="91440" marT="45720" marB="45720" anchor="ctr">
+                    <a:lnL w="12700" cap="flat" cmpd="sng" algn="ctr">
+                      <a:solidFill>
+                        <a:srgbClr val="D0D5DD"/>
+                      </a:solidFill>
+                      <a:prstDash val="solid"/>
+                      <a:round/>
+                      <a:headEnd type="none" w="med" len="med"/>
+                      <a:tailEnd type="none" w="med" len="med"/>
+                    </a:lnL>
+                    <a:lnR w="12700" cap="flat" cmpd="sng" algn="ctr">
+                      <a:solidFill>
+                        <a:srgbClr val="D0D5DD"/>
+                      </a:solidFill>
+                      <a:prstDash val="solid"/>
+                      <a:round/>
+                      <a:headEnd type="none" w="med" len="med"/>
+                      <a:tailEnd type="none" w="med" len="med"/>
+                    </a:lnR>
+                    <a:lnT w="12700" cap="flat" cmpd="sng" algn="ctr">
+                      <a:solidFill>
+                        <a:srgbClr val="D0D5DD"/>
+                      </a:solidFill>
+                      <a:prstDash val="solid"/>
+                      <a:round/>
+                      <a:headEnd type="none" w="med" len="med"/>
+                      <a:tailEnd type="none" w="med" len="med"/>
+                    </a:lnT>
+                    <a:lnB w="12700" cap="flat" cmpd="sng" algn="ctr">
+                      <a:solidFill>
+                        <a:srgbClr val="D0D5DD"/>
+                      </a:solidFill>
+                      <a:prstDash val="solid"/>
+                      <a:round/>
+                      <a:headEnd type="none" w="med" len="med"/>
+                      <a:tailEnd type="none" w="med" len="med"/>
+                    </a:lnB>
+                    <a:solidFill>
+                      <a:srgbClr val="2E6F52"/>
+                    </a:solidFill>
+                  </a:tcPr>
+                </a:tc>
+                <a:tc>
+                  <a:txBody>
+                    <a:bodyPr/>
+                    <a:lstStyle/>
+                    <a:p>
+                      <a:pPr algn="ctr" indent="0" marL="0">
+                        <a:buNone/>
+                      </a:pPr>
+                      <a:r>
+                        <a:rPr lang="en-US" sz="1400" b="1" dirty="0">
+                          <a:solidFill>
+                            <a:srgbClr val="FFFFFF"/>
+                          </a:solidFill>
+                          <a:latin typeface="Meiryo UI" pitchFamily="34" charset="0"/>
+                          <a:ea typeface="Meiryo UI" pitchFamily="34" charset="-122"/>
+                          <a:cs typeface="Meiryo UI" pitchFamily="34" charset="-120"/>
+                        </a:rPr>
+                        <a:t>銀行内で完結する運用キャリア（ゆうちょ銀行型）</a:t>
+                      </a:r>
+                      <a:endParaRPr lang="en-US" sz="1400" dirty="0">
+                        <a:latin typeface="Meiryo UI" charset="0"/>
+                        <a:ea typeface="Meiryo UI" charset="0"/>
+                        <a:cs typeface="Meiryo UI" charset="0"/>
+                      </a:endParaRPr>
+                    </a:p>
+                  </a:txBody>
+                  <a:tcPr marL="91440" marR="91440" marT="45720" marB="45720" anchor="ctr">
+                    <a:lnL w="12700" cap="flat" cmpd="sng" algn="ctr">
+                      <a:solidFill>
+                        <a:srgbClr val="D0D5DD"/>
+                      </a:solidFill>
+                      <a:prstDash val="solid"/>
+                      <a:round/>
+                      <a:headEnd type="none" w="med" len="med"/>
+                      <a:tailEnd type="none" w="med" len="med"/>
+                    </a:lnL>
+                    <a:lnR w="12700" cap="flat" cmpd="sng" algn="ctr">
+                      <a:solidFill>
+                        <a:srgbClr val="D0D5DD"/>
+                      </a:solidFill>
+                      <a:prstDash val="solid"/>
+                      <a:round/>
+                      <a:headEnd type="none" w="med" len="med"/>
+                      <a:tailEnd type="none" w="med" len="med"/>
+                    </a:lnR>
+                    <a:lnT w="12700" cap="flat" cmpd="sng" algn="ctr">
+                      <a:solidFill>
+                        <a:srgbClr val="D0D5DD"/>
+                      </a:solidFill>
+                      <a:prstDash val="solid"/>
+                      <a:round/>
+                      <a:headEnd type="none" w="med" len="med"/>
+                      <a:tailEnd type="none" w="med" len="med"/>
+                    </a:lnT>
+                    <a:lnB w="12700" cap="flat" cmpd="sng" algn="ctr">
+                      <a:solidFill>
+                        <a:srgbClr val="D0D5DD"/>
+                      </a:solidFill>
+                      <a:prstDash val="solid"/>
+                      <a:round/>
+                      <a:headEnd type="none" w="med" len="med"/>
+                      <a:tailEnd type="none" w="med" len="med"/>
+                    </a:lnB>
+                    <a:solidFill>
+                      <a:srgbClr val="8A4B1E"/>
+                    </a:solidFill>
+                  </a:tcPr>
+                </a:tc>
+              </a:tr>
+              <a:tr h="576072">
+                <a:tc>
+                  <a:txBody>
+                    <a:bodyPr/>
+                    <a:lstStyle/>
+                    <a:p>
+                      <a:pPr algn="l" indent="0" marL="0">
+                        <a:buNone/>
+                      </a:pPr>
+                      <a:r>
+                        <a:rPr lang="en-US" sz="1300" b="1" dirty="0">
+                          <a:solidFill>
+                            <a:srgbClr val="000000"/>
+                          </a:solidFill>
+                          <a:latin typeface="Meiryo UI" pitchFamily="34" charset="0"/>
+                          <a:ea typeface="Meiryo UI" pitchFamily="34" charset="-122"/>
+                          <a:cs typeface="Meiryo UI" pitchFamily="34" charset="-120"/>
+                        </a:rPr>
+                        <a:t>部署の異動</a:t>
+                      </a:r>
+                      <a:endParaRPr lang="en-US" sz="1300" dirty="0">
+                        <a:latin typeface="Meiryo UI" charset="0"/>
+                        <a:ea typeface="Meiryo UI" charset="0"/>
+                        <a:cs typeface="Meiryo UI" charset="0"/>
+                      </a:endParaRPr>
+                    </a:p>
+                  </a:txBody>
+                  <a:tcPr marL="91440" marR="91440" marT="45720" marB="45720" anchor="ctr">
+                    <a:lnL w="12700" cap="flat" cmpd="sng" algn="ctr">
+                      <a:solidFill>
+                        <a:srgbClr val="D0D5DD"/>
+                      </a:solidFill>
+                      <a:prstDash val="solid"/>
+                      <a:round/>
+                      <a:headEnd type="none" w="med" len="med"/>
+                      <a:tailEnd type="none" w="med" len="med"/>
+                    </a:lnL>
+                    <a:lnR w="12700" cap="flat" cmpd="sng" algn="ctr">
+                      <a:solidFill>
+                        <a:srgbClr val="D0D5DD"/>
+                      </a:solidFill>
+                      <a:prstDash val="solid"/>
+                      <a:round/>
+                      <a:headEnd type="none" w="med" len="med"/>
+                      <a:tailEnd type="none" w="med" len="med"/>
+                    </a:lnR>
+                    <a:lnT w="12700" cap="flat" cmpd="sng" algn="ctr">
+                      <a:solidFill>
+                        <a:srgbClr val="D0D5DD"/>
+                      </a:solidFill>
+                      <a:prstDash val="solid"/>
+                      <a:round/>
+                      <a:headEnd type="none" w="med" len="med"/>
+                      <a:tailEnd type="none" w="med" len="med"/>
+                    </a:lnT>
+                    <a:lnB w="12700" cap="flat" cmpd="sng" algn="ctr">
+                      <a:solidFill>
+                        <a:srgbClr val="D0D5DD"/>
+                      </a:solidFill>
+                      <a:prstDash val="solid"/>
+                      <a:round/>
+                      <a:headEnd type="none" w="med" len="med"/>
+                      <a:tailEnd type="none" w="med" len="med"/>
+                    </a:lnB>
+                    <a:solidFill>
+                      <a:srgbClr val="F2F3F5"/>
+                    </a:solidFill>
+                  </a:tcPr>
+                </a:tc>
+                <a:tc>
+                  <a:txBody>
+                    <a:bodyPr/>
+                    <a:lstStyle/>
+                    <a:p>
+                      <a:pPr algn="l" indent="0" marL="0">
+                        <a:buNone/>
+                      </a:pPr>
+                      <a:r>
+                        <a:rPr lang="en-US" sz="1300" dirty="0">
+                          <a:solidFill>
+                            <a:srgbClr val="000000"/>
+                          </a:solidFill>
+                          <a:latin typeface="Meiryo UI" pitchFamily="34" charset="0"/>
+                          <a:ea typeface="Meiryo UI" pitchFamily="34" charset="-122"/>
+                          <a:cs typeface="Meiryo UI" pitchFamily="34" charset="-120"/>
+                        </a:rPr>
+                        <a:t>信託銀行とグループAM会社</a:t>
+                      </a:r>
+                      <a:endParaRPr lang="en-US" sz="1300" dirty="0">
+                        <a:latin typeface="Meiryo UI" charset="0"/>
+                        <a:ea typeface="Meiryo UI" charset="0"/>
+                        <a:cs typeface="Meiryo UI" charset="0"/>
+                      </a:endParaRPr>
+                    </a:p>
+                  </a:txBody>
+                  <a:tcPr marL="91440" marR="91440" marT="45720" marB="45720" anchor="ctr">
+                    <a:lnL w="12700" cap="flat" cmpd="sng" algn="ctr">
+                      <a:solidFill>
+                        <a:srgbClr val="D0D5DD"/>
+                      </a:solidFill>
+                      <a:prstDash val="solid"/>
+                      <a:round/>
+                      <a:headEnd type="none" w="med" len="med"/>
+                      <a:tailEnd type="none" w="med" len="med"/>
+                    </a:lnL>
+                    <a:lnR w="12700" cap="flat" cmpd="sng" algn="ctr">
+                      <a:solidFill>
+                        <a:srgbClr val="D0D5DD"/>
+                      </a:solidFill>
+                      <a:prstDash val="solid"/>
+                      <a:round/>
+                      <a:headEnd type="none" w="med" len="med"/>
+                      <a:tailEnd type="none" w="med" len="med"/>
+                    </a:lnR>
+                    <a:lnT w="12700" cap="flat" cmpd="sng" algn="ctr">
+                      <a:solidFill>
+                        <a:srgbClr val="D0D5DD"/>
+                      </a:solidFill>
+                      <a:prstDash val="solid"/>
+                      <a:round/>
+                      <a:headEnd type="none" w="med" len="med"/>
+                      <a:tailEnd type="none" w="med" len="med"/>
+                    </a:lnT>
+                    <a:lnB w="12700" cap="flat" cmpd="sng" algn="ctr">
+                      <a:solidFill>
+                        <a:srgbClr val="D0D5DD"/>
+                      </a:solidFill>
+                      <a:prstDash val="solid"/>
+                      <a:round/>
+                      <a:headEnd type="none" w="med" len="med"/>
+                      <a:tailEnd type="none" w="med" len="med"/>
+                    </a:lnB>
+                  </a:tcPr>
+                </a:tc>
+                <a:tc>
+                  <a:txBody>
+                    <a:bodyPr/>
+                    <a:lstStyle/>
+                    <a:p>
+                      <a:pPr algn="l" indent="0" marL="0">
+                        <a:buNone/>
+                      </a:pPr>
+                      <a:r>
+                        <a:rPr lang="en-US" sz="1300" dirty="0">
+                          <a:solidFill>
+                            <a:srgbClr val="000000"/>
+                          </a:solidFill>
+                          <a:latin typeface="Meiryo UI" pitchFamily="34" charset="0"/>
+                          <a:ea typeface="Meiryo UI" pitchFamily="34" charset="-122"/>
+                          <a:cs typeface="Meiryo UI" pitchFamily="34" charset="-120"/>
+                        </a:rPr>
+                        <a:t>信託銀行とグループAM会社</a:t>
+                      </a:r>
+                      <a:endParaRPr lang="en-US" sz="1300" dirty="0">
+                        <a:latin typeface="Meiryo UI" charset="0"/>
+                        <a:ea typeface="Meiryo UI" charset="0"/>
+                        <a:cs typeface="Meiryo UI" charset="0"/>
+                      </a:endParaRPr>
+                    </a:p>
+                  </a:txBody>
+                  <a:tcPr marL="91440" marR="91440" marT="45720" marB="45720" anchor="ctr">
+                    <a:lnL w="12700" cap="flat" cmpd="sng" algn="ctr">
+                      <a:solidFill>
+                        <a:srgbClr val="D0D5DD"/>
+                      </a:solidFill>
+                      <a:prstDash val="solid"/>
+                      <a:round/>
+                      <a:headEnd type="none" w="med" len="med"/>
+                      <a:tailEnd type="none" w="med" len="med"/>
+                    </a:lnL>
+                    <a:lnR w="12700" cap="flat" cmpd="sng" algn="ctr">
+                      <a:solidFill>
+                        <a:srgbClr val="D0D5DD"/>
+                      </a:solidFill>
+                      <a:prstDash val="solid"/>
+                      <a:round/>
+                      <a:headEnd type="none" w="med" len="med"/>
+                      <a:tailEnd type="none" w="med" len="med"/>
+                    </a:lnR>
+                    <a:lnT w="12700" cap="flat" cmpd="sng" algn="ctr">
+                      <a:solidFill>
+                        <a:srgbClr val="D0D5DD"/>
+                      </a:solidFill>
+                      <a:prstDash val="solid"/>
+                      <a:round/>
+                      <a:headEnd type="none" w="med" len="med"/>
+                      <a:tailEnd type="none" w="med" len="med"/>
+                    </a:lnT>
+                    <a:lnB w="12700" cap="flat" cmpd="sng" algn="ctr">
+                      <a:solidFill>
+                        <a:srgbClr val="D0D5DD"/>
+                      </a:solidFill>
+                      <a:prstDash val="solid"/>
+                      <a:round/>
+                      <a:headEnd type="none" w="med" len="med"/>
+                      <a:tailEnd type="none" w="med" len="med"/>
+                    </a:lnB>
+                  </a:tcPr>
+                </a:tc>
+                <a:tc>
+                  <a:txBody>
+                    <a:bodyPr/>
+                    <a:lstStyle/>
+                    <a:p>
+                      <a:pPr algn="l" indent="0" marL="0">
+                        <a:buNone/>
+                      </a:pPr>
+                      <a:r>
+                        <a:rPr lang="en-US" sz="1300" dirty="0">
+                          <a:solidFill>
+                            <a:srgbClr val="000000"/>
+                          </a:solidFill>
+                          <a:latin typeface="Meiryo UI" pitchFamily="34" charset="0"/>
+                          <a:ea typeface="Meiryo UI" pitchFamily="34" charset="-122"/>
+                          <a:cs typeface="Meiryo UI" pitchFamily="34" charset="-120"/>
+                        </a:rPr>
+                        <a:t>銀行内のみで完結</a:t>
+                      </a:r>
+                      <a:endParaRPr lang="en-US" sz="1300" dirty="0">
+                        <a:latin typeface="Meiryo UI" charset="0"/>
+                        <a:ea typeface="Meiryo UI" charset="0"/>
+                        <a:cs typeface="Meiryo UI" charset="0"/>
+                      </a:endParaRPr>
+                    </a:p>
+                  </a:txBody>
+                  <a:tcPr marL="91440" marR="91440" marT="45720" marB="45720" anchor="ctr">
+                    <a:lnL w="12700" cap="flat" cmpd="sng" algn="ctr">
+                      <a:solidFill>
+                        <a:srgbClr val="D0D5DD"/>
+                      </a:solidFill>
+                      <a:prstDash val="solid"/>
+                      <a:round/>
+                      <a:headEnd type="none" w="med" len="med"/>
+                      <a:tailEnd type="none" w="med" len="med"/>
+                    </a:lnL>
+                    <a:lnR w="12700" cap="flat" cmpd="sng" algn="ctr">
+                      <a:solidFill>
+                        <a:srgbClr val="D0D5DD"/>
+                      </a:solidFill>
+                      <a:prstDash val="solid"/>
+                      <a:round/>
+                      <a:headEnd type="none" w="med" len="med"/>
+                      <a:tailEnd type="none" w="med" len="med"/>
+                    </a:lnR>
+                    <a:lnT w="12700" cap="flat" cmpd="sng" algn="ctr">
+                      <a:solidFill>
+                        <a:srgbClr val="D0D5DD"/>
+                      </a:solidFill>
+                      <a:prstDash val="solid"/>
+                      <a:round/>
+                      <a:headEnd type="none" w="med" len="med"/>
+                      <a:tailEnd type="none" w="med" len="med"/>
+                    </a:lnT>
+                    <a:lnB w="12700" cap="flat" cmpd="sng" algn="ctr">
+                      <a:solidFill>
+                        <a:srgbClr val="D0D5DD"/>
+                      </a:solidFill>
+                      <a:prstDash val="solid"/>
+                      <a:round/>
+                      <a:headEnd type="none" w="med" len="med"/>
+                      <a:tailEnd type="none" w="med" len="med"/>
+                    </a:lnB>
+                  </a:tcPr>
+                </a:tc>
+              </a:tr>
+              <a:tr h="576072">
+                <a:tc>
+                  <a:txBody>
+                    <a:bodyPr/>
+                    <a:lstStyle/>
+                    <a:p>
+                      <a:pPr algn="l" indent="0" marL="0">
+                        <a:buNone/>
+                      </a:pPr>
+                      <a:r>
+                        <a:rPr lang="en-US" sz="1300" b="1" dirty="0">
+                          <a:solidFill>
+                            <a:srgbClr val="000000"/>
+                          </a:solidFill>
+                          <a:latin typeface="Meiryo UI" pitchFamily="34" charset="0"/>
+                          <a:ea typeface="Meiryo UI" pitchFamily="34" charset="-122"/>
+                          <a:cs typeface="Meiryo UI" pitchFamily="34" charset="-120"/>
+                        </a:rPr>
+                        <a:t>運用の「頭脳」役</a:t>
+                      </a:r>
+                      <a:endParaRPr lang="en-US" sz="1300" dirty="0">
+                        <a:latin typeface="Meiryo UI" charset="0"/>
+                        <a:ea typeface="Meiryo UI" charset="0"/>
+                        <a:cs typeface="Meiryo UI" charset="0"/>
+                      </a:endParaRPr>
+                    </a:p>
+                  </a:txBody>
+                  <a:tcPr marL="91440" marR="91440" marT="45720" marB="45720" anchor="ctr">
+                    <a:lnL w="12700" cap="flat" cmpd="sng" algn="ctr">
+                      <a:solidFill>
+                        <a:srgbClr val="D0D5DD"/>
+                      </a:solidFill>
+                      <a:prstDash val="solid"/>
+                      <a:round/>
+                      <a:headEnd type="none" w="med" len="med"/>
+                      <a:tailEnd type="none" w="med" len="med"/>
+                    </a:lnL>
+                    <a:lnR w="12700" cap="flat" cmpd="sng" algn="ctr">
+                      <a:solidFill>
+                        <a:srgbClr val="D0D5DD"/>
+                      </a:solidFill>
+                      <a:prstDash val="solid"/>
+                      <a:round/>
+                      <a:headEnd type="none" w="med" len="med"/>
+                      <a:tailEnd type="none" w="med" len="med"/>
+                    </a:lnR>
+                    <a:lnT w="12700" cap="flat" cmpd="sng" algn="ctr">
+                      <a:solidFill>
+                        <a:srgbClr val="D0D5DD"/>
+                      </a:solidFill>
+                      <a:prstDash val="solid"/>
+                      <a:round/>
+                      <a:headEnd type="none" w="med" len="med"/>
+                      <a:tailEnd type="none" w="med" len="med"/>
+                    </a:lnT>
+                    <a:lnB w="12700" cap="flat" cmpd="sng" algn="ctr">
+                      <a:solidFill>
+                        <a:srgbClr val="D0D5DD"/>
+                      </a:solidFill>
+                      <a:prstDash val="solid"/>
+                      <a:round/>
+                      <a:headEnd type="none" w="med" len="med"/>
+                      <a:tailEnd type="none" w="med" len="med"/>
+                    </a:lnB>
+                    <a:solidFill>
+                      <a:srgbClr val="F2F3F5"/>
+                    </a:solidFill>
+                  </a:tcPr>
+                </a:tc>
+                <a:tc>
+                  <a:txBody>
+                    <a:bodyPr/>
+                    <a:lstStyle/>
+                    <a:p>
+                      <a:pPr algn="l" indent="0" marL="0">
+                        <a:buNone/>
+                      </a:pPr>
+                      <a:r>
+                        <a:rPr lang="en-US" sz="1300" dirty="0">
+                          <a:solidFill>
+                            <a:srgbClr val="000000"/>
+                          </a:solidFill>
+                          <a:latin typeface="Meiryo UI" pitchFamily="34" charset="0"/>
+                          <a:ea typeface="Meiryo UI" pitchFamily="34" charset="-122"/>
+                          <a:cs typeface="Meiryo UI" pitchFamily="34" charset="-120"/>
+                        </a:rPr>
+                        <a:t>AM会社で自ら深く担う</a:t>
+                      </a:r>
+                      <a:endParaRPr lang="en-US" sz="1300" dirty="0">
+                        <a:latin typeface="Meiryo UI" charset="0"/>
+                        <a:ea typeface="Meiryo UI" charset="0"/>
+                        <a:cs typeface="Meiryo UI" charset="0"/>
+                      </a:endParaRPr>
+                    </a:p>
+                  </a:txBody>
+                  <a:tcPr marL="91440" marR="91440" marT="45720" marB="45720" anchor="ctr">
+                    <a:lnL w="12700" cap="flat" cmpd="sng" algn="ctr">
+                      <a:solidFill>
+                        <a:srgbClr val="D0D5DD"/>
+                      </a:solidFill>
+                      <a:prstDash val="solid"/>
+                      <a:round/>
+                      <a:headEnd type="none" w="med" len="med"/>
+                      <a:tailEnd type="none" w="med" len="med"/>
+                    </a:lnL>
+                    <a:lnR w="12700" cap="flat" cmpd="sng" algn="ctr">
+                      <a:solidFill>
+                        <a:srgbClr val="D0D5DD"/>
+                      </a:solidFill>
+                      <a:prstDash val="solid"/>
+                      <a:round/>
+                      <a:headEnd type="none" w="med" len="med"/>
+                      <a:tailEnd type="none" w="med" len="med"/>
+                    </a:lnR>
+                    <a:lnT w="12700" cap="flat" cmpd="sng" algn="ctr">
+                      <a:solidFill>
+                        <a:srgbClr val="D0D5DD"/>
+                      </a:solidFill>
+                      <a:prstDash val="solid"/>
+                      <a:round/>
+                      <a:headEnd type="none" w="med" len="med"/>
+                      <a:tailEnd type="none" w="med" len="med"/>
+                    </a:lnT>
+                    <a:lnB w="12700" cap="flat" cmpd="sng" algn="ctr">
+                      <a:solidFill>
+                        <a:srgbClr val="D0D5DD"/>
+                      </a:solidFill>
+                      <a:prstDash val="solid"/>
+                      <a:round/>
+                      <a:headEnd type="none" w="med" len="med"/>
+                      <a:tailEnd type="none" w="med" len="med"/>
+                    </a:lnB>
+                  </a:tcPr>
+                </a:tc>
+                <a:tc>
+                  <a:txBody>
+                    <a:bodyPr/>
+                    <a:lstStyle/>
+                    <a:p>
+                      <a:pPr algn="l" indent="0" marL="0">
+                        <a:buNone/>
+                      </a:pPr>
+                      <a:r>
+                        <a:rPr lang="en-US" sz="1300" dirty="0">
+                          <a:solidFill>
+                            <a:srgbClr val="000000"/>
+                          </a:solidFill>
+                          <a:latin typeface="Meiryo UI" pitchFamily="34" charset="0"/>
+                          <a:ea typeface="Meiryo UI" pitchFamily="34" charset="-122"/>
+                          <a:cs typeface="Meiryo UI" pitchFamily="34" charset="-120"/>
+                        </a:rPr>
+                        <a:t>信託銀行側から評価・選定を担う</a:t>
+                      </a:r>
+                      <a:endParaRPr lang="en-US" sz="1300" dirty="0">
+                        <a:latin typeface="Meiryo UI" charset="0"/>
+                        <a:ea typeface="Meiryo UI" charset="0"/>
+                        <a:cs typeface="Meiryo UI" charset="0"/>
+                      </a:endParaRPr>
+                    </a:p>
+                  </a:txBody>
+                  <a:tcPr marL="91440" marR="91440" marT="45720" marB="45720" anchor="ctr">
+                    <a:lnL w="12700" cap="flat" cmpd="sng" algn="ctr">
+                      <a:solidFill>
+                        <a:srgbClr val="D0D5DD"/>
+                      </a:solidFill>
+                      <a:prstDash val="solid"/>
+                      <a:round/>
+                      <a:headEnd type="none" w="med" len="med"/>
+                      <a:tailEnd type="none" w="med" len="med"/>
+                    </a:lnL>
+                    <a:lnR w="12700" cap="flat" cmpd="sng" algn="ctr">
+                      <a:solidFill>
+                        <a:srgbClr val="D0D5DD"/>
+                      </a:solidFill>
+                      <a:prstDash val="solid"/>
+                      <a:round/>
+                      <a:headEnd type="none" w="med" len="med"/>
+                      <a:tailEnd type="none" w="med" len="med"/>
+                    </a:lnR>
+                    <a:lnT w="12700" cap="flat" cmpd="sng" algn="ctr">
+                      <a:solidFill>
+                        <a:srgbClr val="D0D5DD"/>
+                      </a:solidFill>
+                      <a:prstDash val="solid"/>
+                      <a:round/>
+                      <a:headEnd type="none" w="med" len="med"/>
+                      <a:tailEnd type="none" w="med" len="med"/>
+                    </a:lnT>
+                    <a:lnB w="12700" cap="flat" cmpd="sng" algn="ctr">
+                      <a:solidFill>
+                        <a:srgbClr val="D0D5DD"/>
+                      </a:solidFill>
+                      <a:prstDash val="solid"/>
+                      <a:round/>
+                      <a:headEnd type="none" w="med" len="med"/>
+                      <a:tailEnd type="none" w="med" len="med"/>
+                    </a:lnB>
+                  </a:tcPr>
+                </a:tc>
+                <a:tc>
+                  <a:txBody>
+                    <a:bodyPr/>
+                    <a:lstStyle/>
+                    <a:p>
+                      <a:pPr algn="l" indent="0" marL="0">
+                        <a:buNone/>
+                      </a:pPr>
+                      <a:r>
+                        <a:rPr lang="en-US" sz="1300" dirty="0">
+                          <a:solidFill>
+                            <a:srgbClr val="000000"/>
+                          </a:solidFill>
+                          <a:latin typeface="Meiryo UI" pitchFamily="34" charset="0"/>
+                          <a:ea typeface="Meiryo UI" pitchFamily="34" charset="-122"/>
+                          <a:cs typeface="Meiryo UI" pitchFamily="34" charset="-120"/>
+                        </a:rPr>
+                        <a:t>銀行内で頭脳と金庫を兼ねる</a:t>
+                      </a:r>
+                      <a:endParaRPr lang="en-US" sz="1300" dirty="0">
+                        <a:latin typeface="Meiryo UI" charset="0"/>
+                        <a:ea typeface="Meiryo UI" charset="0"/>
+                        <a:cs typeface="Meiryo UI" charset="0"/>
+                      </a:endParaRPr>
+                    </a:p>
+                  </a:txBody>
+                  <a:tcPr marL="91440" marR="91440" marT="45720" marB="45720" anchor="ctr">
+                    <a:lnL w="12700" cap="flat" cmpd="sng" algn="ctr">
+                      <a:solidFill>
+                        <a:srgbClr val="D0D5DD"/>
+                      </a:solidFill>
+                      <a:prstDash val="solid"/>
+                      <a:round/>
+                      <a:headEnd type="none" w="med" len="med"/>
+                      <a:tailEnd type="none" w="med" len="med"/>
+                    </a:lnL>
+                    <a:lnR w="12700" cap="flat" cmpd="sng" algn="ctr">
+                      <a:solidFill>
+                        <a:srgbClr val="D0D5DD"/>
+                      </a:solidFill>
+                      <a:prstDash val="solid"/>
+                      <a:round/>
+                      <a:headEnd type="none" w="med" len="med"/>
+                      <a:tailEnd type="none" w="med" len="med"/>
+                    </a:lnR>
+                    <a:lnT w="12700" cap="flat" cmpd="sng" algn="ctr">
+                      <a:solidFill>
+                        <a:srgbClr val="D0D5DD"/>
+                      </a:solidFill>
+                      <a:prstDash val="solid"/>
+                      <a:round/>
+                      <a:headEnd type="none" w="med" len="med"/>
+                      <a:tailEnd type="none" w="med" len="med"/>
+                    </a:lnT>
+                    <a:lnB w="12700" cap="flat" cmpd="sng" algn="ctr">
+                      <a:solidFill>
+                        <a:srgbClr val="D0D5DD"/>
+                      </a:solidFill>
+                      <a:prstDash val="solid"/>
+                      <a:round/>
+                      <a:headEnd type="none" w="med" len="med"/>
+                      <a:tailEnd type="none" w="med" len="med"/>
+                    </a:lnB>
+                  </a:tcPr>
+                </a:tc>
+              </a:tr>
+              <a:tr h="576072">
+                <a:tc>
+                  <a:txBody>
+                    <a:bodyPr/>
+                    <a:lstStyle/>
+                    <a:p>
+                      <a:pPr algn="l" indent="0" marL="0">
+                        <a:buNone/>
+                      </a:pPr>
+                      <a:r>
+                        <a:rPr lang="en-US" sz="1300" b="1" dirty="0">
+                          <a:solidFill>
+                            <a:srgbClr val="000000"/>
+                          </a:solidFill>
+                          <a:latin typeface="Meiryo UI" pitchFamily="34" charset="0"/>
+                          <a:ea typeface="Meiryo UI" pitchFamily="34" charset="-122"/>
+                          <a:cs typeface="Meiryo UI" pitchFamily="34" charset="-120"/>
+                        </a:rPr>
+                        <a:t>強みとの接続</a:t>
+                      </a:r>
+                      <a:endParaRPr lang="en-US" sz="1300" dirty="0">
+                        <a:latin typeface="Meiryo UI" charset="0"/>
+                        <a:ea typeface="Meiryo UI" charset="0"/>
+                        <a:cs typeface="Meiryo UI" charset="0"/>
+                      </a:endParaRPr>
+                    </a:p>
+                  </a:txBody>
+                  <a:tcPr marL="91440" marR="91440" marT="45720" marB="45720" anchor="ctr">
+                    <a:lnL w="12700" cap="flat" cmpd="sng" algn="ctr">
+                      <a:solidFill>
+                        <a:srgbClr val="D0D5DD"/>
+                      </a:solidFill>
+                      <a:prstDash val="solid"/>
+                      <a:round/>
+                      <a:headEnd type="none" w="med" len="med"/>
+                      <a:tailEnd type="none" w="med" len="med"/>
+                    </a:lnL>
+                    <a:lnR w="12700" cap="flat" cmpd="sng" algn="ctr">
+                      <a:solidFill>
+                        <a:srgbClr val="D0D5DD"/>
+                      </a:solidFill>
+                      <a:prstDash val="solid"/>
+                      <a:round/>
+                      <a:headEnd type="none" w="med" len="med"/>
+                      <a:tailEnd type="none" w="med" len="med"/>
+                    </a:lnR>
+                    <a:lnT w="12700" cap="flat" cmpd="sng" algn="ctr">
+                      <a:solidFill>
+                        <a:srgbClr val="D0D5DD"/>
+                      </a:solidFill>
+                      <a:prstDash val="solid"/>
+                      <a:round/>
+                      <a:headEnd type="none" w="med" len="med"/>
+                      <a:tailEnd type="none" w="med" len="med"/>
+                    </a:lnT>
+                    <a:lnB w="12700" cap="flat" cmpd="sng" algn="ctr">
+                      <a:solidFill>
+                        <a:srgbClr val="D0D5DD"/>
+                      </a:solidFill>
+                      <a:prstDash val="solid"/>
+                      <a:round/>
+                      <a:headEnd type="none" w="med" len="med"/>
+                      <a:tailEnd type="none" w="med" len="med"/>
+                    </a:lnB>
+                    <a:solidFill>
+                      <a:srgbClr val="F2F3F5"/>
+                    </a:solidFill>
+                  </a:tcPr>
+                </a:tc>
+                <a:tc>
+                  <a:txBody>
+                    <a:bodyPr/>
+                    <a:lstStyle/>
+                    <a:p>
+                      <a:pPr algn="l" indent="0" marL="0">
+                        <a:buNone/>
+                      </a:pPr>
+                      <a:r>
+                        <a:rPr lang="en-US" sz="1300" dirty="0">
+                          <a:solidFill>
+                            <a:srgbClr val="000000"/>
+                          </a:solidFill>
+                          <a:latin typeface="Meiryo UI" pitchFamily="34" charset="0"/>
+                          <a:ea typeface="Meiryo UI" pitchFamily="34" charset="-122"/>
+                          <a:cs typeface="Meiryo UI" pitchFamily="34" charset="-120"/>
+                        </a:rPr>
+                        <a:t>財務分析力→投資判断に直結</a:t>
+                      </a:r>
+                      <a:endParaRPr lang="en-US" sz="1300" dirty="0">
+                        <a:latin typeface="Meiryo UI" charset="0"/>
+                        <a:ea typeface="Meiryo UI" charset="0"/>
+                        <a:cs typeface="Meiryo UI" charset="0"/>
+                      </a:endParaRPr>
+                    </a:p>
+                  </a:txBody>
+                  <a:tcPr marL="91440" marR="91440" marT="45720" marB="45720" anchor="ctr">
+                    <a:lnL w="12700" cap="flat" cmpd="sng" algn="ctr">
+                      <a:solidFill>
+                        <a:srgbClr val="D0D5DD"/>
+                      </a:solidFill>
+                      <a:prstDash val="solid"/>
+                      <a:round/>
+                      <a:headEnd type="none" w="med" len="med"/>
+                      <a:tailEnd type="none" w="med" len="med"/>
+                    </a:lnL>
+                    <a:lnR w="12700" cap="flat" cmpd="sng" algn="ctr">
+                      <a:solidFill>
+                        <a:srgbClr val="D0D5DD"/>
+                      </a:solidFill>
+                      <a:prstDash val="solid"/>
+                      <a:round/>
+                      <a:headEnd type="none" w="med" len="med"/>
+                      <a:tailEnd type="none" w="med" len="med"/>
+                    </a:lnR>
+                    <a:lnT w="12700" cap="flat" cmpd="sng" algn="ctr">
+                      <a:solidFill>
+                        <a:srgbClr val="D0D5DD"/>
+                      </a:solidFill>
+                      <a:prstDash val="solid"/>
+                      <a:round/>
+                      <a:headEnd type="none" w="med" len="med"/>
+                      <a:tailEnd type="none" w="med" len="med"/>
+                    </a:lnT>
+                    <a:lnB w="12700" cap="flat" cmpd="sng" algn="ctr">
+                      <a:solidFill>
+                        <a:srgbClr val="D0D5DD"/>
+                      </a:solidFill>
+                      <a:prstDash val="solid"/>
+                      <a:round/>
+                      <a:headEnd type="none" w="med" len="med"/>
+                      <a:tailEnd type="none" w="med" len="med"/>
+                    </a:lnB>
+                  </a:tcPr>
+                </a:tc>
+                <a:tc>
+                  <a:txBody>
+                    <a:bodyPr/>
+                    <a:lstStyle/>
+                    <a:p>
+                      <a:pPr algn="l" indent="0" marL="0">
+                        <a:buNone/>
+                      </a:pPr>
+                      <a:r>
+                        <a:rPr lang="en-US" sz="1300" dirty="0">
+                          <a:solidFill>
+                            <a:srgbClr val="000000"/>
+                          </a:solidFill>
+                          <a:latin typeface="Meiryo UI" pitchFamily="34" charset="0"/>
+                          <a:ea typeface="Meiryo UI" pitchFamily="34" charset="-122"/>
+                          <a:cs typeface="Meiryo UI" pitchFamily="34" charset="-120"/>
+                        </a:rPr>
+                        <a:t>企業法知識→信託の実務に直結</a:t>
+                      </a:r>
+                      <a:endParaRPr lang="en-US" sz="1300" dirty="0">
+                        <a:latin typeface="Meiryo UI" charset="0"/>
+                        <a:ea typeface="Meiryo UI" charset="0"/>
+                        <a:cs typeface="Meiryo UI" charset="0"/>
+                      </a:endParaRPr>
+                    </a:p>
+                  </a:txBody>
+                  <a:tcPr marL="91440" marR="91440" marT="45720" marB="45720" anchor="ctr">
+                    <a:lnL w="12700" cap="flat" cmpd="sng" algn="ctr">
+                      <a:solidFill>
+                        <a:srgbClr val="D0D5DD"/>
+                      </a:solidFill>
+                      <a:prstDash val="solid"/>
+                      <a:round/>
+                      <a:headEnd type="none" w="med" len="med"/>
+                      <a:tailEnd type="none" w="med" len="med"/>
+                    </a:lnL>
+                    <a:lnR w="12700" cap="flat" cmpd="sng" algn="ctr">
+                      <a:solidFill>
+                        <a:srgbClr val="D0D5DD"/>
+                      </a:solidFill>
+                      <a:prstDash val="solid"/>
+                      <a:round/>
+                      <a:headEnd type="none" w="med" len="med"/>
+                      <a:tailEnd type="none" w="med" len="med"/>
+                    </a:lnR>
+                    <a:lnT w="12700" cap="flat" cmpd="sng" algn="ctr">
+                      <a:solidFill>
+                        <a:srgbClr val="D0D5DD"/>
+                      </a:solidFill>
+                      <a:prstDash val="solid"/>
+                      <a:round/>
+                      <a:headEnd type="none" w="med" len="med"/>
+                      <a:tailEnd type="none" w="med" len="med"/>
+                    </a:lnT>
+                    <a:lnB w="12700" cap="flat" cmpd="sng" algn="ctr">
+                      <a:solidFill>
+                        <a:srgbClr val="D0D5DD"/>
+                      </a:solidFill>
+                      <a:prstDash val="solid"/>
+                      <a:round/>
+                      <a:headEnd type="none" w="med" len="med"/>
+                      <a:tailEnd type="none" w="med" len="med"/>
+                    </a:lnB>
+                  </a:tcPr>
+                </a:tc>
+                <a:tc>
+                  <a:txBody>
+                    <a:bodyPr/>
+                    <a:lstStyle/>
+                    <a:p>
+                      <a:pPr algn="l" indent="0" marL="0">
+                        <a:buNone/>
+                      </a:pPr>
+                      <a:r>
+                        <a:rPr lang="en-US" sz="1300" dirty="0">
+                          <a:solidFill>
+                            <a:srgbClr val="000000"/>
+                          </a:solidFill>
+                          <a:latin typeface="Meiryo UI" pitchFamily="34" charset="0"/>
+                          <a:ea typeface="Meiryo UI" pitchFamily="34" charset="-122"/>
+                          <a:cs typeface="Meiryo UI" pitchFamily="34" charset="-120"/>
+                        </a:rPr>
+                        <a:t>PDCA力→運用改善サイクルに直結</a:t>
+                      </a:r>
+                      <a:endParaRPr lang="en-US" sz="1300" dirty="0">
+                        <a:latin typeface="Meiryo UI" charset="0"/>
+                        <a:ea typeface="Meiryo UI" charset="0"/>
+                        <a:cs typeface="Meiryo UI" charset="0"/>
+                      </a:endParaRPr>
+                    </a:p>
+                  </a:txBody>
+                  <a:tcPr marL="91440" marR="91440" marT="45720" marB="45720" anchor="ctr">
+                    <a:lnL w="12700" cap="flat" cmpd="sng" algn="ctr">
+                      <a:solidFill>
+                        <a:srgbClr val="D0D5DD"/>
+                      </a:solidFill>
+                      <a:prstDash val="solid"/>
+                      <a:round/>
+                      <a:headEnd type="none" w="med" len="med"/>
+                      <a:tailEnd type="none" w="med" len="med"/>
+                    </a:lnL>
+                    <a:lnR w="12700" cap="flat" cmpd="sng" algn="ctr">
+                      <a:solidFill>
+                        <a:srgbClr val="D0D5DD"/>
+                      </a:solidFill>
+                      <a:prstDash val="solid"/>
+                      <a:round/>
+                      <a:headEnd type="none" w="med" len="med"/>
+                      <a:tailEnd type="none" w="med" len="med"/>
+                    </a:lnR>
+                    <a:lnT w="12700" cap="flat" cmpd="sng" algn="ctr">
+                      <a:solidFill>
+                        <a:srgbClr val="D0D5DD"/>
+                      </a:solidFill>
+                      <a:prstDash val="solid"/>
+                      <a:round/>
+                      <a:headEnd type="none" w="med" len="med"/>
+                      <a:tailEnd type="none" w="med" len="med"/>
+                    </a:lnT>
+                    <a:lnB w="12700" cap="flat" cmpd="sng" algn="ctr">
+                      <a:solidFill>
+                        <a:srgbClr val="D0D5DD"/>
+                      </a:solidFill>
+                      <a:prstDash val="solid"/>
+                      <a:round/>
+                      <a:headEnd type="none" w="med" len="med"/>
+                      <a:tailEnd type="none" w="med" len="med"/>
+                    </a:lnB>
+                  </a:tcPr>
+                </a:tc>
+              </a:tr>
+              <a:tr h="576072">
+                <a:tc>
+                  <a:txBody>
+                    <a:bodyPr/>
+                    <a:lstStyle/>
+                    <a:p>
+                      <a:pPr algn="l" indent="0" marL="0">
+                        <a:buNone/>
+                      </a:pPr>
+                      <a:r>
+                        <a:rPr lang="en-US" sz="1300" b="1" dirty="0">
+                          <a:solidFill>
+                            <a:srgbClr val="000000"/>
+                          </a:solidFill>
+                          <a:latin typeface="Meiryo UI" pitchFamily="34" charset="0"/>
+                          <a:ea typeface="Meiryo UI" pitchFamily="34" charset="-122"/>
+                          <a:cs typeface="Meiryo UI" pitchFamily="34" charset="-120"/>
+                        </a:rPr>
+                        <a:t>向いている人</a:t>
+                      </a:r>
+                      <a:endParaRPr lang="en-US" sz="1300" dirty="0">
+                        <a:latin typeface="Meiryo UI" charset="0"/>
+                        <a:ea typeface="Meiryo UI" charset="0"/>
+                        <a:cs typeface="Meiryo UI" charset="0"/>
+                      </a:endParaRPr>
+                    </a:p>
+                  </a:txBody>
+                  <a:tcPr marL="91440" marR="91440" marT="45720" marB="45720" anchor="ctr">
+                    <a:lnL w="12700" cap="flat" cmpd="sng" algn="ctr">
+                      <a:solidFill>
+                        <a:srgbClr val="D0D5DD"/>
+                      </a:solidFill>
+                      <a:prstDash val="solid"/>
+                      <a:round/>
+                      <a:headEnd type="none" w="med" len="med"/>
+                      <a:tailEnd type="none" w="med" len="med"/>
+                    </a:lnL>
+                    <a:lnR w="12700" cap="flat" cmpd="sng" algn="ctr">
+                      <a:solidFill>
+                        <a:srgbClr val="D0D5DD"/>
+                      </a:solidFill>
+                      <a:prstDash val="solid"/>
+                      <a:round/>
+                      <a:headEnd type="none" w="med" len="med"/>
+                      <a:tailEnd type="none" w="med" len="med"/>
+                    </a:lnR>
+                    <a:lnT w="12700" cap="flat" cmpd="sng" algn="ctr">
+                      <a:solidFill>
+                        <a:srgbClr val="D0D5DD"/>
+                      </a:solidFill>
+                      <a:prstDash val="solid"/>
+                      <a:round/>
+                      <a:headEnd type="none" w="med" len="med"/>
+                      <a:tailEnd type="none" w="med" len="med"/>
+                    </a:lnT>
+                    <a:lnB w="12700" cap="flat" cmpd="sng" algn="ctr">
+                      <a:solidFill>
+                        <a:srgbClr val="D0D5DD"/>
+                      </a:solidFill>
+                      <a:prstDash val="solid"/>
+                      <a:round/>
+                      <a:headEnd type="none" w="med" len="med"/>
+                      <a:tailEnd type="none" w="med" len="med"/>
+                    </a:lnB>
+                    <a:solidFill>
+                      <a:srgbClr val="F2F3F5"/>
+                    </a:solidFill>
+                  </a:tcPr>
+                </a:tc>
+                <a:tc>
+                  <a:txBody>
+                    <a:bodyPr/>
+                    <a:lstStyle/>
+                    <a:p>
+                      <a:pPr algn="l" indent="0" marL="0">
+                        <a:buNone/>
+                      </a:pPr>
+                      <a:r>
+                        <a:rPr lang="en-US" sz="1300" dirty="0">
+                          <a:solidFill>
+                            <a:srgbClr val="000000"/>
+                          </a:solidFill>
+                          <a:latin typeface="Meiryo UI" pitchFamily="34" charset="0"/>
+                          <a:ea typeface="Meiryo UI" pitchFamily="34" charset="-122"/>
+                          <a:cs typeface="Meiryo UI" pitchFamily="34" charset="-120"/>
+                        </a:rPr>
+                        <a:t>運用実務そのものを極めたい人</a:t>
+                      </a:r>
+                      <a:endParaRPr lang="en-US" sz="1300" dirty="0">
+                        <a:latin typeface="Meiryo UI" charset="0"/>
+                        <a:ea typeface="Meiryo UI" charset="0"/>
+                        <a:cs typeface="Meiryo UI" charset="0"/>
+                      </a:endParaRPr>
+                    </a:p>
+                  </a:txBody>
+                  <a:tcPr marL="91440" marR="91440" marT="45720" marB="45720" anchor="ctr">
+                    <a:lnL w="12700" cap="flat" cmpd="sng" algn="ctr">
+                      <a:solidFill>
+                        <a:srgbClr val="D0D5DD"/>
+                      </a:solidFill>
+                      <a:prstDash val="solid"/>
+                      <a:round/>
+                      <a:headEnd type="none" w="med" len="med"/>
+                      <a:tailEnd type="none" w="med" len="med"/>
+                    </a:lnL>
+                    <a:lnR w="12700" cap="flat" cmpd="sng" algn="ctr">
+                      <a:solidFill>
+                        <a:srgbClr val="D0D5DD"/>
+                      </a:solidFill>
+                      <a:prstDash val="solid"/>
+                      <a:round/>
+                      <a:headEnd type="none" w="med" len="med"/>
+                      <a:tailEnd type="none" w="med" len="med"/>
+                    </a:lnR>
+                    <a:lnT w="12700" cap="flat" cmpd="sng" algn="ctr">
+                      <a:solidFill>
+                        <a:srgbClr val="D0D5DD"/>
+                      </a:solidFill>
+                      <a:prstDash val="solid"/>
+                      <a:round/>
+                      <a:headEnd type="none" w="med" len="med"/>
+                      <a:tailEnd type="none" w="med" len="med"/>
+                    </a:lnT>
+                    <a:lnB w="12700" cap="flat" cmpd="sng" algn="ctr">
+                      <a:solidFill>
+                        <a:srgbClr val="D0D5DD"/>
+                      </a:solidFill>
+                      <a:prstDash val="solid"/>
+                      <a:round/>
+                      <a:headEnd type="none" w="med" len="med"/>
+                      <a:tailEnd type="none" w="med" len="med"/>
+                    </a:lnB>
+                  </a:tcPr>
+                </a:tc>
+                <a:tc>
+                  <a:txBody>
+                    <a:bodyPr/>
+                    <a:lstStyle/>
+                    <a:p>
+                      <a:pPr algn="l" indent="0" marL="0">
+                        <a:buNone/>
+                      </a:pPr>
+                      <a:r>
+                        <a:rPr lang="en-US" sz="1300" dirty="0">
+                          <a:solidFill>
+                            <a:srgbClr val="000000"/>
+                          </a:solidFill>
+                          <a:latin typeface="Meiryo UI" pitchFamily="34" charset="0"/>
+                          <a:ea typeface="Meiryo UI" pitchFamily="34" charset="-122"/>
+                          <a:cs typeface="Meiryo UI" pitchFamily="34" charset="-120"/>
+                        </a:rPr>
+                        <a:t>信託銀行の専門性を軸にしたい人</a:t>
+                      </a:r>
+                      <a:endParaRPr lang="en-US" sz="1300" dirty="0">
+                        <a:latin typeface="Meiryo UI" charset="0"/>
+                        <a:ea typeface="Meiryo UI" charset="0"/>
+                        <a:cs typeface="Meiryo UI" charset="0"/>
+                      </a:endParaRPr>
+                    </a:p>
+                  </a:txBody>
+                  <a:tcPr marL="91440" marR="91440" marT="45720" marB="45720" anchor="ctr">
+                    <a:lnL w="12700" cap="flat" cmpd="sng" algn="ctr">
+                      <a:solidFill>
+                        <a:srgbClr val="D0D5DD"/>
+                      </a:solidFill>
+                      <a:prstDash val="solid"/>
+                      <a:round/>
+                      <a:headEnd type="none" w="med" len="med"/>
+                      <a:tailEnd type="none" w="med" len="med"/>
+                    </a:lnL>
+                    <a:lnR w="12700" cap="flat" cmpd="sng" algn="ctr">
+                      <a:solidFill>
+                        <a:srgbClr val="D0D5DD"/>
+                      </a:solidFill>
+                      <a:prstDash val="solid"/>
+                      <a:round/>
+                      <a:headEnd type="none" w="med" len="med"/>
+                      <a:tailEnd type="none" w="med" len="med"/>
+                    </a:lnR>
+                    <a:lnT w="12700" cap="flat" cmpd="sng" algn="ctr">
+                      <a:solidFill>
+                        <a:srgbClr val="D0D5DD"/>
+                      </a:solidFill>
+                      <a:prstDash val="solid"/>
+                      <a:round/>
+                      <a:headEnd type="none" w="med" len="med"/>
+                      <a:tailEnd type="none" w="med" len="med"/>
+                    </a:lnT>
+                    <a:lnB w="12700" cap="flat" cmpd="sng" algn="ctr">
+                      <a:solidFill>
+                        <a:srgbClr val="D0D5DD"/>
+                      </a:solidFill>
+                      <a:prstDash val="solid"/>
+                      <a:round/>
+                      <a:headEnd type="none" w="med" len="med"/>
+                      <a:tailEnd type="none" w="med" len="med"/>
+                    </a:lnB>
+                  </a:tcPr>
+                </a:tc>
+                <a:tc>
+                  <a:txBody>
+                    <a:bodyPr/>
+                    <a:lstStyle/>
+                    <a:p>
+                      <a:pPr algn="l" indent="0" marL="0">
+                        <a:buNone/>
+                      </a:pPr>
+                      <a:r>
+                        <a:rPr lang="en-US" sz="1300" dirty="0">
+                          <a:solidFill>
+                            <a:srgbClr val="000000"/>
+                          </a:solidFill>
+                          <a:latin typeface="Meiryo UI" pitchFamily="34" charset="0"/>
+                          <a:ea typeface="Meiryo UI" pitchFamily="34" charset="-122"/>
+                          <a:cs typeface="Meiryo UI" pitchFamily="34" charset="-120"/>
+                        </a:rPr>
+                        <a:t>異動リスクを抑え一貫性を重視する人</a:t>
+                      </a:r>
+                      <a:endParaRPr lang="en-US" sz="1300" dirty="0">
+                        <a:latin typeface="Meiryo UI" charset="0"/>
+                        <a:ea typeface="Meiryo UI" charset="0"/>
+                        <a:cs typeface="Meiryo UI" charset="0"/>
+                      </a:endParaRPr>
+                    </a:p>
+                  </a:txBody>
+                  <a:tcPr marL="91440" marR="91440" marT="45720" marB="45720" anchor="ctr">
+                    <a:lnL w="12700" cap="flat" cmpd="sng" algn="ctr">
+                      <a:solidFill>
+                        <a:srgbClr val="D0D5DD"/>
+                      </a:solidFill>
+                      <a:prstDash val="solid"/>
+                      <a:round/>
+                      <a:headEnd type="none" w="med" len="med"/>
+                      <a:tailEnd type="none" w="med" len="med"/>
+                    </a:lnL>
+                    <a:lnR w="12700" cap="flat" cmpd="sng" algn="ctr">
+                      <a:solidFill>
+                        <a:srgbClr val="D0D5DD"/>
+                      </a:solidFill>
+                      <a:prstDash val="solid"/>
+                      <a:round/>
+                      <a:headEnd type="none" w="med" len="med"/>
+                      <a:tailEnd type="none" w="med" len="med"/>
+                    </a:lnR>
+                    <a:lnT w="12700" cap="flat" cmpd="sng" algn="ctr">
+                      <a:solidFill>
+                        <a:srgbClr val="D0D5DD"/>
+                      </a:solidFill>
+                      <a:prstDash val="solid"/>
+                      <a:round/>
+                      <a:headEnd type="none" w="med" len="med"/>
+                      <a:tailEnd type="none" w="med" len="med"/>
+                    </a:lnT>
+                    <a:lnB w="12700" cap="flat" cmpd="sng" algn="ctr">
+                      <a:solidFill>
+                        <a:srgbClr val="D0D5DD"/>
+                      </a:solidFill>
+                      <a:prstDash val="solid"/>
+                      <a:round/>
+                      <a:headEnd type="none" w="med" len="med"/>
+                      <a:tailEnd type="none" w="med" len="med"/>
+                    </a:lnB>
+                  </a:tcPr>
+                </a:tc>
+              </a:tr>
+            </a:tbl>
+          </a:graphicData>
+        </a:graphic>
+      </p:graphicFrame>
+      <p:sp>
+        <p:nvSpPr>
+          <p:cNvPr id="4" name="Shape 1"/>
+          <p:cNvSpPr/>
+          <p:nvPr/>
+        </p:nvSpPr>
+        <p:spPr>
+          <a:xfrm>
+            <a:off x="548640" y="4206240"/>
+            <a:ext cx="11064240" cy="2331720"/>
           </a:xfrm>
           <a:prstGeom prst="roundRect">
             <a:avLst>
@@ -6737,14 +9255,14 @@
       </p:sp>
       <p:sp>
         <p:nvSpPr>
-          <p:cNvPr id="20" name="Text 15"/>
-          <p:cNvSpPr/>
-          <p:nvPr/>
-        </p:nvSpPr>
-        <p:spPr>
-          <a:xfrm>
-            <a:off x="914400" y="4114800"/>
-            <a:ext cx="10241280" cy="365760"/>
+          <p:cNvPr id="5" name="Text 2"/>
+          <p:cNvSpPr/>
+          <p:nvPr/>
+        </p:nvSpPr>
+        <p:spPr>
+          <a:xfrm>
+            <a:off x="822960" y="4389120"/>
+            <a:ext cx="10424160" cy="320040"/>
           </a:xfrm>
           <a:prstGeom prst="rect">
             <a:avLst/>
@@ -6776,14 +9294,14 @@
       </p:sp>
       <p:sp>
         <p:nvSpPr>
-          <p:cNvPr id="21" name="Text 16"/>
-          <p:cNvSpPr/>
-          <p:nvPr/>
-        </p:nvSpPr>
-        <p:spPr>
-          <a:xfrm>
-            <a:off x="1051560" y="4572000"/>
-            <a:ext cx="10149840" cy="1554480"/>
+          <p:cNvPr id="6" name="Text 3"/>
+          <p:cNvSpPr/>
+          <p:nvPr/>
+        </p:nvSpPr>
+        <p:spPr>
+          <a:xfrm>
+            <a:off x="960120" y="5074920"/>
+            <a:ext cx="10332720" cy="1371600"/>
           </a:xfrm>
           <a:prstGeom prst="rect">
             <a:avLst/>
@@ -6797,10 +9315,10 @@
           <a:p>
             <a:pPr marL="342900" indent="-342900">
               <a:lnSpc>
-                <a:spcPct val="130000"/>
+                <a:spcPct val="125000"/>
               </a:lnSpc>
               <a:spcAft>
-                <a:spcPts val="800"/>
+                <a:spcPts val="600"/>
               </a:spcAft>
               <a:buSzPct val="100000"/>
               <a:buChar char="•"/>
@@ -6814,17 +9332,17 @@
                 <a:ea typeface="Meiryo UI" pitchFamily="34" charset="-122"/>
                 <a:cs typeface="Meiryo UI" pitchFamily="34" charset="-120"/>
               </a:rPr>
-              <a:t>面接・ESでは「財務諸表を読める強み」を、まず法人融資・与信審査の場面でどう活かすかを具体的に語る</a:t>
+              <a:t>3パターンとも「入行後まず信託銀行の実務を経験する」点は共通。面接では、どのパターンでも通用する「財務諸表を読める」強みをまず語る</a:t>
             </a:r>
             <a:endParaRPr lang="en-US" sz="1400" dirty="0"/>
           </a:p>
           <a:p>
             <a:pPr marL="342900" indent="-342900">
               <a:lnSpc>
-                <a:spcPct val="130000"/>
+                <a:spcPct val="125000"/>
               </a:lnSpc>
               <a:spcAft>
-                <a:spcPts val="800"/>
+                <a:spcPts val="600"/>
               </a:spcAft>
               <a:buSzPct val="100000"/>
               <a:buChar char="•"/>
@@ -6838,17 +9356,17 @@
                 <a:ea typeface="Meiryo UI" pitchFamily="34" charset="-122"/>
                 <a:cs typeface="Meiryo UI" pitchFamily="34" charset="-120"/>
               </a:rPr>
-              <a:t>企業法ゼミでの学びを、証券代行・年金信託といった信託銀行特有の業務にどう接続できるかを調べて言語化しておく</a:t>
+              <a:t>「運用の頭脳を極めたい／信託銀行の専門性を軸にしたい／異動リスクを抑えたい」のどれに一番惹かれるかを整理し、志望動機に反映する</a:t>
             </a:r>
             <a:endParaRPr lang="en-US" sz="1400" dirty="0"/>
           </a:p>
           <a:p>
             <a:pPr marL="342900" indent="-342900">
               <a:lnSpc>
-                <a:spcPct val="130000"/>
+                <a:spcPct val="125000"/>
               </a:lnSpc>
               <a:spcAft>
-                <a:spcPts val="800"/>
+                <a:spcPts val="600"/>
               </a:spcAft>
               <a:buSzPct val="100000"/>
               <a:buChar char="•"/>
@@ -6862,7 +9380,7 @@
                 <a:ea typeface="Meiryo UI" pitchFamily="34" charset="-122"/>
                 <a:cs typeface="Meiryo UI" pitchFamily="34" charset="-120"/>
               </a:rPr>
-              <a:t>将来的に「財務分析×法務」を掛け合わせた事業承継・M&amp;Aアドバイザリーを志向している、という一貫したストーリーを準備する</a:t>
+              <a:t>説明会・面接で「グループAM会社への出向・転籍の実態」を具体的に質問し、パターンの解像度を上げる</a:t>
             </a:r>
             <a:endParaRPr lang="en-US" sz="1400" dirty="0"/>
           </a:p>

--- a/信吾/銀行研究/添付ファイル/信託銀行キャリア形成モデル.pptx
+++ b/信吾/銀行研究/添付ファイル/信託銀行キャリア形成モデル.pptx
@@ -1622,7 +1622,7 @@
                 <a:ea typeface="Meiryo UI" pitchFamily="34" charset="-122"/>
                 <a:cs typeface="Meiryo UI" pitchFamily="34" charset="-120"/>
               </a:rPr>
-              <a:t>③銀行内で完結する運用キャリア（ゆうちょ銀行型）</a:t>
+              <a:t>③銀行の自己勘定運用（マーケット業務）を中心とするキャリア</a:t>
             </a:r>
             <a:endParaRPr lang="en-US" sz="1600" dirty="0"/>
           </a:p>
@@ -3891,7 +3891,7 @@
                 <a:ea typeface="Meiryo UI" pitchFamily="34" charset="-122"/>
                 <a:cs typeface="Meiryo UI" pitchFamily="34" charset="-120"/>
               </a:rPr>
-              <a:t>銀行内で完結する運用キャリア（ゆうちょ銀行型）</a:t>
+              <a:t>銀行の自己勘定運用（マーケット業務）を中心とするキャリア</a:t>
             </a:r>
             <a:endParaRPr lang="en-US" sz="1500" dirty="0"/>
           </a:p>
@@ -4220,7 +4220,7 @@
                 <a:ea typeface="Meiryo UI" pitchFamily="34" charset="-122"/>
                 <a:cs typeface="Meiryo UI" pitchFamily="34" charset="-120"/>
               </a:rPr>
-              <a:t>資産運用の専門職</a:t>
+              <a:t>自己勘定運用の専門職</a:t>
             </a:r>
             <a:endParaRPr lang="en-US" sz="1400" dirty="0"/>
           </a:p>
@@ -4473,7 +4473,7 @@
                 <a:ea typeface="Meiryo UI" pitchFamily="34" charset="-122"/>
                 <a:cs typeface="Meiryo UI" pitchFamily="34" charset="-120"/>
               </a:rPr>
-              <a:t>別会社に異動せず、銀行内で運用の「頭脳」まで一貫して担う</a:t>
+              <a:t>別会社に異動せず、銀行自身の資金運用（マーケット業務）に軸足を置く</a:t>
             </a:r>
             <a:endParaRPr lang="en-US" sz="1400" dirty="0"/>
           </a:p>
@@ -6819,7 +6819,7 @@
                 <a:ea typeface="Meiryo UI" pitchFamily="34" charset="-122"/>
                 <a:cs typeface="Meiryo UI" pitchFamily="34" charset="-120"/>
               </a:rPr>
-              <a:t>銀行内で完結する運用キャリア（ゆうちょ銀行型）</a:t>
+              <a:t>銀行の自己勘定運用（マーケット業務）を中心とするキャリア</a:t>
             </a:r>
             <a:endParaRPr lang="en-US" sz="2600" dirty="0"/>
           </a:p>
@@ -6858,7 +6858,7 @@
                 <a:ea typeface="Meiryo UI" pitchFamily="34" charset="-122"/>
                 <a:cs typeface="Meiryo UI" pitchFamily="34" charset="-120"/>
               </a:rPr>
-              <a:t>グループの別会社を介さず、銀行内で「頭脳」と「金庫」の両方を一貫して担う</a:t>
+              <a:t>別会社を介さず、銀行自身の資金を運用する「マーケット業務」に軸足を置く</a:t>
             </a:r>
             <a:endParaRPr lang="en-US" sz="1400" dirty="0"/>
           </a:p>
@@ -7119,7 +7119,7 @@
                 <a:ea typeface="Meiryo UI" pitchFamily="34" charset="-122"/>
                 <a:cs typeface="Meiryo UI" pitchFamily="34" charset="-120"/>
               </a:rPr>
-              <a:t>銀行自身の資金（自己勘定・有価証券運用）を対象に、債券・株式等の市場調査やディーリング実務の基礎を習得する。</a:t>
+              <a:t>銀行自身の資金（自己勘定・有価証券運用）を対象に、債券・株式等の市場調査やディーリング実務の基礎を習得する。ゆうちょ銀行はこの自己勘定運用（国債等）が収益の柱であり、代表的な配属先となる。</a:t>
             </a:r>
             <a:endParaRPr lang="en-US" sz="1400" dirty="0"/>
           </a:p>
@@ -7350,7 +7350,7 @@
                 <a:ea typeface="Meiryo UI" pitchFamily="34" charset="-122"/>
                 <a:cs typeface="Meiryo UI" pitchFamily="34" charset="-120"/>
               </a:rPr>
-              <a:t>資産運用の専門職</a:t>
+              <a:t>自己勘定運用の専門職</a:t>
             </a:r>
             <a:endParaRPr lang="en-US" sz="1500" dirty="0"/>
           </a:p>
@@ -7439,7 +7439,7 @@
                 <a:ea typeface="Meiryo UI" pitchFamily="34" charset="-122"/>
                 <a:cs typeface="Meiryo UI" pitchFamily="34" charset="-120"/>
               </a:rPr>
-              <a:t>債券・株式・オルタナティブ等の運用担当として、ALM（資産負債管理）やリスク管理部門と連携しながら、銀行内で運用の頭脳役を担う。</a:t>
+              <a:t>債券・株式等の自己勘定運用担当として、ALM（資産負債管理）やリスク管理部門と連携しながら、銀行内で運用の頭脳役を担う。</a:t>
             </a:r>
             <a:endParaRPr lang="en-US" sz="1400" dirty="0"/>
           </a:p>
@@ -7735,7 +7735,7 @@
                 <a:ea typeface="Meiryo UI" pitchFamily="34" charset="-122"/>
                 <a:cs typeface="Meiryo UI" pitchFamily="34" charset="-120"/>
               </a:rPr>
-              <a:t>銀行全体の資産運用方針の立案・運用部門の統括を担当。頭脳と金庫が同一組織内で完結する体制の中核を担う。</a:t>
+              <a:t>銀行全体の自己勘定運用方針の立案・運用部門の統括を担当。頭脳と金庫が同一組織内で完結する体制の中核を担う。※機関投資家向け運用やPE投資等のアセットマネジメント業務は、ゆうちょ銀行では2026年4月発足の「ゆうちょアセットマネジメント」等、グループ別会社が担っており、この完結型キャリアの対象外。</a:t>
             </a:r>
             <a:endParaRPr lang="en-US" sz="1400" dirty="0"/>
           </a:p>
@@ -8110,7 +8110,7 @@
                           <a:ea typeface="Meiryo UI" pitchFamily="34" charset="-122"/>
                           <a:cs typeface="Meiryo UI" pitchFamily="34" charset="-120"/>
                         </a:rPr>
-                        <a:t>銀行内で完結する運用キャリア（ゆうちょ銀行型）</a:t>
+                        <a:t>銀行の自己勘定運用（マーケット業務）を中心とするキャリア</a:t>
                       </a:r>
                       <a:endParaRPr lang="en-US" sz="1400" dirty="0">
                         <a:latin typeface="Meiryo UI" charset="0"/>
@@ -8378,7 +8378,7 @@
                           <a:ea typeface="Meiryo UI" pitchFamily="34" charset="-122"/>
                           <a:cs typeface="Meiryo UI" pitchFamily="34" charset="-120"/>
                         </a:rPr>
-                        <a:t>銀行内のみで完結</a:t>
+                        <a:t>自己勘定運用は銀行内で完結（PE等は別会社）</a:t>
                       </a:r>
                       <a:endParaRPr lang="en-US" sz="1300" dirty="0">
                         <a:latin typeface="Meiryo UI" charset="0"/>
@@ -8643,7 +8643,7 @@
                           <a:ea typeface="Meiryo UI" pitchFamily="34" charset="-122"/>
                           <a:cs typeface="Meiryo UI" pitchFamily="34" charset="-120"/>
                         </a:rPr>
-                        <a:t>銀行内で頭脳と金庫を兼ねる</a:t>
+                        <a:t>銀行内で自己勘定の頭脳と金庫を兼ねる</a:t>
                       </a:r>
                       <a:endParaRPr lang="en-US" sz="1300" dirty="0">
                         <a:latin typeface="Meiryo UI" charset="0"/>

--- a/信吾/銀行研究/添付ファイル/信託銀行キャリア形成モデル.pptx
+++ b/信吾/銀行研究/添付ファイル/信託銀行キャリア形成モデル.pptx
@@ -7439,7 +7439,7 @@
                 <a:ea typeface="Meiryo UI" pitchFamily="34" charset="-122"/>
                 <a:cs typeface="Meiryo UI" pitchFamily="34" charset="-120"/>
               </a:rPr>
-              <a:t>債券・株式等の自己勘定運用担当として、ALM（資産負債管理）やリスク管理部門と連携しながら、銀行内で運用の頭脳役を担う。</a:t>
+              <a:t>債券・株式等に加え、PE・不動産等オルタナティブ資産への自己資金配分も含めた自己勘定運用の専門職として、ALM（資産負債管理）やリスク管理部門と連携しながら銀行内で運用の頭脳役を担う。ゆうちょ銀行は自己資金によるPE投資でも国内最大級（2025年9月末時点で7.6兆円）であり、この分野の代表例といえる。</a:t>
             </a:r>
             <a:endParaRPr lang="en-US" sz="1400" dirty="0"/>
           </a:p>
@@ -7735,7 +7735,7 @@
                 <a:ea typeface="Meiryo UI" pitchFamily="34" charset="-122"/>
                 <a:cs typeface="Meiryo UI" pitchFamily="34" charset="-120"/>
               </a:rPr>
-              <a:t>銀行全体の自己勘定運用方針の立案・運用部門の統括を担当。頭脳と金庫が同一組織内で完結する体制の中核を担う。※機関投資家向け運用やPE投資等のアセットマネジメント業務は、ゆうちょ銀行では2026年4月発足の「ゆうちょアセットマネジメント」等、グループ別会社が担っており、この完結型キャリアの対象外。</a:t>
+              <a:t>銀行全体の自己勘定運用方針の立案・運用部門の統括を担当。頭脳と金庫が同一組織内で完結する体制の中核を担う。※ゆうちょ銀行では2026年4月、PE・不動産投資の運用機能を「ゆうちょアセットマネジメント」（別会社）へ移管したが、原資は引き続き銀行自身の資金であり、機関投資家など外部の資金を預かる一般的な「アセットマネジメント業務」とは性格が異なる点に注意。</a:t>
             </a:r>
             <a:endParaRPr lang="en-US" sz="1400" dirty="0"/>
           </a:p>

--- a/信吾/銀行研究/添付ファイル/信託銀行キャリア形成モデル.pptx
+++ b/信吾/銀行研究/添付ファイル/信託銀行キャリア形成モデル.pptx
@@ -7735,7 +7735,7 @@
                 <a:ea typeface="Meiryo UI" pitchFamily="34" charset="-122"/>
                 <a:cs typeface="Meiryo UI" pitchFamily="34" charset="-120"/>
               </a:rPr>
-              <a:t>銀行全体の自己勘定運用方針の立案・運用部門の統括を担当。頭脳と金庫が同一組織内で完結する体制の中核を担う。※ゆうちょ銀行では2026年4月、PE・不動産投資の運用機能を「ゆうちょアセットマネジメント」（別会社）へ移管したが、原資は引き続き銀行自身の資金であり、機関投資家など外部の資金を預かる一般的な「アセットマネジメント業務」とは性格が異なる点に注意。</a:t>
+              <a:t>銀行全体の自己勘定運用方針の立案・運用部門の統括を担当。頭脳と金庫が同一組織内で完結する体制の中核を担う。ゆうちょ銀行のプライベートエクイティ投資部は2026年4月の組織再編後も市場部門内に存続しており、機関投資家など外部の資金を預かる一般的な「アセットマネジメント業務」とは異なり、自社の資金を自社で判断・運用する体制が続いている。</a:t>
             </a:r>
             <a:endParaRPr lang="en-US" sz="1400" dirty="0"/>
           </a:p>

--- a/信吾/銀行研究/添付ファイル/信託銀行キャリア形成モデル.pptx
+++ b/信吾/銀行研究/添付ファイル/信託銀行キャリア形成モデル.pptx
@@ -12,9 +12,10 @@
     <p:sldId id="260" r:id="rId6"/>
     <p:sldId id="261" r:id="rId7"/>
     <p:sldId id="262" r:id="rId8"/>
+    <p:sldId id="263" r:id="rId9"/>
   </p:sldIdLst>
   <p:notesMasterIdLst>
-    <p:notesMasterId r:id="rId9"/>
+    <p:notesMasterId r:id="rId10"/>
   </p:notesMasterIdLst>
   <p:sldSz cx="12192000" cy="6858000"/>
   <p:notesSz cx="6858000" cy="12192000"/>
@@ -1060,6 +1061,94 @@
             <a:fld id="{F7021451-1387-4CA6-816F-3879F97B5CBC}" type="slidenum">
               <a:rPr lang="en-US"/>
               <a:t>7</a:t>
+            </a:fld>
+            <a:endParaRPr lang="en-US"/>
+          </a:p>
+        </p:txBody>
+      </p:sp>
+    </p:spTree>
+    <p:extLst>
+      <p:ext uri="{BB962C8B-B14F-4D97-AF65-F5344CB8AC3E}">
+        <p14:creationId xmlns:p14="http://schemas.microsoft.com/office/powerpoint/2010/main" val="1024086991"/>
+      </p:ext>
+    </p:extLst>
+  </p:cSld>
+  <p:clrMapOvr>
+    <a:masterClrMapping/>
+  </p:clrMapOvr>
+</p:notes>
+</file>
+
+<file path=ppt/notesSlides/notesSlide8.xml><?xml version="1.0" encoding="utf-8"?>
+<p:notes xmlns:a="http://schemas.openxmlformats.org/drawingml/2006/main" xmlns:r="http://schemas.openxmlformats.org/officeDocument/2006/relationships" xmlns:p="http://schemas.openxmlformats.org/presentationml/2006/main">
+  <p:cSld>
+    <p:spTree>
+      <p:nvGrpSpPr>
+        <p:cNvPr id="1" name=""/>
+        <p:cNvGrpSpPr/>
+        <p:nvPr/>
+      </p:nvGrpSpPr>
+      <p:grpSpPr>
+        <a:xfrm>
+          <a:off x="0" y="0"/>
+          <a:ext cx="0" cy="0"/>
+          <a:chOff x="0" y="0"/>
+          <a:chExt cx="0" cy="0"/>
+        </a:xfrm>
+      </p:grpSpPr>
+      <p:sp>
+        <p:nvSpPr>
+          <p:cNvPr id="2" name="Slide Image Placeholder 1"/>
+          <p:cNvSpPr>
+            <a:spLocks noGrp="1" noRot="1" noChangeAspect="1"/>
+          </p:cNvSpPr>
+          <p:nvPr>
+            <p:ph type="sldImg"/>
+          </p:nvPr>
+        </p:nvSpPr>
+        <p:spPr/>
+      </p:sp>
+      <p:sp>
+        <p:nvSpPr>
+          <p:cNvPr id="3" name="Notes Placeholder 2"/>
+          <p:cNvSpPr>
+            <a:spLocks noGrp="1"/>
+          </p:cNvSpPr>
+          <p:nvPr>
+            <p:ph type="body" idx="1"/>
+          </p:nvPr>
+        </p:nvSpPr>
+        <p:spPr/>
+        <p:txBody>
+          <a:bodyPr/>
+          <a:lstStyle/>
+          <a:p>
+            <a:r>
+              <a:rPr lang="en-US" dirty="0"/>
+              <a:t/>
+            </a:r>
+            <a:endParaRPr lang="en-US" dirty="0"/>
+          </a:p>
+        </p:txBody>
+      </p:sp>
+      <p:sp>
+        <p:nvSpPr>
+          <p:cNvPr id="4" name="Slide Number Placeholder 3"/>
+          <p:cNvSpPr>
+            <a:spLocks noGrp="1"/>
+          </p:cNvSpPr>
+          <p:nvPr>
+            <p:ph type="sldNum" sz="quarter" idx="10"/>
+          </p:nvPr>
+        </p:nvSpPr>
+        <p:spPr/>
+        <p:txBody>
+          <a:bodyPr/>
+          <a:lstStyle/>
+          <a:p>
+            <a:fld id="{F7021451-1387-4CA6-816F-3879F97B5CBC}" type="slidenum">
+              <a:rPr lang="en-US"/>
+              <a:t>8</a:t>
             </a:fld>
             <a:endParaRPr lang="en-US"/>
           </a:p>
@@ -1528,7 +1617,7 @@
                 <a:ea typeface="Meiryo UI" pitchFamily="34" charset="-122"/>
                 <a:cs typeface="Meiryo UI" pitchFamily="34" charset="-120"/>
               </a:rPr>
-              <a:t>「運用」に関わる3つのキャリアパターンで考える、信吾さんの成長ロードマップ</a:t>
+              <a:t>「私は、何のプロになりたいか」を軸に考える、信吾さんの成長ロードマップ</a:t>
             </a:r>
             <a:endParaRPr lang="en-US" sz="1800" dirty="0"/>
           </a:p>
@@ -1574,7 +1663,7 @@
                 <a:ea typeface="Meiryo UI" pitchFamily="34" charset="-122"/>
                 <a:cs typeface="Meiryo UI" pitchFamily="34" charset="-120"/>
               </a:rPr>
-              <a:t>①アセットマネジメント業務を中心とするキャリア</a:t>
+              <a:t>①資産運用のプロになる</a:t>
             </a:r>
             <a:endParaRPr lang="en-US" sz="1600" dirty="0"/>
           </a:p>
@@ -1598,7 +1687,7 @@
                 <a:ea typeface="Meiryo UI" pitchFamily="34" charset="-122"/>
                 <a:cs typeface="Meiryo UI" pitchFamily="34" charset="-120"/>
               </a:rPr>
-              <a:t>②信託銀行の運用業務を中心とするキャリア</a:t>
+              <a:t>②企業法務・ガバナンスのプロになる</a:t>
             </a:r>
             <a:endParaRPr lang="en-US" sz="1600" dirty="0"/>
           </a:p>
@@ -1622,7 +1711,7 @@
                 <a:ea typeface="Meiryo UI" pitchFamily="34" charset="-122"/>
                 <a:cs typeface="Meiryo UI" pitchFamily="34" charset="-120"/>
               </a:rPr>
-              <a:t>③銀行の自己勘定運用（マーケット業務）を中心とするキャリア</a:t>
+              <a:t>③自己勘定運用のプロになる</a:t>
             </a:r>
             <a:endParaRPr lang="en-US" sz="1600" dirty="0"/>
           </a:p>
@@ -2273,7 +2362,7 @@
         </p:nvSpPr>
         <p:spPr>
           <a:xfrm>
-            <a:off x="640080" y="411480"/>
+            <a:off x="640080" y="457200"/>
             <a:ext cx="10972800" cy="640080"/>
           </a:xfrm>
           <a:prstGeom prst="rect">
@@ -2290,17 +2379,17 @@
               <a:buNone/>
             </a:pPr>
             <a:r>
-              <a:rPr lang="en-US" sz="3000" b="1" dirty="0">
-                <a:solidFill>
-                  <a:srgbClr val="000000"/>
-                </a:solidFill>
-                <a:latin typeface="Meiryo UI" pitchFamily="34" charset="0"/>
-                <a:ea typeface="Meiryo UI" pitchFamily="34" charset="-122"/>
-                <a:cs typeface="Meiryo UI" pitchFamily="34" charset="-120"/>
-              </a:rPr>
-              <a:t>3つのキャリアパターン全体像</a:t>
-            </a:r>
-            <a:endParaRPr lang="en-US" sz="3000" dirty="0"/>
+              <a:rPr lang="en-US" sz="2800" b="1" dirty="0">
+                <a:solidFill>
+                  <a:srgbClr val="000000"/>
+                </a:solidFill>
+                <a:latin typeface="Meiryo UI" pitchFamily="34" charset="0"/>
+                <a:ea typeface="Meiryo UI" pitchFamily="34" charset="-122"/>
+                <a:cs typeface="Meiryo UI" pitchFamily="34" charset="-120"/>
+              </a:rPr>
+              <a:t>考え方の軸：「私は、何のプロになりたいか」</a:t>
+            </a:r>
+            <a:endParaRPr lang="en-US" sz="2800" dirty="0"/>
           </a:p>
         </p:txBody>
       </p:sp>
@@ -2312,7 +2401,7 @@
         </p:nvSpPr>
         <p:spPr>
           <a:xfrm>
-            <a:off x="640080" y="1005840"/>
+            <a:off x="640080" y="1097280"/>
             <a:ext cx="10972800" cy="411480"/>
           </a:xfrm>
           <a:prstGeom prst="rect">
@@ -2337,7 +2426,7 @@
                 <a:ea typeface="Meiryo UI" pitchFamily="34" charset="-122"/>
                 <a:cs typeface="Meiryo UI" pitchFamily="34" charset="-120"/>
               </a:rPr>
-              <a:t>「運用の頭脳をどこで担うか」「別会社に異動するか、銀行内で完結するか」で3パターンに分かれます。</a:t>
+              <a:t>会社・部署の名前で選ぶのではなく、「何の専門性を鍛えたいか」を先に決め、そのための職場を選ぶという考え方。</a:t>
             </a:r>
             <a:endParaRPr lang="en-US" sz="1400" dirty="0"/>
           </a:p>
@@ -2351,18 +2440,18 @@
         </p:nvSpPr>
         <p:spPr>
           <a:xfrm>
-            <a:off x="548640" y="1600200"/>
-            <a:ext cx="3566160" cy="4892040"/>
+            <a:off x="640080" y="1691640"/>
+            <a:ext cx="10881360" cy="1737360"/>
           </a:xfrm>
           <a:prstGeom prst="roundRect">
             <a:avLst>
-              <a:gd name="adj" fmla="val 2564"/>
+              <a:gd name="adj" fmla="val 5263"/>
             </a:avLst>
           </a:prstGeom>
           <a:solidFill>
             <a:srgbClr val="FFFFFF"/>
           </a:solidFill>
-          <a:ln w="19050">
+          <a:ln w="15875">
             <a:solidFill>
               <a:srgbClr val="1E2761"/>
             </a:solidFill>
@@ -2372,640 +2461,260 @@
       </p:sp>
       <p:sp>
         <p:nvSpPr>
-          <p:cNvPr id="5" name="Shape 3"/>
-          <p:cNvSpPr/>
-          <p:nvPr/>
-        </p:nvSpPr>
-        <p:spPr>
-          <a:xfrm>
-            <a:off x="777240" y="1801368"/>
-            <a:ext cx="502920" cy="384048"/>
+          <p:cNvPr id="5" name="Text 3"/>
+          <p:cNvSpPr/>
+          <p:nvPr/>
+        </p:nvSpPr>
+        <p:spPr>
+          <a:xfrm>
+            <a:off x="914400" y="1874520"/>
+            <a:ext cx="10332720" cy="365760"/>
+          </a:xfrm>
+          <a:prstGeom prst="rect">
+            <a:avLst/>
+          </a:prstGeom>
+          <a:noFill/>
+          <a:ln/>
+        </p:spPr>
+        <p:txBody>
+          <a:bodyPr wrap="square" rtlCol="0" anchor="ctr"/>
+          <a:lstStyle/>
+          <a:p>
+            <a:pPr indent="0" marL="0">
+              <a:buNone/>
+            </a:pPr>
+            <a:r>
+              <a:rPr lang="en-US" sz="1600" b="1" dirty="0">
+                <a:solidFill>
+                  <a:srgbClr val="1E2761"/>
+                </a:solidFill>
+                <a:latin typeface="Meiryo UI" pitchFamily="34" charset="0"/>
+                <a:ea typeface="Meiryo UI" pitchFamily="34" charset="-122"/>
+                <a:cs typeface="Meiryo UI" pitchFamily="34" charset="-120"/>
+              </a:rPr>
+              <a:t>「運用」とは何か？　―　2つの問いに分解できる</a:t>
+            </a:r>
+            <a:endParaRPr lang="en-US" sz="1600" dirty="0"/>
+          </a:p>
+        </p:txBody>
+      </p:sp>
+      <p:sp>
+        <p:nvSpPr>
+          <p:cNvPr id="6" name="Text 4"/>
+          <p:cNvSpPr/>
+          <p:nvPr/>
+        </p:nvSpPr>
+        <p:spPr>
+          <a:xfrm>
+            <a:off x="914400" y="2331720"/>
+            <a:ext cx="5074920" cy="1005840"/>
+          </a:xfrm>
+          <a:prstGeom prst="rect">
+            <a:avLst/>
+          </a:prstGeom>
+          <a:noFill/>
+          <a:ln/>
+        </p:spPr>
+        <p:txBody>
+          <a:bodyPr wrap="square" rtlCol="0" anchor="ctr"/>
+          <a:lstStyle/>
+          <a:p>
+            <a:pPr indent="0" marL="0">
+              <a:lnSpc>
+                <a:spcPct val="120000"/>
+              </a:lnSpc>
+              <a:buNone/>
+            </a:pPr>
+            <a:r>
+              <a:rPr lang="en-US" sz="1400" b="1" dirty="0">
+                <a:solidFill>
+                  <a:srgbClr val="1E2761"/>
+                </a:solidFill>
+                <a:latin typeface="Meiryo UI" pitchFamily="34" charset="0"/>
+                <a:ea typeface="Meiryo UI" pitchFamily="34" charset="-122"/>
+                <a:cs typeface="Meiryo UI" pitchFamily="34" charset="-120"/>
+              </a:rPr>
+              <a:t>①頭脳　</a:t>
+            </a:r>
+            <a:pPr indent="0" marL="0">
+              <a:lnSpc>
+                <a:spcPct val="120000"/>
+              </a:lnSpc>
+              <a:buNone/>
+            </a:pPr>
+            <a:r>
+              <a:rPr lang="en-US" sz="1400" dirty="0">
+                <a:solidFill>
+                  <a:srgbClr val="000000"/>
+                </a:solidFill>
+                <a:latin typeface="Meiryo UI" pitchFamily="34" charset="0"/>
+                <a:ea typeface="Meiryo UI" pitchFamily="34" charset="-122"/>
+                <a:cs typeface="Meiryo UI" pitchFamily="34" charset="-120"/>
+              </a:rPr>
+              <a:t>誰が「何を買うか・売るか」を判断するのか</a:t>
+            </a:r>
+            <a:endParaRPr lang="en-US" sz="1400" dirty="0"/>
+          </a:p>
+          <a:p>
+            <a:pPr indent="0" marL="0">
+              <a:lnSpc>
+                <a:spcPct val="120000"/>
+              </a:lnSpc>
+              <a:buNone/>
+            </a:pPr>
+            <a:r>
+              <a:rPr lang="en-US" sz="1400" dirty="0">
+                <a:solidFill>
+                  <a:srgbClr val="000000"/>
+                </a:solidFill>
+                <a:latin typeface="Meiryo UI" pitchFamily="34" charset="0"/>
+                <a:ea typeface="Meiryo UI" pitchFamily="34" charset="-122"/>
+                <a:cs typeface="Meiryo UI" pitchFamily="34" charset="-120"/>
+              </a:rPr>
+              <a:t>　自分自身か／他社（運用を委託する相手）か</a:t>
+            </a:r>
+            <a:endParaRPr lang="en-US" sz="1400" dirty="0"/>
+          </a:p>
+        </p:txBody>
+      </p:sp>
+      <p:sp>
+        <p:nvSpPr>
+          <p:cNvPr id="7" name="Text 5"/>
+          <p:cNvSpPr/>
+          <p:nvPr/>
+        </p:nvSpPr>
+        <p:spPr>
+          <a:xfrm>
+            <a:off x="6263640" y="2331720"/>
+            <a:ext cx="5074920" cy="1005840"/>
+          </a:xfrm>
+          <a:prstGeom prst="rect">
+            <a:avLst/>
+          </a:prstGeom>
+          <a:noFill/>
+          <a:ln/>
+        </p:spPr>
+        <p:txBody>
+          <a:bodyPr wrap="square" rtlCol="0" anchor="ctr"/>
+          <a:lstStyle/>
+          <a:p>
+            <a:pPr indent="0" marL="0">
+              <a:lnSpc>
+                <a:spcPct val="120000"/>
+              </a:lnSpc>
+              <a:buNone/>
+            </a:pPr>
+            <a:r>
+              <a:rPr lang="en-US" sz="1400" b="1" dirty="0">
+                <a:solidFill>
+                  <a:srgbClr val="1E2761"/>
+                </a:solidFill>
+                <a:latin typeface="Meiryo UI" pitchFamily="34" charset="0"/>
+                <a:ea typeface="Meiryo UI" pitchFamily="34" charset="-122"/>
+                <a:cs typeface="Meiryo UI" pitchFamily="34" charset="-120"/>
+              </a:rPr>
+              <a:t>②投資対象　</a:t>
+            </a:r>
+            <a:pPr indent="0" marL="0">
+              <a:lnSpc>
+                <a:spcPct val="120000"/>
+              </a:lnSpc>
+              <a:buNone/>
+            </a:pPr>
+            <a:r>
+              <a:rPr lang="en-US" sz="1400" dirty="0">
+                <a:solidFill>
+                  <a:srgbClr val="000000"/>
+                </a:solidFill>
+                <a:latin typeface="Meiryo UI" pitchFamily="34" charset="0"/>
+                <a:ea typeface="Meiryo UI" pitchFamily="34" charset="-122"/>
+                <a:cs typeface="Meiryo UI" pitchFamily="34" charset="-120"/>
+              </a:rPr>
+              <a:t>何に投資するのか、誰の資金なのか</a:t>
+            </a:r>
+            <a:endParaRPr lang="en-US" sz="1400" dirty="0"/>
+          </a:p>
+          <a:p>
+            <a:pPr indent="0" marL="0">
+              <a:lnSpc>
+                <a:spcPct val="120000"/>
+              </a:lnSpc>
+              <a:buNone/>
+            </a:pPr>
+            <a:r>
+              <a:rPr lang="en-US" sz="1400" dirty="0">
+                <a:solidFill>
+                  <a:srgbClr val="000000"/>
+                </a:solidFill>
+                <a:latin typeface="Meiryo UI" pitchFamily="34" charset="0"/>
+                <a:ea typeface="Meiryo UI" pitchFamily="34" charset="-122"/>
+                <a:cs typeface="Meiryo UI" pitchFamily="34" charset="-120"/>
+              </a:rPr>
+              <a:t>　顧客の信託資金か／銀行自身の資金か。伝統資産かオルタナティブか</a:t>
+            </a:r>
+            <a:endParaRPr lang="en-US" sz="1400" dirty="0"/>
+          </a:p>
+        </p:txBody>
+      </p:sp>
+      <p:sp>
+        <p:nvSpPr>
+          <p:cNvPr id="8" name="Text 6"/>
+          <p:cNvSpPr/>
+          <p:nvPr/>
+        </p:nvSpPr>
+        <p:spPr>
+          <a:xfrm>
+            <a:off x="640080" y="3611880"/>
+            <a:ext cx="10881360" cy="457200"/>
+          </a:xfrm>
+          <a:prstGeom prst="rect">
+            <a:avLst/>
+          </a:prstGeom>
+          <a:noFill/>
+          <a:ln/>
+        </p:spPr>
+        <p:txBody>
+          <a:bodyPr wrap="square" rtlCol="0" anchor="ctr"/>
+          <a:lstStyle/>
+          <a:p>
+            <a:pPr indent="0" marL="0">
+              <a:buNone/>
+            </a:pPr>
+            <a:r>
+              <a:rPr lang="en-US" sz="1400" dirty="0">
+                <a:solidFill>
+                  <a:srgbClr val="000000"/>
+                </a:solidFill>
+                <a:latin typeface="Meiryo UI" pitchFamily="34" charset="0"/>
+                <a:ea typeface="Meiryo UI" pitchFamily="34" charset="-122"/>
+                <a:cs typeface="Meiryo UI" pitchFamily="34" charset="-120"/>
+              </a:rPr>
+              <a:t>この2つの掛け合わせと、「運用そのものではなく企業への助言を極める」という第三の道を合わせ、3つの「なりたいプロ」を設定する。</a:t>
+            </a:r>
+            <a:endParaRPr lang="en-US" sz="1400" dirty="0"/>
+          </a:p>
+        </p:txBody>
+      </p:sp>
+      <p:sp>
+        <p:nvSpPr>
+          <p:cNvPr id="9" name="Shape 7"/>
+          <p:cNvSpPr/>
+          <p:nvPr/>
+        </p:nvSpPr>
+        <p:spPr>
+          <a:xfrm>
+            <a:off x="548640" y="4206240"/>
+            <a:ext cx="3566160" cy="1920240"/>
           </a:xfrm>
           <a:prstGeom prst="roundRect">
             <a:avLst>
-              <a:gd name="adj" fmla="val 19048"/>
-            </a:avLst>
-          </a:prstGeom>
-          <a:solidFill>
-            <a:srgbClr val="1E2761"/>
-          </a:solidFill>
-          <a:ln/>
-        </p:spPr>
-      </p:sp>
-      <p:sp>
-        <p:nvSpPr>
-          <p:cNvPr id="6" name="Text 4"/>
-          <p:cNvSpPr/>
-          <p:nvPr/>
-        </p:nvSpPr>
-        <p:spPr>
-          <a:xfrm>
-            <a:off x="777240" y="1801368"/>
-            <a:ext cx="502920" cy="384048"/>
-          </a:xfrm>
-          <a:prstGeom prst="rect">
-            <a:avLst/>
-          </a:prstGeom>
-          <a:noFill/>
-          <a:ln/>
-        </p:spPr>
-        <p:txBody>
-          <a:bodyPr wrap="square" rtlCol="0" anchor="ctr"/>
-          <a:lstStyle/>
-          <a:p>
-            <a:pPr algn="ctr" indent="0" marL="0">
-              <a:buNone/>
-            </a:pPr>
-            <a:r>
-              <a:rPr lang="en-US" sz="1600" b="1" dirty="0">
-                <a:solidFill>
-                  <a:srgbClr val="FFFFFF"/>
-                </a:solidFill>
-                <a:latin typeface="Meiryo UI" pitchFamily="34" charset="0"/>
-                <a:ea typeface="Meiryo UI" pitchFamily="34" charset="-122"/>
-                <a:cs typeface="Meiryo UI" pitchFamily="34" charset="-120"/>
-              </a:rPr>
-              <a:t>1</a:t>
-            </a:r>
-            <a:endParaRPr lang="en-US" sz="1600" dirty="0"/>
-          </a:p>
-        </p:txBody>
-      </p:sp>
-      <p:sp>
-        <p:nvSpPr>
-          <p:cNvPr id="7" name="Text 5"/>
-          <p:cNvSpPr/>
-          <p:nvPr/>
-        </p:nvSpPr>
-        <p:spPr>
-          <a:xfrm>
-            <a:off x="1417320" y="1764792"/>
-            <a:ext cx="2468880" cy="502920"/>
-          </a:xfrm>
-          <a:prstGeom prst="rect">
-            <a:avLst/>
-          </a:prstGeom>
-          <a:noFill/>
-          <a:ln/>
-        </p:spPr>
-        <p:txBody>
-          <a:bodyPr wrap="square" rtlCol="0" anchor="ctr"/>
-          <a:lstStyle/>
-          <a:p>
-            <a:pPr indent="0" marL="0">
-              <a:lnSpc>
-                <a:spcPct val="105000"/>
-              </a:lnSpc>
-              <a:buNone/>
-            </a:pPr>
-            <a:r>
-              <a:rPr lang="en-US" sz="1500" b="1" dirty="0">
-                <a:solidFill>
-                  <a:srgbClr val="000000"/>
-                </a:solidFill>
-                <a:latin typeface="Meiryo UI" pitchFamily="34" charset="0"/>
-                <a:ea typeface="Meiryo UI" pitchFamily="34" charset="-122"/>
-                <a:cs typeface="Meiryo UI" pitchFamily="34" charset="-120"/>
-              </a:rPr>
-              <a:t>アセットマネジメント業務を中心とするキャリア</a:t>
-            </a:r>
-            <a:endParaRPr lang="en-US" sz="1500" dirty="0"/>
-          </a:p>
-        </p:txBody>
-      </p:sp>
-      <p:sp>
-        <p:nvSpPr>
-          <p:cNvPr id="8" name="Shape 6"/>
-          <p:cNvSpPr/>
-          <p:nvPr/>
-        </p:nvSpPr>
-        <p:spPr>
-          <a:xfrm>
-            <a:off x="804672" y="2468880"/>
-            <a:ext cx="566928" cy="566928"/>
-          </a:xfrm>
-          <a:prstGeom prst="ellipse">
-            <a:avLst/>
-          </a:prstGeom>
-          <a:solidFill>
-            <a:srgbClr val="1E2761"/>
-          </a:solidFill>
-          <a:ln/>
-        </p:spPr>
-      </p:sp>
-      <p:pic>
-        <p:nvPicPr>
-          <p:cNvPr id="9" name="Image 0" descr="icon_building.png">    </p:cNvPr>
-          <p:cNvPicPr>
-            <a:picLocks noChangeAspect="1"/>
-          </p:cNvPicPr>
-          <p:nvPr/>
-        </p:nvPicPr>
-        <p:blipFill>
-          <a:blip r:embed="rId1"/>
-          <a:stretch>
-            <a:fillRect/>
-          </a:stretch>
-        </p:blipFill>
-        <p:spPr>
-          <a:xfrm>
-            <a:off x="923544" y="2587752"/>
-            <a:ext cx="329184" cy="329184"/>
-          </a:xfrm>
-          <a:prstGeom prst="rect">
-            <a:avLst/>
-          </a:prstGeom>
-        </p:spPr>
-      </p:pic>
-      <p:sp>
-        <p:nvSpPr>
-          <p:cNvPr id="10" name="Text 7"/>
-          <p:cNvSpPr/>
-          <p:nvPr/>
-        </p:nvSpPr>
-        <p:spPr>
-          <a:xfrm>
-            <a:off x="1508760" y="2441448"/>
-            <a:ext cx="2377440" cy="274320"/>
-          </a:xfrm>
-          <a:prstGeom prst="rect">
-            <a:avLst/>
-          </a:prstGeom>
-          <a:noFill/>
-          <a:ln/>
-        </p:spPr>
-        <p:txBody>
-          <a:bodyPr wrap="square" rtlCol="0" anchor="ctr"/>
-          <a:lstStyle/>
-          <a:p>
-            <a:pPr indent="0" marL="0">
-              <a:buNone/>
-            </a:pPr>
-            <a:r>
-              <a:rPr lang="en-US" sz="1300" b="1" dirty="0">
-                <a:solidFill>
-                  <a:srgbClr val="000000"/>
-                </a:solidFill>
-                <a:latin typeface="Meiryo UI" pitchFamily="34" charset="0"/>
-                <a:ea typeface="Meiryo UI" pitchFamily="34" charset="-122"/>
-                <a:cs typeface="Meiryo UI" pitchFamily="34" charset="-120"/>
-              </a:rPr>
-              <a:t>入行〜5年目</a:t>
-            </a:r>
-            <a:endParaRPr lang="en-US" sz="1300" dirty="0"/>
-          </a:p>
-        </p:txBody>
-      </p:sp>
-      <p:sp>
-        <p:nvSpPr>
-          <p:cNvPr id="11" name="Text 8"/>
-          <p:cNvSpPr/>
-          <p:nvPr/>
-        </p:nvSpPr>
-        <p:spPr>
-          <a:xfrm>
-            <a:off x="1508760" y="2706624"/>
-            <a:ext cx="2377440" cy="594360"/>
-          </a:xfrm>
-          <a:prstGeom prst="rect">
-            <a:avLst/>
-          </a:prstGeom>
-          <a:noFill/>
-          <a:ln/>
-        </p:spPr>
-        <p:txBody>
-          <a:bodyPr wrap="square" rtlCol="0" anchor="ctr"/>
-          <a:lstStyle/>
-          <a:p>
-            <a:pPr indent="0" marL="0">
-              <a:lnSpc>
-                <a:spcPct val="105000"/>
-              </a:lnSpc>
-              <a:buNone/>
-            </a:pPr>
-            <a:r>
-              <a:rPr lang="en-US" sz="1400" dirty="0">
-                <a:solidFill>
-                  <a:srgbClr val="000000"/>
-                </a:solidFill>
-                <a:latin typeface="Meiryo UI" pitchFamily="34" charset="0"/>
-                <a:ea typeface="Meiryo UI" pitchFamily="34" charset="-122"/>
-                <a:cs typeface="Meiryo UI" pitchFamily="34" charset="-120"/>
-              </a:rPr>
-              <a:t>信託銀行</a:t>
-            </a:r>
-            <a:endParaRPr lang="en-US" sz="1400" dirty="0"/>
-          </a:p>
-          <a:p>
-            <a:pPr indent="0" marL="0">
-              <a:lnSpc>
-                <a:spcPct val="105000"/>
-              </a:lnSpc>
-              <a:buNone/>
-            </a:pPr>
-            <a:r>
-              <a:rPr lang="en-US" sz="1400" dirty="0">
-                <a:solidFill>
-                  <a:srgbClr val="000000"/>
-                </a:solidFill>
-                <a:latin typeface="Meiryo UI" pitchFamily="34" charset="0"/>
-                <a:ea typeface="Meiryo UI" pitchFamily="34" charset="-122"/>
-                <a:cs typeface="Meiryo UI" pitchFamily="34" charset="-120"/>
-              </a:rPr>
-              <a:t>資産運用部門</a:t>
-            </a:r>
-            <a:endParaRPr lang="en-US" sz="1400" dirty="0"/>
-          </a:p>
-        </p:txBody>
-      </p:sp>
-      <p:sp>
-        <p:nvSpPr>
-          <p:cNvPr id="12" name="Text 9"/>
-          <p:cNvSpPr/>
-          <p:nvPr/>
-        </p:nvSpPr>
-        <p:spPr>
-          <a:xfrm>
-            <a:off x="804672" y="3035808"/>
-            <a:ext cx="566928" cy="292608"/>
-          </a:xfrm>
-          <a:prstGeom prst="rect">
-            <a:avLst/>
-          </a:prstGeom>
-          <a:noFill/>
-          <a:ln/>
-        </p:spPr>
-        <p:txBody>
-          <a:bodyPr wrap="square" rtlCol="0" anchor="ctr"/>
-          <a:lstStyle/>
-          <a:p>
-            <a:pPr algn="ctr" indent="0" marL="0">
-              <a:buNone/>
-            </a:pPr>
-            <a:r>
-              <a:rPr lang="en-US" sz="1800" dirty="0">
-                <a:solidFill>
-                  <a:srgbClr val="1E2761"/>
-                </a:solidFill>
-                <a:latin typeface="Meiryo UI" pitchFamily="34" charset="0"/>
-                <a:ea typeface="Meiryo UI" pitchFamily="34" charset="-122"/>
-                <a:cs typeface="Meiryo UI" pitchFamily="34" charset="-120"/>
-              </a:rPr>
-              <a:t>↓</a:t>
-            </a:r>
-            <a:endParaRPr lang="en-US" sz="1800" dirty="0"/>
-          </a:p>
-        </p:txBody>
-      </p:sp>
-      <p:sp>
-        <p:nvSpPr>
-          <p:cNvPr id="13" name="Shape 10"/>
-          <p:cNvSpPr/>
-          <p:nvPr/>
-        </p:nvSpPr>
-        <p:spPr>
-          <a:xfrm>
-            <a:off x="804672" y="3328416"/>
-            <a:ext cx="566928" cy="566928"/>
-          </a:xfrm>
-          <a:prstGeom prst="ellipse">
-            <a:avLst/>
-          </a:prstGeom>
-          <a:solidFill>
-            <a:srgbClr val="1E2761"/>
-          </a:solidFill>
-          <a:ln/>
-        </p:spPr>
-      </p:sp>
-      <p:pic>
-        <p:nvPicPr>
-          <p:cNvPr id="14" name="Image 1" descr="icon_exchange.png">    </p:cNvPr>
-          <p:cNvPicPr>
-            <a:picLocks noChangeAspect="1"/>
-          </p:cNvPicPr>
-          <p:nvPr/>
-        </p:nvPicPr>
-        <p:blipFill>
-          <a:blip r:embed="rId2"/>
-          <a:stretch>
-            <a:fillRect/>
-          </a:stretch>
-        </p:blipFill>
-        <p:spPr>
-          <a:xfrm>
-            <a:off x="923544" y="3447288"/>
-            <a:ext cx="329184" cy="329184"/>
-          </a:xfrm>
-          <a:prstGeom prst="rect">
-            <a:avLst/>
-          </a:prstGeom>
-        </p:spPr>
-      </p:pic>
-      <p:sp>
-        <p:nvSpPr>
-          <p:cNvPr id="15" name="Text 11"/>
-          <p:cNvSpPr/>
-          <p:nvPr/>
-        </p:nvSpPr>
-        <p:spPr>
-          <a:xfrm>
-            <a:off x="1508760" y="3300984"/>
-            <a:ext cx="2377440" cy="274320"/>
-          </a:xfrm>
-          <a:prstGeom prst="rect">
-            <a:avLst/>
-          </a:prstGeom>
-          <a:noFill/>
-          <a:ln/>
-        </p:spPr>
-        <p:txBody>
-          <a:bodyPr wrap="square" rtlCol="0" anchor="ctr"/>
-          <a:lstStyle/>
-          <a:p>
-            <a:pPr indent="0" marL="0">
-              <a:buNone/>
-            </a:pPr>
-            <a:r>
-              <a:rPr lang="en-US" sz="1300" b="1" dirty="0">
-                <a:solidFill>
-                  <a:srgbClr val="000000"/>
-                </a:solidFill>
-                <a:latin typeface="Meiryo UI" pitchFamily="34" charset="0"/>
-                <a:ea typeface="Meiryo UI" pitchFamily="34" charset="-122"/>
-                <a:cs typeface="Meiryo UI" pitchFamily="34" charset="-120"/>
-              </a:rPr>
-              <a:t>6〜12年目</a:t>
-            </a:r>
-            <a:endParaRPr lang="en-US" sz="1300" dirty="0"/>
-          </a:p>
-        </p:txBody>
-      </p:sp>
-      <p:sp>
-        <p:nvSpPr>
-          <p:cNvPr id="16" name="Text 12"/>
-          <p:cNvSpPr/>
-          <p:nvPr/>
-        </p:nvSpPr>
-        <p:spPr>
-          <a:xfrm>
-            <a:off x="1508760" y="3566160"/>
-            <a:ext cx="2377440" cy="594360"/>
-          </a:xfrm>
-          <a:prstGeom prst="rect">
-            <a:avLst/>
-          </a:prstGeom>
-          <a:noFill/>
-          <a:ln/>
-        </p:spPr>
-        <p:txBody>
-          <a:bodyPr wrap="square" rtlCol="0" anchor="ctr"/>
-          <a:lstStyle/>
-          <a:p>
-            <a:pPr indent="0" marL="0">
-              <a:lnSpc>
-                <a:spcPct val="105000"/>
-              </a:lnSpc>
-              <a:buNone/>
-            </a:pPr>
-            <a:r>
-              <a:rPr lang="en-US" sz="1400" dirty="0">
-                <a:solidFill>
-                  <a:srgbClr val="000000"/>
-                </a:solidFill>
-                <a:latin typeface="Meiryo UI" pitchFamily="34" charset="0"/>
-                <a:ea typeface="Meiryo UI" pitchFamily="34" charset="-122"/>
-                <a:cs typeface="Meiryo UI" pitchFamily="34" charset="-120"/>
-              </a:rPr>
-              <a:t>グループAM会社へ</a:t>
-            </a:r>
-            <a:endParaRPr lang="en-US" sz="1400" dirty="0"/>
-          </a:p>
-          <a:p>
-            <a:pPr indent="0" marL="0">
-              <a:lnSpc>
-                <a:spcPct val="105000"/>
-              </a:lnSpc>
-              <a:buNone/>
-            </a:pPr>
-            <a:r>
-              <a:rPr lang="en-US" sz="1400" dirty="0">
-                <a:solidFill>
-                  <a:srgbClr val="000000"/>
-                </a:solidFill>
-                <a:latin typeface="Meiryo UI" pitchFamily="34" charset="0"/>
-                <a:ea typeface="Meiryo UI" pitchFamily="34" charset="-122"/>
-                <a:cs typeface="Meiryo UI" pitchFamily="34" charset="-120"/>
-              </a:rPr>
-              <a:t>出向・転籍</a:t>
-            </a:r>
-            <a:endParaRPr lang="en-US" sz="1400" dirty="0"/>
-          </a:p>
-        </p:txBody>
-      </p:sp>
-      <p:sp>
-        <p:nvSpPr>
-          <p:cNvPr id="17" name="Text 13"/>
-          <p:cNvSpPr/>
-          <p:nvPr/>
-        </p:nvSpPr>
-        <p:spPr>
-          <a:xfrm>
-            <a:off x="804672" y="3895344"/>
-            <a:ext cx="566928" cy="292608"/>
-          </a:xfrm>
-          <a:prstGeom prst="rect">
-            <a:avLst/>
-          </a:prstGeom>
-          <a:noFill/>
-          <a:ln/>
-        </p:spPr>
-        <p:txBody>
-          <a:bodyPr wrap="square" rtlCol="0" anchor="ctr"/>
-          <a:lstStyle/>
-          <a:p>
-            <a:pPr algn="ctr" indent="0" marL="0">
-              <a:buNone/>
-            </a:pPr>
-            <a:r>
-              <a:rPr lang="en-US" sz="1800" dirty="0">
-                <a:solidFill>
-                  <a:srgbClr val="1E2761"/>
-                </a:solidFill>
-                <a:latin typeface="Meiryo UI" pitchFamily="34" charset="0"/>
-                <a:ea typeface="Meiryo UI" pitchFamily="34" charset="-122"/>
-                <a:cs typeface="Meiryo UI" pitchFamily="34" charset="-120"/>
-              </a:rPr>
-              <a:t>↓</a:t>
-            </a:r>
-            <a:endParaRPr lang="en-US" sz="1800" dirty="0"/>
-          </a:p>
-        </p:txBody>
-      </p:sp>
-      <p:sp>
-        <p:nvSpPr>
-          <p:cNvPr id="18" name="Shape 14"/>
-          <p:cNvSpPr/>
-          <p:nvPr/>
-        </p:nvSpPr>
-        <p:spPr>
-          <a:xfrm>
-            <a:off x="804672" y="4187952"/>
-            <a:ext cx="566928" cy="566928"/>
-          </a:xfrm>
-          <a:prstGeom prst="ellipse">
-            <a:avLst/>
-          </a:prstGeom>
-          <a:solidFill>
-            <a:srgbClr val="1E2761"/>
-          </a:solidFill>
-          <a:ln/>
-        </p:spPr>
-      </p:sp>
-      <p:pic>
-        <p:nvPicPr>
-          <p:cNvPr id="19" name="Image 2" descr="icon_crown.png">    </p:cNvPr>
-          <p:cNvPicPr>
-            <a:picLocks noChangeAspect="1"/>
-          </p:cNvPicPr>
-          <p:nvPr/>
-        </p:nvPicPr>
-        <p:blipFill>
-          <a:blip r:embed="rId3"/>
-          <a:stretch>
-            <a:fillRect/>
-          </a:stretch>
-        </p:blipFill>
-        <p:spPr>
-          <a:xfrm>
-            <a:off x="923544" y="4306824"/>
-            <a:ext cx="329184" cy="329184"/>
-          </a:xfrm>
-          <a:prstGeom prst="rect">
-            <a:avLst/>
-          </a:prstGeom>
-        </p:spPr>
-      </p:pic>
-      <p:sp>
-        <p:nvSpPr>
-          <p:cNvPr id="20" name="Text 15"/>
-          <p:cNvSpPr/>
-          <p:nvPr/>
-        </p:nvSpPr>
-        <p:spPr>
-          <a:xfrm>
-            <a:off x="1508760" y="4160520"/>
-            <a:ext cx="2377440" cy="274320"/>
-          </a:xfrm>
-          <a:prstGeom prst="rect">
-            <a:avLst/>
-          </a:prstGeom>
-          <a:noFill/>
-          <a:ln/>
-        </p:spPr>
-        <p:txBody>
-          <a:bodyPr wrap="square" rtlCol="0" anchor="ctr"/>
-          <a:lstStyle/>
-          <a:p>
-            <a:pPr indent="0" marL="0">
-              <a:buNone/>
-            </a:pPr>
-            <a:r>
-              <a:rPr lang="en-US" sz="1300" b="1" dirty="0">
-                <a:solidFill>
-                  <a:srgbClr val="000000"/>
-                </a:solidFill>
-                <a:latin typeface="Meiryo UI" pitchFamily="34" charset="0"/>
-                <a:ea typeface="Meiryo UI" pitchFamily="34" charset="-122"/>
-                <a:cs typeface="Meiryo UI" pitchFamily="34" charset="-120"/>
-              </a:rPr>
-              <a:t>13年目〜</a:t>
-            </a:r>
-            <a:endParaRPr lang="en-US" sz="1300" dirty="0"/>
-          </a:p>
-        </p:txBody>
-      </p:sp>
-      <p:sp>
-        <p:nvSpPr>
-          <p:cNvPr id="21" name="Text 16"/>
-          <p:cNvSpPr/>
-          <p:nvPr/>
-        </p:nvSpPr>
-        <p:spPr>
-          <a:xfrm>
-            <a:off x="1508760" y="4425696"/>
-            <a:ext cx="2377440" cy="594360"/>
-          </a:xfrm>
-          <a:prstGeom prst="rect">
-            <a:avLst/>
-          </a:prstGeom>
-          <a:noFill/>
-          <a:ln/>
-        </p:spPr>
-        <p:txBody>
-          <a:bodyPr wrap="square" rtlCol="0" anchor="ctr"/>
-          <a:lstStyle/>
-          <a:p>
-            <a:pPr indent="0" marL="0">
-              <a:lnSpc>
-                <a:spcPct val="105000"/>
-              </a:lnSpc>
-              <a:buNone/>
-            </a:pPr>
-            <a:r>
-              <a:rPr lang="en-US" sz="1400" dirty="0">
-                <a:solidFill>
-                  <a:srgbClr val="000000"/>
-                </a:solidFill>
-                <a:latin typeface="Meiryo UI" pitchFamily="34" charset="0"/>
-                <a:ea typeface="Meiryo UI" pitchFamily="34" charset="-122"/>
-                <a:cs typeface="Meiryo UI" pitchFamily="34" charset="-120"/>
-              </a:rPr>
-              <a:t>信託銀行復帰 or</a:t>
-            </a:r>
-            <a:endParaRPr lang="en-US" sz="1400" dirty="0"/>
-          </a:p>
-          <a:p>
-            <a:pPr indent="0" marL="0">
-              <a:lnSpc>
-                <a:spcPct val="105000"/>
-              </a:lnSpc>
-              <a:buNone/>
-            </a:pPr>
-            <a:r>
-              <a:rPr lang="en-US" sz="1400" dirty="0">
-                <a:solidFill>
-                  <a:srgbClr val="000000"/>
-                </a:solidFill>
-                <a:latin typeface="Meiryo UI" pitchFamily="34" charset="0"/>
-                <a:ea typeface="Meiryo UI" pitchFamily="34" charset="-122"/>
-                <a:cs typeface="Meiryo UI" pitchFamily="34" charset="-120"/>
-              </a:rPr>
-              <a:t>AM会社の上級職</a:t>
-            </a:r>
-            <a:endParaRPr lang="en-US" sz="1400" dirty="0"/>
-          </a:p>
-        </p:txBody>
-      </p:sp>
-      <p:sp>
-        <p:nvSpPr>
-          <p:cNvPr id="22" name="Shape 17"/>
-          <p:cNvSpPr/>
-          <p:nvPr/>
-        </p:nvSpPr>
-        <p:spPr>
-          <a:xfrm>
-            <a:off x="685800" y="5513832"/>
-            <a:ext cx="3291840" cy="822960"/>
-          </a:xfrm>
-          <a:prstGeom prst="roundRect">
-            <a:avLst>
-              <a:gd name="adj" fmla="val 11111"/>
+              <a:gd name="adj" fmla="val 4762"/>
             </a:avLst>
           </a:prstGeom>
           <a:solidFill>
             <a:srgbClr val="FFFFFF"/>
           </a:solidFill>
-          <a:ln w="12700">
+          <a:ln w="15875">
             <a:solidFill>
               <a:srgbClr val="1E2761"/>
             </a:solidFill>
@@ -3015,14 +2724,156 @@
       </p:sp>
       <p:sp>
         <p:nvSpPr>
-          <p:cNvPr id="23" name="Text 18"/>
-          <p:cNvSpPr/>
-          <p:nvPr/>
-        </p:nvSpPr>
-        <p:spPr>
-          <a:xfrm>
-            <a:off x="822960" y="5577840"/>
-            <a:ext cx="3017520" cy="713232"/>
+          <p:cNvPr id="10" name="Shape 8"/>
+          <p:cNvSpPr/>
+          <p:nvPr/>
+        </p:nvSpPr>
+        <p:spPr>
+          <a:xfrm>
+            <a:off x="731520" y="4370832"/>
+            <a:ext cx="438912" cy="347472"/>
+          </a:xfrm>
+          <a:prstGeom prst="roundRect">
+            <a:avLst>
+              <a:gd name="adj" fmla="val 18421"/>
+            </a:avLst>
+          </a:prstGeom>
+          <a:solidFill>
+            <a:srgbClr val="1E2761"/>
+          </a:solidFill>
+          <a:ln/>
+        </p:spPr>
+      </p:sp>
+      <p:sp>
+        <p:nvSpPr>
+          <p:cNvPr id="11" name="Text 9"/>
+          <p:cNvSpPr/>
+          <p:nvPr/>
+        </p:nvSpPr>
+        <p:spPr>
+          <a:xfrm>
+            <a:off x="731520" y="4370832"/>
+            <a:ext cx="438912" cy="347472"/>
+          </a:xfrm>
+          <a:prstGeom prst="rect">
+            <a:avLst/>
+          </a:prstGeom>
+          <a:noFill/>
+          <a:ln/>
+        </p:spPr>
+        <p:txBody>
+          <a:bodyPr wrap="square" rtlCol="0" anchor="ctr"/>
+          <a:lstStyle/>
+          <a:p>
+            <a:pPr algn="ctr" indent="0" marL="0">
+              <a:buNone/>
+            </a:pPr>
+            <a:r>
+              <a:rPr lang="en-US" sz="1400" b="1" dirty="0">
+                <a:solidFill>
+                  <a:srgbClr val="FFFFFF"/>
+                </a:solidFill>
+                <a:latin typeface="Meiryo UI" pitchFamily="34" charset="0"/>
+                <a:ea typeface="Meiryo UI" pitchFamily="34" charset="-122"/>
+                <a:cs typeface="Meiryo UI" pitchFamily="34" charset="-120"/>
+              </a:rPr>
+              <a:t>①</a:t>
+            </a:r>
+            <a:endParaRPr lang="en-US" sz="1400" dirty="0"/>
+          </a:p>
+        </p:txBody>
+      </p:sp>
+      <p:sp>
+        <p:nvSpPr>
+          <p:cNvPr id="12" name="Text 10"/>
+          <p:cNvSpPr/>
+          <p:nvPr/>
+        </p:nvSpPr>
+        <p:spPr>
+          <a:xfrm>
+            <a:off x="1234440" y="4334256"/>
+            <a:ext cx="2697480" cy="457200"/>
+          </a:xfrm>
+          <a:prstGeom prst="rect">
+            <a:avLst/>
+          </a:prstGeom>
+          <a:noFill/>
+          <a:ln/>
+        </p:spPr>
+        <p:txBody>
+          <a:bodyPr wrap="square" rtlCol="0" anchor="ctr"/>
+          <a:lstStyle/>
+          <a:p>
+            <a:pPr indent="0" marL="0">
+              <a:lnSpc>
+                <a:spcPct val="100000"/>
+              </a:lnSpc>
+              <a:buNone/>
+            </a:pPr>
+            <a:r>
+              <a:rPr lang="en-US" sz="1350" b="1" dirty="0">
+                <a:solidFill>
+                  <a:srgbClr val="000000"/>
+                </a:solidFill>
+                <a:latin typeface="Meiryo UI" pitchFamily="34" charset="0"/>
+                <a:ea typeface="Meiryo UI" pitchFamily="34" charset="-122"/>
+                <a:cs typeface="Meiryo UI" pitchFamily="34" charset="-120"/>
+              </a:rPr>
+              <a:t>資産運用のプロ</a:t>
+            </a:r>
+            <a:endParaRPr lang="en-US" sz="1350" dirty="0"/>
+          </a:p>
+        </p:txBody>
+      </p:sp>
+      <p:sp>
+        <p:nvSpPr>
+          <p:cNvPr id="13" name="Text 11"/>
+          <p:cNvSpPr/>
+          <p:nvPr/>
+        </p:nvSpPr>
+        <p:spPr>
+          <a:xfrm>
+            <a:off x="777240" y="4983480"/>
+            <a:ext cx="3108960" cy="365760"/>
+          </a:xfrm>
+          <a:prstGeom prst="rect">
+            <a:avLst/>
+          </a:prstGeom>
+          <a:noFill/>
+          <a:ln/>
+        </p:spPr>
+        <p:txBody>
+          <a:bodyPr wrap="square" rtlCol="0" anchor="ctr"/>
+          <a:lstStyle/>
+          <a:p>
+            <a:pPr indent="0" marL="0">
+              <a:buNone/>
+            </a:pPr>
+            <a:r>
+              <a:rPr lang="en-US" sz="1300" b="1" dirty="0">
+                <a:solidFill>
+                  <a:srgbClr val="1E2761"/>
+                </a:solidFill>
+                <a:latin typeface="Meiryo UI" pitchFamily="34" charset="0"/>
+                <a:ea typeface="Meiryo UI" pitchFamily="34" charset="-122"/>
+                <a:cs typeface="Meiryo UI" pitchFamily="34" charset="-120"/>
+              </a:rPr>
+              <a:t>頭脳＝自分</a:t>
+            </a:r>
+            <a:endParaRPr lang="en-US" sz="1300" dirty="0"/>
+          </a:p>
+        </p:txBody>
+      </p:sp>
+      <p:sp>
+        <p:nvSpPr>
+          <p:cNvPr id="14" name="Text 12"/>
+          <p:cNvSpPr/>
+          <p:nvPr/>
+        </p:nvSpPr>
+        <p:spPr>
+          <a:xfrm>
+            <a:off x="777240" y="5349240"/>
+            <a:ext cx="3108960" cy="685800"/>
           </a:xfrm>
           <a:prstGeom prst="rect">
             <a:avLst/>
@@ -3041,40 +2892,40 @@
               <a:buNone/>
             </a:pPr>
             <a:r>
-              <a:rPr lang="en-US" sz="1400" b="1" dirty="0">
-                <a:solidFill>
-                  <a:srgbClr val="1E2761"/>
-                </a:solidFill>
-                <a:latin typeface="Meiryo UI" pitchFamily="34" charset="0"/>
-                <a:ea typeface="Meiryo UI" pitchFamily="34" charset="-122"/>
-                <a:cs typeface="Meiryo UI" pitchFamily="34" charset="-120"/>
-              </a:rPr>
-              <a:t>信託銀行とグループAM会社を異動し、運用の「頭脳」を極める</a:t>
-            </a:r>
-            <a:endParaRPr lang="en-US" sz="1400" dirty="0"/>
-          </a:p>
-        </p:txBody>
-      </p:sp>
-      <p:sp>
-        <p:nvSpPr>
-          <p:cNvPr id="24" name="Shape 19"/>
-          <p:cNvSpPr/>
-          <p:nvPr/>
-        </p:nvSpPr>
-        <p:spPr>
-          <a:xfrm>
-            <a:off x="4389120" y="1600200"/>
-            <a:ext cx="3566160" cy="4892040"/>
+              <a:rPr lang="en-US" sz="1250" dirty="0">
+                <a:solidFill>
+                  <a:srgbClr val="000000"/>
+                </a:solidFill>
+                <a:latin typeface="Meiryo UI" pitchFamily="34" charset="0"/>
+                <a:ea typeface="Meiryo UI" pitchFamily="34" charset="-122"/>
+                <a:cs typeface="Meiryo UI" pitchFamily="34" charset="-120"/>
+              </a:rPr>
+              <a:t>対象＝顧客の信託資金／幅広い資産（公募投信・年金・オルタナティブ等）</a:t>
+            </a:r>
+            <a:endParaRPr lang="en-US" sz="1250" dirty="0"/>
+          </a:p>
+        </p:txBody>
+      </p:sp>
+      <p:sp>
+        <p:nvSpPr>
+          <p:cNvPr id="15" name="Shape 13"/>
+          <p:cNvSpPr/>
+          <p:nvPr/>
+        </p:nvSpPr>
+        <p:spPr>
+          <a:xfrm>
+            <a:off x="4389120" y="4206240"/>
+            <a:ext cx="3566160" cy="1920240"/>
           </a:xfrm>
           <a:prstGeom prst="roundRect">
             <a:avLst>
-              <a:gd name="adj" fmla="val 2564"/>
+              <a:gd name="adj" fmla="val 4762"/>
             </a:avLst>
           </a:prstGeom>
           <a:solidFill>
             <a:srgbClr val="FFFFFF"/>
           </a:solidFill>
-          <a:ln w="19050">
+          <a:ln w="15875">
             <a:solidFill>
               <a:srgbClr val="2E6F52"/>
             </a:solidFill>
@@ -3084,18 +2935,18 @@
       </p:sp>
       <p:sp>
         <p:nvSpPr>
-          <p:cNvPr id="25" name="Shape 20"/>
-          <p:cNvSpPr/>
-          <p:nvPr/>
-        </p:nvSpPr>
-        <p:spPr>
-          <a:xfrm>
-            <a:off x="4617720" y="1801368"/>
-            <a:ext cx="502920" cy="384048"/>
+          <p:cNvPr id="16" name="Shape 14"/>
+          <p:cNvSpPr/>
+          <p:nvPr/>
+        </p:nvSpPr>
+        <p:spPr>
+          <a:xfrm>
+            <a:off x="4572000" y="4370832"/>
+            <a:ext cx="438912" cy="347472"/>
           </a:xfrm>
           <a:prstGeom prst="roundRect">
             <a:avLst>
-              <a:gd name="adj" fmla="val 19048"/>
+              <a:gd name="adj" fmla="val 18421"/>
             </a:avLst>
           </a:prstGeom>
           <a:solidFill>
@@ -3106,14 +2957,14 @@
       </p:sp>
       <p:sp>
         <p:nvSpPr>
-          <p:cNvPr id="26" name="Text 21"/>
-          <p:cNvSpPr/>
-          <p:nvPr/>
-        </p:nvSpPr>
-        <p:spPr>
-          <a:xfrm>
-            <a:off x="4617720" y="1801368"/>
-            <a:ext cx="502920" cy="384048"/>
+          <p:cNvPr id="17" name="Text 15"/>
+          <p:cNvSpPr/>
+          <p:nvPr/>
+        </p:nvSpPr>
+        <p:spPr>
+          <a:xfrm>
+            <a:off x="4572000" y="4370832"/>
+            <a:ext cx="438912" cy="347472"/>
           </a:xfrm>
           <a:prstGeom prst="rect">
             <a:avLst/>
@@ -3129,7 +2980,7 @@
               <a:buNone/>
             </a:pPr>
             <a:r>
-              <a:rPr lang="en-US" sz="1600" b="1" dirty="0">
+              <a:rPr lang="en-US" sz="1400" b="1" dirty="0">
                 <a:solidFill>
                   <a:srgbClr val="FFFFFF"/>
                 </a:solidFill>
@@ -3137,22 +2988,22 @@
                 <a:ea typeface="Meiryo UI" pitchFamily="34" charset="-122"/>
                 <a:cs typeface="Meiryo UI" pitchFamily="34" charset="-120"/>
               </a:rPr>
-              <a:t>2</a:t>
-            </a:r>
-            <a:endParaRPr lang="en-US" sz="1600" dirty="0"/>
-          </a:p>
-        </p:txBody>
-      </p:sp>
-      <p:sp>
-        <p:nvSpPr>
-          <p:cNvPr id="27" name="Text 22"/>
-          <p:cNvSpPr/>
-          <p:nvPr/>
-        </p:nvSpPr>
-        <p:spPr>
-          <a:xfrm>
-            <a:off x="5257800" y="1764792"/>
-            <a:ext cx="2468880" cy="502920"/>
+              <a:t>②</a:t>
+            </a:r>
+            <a:endParaRPr lang="en-US" sz="1400" dirty="0"/>
+          </a:p>
+        </p:txBody>
+      </p:sp>
+      <p:sp>
+        <p:nvSpPr>
+          <p:cNvPr id="18" name="Text 16"/>
+          <p:cNvSpPr/>
+          <p:nvPr/>
+        </p:nvSpPr>
+        <p:spPr>
+          <a:xfrm>
+            <a:off x="5074920" y="4334256"/>
+            <a:ext cx="2697480" cy="457200"/>
           </a:xfrm>
           <a:prstGeom prst="rect">
             <a:avLst/>
@@ -3166,79 +3017,35 @@
           <a:p>
             <a:pPr indent="0" marL="0">
               <a:lnSpc>
-                <a:spcPct val="105000"/>
+                <a:spcPct val="100000"/>
               </a:lnSpc>
               <a:buNone/>
             </a:pPr>
             <a:r>
-              <a:rPr lang="en-US" sz="1500" b="1" dirty="0">
-                <a:solidFill>
-                  <a:srgbClr val="000000"/>
-                </a:solidFill>
-                <a:latin typeface="Meiryo UI" pitchFamily="34" charset="0"/>
-                <a:ea typeface="Meiryo UI" pitchFamily="34" charset="-122"/>
-                <a:cs typeface="Meiryo UI" pitchFamily="34" charset="-120"/>
-              </a:rPr>
-              <a:t>信託銀行の運用業務を中心とするキャリア</a:t>
-            </a:r>
-            <a:endParaRPr lang="en-US" sz="1500" dirty="0"/>
-          </a:p>
-        </p:txBody>
-      </p:sp>
-      <p:sp>
-        <p:nvSpPr>
-          <p:cNvPr id="28" name="Shape 23"/>
-          <p:cNvSpPr/>
-          <p:nvPr/>
-        </p:nvSpPr>
-        <p:spPr>
-          <a:xfrm>
-            <a:off x="4645152" y="2468880"/>
-            <a:ext cx="566928" cy="566928"/>
-          </a:xfrm>
-          <a:prstGeom prst="ellipse">
-            <a:avLst/>
-          </a:prstGeom>
-          <a:solidFill>
-            <a:srgbClr val="2E6F52"/>
-          </a:solidFill>
-          <a:ln/>
-        </p:spPr>
-      </p:sp>
-      <p:pic>
-        <p:nvPicPr>
-          <p:cNvPr id="29" name="Image 3" descr="icon_contract.png">    </p:cNvPr>
-          <p:cNvPicPr>
-            <a:picLocks noChangeAspect="1"/>
-          </p:cNvPicPr>
-          <p:nvPr/>
-        </p:nvPicPr>
-        <p:blipFill>
-          <a:blip r:embed="rId4"/>
-          <a:stretch>
-            <a:fillRect/>
-          </a:stretch>
-        </p:blipFill>
-        <p:spPr>
-          <a:xfrm>
-            <a:off x="4764024" y="2587752"/>
-            <a:ext cx="329184" cy="329184"/>
-          </a:xfrm>
-          <a:prstGeom prst="rect">
-            <a:avLst/>
-          </a:prstGeom>
-        </p:spPr>
-      </p:pic>
-      <p:sp>
-        <p:nvSpPr>
-          <p:cNvPr id="30" name="Text 24"/>
-          <p:cNvSpPr/>
-          <p:nvPr/>
-        </p:nvSpPr>
-        <p:spPr>
-          <a:xfrm>
-            <a:off x="5349240" y="2441448"/>
-            <a:ext cx="2377440" cy="274320"/>
+              <a:rPr lang="en-US" sz="1350" b="1" dirty="0">
+                <a:solidFill>
+                  <a:srgbClr val="000000"/>
+                </a:solidFill>
+                <a:latin typeface="Meiryo UI" pitchFamily="34" charset="0"/>
+                <a:ea typeface="Meiryo UI" pitchFamily="34" charset="-122"/>
+                <a:cs typeface="Meiryo UI" pitchFamily="34" charset="-120"/>
+              </a:rPr>
+              <a:t>企業法務・ガバナンスのプロ</a:t>
+            </a:r>
+            <a:endParaRPr lang="en-US" sz="1350" dirty="0"/>
+          </a:p>
+        </p:txBody>
+      </p:sp>
+      <p:sp>
+        <p:nvSpPr>
+          <p:cNvPr id="19" name="Text 17"/>
+          <p:cNvSpPr/>
+          <p:nvPr/>
+        </p:nvSpPr>
+        <p:spPr>
+          <a:xfrm>
+            <a:off x="4617720" y="4983480"/>
+            <a:ext cx="3108960" cy="365760"/>
           </a:xfrm>
           <a:prstGeom prst="rect">
             <a:avLst/>
@@ -3256,13 +3063,13 @@
             <a:r>
               <a:rPr lang="en-US" sz="1300" b="1" dirty="0">
                 <a:solidFill>
-                  <a:srgbClr val="000000"/>
-                </a:solidFill>
-                <a:latin typeface="Meiryo UI" pitchFamily="34" charset="0"/>
-                <a:ea typeface="Meiryo UI" pitchFamily="34" charset="-122"/>
-                <a:cs typeface="Meiryo UI" pitchFamily="34" charset="-120"/>
-              </a:rPr>
-              <a:t>入行〜5年目</a:t>
+                  <a:srgbClr val="2E6F52"/>
+                </a:solidFill>
+                <a:latin typeface="Meiryo UI" pitchFamily="34" charset="0"/>
+                <a:ea typeface="Meiryo UI" pitchFamily="34" charset="-122"/>
+                <a:cs typeface="Meiryo UI" pitchFamily="34" charset="-120"/>
+              </a:rPr>
+              <a:t>頭脳＝運用ではなく助言</a:t>
             </a:r>
             <a:endParaRPr lang="en-US" sz="1300" dirty="0"/>
           </a:p>
@@ -3270,14 +3077,14 @@
       </p:sp>
       <p:sp>
         <p:nvSpPr>
-          <p:cNvPr id="31" name="Text 25"/>
-          <p:cNvSpPr/>
-          <p:nvPr/>
-        </p:nvSpPr>
-        <p:spPr>
-          <a:xfrm>
-            <a:off x="5349240" y="2706624"/>
-            <a:ext cx="2377440" cy="594360"/>
+          <p:cNvPr id="20" name="Text 18"/>
+          <p:cNvSpPr/>
+          <p:nvPr/>
+        </p:nvSpPr>
+        <p:spPr>
+          <a:xfrm>
+            <a:off x="4617720" y="5349240"/>
+            <a:ext cx="3108960" cy="685800"/>
           </a:xfrm>
           <a:prstGeom prst="rect">
             <a:avLst/>
@@ -3291,502 +3098,45 @@
           <a:p>
             <a:pPr indent="0" marL="0">
               <a:lnSpc>
-                <a:spcPct val="105000"/>
+                <a:spcPct val="115000"/>
               </a:lnSpc>
               <a:buNone/>
             </a:pPr>
             <a:r>
-              <a:rPr lang="en-US" sz="1400" dirty="0">
-                <a:solidFill>
-                  <a:srgbClr val="000000"/>
-                </a:solidFill>
-                <a:latin typeface="Meiryo UI" pitchFamily="34" charset="0"/>
-                <a:ea typeface="Meiryo UI" pitchFamily="34" charset="-122"/>
-                <a:cs typeface="Meiryo UI" pitchFamily="34" charset="-120"/>
-              </a:rPr>
-              <a:t>信託銀行</a:t>
-            </a:r>
-            <a:endParaRPr lang="en-US" sz="1400" dirty="0"/>
-          </a:p>
-          <a:p>
-            <a:pPr indent="0" marL="0">
-              <a:lnSpc>
-                <a:spcPct val="105000"/>
-              </a:lnSpc>
-              <a:buNone/>
-            </a:pPr>
-            <a:r>
-              <a:rPr lang="en-US" sz="1400" dirty="0">
-                <a:solidFill>
-                  <a:srgbClr val="000000"/>
-                </a:solidFill>
-                <a:latin typeface="Meiryo UI" pitchFamily="34" charset="0"/>
-                <a:ea typeface="Meiryo UI" pitchFamily="34" charset="-122"/>
-                <a:cs typeface="Meiryo UI" pitchFamily="34" charset="-120"/>
-              </a:rPr>
-              <a:t>年金信託業務部門</a:t>
-            </a:r>
-            <a:endParaRPr lang="en-US" sz="1400" dirty="0"/>
-          </a:p>
-        </p:txBody>
-      </p:sp>
-      <p:sp>
-        <p:nvSpPr>
-          <p:cNvPr id="32" name="Text 26"/>
-          <p:cNvSpPr/>
-          <p:nvPr/>
-        </p:nvSpPr>
-        <p:spPr>
-          <a:xfrm>
-            <a:off x="4645152" y="3035808"/>
-            <a:ext cx="566928" cy="292608"/>
-          </a:xfrm>
-          <a:prstGeom prst="rect">
-            <a:avLst/>
-          </a:prstGeom>
-          <a:noFill/>
-          <a:ln/>
-        </p:spPr>
-        <p:txBody>
-          <a:bodyPr wrap="square" rtlCol="0" anchor="ctr"/>
-          <a:lstStyle/>
-          <a:p>
-            <a:pPr algn="ctr" indent="0" marL="0">
-              <a:buNone/>
-            </a:pPr>
-            <a:r>
-              <a:rPr lang="en-US" sz="1800" dirty="0">
-                <a:solidFill>
-                  <a:srgbClr val="2E6F52"/>
-                </a:solidFill>
-                <a:latin typeface="Meiryo UI" pitchFamily="34" charset="0"/>
-                <a:ea typeface="Meiryo UI" pitchFamily="34" charset="-122"/>
-                <a:cs typeface="Meiryo UI" pitchFamily="34" charset="-120"/>
-              </a:rPr>
-              <a:t>↓</a:t>
-            </a:r>
-            <a:endParaRPr lang="en-US" sz="1800" dirty="0"/>
-          </a:p>
-        </p:txBody>
-      </p:sp>
-      <p:sp>
-        <p:nvSpPr>
-          <p:cNvPr id="33" name="Shape 27"/>
-          <p:cNvSpPr/>
-          <p:nvPr/>
-        </p:nvSpPr>
-        <p:spPr>
-          <a:xfrm>
-            <a:off x="4645152" y="3328416"/>
-            <a:ext cx="566928" cy="566928"/>
-          </a:xfrm>
-          <a:prstGeom prst="ellipse">
-            <a:avLst/>
-          </a:prstGeom>
-          <a:solidFill>
-            <a:srgbClr val="2E6F52"/>
-          </a:solidFill>
-          <a:ln/>
-        </p:spPr>
-      </p:sp>
-      <p:pic>
-        <p:nvPicPr>
-          <p:cNvPr id="34" name="Image 4" descr="icon_exchange.png">    </p:cNvPr>
-          <p:cNvPicPr>
-            <a:picLocks noChangeAspect="1"/>
-          </p:cNvPicPr>
-          <p:nvPr/>
-        </p:nvPicPr>
-        <p:blipFill>
-          <a:blip r:embed="rId5"/>
-          <a:stretch>
-            <a:fillRect/>
-          </a:stretch>
-        </p:blipFill>
-        <p:spPr>
-          <a:xfrm>
-            <a:off x="4764024" y="3447288"/>
-            <a:ext cx="329184" cy="329184"/>
-          </a:xfrm>
-          <a:prstGeom prst="rect">
-            <a:avLst/>
-          </a:prstGeom>
-        </p:spPr>
-      </p:pic>
-      <p:sp>
-        <p:nvSpPr>
-          <p:cNvPr id="35" name="Text 28"/>
-          <p:cNvSpPr/>
-          <p:nvPr/>
-        </p:nvSpPr>
-        <p:spPr>
-          <a:xfrm>
-            <a:off x="5349240" y="3300984"/>
-            <a:ext cx="2377440" cy="274320"/>
-          </a:xfrm>
-          <a:prstGeom prst="rect">
-            <a:avLst/>
-          </a:prstGeom>
-          <a:noFill/>
-          <a:ln/>
-        </p:spPr>
-        <p:txBody>
-          <a:bodyPr wrap="square" rtlCol="0" anchor="ctr"/>
-          <a:lstStyle/>
-          <a:p>
-            <a:pPr indent="0" marL="0">
-              <a:buNone/>
-            </a:pPr>
-            <a:r>
-              <a:rPr lang="en-US" sz="1300" b="1" dirty="0">
-                <a:solidFill>
-                  <a:srgbClr val="000000"/>
-                </a:solidFill>
-                <a:latin typeface="Meiryo UI" pitchFamily="34" charset="0"/>
-                <a:ea typeface="Meiryo UI" pitchFamily="34" charset="-122"/>
-                <a:cs typeface="Meiryo UI" pitchFamily="34" charset="-120"/>
-              </a:rPr>
-              <a:t>6〜10年目</a:t>
-            </a:r>
-            <a:endParaRPr lang="en-US" sz="1300" dirty="0"/>
-          </a:p>
-        </p:txBody>
-      </p:sp>
-      <p:sp>
-        <p:nvSpPr>
-          <p:cNvPr id="36" name="Text 29"/>
-          <p:cNvSpPr/>
-          <p:nvPr/>
-        </p:nvSpPr>
-        <p:spPr>
-          <a:xfrm>
-            <a:off x="5349240" y="3566160"/>
-            <a:ext cx="2377440" cy="594360"/>
-          </a:xfrm>
-          <a:prstGeom prst="rect">
-            <a:avLst/>
-          </a:prstGeom>
-          <a:noFill/>
-          <a:ln/>
-        </p:spPr>
-        <p:txBody>
-          <a:bodyPr wrap="square" rtlCol="0" anchor="ctr"/>
-          <a:lstStyle/>
-          <a:p>
-            <a:pPr indent="0" marL="0">
-              <a:lnSpc>
-                <a:spcPct val="105000"/>
-              </a:lnSpc>
-              <a:buNone/>
-            </a:pPr>
-            <a:r>
-              <a:rPr lang="en-US" sz="1400" dirty="0">
-                <a:solidFill>
-                  <a:srgbClr val="000000"/>
-                </a:solidFill>
-                <a:latin typeface="Meiryo UI" pitchFamily="34" charset="0"/>
-                <a:ea typeface="Meiryo UI" pitchFamily="34" charset="-122"/>
-                <a:cs typeface="Meiryo UI" pitchFamily="34" charset="-120"/>
-              </a:rPr>
-              <a:t>グループAM会社へ</a:t>
-            </a:r>
-            <a:endParaRPr lang="en-US" sz="1400" dirty="0"/>
-          </a:p>
-          <a:p>
-            <a:pPr indent="0" marL="0">
-              <a:lnSpc>
-                <a:spcPct val="105000"/>
-              </a:lnSpc>
-              <a:buNone/>
-            </a:pPr>
-            <a:r>
-              <a:rPr lang="en-US" sz="1400" dirty="0">
-                <a:solidFill>
-                  <a:srgbClr val="000000"/>
-                </a:solidFill>
-                <a:latin typeface="Meiryo UI" pitchFamily="34" charset="0"/>
-                <a:ea typeface="Meiryo UI" pitchFamily="34" charset="-122"/>
-                <a:cs typeface="Meiryo UI" pitchFamily="34" charset="-120"/>
-              </a:rPr>
-              <a:t>出向</a:t>
-            </a:r>
-            <a:endParaRPr lang="en-US" sz="1400" dirty="0"/>
-          </a:p>
-        </p:txBody>
-      </p:sp>
-      <p:sp>
-        <p:nvSpPr>
-          <p:cNvPr id="37" name="Text 30"/>
-          <p:cNvSpPr/>
-          <p:nvPr/>
-        </p:nvSpPr>
-        <p:spPr>
-          <a:xfrm>
-            <a:off x="4645152" y="3895344"/>
-            <a:ext cx="566928" cy="292608"/>
-          </a:xfrm>
-          <a:prstGeom prst="rect">
-            <a:avLst/>
-          </a:prstGeom>
-          <a:noFill/>
-          <a:ln/>
-        </p:spPr>
-        <p:txBody>
-          <a:bodyPr wrap="square" rtlCol="0" anchor="ctr"/>
-          <a:lstStyle/>
-          <a:p>
-            <a:pPr algn="ctr" indent="0" marL="0">
-              <a:buNone/>
-            </a:pPr>
-            <a:r>
-              <a:rPr lang="en-US" sz="1800" dirty="0">
-                <a:solidFill>
-                  <a:srgbClr val="2E6F52"/>
-                </a:solidFill>
-                <a:latin typeface="Meiryo UI" pitchFamily="34" charset="0"/>
-                <a:ea typeface="Meiryo UI" pitchFamily="34" charset="-122"/>
-                <a:cs typeface="Meiryo UI" pitchFamily="34" charset="-120"/>
-              </a:rPr>
-              <a:t>↓</a:t>
-            </a:r>
-            <a:endParaRPr lang="en-US" sz="1800" dirty="0"/>
-          </a:p>
-        </p:txBody>
-      </p:sp>
-      <p:sp>
-        <p:nvSpPr>
-          <p:cNvPr id="38" name="Shape 31"/>
-          <p:cNvSpPr/>
-          <p:nvPr/>
-        </p:nvSpPr>
-        <p:spPr>
-          <a:xfrm>
-            <a:off x="4645152" y="4187952"/>
-            <a:ext cx="566928" cy="566928"/>
-          </a:xfrm>
-          <a:prstGeom prst="ellipse">
-            <a:avLst/>
-          </a:prstGeom>
-          <a:solidFill>
-            <a:srgbClr val="2E6F52"/>
-          </a:solidFill>
-          <a:ln/>
-        </p:spPr>
-      </p:sp>
-      <p:pic>
-        <p:nvPicPr>
-          <p:cNvPr id="39" name="Image 5" descr="icon_usertie.png">    </p:cNvPr>
-          <p:cNvPicPr>
-            <a:picLocks noChangeAspect="1"/>
-          </p:cNvPicPr>
-          <p:nvPr/>
-        </p:nvPicPr>
-        <p:blipFill>
-          <a:blip r:embed="rId6"/>
-          <a:stretch>
-            <a:fillRect/>
-          </a:stretch>
-        </p:blipFill>
-        <p:spPr>
-          <a:xfrm>
-            <a:off x="4764024" y="4306824"/>
-            <a:ext cx="329184" cy="329184"/>
-          </a:xfrm>
-          <a:prstGeom prst="rect">
-            <a:avLst/>
-          </a:prstGeom>
-        </p:spPr>
-      </p:pic>
-      <p:sp>
-        <p:nvSpPr>
-          <p:cNvPr id="40" name="Text 32"/>
-          <p:cNvSpPr/>
-          <p:nvPr/>
-        </p:nvSpPr>
-        <p:spPr>
-          <a:xfrm>
-            <a:off x="5349240" y="4160520"/>
-            <a:ext cx="2377440" cy="274320"/>
-          </a:xfrm>
-          <a:prstGeom prst="rect">
-            <a:avLst/>
-          </a:prstGeom>
-          <a:noFill/>
-          <a:ln/>
-        </p:spPr>
-        <p:txBody>
-          <a:bodyPr wrap="square" rtlCol="0" anchor="ctr"/>
-          <a:lstStyle/>
-          <a:p>
-            <a:pPr indent="0" marL="0">
-              <a:buNone/>
-            </a:pPr>
-            <a:r>
-              <a:rPr lang="en-US" sz="1300" b="1" dirty="0">
-                <a:solidFill>
-                  <a:srgbClr val="000000"/>
-                </a:solidFill>
-                <a:latin typeface="Meiryo UI" pitchFamily="34" charset="0"/>
-                <a:ea typeface="Meiryo UI" pitchFamily="34" charset="-122"/>
-                <a:cs typeface="Meiryo UI" pitchFamily="34" charset="-120"/>
-              </a:rPr>
-              <a:t>11年目〜</a:t>
-            </a:r>
-            <a:endParaRPr lang="en-US" sz="1300" dirty="0"/>
-          </a:p>
-        </p:txBody>
-      </p:sp>
-      <p:sp>
-        <p:nvSpPr>
-          <p:cNvPr id="41" name="Text 33"/>
-          <p:cNvSpPr/>
-          <p:nvPr/>
-        </p:nvSpPr>
-        <p:spPr>
-          <a:xfrm>
-            <a:off x="5349240" y="4425696"/>
-            <a:ext cx="2377440" cy="594360"/>
-          </a:xfrm>
-          <a:prstGeom prst="rect">
-            <a:avLst/>
-          </a:prstGeom>
-          <a:noFill/>
-          <a:ln/>
-        </p:spPr>
-        <p:txBody>
-          <a:bodyPr wrap="square" rtlCol="0" anchor="ctr"/>
-          <a:lstStyle/>
-          <a:p>
-            <a:pPr indent="0" marL="0">
-              <a:lnSpc>
-                <a:spcPct val="105000"/>
-              </a:lnSpc>
-              <a:buNone/>
-            </a:pPr>
-            <a:r>
-              <a:rPr lang="en-US" sz="1400" dirty="0">
-                <a:solidFill>
-                  <a:srgbClr val="000000"/>
-                </a:solidFill>
-                <a:latin typeface="Meiryo UI" pitchFamily="34" charset="0"/>
-                <a:ea typeface="Meiryo UI" pitchFamily="34" charset="-122"/>
-                <a:cs typeface="Meiryo UI" pitchFamily="34" charset="-120"/>
-              </a:rPr>
-              <a:t>信託銀行</a:t>
-            </a:r>
-            <a:endParaRPr lang="en-US" sz="1400" dirty="0"/>
-          </a:p>
-          <a:p>
-            <a:pPr indent="0" marL="0">
-              <a:lnSpc>
-                <a:spcPct val="105000"/>
-              </a:lnSpc>
-              <a:buNone/>
-            </a:pPr>
-            <a:r>
-              <a:rPr lang="en-US" sz="1400" dirty="0">
-                <a:solidFill>
-                  <a:srgbClr val="000000"/>
-                </a:solidFill>
-                <a:latin typeface="Meiryo UI" pitchFamily="34" charset="0"/>
-                <a:ea typeface="Meiryo UI" pitchFamily="34" charset="-122"/>
-                <a:cs typeface="Meiryo UI" pitchFamily="34" charset="-120"/>
-              </a:rPr>
-              <a:t>資産運用部門管理職</a:t>
-            </a:r>
-            <a:endParaRPr lang="en-US" sz="1400" dirty="0"/>
-          </a:p>
-        </p:txBody>
-      </p:sp>
-      <p:sp>
-        <p:nvSpPr>
-          <p:cNvPr id="42" name="Shape 34"/>
-          <p:cNvSpPr/>
-          <p:nvPr/>
-        </p:nvSpPr>
-        <p:spPr>
-          <a:xfrm>
-            <a:off x="4526280" y="5513832"/>
-            <a:ext cx="3291840" cy="822960"/>
+              <a:rPr lang="en-US" sz="1250" dirty="0">
+                <a:solidFill>
+                  <a:srgbClr val="000000"/>
+                </a:solidFill>
+                <a:latin typeface="Meiryo UI" pitchFamily="34" charset="0"/>
+                <a:ea typeface="Meiryo UI" pitchFamily="34" charset="-122"/>
+                <a:cs typeface="Meiryo UI" pitchFamily="34" charset="-120"/>
+              </a:rPr>
+              <a:t>対象＝企業のガバナンス・株主総会・株主対応</a:t>
+            </a:r>
+            <a:endParaRPr lang="en-US" sz="1250" dirty="0"/>
+          </a:p>
+        </p:txBody>
+      </p:sp>
+      <p:sp>
+        <p:nvSpPr>
+          <p:cNvPr id="21" name="Shape 19"/>
+          <p:cNvSpPr/>
+          <p:nvPr/>
+        </p:nvSpPr>
+        <p:spPr>
+          <a:xfrm>
+            <a:off x="8229600" y="4206240"/>
+            <a:ext cx="3566160" cy="1920240"/>
           </a:xfrm>
           <a:prstGeom prst="roundRect">
             <a:avLst>
-              <a:gd name="adj" fmla="val 11111"/>
+              <a:gd name="adj" fmla="val 4762"/>
             </a:avLst>
           </a:prstGeom>
           <a:solidFill>
             <a:srgbClr val="FFFFFF"/>
           </a:solidFill>
-          <a:ln w="12700">
-            <a:solidFill>
-              <a:srgbClr val="2E6F52"/>
-            </a:solidFill>
-            <a:prstDash val="solid"/>
-          </a:ln>
-        </p:spPr>
-      </p:sp>
-      <p:sp>
-        <p:nvSpPr>
-          <p:cNvPr id="43" name="Text 35"/>
-          <p:cNvSpPr/>
-          <p:nvPr/>
-        </p:nvSpPr>
-        <p:spPr>
-          <a:xfrm>
-            <a:off x="4663440" y="5577840"/>
-            <a:ext cx="3017520" cy="713232"/>
-          </a:xfrm>
-          <a:prstGeom prst="rect">
-            <a:avLst/>
-          </a:prstGeom>
-          <a:noFill/>
-          <a:ln/>
-        </p:spPr>
-        <p:txBody>
-          <a:bodyPr wrap="square" rtlCol="0" anchor="ctr"/>
-          <a:lstStyle/>
-          <a:p>
-            <a:pPr indent="0" marL="0">
-              <a:lnSpc>
-                <a:spcPct val="115000"/>
-              </a:lnSpc>
-              <a:buNone/>
-            </a:pPr>
-            <a:r>
-              <a:rPr lang="en-US" sz="1400" b="1" dirty="0">
-                <a:solidFill>
-                  <a:srgbClr val="2E6F52"/>
-                </a:solidFill>
-                <a:latin typeface="Meiryo UI" pitchFamily="34" charset="0"/>
-                <a:ea typeface="Meiryo UI" pitchFamily="34" charset="-122"/>
-                <a:cs typeface="Meiryo UI" pitchFamily="34" charset="-120"/>
-              </a:rPr>
-              <a:t>信託銀行に軸足を置きつつ、AM会社を経験し「委託する側」の視点も得る</a:t>
-            </a:r>
-            <a:endParaRPr lang="en-US" sz="1400" dirty="0"/>
-          </a:p>
-        </p:txBody>
-      </p:sp>
-      <p:sp>
-        <p:nvSpPr>
-          <p:cNvPr id="44" name="Shape 36"/>
-          <p:cNvSpPr/>
-          <p:nvPr/>
-        </p:nvSpPr>
-        <p:spPr>
-          <a:xfrm>
-            <a:off x="8229600" y="1600200"/>
-            <a:ext cx="3566160" cy="4892040"/>
-          </a:xfrm>
-          <a:prstGeom prst="roundRect">
-            <a:avLst>
-              <a:gd name="adj" fmla="val 2564"/>
-            </a:avLst>
-          </a:prstGeom>
-          <a:solidFill>
-            <a:srgbClr val="FFFFFF"/>
-          </a:solidFill>
-          <a:ln w="19050">
+          <a:ln w="15875">
             <a:solidFill>
               <a:srgbClr val="8A4B1E"/>
             </a:solidFill>
@@ -3796,18 +3146,18 @@
       </p:sp>
       <p:sp>
         <p:nvSpPr>
-          <p:cNvPr id="45" name="Shape 37"/>
-          <p:cNvSpPr/>
-          <p:nvPr/>
-        </p:nvSpPr>
-        <p:spPr>
-          <a:xfrm>
-            <a:off x="8458200" y="1801368"/>
-            <a:ext cx="502920" cy="384048"/>
+          <p:cNvPr id="22" name="Shape 20"/>
+          <p:cNvSpPr/>
+          <p:nvPr/>
+        </p:nvSpPr>
+        <p:spPr>
+          <a:xfrm>
+            <a:off x="8412480" y="4370832"/>
+            <a:ext cx="438912" cy="347472"/>
           </a:xfrm>
           <a:prstGeom prst="roundRect">
             <a:avLst>
-              <a:gd name="adj" fmla="val 19048"/>
+              <a:gd name="adj" fmla="val 18421"/>
             </a:avLst>
           </a:prstGeom>
           <a:solidFill>
@@ -3818,14 +3168,14 @@
       </p:sp>
       <p:sp>
         <p:nvSpPr>
-          <p:cNvPr id="46" name="Text 38"/>
-          <p:cNvSpPr/>
-          <p:nvPr/>
-        </p:nvSpPr>
-        <p:spPr>
-          <a:xfrm>
-            <a:off x="8458200" y="1801368"/>
-            <a:ext cx="502920" cy="384048"/>
+          <p:cNvPr id="23" name="Text 21"/>
+          <p:cNvSpPr/>
+          <p:nvPr/>
+        </p:nvSpPr>
+        <p:spPr>
+          <a:xfrm>
+            <a:off x="8412480" y="4370832"/>
+            <a:ext cx="438912" cy="347472"/>
           </a:xfrm>
           <a:prstGeom prst="rect">
             <a:avLst/>
@@ -3841,7 +3191,7 @@
               <a:buNone/>
             </a:pPr>
             <a:r>
-              <a:rPr lang="en-US" sz="1600" b="1" dirty="0">
+              <a:rPr lang="en-US" sz="1400" b="1" dirty="0">
                 <a:solidFill>
                   <a:srgbClr val="FFFFFF"/>
                 </a:solidFill>
@@ -3849,22 +3199,22 @@
                 <a:ea typeface="Meiryo UI" pitchFamily="34" charset="-122"/>
                 <a:cs typeface="Meiryo UI" pitchFamily="34" charset="-120"/>
               </a:rPr>
-              <a:t>3</a:t>
-            </a:r>
-            <a:endParaRPr lang="en-US" sz="1600" dirty="0"/>
-          </a:p>
-        </p:txBody>
-      </p:sp>
-      <p:sp>
-        <p:nvSpPr>
-          <p:cNvPr id="47" name="Text 39"/>
-          <p:cNvSpPr/>
-          <p:nvPr/>
-        </p:nvSpPr>
-        <p:spPr>
-          <a:xfrm>
-            <a:off x="9098280" y="1764792"/>
-            <a:ext cx="2468880" cy="502920"/>
+              <a:t>③</a:t>
+            </a:r>
+            <a:endParaRPr lang="en-US" sz="1400" dirty="0"/>
+          </a:p>
+        </p:txBody>
+      </p:sp>
+      <p:sp>
+        <p:nvSpPr>
+          <p:cNvPr id="24" name="Text 22"/>
+          <p:cNvSpPr/>
+          <p:nvPr/>
+        </p:nvSpPr>
+        <p:spPr>
+          <a:xfrm>
+            <a:off x="8915400" y="4334256"/>
+            <a:ext cx="2697480" cy="457200"/>
           </a:xfrm>
           <a:prstGeom prst="rect">
             <a:avLst/>
@@ -3878,79 +3228,35 @@
           <a:p>
             <a:pPr indent="0" marL="0">
               <a:lnSpc>
-                <a:spcPct val="105000"/>
+                <a:spcPct val="100000"/>
               </a:lnSpc>
               <a:buNone/>
             </a:pPr>
             <a:r>
-              <a:rPr lang="en-US" sz="1500" b="1" dirty="0">
-                <a:solidFill>
-                  <a:srgbClr val="000000"/>
-                </a:solidFill>
-                <a:latin typeface="Meiryo UI" pitchFamily="34" charset="0"/>
-                <a:ea typeface="Meiryo UI" pitchFamily="34" charset="-122"/>
-                <a:cs typeface="Meiryo UI" pitchFamily="34" charset="-120"/>
-              </a:rPr>
-              <a:t>銀行の自己勘定運用（マーケット業務）を中心とするキャリア</a:t>
-            </a:r>
-            <a:endParaRPr lang="en-US" sz="1500" dirty="0"/>
-          </a:p>
-        </p:txBody>
-      </p:sp>
-      <p:sp>
-        <p:nvSpPr>
-          <p:cNvPr id="48" name="Shape 40"/>
-          <p:cNvSpPr/>
-          <p:nvPr/>
-        </p:nvSpPr>
-        <p:spPr>
-          <a:xfrm>
-            <a:off x="8485632" y="2468880"/>
-            <a:ext cx="566928" cy="566928"/>
-          </a:xfrm>
-          <a:prstGeom prst="ellipse">
-            <a:avLst/>
-          </a:prstGeom>
-          <a:solidFill>
-            <a:srgbClr val="8A4B1E"/>
-          </a:solidFill>
-          <a:ln/>
-        </p:spPr>
-      </p:sp>
-      <p:pic>
-        <p:nvPicPr>
-          <p:cNvPr id="49" name="Image 6" descr="icon_landmark.png">    </p:cNvPr>
-          <p:cNvPicPr>
-            <a:picLocks noChangeAspect="1"/>
-          </p:cNvPicPr>
-          <p:nvPr/>
-        </p:nvPicPr>
-        <p:blipFill>
-          <a:blip r:embed="rId7"/>
-          <a:stretch>
-            <a:fillRect/>
-          </a:stretch>
-        </p:blipFill>
-        <p:spPr>
-          <a:xfrm>
-            <a:off x="8604504" y="2587752"/>
-            <a:ext cx="329184" cy="329184"/>
-          </a:xfrm>
-          <a:prstGeom prst="rect">
-            <a:avLst/>
-          </a:prstGeom>
-        </p:spPr>
-      </p:pic>
-      <p:sp>
-        <p:nvSpPr>
-          <p:cNvPr id="50" name="Text 41"/>
-          <p:cNvSpPr/>
-          <p:nvPr/>
-        </p:nvSpPr>
-        <p:spPr>
-          <a:xfrm>
-            <a:off x="9189720" y="2441448"/>
-            <a:ext cx="2377440" cy="274320"/>
+              <a:rPr lang="en-US" sz="1350" b="1" dirty="0">
+                <a:solidFill>
+                  <a:srgbClr val="000000"/>
+                </a:solidFill>
+                <a:latin typeface="Meiryo UI" pitchFamily="34" charset="0"/>
+                <a:ea typeface="Meiryo UI" pitchFamily="34" charset="-122"/>
+                <a:cs typeface="Meiryo UI" pitchFamily="34" charset="-120"/>
+              </a:rPr>
+              <a:t>自己勘定運用のプロ</a:t>
+            </a:r>
+            <a:endParaRPr lang="en-US" sz="1350" dirty="0"/>
+          </a:p>
+        </p:txBody>
+      </p:sp>
+      <p:sp>
+        <p:nvSpPr>
+          <p:cNvPr id="25" name="Text 23"/>
+          <p:cNvSpPr/>
+          <p:nvPr/>
+        </p:nvSpPr>
+        <p:spPr>
+          <a:xfrm>
+            <a:off x="8458200" y="4983480"/>
+            <a:ext cx="3108960" cy="365760"/>
           </a:xfrm>
           <a:prstGeom prst="rect">
             <a:avLst/>
@@ -3968,13 +3274,13 @@
             <a:r>
               <a:rPr lang="en-US" sz="1300" b="1" dirty="0">
                 <a:solidFill>
-                  <a:srgbClr val="000000"/>
-                </a:solidFill>
-                <a:latin typeface="Meiryo UI" pitchFamily="34" charset="0"/>
-                <a:ea typeface="Meiryo UI" pitchFamily="34" charset="-122"/>
-                <a:cs typeface="Meiryo UI" pitchFamily="34" charset="-120"/>
-              </a:rPr>
-              <a:t>入行〜5年目</a:t>
+                  <a:srgbClr val="8A4B1E"/>
+                </a:solidFill>
+                <a:latin typeface="Meiryo UI" pitchFamily="34" charset="0"/>
+                <a:ea typeface="Meiryo UI" pitchFamily="34" charset="-122"/>
+                <a:cs typeface="Meiryo UI" pitchFamily="34" charset="-120"/>
+              </a:rPr>
+              <a:t>頭脳＝自分</a:t>
             </a:r>
             <a:endParaRPr lang="en-US" sz="1300" dirty="0"/>
           </a:p>
@@ -3982,471 +3288,14 @@
       </p:sp>
       <p:sp>
         <p:nvSpPr>
-          <p:cNvPr id="51" name="Text 42"/>
-          <p:cNvSpPr/>
-          <p:nvPr/>
-        </p:nvSpPr>
-        <p:spPr>
-          <a:xfrm>
-            <a:off x="9189720" y="2706624"/>
-            <a:ext cx="2377440" cy="594360"/>
-          </a:xfrm>
-          <a:prstGeom prst="rect">
-            <a:avLst/>
-          </a:prstGeom>
-          <a:noFill/>
-          <a:ln/>
-        </p:spPr>
-        <p:txBody>
-          <a:bodyPr wrap="square" rtlCol="0" anchor="ctr"/>
-          <a:lstStyle/>
-          <a:p>
-            <a:pPr indent="0" marL="0">
-              <a:lnSpc>
-                <a:spcPct val="105000"/>
-              </a:lnSpc>
-              <a:buNone/>
-            </a:pPr>
-            <a:r>
-              <a:rPr lang="en-US" sz="1400" dirty="0">
-                <a:solidFill>
-                  <a:srgbClr val="000000"/>
-                </a:solidFill>
-                <a:latin typeface="Meiryo UI" pitchFamily="34" charset="0"/>
-                <a:ea typeface="Meiryo UI" pitchFamily="34" charset="-122"/>
-                <a:cs typeface="Meiryo UI" pitchFamily="34" charset="-120"/>
-              </a:rPr>
-              <a:t>銀行内</a:t>
-            </a:r>
-            <a:endParaRPr lang="en-US" sz="1400" dirty="0"/>
-          </a:p>
-          <a:p>
-            <a:pPr indent="0" marL="0">
-              <a:lnSpc>
-                <a:spcPct val="105000"/>
-              </a:lnSpc>
-              <a:buNone/>
-            </a:pPr>
-            <a:r>
-              <a:rPr lang="en-US" sz="1400" dirty="0">
-                <a:solidFill>
-                  <a:srgbClr val="000000"/>
-                </a:solidFill>
-                <a:latin typeface="Meiryo UI" pitchFamily="34" charset="0"/>
-                <a:ea typeface="Meiryo UI" pitchFamily="34" charset="-122"/>
-                <a:cs typeface="Meiryo UI" pitchFamily="34" charset="-120"/>
-              </a:rPr>
-              <a:t>市場運用部門</a:t>
-            </a:r>
-            <a:endParaRPr lang="en-US" sz="1400" dirty="0"/>
-          </a:p>
-        </p:txBody>
-      </p:sp>
-      <p:sp>
-        <p:nvSpPr>
-          <p:cNvPr id="52" name="Text 43"/>
-          <p:cNvSpPr/>
-          <p:nvPr/>
-        </p:nvSpPr>
-        <p:spPr>
-          <a:xfrm>
-            <a:off x="8485632" y="3035808"/>
-            <a:ext cx="566928" cy="292608"/>
-          </a:xfrm>
-          <a:prstGeom prst="rect">
-            <a:avLst/>
-          </a:prstGeom>
-          <a:noFill/>
-          <a:ln/>
-        </p:spPr>
-        <p:txBody>
-          <a:bodyPr wrap="square" rtlCol="0" anchor="ctr"/>
-          <a:lstStyle/>
-          <a:p>
-            <a:pPr algn="ctr" indent="0" marL="0">
-              <a:buNone/>
-            </a:pPr>
-            <a:r>
-              <a:rPr lang="en-US" sz="1800" dirty="0">
-                <a:solidFill>
-                  <a:srgbClr val="8A4B1E"/>
-                </a:solidFill>
-                <a:latin typeface="Meiryo UI" pitchFamily="34" charset="0"/>
-                <a:ea typeface="Meiryo UI" pitchFamily="34" charset="-122"/>
-                <a:cs typeface="Meiryo UI" pitchFamily="34" charset="-120"/>
-              </a:rPr>
-              <a:t>↓</a:t>
-            </a:r>
-            <a:endParaRPr lang="en-US" sz="1800" dirty="0"/>
-          </a:p>
-        </p:txBody>
-      </p:sp>
-      <p:sp>
-        <p:nvSpPr>
-          <p:cNvPr id="53" name="Shape 44"/>
-          <p:cNvSpPr/>
-          <p:nvPr/>
-        </p:nvSpPr>
-        <p:spPr>
-          <a:xfrm>
-            <a:off x="8485632" y="3328416"/>
-            <a:ext cx="566928" cy="566928"/>
-          </a:xfrm>
-          <a:prstGeom prst="ellipse">
-            <a:avLst/>
-          </a:prstGeom>
-          <a:solidFill>
-            <a:srgbClr val="8A4B1E"/>
-          </a:solidFill>
-          <a:ln/>
-        </p:spPr>
-      </p:sp>
-      <p:pic>
-        <p:nvPicPr>
-          <p:cNvPr id="54" name="Image 7" descr="icon_chartpie.png">    </p:cNvPr>
-          <p:cNvPicPr>
-            <a:picLocks noChangeAspect="1"/>
-          </p:cNvPicPr>
-          <p:nvPr/>
-        </p:nvPicPr>
-        <p:blipFill>
-          <a:blip r:embed="rId8"/>
-          <a:stretch>
-            <a:fillRect/>
-          </a:stretch>
-        </p:blipFill>
-        <p:spPr>
-          <a:xfrm>
-            <a:off x="8604504" y="3447288"/>
-            <a:ext cx="329184" cy="329184"/>
-          </a:xfrm>
-          <a:prstGeom prst="rect">
-            <a:avLst/>
-          </a:prstGeom>
-        </p:spPr>
-      </p:pic>
-      <p:sp>
-        <p:nvSpPr>
-          <p:cNvPr id="55" name="Text 45"/>
-          <p:cNvSpPr/>
-          <p:nvPr/>
-        </p:nvSpPr>
-        <p:spPr>
-          <a:xfrm>
-            <a:off x="9189720" y="3300984"/>
-            <a:ext cx="2377440" cy="274320"/>
-          </a:xfrm>
-          <a:prstGeom prst="rect">
-            <a:avLst/>
-          </a:prstGeom>
-          <a:noFill/>
-          <a:ln/>
-        </p:spPr>
-        <p:txBody>
-          <a:bodyPr wrap="square" rtlCol="0" anchor="ctr"/>
-          <a:lstStyle/>
-          <a:p>
-            <a:pPr indent="0" marL="0">
-              <a:buNone/>
-            </a:pPr>
-            <a:r>
-              <a:rPr lang="en-US" sz="1300" b="1" dirty="0">
-                <a:solidFill>
-                  <a:srgbClr val="000000"/>
-                </a:solidFill>
-                <a:latin typeface="Meiryo UI" pitchFamily="34" charset="0"/>
-                <a:ea typeface="Meiryo UI" pitchFamily="34" charset="-122"/>
-                <a:cs typeface="Meiryo UI" pitchFamily="34" charset="-120"/>
-              </a:rPr>
-              <a:t>6〜12年目</a:t>
-            </a:r>
-            <a:endParaRPr lang="en-US" sz="1300" dirty="0"/>
-          </a:p>
-        </p:txBody>
-      </p:sp>
-      <p:sp>
-        <p:nvSpPr>
-          <p:cNvPr id="56" name="Text 46"/>
-          <p:cNvSpPr/>
-          <p:nvPr/>
-        </p:nvSpPr>
-        <p:spPr>
-          <a:xfrm>
-            <a:off x="9189720" y="3566160"/>
-            <a:ext cx="2377440" cy="594360"/>
-          </a:xfrm>
-          <a:prstGeom prst="rect">
-            <a:avLst/>
-          </a:prstGeom>
-          <a:noFill/>
-          <a:ln/>
-        </p:spPr>
-        <p:txBody>
-          <a:bodyPr wrap="square" rtlCol="0" anchor="ctr"/>
-          <a:lstStyle/>
-          <a:p>
-            <a:pPr indent="0" marL="0">
-              <a:lnSpc>
-                <a:spcPct val="105000"/>
-              </a:lnSpc>
-              <a:buNone/>
-            </a:pPr>
-            <a:r>
-              <a:rPr lang="en-US" sz="1400" dirty="0">
-                <a:solidFill>
-                  <a:srgbClr val="000000"/>
-                </a:solidFill>
-                <a:latin typeface="Meiryo UI" pitchFamily="34" charset="0"/>
-                <a:ea typeface="Meiryo UI" pitchFamily="34" charset="-122"/>
-                <a:cs typeface="Meiryo UI" pitchFamily="34" charset="-120"/>
-              </a:rPr>
-              <a:t>銀行内</a:t>
-            </a:r>
-            <a:endParaRPr lang="en-US" sz="1400" dirty="0"/>
-          </a:p>
-          <a:p>
-            <a:pPr indent="0" marL="0">
-              <a:lnSpc>
-                <a:spcPct val="105000"/>
-              </a:lnSpc>
-              <a:buNone/>
-            </a:pPr>
-            <a:r>
-              <a:rPr lang="en-US" sz="1400" dirty="0">
-                <a:solidFill>
-                  <a:srgbClr val="000000"/>
-                </a:solidFill>
-                <a:latin typeface="Meiryo UI" pitchFamily="34" charset="0"/>
-                <a:ea typeface="Meiryo UI" pitchFamily="34" charset="-122"/>
-                <a:cs typeface="Meiryo UI" pitchFamily="34" charset="-120"/>
-              </a:rPr>
-              <a:t>自己勘定運用の専門職</a:t>
-            </a:r>
-            <a:endParaRPr lang="en-US" sz="1400" dirty="0"/>
-          </a:p>
-        </p:txBody>
-      </p:sp>
-      <p:sp>
-        <p:nvSpPr>
-          <p:cNvPr id="57" name="Text 47"/>
-          <p:cNvSpPr/>
-          <p:nvPr/>
-        </p:nvSpPr>
-        <p:spPr>
-          <a:xfrm>
-            <a:off x="8485632" y="3895344"/>
-            <a:ext cx="566928" cy="292608"/>
-          </a:xfrm>
-          <a:prstGeom prst="rect">
-            <a:avLst/>
-          </a:prstGeom>
-          <a:noFill/>
-          <a:ln/>
-        </p:spPr>
-        <p:txBody>
-          <a:bodyPr wrap="square" rtlCol="0" anchor="ctr"/>
-          <a:lstStyle/>
-          <a:p>
-            <a:pPr algn="ctr" indent="0" marL="0">
-              <a:buNone/>
-            </a:pPr>
-            <a:r>
-              <a:rPr lang="en-US" sz="1800" dirty="0">
-                <a:solidFill>
-                  <a:srgbClr val="8A4B1E"/>
-                </a:solidFill>
-                <a:latin typeface="Meiryo UI" pitchFamily="34" charset="0"/>
-                <a:ea typeface="Meiryo UI" pitchFamily="34" charset="-122"/>
-                <a:cs typeface="Meiryo UI" pitchFamily="34" charset="-120"/>
-              </a:rPr>
-              <a:t>↓</a:t>
-            </a:r>
-            <a:endParaRPr lang="en-US" sz="1800" dirty="0"/>
-          </a:p>
-        </p:txBody>
-      </p:sp>
-      <p:sp>
-        <p:nvSpPr>
-          <p:cNvPr id="58" name="Shape 48"/>
-          <p:cNvSpPr/>
-          <p:nvPr/>
-        </p:nvSpPr>
-        <p:spPr>
-          <a:xfrm>
-            <a:off x="8485632" y="4187952"/>
-            <a:ext cx="566928" cy="566928"/>
-          </a:xfrm>
-          <a:prstGeom prst="ellipse">
-            <a:avLst/>
-          </a:prstGeom>
-          <a:solidFill>
-            <a:srgbClr val="8A4B1E"/>
-          </a:solidFill>
-          <a:ln/>
-        </p:spPr>
-      </p:sp>
-      <p:pic>
-        <p:nvPicPr>
-          <p:cNvPr id="59" name="Image 8" descr="icon_crown.png">    </p:cNvPr>
-          <p:cNvPicPr>
-            <a:picLocks noChangeAspect="1"/>
-          </p:cNvPicPr>
-          <p:nvPr/>
-        </p:nvPicPr>
-        <p:blipFill>
-          <a:blip r:embed="rId9"/>
-          <a:stretch>
-            <a:fillRect/>
-          </a:stretch>
-        </p:blipFill>
-        <p:spPr>
-          <a:xfrm>
-            <a:off x="8604504" y="4306824"/>
-            <a:ext cx="329184" cy="329184"/>
-          </a:xfrm>
-          <a:prstGeom prst="rect">
-            <a:avLst/>
-          </a:prstGeom>
-        </p:spPr>
-      </p:pic>
-      <p:sp>
-        <p:nvSpPr>
-          <p:cNvPr id="60" name="Text 49"/>
-          <p:cNvSpPr/>
-          <p:nvPr/>
-        </p:nvSpPr>
-        <p:spPr>
-          <a:xfrm>
-            <a:off x="9189720" y="4160520"/>
-            <a:ext cx="2377440" cy="274320"/>
-          </a:xfrm>
-          <a:prstGeom prst="rect">
-            <a:avLst/>
-          </a:prstGeom>
-          <a:noFill/>
-          <a:ln/>
-        </p:spPr>
-        <p:txBody>
-          <a:bodyPr wrap="square" rtlCol="0" anchor="ctr"/>
-          <a:lstStyle/>
-          <a:p>
-            <a:pPr indent="0" marL="0">
-              <a:buNone/>
-            </a:pPr>
-            <a:r>
-              <a:rPr lang="en-US" sz="1300" b="1" dirty="0">
-                <a:solidFill>
-                  <a:srgbClr val="000000"/>
-                </a:solidFill>
-                <a:latin typeface="Meiryo UI" pitchFamily="34" charset="0"/>
-                <a:ea typeface="Meiryo UI" pitchFamily="34" charset="-122"/>
-                <a:cs typeface="Meiryo UI" pitchFamily="34" charset="-120"/>
-              </a:rPr>
-              <a:t>13年目〜</a:t>
-            </a:r>
-            <a:endParaRPr lang="en-US" sz="1300" dirty="0"/>
-          </a:p>
-        </p:txBody>
-      </p:sp>
-      <p:sp>
-        <p:nvSpPr>
-          <p:cNvPr id="61" name="Text 50"/>
-          <p:cNvSpPr/>
-          <p:nvPr/>
-        </p:nvSpPr>
-        <p:spPr>
-          <a:xfrm>
-            <a:off x="9189720" y="4425696"/>
-            <a:ext cx="2377440" cy="594360"/>
-          </a:xfrm>
-          <a:prstGeom prst="rect">
-            <a:avLst/>
-          </a:prstGeom>
-          <a:noFill/>
-          <a:ln/>
-        </p:spPr>
-        <p:txBody>
-          <a:bodyPr wrap="square" rtlCol="0" anchor="ctr"/>
-          <a:lstStyle/>
-          <a:p>
-            <a:pPr indent="0" marL="0">
-              <a:lnSpc>
-                <a:spcPct val="105000"/>
-              </a:lnSpc>
-              <a:buNone/>
-            </a:pPr>
-            <a:r>
-              <a:rPr lang="en-US" sz="1400" dirty="0">
-                <a:solidFill>
-                  <a:srgbClr val="000000"/>
-                </a:solidFill>
-                <a:latin typeface="Meiryo UI" pitchFamily="34" charset="0"/>
-                <a:ea typeface="Meiryo UI" pitchFamily="34" charset="-122"/>
-                <a:cs typeface="Meiryo UI" pitchFamily="34" charset="-120"/>
-              </a:rPr>
-              <a:t>銀行内</a:t>
-            </a:r>
-            <a:endParaRPr lang="en-US" sz="1400" dirty="0"/>
-          </a:p>
-          <a:p>
-            <a:pPr indent="0" marL="0">
-              <a:lnSpc>
-                <a:spcPct val="105000"/>
-              </a:lnSpc>
-              <a:buNone/>
-            </a:pPr>
-            <a:r>
-              <a:rPr lang="en-US" sz="1400" dirty="0">
-                <a:solidFill>
-                  <a:srgbClr val="000000"/>
-                </a:solidFill>
-                <a:latin typeface="Meiryo UI" pitchFamily="34" charset="0"/>
-                <a:ea typeface="Meiryo UI" pitchFamily="34" charset="-122"/>
-                <a:cs typeface="Meiryo UI" pitchFamily="34" charset="-120"/>
-              </a:rPr>
-              <a:t>運用部門の管理職</a:t>
-            </a:r>
-            <a:endParaRPr lang="en-US" sz="1400" dirty="0"/>
-          </a:p>
-        </p:txBody>
-      </p:sp>
-      <p:sp>
-        <p:nvSpPr>
-          <p:cNvPr id="62" name="Shape 51"/>
-          <p:cNvSpPr/>
-          <p:nvPr/>
-        </p:nvSpPr>
-        <p:spPr>
-          <a:xfrm>
-            <a:off x="8366760" y="5513832"/>
-            <a:ext cx="3291840" cy="822960"/>
-          </a:xfrm>
-          <a:prstGeom prst="roundRect">
-            <a:avLst>
-              <a:gd name="adj" fmla="val 11111"/>
-            </a:avLst>
-          </a:prstGeom>
-          <a:solidFill>
-            <a:srgbClr val="FFFFFF"/>
-          </a:solidFill>
-          <a:ln w="12700">
-            <a:solidFill>
-              <a:srgbClr val="8A4B1E"/>
-            </a:solidFill>
-            <a:prstDash val="solid"/>
-          </a:ln>
-        </p:spPr>
-      </p:sp>
-      <p:sp>
-        <p:nvSpPr>
-          <p:cNvPr id="63" name="Text 52"/>
-          <p:cNvSpPr/>
-          <p:nvPr/>
-        </p:nvSpPr>
-        <p:spPr>
-          <a:xfrm>
-            <a:off x="8503920" y="5577840"/>
-            <a:ext cx="3017520" cy="713232"/>
+          <p:cNvPr id="26" name="Text 24"/>
+          <p:cNvSpPr/>
+          <p:nvPr/>
+        </p:nvSpPr>
+        <p:spPr>
+          <a:xfrm>
+            <a:off x="8458200" y="5349240"/>
+            <a:ext cx="3108960" cy="685800"/>
           </a:xfrm>
           <a:prstGeom prst="rect">
             <a:avLst/>
@@ -4465,17 +3314,17 @@
               <a:buNone/>
             </a:pPr>
             <a:r>
-              <a:rPr lang="en-US" sz="1400" b="1" dirty="0">
-                <a:solidFill>
-                  <a:srgbClr val="8A4B1E"/>
-                </a:solidFill>
-                <a:latin typeface="Meiryo UI" pitchFamily="34" charset="0"/>
-                <a:ea typeface="Meiryo UI" pitchFamily="34" charset="-122"/>
-                <a:cs typeface="Meiryo UI" pitchFamily="34" charset="-120"/>
-              </a:rPr>
-              <a:t>別会社に異動せず、銀行自身の資金運用（マーケット業務）に軸足を置く</a:t>
-            </a:r>
-            <a:endParaRPr lang="en-US" sz="1400" dirty="0"/>
+              <a:rPr lang="en-US" sz="1250" dirty="0">
+                <a:solidFill>
+                  <a:srgbClr val="000000"/>
+                </a:solidFill>
+                <a:latin typeface="Meiryo UI" pitchFamily="34" charset="0"/>
+                <a:ea typeface="Meiryo UI" pitchFamily="34" charset="-122"/>
+                <a:cs typeface="Meiryo UI" pitchFamily="34" charset="-120"/>
+              </a:rPr>
+              <a:t>対象＝銀行自身の資金／伝統的資産（国債・為替等）が中心</a:t>
+            </a:r>
+            <a:endParaRPr lang="en-US" sz="1250" dirty="0"/>
           </a:p>
         </p:txBody>
       </p:sp>
@@ -4513,163 +3362,102 @@
       </p:grpSpPr>
       <p:sp>
         <p:nvSpPr>
-          <p:cNvPr id="2" name="Shape 0"/>
+          <p:cNvPr id="2" name="Text 0"/>
           <p:cNvSpPr/>
           <p:nvPr/>
         </p:nvSpPr>
         <p:spPr>
           <a:xfrm>
             <a:off x="640080" y="411480"/>
-            <a:ext cx="502920" cy="457200"/>
+            <a:ext cx="10972800" cy="640080"/>
+          </a:xfrm>
+          <a:prstGeom prst="rect">
+            <a:avLst/>
+          </a:prstGeom>
+          <a:noFill/>
+          <a:ln/>
+        </p:spPr>
+        <p:txBody>
+          <a:bodyPr wrap="square" rtlCol="0" anchor="ctr"/>
+          <a:lstStyle/>
+          <a:p>
+            <a:pPr indent="0" marL="0">
+              <a:buNone/>
+            </a:pPr>
+            <a:r>
+              <a:rPr lang="en-US" sz="3000" b="1" dirty="0">
+                <a:solidFill>
+                  <a:srgbClr val="000000"/>
+                </a:solidFill>
+                <a:latin typeface="Meiryo UI" pitchFamily="34" charset="0"/>
+                <a:ea typeface="Meiryo UI" pitchFamily="34" charset="-122"/>
+                <a:cs typeface="Meiryo UI" pitchFamily="34" charset="-120"/>
+              </a:rPr>
+              <a:t>3つのキャリアパターン全体像</a:t>
+            </a:r>
+            <a:endParaRPr lang="en-US" sz="3000" dirty="0"/>
+          </a:p>
+        </p:txBody>
+      </p:sp>
+      <p:sp>
+        <p:nvSpPr>
+          <p:cNvPr id="3" name="Text 1"/>
+          <p:cNvSpPr/>
+          <p:nvPr/>
+        </p:nvSpPr>
+        <p:spPr>
+          <a:xfrm>
+            <a:off x="640080" y="1005840"/>
+            <a:ext cx="10972800" cy="411480"/>
+          </a:xfrm>
+          <a:prstGeom prst="rect">
+            <a:avLst/>
+          </a:prstGeom>
+          <a:noFill/>
+          <a:ln/>
+        </p:spPr>
+        <p:txBody>
+          <a:bodyPr wrap="square" rtlCol="0" anchor="ctr"/>
+          <a:lstStyle/>
+          <a:p>
+            <a:pPr indent="0" marL="0">
+              <a:buNone/>
+            </a:pPr>
+            <a:r>
+              <a:rPr lang="en-US" sz="1400" dirty="0">
+                <a:solidFill>
+                  <a:srgbClr val="000000"/>
+                </a:solidFill>
+                <a:latin typeface="Meiryo UI" pitchFamily="34" charset="0"/>
+                <a:ea typeface="Meiryo UI" pitchFamily="34" charset="-122"/>
+                <a:cs typeface="Meiryo UI" pitchFamily="34" charset="-120"/>
+              </a:rPr>
+              <a:t>「何のプロになりたいか」で選び、それぞれに合った職場を経験していく3パターン。</a:t>
+            </a:r>
+            <a:endParaRPr lang="en-US" sz="1400" dirty="0"/>
+          </a:p>
+        </p:txBody>
+      </p:sp>
+      <p:sp>
+        <p:nvSpPr>
+          <p:cNvPr id="4" name="Shape 2"/>
+          <p:cNvSpPr/>
+          <p:nvPr/>
+        </p:nvSpPr>
+        <p:spPr>
+          <a:xfrm>
+            <a:off x="548640" y="1600200"/>
+            <a:ext cx="3566160" cy="4892040"/>
           </a:xfrm>
           <a:prstGeom prst="roundRect">
             <a:avLst>
-              <a:gd name="adj" fmla="val 16000"/>
-            </a:avLst>
-          </a:prstGeom>
-          <a:solidFill>
-            <a:srgbClr val="1E2761"/>
-          </a:solidFill>
-          <a:ln/>
-        </p:spPr>
-      </p:sp>
-      <p:sp>
-        <p:nvSpPr>
-          <p:cNvPr id="3" name="Text 1"/>
-          <p:cNvSpPr/>
-          <p:nvPr/>
-        </p:nvSpPr>
-        <p:spPr>
-          <a:xfrm>
-            <a:off x="640080" y="411480"/>
-            <a:ext cx="502920" cy="457200"/>
-          </a:xfrm>
-          <a:prstGeom prst="rect">
-            <a:avLst/>
-          </a:prstGeom>
-          <a:noFill/>
-          <a:ln/>
-        </p:spPr>
-        <p:txBody>
-          <a:bodyPr wrap="square" rtlCol="0" anchor="ctr"/>
-          <a:lstStyle/>
-          <a:p>
-            <a:pPr algn="ctr" indent="0" marL="0">
-              <a:buNone/>
-            </a:pPr>
-            <a:r>
-              <a:rPr lang="en-US" sz="2000" b="1" dirty="0">
-                <a:solidFill>
-                  <a:srgbClr val="FFFFFF"/>
-                </a:solidFill>
-                <a:latin typeface="Meiryo UI" pitchFamily="34" charset="0"/>
-                <a:ea typeface="Meiryo UI" pitchFamily="34" charset="-122"/>
-                <a:cs typeface="Meiryo UI" pitchFamily="34" charset="-120"/>
-              </a:rPr>
-              <a:t>①</a:t>
-            </a:r>
-            <a:endParaRPr lang="en-US" sz="2000" dirty="0"/>
-          </a:p>
-        </p:txBody>
-      </p:sp>
-      <p:sp>
-        <p:nvSpPr>
-          <p:cNvPr id="4" name="Text 2"/>
-          <p:cNvSpPr/>
-          <p:nvPr/>
-        </p:nvSpPr>
-        <p:spPr>
-          <a:xfrm>
-            <a:off x="1280160" y="365760"/>
-            <a:ext cx="10241280" cy="502920"/>
-          </a:xfrm>
-          <a:prstGeom prst="rect">
-            <a:avLst/>
-          </a:prstGeom>
-          <a:noFill/>
-          <a:ln/>
-        </p:spPr>
-        <p:txBody>
-          <a:bodyPr wrap="square" rtlCol="0" anchor="ctr"/>
-          <a:lstStyle/>
-          <a:p>
-            <a:pPr indent="0" marL="0">
-              <a:buNone/>
-            </a:pPr>
-            <a:r>
-              <a:rPr lang="en-US" sz="2600" b="1" dirty="0">
-                <a:solidFill>
-                  <a:srgbClr val="000000"/>
-                </a:solidFill>
-                <a:latin typeface="Meiryo UI" pitchFamily="34" charset="0"/>
-                <a:ea typeface="Meiryo UI" pitchFamily="34" charset="-122"/>
-                <a:cs typeface="Meiryo UI" pitchFamily="34" charset="-120"/>
-              </a:rPr>
-              <a:t>アセットマネジメント業務を中心とするキャリア</a:t>
-            </a:r>
-            <a:endParaRPr lang="en-US" sz="2600" dirty="0"/>
-          </a:p>
-        </p:txBody>
-      </p:sp>
-      <p:sp>
-        <p:nvSpPr>
-          <p:cNvPr id="5" name="Text 3"/>
-          <p:cNvSpPr/>
-          <p:nvPr/>
-        </p:nvSpPr>
-        <p:spPr>
-          <a:xfrm>
-            <a:off x="1280160" y="868680"/>
-            <a:ext cx="10241280" cy="365760"/>
-          </a:xfrm>
-          <a:prstGeom prst="rect">
-            <a:avLst/>
-          </a:prstGeom>
-          <a:noFill/>
-          <a:ln/>
-        </p:spPr>
-        <p:txBody>
-          <a:bodyPr wrap="square" rtlCol="0" anchor="ctr"/>
-          <a:lstStyle/>
-          <a:p>
-            <a:pPr indent="0" marL="0">
-              <a:buNone/>
-            </a:pPr>
-            <a:r>
-              <a:rPr lang="en-US" sz="1400" i="1" dirty="0">
-                <a:solidFill>
-                  <a:srgbClr val="000000"/>
-                </a:solidFill>
-                <a:latin typeface="Meiryo UI" pitchFamily="34" charset="0"/>
-                <a:ea typeface="Meiryo UI" pitchFamily="34" charset="-122"/>
-                <a:cs typeface="Meiryo UI" pitchFamily="34" charset="-120"/>
-              </a:rPr>
-              <a:t>信託銀行とグループの資産運用会社（AM会社）を行き来しながら、運用の「頭脳」側を極める</a:t>
-            </a:r>
-            <a:endParaRPr lang="en-US" sz="1400" dirty="0"/>
-          </a:p>
-        </p:txBody>
-      </p:sp>
-      <p:sp>
-        <p:nvSpPr>
-          <p:cNvPr id="6" name="Shape 4"/>
-          <p:cNvSpPr/>
-          <p:nvPr/>
-        </p:nvSpPr>
-        <p:spPr>
-          <a:xfrm>
-            <a:off x="548640" y="1417320"/>
-            <a:ext cx="3566160" cy="1417320"/>
-          </a:xfrm>
-          <a:prstGeom prst="roundRect">
-            <a:avLst>
-              <a:gd name="adj" fmla="val 6452"/>
+              <a:gd name="adj" fmla="val 2564"/>
             </a:avLst>
           </a:prstGeom>
           <a:solidFill>
             <a:srgbClr val="FFFFFF"/>
           </a:solidFill>
-          <a:ln w="15875">
+          <a:ln w="19050">
             <a:solidFill>
               <a:srgbClr val="1E2761"/>
             </a:solidFill>
@@ -4679,17 +3467,19 @@
       </p:sp>
       <p:sp>
         <p:nvSpPr>
-          <p:cNvPr id="7" name="Shape 5"/>
-          <p:cNvSpPr/>
-          <p:nvPr/>
-        </p:nvSpPr>
-        <p:spPr>
-          <a:xfrm>
-            <a:off x="749808" y="1691640"/>
-            <a:ext cx="868680" cy="868680"/>
-          </a:xfrm>
-          <a:prstGeom prst="ellipse">
-            <a:avLst/>
+          <p:cNvPr id="5" name="Shape 3"/>
+          <p:cNvSpPr/>
+          <p:nvPr/>
+        </p:nvSpPr>
+        <p:spPr>
+          <a:xfrm>
+            <a:off x="777240" y="1801368"/>
+            <a:ext cx="502920" cy="384048"/>
+          </a:xfrm>
+          <a:prstGeom prst="roundRect">
+            <a:avLst>
+              <a:gd name="adj" fmla="val 19048"/>
+            </a:avLst>
           </a:prstGeom>
           <a:solidFill>
             <a:srgbClr val="1E2761"/>
@@ -4697,9 +3487,110 @@
           <a:ln/>
         </p:spPr>
       </p:sp>
+      <p:sp>
+        <p:nvSpPr>
+          <p:cNvPr id="6" name="Text 4"/>
+          <p:cNvSpPr/>
+          <p:nvPr/>
+        </p:nvSpPr>
+        <p:spPr>
+          <a:xfrm>
+            <a:off x="777240" y="1801368"/>
+            <a:ext cx="502920" cy="384048"/>
+          </a:xfrm>
+          <a:prstGeom prst="rect">
+            <a:avLst/>
+          </a:prstGeom>
+          <a:noFill/>
+          <a:ln/>
+        </p:spPr>
+        <p:txBody>
+          <a:bodyPr wrap="square" rtlCol="0" anchor="ctr"/>
+          <a:lstStyle/>
+          <a:p>
+            <a:pPr algn="ctr" indent="0" marL="0">
+              <a:buNone/>
+            </a:pPr>
+            <a:r>
+              <a:rPr lang="en-US" sz="1600" b="1" dirty="0">
+                <a:solidFill>
+                  <a:srgbClr val="FFFFFF"/>
+                </a:solidFill>
+                <a:latin typeface="Meiryo UI" pitchFamily="34" charset="0"/>
+                <a:ea typeface="Meiryo UI" pitchFamily="34" charset="-122"/>
+                <a:cs typeface="Meiryo UI" pitchFamily="34" charset="-120"/>
+              </a:rPr>
+              <a:t>1</a:t>
+            </a:r>
+            <a:endParaRPr lang="en-US" sz="1600" dirty="0"/>
+          </a:p>
+        </p:txBody>
+      </p:sp>
+      <p:sp>
+        <p:nvSpPr>
+          <p:cNvPr id="7" name="Text 5"/>
+          <p:cNvSpPr/>
+          <p:nvPr/>
+        </p:nvSpPr>
+        <p:spPr>
+          <a:xfrm>
+            <a:off x="1417320" y="1764792"/>
+            <a:ext cx="2468880" cy="502920"/>
+          </a:xfrm>
+          <a:prstGeom prst="rect">
+            <a:avLst/>
+          </a:prstGeom>
+          <a:noFill/>
+          <a:ln/>
+        </p:spPr>
+        <p:txBody>
+          <a:bodyPr wrap="square" rtlCol="0" anchor="ctr"/>
+          <a:lstStyle/>
+          <a:p>
+            <a:pPr indent="0" marL="0">
+              <a:lnSpc>
+                <a:spcPct val="105000"/>
+              </a:lnSpc>
+              <a:buNone/>
+            </a:pPr>
+            <a:r>
+              <a:rPr lang="en-US" sz="1500" b="1" dirty="0">
+                <a:solidFill>
+                  <a:srgbClr val="000000"/>
+                </a:solidFill>
+                <a:latin typeface="Meiryo UI" pitchFamily="34" charset="0"/>
+                <a:ea typeface="Meiryo UI" pitchFamily="34" charset="-122"/>
+                <a:cs typeface="Meiryo UI" pitchFamily="34" charset="-120"/>
+              </a:rPr>
+              <a:t>資産運用のプロになる</a:t>
+            </a:r>
+            <a:endParaRPr lang="en-US" sz="1500" dirty="0"/>
+          </a:p>
+        </p:txBody>
+      </p:sp>
+      <p:sp>
+        <p:nvSpPr>
+          <p:cNvPr id="8" name="Shape 6"/>
+          <p:cNvSpPr/>
+          <p:nvPr/>
+        </p:nvSpPr>
+        <p:spPr>
+          <a:xfrm>
+            <a:off x="804672" y="2468880"/>
+            <a:ext cx="566928" cy="566928"/>
+          </a:xfrm>
+          <a:prstGeom prst="ellipse">
+            <a:avLst/>
+          </a:prstGeom>
+          <a:solidFill>
+            <a:srgbClr val="1E2761"/>
+          </a:solidFill>
+          <a:ln/>
+        </p:spPr>
+      </p:sp>
       <p:pic>
         <p:nvPicPr>
-          <p:cNvPr id="8" name="Image 0" descr="icon_building.png">    </p:cNvPr>
+          <p:cNvPr id="9" name="Image 0" descr="icon_building.png">    </p:cNvPr>
           <p:cNvPicPr>
             <a:picLocks noChangeAspect="1"/>
           </p:cNvPicPr>
@@ -4713,8 +3604,8 @@
         </p:blipFill>
         <p:spPr>
           <a:xfrm>
-            <a:off x="932688" y="1874520"/>
-            <a:ext cx="502920" cy="502920"/>
+            <a:off x="923544" y="2587752"/>
+            <a:ext cx="329184" cy="329184"/>
           </a:xfrm>
           <a:prstGeom prst="rect">
             <a:avLst/>
@@ -4723,30 +3614,30 @@
       </p:pic>
       <p:sp>
         <p:nvSpPr>
-          <p:cNvPr id="9" name="Text 6"/>
-          <p:cNvSpPr/>
-          <p:nvPr/>
-        </p:nvSpPr>
-        <p:spPr>
-          <a:xfrm>
-            <a:off x="1783080" y="1645920"/>
-            <a:ext cx="2148840" cy="320040"/>
-          </a:xfrm>
-          <a:prstGeom prst="rect">
-            <a:avLst/>
-          </a:prstGeom>
-          <a:noFill/>
-          <a:ln/>
-        </p:spPr>
-        <p:txBody>
-          <a:bodyPr wrap="square" rtlCol="0" anchor="ctr"/>
-          <a:lstStyle/>
-          <a:p>
-            <a:pPr indent="0" marL="0">
-              <a:buNone/>
-            </a:pPr>
-            <a:r>
-              <a:rPr lang="en-US" sz="1400" b="1" dirty="0">
+          <p:cNvPr id="10" name="Text 7"/>
+          <p:cNvSpPr/>
+          <p:nvPr/>
+        </p:nvSpPr>
+        <p:spPr>
+          <a:xfrm>
+            <a:off x="1508760" y="2441448"/>
+            <a:ext cx="2377440" cy="274320"/>
+          </a:xfrm>
+          <a:prstGeom prst="rect">
+            <a:avLst/>
+          </a:prstGeom>
+          <a:noFill/>
+          <a:ln/>
+        </p:spPr>
+        <p:txBody>
+          <a:bodyPr wrap="square" rtlCol="0" anchor="ctr"/>
+          <a:lstStyle/>
+          <a:p>
+            <a:pPr indent="0" marL="0">
+              <a:buNone/>
+            </a:pPr>
+            <a:r>
+              <a:rPr lang="en-US" sz="1300" b="1" dirty="0">
                 <a:solidFill>
                   <a:srgbClr val="000000"/>
                 </a:solidFill>
@@ -4756,59 +3647,59 @@
               </a:rPr>
               <a:t>入行〜5年目</a:t>
             </a:r>
+            <a:endParaRPr lang="en-US" sz="1300" dirty="0"/>
+          </a:p>
+        </p:txBody>
+      </p:sp>
+      <p:sp>
+        <p:nvSpPr>
+          <p:cNvPr id="11" name="Text 8"/>
+          <p:cNvSpPr/>
+          <p:nvPr/>
+        </p:nvSpPr>
+        <p:spPr>
+          <a:xfrm>
+            <a:off x="1508760" y="2706624"/>
+            <a:ext cx="2377440" cy="594360"/>
+          </a:xfrm>
+          <a:prstGeom prst="rect">
+            <a:avLst/>
+          </a:prstGeom>
+          <a:noFill/>
+          <a:ln/>
+        </p:spPr>
+        <p:txBody>
+          <a:bodyPr wrap="square" rtlCol="0" anchor="ctr"/>
+          <a:lstStyle/>
+          <a:p>
+            <a:pPr indent="0" marL="0">
+              <a:lnSpc>
+                <a:spcPct val="105000"/>
+              </a:lnSpc>
+              <a:buNone/>
+            </a:pPr>
+            <a:r>
+              <a:rPr lang="en-US" sz="1400" dirty="0">
+                <a:solidFill>
+                  <a:srgbClr val="000000"/>
+                </a:solidFill>
+                <a:latin typeface="Meiryo UI" pitchFamily="34" charset="0"/>
+                <a:ea typeface="Meiryo UI" pitchFamily="34" charset="-122"/>
+                <a:cs typeface="Meiryo UI" pitchFamily="34" charset="-120"/>
+              </a:rPr>
+              <a:t>信託銀行</a:t>
+            </a:r>
             <a:endParaRPr lang="en-US" sz="1400" dirty="0"/>
           </a:p>
-        </p:txBody>
-      </p:sp>
-      <p:sp>
-        <p:nvSpPr>
-          <p:cNvPr id="10" name="Text 7"/>
-          <p:cNvSpPr/>
-          <p:nvPr/>
-        </p:nvSpPr>
-        <p:spPr>
-          <a:xfrm>
-            <a:off x="1783080" y="1965960"/>
-            <a:ext cx="2148840" cy="777240"/>
-          </a:xfrm>
-          <a:prstGeom prst="rect">
-            <a:avLst/>
-          </a:prstGeom>
-          <a:noFill/>
-          <a:ln/>
-        </p:spPr>
-        <p:txBody>
-          <a:bodyPr wrap="square" rtlCol="0" anchor="ctr"/>
-          <a:lstStyle/>
           <a:p>
             <a:pPr indent="0" marL="0">
               <a:lnSpc>
-                <a:spcPct val="110000"/>
+                <a:spcPct val="105000"/>
               </a:lnSpc>
               <a:buNone/>
             </a:pPr>
             <a:r>
-              <a:rPr lang="en-US" sz="1500" b="1" dirty="0">
-                <a:solidFill>
-                  <a:srgbClr val="000000"/>
-                </a:solidFill>
-                <a:latin typeface="Meiryo UI" pitchFamily="34" charset="0"/>
-                <a:ea typeface="Meiryo UI" pitchFamily="34" charset="-122"/>
-                <a:cs typeface="Meiryo UI" pitchFamily="34" charset="-120"/>
-              </a:rPr>
-              <a:t>信託銀行</a:t>
-            </a:r>
-            <a:endParaRPr lang="en-US" sz="1500" dirty="0"/>
-          </a:p>
-          <a:p>
-            <a:pPr indent="0" marL="0">
-              <a:lnSpc>
-                <a:spcPct val="110000"/>
-              </a:lnSpc>
-              <a:buNone/>
-            </a:pPr>
-            <a:r>
-              <a:rPr lang="en-US" sz="1500" b="1" dirty="0">
+              <a:rPr lang="en-US" sz="1400" dirty="0">
                 <a:solidFill>
                   <a:srgbClr val="000000"/>
                 </a:solidFill>
@@ -4818,13 +3709,72 @@
               </a:rPr>
               <a:t>資産運用部門</a:t>
             </a:r>
-            <a:endParaRPr lang="en-US" sz="1500" dirty="0"/>
-          </a:p>
-        </p:txBody>
+            <a:endParaRPr lang="en-US" sz="1400" dirty="0"/>
+          </a:p>
+        </p:txBody>
+      </p:sp>
+      <p:sp>
+        <p:nvSpPr>
+          <p:cNvPr id="12" name="Text 9"/>
+          <p:cNvSpPr/>
+          <p:nvPr/>
+        </p:nvSpPr>
+        <p:spPr>
+          <a:xfrm>
+            <a:off x="804672" y="3035808"/>
+            <a:ext cx="566928" cy="292608"/>
+          </a:xfrm>
+          <a:prstGeom prst="rect">
+            <a:avLst/>
+          </a:prstGeom>
+          <a:noFill/>
+          <a:ln/>
+        </p:spPr>
+        <p:txBody>
+          <a:bodyPr wrap="square" rtlCol="0" anchor="ctr"/>
+          <a:lstStyle/>
+          <a:p>
+            <a:pPr algn="ctr" indent="0" marL="0">
+              <a:buNone/>
+            </a:pPr>
+            <a:r>
+              <a:rPr lang="en-US" sz="1800" dirty="0">
+                <a:solidFill>
+                  <a:srgbClr val="1E2761"/>
+                </a:solidFill>
+                <a:latin typeface="Meiryo UI" pitchFamily="34" charset="0"/>
+                <a:ea typeface="Meiryo UI" pitchFamily="34" charset="-122"/>
+                <a:cs typeface="Meiryo UI" pitchFamily="34" charset="-120"/>
+              </a:rPr>
+              <a:t>↓</a:t>
+            </a:r>
+            <a:endParaRPr lang="en-US" sz="1800" dirty="0"/>
+          </a:p>
+        </p:txBody>
+      </p:sp>
+      <p:sp>
+        <p:nvSpPr>
+          <p:cNvPr id="13" name="Shape 10"/>
+          <p:cNvSpPr/>
+          <p:nvPr/>
+        </p:nvSpPr>
+        <p:spPr>
+          <a:xfrm>
+            <a:off x="804672" y="3328416"/>
+            <a:ext cx="566928" cy="566928"/>
+          </a:xfrm>
+          <a:prstGeom prst="ellipse">
+            <a:avLst/>
+          </a:prstGeom>
+          <a:solidFill>
+            <a:srgbClr val="1E2761"/>
+          </a:solidFill>
+          <a:ln/>
+        </p:spPr>
       </p:sp>
       <p:pic>
         <p:nvPicPr>
-          <p:cNvPr id="11" name="Image 1" descr="icon_arrow_dark.png">    </p:cNvPr>
+          <p:cNvPr id="14" name="Image 1" descr="icon_exchange.png">    </p:cNvPr>
           <p:cNvPicPr>
             <a:picLocks noChangeAspect="1"/>
           </p:cNvPicPr>
@@ -4838,8 +3788,8 @@
         </p:blipFill>
         <p:spPr>
           <a:xfrm>
-            <a:off x="4133088" y="1979676"/>
-            <a:ext cx="219456" cy="292608"/>
+            <a:off x="923544" y="3447288"/>
+            <a:ext cx="329184" cy="329184"/>
           </a:xfrm>
           <a:prstGeom prst="rect">
             <a:avLst/>
@@ -4848,14 +3798,53 @@
       </p:pic>
       <p:sp>
         <p:nvSpPr>
-          <p:cNvPr id="12" name="Text 8"/>
-          <p:cNvSpPr/>
-          <p:nvPr/>
-        </p:nvSpPr>
-        <p:spPr>
-          <a:xfrm>
-            <a:off x="548640" y="3017520"/>
-            <a:ext cx="3566160" cy="2103120"/>
+          <p:cNvPr id="15" name="Text 11"/>
+          <p:cNvSpPr/>
+          <p:nvPr/>
+        </p:nvSpPr>
+        <p:spPr>
+          <a:xfrm>
+            <a:off x="1508760" y="3300984"/>
+            <a:ext cx="2377440" cy="274320"/>
+          </a:xfrm>
+          <a:prstGeom prst="rect">
+            <a:avLst/>
+          </a:prstGeom>
+          <a:noFill/>
+          <a:ln/>
+        </p:spPr>
+        <p:txBody>
+          <a:bodyPr wrap="square" rtlCol="0" anchor="ctr"/>
+          <a:lstStyle/>
+          <a:p>
+            <a:pPr indent="0" marL="0">
+              <a:buNone/>
+            </a:pPr>
+            <a:r>
+              <a:rPr lang="en-US" sz="1300" b="1" dirty="0">
+                <a:solidFill>
+                  <a:srgbClr val="000000"/>
+                </a:solidFill>
+                <a:latin typeface="Meiryo UI" pitchFamily="34" charset="0"/>
+                <a:ea typeface="Meiryo UI" pitchFamily="34" charset="-122"/>
+                <a:cs typeface="Meiryo UI" pitchFamily="34" charset="-120"/>
+              </a:rPr>
+              <a:t>6〜12年目</a:t>
+            </a:r>
+            <a:endParaRPr lang="en-US" sz="1300" dirty="0"/>
+          </a:p>
+        </p:txBody>
+      </p:sp>
+      <p:sp>
+        <p:nvSpPr>
+          <p:cNvPr id="16" name="Text 12"/>
+          <p:cNvSpPr/>
+          <p:nvPr/>
+        </p:nvSpPr>
+        <p:spPr>
+          <a:xfrm>
+            <a:off x="1508760" y="3566160"/>
+            <a:ext cx="2377440" cy="594360"/>
           </a:xfrm>
           <a:prstGeom prst="rect">
             <a:avLst/>
@@ -4869,15 +3858,71 @@
           <a:p>
             <a:pPr indent="0" marL="0">
               <a:lnSpc>
-                <a:spcPct val="125000"/>
+                <a:spcPct val="105000"/>
               </a:lnSpc>
-              <a:spcAft>
-                <a:spcPts val="600"/>
-              </a:spcAft>
-              <a:buNone/>
-            </a:pPr>
-            <a:r>
-              <a:rPr lang="en-US" sz="1400" b="1" dirty="0">
+              <a:buNone/>
+            </a:pPr>
+            <a:r>
+              <a:rPr lang="en-US" sz="1400" dirty="0">
+                <a:solidFill>
+                  <a:srgbClr val="000000"/>
+                </a:solidFill>
+                <a:latin typeface="Meiryo UI" pitchFamily="34" charset="0"/>
+                <a:ea typeface="Meiryo UI" pitchFamily="34" charset="-122"/>
+                <a:cs typeface="Meiryo UI" pitchFamily="34" charset="-120"/>
+              </a:rPr>
+              <a:t>グループAM会社へ</a:t>
+            </a:r>
+            <a:endParaRPr lang="en-US" sz="1400" dirty="0"/>
+          </a:p>
+          <a:p>
+            <a:pPr indent="0" marL="0">
+              <a:lnSpc>
+                <a:spcPct val="105000"/>
+              </a:lnSpc>
+              <a:buNone/>
+            </a:pPr>
+            <a:r>
+              <a:rPr lang="en-US" sz="1400" dirty="0">
+                <a:solidFill>
+                  <a:srgbClr val="000000"/>
+                </a:solidFill>
+                <a:latin typeface="Meiryo UI" pitchFamily="34" charset="0"/>
+                <a:ea typeface="Meiryo UI" pitchFamily="34" charset="-122"/>
+                <a:cs typeface="Meiryo UI" pitchFamily="34" charset="-120"/>
+              </a:rPr>
+              <a:t>出向・転籍</a:t>
+            </a:r>
+            <a:endParaRPr lang="en-US" sz="1400" dirty="0"/>
+          </a:p>
+        </p:txBody>
+      </p:sp>
+      <p:sp>
+        <p:nvSpPr>
+          <p:cNvPr id="17" name="Text 13"/>
+          <p:cNvSpPr/>
+          <p:nvPr/>
+        </p:nvSpPr>
+        <p:spPr>
+          <a:xfrm>
+            <a:off x="804672" y="3895344"/>
+            <a:ext cx="566928" cy="292608"/>
+          </a:xfrm>
+          <a:prstGeom prst="rect">
+            <a:avLst/>
+          </a:prstGeom>
+          <a:noFill/>
+          <a:ln/>
+        </p:spPr>
+        <p:txBody>
+          <a:bodyPr wrap="square" rtlCol="0" anchor="ctr"/>
+          <a:lstStyle/>
+          <a:p>
+            <a:pPr algn="ctr" indent="0" marL="0">
+              <a:buNone/>
+            </a:pPr>
+            <a:r>
+              <a:rPr lang="en-US" sz="1800" dirty="0">
                 <a:solidFill>
                   <a:srgbClr val="1E2761"/>
                 </a:solidFill>
@@ -4885,128 +3930,22 @@
                 <a:ea typeface="Meiryo UI" pitchFamily="34" charset="-122"/>
                 <a:cs typeface="Meiryo UI" pitchFamily="34" charset="-120"/>
               </a:rPr>
-              <a:t>業務内容　</a:t>
-            </a:r>
-            <a:pPr indent="0" marL="0">
-              <a:lnSpc>
-                <a:spcPct val="125000"/>
-              </a:lnSpc>
-              <a:spcAft>
-                <a:spcPts val="600"/>
-              </a:spcAft>
-              <a:buNone/>
-            </a:pPr>
-            <a:r>
-              <a:rPr lang="en-US" sz="1400" dirty="0">
-                <a:solidFill>
-                  <a:srgbClr val="000000"/>
-                </a:solidFill>
-                <a:latin typeface="Meiryo UI" pitchFamily="34" charset="0"/>
-                <a:ea typeface="Meiryo UI" pitchFamily="34" charset="-122"/>
-                <a:cs typeface="Meiryo UI" pitchFamily="34" charset="-120"/>
-              </a:rPr>
-              <a:t>特定金銭信託・年金信託等の運用実務、商品組成、マーケット分析の基礎を、信託銀行の運用担当としてOJTで習得する。</a:t>
-            </a:r>
-            <a:endParaRPr lang="en-US" sz="1400" dirty="0"/>
-          </a:p>
-        </p:txBody>
-      </p:sp>
-      <p:sp>
-        <p:nvSpPr>
-          <p:cNvPr id="13" name="Text 9"/>
-          <p:cNvSpPr/>
-          <p:nvPr/>
-        </p:nvSpPr>
-        <p:spPr>
-          <a:xfrm>
-            <a:off x="548640" y="4983480"/>
-            <a:ext cx="3566160" cy="1463040"/>
-          </a:xfrm>
-          <a:prstGeom prst="rect">
-            <a:avLst/>
-          </a:prstGeom>
-          <a:noFill/>
-          <a:ln/>
-        </p:spPr>
-        <p:txBody>
-          <a:bodyPr wrap="square" rtlCol="0" anchor="ctr"/>
-          <a:lstStyle/>
-          <a:p>
-            <a:pPr indent="0" marL="0">
-              <a:lnSpc>
-                <a:spcPct val="125000"/>
-              </a:lnSpc>
-              <a:buNone/>
-            </a:pPr>
-            <a:r>
-              <a:rPr lang="en-US" sz="1400" b="1" dirty="0">
-                <a:solidFill>
-                  <a:srgbClr val="1E2761"/>
-                </a:solidFill>
-                <a:latin typeface="Meiryo UI" pitchFamily="34" charset="0"/>
-                <a:ea typeface="Meiryo UI" pitchFamily="34" charset="-122"/>
-                <a:cs typeface="Meiryo UI" pitchFamily="34" charset="-120"/>
-              </a:rPr>
-              <a:t>身につく力　</a:t>
-            </a:r>
-            <a:pPr indent="0" marL="0">
-              <a:lnSpc>
-                <a:spcPct val="125000"/>
-              </a:lnSpc>
-              <a:buNone/>
-            </a:pPr>
-            <a:r>
-              <a:rPr lang="en-US" sz="1400" dirty="0">
-                <a:solidFill>
-                  <a:srgbClr val="000000"/>
-                </a:solidFill>
-                <a:latin typeface="Meiryo UI" pitchFamily="34" charset="0"/>
-                <a:ea typeface="Meiryo UI" pitchFamily="34" charset="-122"/>
-                <a:cs typeface="Meiryo UI" pitchFamily="34" charset="-120"/>
-              </a:rPr>
-              <a:t>マーケットを見る目と運用商品の基本構造の理解、財務諸表分析力を投資判断に応用する初期経験。</a:t>
-            </a:r>
-            <a:endParaRPr lang="en-US" sz="1400" dirty="0"/>
-          </a:p>
-        </p:txBody>
-      </p:sp>
-      <p:sp>
-        <p:nvSpPr>
-          <p:cNvPr id="14" name="Shape 10"/>
-          <p:cNvSpPr/>
-          <p:nvPr/>
-        </p:nvSpPr>
-        <p:spPr>
-          <a:xfrm>
-            <a:off x="4389120" y="1417320"/>
-            <a:ext cx="3566160" cy="1417320"/>
-          </a:xfrm>
-          <a:prstGeom prst="roundRect">
-            <a:avLst>
-              <a:gd name="adj" fmla="val 6452"/>
-            </a:avLst>
-          </a:prstGeom>
-          <a:solidFill>
-            <a:srgbClr val="FFFFFF"/>
-          </a:solidFill>
-          <a:ln w="15875">
-            <a:solidFill>
-              <a:srgbClr val="1E2761"/>
-            </a:solidFill>
-            <a:prstDash val="solid"/>
-          </a:ln>
-        </p:spPr>
-      </p:sp>
-      <p:sp>
-        <p:nvSpPr>
-          <p:cNvPr id="15" name="Shape 11"/>
-          <p:cNvSpPr/>
-          <p:nvPr/>
-        </p:nvSpPr>
-        <p:spPr>
-          <a:xfrm>
-            <a:off x="4590288" y="1691640"/>
-            <a:ext cx="868680" cy="868680"/>
+              <a:t>↓</a:t>
+            </a:r>
+            <a:endParaRPr lang="en-US" sz="1800" dirty="0"/>
+          </a:p>
+        </p:txBody>
+      </p:sp>
+      <p:sp>
+        <p:nvSpPr>
+          <p:cNvPr id="18" name="Shape 14"/>
+          <p:cNvSpPr/>
+          <p:nvPr/>
+        </p:nvSpPr>
+        <p:spPr>
+          <a:xfrm>
+            <a:off x="804672" y="4187952"/>
+            <a:ext cx="566928" cy="566928"/>
           </a:xfrm>
           <a:prstGeom prst="ellipse">
             <a:avLst/>
@@ -5019,7 +3958,7 @@
       </p:sp>
       <p:pic>
         <p:nvPicPr>
-          <p:cNvPr id="16" name="Image 2" descr="icon_exchange.png">    </p:cNvPr>
+          <p:cNvPr id="19" name="Image 2" descr="icon_crown.png">    </p:cNvPr>
           <p:cNvPicPr>
             <a:picLocks noChangeAspect="1"/>
           </p:cNvPicPr>
@@ -5033,8 +3972,8 @@
         </p:blipFill>
         <p:spPr>
           <a:xfrm>
-            <a:off x="4773168" y="1874520"/>
-            <a:ext cx="502920" cy="502920"/>
+            <a:off x="923544" y="4306824"/>
+            <a:ext cx="329184" cy="329184"/>
           </a:xfrm>
           <a:prstGeom prst="rect">
             <a:avLst/>
@@ -5043,38 +3982,169 @@
       </p:pic>
       <p:sp>
         <p:nvSpPr>
-          <p:cNvPr id="17" name="Text 12"/>
-          <p:cNvSpPr/>
-          <p:nvPr/>
-        </p:nvSpPr>
-        <p:spPr>
-          <a:xfrm>
-            <a:off x="5623560" y="1645920"/>
-            <a:ext cx="2148840" cy="320040"/>
-          </a:xfrm>
-          <a:prstGeom prst="rect">
-            <a:avLst/>
-          </a:prstGeom>
-          <a:noFill/>
-          <a:ln/>
-        </p:spPr>
-        <p:txBody>
-          <a:bodyPr wrap="square" rtlCol="0" anchor="ctr"/>
-          <a:lstStyle/>
-          <a:p>
-            <a:pPr indent="0" marL="0">
+          <p:cNvPr id="20" name="Text 15"/>
+          <p:cNvSpPr/>
+          <p:nvPr/>
+        </p:nvSpPr>
+        <p:spPr>
+          <a:xfrm>
+            <a:off x="1508760" y="4160520"/>
+            <a:ext cx="2377440" cy="274320"/>
+          </a:xfrm>
+          <a:prstGeom prst="rect">
+            <a:avLst/>
+          </a:prstGeom>
+          <a:noFill/>
+          <a:ln/>
+        </p:spPr>
+        <p:txBody>
+          <a:bodyPr wrap="square" rtlCol="0" anchor="ctr"/>
+          <a:lstStyle/>
+          <a:p>
+            <a:pPr indent="0" marL="0">
+              <a:buNone/>
+            </a:pPr>
+            <a:r>
+              <a:rPr lang="en-US" sz="1300" b="1" dirty="0">
+                <a:solidFill>
+                  <a:srgbClr val="000000"/>
+                </a:solidFill>
+                <a:latin typeface="Meiryo UI" pitchFamily="34" charset="0"/>
+                <a:ea typeface="Meiryo UI" pitchFamily="34" charset="-122"/>
+                <a:cs typeface="Meiryo UI" pitchFamily="34" charset="-120"/>
+              </a:rPr>
+              <a:t>13年目〜</a:t>
+            </a:r>
+            <a:endParaRPr lang="en-US" sz="1300" dirty="0"/>
+          </a:p>
+        </p:txBody>
+      </p:sp>
+      <p:sp>
+        <p:nvSpPr>
+          <p:cNvPr id="21" name="Text 16"/>
+          <p:cNvSpPr/>
+          <p:nvPr/>
+        </p:nvSpPr>
+        <p:spPr>
+          <a:xfrm>
+            <a:off x="1508760" y="4425696"/>
+            <a:ext cx="2377440" cy="594360"/>
+          </a:xfrm>
+          <a:prstGeom prst="rect">
+            <a:avLst/>
+          </a:prstGeom>
+          <a:noFill/>
+          <a:ln/>
+        </p:spPr>
+        <p:txBody>
+          <a:bodyPr wrap="square" rtlCol="0" anchor="ctr"/>
+          <a:lstStyle/>
+          <a:p>
+            <a:pPr indent="0" marL="0">
+              <a:lnSpc>
+                <a:spcPct val="105000"/>
+              </a:lnSpc>
+              <a:buNone/>
+            </a:pPr>
+            <a:r>
+              <a:rPr lang="en-US" sz="1400" dirty="0">
+                <a:solidFill>
+                  <a:srgbClr val="000000"/>
+                </a:solidFill>
+                <a:latin typeface="Meiryo UI" pitchFamily="34" charset="0"/>
+                <a:ea typeface="Meiryo UI" pitchFamily="34" charset="-122"/>
+                <a:cs typeface="Meiryo UI" pitchFamily="34" charset="-120"/>
+              </a:rPr>
+              <a:t>信託銀行復帰 or</a:t>
+            </a:r>
+            <a:endParaRPr lang="en-US" sz="1400" dirty="0"/>
+          </a:p>
+          <a:p>
+            <a:pPr indent="0" marL="0">
+              <a:lnSpc>
+                <a:spcPct val="105000"/>
+              </a:lnSpc>
+              <a:buNone/>
+            </a:pPr>
+            <a:r>
+              <a:rPr lang="en-US" sz="1400" dirty="0">
+                <a:solidFill>
+                  <a:srgbClr val="000000"/>
+                </a:solidFill>
+                <a:latin typeface="Meiryo UI" pitchFamily="34" charset="0"/>
+                <a:ea typeface="Meiryo UI" pitchFamily="34" charset="-122"/>
+                <a:cs typeface="Meiryo UI" pitchFamily="34" charset="-120"/>
+              </a:rPr>
+              <a:t>AM会社の上級職</a:t>
+            </a:r>
+            <a:endParaRPr lang="en-US" sz="1400" dirty="0"/>
+          </a:p>
+        </p:txBody>
+      </p:sp>
+      <p:sp>
+        <p:nvSpPr>
+          <p:cNvPr id="22" name="Shape 17"/>
+          <p:cNvSpPr/>
+          <p:nvPr/>
+        </p:nvSpPr>
+        <p:spPr>
+          <a:xfrm>
+            <a:off x="685800" y="5513832"/>
+            <a:ext cx="3291840" cy="822960"/>
+          </a:xfrm>
+          <a:prstGeom prst="roundRect">
+            <a:avLst>
+              <a:gd name="adj" fmla="val 11111"/>
+            </a:avLst>
+          </a:prstGeom>
+          <a:solidFill>
+            <a:srgbClr val="FFFFFF"/>
+          </a:solidFill>
+          <a:ln w="12700">
+            <a:solidFill>
+              <a:srgbClr val="1E2761"/>
+            </a:solidFill>
+            <a:prstDash val="solid"/>
+          </a:ln>
+        </p:spPr>
+      </p:sp>
+      <p:sp>
+        <p:nvSpPr>
+          <p:cNvPr id="23" name="Text 18"/>
+          <p:cNvSpPr/>
+          <p:nvPr/>
+        </p:nvSpPr>
+        <p:spPr>
+          <a:xfrm>
+            <a:off x="822960" y="5577840"/>
+            <a:ext cx="3017520" cy="713232"/>
+          </a:xfrm>
+          <a:prstGeom prst="rect">
+            <a:avLst/>
+          </a:prstGeom>
+          <a:noFill/>
+          <a:ln/>
+        </p:spPr>
+        <p:txBody>
+          <a:bodyPr wrap="square" rtlCol="0" anchor="ctr"/>
+          <a:lstStyle/>
+          <a:p>
+            <a:pPr indent="0" marL="0">
+              <a:lnSpc>
+                <a:spcPct val="115000"/>
+              </a:lnSpc>
               <a:buNone/>
             </a:pPr>
             <a:r>
               <a:rPr lang="en-US" sz="1400" b="1" dirty="0">
                 <a:solidFill>
-                  <a:srgbClr val="000000"/>
-                </a:solidFill>
-                <a:latin typeface="Meiryo UI" pitchFamily="34" charset="0"/>
-                <a:ea typeface="Meiryo UI" pitchFamily="34" charset="-122"/>
-                <a:cs typeface="Meiryo UI" pitchFamily="34" charset="-120"/>
-              </a:rPr>
-              <a:t>6〜12年目</a:t>
+                  <a:srgbClr val="1E2761"/>
+                </a:solidFill>
+                <a:latin typeface="Meiryo UI" pitchFamily="34" charset="0"/>
+                <a:ea typeface="Meiryo UI" pitchFamily="34" charset="-122"/>
+                <a:cs typeface="Meiryo UI" pitchFamily="34" charset="-120"/>
+              </a:rPr>
+              <a:t>頭脳＝自分で、顧客の信託資金による幅広い資産の運用を極める</a:t>
             </a:r>
             <a:endParaRPr lang="en-US" sz="1400" dirty="0"/>
           </a:p>
@@ -5082,14 +4152,102 @@
       </p:sp>
       <p:sp>
         <p:nvSpPr>
-          <p:cNvPr id="18" name="Text 13"/>
-          <p:cNvSpPr/>
-          <p:nvPr/>
-        </p:nvSpPr>
-        <p:spPr>
-          <a:xfrm>
-            <a:off x="5623560" y="1965960"/>
-            <a:ext cx="2148840" cy="777240"/>
+          <p:cNvPr id="24" name="Shape 19"/>
+          <p:cNvSpPr/>
+          <p:nvPr/>
+        </p:nvSpPr>
+        <p:spPr>
+          <a:xfrm>
+            <a:off x="4389120" y="1600200"/>
+            <a:ext cx="3566160" cy="4892040"/>
+          </a:xfrm>
+          <a:prstGeom prst="roundRect">
+            <a:avLst>
+              <a:gd name="adj" fmla="val 2564"/>
+            </a:avLst>
+          </a:prstGeom>
+          <a:solidFill>
+            <a:srgbClr val="FFFFFF"/>
+          </a:solidFill>
+          <a:ln w="19050">
+            <a:solidFill>
+              <a:srgbClr val="2E6F52"/>
+            </a:solidFill>
+            <a:prstDash val="solid"/>
+          </a:ln>
+        </p:spPr>
+      </p:sp>
+      <p:sp>
+        <p:nvSpPr>
+          <p:cNvPr id="25" name="Shape 20"/>
+          <p:cNvSpPr/>
+          <p:nvPr/>
+        </p:nvSpPr>
+        <p:spPr>
+          <a:xfrm>
+            <a:off x="4617720" y="1801368"/>
+            <a:ext cx="502920" cy="384048"/>
+          </a:xfrm>
+          <a:prstGeom prst="roundRect">
+            <a:avLst>
+              <a:gd name="adj" fmla="val 19048"/>
+            </a:avLst>
+          </a:prstGeom>
+          <a:solidFill>
+            <a:srgbClr val="2E6F52"/>
+          </a:solidFill>
+          <a:ln/>
+        </p:spPr>
+      </p:sp>
+      <p:sp>
+        <p:nvSpPr>
+          <p:cNvPr id="26" name="Text 21"/>
+          <p:cNvSpPr/>
+          <p:nvPr/>
+        </p:nvSpPr>
+        <p:spPr>
+          <a:xfrm>
+            <a:off x="4617720" y="1801368"/>
+            <a:ext cx="502920" cy="384048"/>
+          </a:xfrm>
+          <a:prstGeom prst="rect">
+            <a:avLst/>
+          </a:prstGeom>
+          <a:noFill/>
+          <a:ln/>
+        </p:spPr>
+        <p:txBody>
+          <a:bodyPr wrap="square" rtlCol="0" anchor="ctr"/>
+          <a:lstStyle/>
+          <a:p>
+            <a:pPr algn="ctr" indent="0" marL="0">
+              <a:buNone/>
+            </a:pPr>
+            <a:r>
+              <a:rPr lang="en-US" sz="1600" b="1" dirty="0">
+                <a:solidFill>
+                  <a:srgbClr val="FFFFFF"/>
+                </a:solidFill>
+                <a:latin typeface="Meiryo UI" pitchFamily="34" charset="0"/>
+                <a:ea typeface="Meiryo UI" pitchFamily="34" charset="-122"/>
+                <a:cs typeface="Meiryo UI" pitchFamily="34" charset="-120"/>
+              </a:rPr>
+              <a:t>2</a:t>
+            </a:r>
+            <a:endParaRPr lang="en-US" sz="1600" dirty="0"/>
+          </a:p>
+        </p:txBody>
+      </p:sp>
+      <p:sp>
+        <p:nvSpPr>
+          <p:cNvPr id="27" name="Text 22"/>
+          <p:cNvSpPr/>
+          <p:nvPr/>
+        </p:nvSpPr>
+        <p:spPr>
+          <a:xfrm>
+            <a:off x="5257800" y="1764792"/>
+            <a:ext cx="2468880" cy="502920"/>
           </a:xfrm>
           <a:prstGeom prst="rect">
             <a:avLst/>
@@ -5103,7 +4261,7 @@
           <a:p>
             <a:pPr indent="0" marL="0">
               <a:lnSpc>
-                <a:spcPct val="110000"/>
+                <a:spcPct val="105000"/>
               </a:lnSpc>
               <a:buNone/>
             </a:pPr>
@@ -5116,35 +4274,35 @@
                 <a:ea typeface="Meiryo UI" pitchFamily="34" charset="-122"/>
                 <a:cs typeface="Meiryo UI" pitchFamily="34" charset="-120"/>
               </a:rPr>
-              <a:t>グループAM会社へ</a:t>
+              <a:t>企業法務・ガバナンスのプロになる</a:t>
             </a:r>
             <a:endParaRPr lang="en-US" sz="1500" dirty="0"/>
           </a:p>
-          <a:p>
-            <a:pPr indent="0" marL="0">
-              <a:lnSpc>
-                <a:spcPct val="110000"/>
-              </a:lnSpc>
-              <a:buNone/>
-            </a:pPr>
-            <a:r>
-              <a:rPr lang="en-US" sz="1500" b="1" dirty="0">
-                <a:solidFill>
-                  <a:srgbClr val="000000"/>
-                </a:solidFill>
-                <a:latin typeface="Meiryo UI" pitchFamily="34" charset="0"/>
-                <a:ea typeface="Meiryo UI" pitchFamily="34" charset="-122"/>
-                <a:cs typeface="Meiryo UI" pitchFamily="34" charset="-120"/>
-              </a:rPr>
-              <a:t>出向・転籍</a:t>
-            </a:r>
-            <a:endParaRPr lang="en-US" sz="1500" dirty="0"/>
-          </a:p>
-        </p:txBody>
+        </p:txBody>
+      </p:sp>
+      <p:sp>
+        <p:nvSpPr>
+          <p:cNvPr id="28" name="Shape 23"/>
+          <p:cNvSpPr/>
+          <p:nvPr/>
+        </p:nvSpPr>
+        <p:spPr>
+          <a:xfrm>
+            <a:off x="4645152" y="2468880"/>
+            <a:ext cx="566928" cy="566928"/>
+          </a:xfrm>
+          <a:prstGeom prst="ellipse">
+            <a:avLst/>
+          </a:prstGeom>
+          <a:solidFill>
+            <a:srgbClr val="2E6F52"/>
+          </a:solidFill>
+          <a:ln/>
+        </p:spPr>
       </p:sp>
       <p:pic>
         <p:nvPicPr>
-          <p:cNvPr id="19" name="Image 3" descr="icon_arrow_dark.png">    </p:cNvPr>
+          <p:cNvPr id="29" name="Image 3" descr="icon_contract.png">    </p:cNvPr>
           <p:cNvPicPr>
             <a:picLocks noChangeAspect="1"/>
           </p:cNvPicPr>
@@ -5158,8 +4316,8 @@
         </p:blipFill>
         <p:spPr>
           <a:xfrm>
-            <a:off x="7973568" y="1979676"/>
-            <a:ext cx="219456" cy="292608"/>
+            <a:off x="4764024" y="2587752"/>
+            <a:ext cx="329184" cy="329184"/>
           </a:xfrm>
           <a:prstGeom prst="rect">
             <a:avLst/>
@@ -5168,14 +4326,53 @@
       </p:pic>
       <p:sp>
         <p:nvSpPr>
-          <p:cNvPr id="20" name="Text 14"/>
-          <p:cNvSpPr/>
-          <p:nvPr/>
-        </p:nvSpPr>
-        <p:spPr>
-          <a:xfrm>
-            <a:off x="4389120" y="3017520"/>
-            <a:ext cx="3566160" cy="2103120"/>
+          <p:cNvPr id="30" name="Text 24"/>
+          <p:cNvSpPr/>
+          <p:nvPr/>
+        </p:nvSpPr>
+        <p:spPr>
+          <a:xfrm>
+            <a:off x="5349240" y="2441448"/>
+            <a:ext cx="2377440" cy="274320"/>
+          </a:xfrm>
+          <a:prstGeom prst="rect">
+            <a:avLst/>
+          </a:prstGeom>
+          <a:noFill/>
+          <a:ln/>
+        </p:spPr>
+        <p:txBody>
+          <a:bodyPr wrap="square" rtlCol="0" anchor="ctr"/>
+          <a:lstStyle/>
+          <a:p>
+            <a:pPr indent="0" marL="0">
+              <a:buNone/>
+            </a:pPr>
+            <a:r>
+              <a:rPr lang="en-US" sz="1300" b="1" dirty="0">
+                <a:solidFill>
+                  <a:srgbClr val="000000"/>
+                </a:solidFill>
+                <a:latin typeface="Meiryo UI" pitchFamily="34" charset="0"/>
+                <a:ea typeface="Meiryo UI" pitchFamily="34" charset="-122"/>
+                <a:cs typeface="Meiryo UI" pitchFamily="34" charset="-120"/>
+              </a:rPr>
+              <a:t>入行後</a:t>
+            </a:r>
+            <a:endParaRPr lang="en-US" sz="1300" dirty="0"/>
+          </a:p>
+        </p:txBody>
+      </p:sp>
+      <p:sp>
+        <p:nvSpPr>
+          <p:cNvPr id="31" name="Text 25"/>
+          <p:cNvSpPr/>
+          <p:nvPr/>
+        </p:nvSpPr>
+        <p:spPr>
+          <a:xfrm>
+            <a:off x="5349240" y="2706624"/>
+            <a:ext cx="2377440" cy="594360"/>
           </a:xfrm>
           <a:prstGeom prst="rect">
             <a:avLst/>
@@ -5189,31 +4386,28 @@
           <a:p>
             <a:pPr indent="0" marL="0">
               <a:lnSpc>
-                <a:spcPct val="125000"/>
+                <a:spcPct val="105000"/>
               </a:lnSpc>
-              <a:spcAft>
-                <a:spcPts val="600"/>
-              </a:spcAft>
-              <a:buNone/>
-            </a:pPr>
-            <a:r>
-              <a:rPr lang="en-US" sz="1400" b="1" dirty="0">
-                <a:solidFill>
-                  <a:srgbClr val="1E2761"/>
-                </a:solidFill>
-                <a:latin typeface="Meiryo UI" pitchFamily="34" charset="0"/>
-                <a:ea typeface="Meiryo UI" pitchFamily="34" charset="-122"/>
-                <a:cs typeface="Meiryo UI" pitchFamily="34" charset="-120"/>
-              </a:rPr>
-              <a:t>業務内容　</a:t>
-            </a:r>
+              <a:buNone/>
+            </a:pPr>
+            <a:r>
+              <a:rPr lang="en-US" sz="1400" dirty="0">
+                <a:solidFill>
+                  <a:srgbClr val="000000"/>
+                </a:solidFill>
+                <a:latin typeface="Meiryo UI" pitchFamily="34" charset="0"/>
+                <a:ea typeface="Meiryo UI" pitchFamily="34" charset="-122"/>
+                <a:cs typeface="Meiryo UI" pitchFamily="34" charset="-120"/>
+              </a:rPr>
+              <a:t>信託銀行</a:t>
+            </a:r>
+            <a:endParaRPr lang="en-US" sz="1400" dirty="0"/>
+          </a:p>
+          <a:p>
             <a:pPr indent="0" marL="0">
               <a:lnSpc>
-                <a:spcPct val="125000"/>
+                <a:spcPct val="105000"/>
               </a:lnSpc>
-              <a:spcAft>
-                <a:spcPts val="600"/>
-              </a:spcAft>
               <a:buNone/>
             </a:pPr>
             <a:r>
@@ -5225,7 +4419,7 @@
                 <a:ea typeface="Meiryo UI" pitchFamily="34" charset="-122"/>
                 <a:cs typeface="Meiryo UI" pitchFamily="34" charset="-120"/>
               </a:rPr>
-              <a:t>ファンドマネージャー／アナリストとして「何を買うか」を決める運用の頭脳側を担当。マルチマネージャー方式で信託銀行等から運用を受託する側の実務を経験する。</a:t>
+              <a:t>証券代行部門</a:t>
             </a:r>
             <a:endParaRPr lang="en-US" sz="1400" dirty="0"/>
           </a:p>
@@ -5233,113 +4427,66 @@
       </p:sp>
       <p:sp>
         <p:nvSpPr>
-          <p:cNvPr id="21" name="Text 15"/>
-          <p:cNvSpPr/>
-          <p:nvPr/>
-        </p:nvSpPr>
-        <p:spPr>
-          <a:xfrm>
-            <a:off x="4389120" y="4983480"/>
-            <a:ext cx="3566160" cy="1463040"/>
-          </a:xfrm>
-          <a:prstGeom prst="rect">
-            <a:avLst/>
-          </a:prstGeom>
-          <a:noFill/>
-          <a:ln/>
-        </p:spPr>
-        <p:txBody>
-          <a:bodyPr wrap="square" rtlCol="0" anchor="ctr"/>
-          <a:lstStyle/>
-          <a:p>
-            <a:pPr indent="0" marL="0">
-              <a:lnSpc>
-                <a:spcPct val="125000"/>
-              </a:lnSpc>
-              <a:buNone/>
-            </a:pPr>
-            <a:r>
-              <a:rPr lang="en-US" sz="1400" b="1" dirty="0">
-                <a:solidFill>
-                  <a:srgbClr val="1E2761"/>
-                </a:solidFill>
-                <a:latin typeface="Meiryo UI" pitchFamily="34" charset="0"/>
-                <a:ea typeface="Meiryo UI" pitchFamily="34" charset="-122"/>
-                <a:cs typeface="Meiryo UI" pitchFamily="34" charset="-120"/>
-              </a:rPr>
-              <a:t>身につく力　</a:t>
-            </a:r>
-            <a:pPr indent="0" marL="0">
-              <a:lnSpc>
-                <a:spcPct val="125000"/>
-              </a:lnSpc>
-              <a:buNone/>
-            </a:pPr>
-            <a:r>
-              <a:rPr lang="en-US" sz="1400" dirty="0">
-                <a:solidFill>
-                  <a:srgbClr val="000000"/>
-                </a:solidFill>
-                <a:latin typeface="Meiryo UI" pitchFamily="34" charset="0"/>
-                <a:ea typeface="Meiryo UI" pitchFamily="34" charset="-122"/>
-                <a:cs typeface="Meiryo UI" pitchFamily="34" charset="-120"/>
-              </a:rPr>
-              <a:t>投資判断力・リサーチ力を、財務諸表分析力を武器に磨き上げ、運用会社ならではの専門性を確立する。</a:t>
-            </a:r>
-            <a:endParaRPr lang="en-US" sz="1400" dirty="0"/>
-          </a:p>
-        </p:txBody>
-      </p:sp>
-      <p:sp>
-        <p:nvSpPr>
-          <p:cNvPr id="22" name="Shape 16"/>
-          <p:cNvSpPr/>
-          <p:nvPr/>
-        </p:nvSpPr>
-        <p:spPr>
-          <a:xfrm>
-            <a:off x="8229600" y="1417320"/>
-            <a:ext cx="3566160" cy="1417320"/>
-          </a:xfrm>
-          <a:prstGeom prst="roundRect">
-            <a:avLst>
-              <a:gd name="adj" fmla="val 6452"/>
-            </a:avLst>
+          <p:cNvPr id="32" name="Text 26"/>
+          <p:cNvSpPr/>
+          <p:nvPr/>
+        </p:nvSpPr>
+        <p:spPr>
+          <a:xfrm>
+            <a:off x="4645152" y="3035808"/>
+            <a:ext cx="566928" cy="292608"/>
+          </a:xfrm>
+          <a:prstGeom prst="rect">
+            <a:avLst/>
+          </a:prstGeom>
+          <a:noFill/>
+          <a:ln/>
+        </p:spPr>
+        <p:txBody>
+          <a:bodyPr wrap="square" rtlCol="0" anchor="ctr"/>
+          <a:lstStyle/>
+          <a:p>
+            <a:pPr algn="ctr" indent="0" marL="0">
+              <a:buNone/>
+            </a:pPr>
+            <a:r>
+              <a:rPr lang="en-US" sz="1800" dirty="0">
+                <a:solidFill>
+                  <a:srgbClr val="2E6F52"/>
+                </a:solidFill>
+                <a:latin typeface="Meiryo UI" pitchFamily="34" charset="0"/>
+                <a:ea typeface="Meiryo UI" pitchFamily="34" charset="-122"/>
+                <a:cs typeface="Meiryo UI" pitchFamily="34" charset="-120"/>
+              </a:rPr>
+              <a:t>↓</a:t>
+            </a:r>
+            <a:endParaRPr lang="en-US" sz="1800" dirty="0"/>
+          </a:p>
+        </p:txBody>
+      </p:sp>
+      <p:sp>
+        <p:nvSpPr>
+          <p:cNvPr id="33" name="Shape 27"/>
+          <p:cNvSpPr/>
+          <p:nvPr/>
+        </p:nvSpPr>
+        <p:spPr>
+          <a:xfrm>
+            <a:off x="4645152" y="3328416"/>
+            <a:ext cx="566928" cy="566928"/>
+          </a:xfrm>
+          <a:prstGeom prst="ellipse">
+            <a:avLst/>
           </a:prstGeom>
           <a:solidFill>
-            <a:srgbClr val="FFFFFF"/>
-          </a:solidFill>
-          <a:ln w="15875">
-            <a:solidFill>
-              <a:srgbClr val="1E2761"/>
-            </a:solidFill>
-            <a:prstDash val="solid"/>
-          </a:ln>
-        </p:spPr>
-      </p:sp>
-      <p:sp>
-        <p:nvSpPr>
-          <p:cNvPr id="23" name="Shape 17"/>
-          <p:cNvSpPr/>
-          <p:nvPr/>
-        </p:nvSpPr>
-        <p:spPr>
-          <a:xfrm>
-            <a:off x="8430768" y="1691640"/>
-            <a:ext cx="868680" cy="868680"/>
-          </a:xfrm>
-          <a:prstGeom prst="ellipse">
-            <a:avLst/>
-          </a:prstGeom>
-          <a:solidFill>
-            <a:srgbClr val="1E2761"/>
+            <a:srgbClr val="2E6F52"/>
           </a:solidFill>
           <a:ln/>
         </p:spPr>
       </p:sp>
       <p:pic>
         <p:nvPicPr>
-          <p:cNvPr id="24" name="Image 4" descr="icon_crown.png">    </p:cNvPr>
+          <p:cNvPr id="34" name="Image 4" descr="icon_law.png">    </p:cNvPr>
           <p:cNvPicPr>
             <a:picLocks noChangeAspect="1"/>
           </p:cNvPicPr>
@@ -5353,8 +4500,8 @@
         </p:blipFill>
         <p:spPr>
           <a:xfrm>
-            <a:off x="8613648" y="1874520"/>
-            <a:ext cx="502920" cy="502920"/>
+            <a:off x="4764024" y="3447288"/>
+            <a:ext cx="329184" cy="329184"/>
           </a:xfrm>
           <a:prstGeom prst="rect">
             <a:avLst/>
@@ -5363,31 +4510,927 @@
       </p:pic>
       <p:sp>
         <p:nvSpPr>
-          <p:cNvPr id="25" name="Text 18"/>
-          <p:cNvSpPr/>
-          <p:nvPr/>
-        </p:nvSpPr>
-        <p:spPr>
-          <a:xfrm>
-            <a:off x="9464040" y="1645920"/>
-            <a:ext cx="2148840" cy="320040"/>
-          </a:xfrm>
-          <a:prstGeom prst="rect">
-            <a:avLst/>
-          </a:prstGeom>
-          <a:noFill/>
-          <a:ln/>
-        </p:spPr>
-        <p:txBody>
-          <a:bodyPr wrap="square" rtlCol="0" anchor="ctr"/>
-          <a:lstStyle/>
-          <a:p>
-            <a:pPr indent="0" marL="0">
+          <p:cNvPr id="35" name="Text 28"/>
+          <p:cNvSpPr/>
+          <p:nvPr/>
+        </p:nvSpPr>
+        <p:spPr>
+          <a:xfrm>
+            <a:off x="5349240" y="3300984"/>
+            <a:ext cx="2377440" cy="274320"/>
+          </a:xfrm>
+          <a:prstGeom prst="rect">
+            <a:avLst/>
+          </a:prstGeom>
+          <a:noFill/>
+          <a:ln/>
+        </p:spPr>
+        <p:txBody>
+          <a:bodyPr wrap="square" rtlCol="0" anchor="ctr"/>
+          <a:lstStyle/>
+          <a:p>
+            <a:pPr indent="0" marL="0">
+              <a:buNone/>
+            </a:pPr>
+            <a:r>
+              <a:rPr lang="en-US" sz="1300" b="1" dirty="0">
+                <a:solidFill>
+                  <a:srgbClr val="000000"/>
+                </a:solidFill>
+                <a:latin typeface="Meiryo UI" pitchFamily="34" charset="0"/>
+                <a:ea typeface="Meiryo UI" pitchFamily="34" charset="-122"/>
+                <a:cs typeface="Meiryo UI" pitchFamily="34" charset="-120"/>
+              </a:rPr>
+              <a:t>経験を積んだ後</a:t>
+            </a:r>
+            <a:endParaRPr lang="en-US" sz="1300" dirty="0"/>
+          </a:p>
+        </p:txBody>
+      </p:sp>
+      <p:sp>
+        <p:nvSpPr>
+          <p:cNvPr id="36" name="Text 29"/>
+          <p:cNvSpPr/>
+          <p:nvPr/>
+        </p:nvSpPr>
+        <p:spPr>
+          <a:xfrm>
+            <a:off x="5349240" y="3566160"/>
+            <a:ext cx="2377440" cy="594360"/>
+          </a:xfrm>
+          <a:prstGeom prst="rect">
+            <a:avLst/>
+          </a:prstGeom>
+          <a:noFill/>
+          <a:ln/>
+        </p:spPr>
+        <p:txBody>
+          <a:bodyPr wrap="square" rtlCol="0" anchor="ctr"/>
+          <a:lstStyle/>
+          <a:p>
+            <a:pPr indent="0" marL="0">
+              <a:lnSpc>
+                <a:spcPct val="105000"/>
+              </a:lnSpc>
+              <a:buNone/>
+            </a:pPr>
+            <a:r>
+              <a:rPr lang="en-US" sz="1400" dirty="0">
+                <a:solidFill>
+                  <a:srgbClr val="000000"/>
+                </a:solidFill>
+                <a:latin typeface="Meiryo UI" pitchFamily="34" charset="0"/>
+                <a:ea typeface="Meiryo UI" pitchFamily="34" charset="-122"/>
+                <a:cs typeface="Meiryo UI" pitchFamily="34" charset="-120"/>
+              </a:rPr>
+              <a:t>部門内の</a:t>
+            </a:r>
+            <a:endParaRPr lang="en-US" sz="1400" dirty="0"/>
+          </a:p>
+          <a:p>
+            <a:pPr indent="0" marL="0">
+              <a:lnSpc>
+                <a:spcPct val="105000"/>
+              </a:lnSpc>
+              <a:buNone/>
+            </a:pPr>
+            <a:r>
+              <a:rPr lang="en-US" sz="1400" dirty="0">
+                <a:solidFill>
+                  <a:srgbClr val="000000"/>
+                </a:solidFill>
+                <a:latin typeface="Meiryo UI" pitchFamily="34" charset="0"/>
+                <a:ea typeface="Meiryo UI" pitchFamily="34" charset="-122"/>
+                <a:cs typeface="Meiryo UI" pitchFamily="34" charset="-120"/>
+              </a:rPr>
+              <a:t>ガバナンスコンサルティングチーム</a:t>
+            </a:r>
+            <a:endParaRPr lang="en-US" sz="1400" dirty="0"/>
+          </a:p>
+        </p:txBody>
+      </p:sp>
+      <p:sp>
+        <p:nvSpPr>
+          <p:cNvPr id="37" name="Text 30"/>
+          <p:cNvSpPr/>
+          <p:nvPr/>
+        </p:nvSpPr>
+        <p:spPr>
+          <a:xfrm>
+            <a:off x="4645152" y="3895344"/>
+            <a:ext cx="566928" cy="292608"/>
+          </a:xfrm>
+          <a:prstGeom prst="rect">
+            <a:avLst/>
+          </a:prstGeom>
+          <a:noFill/>
+          <a:ln/>
+        </p:spPr>
+        <p:txBody>
+          <a:bodyPr wrap="square" rtlCol="0" anchor="ctr"/>
+          <a:lstStyle/>
+          <a:p>
+            <a:pPr algn="ctr" indent="0" marL="0">
+              <a:buNone/>
+            </a:pPr>
+            <a:r>
+              <a:rPr lang="en-US" sz="1800" dirty="0">
+                <a:solidFill>
+                  <a:srgbClr val="2E6F52"/>
+                </a:solidFill>
+                <a:latin typeface="Meiryo UI" pitchFamily="34" charset="0"/>
+                <a:ea typeface="Meiryo UI" pitchFamily="34" charset="-122"/>
+                <a:cs typeface="Meiryo UI" pitchFamily="34" charset="-120"/>
+              </a:rPr>
+              <a:t>↓</a:t>
+            </a:r>
+            <a:endParaRPr lang="en-US" sz="1800" dirty="0"/>
+          </a:p>
+        </p:txBody>
+      </p:sp>
+      <p:sp>
+        <p:nvSpPr>
+          <p:cNvPr id="38" name="Shape 31"/>
+          <p:cNvSpPr/>
+          <p:nvPr/>
+        </p:nvSpPr>
+        <p:spPr>
+          <a:xfrm>
+            <a:off x="4645152" y="4187952"/>
+            <a:ext cx="566928" cy="566928"/>
+          </a:xfrm>
+          <a:prstGeom prst="ellipse">
+            <a:avLst/>
+          </a:prstGeom>
+          <a:solidFill>
+            <a:srgbClr val="2E6F52"/>
+          </a:solidFill>
+          <a:ln/>
+        </p:spPr>
+      </p:sp>
+      <p:pic>
+        <p:nvPicPr>
+          <p:cNvPr id="39" name="Image 5" descr="icon_usertie.png">    </p:cNvPr>
+          <p:cNvPicPr>
+            <a:picLocks noChangeAspect="1"/>
+          </p:cNvPicPr>
+          <p:nvPr/>
+        </p:nvPicPr>
+        <p:blipFill>
+          <a:blip r:embed="rId6"/>
+          <a:stretch>
+            <a:fillRect/>
+          </a:stretch>
+        </p:blipFill>
+        <p:spPr>
+          <a:xfrm>
+            <a:off x="4764024" y="4306824"/>
+            <a:ext cx="329184" cy="329184"/>
+          </a:xfrm>
+          <a:prstGeom prst="rect">
+            <a:avLst/>
+          </a:prstGeom>
+        </p:spPr>
+      </p:pic>
+      <p:sp>
+        <p:nvSpPr>
+          <p:cNvPr id="40" name="Text 32"/>
+          <p:cNvSpPr/>
+          <p:nvPr/>
+        </p:nvSpPr>
+        <p:spPr>
+          <a:xfrm>
+            <a:off x="5349240" y="4160520"/>
+            <a:ext cx="2377440" cy="274320"/>
+          </a:xfrm>
+          <a:prstGeom prst="rect">
+            <a:avLst/>
+          </a:prstGeom>
+          <a:noFill/>
+          <a:ln/>
+        </p:spPr>
+        <p:txBody>
+          <a:bodyPr wrap="square" rtlCol="0" anchor="ctr"/>
+          <a:lstStyle/>
+          <a:p>
+            <a:pPr indent="0" marL="0">
+              <a:buNone/>
+            </a:pPr>
+            <a:r>
+              <a:rPr lang="en-US" sz="1300" b="1" dirty="0">
+                <a:solidFill>
+                  <a:srgbClr val="000000"/>
+                </a:solidFill>
+                <a:latin typeface="Meiryo UI" pitchFamily="34" charset="0"/>
+                <a:ea typeface="Meiryo UI" pitchFamily="34" charset="-122"/>
+                <a:cs typeface="Meiryo UI" pitchFamily="34" charset="-120"/>
+              </a:rPr>
+              <a:t>将来的に</a:t>
+            </a:r>
+            <a:endParaRPr lang="en-US" sz="1300" dirty="0"/>
+          </a:p>
+        </p:txBody>
+      </p:sp>
+      <p:sp>
+        <p:nvSpPr>
+          <p:cNvPr id="41" name="Text 33"/>
+          <p:cNvSpPr/>
+          <p:nvPr/>
+        </p:nvSpPr>
+        <p:spPr>
+          <a:xfrm>
+            <a:off x="5349240" y="4425696"/>
+            <a:ext cx="2377440" cy="594360"/>
+          </a:xfrm>
+          <a:prstGeom prst="rect">
+            <a:avLst/>
+          </a:prstGeom>
+          <a:noFill/>
+          <a:ln/>
+        </p:spPr>
+        <p:txBody>
+          <a:bodyPr wrap="square" rtlCol="0" anchor="ctr"/>
+          <a:lstStyle/>
+          <a:p>
+            <a:pPr indent="0" marL="0">
+              <a:lnSpc>
+                <a:spcPct val="105000"/>
+              </a:lnSpc>
+              <a:buNone/>
+            </a:pPr>
+            <a:r>
+              <a:rPr lang="en-US" sz="1400" dirty="0">
+                <a:solidFill>
+                  <a:srgbClr val="000000"/>
+                </a:solidFill>
+                <a:latin typeface="Meiryo UI" pitchFamily="34" charset="0"/>
+                <a:ea typeface="Meiryo UI" pitchFamily="34" charset="-122"/>
+                <a:cs typeface="Meiryo UI" pitchFamily="34" charset="-120"/>
+              </a:rPr>
+              <a:t>シニアコンサルタント</a:t>
+            </a:r>
+            <a:endParaRPr lang="en-US" sz="1400" dirty="0"/>
+          </a:p>
+          <a:p>
+            <a:pPr indent="0" marL="0">
+              <a:lnSpc>
+                <a:spcPct val="105000"/>
+              </a:lnSpc>
+              <a:buNone/>
+            </a:pPr>
+            <a:r>
+              <a:rPr lang="en-US" sz="1400" dirty="0">
+                <a:solidFill>
+                  <a:srgbClr val="000000"/>
+                </a:solidFill>
+                <a:latin typeface="Meiryo UI" pitchFamily="34" charset="0"/>
+                <a:ea typeface="Meiryo UI" pitchFamily="34" charset="-122"/>
+                <a:cs typeface="Meiryo UI" pitchFamily="34" charset="-120"/>
+              </a:rPr>
+              <a:t>または管理職</a:t>
+            </a:r>
+            <a:endParaRPr lang="en-US" sz="1400" dirty="0"/>
+          </a:p>
+        </p:txBody>
+      </p:sp>
+      <p:sp>
+        <p:nvSpPr>
+          <p:cNvPr id="42" name="Shape 34"/>
+          <p:cNvSpPr/>
+          <p:nvPr/>
+        </p:nvSpPr>
+        <p:spPr>
+          <a:xfrm>
+            <a:off x="4526280" y="5513832"/>
+            <a:ext cx="3291840" cy="822960"/>
+          </a:xfrm>
+          <a:prstGeom prst="roundRect">
+            <a:avLst>
+              <a:gd name="adj" fmla="val 11111"/>
+            </a:avLst>
+          </a:prstGeom>
+          <a:solidFill>
+            <a:srgbClr val="FFFFFF"/>
+          </a:solidFill>
+          <a:ln w="12700">
+            <a:solidFill>
+              <a:srgbClr val="2E6F52"/>
+            </a:solidFill>
+            <a:prstDash val="solid"/>
+          </a:ln>
+        </p:spPr>
+      </p:sp>
+      <p:sp>
+        <p:nvSpPr>
+          <p:cNvPr id="43" name="Text 35"/>
+          <p:cNvSpPr/>
+          <p:nvPr/>
+        </p:nvSpPr>
+        <p:spPr>
+          <a:xfrm>
+            <a:off x="4663440" y="5577840"/>
+            <a:ext cx="3017520" cy="713232"/>
+          </a:xfrm>
+          <a:prstGeom prst="rect">
+            <a:avLst/>
+          </a:prstGeom>
+          <a:noFill/>
+          <a:ln/>
+        </p:spPr>
+        <p:txBody>
+          <a:bodyPr wrap="square" rtlCol="0" anchor="ctr"/>
+          <a:lstStyle/>
+          <a:p>
+            <a:pPr indent="0" marL="0">
+              <a:lnSpc>
+                <a:spcPct val="115000"/>
+              </a:lnSpc>
               <a:buNone/>
             </a:pPr>
             <a:r>
               <a:rPr lang="en-US" sz="1400" b="1" dirty="0">
                 <a:solidFill>
+                  <a:srgbClr val="2E6F52"/>
+                </a:solidFill>
+                <a:latin typeface="Meiryo UI" pitchFamily="34" charset="0"/>
+                <a:ea typeface="Meiryo UI" pitchFamily="34" charset="-122"/>
+                <a:cs typeface="Meiryo UI" pitchFamily="34" charset="-120"/>
+              </a:rPr>
+              <a:t>運用ではなく企業経営への助言を極める。証券代行部門が起点</a:t>
+            </a:r>
+            <a:endParaRPr lang="en-US" sz="1400" dirty="0"/>
+          </a:p>
+        </p:txBody>
+      </p:sp>
+      <p:sp>
+        <p:nvSpPr>
+          <p:cNvPr id="44" name="Shape 36"/>
+          <p:cNvSpPr/>
+          <p:nvPr/>
+        </p:nvSpPr>
+        <p:spPr>
+          <a:xfrm>
+            <a:off x="8229600" y="1600200"/>
+            <a:ext cx="3566160" cy="4892040"/>
+          </a:xfrm>
+          <a:prstGeom prst="roundRect">
+            <a:avLst>
+              <a:gd name="adj" fmla="val 2564"/>
+            </a:avLst>
+          </a:prstGeom>
+          <a:solidFill>
+            <a:srgbClr val="FFFFFF"/>
+          </a:solidFill>
+          <a:ln w="19050">
+            <a:solidFill>
+              <a:srgbClr val="8A4B1E"/>
+            </a:solidFill>
+            <a:prstDash val="solid"/>
+          </a:ln>
+        </p:spPr>
+      </p:sp>
+      <p:sp>
+        <p:nvSpPr>
+          <p:cNvPr id="45" name="Shape 37"/>
+          <p:cNvSpPr/>
+          <p:nvPr/>
+        </p:nvSpPr>
+        <p:spPr>
+          <a:xfrm>
+            <a:off x="8458200" y="1801368"/>
+            <a:ext cx="502920" cy="384048"/>
+          </a:xfrm>
+          <a:prstGeom prst="roundRect">
+            <a:avLst>
+              <a:gd name="adj" fmla="val 19048"/>
+            </a:avLst>
+          </a:prstGeom>
+          <a:solidFill>
+            <a:srgbClr val="8A4B1E"/>
+          </a:solidFill>
+          <a:ln/>
+        </p:spPr>
+      </p:sp>
+      <p:sp>
+        <p:nvSpPr>
+          <p:cNvPr id="46" name="Text 38"/>
+          <p:cNvSpPr/>
+          <p:nvPr/>
+        </p:nvSpPr>
+        <p:spPr>
+          <a:xfrm>
+            <a:off x="8458200" y="1801368"/>
+            <a:ext cx="502920" cy="384048"/>
+          </a:xfrm>
+          <a:prstGeom prst="rect">
+            <a:avLst/>
+          </a:prstGeom>
+          <a:noFill/>
+          <a:ln/>
+        </p:spPr>
+        <p:txBody>
+          <a:bodyPr wrap="square" rtlCol="0" anchor="ctr"/>
+          <a:lstStyle/>
+          <a:p>
+            <a:pPr algn="ctr" indent="0" marL="0">
+              <a:buNone/>
+            </a:pPr>
+            <a:r>
+              <a:rPr lang="en-US" sz="1600" b="1" dirty="0">
+                <a:solidFill>
+                  <a:srgbClr val="FFFFFF"/>
+                </a:solidFill>
+                <a:latin typeface="Meiryo UI" pitchFamily="34" charset="0"/>
+                <a:ea typeface="Meiryo UI" pitchFamily="34" charset="-122"/>
+                <a:cs typeface="Meiryo UI" pitchFamily="34" charset="-120"/>
+              </a:rPr>
+              <a:t>3</a:t>
+            </a:r>
+            <a:endParaRPr lang="en-US" sz="1600" dirty="0"/>
+          </a:p>
+        </p:txBody>
+      </p:sp>
+      <p:sp>
+        <p:nvSpPr>
+          <p:cNvPr id="47" name="Text 39"/>
+          <p:cNvSpPr/>
+          <p:nvPr/>
+        </p:nvSpPr>
+        <p:spPr>
+          <a:xfrm>
+            <a:off x="9098280" y="1764792"/>
+            <a:ext cx="2468880" cy="502920"/>
+          </a:xfrm>
+          <a:prstGeom prst="rect">
+            <a:avLst/>
+          </a:prstGeom>
+          <a:noFill/>
+          <a:ln/>
+        </p:spPr>
+        <p:txBody>
+          <a:bodyPr wrap="square" rtlCol="0" anchor="ctr"/>
+          <a:lstStyle/>
+          <a:p>
+            <a:pPr indent="0" marL="0">
+              <a:lnSpc>
+                <a:spcPct val="105000"/>
+              </a:lnSpc>
+              <a:buNone/>
+            </a:pPr>
+            <a:r>
+              <a:rPr lang="en-US" sz="1500" b="1" dirty="0">
+                <a:solidFill>
+                  <a:srgbClr val="000000"/>
+                </a:solidFill>
+                <a:latin typeface="Meiryo UI" pitchFamily="34" charset="0"/>
+                <a:ea typeface="Meiryo UI" pitchFamily="34" charset="-122"/>
+                <a:cs typeface="Meiryo UI" pitchFamily="34" charset="-120"/>
+              </a:rPr>
+              <a:t>自己勘定運用のプロになる</a:t>
+            </a:r>
+            <a:endParaRPr lang="en-US" sz="1500" dirty="0"/>
+          </a:p>
+        </p:txBody>
+      </p:sp>
+      <p:sp>
+        <p:nvSpPr>
+          <p:cNvPr id="48" name="Shape 40"/>
+          <p:cNvSpPr/>
+          <p:nvPr/>
+        </p:nvSpPr>
+        <p:spPr>
+          <a:xfrm>
+            <a:off x="8485632" y="2468880"/>
+            <a:ext cx="566928" cy="566928"/>
+          </a:xfrm>
+          <a:prstGeom prst="ellipse">
+            <a:avLst/>
+          </a:prstGeom>
+          <a:solidFill>
+            <a:srgbClr val="8A4B1E"/>
+          </a:solidFill>
+          <a:ln/>
+        </p:spPr>
+      </p:sp>
+      <p:pic>
+        <p:nvPicPr>
+          <p:cNvPr id="49" name="Image 6" descr="icon_landmark.png">    </p:cNvPr>
+          <p:cNvPicPr>
+            <a:picLocks noChangeAspect="1"/>
+          </p:cNvPicPr>
+          <p:nvPr/>
+        </p:nvPicPr>
+        <p:blipFill>
+          <a:blip r:embed="rId7"/>
+          <a:stretch>
+            <a:fillRect/>
+          </a:stretch>
+        </p:blipFill>
+        <p:spPr>
+          <a:xfrm>
+            <a:off x="8604504" y="2587752"/>
+            <a:ext cx="329184" cy="329184"/>
+          </a:xfrm>
+          <a:prstGeom prst="rect">
+            <a:avLst/>
+          </a:prstGeom>
+        </p:spPr>
+      </p:pic>
+      <p:sp>
+        <p:nvSpPr>
+          <p:cNvPr id="50" name="Text 41"/>
+          <p:cNvSpPr/>
+          <p:nvPr/>
+        </p:nvSpPr>
+        <p:spPr>
+          <a:xfrm>
+            <a:off x="9189720" y="2441448"/>
+            <a:ext cx="2377440" cy="274320"/>
+          </a:xfrm>
+          <a:prstGeom prst="rect">
+            <a:avLst/>
+          </a:prstGeom>
+          <a:noFill/>
+          <a:ln/>
+        </p:spPr>
+        <p:txBody>
+          <a:bodyPr wrap="square" rtlCol="0" anchor="ctr"/>
+          <a:lstStyle/>
+          <a:p>
+            <a:pPr indent="0" marL="0">
+              <a:buNone/>
+            </a:pPr>
+            <a:r>
+              <a:rPr lang="en-US" sz="1300" b="1" dirty="0">
+                <a:solidFill>
+                  <a:srgbClr val="000000"/>
+                </a:solidFill>
+                <a:latin typeface="Meiryo UI" pitchFamily="34" charset="0"/>
+                <a:ea typeface="Meiryo UI" pitchFamily="34" charset="-122"/>
+                <a:cs typeface="Meiryo UI" pitchFamily="34" charset="-120"/>
+              </a:rPr>
+              <a:t>入行〜5年目</a:t>
+            </a:r>
+            <a:endParaRPr lang="en-US" sz="1300" dirty="0"/>
+          </a:p>
+        </p:txBody>
+      </p:sp>
+      <p:sp>
+        <p:nvSpPr>
+          <p:cNvPr id="51" name="Text 42"/>
+          <p:cNvSpPr/>
+          <p:nvPr/>
+        </p:nvSpPr>
+        <p:spPr>
+          <a:xfrm>
+            <a:off x="9189720" y="2706624"/>
+            <a:ext cx="2377440" cy="594360"/>
+          </a:xfrm>
+          <a:prstGeom prst="rect">
+            <a:avLst/>
+          </a:prstGeom>
+          <a:noFill/>
+          <a:ln/>
+        </p:spPr>
+        <p:txBody>
+          <a:bodyPr wrap="square" rtlCol="0" anchor="ctr"/>
+          <a:lstStyle/>
+          <a:p>
+            <a:pPr indent="0" marL="0">
+              <a:lnSpc>
+                <a:spcPct val="105000"/>
+              </a:lnSpc>
+              <a:buNone/>
+            </a:pPr>
+            <a:r>
+              <a:rPr lang="en-US" sz="1400" dirty="0">
+                <a:solidFill>
+                  <a:srgbClr val="000000"/>
+                </a:solidFill>
+                <a:latin typeface="Meiryo UI" pitchFamily="34" charset="0"/>
+                <a:ea typeface="Meiryo UI" pitchFamily="34" charset="-122"/>
+                <a:cs typeface="Meiryo UI" pitchFamily="34" charset="-120"/>
+              </a:rPr>
+              <a:t>銀行内</a:t>
+            </a:r>
+            <a:endParaRPr lang="en-US" sz="1400" dirty="0"/>
+          </a:p>
+          <a:p>
+            <a:pPr indent="0" marL="0">
+              <a:lnSpc>
+                <a:spcPct val="105000"/>
+              </a:lnSpc>
+              <a:buNone/>
+            </a:pPr>
+            <a:r>
+              <a:rPr lang="en-US" sz="1400" dirty="0">
+                <a:solidFill>
+                  <a:srgbClr val="000000"/>
+                </a:solidFill>
+                <a:latin typeface="Meiryo UI" pitchFamily="34" charset="0"/>
+                <a:ea typeface="Meiryo UI" pitchFamily="34" charset="-122"/>
+                <a:cs typeface="Meiryo UI" pitchFamily="34" charset="-120"/>
+              </a:rPr>
+              <a:t>市場運用部門</a:t>
+            </a:r>
+            <a:endParaRPr lang="en-US" sz="1400" dirty="0"/>
+          </a:p>
+        </p:txBody>
+      </p:sp>
+      <p:sp>
+        <p:nvSpPr>
+          <p:cNvPr id="52" name="Text 43"/>
+          <p:cNvSpPr/>
+          <p:nvPr/>
+        </p:nvSpPr>
+        <p:spPr>
+          <a:xfrm>
+            <a:off x="8485632" y="3035808"/>
+            <a:ext cx="566928" cy="292608"/>
+          </a:xfrm>
+          <a:prstGeom prst="rect">
+            <a:avLst/>
+          </a:prstGeom>
+          <a:noFill/>
+          <a:ln/>
+        </p:spPr>
+        <p:txBody>
+          <a:bodyPr wrap="square" rtlCol="0" anchor="ctr"/>
+          <a:lstStyle/>
+          <a:p>
+            <a:pPr algn="ctr" indent="0" marL="0">
+              <a:buNone/>
+            </a:pPr>
+            <a:r>
+              <a:rPr lang="en-US" sz="1800" dirty="0">
+                <a:solidFill>
+                  <a:srgbClr val="8A4B1E"/>
+                </a:solidFill>
+                <a:latin typeface="Meiryo UI" pitchFamily="34" charset="0"/>
+                <a:ea typeface="Meiryo UI" pitchFamily="34" charset="-122"/>
+                <a:cs typeface="Meiryo UI" pitchFamily="34" charset="-120"/>
+              </a:rPr>
+              <a:t>↓</a:t>
+            </a:r>
+            <a:endParaRPr lang="en-US" sz="1800" dirty="0"/>
+          </a:p>
+        </p:txBody>
+      </p:sp>
+      <p:sp>
+        <p:nvSpPr>
+          <p:cNvPr id="53" name="Shape 44"/>
+          <p:cNvSpPr/>
+          <p:nvPr/>
+        </p:nvSpPr>
+        <p:spPr>
+          <a:xfrm>
+            <a:off x="8485632" y="3328416"/>
+            <a:ext cx="566928" cy="566928"/>
+          </a:xfrm>
+          <a:prstGeom prst="ellipse">
+            <a:avLst/>
+          </a:prstGeom>
+          <a:solidFill>
+            <a:srgbClr val="8A4B1E"/>
+          </a:solidFill>
+          <a:ln/>
+        </p:spPr>
+      </p:sp>
+      <p:pic>
+        <p:nvPicPr>
+          <p:cNvPr id="54" name="Image 7" descr="icon_chartpie.png">    </p:cNvPr>
+          <p:cNvPicPr>
+            <a:picLocks noChangeAspect="1"/>
+          </p:cNvPicPr>
+          <p:nvPr/>
+        </p:nvPicPr>
+        <p:blipFill>
+          <a:blip r:embed="rId8"/>
+          <a:stretch>
+            <a:fillRect/>
+          </a:stretch>
+        </p:blipFill>
+        <p:spPr>
+          <a:xfrm>
+            <a:off x="8604504" y="3447288"/>
+            <a:ext cx="329184" cy="329184"/>
+          </a:xfrm>
+          <a:prstGeom prst="rect">
+            <a:avLst/>
+          </a:prstGeom>
+        </p:spPr>
+      </p:pic>
+      <p:sp>
+        <p:nvSpPr>
+          <p:cNvPr id="55" name="Text 45"/>
+          <p:cNvSpPr/>
+          <p:nvPr/>
+        </p:nvSpPr>
+        <p:spPr>
+          <a:xfrm>
+            <a:off x="9189720" y="3300984"/>
+            <a:ext cx="2377440" cy="274320"/>
+          </a:xfrm>
+          <a:prstGeom prst="rect">
+            <a:avLst/>
+          </a:prstGeom>
+          <a:noFill/>
+          <a:ln/>
+        </p:spPr>
+        <p:txBody>
+          <a:bodyPr wrap="square" rtlCol="0" anchor="ctr"/>
+          <a:lstStyle/>
+          <a:p>
+            <a:pPr indent="0" marL="0">
+              <a:buNone/>
+            </a:pPr>
+            <a:r>
+              <a:rPr lang="en-US" sz="1300" b="1" dirty="0">
+                <a:solidFill>
+                  <a:srgbClr val="000000"/>
+                </a:solidFill>
+                <a:latin typeface="Meiryo UI" pitchFamily="34" charset="0"/>
+                <a:ea typeface="Meiryo UI" pitchFamily="34" charset="-122"/>
+                <a:cs typeface="Meiryo UI" pitchFamily="34" charset="-120"/>
+              </a:rPr>
+              <a:t>6〜12年目</a:t>
+            </a:r>
+            <a:endParaRPr lang="en-US" sz="1300" dirty="0"/>
+          </a:p>
+        </p:txBody>
+      </p:sp>
+      <p:sp>
+        <p:nvSpPr>
+          <p:cNvPr id="56" name="Text 46"/>
+          <p:cNvSpPr/>
+          <p:nvPr/>
+        </p:nvSpPr>
+        <p:spPr>
+          <a:xfrm>
+            <a:off x="9189720" y="3566160"/>
+            <a:ext cx="2377440" cy="594360"/>
+          </a:xfrm>
+          <a:prstGeom prst="rect">
+            <a:avLst/>
+          </a:prstGeom>
+          <a:noFill/>
+          <a:ln/>
+        </p:spPr>
+        <p:txBody>
+          <a:bodyPr wrap="square" rtlCol="0" anchor="ctr"/>
+          <a:lstStyle/>
+          <a:p>
+            <a:pPr indent="0" marL="0">
+              <a:lnSpc>
+                <a:spcPct val="105000"/>
+              </a:lnSpc>
+              <a:buNone/>
+            </a:pPr>
+            <a:r>
+              <a:rPr lang="en-US" sz="1400" dirty="0">
+                <a:solidFill>
+                  <a:srgbClr val="000000"/>
+                </a:solidFill>
+                <a:latin typeface="Meiryo UI" pitchFamily="34" charset="0"/>
+                <a:ea typeface="Meiryo UI" pitchFamily="34" charset="-122"/>
+                <a:cs typeface="Meiryo UI" pitchFamily="34" charset="-120"/>
+              </a:rPr>
+              <a:t>銀行内</a:t>
+            </a:r>
+            <a:endParaRPr lang="en-US" sz="1400" dirty="0"/>
+          </a:p>
+          <a:p>
+            <a:pPr indent="0" marL="0">
+              <a:lnSpc>
+                <a:spcPct val="105000"/>
+              </a:lnSpc>
+              <a:buNone/>
+            </a:pPr>
+            <a:r>
+              <a:rPr lang="en-US" sz="1400" dirty="0">
+                <a:solidFill>
+                  <a:srgbClr val="000000"/>
+                </a:solidFill>
+                <a:latin typeface="Meiryo UI" pitchFamily="34" charset="0"/>
+                <a:ea typeface="Meiryo UI" pitchFamily="34" charset="-122"/>
+                <a:cs typeface="Meiryo UI" pitchFamily="34" charset="-120"/>
+              </a:rPr>
+              <a:t>自己勘定運用の専門職</a:t>
+            </a:r>
+            <a:endParaRPr lang="en-US" sz="1400" dirty="0"/>
+          </a:p>
+        </p:txBody>
+      </p:sp>
+      <p:sp>
+        <p:nvSpPr>
+          <p:cNvPr id="57" name="Text 47"/>
+          <p:cNvSpPr/>
+          <p:nvPr/>
+        </p:nvSpPr>
+        <p:spPr>
+          <a:xfrm>
+            <a:off x="8485632" y="3895344"/>
+            <a:ext cx="566928" cy="292608"/>
+          </a:xfrm>
+          <a:prstGeom prst="rect">
+            <a:avLst/>
+          </a:prstGeom>
+          <a:noFill/>
+          <a:ln/>
+        </p:spPr>
+        <p:txBody>
+          <a:bodyPr wrap="square" rtlCol="0" anchor="ctr"/>
+          <a:lstStyle/>
+          <a:p>
+            <a:pPr algn="ctr" indent="0" marL="0">
+              <a:buNone/>
+            </a:pPr>
+            <a:r>
+              <a:rPr lang="en-US" sz="1800" dirty="0">
+                <a:solidFill>
+                  <a:srgbClr val="8A4B1E"/>
+                </a:solidFill>
+                <a:latin typeface="Meiryo UI" pitchFamily="34" charset="0"/>
+                <a:ea typeface="Meiryo UI" pitchFamily="34" charset="-122"/>
+                <a:cs typeface="Meiryo UI" pitchFamily="34" charset="-120"/>
+              </a:rPr>
+              <a:t>↓</a:t>
+            </a:r>
+            <a:endParaRPr lang="en-US" sz="1800" dirty="0"/>
+          </a:p>
+        </p:txBody>
+      </p:sp>
+      <p:sp>
+        <p:nvSpPr>
+          <p:cNvPr id="58" name="Shape 48"/>
+          <p:cNvSpPr/>
+          <p:nvPr/>
+        </p:nvSpPr>
+        <p:spPr>
+          <a:xfrm>
+            <a:off x="8485632" y="4187952"/>
+            <a:ext cx="566928" cy="566928"/>
+          </a:xfrm>
+          <a:prstGeom prst="ellipse">
+            <a:avLst/>
+          </a:prstGeom>
+          <a:solidFill>
+            <a:srgbClr val="8A4B1E"/>
+          </a:solidFill>
+          <a:ln/>
+        </p:spPr>
+      </p:sp>
+      <p:pic>
+        <p:nvPicPr>
+          <p:cNvPr id="59" name="Image 8" descr="icon_crown.png">    </p:cNvPr>
+          <p:cNvPicPr>
+            <a:picLocks noChangeAspect="1"/>
+          </p:cNvPicPr>
+          <p:nvPr/>
+        </p:nvPicPr>
+        <p:blipFill>
+          <a:blip r:embed="rId9"/>
+          <a:stretch>
+            <a:fillRect/>
+          </a:stretch>
+        </p:blipFill>
+        <p:spPr>
+          <a:xfrm>
+            <a:off x="8604504" y="4306824"/>
+            <a:ext cx="329184" cy="329184"/>
+          </a:xfrm>
+          <a:prstGeom prst="rect">
+            <a:avLst/>
+          </a:prstGeom>
+        </p:spPr>
+      </p:pic>
+      <p:sp>
+        <p:nvSpPr>
+          <p:cNvPr id="60" name="Text 49"/>
+          <p:cNvSpPr/>
+          <p:nvPr/>
+        </p:nvSpPr>
+        <p:spPr>
+          <a:xfrm>
+            <a:off x="9189720" y="4160520"/>
+            <a:ext cx="2377440" cy="274320"/>
+          </a:xfrm>
+          <a:prstGeom prst="rect">
+            <a:avLst/>
+          </a:prstGeom>
+          <a:noFill/>
+          <a:ln/>
+        </p:spPr>
+        <p:txBody>
+          <a:bodyPr wrap="square" rtlCol="0" anchor="ctr"/>
+          <a:lstStyle/>
+          <a:p>
+            <a:pPr indent="0" marL="0">
+              <a:buNone/>
+            </a:pPr>
+            <a:r>
+              <a:rPr lang="en-US" sz="1300" b="1" dirty="0">
+                <a:solidFill>
                   <a:srgbClr val="000000"/>
                 </a:solidFill>
                 <a:latin typeface="Meiryo UI" pitchFamily="34" charset="0"/>
@@ -5396,191 +5439,136 @@
               </a:rPr>
               <a:t>13年目〜</a:t>
             </a:r>
+            <a:endParaRPr lang="en-US" sz="1300" dirty="0"/>
+          </a:p>
+        </p:txBody>
+      </p:sp>
+      <p:sp>
+        <p:nvSpPr>
+          <p:cNvPr id="61" name="Text 50"/>
+          <p:cNvSpPr/>
+          <p:nvPr/>
+        </p:nvSpPr>
+        <p:spPr>
+          <a:xfrm>
+            <a:off x="9189720" y="4425696"/>
+            <a:ext cx="2377440" cy="594360"/>
+          </a:xfrm>
+          <a:prstGeom prst="rect">
+            <a:avLst/>
+          </a:prstGeom>
+          <a:noFill/>
+          <a:ln/>
+        </p:spPr>
+        <p:txBody>
+          <a:bodyPr wrap="square" rtlCol="0" anchor="ctr"/>
+          <a:lstStyle/>
+          <a:p>
+            <a:pPr indent="0" marL="0">
+              <a:lnSpc>
+                <a:spcPct val="105000"/>
+              </a:lnSpc>
+              <a:buNone/>
+            </a:pPr>
+            <a:r>
+              <a:rPr lang="en-US" sz="1400" dirty="0">
+                <a:solidFill>
+                  <a:srgbClr val="000000"/>
+                </a:solidFill>
+                <a:latin typeface="Meiryo UI" pitchFamily="34" charset="0"/>
+                <a:ea typeface="Meiryo UI" pitchFamily="34" charset="-122"/>
+                <a:cs typeface="Meiryo UI" pitchFamily="34" charset="-120"/>
+              </a:rPr>
+              <a:t>銀行内</a:t>
+            </a:r>
             <a:endParaRPr lang="en-US" sz="1400" dirty="0"/>
           </a:p>
-        </p:txBody>
-      </p:sp>
-      <p:sp>
-        <p:nvSpPr>
-          <p:cNvPr id="26" name="Text 19"/>
-          <p:cNvSpPr/>
-          <p:nvPr/>
-        </p:nvSpPr>
-        <p:spPr>
-          <a:xfrm>
-            <a:off x="9464040" y="1965960"/>
-            <a:ext cx="2148840" cy="777240"/>
-          </a:xfrm>
-          <a:prstGeom prst="rect">
-            <a:avLst/>
-          </a:prstGeom>
-          <a:noFill/>
-          <a:ln/>
-        </p:spPr>
-        <p:txBody>
-          <a:bodyPr wrap="square" rtlCol="0" anchor="ctr"/>
-          <a:lstStyle/>
           <a:p>
             <a:pPr indent="0" marL="0">
               <a:lnSpc>
-                <a:spcPct val="110000"/>
+                <a:spcPct val="105000"/>
               </a:lnSpc>
               <a:buNone/>
             </a:pPr>
             <a:r>
-              <a:rPr lang="en-US" sz="1500" b="1" dirty="0">
-                <a:solidFill>
-                  <a:srgbClr val="000000"/>
-                </a:solidFill>
-                <a:latin typeface="Meiryo UI" pitchFamily="34" charset="0"/>
-                <a:ea typeface="Meiryo UI" pitchFamily="34" charset="-122"/>
-                <a:cs typeface="Meiryo UI" pitchFamily="34" charset="-120"/>
-              </a:rPr>
-              <a:t>信託銀行復帰 or</a:t>
-            </a:r>
-            <a:endParaRPr lang="en-US" sz="1500" dirty="0"/>
-          </a:p>
+              <a:rPr lang="en-US" sz="1400" dirty="0">
+                <a:solidFill>
+                  <a:srgbClr val="000000"/>
+                </a:solidFill>
+                <a:latin typeface="Meiryo UI" pitchFamily="34" charset="0"/>
+                <a:ea typeface="Meiryo UI" pitchFamily="34" charset="-122"/>
+                <a:cs typeface="Meiryo UI" pitchFamily="34" charset="-120"/>
+              </a:rPr>
+              <a:t>運用部門の管理職</a:t>
+            </a:r>
+            <a:endParaRPr lang="en-US" sz="1400" dirty="0"/>
+          </a:p>
+        </p:txBody>
+      </p:sp>
+      <p:sp>
+        <p:nvSpPr>
+          <p:cNvPr id="62" name="Shape 51"/>
+          <p:cNvSpPr/>
+          <p:nvPr/>
+        </p:nvSpPr>
+        <p:spPr>
+          <a:xfrm>
+            <a:off x="8366760" y="5513832"/>
+            <a:ext cx="3291840" cy="822960"/>
+          </a:xfrm>
+          <a:prstGeom prst="roundRect">
+            <a:avLst>
+              <a:gd name="adj" fmla="val 11111"/>
+            </a:avLst>
+          </a:prstGeom>
+          <a:solidFill>
+            <a:srgbClr val="FFFFFF"/>
+          </a:solidFill>
+          <a:ln w="12700">
+            <a:solidFill>
+              <a:srgbClr val="8A4B1E"/>
+            </a:solidFill>
+            <a:prstDash val="solid"/>
+          </a:ln>
+        </p:spPr>
+      </p:sp>
+      <p:sp>
+        <p:nvSpPr>
+          <p:cNvPr id="63" name="Text 52"/>
+          <p:cNvSpPr/>
+          <p:nvPr/>
+        </p:nvSpPr>
+        <p:spPr>
+          <a:xfrm>
+            <a:off x="8503920" y="5577840"/>
+            <a:ext cx="3017520" cy="713232"/>
+          </a:xfrm>
+          <a:prstGeom prst="rect">
+            <a:avLst/>
+          </a:prstGeom>
+          <a:noFill/>
+          <a:ln/>
+        </p:spPr>
+        <p:txBody>
+          <a:bodyPr wrap="square" rtlCol="0" anchor="ctr"/>
+          <a:lstStyle/>
           <a:p>
             <a:pPr indent="0" marL="0">
               <a:lnSpc>
-                <a:spcPct val="110000"/>
+                <a:spcPct val="115000"/>
               </a:lnSpc>
               <a:buNone/>
             </a:pPr>
             <a:r>
-              <a:rPr lang="en-US" sz="1500" b="1" dirty="0">
-                <a:solidFill>
-                  <a:srgbClr val="000000"/>
-                </a:solidFill>
-                <a:latin typeface="Meiryo UI" pitchFamily="34" charset="0"/>
-                <a:ea typeface="Meiryo UI" pitchFamily="34" charset="-122"/>
-                <a:cs typeface="Meiryo UI" pitchFamily="34" charset="-120"/>
-              </a:rPr>
-              <a:t>AM会社の上級職</a:t>
-            </a:r>
-            <a:endParaRPr lang="en-US" sz="1500" dirty="0"/>
-          </a:p>
-        </p:txBody>
-      </p:sp>
-      <p:sp>
-        <p:nvSpPr>
-          <p:cNvPr id="27" name="Text 20"/>
-          <p:cNvSpPr/>
-          <p:nvPr/>
-        </p:nvSpPr>
-        <p:spPr>
-          <a:xfrm>
-            <a:off x="8229600" y="3017520"/>
-            <a:ext cx="3566160" cy="2103120"/>
-          </a:xfrm>
-          <a:prstGeom prst="rect">
-            <a:avLst/>
-          </a:prstGeom>
-          <a:noFill/>
-          <a:ln/>
-        </p:spPr>
-        <p:txBody>
-          <a:bodyPr wrap="square" rtlCol="0" anchor="ctr"/>
-          <a:lstStyle/>
-          <a:p>
-            <a:pPr indent="0" marL="0">
-              <a:lnSpc>
-                <a:spcPct val="125000"/>
-              </a:lnSpc>
-              <a:spcAft>
-                <a:spcPts val="600"/>
-              </a:spcAft>
-              <a:buNone/>
-            </a:pPr>
-            <a:r>
               <a:rPr lang="en-US" sz="1400" b="1" dirty="0">
                 <a:solidFill>
-                  <a:srgbClr val="1E2761"/>
-                </a:solidFill>
-                <a:latin typeface="Meiryo UI" pitchFamily="34" charset="0"/>
-                <a:ea typeface="Meiryo UI" pitchFamily="34" charset="-122"/>
-                <a:cs typeface="Meiryo UI" pitchFamily="34" charset="-120"/>
-              </a:rPr>
-              <a:t>業務内容　</a:t>
-            </a:r>
-            <a:pPr indent="0" marL="0">
-              <a:lnSpc>
-                <a:spcPct val="125000"/>
-              </a:lnSpc>
-              <a:spcAft>
-                <a:spcPts val="600"/>
-              </a:spcAft>
-              <a:buNone/>
-            </a:pPr>
-            <a:r>
-              <a:rPr lang="en-US" sz="1400" dirty="0">
-                <a:solidFill>
-                  <a:srgbClr val="000000"/>
-                </a:solidFill>
-                <a:latin typeface="Meiryo UI" pitchFamily="34" charset="0"/>
-                <a:ea typeface="Meiryo UI" pitchFamily="34" charset="-122"/>
-                <a:cs typeface="Meiryo UI" pitchFamily="34" charset="-120"/>
-              </a:rPr>
-              <a:t>信託銀行の運用企画部門で外部運用会社を評価・選定する視点も併せ持つマネージャー、またはAM会社のシニアファンドマネージャー・運用部門責任者。</a:t>
-            </a:r>
-            <a:endParaRPr lang="en-US" sz="1400" dirty="0"/>
-          </a:p>
-        </p:txBody>
-      </p:sp>
-      <p:sp>
-        <p:nvSpPr>
-          <p:cNvPr id="28" name="Text 21"/>
-          <p:cNvSpPr/>
-          <p:nvPr/>
-        </p:nvSpPr>
-        <p:spPr>
-          <a:xfrm>
-            <a:off x="8229600" y="4983480"/>
-            <a:ext cx="3566160" cy="1463040"/>
-          </a:xfrm>
-          <a:prstGeom prst="rect">
-            <a:avLst/>
-          </a:prstGeom>
-          <a:noFill/>
-          <a:ln/>
-        </p:spPr>
-        <p:txBody>
-          <a:bodyPr wrap="square" rtlCol="0" anchor="ctr"/>
-          <a:lstStyle/>
-          <a:p>
-            <a:pPr indent="0" marL="0">
-              <a:lnSpc>
-                <a:spcPct val="125000"/>
-              </a:lnSpc>
-              <a:buNone/>
-            </a:pPr>
-            <a:r>
-              <a:rPr lang="en-US" sz="1400" b="1" dirty="0">
-                <a:solidFill>
-                  <a:srgbClr val="1E2761"/>
-                </a:solidFill>
-                <a:latin typeface="Meiryo UI" pitchFamily="34" charset="0"/>
-                <a:ea typeface="Meiryo UI" pitchFamily="34" charset="-122"/>
-                <a:cs typeface="Meiryo UI" pitchFamily="34" charset="-120"/>
-              </a:rPr>
-              <a:t>身につく力　</a:t>
-            </a:r>
-            <a:pPr indent="0" marL="0">
-              <a:lnSpc>
-                <a:spcPct val="125000"/>
-              </a:lnSpc>
-              <a:buNone/>
-            </a:pPr>
-            <a:r>
-              <a:rPr lang="en-US" sz="1400" dirty="0">
-                <a:solidFill>
-                  <a:srgbClr val="000000"/>
-                </a:solidFill>
-                <a:latin typeface="Meiryo UI" pitchFamily="34" charset="0"/>
-                <a:ea typeface="Meiryo UI" pitchFamily="34" charset="-122"/>
-                <a:cs typeface="Meiryo UI" pitchFamily="34" charset="-120"/>
-              </a:rPr>
-              <a:t>「頭脳」と「金庫」双方の実務を知る、グループ内でも希少な人材としての専門性。</a:t>
+                  <a:srgbClr val="8A4B1E"/>
+                </a:solidFill>
+                <a:latin typeface="Meiryo UI" pitchFamily="34" charset="0"/>
+                <a:ea typeface="Meiryo UI" pitchFamily="34" charset="-122"/>
+                <a:cs typeface="Meiryo UI" pitchFamily="34" charset="-120"/>
+              </a:rPr>
+              <a:t>頭脳＝自分で、銀行自身の資金（伝統的資産中心）の運用を極める</a:t>
             </a:r>
             <a:endParaRPr lang="en-US" sz="1400" dirty="0"/>
           </a:p>
@@ -5635,7 +5623,7 @@
             </a:avLst>
           </a:prstGeom>
           <a:solidFill>
-            <a:srgbClr val="2E6F52"/>
+            <a:srgbClr val="1E2761"/>
           </a:solidFill>
           <a:ln/>
         </p:spPr>
@@ -5673,7 +5661,7 @@
                 <a:ea typeface="Meiryo UI" pitchFamily="34" charset="-122"/>
                 <a:cs typeface="Meiryo UI" pitchFamily="34" charset="-120"/>
               </a:rPr>
-              <a:t>②</a:t>
+              <a:t>①</a:t>
             </a:r>
             <a:endParaRPr lang="en-US" sz="2000" dirty="0"/>
           </a:p>
@@ -5712,7 +5700,7 @@
                 <a:ea typeface="Meiryo UI" pitchFamily="34" charset="-122"/>
                 <a:cs typeface="Meiryo UI" pitchFamily="34" charset="-120"/>
               </a:rPr>
-              <a:t>信託銀行の運用業務を中心とするキャリア</a:t>
+              <a:t>資産運用のプロになる</a:t>
             </a:r>
             <a:endParaRPr lang="en-US" sz="2600" dirty="0"/>
           </a:p>
@@ -5751,7 +5739,7 @@
                 <a:ea typeface="Meiryo UI" pitchFamily="34" charset="-122"/>
                 <a:cs typeface="Meiryo UI" pitchFamily="34" charset="-120"/>
               </a:rPr>
-              <a:t>信託銀行側（受託者・金庫側）に軸足を置きながら、グループAM会社との協働も経験する</a:t>
+              <a:t>頭脳＝自分。顧客の信託資金をもとに、幅広い資産に投資判断を下す専門性を極める</a:t>
             </a:r>
             <a:endParaRPr lang="en-US" sz="1400" dirty="0"/>
           </a:p>
@@ -5778,7 +5766,7 @@
           </a:solidFill>
           <a:ln w="15875">
             <a:solidFill>
-              <a:srgbClr val="2E6F52"/>
+              <a:srgbClr val="1E2761"/>
             </a:solidFill>
             <a:prstDash val="solid"/>
           </a:ln>
@@ -5799,14 +5787,14 @@
             <a:avLst/>
           </a:prstGeom>
           <a:solidFill>
-            <a:srgbClr val="2E6F52"/>
+            <a:srgbClr val="1E2761"/>
           </a:solidFill>
           <a:ln/>
         </p:spPr>
       </p:sp>
       <p:pic>
         <p:nvPicPr>
-          <p:cNvPr id="8" name="Image 0" descr="icon_contract.png">    </p:cNvPr>
+          <p:cNvPr id="8" name="Image 0" descr="icon_building.png">    </p:cNvPr>
           <p:cNvPicPr>
             <a:picLocks noChangeAspect="1"/>
           </p:cNvPicPr>
@@ -5923,7 +5911,7 @@
                 <a:ea typeface="Meiryo UI" pitchFamily="34" charset="-122"/>
                 <a:cs typeface="Meiryo UI" pitchFamily="34" charset="-120"/>
               </a:rPr>
-              <a:t>年金信託業務部門</a:t>
+              <a:t>資産運用部門</a:t>
             </a:r>
             <a:endParaRPr lang="en-US" sz="1500" dirty="0"/>
           </a:p>
@@ -5986,7 +5974,7 @@
             <a:r>
               <a:rPr lang="en-US" sz="1400" b="1" dirty="0">
                 <a:solidFill>
-                  <a:srgbClr val="2E6F52"/>
+                  <a:srgbClr val="1E2761"/>
                 </a:solidFill>
                 <a:latin typeface="Meiryo UI" pitchFamily="34" charset="0"/>
                 <a:ea typeface="Meiryo UI" pitchFamily="34" charset="-122"/>
@@ -6012,7 +6000,7 @@
                 <a:ea typeface="Meiryo UI" pitchFamily="34" charset="-122"/>
                 <a:cs typeface="Meiryo UI" pitchFamily="34" charset="-120"/>
               </a:rPr>
-              <a:t>企業年金の年金信託（合同運用）・特定金銭信託の実務、資産の保管・執行・記録という信託銀行本来の「金庫」機能を担当する。</a:t>
+              <a:t>特定金銭信託・年金信託等の運用実務、商品組成、マーケット分析の基礎を、信託銀行の運用担当としてOJTで習得する。</a:t>
             </a:r>
             <a:endParaRPr lang="en-US" sz="1400" dirty="0"/>
           </a:p>
@@ -6048,7 +6036,7 @@
             <a:r>
               <a:rPr lang="en-US" sz="1400" b="1" dirty="0">
                 <a:solidFill>
-                  <a:srgbClr val="2E6F52"/>
+                  <a:srgbClr val="1E2761"/>
                 </a:solidFill>
                 <a:latin typeface="Meiryo UI" pitchFamily="34" charset="0"/>
                 <a:ea typeface="Meiryo UI" pitchFamily="34" charset="-122"/>
@@ -6071,7 +6059,7 @@
                 <a:ea typeface="Meiryo UI" pitchFamily="34" charset="-122"/>
                 <a:cs typeface="Meiryo UI" pitchFamily="34" charset="-120"/>
               </a:rPr>
-              <a:t>信託の法的構造・受託者としての義務の理解、企業年金顧客への対応力。</a:t>
+              <a:t>マーケットを見る目と運用商品の基本構造の理解、財務諸表分析力を投資判断に応用する初期経験。</a:t>
             </a:r>
             <a:endParaRPr lang="en-US" sz="1400" dirty="0"/>
           </a:p>
@@ -6098,7 +6086,7 @@
           </a:solidFill>
           <a:ln w="15875">
             <a:solidFill>
-              <a:srgbClr val="2E6F52"/>
+              <a:srgbClr val="1E2761"/>
             </a:solidFill>
             <a:prstDash val="solid"/>
           </a:ln>
@@ -6119,7 +6107,7 @@
             <a:avLst/>
           </a:prstGeom>
           <a:solidFill>
-            <a:srgbClr val="2E6F52"/>
+            <a:srgbClr val="1E2761"/>
           </a:solidFill>
           <a:ln/>
         </p:spPr>
@@ -6181,7 +6169,7 @@
                 <a:ea typeface="Meiryo UI" pitchFamily="34" charset="-122"/>
                 <a:cs typeface="Meiryo UI" pitchFamily="34" charset="-120"/>
               </a:rPr>
-              <a:t>6〜10年目</a:t>
+              <a:t>6〜12年目</a:t>
             </a:r>
             <a:endParaRPr lang="en-US" sz="1400" dirty="0"/>
           </a:p>
@@ -6243,7 +6231,7 @@
                 <a:ea typeface="Meiryo UI" pitchFamily="34" charset="-122"/>
                 <a:cs typeface="Meiryo UI" pitchFamily="34" charset="-120"/>
               </a:rPr>
-              <a:t>出向</a:t>
+              <a:t>出向・転籍</a:t>
             </a:r>
             <a:endParaRPr lang="en-US" sz="1500" dirty="0"/>
           </a:p>
@@ -6306,7 +6294,7 @@
             <a:r>
               <a:rPr lang="en-US" sz="1400" b="1" dirty="0">
                 <a:solidFill>
-                  <a:srgbClr val="2E6F52"/>
+                  <a:srgbClr val="1E2761"/>
                 </a:solidFill>
                 <a:latin typeface="Meiryo UI" pitchFamily="34" charset="0"/>
                 <a:ea typeface="Meiryo UI" pitchFamily="34" charset="-122"/>
@@ -6332,7 +6320,7 @@
                 <a:ea typeface="Meiryo UI" pitchFamily="34" charset="-122"/>
                 <a:cs typeface="Meiryo UI" pitchFamily="34" charset="-120"/>
               </a:rPr>
-              <a:t>マルチマネージャー方式のもとで運用会社を選定・モニタリングする、委託する側の実務を、実際にAM会社に身を置いて経験する。</a:t>
+              <a:t>ファンドマネージャー／アナリストとして「何を買うか」を決める運用の頭脳側を担当。公募投信や年金運用等、幅広い資産クラスで運用を受託する側の実務を経験する。</a:t>
             </a:r>
             <a:endParaRPr lang="en-US" sz="1400" dirty="0"/>
           </a:p>
@@ -6368,7 +6356,7 @@
             <a:r>
               <a:rPr lang="en-US" sz="1400" b="1" dirty="0">
                 <a:solidFill>
-                  <a:srgbClr val="2E6F52"/>
+                  <a:srgbClr val="1E2761"/>
                 </a:solidFill>
                 <a:latin typeface="Meiryo UI" pitchFamily="34" charset="0"/>
                 <a:ea typeface="Meiryo UI" pitchFamily="34" charset="-122"/>
@@ -6391,7 +6379,7 @@
                 <a:ea typeface="Meiryo UI" pitchFamily="34" charset="-122"/>
                 <a:cs typeface="Meiryo UI" pitchFamily="34" charset="-120"/>
               </a:rPr>
-              <a:t>運用会社の実務・評価軸を内側から理解する視点、パフォーマンス評価力。</a:t>
+              <a:t>投資判断力・リサーチ力を、財務諸表分析力を武器に磨き上げ、運用会社ならではの専門性を確立する。</a:t>
             </a:r>
             <a:endParaRPr lang="en-US" sz="1400" dirty="0"/>
           </a:p>
@@ -6418,7 +6406,7 @@
           </a:solidFill>
           <a:ln w="15875">
             <a:solidFill>
-              <a:srgbClr val="2E6F52"/>
+              <a:srgbClr val="1E2761"/>
             </a:solidFill>
             <a:prstDash val="solid"/>
           </a:ln>
@@ -6439,14 +6427,14 @@
             <a:avLst/>
           </a:prstGeom>
           <a:solidFill>
-            <a:srgbClr val="2E6F52"/>
+            <a:srgbClr val="1E2761"/>
           </a:solidFill>
           <a:ln/>
         </p:spPr>
       </p:sp>
       <p:pic>
         <p:nvPicPr>
-          <p:cNvPr id="24" name="Image 4" descr="icon_usertie.png">    </p:cNvPr>
+          <p:cNvPr id="24" name="Image 4" descr="icon_crown.png">    </p:cNvPr>
           <p:cNvPicPr>
             <a:picLocks noChangeAspect="1"/>
           </p:cNvPicPr>
@@ -6501,7 +6489,7 @@
                 <a:ea typeface="Meiryo UI" pitchFamily="34" charset="-122"/>
                 <a:cs typeface="Meiryo UI" pitchFamily="34" charset="-120"/>
               </a:rPr>
-              <a:t>11年目〜</a:t>
+              <a:t>13年目〜</a:t>
             </a:r>
             <a:endParaRPr lang="en-US" sz="1400" dirty="0"/>
           </a:p>
@@ -6543,7 +6531,7 @@
                 <a:ea typeface="Meiryo UI" pitchFamily="34" charset="-122"/>
                 <a:cs typeface="Meiryo UI" pitchFamily="34" charset="-120"/>
               </a:rPr>
-              <a:t>信託銀行</a:t>
+              <a:t>信託銀行復帰 or</a:t>
             </a:r>
             <a:endParaRPr lang="en-US" sz="1500" dirty="0"/>
           </a:p>
@@ -6563,7 +6551,7 @@
                 <a:ea typeface="Meiryo UI" pitchFamily="34" charset="-122"/>
                 <a:cs typeface="Meiryo UI" pitchFamily="34" charset="-120"/>
               </a:rPr>
-              <a:t>資産運用部門管理職</a:t>
+              <a:t>AM会社の上級職</a:t>
             </a:r>
             <a:endParaRPr lang="en-US" sz="1500" dirty="0"/>
           </a:p>
@@ -6602,7 +6590,7 @@
             <a:r>
               <a:rPr lang="en-US" sz="1400" b="1" dirty="0">
                 <a:solidFill>
-                  <a:srgbClr val="2E6F52"/>
+                  <a:srgbClr val="1E2761"/>
                 </a:solidFill>
                 <a:latin typeface="Meiryo UI" pitchFamily="34" charset="0"/>
                 <a:ea typeface="Meiryo UI" pitchFamily="34" charset="-122"/>
@@ -6628,7 +6616,7 @@
                 <a:ea typeface="Meiryo UI" pitchFamily="34" charset="-122"/>
                 <a:cs typeface="Meiryo UI" pitchFamily="34" charset="-120"/>
               </a:rPr>
-              <a:t>複数の外部運用会社を評価・選定・モニタリングするマネジメント業務、企業年金基金へのコンサルティングを担当する。</a:t>
+              <a:t>信託銀行の運用企画部門で外部運用会社を評価・選定する視点も併せ持つマネージャー、またはAM会社のシニアファンドマネージャー・運用部門責任者。</a:t>
             </a:r>
             <a:endParaRPr lang="en-US" sz="1400" dirty="0"/>
           </a:p>
@@ -6664,7 +6652,7 @@
             <a:r>
               <a:rPr lang="en-US" sz="1400" b="1" dirty="0">
                 <a:solidFill>
-                  <a:srgbClr val="2E6F52"/>
+                  <a:srgbClr val="1E2761"/>
                 </a:solidFill>
                 <a:latin typeface="Meiryo UI" pitchFamily="34" charset="0"/>
                 <a:ea typeface="Meiryo UI" pitchFamily="34" charset="-122"/>
@@ -6687,7 +6675,7 @@
                 <a:ea typeface="Meiryo UI" pitchFamily="34" charset="-122"/>
                 <a:cs typeface="Meiryo UI" pitchFamily="34" charset="-120"/>
               </a:rPr>
-              <a:t>財務分析力と、AM会社経験に基づく目利き力を融合した、信託銀行ならではの運用マネジメント力。</a:t>
+              <a:t>「頭脳」と「金庫」双方の実務を知る、グループ内でも希少な人材としての専門性。</a:t>
             </a:r>
             <a:endParaRPr lang="en-US" sz="1400" dirty="0"/>
           </a:p>
@@ -6742,7 +6730,7 @@
             </a:avLst>
           </a:prstGeom>
           <a:solidFill>
-            <a:srgbClr val="8A4B1E"/>
+            <a:srgbClr val="2E6F52"/>
           </a:solidFill>
           <a:ln/>
         </p:spPr>
@@ -6780,7 +6768,7 @@
                 <a:ea typeface="Meiryo UI" pitchFamily="34" charset="-122"/>
                 <a:cs typeface="Meiryo UI" pitchFamily="34" charset="-120"/>
               </a:rPr>
-              <a:t>③</a:t>
+              <a:t>②</a:t>
             </a:r>
             <a:endParaRPr lang="en-US" sz="2000" dirty="0"/>
           </a:p>
@@ -6819,7 +6807,7 @@
                 <a:ea typeface="Meiryo UI" pitchFamily="34" charset="-122"/>
                 <a:cs typeface="Meiryo UI" pitchFamily="34" charset="-120"/>
               </a:rPr>
-              <a:t>銀行の自己勘定運用（マーケット業務）を中心とするキャリア</a:t>
+              <a:t>企業法務・ガバナンスのプロになる</a:t>
             </a:r>
             <a:endParaRPr lang="en-US" sz="2600" dirty="0"/>
           </a:p>
@@ -6858,7 +6846,7 @@
                 <a:ea typeface="Meiryo UI" pitchFamily="34" charset="-122"/>
                 <a:cs typeface="Meiryo UI" pitchFamily="34" charset="-120"/>
               </a:rPr>
-              <a:t>別会社を介さず、銀行自身の資金を運用する「マーケット業務」に軸足を置く</a:t>
+              <a:t>頭脳の対象は「運用」ではなく「企業経営」。証券代行部門を起点に、ガバナンス領域の専門性を深める</a:t>
             </a:r>
             <a:endParaRPr lang="en-US" sz="1400" dirty="0"/>
           </a:p>
@@ -6885,7 +6873,7 @@
           </a:solidFill>
           <a:ln w="15875">
             <a:solidFill>
-              <a:srgbClr val="8A4B1E"/>
+              <a:srgbClr val="2E6F52"/>
             </a:solidFill>
             <a:prstDash val="solid"/>
           </a:ln>
@@ -6906,14 +6894,14 @@
             <a:avLst/>
           </a:prstGeom>
           <a:solidFill>
-            <a:srgbClr val="8A4B1E"/>
+            <a:srgbClr val="2E6F52"/>
           </a:solidFill>
           <a:ln/>
         </p:spPr>
       </p:sp>
       <p:pic>
         <p:nvPicPr>
-          <p:cNvPr id="8" name="Image 0" descr="icon_landmark.png">    </p:cNvPr>
+          <p:cNvPr id="8" name="Image 0" descr="icon_contract.png">    </p:cNvPr>
           <p:cNvPicPr>
             <a:picLocks noChangeAspect="1"/>
           </p:cNvPicPr>
@@ -6968,7 +6956,7 @@
                 <a:ea typeface="Meiryo UI" pitchFamily="34" charset="-122"/>
                 <a:cs typeface="Meiryo UI" pitchFamily="34" charset="-120"/>
               </a:rPr>
-              <a:t>入行〜5年目</a:t>
+              <a:t>入行後</a:t>
             </a:r>
             <a:endParaRPr lang="en-US" sz="1400" dirty="0"/>
           </a:p>
@@ -7010,7 +6998,7 @@
                 <a:ea typeface="Meiryo UI" pitchFamily="34" charset="-122"/>
                 <a:cs typeface="Meiryo UI" pitchFamily="34" charset="-120"/>
               </a:rPr>
-              <a:t>銀行内</a:t>
+              <a:t>信託銀行</a:t>
             </a:r>
             <a:endParaRPr lang="en-US" sz="1500" dirty="0"/>
           </a:p>
@@ -7030,7 +7018,7 @@
                 <a:ea typeface="Meiryo UI" pitchFamily="34" charset="-122"/>
                 <a:cs typeface="Meiryo UI" pitchFamily="34" charset="-120"/>
               </a:rPr>
-              <a:t>市場運用部門</a:t>
+              <a:t>証券代行部門</a:t>
             </a:r>
             <a:endParaRPr lang="en-US" sz="1500" dirty="0"/>
           </a:p>
@@ -7093,7 +7081,7 @@
             <a:r>
               <a:rPr lang="en-US" sz="1400" b="1" dirty="0">
                 <a:solidFill>
-                  <a:srgbClr val="8A4B1E"/>
+                  <a:srgbClr val="2E6F52"/>
                 </a:solidFill>
                 <a:latin typeface="Meiryo UI" pitchFamily="34" charset="0"/>
                 <a:ea typeface="Meiryo UI" pitchFamily="34" charset="-122"/>
@@ -7119,7 +7107,7 @@
                 <a:ea typeface="Meiryo UI" pitchFamily="34" charset="-122"/>
                 <a:cs typeface="Meiryo UI" pitchFamily="34" charset="-120"/>
               </a:rPr>
-              <a:t>銀行自身の資金（自己勘定・有価証券運用）を対象に、債券・株式等の市場調査やディーリング実務の基礎を習得する。ゆうちょ銀行はこの自己勘定運用（国債等）が収益の柱であり、代表的な配属先となる。</a:t>
+              <a:t>株主名簿管理・株主総会運営支援等、証券代行業務の実務を通じて、会社法・金融商品取引法の実務知識を習得する。</a:t>
             </a:r>
             <a:endParaRPr lang="en-US" sz="1400" dirty="0"/>
           </a:p>
@@ -7155,7 +7143,7 @@
             <a:r>
               <a:rPr lang="en-US" sz="1400" b="1" dirty="0">
                 <a:solidFill>
-                  <a:srgbClr val="8A4B1E"/>
+                  <a:srgbClr val="2E6F52"/>
                 </a:solidFill>
                 <a:latin typeface="Meiryo UI" pitchFamily="34" charset="0"/>
                 <a:ea typeface="Meiryo UI" pitchFamily="34" charset="-122"/>
@@ -7178,7 +7166,7 @@
                 <a:ea typeface="Meiryo UI" pitchFamily="34" charset="-122"/>
                 <a:cs typeface="Meiryo UI" pitchFamily="34" charset="-120"/>
               </a:rPr>
-              <a:t>マーケットを継続的に追う力、リスク量を意識した投資判断の基礎。</a:t>
+              <a:t>企業法ゼミで学んだ会社法の知識を実務に接続する経験、株主総会実務への理解。</a:t>
             </a:r>
             <a:endParaRPr lang="en-US" sz="1400" dirty="0"/>
           </a:p>
@@ -7205,7 +7193,7 @@
           </a:solidFill>
           <a:ln w="15875">
             <a:solidFill>
-              <a:srgbClr val="8A4B1E"/>
+              <a:srgbClr val="2E6F52"/>
             </a:solidFill>
             <a:prstDash val="solid"/>
           </a:ln>
@@ -7226,14 +7214,14 @@
             <a:avLst/>
           </a:prstGeom>
           <a:solidFill>
-            <a:srgbClr val="8A4B1E"/>
+            <a:srgbClr val="2E6F52"/>
           </a:solidFill>
           <a:ln/>
         </p:spPr>
       </p:sp>
       <p:pic>
         <p:nvPicPr>
-          <p:cNvPr id="16" name="Image 2" descr="icon_chartpie.png">    </p:cNvPr>
+          <p:cNvPr id="16" name="Image 2" descr="icon_law.png">    </p:cNvPr>
           <p:cNvPicPr>
             <a:picLocks noChangeAspect="1"/>
           </p:cNvPicPr>
@@ -7288,7 +7276,7 @@
                 <a:ea typeface="Meiryo UI" pitchFamily="34" charset="-122"/>
                 <a:cs typeface="Meiryo UI" pitchFamily="34" charset="-120"/>
               </a:rPr>
-              <a:t>6〜12年目</a:t>
+              <a:t>経験を積んだ後</a:t>
             </a:r>
             <a:endParaRPr lang="en-US" sz="1400" dirty="0"/>
           </a:p>
@@ -7330,7 +7318,7 @@
                 <a:ea typeface="Meiryo UI" pitchFamily="34" charset="-122"/>
                 <a:cs typeface="Meiryo UI" pitchFamily="34" charset="-120"/>
               </a:rPr>
-              <a:t>銀行内</a:t>
+              <a:t>部門内の</a:t>
             </a:r>
             <a:endParaRPr lang="en-US" sz="1500" dirty="0"/>
           </a:p>
@@ -7350,7 +7338,7 @@
                 <a:ea typeface="Meiryo UI" pitchFamily="34" charset="-122"/>
                 <a:cs typeface="Meiryo UI" pitchFamily="34" charset="-120"/>
               </a:rPr>
-              <a:t>自己勘定運用の専門職</a:t>
+              <a:t>ガバナンスコンサルティングチーム</a:t>
             </a:r>
             <a:endParaRPr lang="en-US" sz="1500" dirty="0"/>
           </a:p>
@@ -7413,7 +7401,7 @@
             <a:r>
               <a:rPr lang="en-US" sz="1400" b="1" dirty="0">
                 <a:solidFill>
-                  <a:srgbClr val="8A4B1E"/>
+                  <a:srgbClr val="2E6F52"/>
                 </a:solidFill>
                 <a:latin typeface="Meiryo UI" pitchFamily="34" charset="0"/>
                 <a:ea typeface="Meiryo UI" pitchFamily="34" charset="-122"/>
@@ -7439,7 +7427,7 @@
                 <a:ea typeface="Meiryo UI" pitchFamily="34" charset="-122"/>
                 <a:cs typeface="Meiryo UI" pitchFamily="34" charset="-120"/>
               </a:rPr>
-              <a:t>債券・株式等に加え、PE・不動産等オルタナティブ資産への自己資金配分も含めた自己勘定運用の専門職として、ALM（資産負債管理）やリスク管理部門と連携しながら銀行内で運用の頭脳役を担う。ゆうちょ銀行は自己資金によるPE投資でも国内最大級（2025年9月末時点で7.6兆円）であり、この分野の代表例といえる。</a:t>
+              <a:t>IR・SRコンサルティング、ガバナンスコンサルティング、指名・報酬コンサルティング等、証券代行部門が提供する企業向けの経営助言業務を担当する。</a:t>
             </a:r>
             <a:endParaRPr lang="en-US" sz="1400" dirty="0"/>
           </a:p>
@@ -7475,7 +7463,7 @@
             <a:r>
               <a:rPr lang="en-US" sz="1400" b="1" dirty="0">
                 <a:solidFill>
-                  <a:srgbClr val="8A4B1E"/>
+                  <a:srgbClr val="2E6F52"/>
                 </a:solidFill>
                 <a:latin typeface="Meiryo UI" pitchFamily="34" charset="0"/>
                 <a:ea typeface="Meiryo UI" pitchFamily="34" charset="-122"/>
@@ -7498,7 +7486,7 @@
                 <a:ea typeface="Meiryo UI" pitchFamily="34" charset="-122"/>
                 <a:cs typeface="Meiryo UI" pitchFamily="34" charset="-120"/>
               </a:rPr>
-              <a:t>財務分析力を活かした投資判断力、PDCAによる運用改善力（検証→仮説修正の繰り返し）。</a:t>
+              <a:t>企業法の知識を武器に、財務諸表分析力も組み合わせてガバナンス課題を分析・助言する力。</a:t>
             </a:r>
             <a:endParaRPr lang="en-US" sz="1400" dirty="0"/>
           </a:p>
@@ -7525,7 +7513,7 @@
           </a:solidFill>
           <a:ln w="15875">
             <a:solidFill>
-              <a:srgbClr val="8A4B1E"/>
+              <a:srgbClr val="2E6F52"/>
             </a:solidFill>
             <a:prstDash val="solid"/>
           </a:ln>
@@ -7546,14 +7534,14 @@
             <a:avLst/>
           </a:prstGeom>
           <a:solidFill>
-            <a:srgbClr val="8A4B1E"/>
+            <a:srgbClr val="2E6F52"/>
           </a:solidFill>
           <a:ln/>
         </p:spPr>
       </p:sp>
       <p:pic>
         <p:nvPicPr>
-          <p:cNvPr id="24" name="Image 4" descr="icon_crown.png">    </p:cNvPr>
+          <p:cNvPr id="24" name="Image 4" descr="icon_usertie.png">    </p:cNvPr>
           <p:cNvPicPr>
             <a:picLocks noChangeAspect="1"/>
           </p:cNvPicPr>
@@ -7608,7 +7596,7 @@
                 <a:ea typeface="Meiryo UI" pitchFamily="34" charset="-122"/>
                 <a:cs typeface="Meiryo UI" pitchFamily="34" charset="-120"/>
               </a:rPr>
-              <a:t>13年目〜</a:t>
+              <a:t>将来的に</a:t>
             </a:r>
             <a:endParaRPr lang="en-US" sz="1400" dirty="0"/>
           </a:p>
@@ -7650,7 +7638,7 @@
                 <a:ea typeface="Meiryo UI" pitchFamily="34" charset="-122"/>
                 <a:cs typeface="Meiryo UI" pitchFamily="34" charset="-120"/>
               </a:rPr>
-              <a:t>銀行内</a:t>
+              <a:t>シニアコンサルタント</a:t>
             </a:r>
             <a:endParaRPr lang="en-US" sz="1500" dirty="0"/>
           </a:p>
@@ -7670,7 +7658,7 @@
                 <a:ea typeface="Meiryo UI" pitchFamily="34" charset="-122"/>
                 <a:cs typeface="Meiryo UI" pitchFamily="34" charset="-120"/>
               </a:rPr>
-              <a:t>運用部門の管理職</a:t>
+              <a:t>または管理職</a:t>
             </a:r>
             <a:endParaRPr lang="en-US" sz="1500" dirty="0"/>
           </a:p>
@@ -7709,7 +7697,7 @@
             <a:r>
               <a:rPr lang="en-US" sz="1400" b="1" dirty="0">
                 <a:solidFill>
-                  <a:srgbClr val="8A4B1E"/>
+                  <a:srgbClr val="2E6F52"/>
                 </a:solidFill>
                 <a:latin typeface="Meiryo UI" pitchFamily="34" charset="0"/>
                 <a:ea typeface="Meiryo UI" pitchFamily="34" charset="-122"/>
@@ -7735,7 +7723,7 @@
                 <a:ea typeface="Meiryo UI" pitchFamily="34" charset="-122"/>
                 <a:cs typeface="Meiryo UI" pitchFamily="34" charset="-120"/>
               </a:rPr>
-              <a:t>銀行全体の自己勘定運用方針の立案・運用部門の統括を担当。頭脳と金庫が同一組織内で完結する体制の中核を担う。ゆうちょ銀行のプライベートエクイティ投資部は2026年4月の組織再編後も市場部門内に存続しており、機関投資家など外部の資金を預かる一般的な「アセットマネジメント業務」とは異なり、自社の資金を自社で判断・運用する体制が続いている。</a:t>
+              <a:t>買収防衛策アドバイザリーやアクティビスト対応など、より高度な経営課題への助言をリードする、または部門のマネジメントを担う。</a:t>
             </a:r>
             <a:endParaRPr lang="en-US" sz="1400" dirty="0"/>
           </a:p>
@@ -7771,7 +7759,7 @@
             <a:r>
               <a:rPr lang="en-US" sz="1400" b="1" dirty="0">
                 <a:solidFill>
-                  <a:srgbClr val="8A4B1E"/>
+                  <a:srgbClr val="2E6F52"/>
                 </a:solidFill>
                 <a:latin typeface="Meiryo UI" pitchFamily="34" charset="0"/>
                 <a:ea typeface="Meiryo UI" pitchFamily="34" charset="-122"/>
@@ -7794,7 +7782,7 @@
                 <a:ea typeface="Meiryo UI" pitchFamily="34" charset="-122"/>
                 <a:cs typeface="Meiryo UI" pitchFamily="34" charset="-120"/>
               </a:rPr>
-              <a:t>組織全体の運用戦略を描く視座、社内の他部門を巻き込む統括力。</a:t>
+              <a:t>企業法の専門性を軸に、企業経営そのものへの助言力を持つ、信託銀行ならではの人材としての専門性。</a:t>
             </a:r>
             <a:endParaRPr lang="en-US" sz="1400" dirty="0"/>
           </a:p>
@@ -7834,6 +7822,1113 @@
       </p:grpSpPr>
       <p:sp>
         <p:nvSpPr>
+          <p:cNvPr id="2" name="Shape 0"/>
+          <p:cNvSpPr/>
+          <p:nvPr/>
+        </p:nvSpPr>
+        <p:spPr>
+          <a:xfrm>
+            <a:off x="640080" y="411480"/>
+            <a:ext cx="502920" cy="457200"/>
+          </a:xfrm>
+          <a:prstGeom prst="roundRect">
+            <a:avLst>
+              <a:gd name="adj" fmla="val 16000"/>
+            </a:avLst>
+          </a:prstGeom>
+          <a:solidFill>
+            <a:srgbClr val="8A4B1E"/>
+          </a:solidFill>
+          <a:ln/>
+        </p:spPr>
+      </p:sp>
+      <p:sp>
+        <p:nvSpPr>
+          <p:cNvPr id="3" name="Text 1"/>
+          <p:cNvSpPr/>
+          <p:nvPr/>
+        </p:nvSpPr>
+        <p:spPr>
+          <a:xfrm>
+            <a:off x="640080" y="411480"/>
+            <a:ext cx="502920" cy="457200"/>
+          </a:xfrm>
+          <a:prstGeom prst="rect">
+            <a:avLst/>
+          </a:prstGeom>
+          <a:noFill/>
+          <a:ln/>
+        </p:spPr>
+        <p:txBody>
+          <a:bodyPr wrap="square" rtlCol="0" anchor="ctr"/>
+          <a:lstStyle/>
+          <a:p>
+            <a:pPr algn="ctr" indent="0" marL="0">
+              <a:buNone/>
+            </a:pPr>
+            <a:r>
+              <a:rPr lang="en-US" sz="2000" b="1" dirty="0">
+                <a:solidFill>
+                  <a:srgbClr val="FFFFFF"/>
+                </a:solidFill>
+                <a:latin typeface="Meiryo UI" pitchFamily="34" charset="0"/>
+                <a:ea typeface="Meiryo UI" pitchFamily="34" charset="-122"/>
+                <a:cs typeface="Meiryo UI" pitchFamily="34" charset="-120"/>
+              </a:rPr>
+              <a:t>③</a:t>
+            </a:r>
+            <a:endParaRPr lang="en-US" sz="2000" dirty="0"/>
+          </a:p>
+        </p:txBody>
+      </p:sp>
+      <p:sp>
+        <p:nvSpPr>
+          <p:cNvPr id="4" name="Text 2"/>
+          <p:cNvSpPr/>
+          <p:nvPr/>
+        </p:nvSpPr>
+        <p:spPr>
+          <a:xfrm>
+            <a:off x="1280160" y="365760"/>
+            <a:ext cx="10241280" cy="502920"/>
+          </a:xfrm>
+          <a:prstGeom prst="rect">
+            <a:avLst/>
+          </a:prstGeom>
+          <a:noFill/>
+          <a:ln/>
+        </p:spPr>
+        <p:txBody>
+          <a:bodyPr wrap="square" rtlCol="0" anchor="ctr"/>
+          <a:lstStyle/>
+          <a:p>
+            <a:pPr indent="0" marL="0">
+              <a:buNone/>
+            </a:pPr>
+            <a:r>
+              <a:rPr lang="en-US" sz="2600" b="1" dirty="0">
+                <a:solidFill>
+                  <a:srgbClr val="000000"/>
+                </a:solidFill>
+                <a:latin typeface="Meiryo UI" pitchFamily="34" charset="0"/>
+                <a:ea typeface="Meiryo UI" pitchFamily="34" charset="-122"/>
+                <a:cs typeface="Meiryo UI" pitchFamily="34" charset="-120"/>
+              </a:rPr>
+              <a:t>自己勘定運用のプロになる</a:t>
+            </a:r>
+            <a:endParaRPr lang="en-US" sz="2600" dirty="0"/>
+          </a:p>
+        </p:txBody>
+      </p:sp>
+      <p:sp>
+        <p:nvSpPr>
+          <p:cNvPr id="5" name="Text 3"/>
+          <p:cNvSpPr/>
+          <p:nvPr/>
+        </p:nvSpPr>
+        <p:spPr>
+          <a:xfrm>
+            <a:off x="1280160" y="868680"/>
+            <a:ext cx="10241280" cy="365760"/>
+          </a:xfrm>
+          <a:prstGeom prst="rect">
+            <a:avLst/>
+          </a:prstGeom>
+          <a:noFill/>
+          <a:ln/>
+        </p:spPr>
+        <p:txBody>
+          <a:bodyPr wrap="square" rtlCol="0" anchor="ctr"/>
+          <a:lstStyle/>
+          <a:p>
+            <a:pPr indent="0" marL="0">
+              <a:buNone/>
+            </a:pPr>
+            <a:r>
+              <a:rPr lang="en-US" sz="1400" i="1" dirty="0">
+                <a:solidFill>
+                  <a:srgbClr val="000000"/>
+                </a:solidFill>
+                <a:latin typeface="Meiryo UI" pitchFamily="34" charset="0"/>
+                <a:ea typeface="Meiryo UI" pitchFamily="34" charset="-122"/>
+                <a:cs typeface="Meiryo UI" pitchFamily="34" charset="-120"/>
+              </a:rPr>
+              <a:t>頭脳＝自分。銀行自身の資金をもとに、国債・為替等の伝統的資産を中心に運用判断力を極める</a:t>
+            </a:r>
+            <a:endParaRPr lang="en-US" sz="1400" dirty="0"/>
+          </a:p>
+        </p:txBody>
+      </p:sp>
+      <p:sp>
+        <p:nvSpPr>
+          <p:cNvPr id="6" name="Shape 4"/>
+          <p:cNvSpPr/>
+          <p:nvPr/>
+        </p:nvSpPr>
+        <p:spPr>
+          <a:xfrm>
+            <a:off x="548640" y="1417320"/>
+            <a:ext cx="3566160" cy="1417320"/>
+          </a:xfrm>
+          <a:prstGeom prst="roundRect">
+            <a:avLst>
+              <a:gd name="adj" fmla="val 6452"/>
+            </a:avLst>
+          </a:prstGeom>
+          <a:solidFill>
+            <a:srgbClr val="FFFFFF"/>
+          </a:solidFill>
+          <a:ln w="15875">
+            <a:solidFill>
+              <a:srgbClr val="8A4B1E"/>
+            </a:solidFill>
+            <a:prstDash val="solid"/>
+          </a:ln>
+        </p:spPr>
+      </p:sp>
+      <p:sp>
+        <p:nvSpPr>
+          <p:cNvPr id="7" name="Shape 5"/>
+          <p:cNvSpPr/>
+          <p:nvPr/>
+        </p:nvSpPr>
+        <p:spPr>
+          <a:xfrm>
+            <a:off x="749808" y="1691640"/>
+            <a:ext cx="868680" cy="868680"/>
+          </a:xfrm>
+          <a:prstGeom prst="ellipse">
+            <a:avLst/>
+          </a:prstGeom>
+          <a:solidFill>
+            <a:srgbClr val="8A4B1E"/>
+          </a:solidFill>
+          <a:ln/>
+        </p:spPr>
+      </p:sp>
+      <p:pic>
+        <p:nvPicPr>
+          <p:cNvPr id="8" name="Image 0" descr="icon_landmark.png">    </p:cNvPr>
+          <p:cNvPicPr>
+            <a:picLocks noChangeAspect="1"/>
+          </p:cNvPicPr>
+          <p:nvPr/>
+        </p:nvPicPr>
+        <p:blipFill>
+          <a:blip r:embed="rId1"/>
+          <a:stretch>
+            <a:fillRect/>
+          </a:stretch>
+        </p:blipFill>
+        <p:spPr>
+          <a:xfrm>
+            <a:off x="932688" y="1874520"/>
+            <a:ext cx="502920" cy="502920"/>
+          </a:xfrm>
+          <a:prstGeom prst="rect">
+            <a:avLst/>
+          </a:prstGeom>
+        </p:spPr>
+      </p:pic>
+      <p:sp>
+        <p:nvSpPr>
+          <p:cNvPr id="9" name="Text 6"/>
+          <p:cNvSpPr/>
+          <p:nvPr/>
+        </p:nvSpPr>
+        <p:spPr>
+          <a:xfrm>
+            <a:off x="1783080" y="1645920"/>
+            <a:ext cx="2148840" cy="320040"/>
+          </a:xfrm>
+          <a:prstGeom prst="rect">
+            <a:avLst/>
+          </a:prstGeom>
+          <a:noFill/>
+          <a:ln/>
+        </p:spPr>
+        <p:txBody>
+          <a:bodyPr wrap="square" rtlCol="0" anchor="ctr"/>
+          <a:lstStyle/>
+          <a:p>
+            <a:pPr indent="0" marL="0">
+              <a:buNone/>
+            </a:pPr>
+            <a:r>
+              <a:rPr lang="en-US" sz="1400" b="1" dirty="0">
+                <a:solidFill>
+                  <a:srgbClr val="000000"/>
+                </a:solidFill>
+                <a:latin typeface="Meiryo UI" pitchFamily="34" charset="0"/>
+                <a:ea typeface="Meiryo UI" pitchFamily="34" charset="-122"/>
+                <a:cs typeface="Meiryo UI" pitchFamily="34" charset="-120"/>
+              </a:rPr>
+              <a:t>入行〜5年目</a:t>
+            </a:r>
+            <a:endParaRPr lang="en-US" sz="1400" dirty="0"/>
+          </a:p>
+        </p:txBody>
+      </p:sp>
+      <p:sp>
+        <p:nvSpPr>
+          <p:cNvPr id="10" name="Text 7"/>
+          <p:cNvSpPr/>
+          <p:nvPr/>
+        </p:nvSpPr>
+        <p:spPr>
+          <a:xfrm>
+            <a:off x="1783080" y="1965960"/>
+            <a:ext cx="2148840" cy="777240"/>
+          </a:xfrm>
+          <a:prstGeom prst="rect">
+            <a:avLst/>
+          </a:prstGeom>
+          <a:noFill/>
+          <a:ln/>
+        </p:spPr>
+        <p:txBody>
+          <a:bodyPr wrap="square" rtlCol="0" anchor="ctr"/>
+          <a:lstStyle/>
+          <a:p>
+            <a:pPr indent="0" marL="0">
+              <a:lnSpc>
+                <a:spcPct val="110000"/>
+              </a:lnSpc>
+              <a:buNone/>
+            </a:pPr>
+            <a:r>
+              <a:rPr lang="en-US" sz="1500" b="1" dirty="0">
+                <a:solidFill>
+                  <a:srgbClr val="000000"/>
+                </a:solidFill>
+                <a:latin typeface="Meiryo UI" pitchFamily="34" charset="0"/>
+                <a:ea typeface="Meiryo UI" pitchFamily="34" charset="-122"/>
+                <a:cs typeface="Meiryo UI" pitchFamily="34" charset="-120"/>
+              </a:rPr>
+              <a:t>銀行内</a:t>
+            </a:r>
+            <a:endParaRPr lang="en-US" sz="1500" dirty="0"/>
+          </a:p>
+          <a:p>
+            <a:pPr indent="0" marL="0">
+              <a:lnSpc>
+                <a:spcPct val="110000"/>
+              </a:lnSpc>
+              <a:buNone/>
+            </a:pPr>
+            <a:r>
+              <a:rPr lang="en-US" sz="1500" b="1" dirty="0">
+                <a:solidFill>
+                  <a:srgbClr val="000000"/>
+                </a:solidFill>
+                <a:latin typeface="Meiryo UI" pitchFamily="34" charset="0"/>
+                <a:ea typeface="Meiryo UI" pitchFamily="34" charset="-122"/>
+                <a:cs typeface="Meiryo UI" pitchFamily="34" charset="-120"/>
+              </a:rPr>
+              <a:t>市場運用部門</a:t>
+            </a:r>
+            <a:endParaRPr lang="en-US" sz="1500" dirty="0"/>
+          </a:p>
+        </p:txBody>
+      </p:sp>
+      <p:pic>
+        <p:nvPicPr>
+          <p:cNvPr id="11" name="Image 1" descr="icon_arrow_dark.png">    </p:cNvPr>
+          <p:cNvPicPr>
+            <a:picLocks noChangeAspect="1"/>
+          </p:cNvPicPr>
+          <p:nvPr/>
+        </p:nvPicPr>
+        <p:blipFill>
+          <a:blip r:embed="rId2"/>
+          <a:stretch>
+            <a:fillRect/>
+          </a:stretch>
+        </p:blipFill>
+        <p:spPr>
+          <a:xfrm>
+            <a:off x="4133088" y="1979676"/>
+            <a:ext cx="219456" cy="292608"/>
+          </a:xfrm>
+          <a:prstGeom prst="rect">
+            <a:avLst/>
+          </a:prstGeom>
+        </p:spPr>
+      </p:pic>
+      <p:sp>
+        <p:nvSpPr>
+          <p:cNvPr id="12" name="Text 8"/>
+          <p:cNvSpPr/>
+          <p:nvPr/>
+        </p:nvSpPr>
+        <p:spPr>
+          <a:xfrm>
+            <a:off x="548640" y="3017520"/>
+            <a:ext cx="3566160" cy="2103120"/>
+          </a:xfrm>
+          <a:prstGeom prst="rect">
+            <a:avLst/>
+          </a:prstGeom>
+          <a:noFill/>
+          <a:ln/>
+        </p:spPr>
+        <p:txBody>
+          <a:bodyPr wrap="square" rtlCol="0" anchor="ctr"/>
+          <a:lstStyle/>
+          <a:p>
+            <a:pPr indent="0" marL="0">
+              <a:lnSpc>
+                <a:spcPct val="125000"/>
+              </a:lnSpc>
+              <a:spcAft>
+                <a:spcPts val="600"/>
+              </a:spcAft>
+              <a:buNone/>
+            </a:pPr>
+            <a:r>
+              <a:rPr lang="en-US" sz="1400" b="1" dirty="0">
+                <a:solidFill>
+                  <a:srgbClr val="8A4B1E"/>
+                </a:solidFill>
+                <a:latin typeface="Meiryo UI" pitchFamily="34" charset="0"/>
+                <a:ea typeface="Meiryo UI" pitchFamily="34" charset="-122"/>
+                <a:cs typeface="Meiryo UI" pitchFamily="34" charset="-120"/>
+              </a:rPr>
+              <a:t>業務内容　</a:t>
+            </a:r>
+            <a:pPr indent="0" marL="0">
+              <a:lnSpc>
+                <a:spcPct val="125000"/>
+              </a:lnSpc>
+              <a:spcAft>
+                <a:spcPts val="600"/>
+              </a:spcAft>
+              <a:buNone/>
+            </a:pPr>
+            <a:r>
+              <a:rPr lang="en-US" sz="1400" dirty="0">
+                <a:solidFill>
+                  <a:srgbClr val="000000"/>
+                </a:solidFill>
+                <a:latin typeface="Meiryo UI" pitchFamily="34" charset="0"/>
+                <a:ea typeface="Meiryo UI" pitchFamily="34" charset="-122"/>
+                <a:cs typeface="Meiryo UI" pitchFamily="34" charset="-120"/>
+              </a:rPr>
+              <a:t>銀行自身の資金（自己勘定・有価証券運用）を対象に、債券・株式等の市場調査やディーリング実務の基礎を習得する。ゆうちょ銀行はこの自己勘定運用（国債等）が収益の柱であり、代表的な配属先となる。</a:t>
+            </a:r>
+            <a:endParaRPr lang="en-US" sz="1400" dirty="0"/>
+          </a:p>
+        </p:txBody>
+      </p:sp>
+      <p:sp>
+        <p:nvSpPr>
+          <p:cNvPr id="13" name="Text 9"/>
+          <p:cNvSpPr/>
+          <p:nvPr/>
+        </p:nvSpPr>
+        <p:spPr>
+          <a:xfrm>
+            <a:off x="548640" y="4983480"/>
+            <a:ext cx="3566160" cy="1463040"/>
+          </a:xfrm>
+          <a:prstGeom prst="rect">
+            <a:avLst/>
+          </a:prstGeom>
+          <a:noFill/>
+          <a:ln/>
+        </p:spPr>
+        <p:txBody>
+          <a:bodyPr wrap="square" rtlCol="0" anchor="ctr"/>
+          <a:lstStyle/>
+          <a:p>
+            <a:pPr indent="0" marL="0">
+              <a:lnSpc>
+                <a:spcPct val="125000"/>
+              </a:lnSpc>
+              <a:buNone/>
+            </a:pPr>
+            <a:r>
+              <a:rPr lang="en-US" sz="1400" b="1" dirty="0">
+                <a:solidFill>
+                  <a:srgbClr val="8A4B1E"/>
+                </a:solidFill>
+                <a:latin typeface="Meiryo UI" pitchFamily="34" charset="0"/>
+                <a:ea typeface="Meiryo UI" pitchFamily="34" charset="-122"/>
+                <a:cs typeface="Meiryo UI" pitchFamily="34" charset="-120"/>
+              </a:rPr>
+              <a:t>身につく力　</a:t>
+            </a:r>
+            <a:pPr indent="0" marL="0">
+              <a:lnSpc>
+                <a:spcPct val="125000"/>
+              </a:lnSpc>
+              <a:buNone/>
+            </a:pPr>
+            <a:r>
+              <a:rPr lang="en-US" sz="1400" dirty="0">
+                <a:solidFill>
+                  <a:srgbClr val="000000"/>
+                </a:solidFill>
+                <a:latin typeface="Meiryo UI" pitchFamily="34" charset="0"/>
+                <a:ea typeface="Meiryo UI" pitchFamily="34" charset="-122"/>
+                <a:cs typeface="Meiryo UI" pitchFamily="34" charset="-120"/>
+              </a:rPr>
+              <a:t>マーケットを継続的に追う力、リスク量を意識した投資判断の基礎。</a:t>
+            </a:r>
+            <a:endParaRPr lang="en-US" sz="1400" dirty="0"/>
+          </a:p>
+        </p:txBody>
+      </p:sp>
+      <p:sp>
+        <p:nvSpPr>
+          <p:cNvPr id="14" name="Shape 10"/>
+          <p:cNvSpPr/>
+          <p:nvPr/>
+        </p:nvSpPr>
+        <p:spPr>
+          <a:xfrm>
+            <a:off x="4389120" y="1417320"/>
+            <a:ext cx="3566160" cy="1417320"/>
+          </a:xfrm>
+          <a:prstGeom prst="roundRect">
+            <a:avLst>
+              <a:gd name="adj" fmla="val 6452"/>
+            </a:avLst>
+          </a:prstGeom>
+          <a:solidFill>
+            <a:srgbClr val="FFFFFF"/>
+          </a:solidFill>
+          <a:ln w="15875">
+            <a:solidFill>
+              <a:srgbClr val="8A4B1E"/>
+            </a:solidFill>
+            <a:prstDash val="solid"/>
+          </a:ln>
+        </p:spPr>
+      </p:sp>
+      <p:sp>
+        <p:nvSpPr>
+          <p:cNvPr id="15" name="Shape 11"/>
+          <p:cNvSpPr/>
+          <p:nvPr/>
+        </p:nvSpPr>
+        <p:spPr>
+          <a:xfrm>
+            <a:off x="4590288" y="1691640"/>
+            <a:ext cx="868680" cy="868680"/>
+          </a:xfrm>
+          <a:prstGeom prst="ellipse">
+            <a:avLst/>
+          </a:prstGeom>
+          <a:solidFill>
+            <a:srgbClr val="8A4B1E"/>
+          </a:solidFill>
+          <a:ln/>
+        </p:spPr>
+      </p:sp>
+      <p:pic>
+        <p:nvPicPr>
+          <p:cNvPr id="16" name="Image 2" descr="icon_chartpie.png">    </p:cNvPr>
+          <p:cNvPicPr>
+            <a:picLocks noChangeAspect="1"/>
+          </p:cNvPicPr>
+          <p:nvPr/>
+        </p:nvPicPr>
+        <p:blipFill>
+          <a:blip r:embed="rId3"/>
+          <a:stretch>
+            <a:fillRect/>
+          </a:stretch>
+        </p:blipFill>
+        <p:spPr>
+          <a:xfrm>
+            <a:off x="4773168" y="1874520"/>
+            <a:ext cx="502920" cy="502920"/>
+          </a:xfrm>
+          <a:prstGeom prst="rect">
+            <a:avLst/>
+          </a:prstGeom>
+        </p:spPr>
+      </p:pic>
+      <p:sp>
+        <p:nvSpPr>
+          <p:cNvPr id="17" name="Text 12"/>
+          <p:cNvSpPr/>
+          <p:nvPr/>
+        </p:nvSpPr>
+        <p:spPr>
+          <a:xfrm>
+            <a:off x="5623560" y="1645920"/>
+            <a:ext cx="2148840" cy="320040"/>
+          </a:xfrm>
+          <a:prstGeom prst="rect">
+            <a:avLst/>
+          </a:prstGeom>
+          <a:noFill/>
+          <a:ln/>
+        </p:spPr>
+        <p:txBody>
+          <a:bodyPr wrap="square" rtlCol="0" anchor="ctr"/>
+          <a:lstStyle/>
+          <a:p>
+            <a:pPr indent="0" marL="0">
+              <a:buNone/>
+            </a:pPr>
+            <a:r>
+              <a:rPr lang="en-US" sz="1400" b="1" dirty="0">
+                <a:solidFill>
+                  <a:srgbClr val="000000"/>
+                </a:solidFill>
+                <a:latin typeface="Meiryo UI" pitchFamily="34" charset="0"/>
+                <a:ea typeface="Meiryo UI" pitchFamily="34" charset="-122"/>
+                <a:cs typeface="Meiryo UI" pitchFamily="34" charset="-120"/>
+              </a:rPr>
+              <a:t>6〜12年目</a:t>
+            </a:r>
+            <a:endParaRPr lang="en-US" sz="1400" dirty="0"/>
+          </a:p>
+        </p:txBody>
+      </p:sp>
+      <p:sp>
+        <p:nvSpPr>
+          <p:cNvPr id="18" name="Text 13"/>
+          <p:cNvSpPr/>
+          <p:nvPr/>
+        </p:nvSpPr>
+        <p:spPr>
+          <a:xfrm>
+            <a:off x="5623560" y="1965960"/>
+            <a:ext cx="2148840" cy="777240"/>
+          </a:xfrm>
+          <a:prstGeom prst="rect">
+            <a:avLst/>
+          </a:prstGeom>
+          <a:noFill/>
+          <a:ln/>
+        </p:spPr>
+        <p:txBody>
+          <a:bodyPr wrap="square" rtlCol="0" anchor="ctr"/>
+          <a:lstStyle/>
+          <a:p>
+            <a:pPr indent="0" marL="0">
+              <a:lnSpc>
+                <a:spcPct val="110000"/>
+              </a:lnSpc>
+              <a:buNone/>
+            </a:pPr>
+            <a:r>
+              <a:rPr lang="en-US" sz="1500" b="1" dirty="0">
+                <a:solidFill>
+                  <a:srgbClr val="000000"/>
+                </a:solidFill>
+                <a:latin typeface="Meiryo UI" pitchFamily="34" charset="0"/>
+                <a:ea typeface="Meiryo UI" pitchFamily="34" charset="-122"/>
+                <a:cs typeface="Meiryo UI" pitchFamily="34" charset="-120"/>
+              </a:rPr>
+              <a:t>銀行内</a:t>
+            </a:r>
+            <a:endParaRPr lang="en-US" sz="1500" dirty="0"/>
+          </a:p>
+          <a:p>
+            <a:pPr indent="0" marL="0">
+              <a:lnSpc>
+                <a:spcPct val="110000"/>
+              </a:lnSpc>
+              <a:buNone/>
+            </a:pPr>
+            <a:r>
+              <a:rPr lang="en-US" sz="1500" b="1" dirty="0">
+                <a:solidFill>
+                  <a:srgbClr val="000000"/>
+                </a:solidFill>
+                <a:latin typeface="Meiryo UI" pitchFamily="34" charset="0"/>
+                <a:ea typeface="Meiryo UI" pitchFamily="34" charset="-122"/>
+                <a:cs typeface="Meiryo UI" pitchFamily="34" charset="-120"/>
+              </a:rPr>
+              <a:t>自己勘定運用の専門職</a:t>
+            </a:r>
+            <a:endParaRPr lang="en-US" sz="1500" dirty="0"/>
+          </a:p>
+        </p:txBody>
+      </p:sp>
+      <p:pic>
+        <p:nvPicPr>
+          <p:cNvPr id="19" name="Image 3" descr="icon_arrow_dark.png">    </p:cNvPr>
+          <p:cNvPicPr>
+            <a:picLocks noChangeAspect="1"/>
+          </p:cNvPicPr>
+          <p:nvPr/>
+        </p:nvPicPr>
+        <p:blipFill>
+          <a:blip r:embed="rId4"/>
+          <a:stretch>
+            <a:fillRect/>
+          </a:stretch>
+        </p:blipFill>
+        <p:spPr>
+          <a:xfrm>
+            <a:off x="7973568" y="1979676"/>
+            <a:ext cx="219456" cy="292608"/>
+          </a:xfrm>
+          <a:prstGeom prst="rect">
+            <a:avLst/>
+          </a:prstGeom>
+        </p:spPr>
+      </p:pic>
+      <p:sp>
+        <p:nvSpPr>
+          <p:cNvPr id="20" name="Text 14"/>
+          <p:cNvSpPr/>
+          <p:nvPr/>
+        </p:nvSpPr>
+        <p:spPr>
+          <a:xfrm>
+            <a:off x="4389120" y="3017520"/>
+            <a:ext cx="3566160" cy="2103120"/>
+          </a:xfrm>
+          <a:prstGeom prst="rect">
+            <a:avLst/>
+          </a:prstGeom>
+          <a:noFill/>
+          <a:ln/>
+        </p:spPr>
+        <p:txBody>
+          <a:bodyPr wrap="square" rtlCol="0" anchor="ctr"/>
+          <a:lstStyle/>
+          <a:p>
+            <a:pPr indent="0" marL="0">
+              <a:lnSpc>
+                <a:spcPct val="125000"/>
+              </a:lnSpc>
+              <a:spcAft>
+                <a:spcPts val="600"/>
+              </a:spcAft>
+              <a:buNone/>
+            </a:pPr>
+            <a:r>
+              <a:rPr lang="en-US" sz="1400" b="1" dirty="0">
+                <a:solidFill>
+                  <a:srgbClr val="8A4B1E"/>
+                </a:solidFill>
+                <a:latin typeface="Meiryo UI" pitchFamily="34" charset="0"/>
+                <a:ea typeface="Meiryo UI" pitchFamily="34" charset="-122"/>
+                <a:cs typeface="Meiryo UI" pitchFamily="34" charset="-120"/>
+              </a:rPr>
+              <a:t>業務内容　</a:t>
+            </a:r>
+            <a:pPr indent="0" marL="0">
+              <a:lnSpc>
+                <a:spcPct val="125000"/>
+              </a:lnSpc>
+              <a:spcAft>
+                <a:spcPts val="600"/>
+              </a:spcAft>
+              <a:buNone/>
+            </a:pPr>
+            <a:r>
+              <a:rPr lang="en-US" sz="1400" dirty="0">
+                <a:solidFill>
+                  <a:srgbClr val="000000"/>
+                </a:solidFill>
+                <a:latin typeface="Meiryo UI" pitchFamily="34" charset="0"/>
+                <a:ea typeface="Meiryo UI" pitchFamily="34" charset="-122"/>
+                <a:cs typeface="Meiryo UI" pitchFamily="34" charset="-120"/>
+              </a:rPr>
+              <a:t>債券・株式等に加え、PE・不動産等オルタナティブ資産への自己資金配分も含めた自己勘定運用の専門職として、ALM（資産負債管理）やリスク管理部門と連携しながら銀行内で運用の頭脳役を担う。ゆうちょ銀行は自己資金によるPE投資でも国内最大級（2025年9月末時点で7.6兆円）であり、この分野の代表例といえる。</a:t>
+            </a:r>
+            <a:endParaRPr lang="en-US" sz="1400" dirty="0"/>
+          </a:p>
+        </p:txBody>
+      </p:sp>
+      <p:sp>
+        <p:nvSpPr>
+          <p:cNvPr id="21" name="Text 15"/>
+          <p:cNvSpPr/>
+          <p:nvPr/>
+        </p:nvSpPr>
+        <p:spPr>
+          <a:xfrm>
+            <a:off x="4389120" y="4983480"/>
+            <a:ext cx="3566160" cy="1463040"/>
+          </a:xfrm>
+          <a:prstGeom prst="rect">
+            <a:avLst/>
+          </a:prstGeom>
+          <a:noFill/>
+          <a:ln/>
+        </p:spPr>
+        <p:txBody>
+          <a:bodyPr wrap="square" rtlCol="0" anchor="ctr"/>
+          <a:lstStyle/>
+          <a:p>
+            <a:pPr indent="0" marL="0">
+              <a:lnSpc>
+                <a:spcPct val="125000"/>
+              </a:lnSpc>
+              <a:buNone/>
+            </a:pPr>
+            <a:r>
+              <a:rPr lang="en-US" sz="1400" b="1" dirty="0">
+                <a:solidFill>
+                  <a:srgbClr val="8A4B1E"/>
+                </a:solidFill>
+                <a:latin typeface="Meiryo UI" pitchFamily="34" charset="0"/>
+                <a:ea typeface="Meiryo UI" pitchFamily="34" charset="-122"/>
+                <a:cs typeface="Meiryo UI" pitchFamily="34" charset="-120"/>
+              </a:rPr>
+              <a:t>身につく力　</a:t>
+            </a:r>
+            <a:pPr indent="0" marL="0">
+              <a:lnSpc>
+                <a:spcPct val="125000"/>
+              </a:lnSpc>
+              <a:buNone/>
+            </a:pPr>
+            <a:r>
+              <a:rPr lang="en-US" sz="1400" dirty="0">
+                <a:solidFill>
+                  <a:srgbClr val="000000"/>
+                </a:solidFill>
+                <a:latin typeface="Meiryo UI" pitchFamily="34" charset="0"/>
+                <a:ea typeface="Meiryo UI" pitchFamily="34" charset="-122"/>
+                <a:cs typeface="Meiryo UI" pitchFamily="34" charset="-120"/>
+              </a:rPr>
+              <a:t>財務分析力を活かした投資判断力、PDCAによる運用改善力（検証→仮説修正の繰り返し）。</a:t>
+            </a:r>
+            <a:endParaRPr lang="en-US" sz="1400" dirty="0"/>
+          </a:p>
+        </p:txBody>
+      </p:sp>
+      <p:sp>
+        <p:nvSpPr>
+          <p:cNvPr id="22" name="Shape 16"/>
+          <p:cNvSpPr/>
+          <p:nvPr/>
+        </p:nvSpPr>
+        <p:spPr>
+          <a:xfrm>
+            <a:off x="8229600" y="1417320"/>
+            <a:ext cx="3566160" cy="1417320"/>
+          </a:xfrm>
+          <a:prstGeom prst="roundRect">
+            <a:avLst>
+              <a:gd name="adj" fmla="val 6452"/>
+            </a:avLst>
+          </a:prstGeom>
+          <a:solidFill>
+            <a:srgbClr val="FFFFFF"/>
+          </a:solidFill>
+          <a:ln w="15875">
+            <a:solidFill>
+              <a:srgbClr val="8A4B1E"/>
+            </a:solidFill>
+            <a:prstDash val="solid"/>
+          </a:ln>
+        </p:spPr>
+      </p:sp>
+      <p:sp>
+        <p:nvSpPr>
+          <p:cNvPr id="23" name="Shape 17"/>
+          <p:cNvSpPr/>
+          <p:nvPr/>
+        </p:nvSpPr>
+        <p:spPr>
+          <a:xfrm>
+            <a:off x="8430768" y="1691640"/>
+            <a:ext cx="868680" cy="868680"/>
+          </a:xfrm>
+          <a:prstGeom prst="ellipse">
+            <a:avLst/>
+          </a:prstGeom>
+          <a:solidFill>
+            <a:srgbClr val="8A4B1E"/>
+          </a:solidFill>
+          <a:ln/>
+        </p:spPr>
+      </p:sp>
+      <p:pic>
+        <p:nvPicPr>
+          <p:cNvPr id="24" name="Image 4" descr="icon_crown.png">    </p:cNvPr>
+          <p:cNvPicPr>
+            <a:picLocks noChangeAspect="1"/>
+          </p:cNvPicPr>
+          <p:nvPr/>
+        </p:nvPicPr>
+        <p:blipFill>
+          <a:blip r:embed="rId5"/>
+          <a:stretch>
+            <a:fillRect/>
+          </a:stretch>
+        </p:blipFill>
+        <p:spPr>
+          <a:xfrm>
+            <a:off x="8613648" y="1874520"/>
+            <a:ext cx="502920" cy="502920"/>
+          </a:xfrm>
+          <a:prstGeom prst="rect">
+            <a:avLst/>
+          </a:prstGeom>
+        </p:spPr>
+      </p:pic>
+      <p:sp>
+        <p:nvSpPr>
+          <p:cNvPr id="25" name="Text 18"/>
+          <p:cNvSpPr/>
+          <p:nvPr/>
+        </p:nvSpPr>
+        <p:spPr>
+          <a:xfrm>
+            <a:off x="9464040" y="1645920"/>
+            <a:ext cx="2148840" cy="320040"/>
+          </a:xfrm>
+          <a:prstGeom prst="rect">
+            <a:avLst/>
+          </a:prstGeom>
+          <a:noFill/>
+          <a:ln/>
+        </p:spPr>
+        <p:txBody>
+          <a:bodyPr wrap="square" rtlCol="0" anchor="ctr"/>
+          <a:lstStyle/>
+          <a:p>
+            <a:pPr indent="0" marL="0">
+              <a:buNone/>
+            </a:pPr>
+            <a:r>
+              <a:rPr lang="en-US" sz="1400" b="1" dirty="0">
+                <a:solidFill>
+                  <a:srgbClr val="000000"/>
+                </a:solidFill>
+                <a:latin typeface="Meiryo UI" pitchFamily="34" charset="0"/>
+                <a:ea typeface="Meiryo UI" pitchFamily="34" charset="-122"/>
+                <a:cs typeface="Meiryo UI" pitchFamily="34" charset="-120"/>
+              </a:rPr>
+              <a:t>13年目〜</a:t>
+            </a:r>
+            <a:endParaRPr lang="en-US" sz="1400" dirty="0"/>
+          </a:p>
+        </p:txBody>
+      </p:sp>
+      <p:sp>
+        <p:nvSpPr>
+          <p:cNvPr id="26" name="Text 19"/>
+          <p:cNvSpPr/>
+          <p:nvPr/>
+        </p:nvSpPr>
+        <p:spPr>
+          <a:xfrm>
+            <a:off x="9464040" y="1965960"/>
+            <a:ext cx="2148840" cy="777240"/>
+          </a:xfrm>
+          <a:prstGeom prst="rect">
+            <a:avLst/>
+          </a:prstGeom>
+          <a:noFill/>
+          <a:ln/>
+        </p:spPr>
+        <p:txBody>
+          <a:bodyPr wrap="square" rtlCol="0" anchor="ctr"/>
+          <a:lstStyle/>
+          <a:p>
+            <a:pPr indent="0" marL="0">
+              <a:lnSpc>
+                <a:spcPct val="110000"/>
+              </a:lnSpc>
+              <a:buNone/>
+            </a:pPr>
+            <a:r>
+              <a:rPr lang="en-US" sz="1500" b="1" dirty="0">
+                <a:solidFill>
+                  <a:srgbClr val="000000"/>
+                </a:solidFill>
+                <a:latin typeface="Meiryo UI" pitchFamily="34" charset="0"/>
+                <a:ea typeface="Meiryo UI" pitchFamily="34" charset="-122"/>
+                <a:cs typeface="Meiryo UI" pitchFamily="34" charset="-120"/>
+              </a:rPr>
+              <a:t>銀行内</a:t>
+            </a:r>
+            <a:endParaRPr lang="en-US" sz="1500" dirty="0"/>
+          </a:p>
+          <a:p>
+            <a:pPr indent="0" marL="0">
+              <a:lnSpc>
+                <a:spcPct val="110000"/>
+              </a:lnSpc>
+              <a:buNone/>
+            </a:pPr>
+            <a:r>
+              <a:rPr lang="en-US" sz="1500" b="1" dirty="0">
+                <a:solidFill>
+                  <a:srgbClr val="000000"/>
+                </a:solidFill>
+                <a:latin typeface="Meiryo UI" pitchFamily="34" charset="0"/>
+                <a:ea typeface="Meiryo UI" pitchFamily="34" charset="-122"/>
+                <a:cs typeface="Meiryo UI" pitchFamily="34" charset="-120"/>
+              </a:rPr>
+              <a:t>運用部門の管理職</a:t>
+            </a:r>
+            <a:endParaRPr lang="en-US" sz="1500" dirty="0"/>
+          </a:p>
+        </p:txBody>
+      </p:sp>
+      <p:sp>
+        <p:nvSpPr>
+          <p:cNvPr id="27" name="Text 20"/>
+          <p:cNvSpPr/>
+          <p:nvPr/>
+        </p:nvSpPr>
+        <p:spPr>
+          <a:xfrm>
+            <a:off x="8229600" y="3017520"/>
+            <a:ext cx="3566160" cy="2103120"/>
+          </a:xfrm>
+          <a:prstGeom prst="rect">
+            <a:avLst/>
+          </a:prstGeom>
+          <a:noFill/>
+          <a:ln/>
+        </p:spPr>
+        <p:txBody>
+          <a:bodyPr wrap="square" rtlCol="0" anchor="ctr"/>
+          <a:lstStyle/>
+          <a:p>
+            <a:pPr indent="0" marL="0">
+              <a:lnSpc>
+                <a:spcPct val="125000"/>
+              </a:lnSpc>
+              <a:spcAft>
+                <a:spcPts val="600"/>
+              </a:spcAft>
+              <a:buNone/>
+            </a:pPr>
+            <a:r>
+              <a:rPr lang="en-US" sz="1400" b="1" dirty="0">
+                <a:solidFill>
+                  <a:srgbClr val="8A4B1E"/>
+                </a:solidFill>
+                <a:latin typeface="Meiryo UI" pitchFamily="34" charset="0"/>
+                <a:ea typeface="Meiryo UI" pitchFamily="34" charset="-122"/>
+                <a:cs typeface="Meiryo UI" pitchFamily="34" charset="-120"/>
+              </a:rPr>
+              <a:t>業務内容　</a:t>
+            </a:r>
+            <a:pPr indent="0" marL="0">
+              <a:lnSpc>
+                <a:spcPct val="125000"/>
+              </a:lnSpc>
+              <a:spcAft>
+                <a:spcPts val="600"/>
+              </a:spcAft>
+              <a:buNone/>
+            </a:pPr>
+            <a:r>
+              <a:rPr lang="en-US" sz="1400" dirty="0">
+                <a:solidFill>
+                  <a:srgbClr val="000000"/>
+                </a:solidFill>
+                <a:latin typeface="Meiryo UI" pitchFamily="34" charset="0"/>
+                <a:ea typeface="Meiryo UI" pitchFamily="34" charset="-122"/>
+                <a:cs typeface="Meiryo UI" pitchFamily="34" charset="-120"/>
+              </a:rPr>
+              <a:t>銀行全体の自己勘定運用方針の立案・運用部門の統括を担当。頭脳と金庫が同一組織内で完結する体制の中核を担う。ゆうちょ銀行のプライベートエクイティ投資部は2026年4月の組織再編後も市場部門内に存続しており、機関投資家など外部の資金を預かる一般的な「アセットマネジメント業務」とは異なり、自社の資金を自社で判断・運用する体制が続いている。</a:t>
+            </a:r>
+            <a:endParaRPr lang="en-US" sz="1400" dirty="0"/>
+          </a:p>
+        </p:txBody>
+      </p:sp>
+      <p:sp>
+        <p:nvSpPr>
+          <p:cNvPr id="28" name="Text 21"/>
+          <p:cNvSpPr/>
+          <p:nvPr/>
+        </p:nvSpPr>
+        <p:spPr>
+          <a:xfrm>
+            <a:off x="8229600" y="4983480"/>
+            <a:ext cx="3566160" cy="1463040"/>
+          </a:xfrm>
+          <a:prstGeom prst="rect">
+            <a:avLst/>
+          </a:prstGeom>
+          <a:noFill/>
+          <a:ln/>
+        </p:spPr>
+        <p:txBody>
+          <a:bodyPr wrap="square" rtlCol="0" anchor="ctr"/>
+          <a:lstStyle/>
+          <a:p>
+            <a:pPr indent="0" marL="0">
+              <a:lnSpc>
+                <a:spcPct val="125000"/>
+              </a:lnSpc>
+              <a:buNone/>
+            </a:pPr>
+            <a:r>
+              <a:rPr lang="en-US" sz="1400" b="1" dirty="0">
+                <a:solidFill>
+                  <a:srgbClr val="8A4B1E"/>
+                </a:solidFill>
+                <a:latin typeface="Meiryo UI" pitchFamily="34" charset="0"/>
+                <a:ea typeface="Meiryo UI" pitchFamily="34" charset="-122"/>
+                <a:cs typeface="Meiryo UI" pitchFamily="34" charset="-120"/>
+              </a:rPr>
+              <a:t>身につく力　</a:t>
+            </a:r>
+            <a:pPr indent="0" marL="0">
+              <a:lnSpc>
+                <a:spcPct val="125000"/>
+              </a:lnSpc>
+              <a:buNone/>
+            </a:pPr>
+            <a:r>
+              <a:rPr lang="en-US" sz="1400" dirty="0">
+                <a:solidFill>
+                  <a:srgbClr val="000000"/>
+                </a:solidFill>
+                <a:latin typeface="Meiryo UI" pitchFamily="34" charset="0"/>
+                <a:ea typeface="Meiryo UI" pitchFamily="34" charset="-122"/>
+                <a:cs typeface="Meiryo UI" pitchFamily="34" charset="-120"/>
+              </a:rPr>
+              <a:t>組織全体の運用戦略を描く視座、社内の他部門を巻き込む統括力。</a:t>
+            </a:r>
+            <a:endParaRPr lang="en-US" sz="1400" dirty="0"/>
+          </a:p>
+        </p:txBody>
+      </p:sp>
+    </p:spTree>
+  </p:cSld>
+  <p:clrMapOvr>
+    <a:masterClrMapping/>
+  </p:clrMapOvr>
+</p:sld>
+</file>
+
+<file path=ppt/slides/slide8.xml><?xml version="1.0" encoding="utf-8"?>
+<p:sld xmlns:a="http://schemas.openxmlformats.org/drawingml/2006/main" xmlns:r="http://schemas.openxmlformats.org/officeDocument/2006/relationships" xmlns:p="http://schemas.openxmlformats.org/presentationml/2006/main">
+  <p:cSld name="Slide 8">
+    <p:bg>
+      <p:bgPr>
+        <a:solidFill>
+          <a:srgbClr val="FFFFFF"/>
+        </a:solidFill>
+      </p:bgPr>
+    </p:bg>
+    <p:spTree>
+      <p:nvGrpSpPr>
+        <p:cNvPr id="1" name=""/>
+        <p:cNvGrpSpPr/>
+        <p:nvPr/>
+      </p:nvGrpSpPr>
+      <p:grpSpPr>
+        <a:xfrm>
+          <a:off x="0" y="0"/>
+          <a:ext cx="0" cy="0"/>
+          <a:chOff x="0" y="0"/>
+          <a:chExt cx="0" cy="0"/>
+        </a:xfrm>
+      </p:grpSpPr>
+      <p:sp>
+        <p:nvSpPr>
           <p:cNvPr id="2" name="Text 0"/>
           <p:cNvSpPr/>
           <p:nvPr/>
@@ -7873,7 +8968,7 @@
       </p:sp>
       <p:graphicFrame>
         <p:nvGraphicFramePr>
-          <p:cNvPr id="8" name="Table 0"/>
+          <p:cNvPr id="9" name="Table 0"/>
           <p:cNvGraphicFramePr>
             <a:graphicFrameLocks noGrp="1"/>
           </p:cNvGraphicFramePr>
@@ -7974,7 +9069,7 @@
                           <a:ea typeface="Meiryo UI" pitchFamily="34" charset="-122"/>
                           <a:cs typeface="Meiryo UI" pitchFamily="34" charset="-120"/>
                         </a:rPr>
-                        <a:t>アセットマネジメント業務を中心とするキャリア</a:t>
+                        <a:t>資産運用のプロになる</a:t>
                       </a:r>
                       <a:endParaRPr lang="en-US" sz="1400" dirty="0">
                         <a:latin typeface="Meiryo UI" charset="0"/>
@@ -8042,7 +9137,7 @@
                           <a:ea typeface="Meiryo UI" pitchFamily="34" charset="-122"/>
                           <a:cs typeface="Meiryo UI" pitchFamily="34" charset="-120"/>
                         </a:rPr>
-                        <a:t>信託銀行の運用業務を中心とするキャリア</a:t>
+                        <a:t>企業法務・ガバナンスのプロになる</a:t>
                       </a:r>
                       <a:endParaRPr lang="en-US" sz="1400" dirty="0">
                         <a:latin typeface="Meiryo UI" charset="0"/>
@@ -8110,7 +9205,7 @@
                           <a:ea typeface="Meiryo UI" pitchFamily="34" charset="-122"/>
                           <a:cs typeface="Meiryo UI" pitchFamily="34" charset="-120"/>
                         </a:rPr>
-                        <a:t>銀行の自己勘定運用（マーケット業務）を中心とするキャリア</a:t>
+                        <a:t>自己勘定運用のプロになる</a:t>
                       </a:r>
                       <a:endParaRPr lang="en-US" sz="1400" dirty="0">
                         <a:latin typeface="Meiryo UI" charset="0"/>
@@ -8180,7 +9275,7 @@
                           <a:ea typeface="Meiryo UI" pitchFamily="34" charset="-122"/>
                           <a:cs typeface="Meiryo UI" pitchFamily="34" charset="-120"/>
                         </a:rPr>
-                        <a:t>部署の異動</a:t>
+                        <a:t>頭脳の対象</a:t>
                       </a:r>
                       <a:endParaRPr lang="en-US" sz="1300" dirty="0">
                         <a:latin typeface="Meiryo UI" charset="0"/>
@@ -8248,7 +9343,7 @@
                           <a:ea typeface="Meiryo UI" pitchFamily="34" charset="-122"/>
                           <a:cs typeface="Meiryo UI" pitchFamily="34" charset="-120"/>
                         </a:rPr>
-                        <a:t>信託銀行とグループAM会社</a:t>
+                        <a:t>顧客の信託資金・幅広い資産</a:t>
                       </a:r>
                       <a:endParaRPr lang="en-US" sz="1300" dirty="0">
                         <a:latin typeface="Meiryo UI" charset="0"/>
@@ -8313,7 +9408,7 @@
                           <a:ea typeface="Meiryo UI" pitchFamily="34" charset="-122"/>
                           <a:cs typeface="Meiryo UI" pitchFamily="34" charset="-120"/>
                         </a:rPr>
-                        <a:t>信託銀行とグループAM会社</a:t>
+                        <a:t>運用ではなく企業経営への助言</a:t>
                       </a:r>
                       <a:endParaRPr lang="en-US" sz="1300" dirty="0">
                         <a:latin typeface="Meiryo UI" charset="0"/>
@@ -8378,7 +9473,7 @@
                           <a:ea typeface="Meiryo UI" pitchFamily="34" charset="-122"/>
                           <a:cs typeface="Meiryo UI" pitchFamily="34" charset="-120"/>
                         </a:rPr>
-                        <a:t>自己勘定運用は銀行内で完結（PE等は別会社）</a:t>
+                        <a:t>銀行自身の資金・伝統的資産中心</a:t>
                       </a:r>
                       <a:endParaRPr lang="en-US" sz="1300" dirty="0">
                         <a:latin typeface="Meiryo UI" charset="0"/>
@@ -8445,7 +9540,7 @@
                           <a:ea typeface="Meiryo UI" pitchFamily="34" charset="-122"/>
                           <a:cs typeface="Meiryo UI" pitchFamily="34" charset="-120"/>
                         </a:rPr>
-                        <a:t>運用の「頭脳」役</a:t>
+                        <a:t>主な職場</a:t>
                       </a:r>
                       <a:endParaRPr lang="en-US" sz="1300" dirty="0">
                         <a:latin typeface="Meiryo UI" charset="0"/>
@@ -8513,7 +9608,28 @@
                           <a:ea typeface="Meiryo UI" pitchFamily="34" charset="-122"/>
                           <a:cs typeface="Meiryo UI" pitchFamily="34" charset="-120"/>
                         </a:rPr>
-                        <a:t>AM会社で自ら深く担う</a:t>
+                        <a:t>信託銀行 資産運用部門</a:t>
+                      </a:r>
+                      <a:endParaRPr lang="en-US" sz="1300" dirty="0">
+                        <a:latin typeface="Meiryo UI" charset="0"/>
+                        <a:ea typeface="Meiryo UI" charset="0"/>
+                        <a:cs typeface="Meiryo UI" charset="0"/>
+                      </a:endParaRPr>
+                    </a:p>
+                    <a:p>
+                      <a:pPr algn="l" indent="0" marL="0">
+                        <a:buNone/>
+                      </a:pPr>
+                      <a:r>
+                        <a:rPr lang="en-US" sz="1300" dirty="0">
+                          <a:solidFill>
+                            <a:srgbClr val="000000"/>
+                          </a:solidFill>
+                          <a:latin typeface="Meiryo UI" pitchFamily="34" charset="0"/>
+                          <a:ea typeface="Meiryo UI" pitchFamily="34" charset="-122"/>
+                          <a:cs typeface="Meiryo UI" pitchFamily="34" charset="-120"/>
+                        </a:rPr>
+                        <a:t>→グループAM会社</a:t>
                       </a:r>
                       <a:endParaRPr lang="en-US" sz="1300" dirty="0">
                         <a:latin typeface="Meiryo UI" charset="0"/>
@@ -8578,7 +9694,28 @@
                           <a:ea typeface="Meiryo UI" pitchFamily="34" charset="-122"/>
                           <a:cs typeface="Meiryo UI" pitchFamily="34" charset="-120"/>
                         </a:rPr>
-                        <a:t>信託銀行側から評価・選定を担う</a:t>
+                        <a:t>信託銀行 証券代行部門</a:t>
+                      </a:r>
+                      <a:endParaRPr lang="en-US" sz="1300" dirty="0">
+                        <a:latin typeface="Meiryo UI" charset="0"/>
+                        <a:ea typeface="Meiryo UI" charset="0"/>
+                        <a:cs typeface="Meiryo UI" charset="0"/>
+                      </a:endParaRPr>
+                    </a:p>
+                    <a:p>
+                      <a:pPr algn="l" indent="0" marL="0">
+                        <a:buNone/>
+                      </a:pPr>
+                      <a:r>
+                        <a:rPr lang="en-US" sz="1300" dirty="0">
+                          <a:solidFill>
+                            <a:srgbClr val="000000"/>
+                          </a:solidFill>
+                          <a:latin typeface="Meiryo UI" pitchFamily="34" charset="0"/>
+                          <a:ea typeface="Meiryo UI" pitchFamily="34" charset="-122"/>
+                          <a:cs typeface="Meiryo UI" pitchFamily="34" charset="-120"/>
+                        </a:rPr>
+                        <a:t>→ガバナンスコンサルティング</a:t>
                       </a:r>
                       <a:endParaRPr lang="en-US" sz="1300" dirty="0">
                         <a:latin typeface="Meiryo UI" charset="0"/>
@@ -8643,7 +9780,7 @@
                           <a:ea typeface="Meiryo UI" pitchFamily="34" charset="-122"/>
                           <a:cs typeface="Meiryo UI" pitchFamily="34" charset="-120"/>
                         </a:rPr>
-                        <a:t>銀行内で自己勘定の頭脳と金庫を兼ねる</a:t>
+                        <a:t>銀行 マーケット部門（内で完結）</a:t>
                       </a:r>
                       <a:endParaRPr lang="en-US" sz="1300" dirty="0">
                         <a:latin typeface="Meiryo UI" charset="0"/>
@@ -8843,7 +9980,7 @@
                           <a:ea typeface="Meiryo UI" pitchFamily="34" charset="-122"/>
                           <a:cs typeface="Meiryo UI" pitchFamily="34" charset="-120"/>
                         </a:rPr>
-                        <a:t>企業法知識→信託の実務に直結</a:t>
+                        <a:t>企業法知識→ガバナンス助言に直結</a:t>
                       </a:r>
                       <a:endParaRPr lang="en-US" sz="1300" dirty="0">
                         <a:latin typeface="Meiryo UI" charset="0"/>
@@ -9043,7 +10180,7 @@
                           <a:ea typeface="Meiryo UI" pitchFamily="34" charset="-122"/>
                           <a:cs typeface="Meiryo UI" pitchFamily="34" charset="-120"/>
                         </a:rPr>
-                        <a:t>運用実務そのものを極めたい人</a:t>
+                        <a:t>幅広い資産の運用判断を極めたい人</a:t>
                       </a:r>
                       <a:endParaRPr lang="en-US" sz="1300" dirty="0">
                         <a:latin typeface="Meiryo UI" charset="0"/>
@@ -9108,7 +10245,7 @@
                           <a:ea typeface="Meiryo UI" pitchFamily="34" charset="-122"/>
                           <a:cs typeface="Meiryo UI" pitchFamily="34" charset="-120"/>
                         </a:rPr>
-                        <a:t>信託銀行の専門性を軸にしたい人</a:t>
+                        <a:t>企業法・ガバナンスを軸にしたい人</a:t>
                       </a:r>
                       <a:endParaRPr lang="en-US" sz="1300" dirty="0">
                         <a:latin typeface="Meiryo UI" charset="0"/>
@@ -9234,12 +10371,12 @@
         </p:nvSpPr>
         <p:spPr>
           <a:xfrm>
-            <a:off x="548640" y="4206240"/>
-            <a:ext cx="11064240" cy="2331720"/>
+            <a:off x="548640" y="4114800"/>
+            <a:ext cx="11064240" cy="2514600"/>
           </a:xfrm>
           <a:prstGeom prst="roundRect">
             <a:avLst>
-              <a:gd name="adj" fmla="val 3922"/>
+              <a:gd name="adj" fmla="val 3636"/>
             </a:avLst>
           </a:prstGeom>
           <a:solidFill>
@@ -9261,7 +10398,7 @@
         </p:nvSpPr>
         <p:spPr>
           <a:xfrm>
-            <a:off x="822960" y="4389120"/>
+            <a:off x="822960" y="4279392"/>
             <a:ext cx="10424160" cy="320040"/>
           </a:xfrm>
           <a:prstGeom prst="rect">
@@ -9300,8 +10437,8 @@
         </p:nvSpPr>
         <p:spPr>
           <a:xfrm>
-            <a:off x="960120" y="5074920"/>
-            <a:ext cx="10332720" cy="1371600"/>
+            <a:off x="960120" y="4709160"/>
+            <a:ext cx="10332720" cy="1828800"/>
           </a:xfrm>
           <a:prstGeom prst="rect">
             <a:avLst/>
@@ -9315,16 +10452,16 @@
           <a:p>
             <a:pPr marL="342900" indent="-342900">
               <a:lnSpc>
-                <a:spcPct val="125000"/>
+                <a:spcPct val="120000"/>
               </a:lnSpc>
               <a:spcAft>
-                <a:spcPts val="600"/>
+                <a:spcPts val="500"/>
               </a:spcAft>
               <a:buSzPct val="100000"/>
               <a:buChar char="•"/>
             </a:pPr>
             <a:r>
-              <a:rPr lang="en-US" sz="1400" dirty="0">
+              <a:rPr lang="en-US" sz="1350" dirty="0">
                 <a:solidFill>
                   <a:srgbClr val="000000"/>
                 </a:solidFill>
@@ -9334,55 +10471,55 @@
               </a:rPr>
               <a:t>3パターンとも「入行後まず信託銀行の実務を経験する」点は共通。面接では、どのパターンでも通用する「財務諸表を読める」強みをまず語る</a:t>
             </a:r>
-            <a:endParaRPr lang="en-US" sz="1400" dirty="0"/>
+            <a:endParaRPr lang="en-US" sz="1350" dirty="0"/>
           </a:p>
           <a:p>
             <a:pPr marL="342900" indent="-342900">
               <a:lnSpc>
-                <a:spcPct val="125000"/>
+                <a:spcPct val="120000"/>
               </a:lnSpc>
               <a:spcAft>
-                <a:spcPts val="600"/>
+                <a:spcPts val="500"/>
               </a:spcAft>
               <a:buSzPct val="100000"/>
               <a:buChar char="•"/>
             </a:pPr>
             <a:r>
-              <a:rPr lang="en-US" sz="1400" dirty="0">
-                <a:solidFill>
-                  <a:srgbClr val="000000"/>
-                </a:solidFill>
-                <a:latin typeface="Meiryo UI" pitchFamily="34" charset="0"/>
-                <a:ea typeface="Meiryo UI" pitchFamily="34" charset="-122"/>
-                <a:cs typeface="Meiryo UI" pitchFamily="34" charset="-120"/>
-              </a:rPr>
-              <a:t>「運用の頭脳を極めたい／信託銀行の専門性を軸にしたい／異動リスクを抑えたい」のどれに一番惹かれるかを整理し、志望動機に反映する</a:t>
-            </a:r>
-            <a:endParaRPr lang="en-US" sz="1400" dirty="0"/>
+              <a:rPr lang="en-US" sz="1350" dirty="0">
+                <a:solidFill>
+                  <a:srgbClr val="000000"/>
+                </a:solidFill>
+                <a:latin typeface="Meiryo UI" pitchFamily="34" charset="0"/>
+                <a:ea typeface="Meiryo UI" pitchFamily="34" charset="-122"/>
+                <a:cs typeface="Meiryo UI" pitchFamily="34" charset="-120"/>
+              </a:rPr>
+              <a:t>「幅広い資産の運用判断を極めたい／企業法・ガバナンスを軸にしたい／自己勘定運用に一貫して取り組みたい」のどれに一番惹かれるかを整理し、志望動機に反映する</a:t>
+            </a:r>
+            <a:endParaRPr lang="en-US" sz="1350" dirty="0"/>
           </a:p>
           <a:p>
             <a:pPr marL="342900" indent="-342900">
               <a:lnSpc>
-                <a:spcPct val="125000"/>
+                <a:spcPct val="120000"/>
               </a:lnSpc>
               <a:spcAft>
-                <a:spcPts val="600"/>
+                <a:spcPts val="500"/>
               </a:spcAft>
               <a:buSzPct val="100000"/>
               <a:buChar char="•"/>
             </a:pPr>
             <a:r>
-              <a:rPr lang="en-US" sz="1400" dirty="0">
-                <a:solidFill>
-                  <a:srgbClr val="000000"/>
-                </a:solidFill>
-                <a:latin typeface="Meiryo UI" pitchFamily="34" charset="0"/>
-                <a:ea typeface="Meiryo UI" pitchFamily="34" charset="-122"/>
-                <a:cs typeface="Meiryo UI" pitchFamily="34" charset="-120"/>
-              </a:rPr>
-              <a:t>説明会・面接で「グループAM会社への出向・転籍の実態」を具体的に質問し、パターンの解像度を上げる</a:t>
-            </a:r>
-            <a:endParaRPr lang="en-US" sz="1400" dirty="0"/>
+              <a:rPr lang="en-US" sz="1350" dirty="0">
+                <a:solidFill>
+                  <a:srgbClr val="000000"/>
+                </a:solidFill>
+                <a:latin typeface="Meiryo UI" pitchFamily="34" charset="0"/>
+                <a:ea typeface="Meiryo UI" pitchFamily="34" charset="-122"/>
+                <a:cs typeface="Meiryo UI" pitchFamily="34" charset="-120"/>
+              </a:rPr>
+              <a:t>説明会・面接で「グループAM会社への出向・転籍の実態」「証券代行部門からガバナンスコンサルティングへの異動の実態」を具体的に質問し、パターンの解像度を上げる</a:t>
+            </a:r>
+            <a:endParaRPr lang="en-US" sz="1350" dirty="0"/>
           </a:p>
         </p:txBody>
       </p:sp>

--- a/信吾/銀行研究/添付ファイル/信託銀行キャリア形成モデル.pptx
+++ b/信吾/銀行研究/添付ファイル/信託銀行キャリア形成モデル.pptx
@@ -1711,7 +1711,7 @@
                 <a:ea typeface="Meiryo UI" pitchFamily="34" charset="-122"/>
                 <a:cs typeface="Meiryo UI" pitchFamily="34" charset="-120"/>
               </a:rPr>
-              <a:t>③自己勘定運用のプロになる</a:t>
+              <a:t>③自己資金で企業を支えるプロになる</a:t>
             </a:r>
             <a:endParaRPr lang="en-US" sz="1600" dirty="0"/>
           </a:p>
@@ -3241,7 +3241,7 @@
                 <a:ea typeface="Meiryo UI" pitchFamily="34" charset="-122"/>
                 <a:cs typeface="Meiryo UI" pitchFamily="34" charset="-120"/>
               </a:rPr>
-              <a:t>自己勘定運用のプロ</a:t>
+              <a:t>自己資金で企業を支えるプロ</a:t>
             </a:r>
             <a:endParaRPr lang="en-US" sz="1350" dirty="0"/>
           </a:p>
@@ -3322,7 +3322,7 @@
                 <a:ea typeface="Meiryo UI" pitchFamily="34" charset="-122"/>
                 <a:cs typeface="Meiryo UI" pitchFamily="34" charset="-120"/>
               </a:rPr>
-              <a:t>対象＝銀行自身の資金／伝統的資産（国債・為替等）が中心</a:t>
+              <a:t>対象＝銀行自身の資金。融資（デット）から自己勘定投資・PE（エクイティ）まで</a:t>
             </a:r>
             <a:endParaRPr lang="en-US" sz="1250" dirty="0"/>
           </a:p>
@@ -4986,7 +4986,7 @@
                 <a:ea typeface="Meiryo UI" pitchFamily="34" charset="-122"/>
                 <a:cs typeface="Meiryo UI" pitchFamily="34" charset="-120"/>
               </a:rPr>
-              <a:t>自己勘定運用のプロになる</a:t>
+              <a:t>自己資金で企業を支えるプロになる</a:t>
             </a:r>
             <a:endParaRPr lang="en-US" sz="1500" dirty="0"/>
           </a:p>
@@ -5131,7 +5131,7 @@
                 <a:ea typeface="Meiryo UI" pitchFamily="34" charset="-122"/>
                 <a:cs typeface="Meiryo UI" pitchFamily="34" charset="-120"/>
               </a:rPr>
-              <a:t>市場運用部門</a:t>
+              <a:t>法人融資 or 市場運用部門</a:t>
             </a:r>
             <a:endParaRPr lang="en-US" sz="1400" dirty="0"/>
           </a:p>
@@ -5315,7 +5315,7 @@
                 <a:ea typeface="Meiryo UI" pitchFamily="34" charset="-122"/>
                 <a:cs typeface="Meiryo UI" pitchFamily="34" charset="-120"/>
               </a:rPr>
-              <a:t>自己勘定運用の専門職</a:t>
+              <a:t>与信審査 or 自己勘定投資</a:t>
             </a:r>
             <a:endParaRPr lang="en-US" sz="1400" dirty="0"/>
           </a:p>
@@ -5499,7 +5499,7 @@
                 <a:ea typeface="Meiryo UI" pitchFamily="34" charset="-122"/>
                 <a:cs typeface="Meiryo UI" pitchFamily="34" charset="-120"/>
               </a:rPr>
-              <a:t>運用部門の管理職</a:t>
+              <a:t>融資・運用部門の管理職</a:t>
             </a:r>
             <a:endParaRPr lang="en-US" sz="1400" dirty="0"/>
           </a:p>
@@ -5568,7 +5568,7 @@
                 <a:ea typeface="Meiryo UI" pitchFamily="34" charset="-122"/>
                 <a:cs typeface="Meiryo UI" pitchFamily="34" charset="-120"/>
               </a:rPr>
-              <a:t>頭脳＝自分で、銀行自身の資金（伝統的資産中心）の運用を極める</a:t>
+              <a:t>頭脳＝自分で、銀行自身の資金（デット・エクイティ両方）を企業の成長に振り向ける</a:t>
             </a:r>
             <a:endParaRPr lang="en-US" sz="1400" dirty="0"/>
           </a:p>
@@ -7914,7 +7914,7 @@
                 <a:ea typeface="Meiryo UI" pitchFamily="34" charset="-122"/>
                 <a:cs typeface="Meiryo UI" pitchFamily="34" charset="-120"/>
               </a:rPr>
-              <a:t>自己勘定運用のプロになる</a:t>
+              <a:t>自己資金で企業を支えるプロになる</a:t>
             </a:r>
             <a:endParaRPr lang="en-US" sz="2600" dirty="0"/>
           </a:p>
@@ -7953,7 +7953,7 @@
                 <a:ea typeface="Meiryo UI" pitchFamily="34" charset="-122"/>
                 <a:cs typeface="Meiryo UI" pitchFamily="34" charset="-120"/>
               </a:rPr>
-              <a:t>頭脳＝自分。銀行自身の資金をもとに、国債・為替等の伝統的資産を中心に運用判断力を極める</a:t>
+              <a:t>頭脳＝自分。銀行自身の資金（デット・エクイティ）で企業の成長を支える専門性を極める</a:t>
             </a:r>
             <a:endParaRPr lang="en-US" sz="1400" dirty="0"/>
           </a:p>
@@ -8125,7 +8125,7 @@
                 <a:ea typeface="Meiryo UI" pitchFamily="34" charset="-122"/>
                 <a:cs typeface="Meiryo UI" pitchFamily="34" charset="-120"/>
               </a:rPr>
-              <a:t>市場運用部門</a:t>
+              <a:t>法人融資 or 市場運用部門</a:t>
             </a:r>
             <a:endParaRPr lang="en-US" sz="1500" dirty="0"/>
           </a:p>
@@ -8214,7 +8214,7 @@
                 <a:ea typeface="Meiryo UI" pitchFamily="34" charset="-122"/>
                 <a:cs typeface="Meiryo UI" pitchFamily="34" charset="-120"/>
               </a:rPr>
-              <a:t>銀行自身の資金（自己勘定・有価証券運用）を対象に、債券・株式等の市場調査やディーリング実務の基礎を習得する。ゆうちょ銀行はこの自己勘定運用（国債等）が収益の柱であり、代表的な配属先となる。</a:t>
+              <a:t>法人融資部門なら企業への与信審査・貸出実務、市場運用部門なら債券・株式等の市場調査やディーリング実務の基礎を習得する。ゆうちょ銀行は市場運用（国債等）が収益の柱であり、代表的な配属先の一つ。</a:t>
             </a:r>
             <a:endParaRPr lang="en-US" sz="1400" dirty="0"/>
           </a:p>
@@ -8273,7 +8273,7 @@
                 <a:ea typeface="Meiryo UI" pitchFamily="34" charset="-122"/>
                 <a:cs typeface="Meiryo UI" pitchFamily="34" charset="-120"/>
               </a:rPr>
-              <a:t>マーケットを継続的に追う力、リスク量を意識した投資判断の基礎。</a:t>
+              <a:t>融資なら財務諸表分析力を与信判断に応用する経験、市場運用ならマーケットを継続的に追う力。銀行自身の資金でリスクを取る感覚を養う。</a:t>
             </a:r>
             <a:endParaRPr lang="en-US" sz="1400" dirty="0"/>
           </a:p>
@@ -8445,7 +8445,7 @@
                 <a:ea typeface="Meiryo UI" pitchFamily="34" charset="-122"/>
                 <a:cs typeface="Meiryo UI" pitchFamily="34" charset="-120"/>
               </a:rPr>
-              <a:t>自己勘定運用の専門職</a:t>
+              <a:t>与信審査 or 自己勘定投資</a:t>
             </a:r>
             <a:endParaRPr lang="en-US" sz="1500" dirty="0"/>
           </a:p>
@@ -8534,7 +8534,7 @@
                 <a:ea typeface="Meiryo UI" pitchFamily="34" charset="-122"/>
                 <a:cs typeface="Meiryo UI" pitchFamily="34" charset="-120"/>
               </a:rPr>
-              <a:t>債券・株式等に加え、PE・不動産等オルタナティブ資産への自己資金配分も含めた自己勘定運用の専門職として、ALM（資産負債管理）やリスク管理部門と連携しながら銀行内で運用の頭脳役を担う。ゆうちょ銀行は自己資金によるPE投資でも国内最大級（2025年9月末時点で7.6兆円）であり、この分野の代表例といえる。</a:t>
+              <a:t>融資（デット）なら大口・プロジェクト融資の審査、自己勘定投資（エクイティ）なら債券・株式・PE等の運用を、ALM（資産負債管理）と連携しつつ頭脳役として担う。ゆうちょ銀行は自己資金PE投資でも国内最大級（2025年9月末時点で7.6兆円）。</a:t>
             </a:r>
             <a:endParaRPr lang="en-US" sz="1400" dirty="0"/>
           </a:p>
@@ -8593,7 +8593,7 @@
                 <a:ea typeface="Meiryo UI" pitchFamily="34" charset="-122"/>
                 <a:cs typeface="Meiryo UI" pitchFamily="34" charset="-120"/>
               </a:rPr>
-              <a:t>財務分析力を活かした投資判断力、PDCAによる運用改善力（検証→仮説修正の繰り返し）。</a:t>
+              <a:t>財務分析力を活かした与信・投資判断力、PDCAによる審査・運用改善力。</a:t>
             </a:r>
             <a:endParaRPr lang="en-US" sz="1400" dirty="0"/>
           </a:p>
@@ -8765,7 +8765,7 @@
                 <a:ea typeface="Meiryo UI" pitchFamily="34" charset="-122"/>
                 <a:cs typeface="Meiryo UI" pitchFamily="34" charset="-120"/>
               </a:rPr>
-              <a:t>運用部門の管理職</a:t>
+              <a:t>融資・運用部門の管理職</a:t>
             </a:r>
             <a:endParaRPr lang="en-US" sz="1500" dirty="0"/>
           </a:p>
@@ -8830,7 +8830,7 @@
                 <a:ea typeface="Meiryo UI" pitchFamily="34" charset="-122"/>
                 <a:cs typeface="Meiryo UI" pitchFamily="34" charset="-120"/>
               </a:rPr>
-              <a:t>銀行全体の自己勘定運用方針の立案・運用部門の統括を担当。頭脳と金庫が同一組織内で完結する体制の中核を担う。ゆうちょ銀行のプライベートエクイティ投資部は2026年4月の組織再編後も市場部門内に存続しており、機関投資家など外部の資金を預かる一般的な「アセットマネジメント業務」とは異なり、自社の資金を自社で判断・運用する体制が続いている。</a:t>
+              <a:t>銀行全体の融資方針・自己勘定運用方針の立案や部門の統括を担当。頭脳と金庫が同一組織内で完結する体制の中核を担う。ゆうちょ銀行のプライベートエクイティ投資部は2026年4月の組織再編後も市場部門内に存続しており、自社の資金を自社で判断し企業に振り向ける体制が続く。</a:t>
             </a:r>
             <a:endParaRPr lang="en-US" sz="1400" dirty="0"/>
           </a:p>
@@ -8889,7 +8889,7 @@
                 <a:ea typeface="Meiryo UI" pitchFamily="34" charset="-122"/>
                 <a:cs typeface="Meiryo UI" pitchFamily="34" charset="-120"/>
               </a:rPr>
-              <a:t>組織全体の運用戦略を描く視座、社内の他部門を巻き込む統括力。</a:t>
+              <a:t>デット・エクイティ双方の視点から資金配分戦略を描く視座、他部門を巻き込む統括力。</a:t>
             </a:r>
             <a:endParaRPr lang="en-US" sz="1400" dirty="0"/>
           </a:p>
@@ -9205,7 +9205,7 @@
                           <a:ea typeface="Meiryo UI" pitchFamily="34" charset="-122"/>
                           <a:cs typeface="Meiryo UI" pitchFamily="34" charset="-120"/>
                         </a:rPr>
-                        <a:t>自己勘定運用のプロになる</a:t>
+                        <a:t>自己資金で企業を支えるプロになる</a:t>
                       </a:r>
                       <a:endParaRPr lang="en-US" sz="1400" dirty="0">
                         <a:latin typeface="Meiryo UI" charset="0"/>
@@ -9473,7 +9473,7 @@
                           <a:ea typeface="Meiryo UI" pitchFamily="34" charset="-122"/>
                           <a:cs typeface="Meiryo UI" pitchFamily="34" charset="-120"/>
                         </a:rPr>
-                        <a:t>銀行自身の資金・伝統的資産中心</a:t>
+                        <a:t>銀行自身の資金（デット・エクイティ）</a:t>
                       </a:r>
                       <a:endParaRPr lang="en-US" sz="1300" dirty="0">
                         <a:latin typeface="Meiryo UI" charset="0"/>
@@ -9780,7 +9780,7 @@
                           <a:ea typeface="Meiryo UI" pitchFamily="34" charset="-122"/>
                           <a:cs typeface="Meiryo UI" pitchFamily="34" charset="-120"/>
                         </a:rPr>
-                        <a:t>銀行 マーケット部門（内で完結）</a:t>
+                        <a:t>銀行 法人融資部門 or 市場運用部門（内で完結）</a:t>
                       </a:r>
                       <a:endParaRPr lang="en-US" sz="1300" dirty="0">
                         <a:latin typeface="Meiryo UI" charset="0"/>
@@ -10045,7 +10045,7 @@
                           <a:ea typeface="Meiryo UI" pitchFamily="34" charset="-122"/>
                           <a:cs typeface="Meiryo UI" pitchFamily="34" charset="-120"/>
                         </a:rPr>
-                        <a:t>PDCA力→運用改善サイクルに直結</a:t>
+                        <a:t>財務分析力→与信・投資判断に直結</a:t>
                       </a:r>
                       <a:endParaRPr lang="en-US" sz="1300" dirty="0">
                         <a:latin typeface="Meiryo UI" charset="0"/>
@@ -10310,7 +10310,7 @@
                           <a:ea typeface="Meiryo UI" pitchFamily="34" charset="-122"/>
                           <a:cs typeface="Meiryo UI" pitchFamily="34" charset="-120"/>
                         </a:rPr>
-                        <a:t>異動リスクを抑え一貫性を重視する人</a:t>
+                        <a:t>融資・投資の両面で企業を支えたい人</a:t>
                       </a:r>
                       <a:endParaRPr lang="en-US" sz="1300" dirty="0">
                         <a:latin typeface="Meiryo UI" charset="0"/>
@@ -10493,7 +10493,7 @@
                 <a:ea typeface="Meiryo UI" pitchFamily="34" charset="-122"/>
                 <a:cs typeface="Meiryo UI" pitchFamily="34" charset="-120"/>
               </a:rPr>
-              <a:t>「幅広い資産の運用判断を極めたい／企業法・ガバナンスを軸にしたい／自己勘定運用に一貫して取り組みたい」のどれに一番惹かれるかを整理し、志望動機に反映する</a:t>
+              <a:t>「幅広い資産の運用判断を極めたい／企業法・ガバナンスを軸にしたい／融資と自己勘定投資の両面で企業を支えたい」のどれに一番惹かれるかを整理し、志望動機に反映する</a:t>
             </a:r>
             <a:endParaRPr lang="en-US" sz="1350" dirty="0"/>
           </a:p>
@@ -10517,7 +10517,7 @@
                 <a:ea typeface="Meiryo UI" pitchFamily="34" charset="-122"/>
                 <a:cs typeface="Meiryo UI" pitchFamily="34" charset="-120"/>
               </a:rPr>
-              <a:t>説明会・面接で「グループAM会社への出向・転籍の実態」「証券代行部門からガバナンスコンサルティングへの異動の実態」を具体的に質問し、パターンの解像度を上げる</a:t>
+              <a:t>説明会・面接で「グループAM会社への出向・転籍の実態」「証券代行部門からガバナンスコンサルティングへの異動の実態」「法人融資部門と市場運用部門の異動の実態」を具体的に質問し、パターンの解像度を上げる</a:t>
             </a:r>
             <a:endParaRPr lang="en-US" sz="1350" dirty="0"/>
           </a:p>

--- a/信吾/銀行研究/添付ファイル/信託銀行キャリア形成モデル.pptx
+++ b/信吾/銀行研究/添付ファイル/信託銀行キャリア形成モデル.pptx
@@ -1663,7 +1663,7 @@
                 <a:ea typeface="Meiryo UI" pitchFamily="34" charset="-122"/>
                 <a:cs typeface="Meiryo UI" pitchFamily="34" charset="-120"/>
               </a:rPr>
-              <a:t>①資産運用のプロになる</a:t>
+              <a:t>①信託資金で資産形成を支えるプロになる</a:t>
             </a:r>
             <a:endParaRPr lang="en-US" sz="1600" dirty="0"/>
           </a:p>
@@ -1687,7 +1687,7 @@
                 <a:ea typeface="Meiryo UI" pitchFamily="34" charset="-122"/>
                 <a:cs typeface="Meiryo UI" pitchFamily="34" charset="-120"/>
               </a:rPr>
-              <a:t>②企業法務・ガバナンスのプロになる</a:t>
+              <a:t>②助言で企業経営を支えるプロになる</a:t>
             </a:r>
             <a:endParaRPr lang="en-US" sz="1600" dirty="0"/>
           </a:p>
@@ -2819,7 +2819,7 @@
                 <a:ea typeface="Meiryo UI" pitchFamily="34" charset="-122"/>
                 <a:cs typeface="Meiryo UI" pitchFamily="34" charset="-120"/>
               </a:rPr>
-              <a:t>資産運用のプロ</a:t>
+              <a:t>信託資金で資産形成を支えるプロ</a:t>
             </a:r>
             <a:endParaRPr lang="en-US" sz="1350" dirty="0"/>
           </a:p>
@@ -3030,7 +3030,7 @@
                 <a:ea typeface="Meiryo UI" pitchFamily="34" charset="-122"/>
                 <a:cs typeface="Meiryo UI" pitchFamily="34" charset="-120"/>
               </a:rPr>
-              <a:t>企業法務・ガバナンスのプロ</a:t>
+              <a:t>助言で企業経営を支えるプロ</a:t>
             </a:r>
             <a:endParaRPr lang="en-US" sz="1350" dirty="0"/>
           </a:p>
@@ -3562,7 +3562,7 @@
                 <a:ea typeface="Meiryo UI" pitchFamily="34" charset="-122"/>
                 <a:cs typeface="Meiryo UI" pitchFamily="34" charset="-120"/>
               </a:rPr>
-              <a:t>資産運用のプロになる</a:t>
+              <a:t>信託資金で資産形成を支えるプロになる</a:t>
             </a:r>
             <a:endParaRPr lang="en-US" sz="1500" dirty="0"/>
           </a:p>
@@ -4274,7 +4274,7 @@
                 <a:ea typeface="Meiryo UI" pitchFamily="34" charset="-122"/>
                 <a:cs typeface="Meiryo UI" pitchFamily="34" charset="-120"/>
               </a:rPr>
-              <a:t>企業法務・ガバナンスのプロになる</a:t>
+              <a:t>助言で企業経営を支えるプロになる</a:t>
             </a:r>
             <a:endParaRPr lang="en-US" sz="1500" dirty="0"/>
           </a:p>
@@ -5700,7 +5700,7 @@
                 <a:ea typeface="Meiryo UI" pitchFamily="34" charset="-122"/>
                 <a:cs typeface="Meiryo UI" pitchFamily="34" charset="-120"/>
               </a:rPr>
-              <a:t>資産運用のプロになる</a:t>
+              <a:t>信託資金で資産形成を支えるプロになる</a:t>
             </a:r>
             <a:endParaRPr lang="en-US" sz="2600" dirty="0"/>
           </a:p>
@@ -6807,7 +6807,7 @@
                 <a:ea typeface="Meiryo UI" pitchFamily="34" charset="-122"/>
                 <a:cs typeface="Meiryo UI" pitchFamily="34" charset="-120"/>
               </a:rPr>
-              <a:t>企業法務・ガバナンスのプロになる</a:t>
+              <a:t>助言で企業経営を支えるプロになる</a:t>
             </a:r>
             <a:endParaRPr lang="en-US" sz="2600" dirty="0"/>
           </a:p>
@@ -9069,7 +9069,7 @@
                           <a:ea typeface="Meiryo UI" pitchFamily="34" charset="-122"/>
                           <a:cs typeface="Meiryo UI" pitchFamily="34" charset="-120"/>
                         </a:rPr>
-                        <a:t>資産運用のプロになる</a:t>
+                        <a:t>信託資金で資産形成を支えるプロになる</a:t>
                       </a:r>
                       <a:endParaRPr lang="en-US" sz="1400" dirty="0">
                         <a:latin typeface="Meiryo UI" charset="0"/>
@@ -9137,7 +9137,7 @@
                           <a:ea typeface="Meiryo UI" pitchFamily="34" charset="-122"/>
                           <a:cs typeface="Meiryo UI" pitchFamily="34" charset="-120"/>
                         </a:rPr>
-                        <a:t>企業法務・ガバナンスのプロになる</a:t>
+                        <a:t>助言で企業経営を支えるプロになる</a:t>
                       </a:r>
                       <a:endParaRPr lang="en-US" sz="1400" dirty="0">
                         <a:latin typeface="Meiryo UI" charset="0"/>

--- a/信吾/銀行研究/添付ファイル/信託銀行キャリア形成モデル.pptx
+++ b/信吾/銀行研究/添付ファイル/信託銀行キャリア形成モデル.pptx
@@ -1711,7 +1711,7 @@
                 <a:ea typeface="Meiryo UI" pitchFamily="34" charset="-122"/>
                 <a:cs typeface="Meiryo UI" pitchFamily="34" charset="-120"/>
               </a:rPr>
-              <a:t>③自己資金で企業を支えるプロになる</a:t>
+              <a:t>③融資・自己資金運用で企業を支えるプロになる</a:t>
             </a:r>
             <a:endParaRPr lang="en-US" sz="1600" dirty="0"/>
           </a:p>
@@ -3241,7 +3241,7 @@
                 <a:ea typeface="Meiryo UI" pitchFamily="34" charset="-122"/>
                 <a:cs typeface="Meiryo UI" pitchFamily="34" charset="-120"/>
               </a:rPr>
-              <a:t>自己資金で企業を支えるプロ</a:t>
+              <a:t>融資・自己資金運用で企業を支えるプロ</a:t>
             </a:r>
             <a:endParaRPr lang="en-US" sz="1350" dirty="0"/>
           </a:p>
@@ -4986,7 +4986,7 @@
                 <a:ea typeface="Meiryo UI" pitchFamily="34" charset="-122"/>
                 <a:cs typeface="Meiryo UI" pitchFamily="34" charset="-120"/>
               </a:rPr>
-              <a:t>自己資金で企業を支えるプロになる</a:t>
+              <a:t>融資・自己資金運用で企業を支えるプロになる</a:t>
             </a:r>
             <a:endParaRPr lang="en-US" sz="1500" dirty="0"/>
           </a:p>
@@ -7914,7 +7914,7 @@
                 <a:ea typeface="Meiryo UI" pitchFamily="34" charset="-122"/>
                 <a:cs typeface="Meiryo UI" pitchFamily="34" charset="-120"/>
               </a:rPr>
-              <a:t>自己資金で企業を支えるプロになる</a:t>
+              <a:t>融資・自己資金運用で企業を支えるプロになる</a:t>
             </a:r>
             <a:endParaRPr lang="en-US" sz="2600" dirty="0"/>
           </a:p>
@@ -9205,7 +9205,7 @@
                           <a:ea typeface="Meiryo UI" pitchFamily="34" charset="-122"/>
                           <a:cs typeface="Meiryo UI" pitchFamily="34" charset="-120"/>
                         </a:rPr>
-                        <a:t>自己資金で企業を支えるプロになる</a:t>
+                        <a:t>融資・自己資金運用で企業を支えるプロになる</a:t>
                       </a:r>
                       <a:endParaRPr lang="en-US" sz="1400" dirty="0">
                         <a:latin typeface="Meiryo UI" charset="0"/>

--- a/信吾/銀行研究/添付ファイル/信託銀行キャリア形成モデル.pptx
+++ b/信吾/銀行研究/添付ファイル/信託銀行キャリア形成モデル.pptx
@@ -1908,9 +1908,14 @@
             <a:avLst/>
           </a:prstGeom>
           <a:solidFill>
-            <a:srgbClr val="1E2761"/>
+            <a:srgbClr val="DCE1F0"/>
           </a:solidFill>
-          <a:ln/>
+          <a:ln w="12700">
+            <a:solidFill>
+              <a:srgbClr val="1E2761"/>
+            </a:solidFill>
+            <a:prstDash val="solid"/>
+          </a:ln>
         </p:spPr>
       </p:sp>
       <p:pic>
@@ -2060,9 +2065,14 @@
             <a:avLst/>
           </a:prstGeom>
           <a:solidFill>
-            <a:srgbClr val="1E2761"/>
+            <a:srgbClr val="DCE1F0"/>
           </a:solidFill>
-          <a:ln/>
+          <a:ln w="12700">
+            <a:solidFill>
+              <a:srgbClr val="1E2761"/>
+            </a:solidFill>
+            <a:prstDash val="solid"/>
+          </a:ln>
         </p:spPr>
       </p:sp>
       <p:pic>
@@ -2212,9 +2222,14 @@
             <a:avLst/>
           </a:prstGeom>
           <a:solidFill>
-            <a:srgbClr val="1E2761"/>
+            <a:srgbClr val="DCE1F0"/>
           </a:solidFill>
-          <a:ln/>
+          <a:ln w="12700">
+            <a:solidFill>
+              <a:srgbClr val="1E2761"/>
+            </a:solidFill>
+            <a:prstDash val="solid"/>
+          </a:ln>
         </p:spPr>
       </p:sp>
       <p:pic>
@@ -3583,9 +3598,14 @@
             <a:avLst/>
           </a:prstGeom>
           <a:solidFill>
-            <a:srgbClr val="1E2761"/>
+            <a:srgbClr val="DCE1F0"/>
           </a:solidFill>
-          <a:ln/>
+          <a:ln w="12700">
+            <a:solidFill>
+              <a:srgbClr val="1E2761"/>
+            </a:solidFill>
+            <a:prstDash val="solid"/>
+          </a:ln>
         </p:spPr>
       </p:sp>
       <p:pic>
@@ -3767,9 +3787,14 @@
             <a:avLst/>
           </a:prstGeom>
           <a:solidFill>
-            <a:srgbClr val="1E2761"/>
+            <a:srgbClr val="DCE1F0"/>
           </a:solidFill>
-          <a:ln/>
+          <a:ln w="12700">
+            <a:solidFill>
+              <a:srgbClr val="1E2761"/>
+            </a:solidFill>
+            <a:prstDash val="solid"/>
+          </a:ln>
         </p:spPr>
       </p:sp>
       <p:pic>
@@ -3951,9 +3976,14 @@
             <a:avLst/>
           </a:prstGeom>
           <a:solidFill>
-            <a:srgbClr val="1E2761"/>
+            <a:srgbClr val="DCE1F0"/>
           </a:solidFill>
-          <a:ln/>
+          <a:ln w="12700">
+            <a:solidFill>
+              <a:srgbClr val="1E2761"/>
+            </a:solidFill>
+            <a:prstDash val="solid"/>
+          </a:ln>
         </p:spPr>
       </p:sp>
       <p:pic>
@@ -4295,9 +4325,14 @@
             <a:avLst/>
           </a:prstGeom>
           <a:solidFill>
-            <a:srgbClr val="2E6F52"/>
+            <a:srgbClr val="DCEEE3"/>
           </a:solidFill>
-          <a:ln/>
+          <a:ln w="12700">
+            <a:solidFill>
+              <a:srgbClr val="2E6F52"/>
+            </a:solidFill>
+            <a:prstDash val="solid"/>
+          </a:ln>
         </p:spPr>
       </p:sp>
       <p:pic>
@@ -4479,9 +4514,14 @@
             <a:avLst/>
           </a:prstGeom>
           <a:solidFill>
-            <a:srgbClr val="2E6F52"/>
+            <a:srgbClr val="DCEEE3"/>
           </a:solidFill>
-          <a:ln/>
+          <a:ln w="12700">
+            <a:solidFill>
+              <a:srgbClr val="2E6F52"/>
+            </a:solidFill>
+            <a:prstDash val="solid"/>
+          </a:ln>
         </p:spPr>
       </p:sp>
       <p:pic>
@@ -4663,9 +4703,14 @@
             <a:avLst/>
           </a:prstGeom>
           <a:solidFill>
-            <a:srgbClr val="2E6F52"/>
+            <a:srgbClr val="DCEEE3"/>
           </a:solidFill>
-          <a:ln/>
+          <a:ln w="12700">
+            <a:solidFill>
+              <a:srgbClr val="2E6F52"/>
+            </a:solidFill>
+            <a:prstDash val="solid"/>
+          </a:ln>
         </p:spPr>
       </p:sp>
       <p:pic>
@@ -5007,9 +5052,14 @@
             <a:avLst/>
           </a:prstGeom>
           <a:solidFill>
-            <a:srgbClr val="8A4B1E"/>
+            <a:srgbClr val="F1E1C9"/>
           </a:solidFill>
-          <a:ln/>
+          <a:ln w="12700">
+            <a:solidFill>
+              <a:srgbClr val="8A4B1E"/>
+            </a:solidFill>
+            <a:prstDash val="solid"/>
+          </a:ln>
         </p:spPr>
       </p:sp>
       <p:pic>
@@ -5191,9 +5241,14 @@
             <a:avLst/>
           </a:prstGeom>
           <a:solidFill>
-            <a:srgbClr val="8A4B1E"/>
+            <a:srgbClr val="F1E1C9"/>
           </a:solidFill>
-          <a:ln/>
+          <a:ln w="12700">
+            <a:solidFill>
+              <a:srgbClr val="8A4B1E"/>
+            </a:solidFill>
+            <a:prstDash val="solid"/>
+          </a:ln>
         </p:spPr>
       </p:sp>
       <p:pic>
@@ -5375,9 +5430,14 @@
             <a:avLst/>
           </a:prstGeom>
           <a:solidFill>
-            <a:srgbClr val="8A4B1E"/>
+            <a:srgbClr val="F1E1C9"/>
           </a:solidFill>
-          <a:ln/>
+          <a:ln w="12700">
+            <a:solidFill>
+              <a:srgbClr val="8A4B1E"/>
+            </a:solidFill>
+            <a:prstDash val="solid"/>
+          </a:ln>
         </p:spPr>
       </p:sp>
       <p:pic>
@@ -5787,9 +5847,14 @@
             <a:avLst/>
           </a:prstGeom>
           <a:solidFill>
-            <a:srgbClr val="1E2761"/>
+            <a:srgbClr val="DCE1F0"/>
           </a:solidFill>
-          <a:ln/>
+          <a:ln w="12700">
+            <a:solidFill>
+              <a:srgbClr val="1E2761"/>
+            </a:solidFill>
+            <a:prstDash val="solid"/>
+          </a:ln>
         </p:spPr>
       </p:sp>
       <p:pic>
@@ -6107,9 +6172,14 @@
             <a:avLst/>
           </a:prstGeom>
           <a:solidFill>
-            <a:srgbClr val="1E2761"/>
+            <a:srgbClr val="DCE1F0"/>
           </a:solidFill>
-          <a:ln/>
+          <a:ln w="12700">
+            <a:solidFill>
+              <a:srgbClr val="1E2761"/>
+            </a:solidFill>
+            <a:prstDash val="solid"/>
+          </a:ln>
         </p:spPr>
       </p:sp>
       <p:pic>
@@ -6427,9 +6497,14 @@
             <a:avLst/>
           </a:prstGeom>
           <a:solidFill>
-            <a:srgbClr val="1E2761"/>
+            <a:srgbClr val="DCE1F0"/>
           </a:solidFill>
-          <a:ln/>
+          <a:ln w="12700">
+            <a:solidFill>
+              <a:srgbClr val="1E2761"/>
+            </a:solidFill>
+            <a:prstDash val="solid"/>
+          </a:ln>
         </p:spPr>
       </p:sp>
       <p:pic>
@@ -6894,9 +6969,14 @@
             <a:avLst/>
           </a:prstGeom>
           <a:solidFill>
-            <a:srgbClr val="2E6F52"/>
+            <a:srgbClr val="DCEEE3"/>
           </a:solidFill>
-          <a:ln/>
+          <a:ln w="12700">
+            <a:solidFill>
+              <a:srgbClr val="2E6F52"/>
+            </a:solidFill>
+            <a:prstDash val="solid"/>
+          </a:ln>
         </p:spPr>
       </p:sp>
       <p:pic>
@@ -7214,9 +7294,14 @@
             <a:avLst/>
           </a:prstGeom>
           <a:solidFill>
-            <a:srgbClr val="2E6F52"/>
+            <a:srgbClr val="DCEEE3"/>
           </a:solidFill>
-          <a:ln/>
+          <a:ln w="12700">
+            <a:solidFill>
+              <a:srgbClr val="2E6F52"/>
+            </a:solidFill>
+            <a:prstDash val="solid"/>
+          </a:ln>
         </p:spPr>
       </p:sp>
       <p:pic>
@@ -7534,9 +7619,14 @@
             <a:avLst/>
           </a:prstGeom>
           <a:solidFill>
-            <a:srgbClr val="2E6F52"/>
+            <a:srgbClr val="DCEEE3"/>
           </a:solidFill>
-          <a:ln/>
+          <a:ln w="12700">
+            <a:solidFill>
+              <a:srgbClr val="2E6F52"/>
+            </a:solidFill>
+            <a:prstDash val="solid"/>
+          </a:ln>
         </p:spPr>
       </p:sp>
       <p:pic>
@@ -8001,9 +8091,14 @@
             <a:avLst/>
           </a:prstGeom>
           <a:solidFill>
-            <a:srgbClr val="8A4B1E"/>
+            <a:srgbClr val="F1E1C9"/>
           </a:solidFill>
-          <a:ln/>
+          <a:ln w="12700">
+            <a:solidFill>
+              <a:srgbClr val="8A4B1E"/>
+            </a:solidFill>
+            <a:prstDash val="solid"/>
+          </a:ln>
         </p:spPr>
       </p:sp>
       <p:pic>
@@ -8321,9 +8416,14 @@
             <a:avLst/>
           </a:prstGeom>
           <a:solidFill>
-            <a:srgbClr val="8A4B1E"/>
+            <a:srgbClr val="F1E1C9"/>
           </a:solidFill>
-          <a:ln/>
+          <a:ln w="12700">
+            <a:solidFill>
+              <a:srgbClr val="8A4B1E"/>
+            </a:solidFill>
+            <a:prstDash val="solid"/>
+          </a:ln>
         </p:spPr>
       </p:sp>
       <p:pic>
@@ -8641,9 +8741,14 @@
             <a:avLst/>
           </a:prstGeom>
           <a:solidFill>
-            <a:srgbClr val="8A4B1E"/>
+            <a:srgbClr val="F1E1C9"/>
           </a:solidFill>
-          <a:ln/>
+          <a:ln w="12700">
+            <a:solidFill>
+              <a:srgbClr val="8A4B1E"/>
+            </a:solidFill>
+            <a:prstDash val="solid"/>
+          </a:ln>
         </p:spPr>
       </p:sp>
       <p:pic>
